--- a/Theory Class-Notes/Unit-4 Advanced Machine Learning Techniques.pptx
+++ b/Theory Class-Notes/Unit-4 Advanced Machine Learning Techniques.pptx
@@ -5,7 +5,7 @@
     <p:sldMasterId id="2147483710" r:id="rId1"/>
   </p:sldMasterIdLst>
   <p:notesMasterIdLst>
-    <p:notesMasterId r:id="rId62"/>
+    <p:notesMasterId r:id="rId87"/>
   </p:notesMasterIdLst>
   <p:sldIdLst>
     <p:sldId id="429" r:id="rId2"/>
@@ -60,14 +60,39 @@
     <p:sldId id="894" r:id="rId51"/>
     <p:sldId id="472" r:id="rId52"/>
     <p:sldId id="912" r:id="rId53"/>
-    <p:sldId id="473" r:id="rId54"/>
-    <p:sldId id="474" r:id="rId55"/>
-    <p:sldId id="475" r:id="rId56"/>
-    <p:sldId id="476" r:id="rId57"/>
-    <p:sldId id="477" r:id="rId58"/>
-    <p:sldId id="478" r:id="rId59"/>
-    <p:sldId id="479" r:id="rId60"/>
-    <p:sldId id="431" r:id="rId61"/>
+    <p:sldId id="319" r:id="rId54"/>
+    <p:sldId id="473" r:id="rId55"/>
+    <p:sldId id="325" r:id="rId56"/>
+    <p:sldId id="326" r:id="rId57"/>
+    <p:sldId id="327" r:id="rId58"/>
+    <p:sldId id="329" r:id="rId59"/>
+    <p:sldId id="328" r:id="rId60"/>
+    <p:sldId id="324" r:id="rId61"/>
+    <p:sldId id="320" r:id="rId62"/>
+    <p:sldId id="331" r:id="rId63"/>
+    <p:sldId id="583" r:id="rId64"/>
+    <p:sldId id="476" r:id="rId65"/>
+    <p:sldId id="477" r:id="rId66"/>
+    <p:sldId id="478" r:id="rId67"/>
+    <p:sldId id="479" r:id="rId68"/>
+    <p:sldId id="582" r:id="rId69"/>
+    <p:sldId id="913" r:id="rId70"/>
+    <p:sldId id="914" r:id="rId71"/>
+    <p:sldId id="915" r:id="rId72"/>
+    <p:sldId id="916" r:id="rId73"/>
+    <p:sldId id="917" r:id="rId74"/>
+    <p:sldId id="918" r:id="rId75"/>
+    <p:sldId id="919" r:id="rId76"/>
+    <p:sldId id="920" r:id="rId77"/>
+    <p:sldId id="431" r:id="rId78"/>
+    <p:sldId id="921" r:id="rId79"/>
+    <p:sldId id="922" r:id="rId80"/>
+    <p:sldId id="923" r:id="rId81"/>
+    <p:sldId id="924" r:id="rId82"/>
+    <p:sldId id="925" r:id="rId83"/>
+    <p:sldId id="926" r:id="rId84"/>
+    <p:sldId id="927" r:id="rId85"/>
+    <p:sldId id="928" r:id="rId86"/>
   </p:sldIdLst>
   <p:sldSz cx="12192000" cy="6858000"/>
   <p:notesSz cx="6858000" cy="9144000"/>
@@ -177,7 +202,7 @@
 <file path=ppt/revisionInfo.xml><?xml version="1.0" encoding="utf-8"?>
 <p1510:revInfo xmlns:a="http://schemas.openxmlformats.org/drawingml/2006/main" xmlns:r="http://schemas.openxmlformats.org/officeDocument/2006/relationships" xmlns:p1510="http://schemas.microsoft.com/office/powerpoint/2015/10/main">
   <p1510:revLst>
-    <p1510:client id="{651BAC71-7343-484D-BD8F-9D1BA4F7D925}" v="203" dt="2025-07-26T15:02:33.576"/>
+    <p1510:client id="{651BAC71-7343-484D-BD8F-9D1BA4F7D925}" v="66" dt="2025-08-01T19:37:25.533"/>
   </p1510:revLst>
 </p1510:revInfo>
 </file>
@@ -187,7 +212,7 @@
   <pc:docChgLst>
     <pc:chgData name="Pramod Naik" userId="ceb6df04-ef15-4d9b-a141-998a03559d75" providerId="ADAL" clId="{651BAC71-7343-484D-BD8F-9D1BA4F7D925}"/>
     <pc:docChg chg="undo custSel addSld delSld modSld sldOrd">
-      <pc:chgData name="Pramod Naik" userId="ceb6df04-ef15-4d9b-a141-998a03559d75" providerId="ADAL" clId="{651BAC71-7343-484D-BD8F-9D1BA4F7D925}" dt="2025-07-26T15:02:52.938" v="1449" actId="113"/>
+      <pc:chgData name="Pramod Naik" userId="ceb6df04-ef15-4d9b-a141-998a03559d75" providerId="ADAL" clId="{651BAC71-7343-484D-BD8F-9D1BA4F7D925}" dt="2025-08-01T19:37:44.615" v="1889" actId="207"/>
       <pc:docMkLst>
         <pc:docMk/>
       </pc:docMkLst>
@@ -210,6 +235,164 @@
         <pc:sldMkLst>
           <pc:docMk/>
           <pc:sldMk cId="1139735195" sldId="280"/>
+        </pc:sldMkLst>
+      </pc:sldChg>
+      <pc:sldChg chg="modSp add mod ord">
+        <pc:chgData name="Pramod Naik" userId="ceb6df04-ef15-4d9b-a141-998a03559d75" providerId="ADAL" clId="{651BAC71-7343-484D-BD8F-9D1BA4F7D925}" dt="2025-08-01T18:34:41.668" v="1469" actId="403"/>
+        <pc:sldMkLst>
+          <pc:docMk/>
+          <pc:sldMk cId="3483828231" sldId="319"/>
+        </pc:sldMkLst>
+        <pc:spChg chg="mod">
+          <ac:chgData name="Pramod Naik" userId="ceb6df04-ef15-4d9b-a141-998a03559d75" providerId="ADAL" clId="{651BAC71-7343-484D-BD8F-9D1BA4F7D925}" dt="2025-08-01T18:34:41.668" v="1469" actId="403"/>
+          <ac:spMkLst>
+            <pc:docMk/>
+            <pc:sldMk cId="3483828231" sldId="319"/>
+            <ac:spMk id="5" creationId="{6F501116-4F2A-3D0D-6DF1-85DD8C9B28E5}"/>
+          </ac:spMkLst>
+        </pc:spChg>
+      </pc:sldChg>
+      <pc:sldChg chg="modSp add mod">
+        <pc:chgData name="Pramod Naik" userId="ceb6df04-ef15-4d9b-a141-998a03559d75" providerId="ADAL" clId="{651BAC71-7343-484D-BD8F-9D1BA4F7D925}" dt="2025-08-01T18:43:04.286" v="1493" actId="1076"/>
+        <pc:sldMkLst>
+          <pc:docMk/>
+          <pc:sldMk cId="628554678" sldId="320"/>
+        </pc:sldMkLst>
+        <pc:spChg chg="mod">
+          <ac:chgData name="Pramod Naik" userId="ceb6df04-ef15-4d9b-a141-998a03559d75" providerId="ADAL" clId="{651BAC71-7343-484D-BD8F-9D1BA4F7D925}" dt="2025-08-01T18:43:04.286" v="1493" actId="1076"/>
+          <ac:spMkLst>
+            <pc:docMk/>
+            <pc:sldMk cId="628554678" sldId="320"/>
+            <ac:spMk id="3" creationId="{24475C9C-CD67-A08C-A843-2413F03B96F0}"/>
+          </ac:spMkLst>
+        </pc:spChg>
+      </pc:sldChg>
+      <pc:sldChg chg="modSp add mod">
+        <pc:chgData name="Pramod Naik" userId="ceb6df04-ef15-4d9b-a141-998a03559d75" providerId="ADAL" clId="{651BAC71-7343-484D-BD8F-9D1BA4F7D925}" dt="2025-08-01T18:40:34.671" v="1488" actId="1076"/>
+        <pc:sldMkLst>
+          <pc:docMk/>
+          <pc:sldMk cId="66431523" sldId="324"/>
+        </pc:sldMkLst>
+        <pc:spChg chg="mod">
+          <ac:chgData name="Pramod Naik" userId="ceb6df04-ef15-4d9b-a141-998a03559d75" providerId="ADAL" clId="{651BAC71-7343-484D-BD8F-9D1BA4F7D925}" dt="2025-08-01T18:40:34.671" v="1488" actId="1076"/>
+          <ac:spMkLst>
+            <pc:docMk/>
+            <pc:sldMk cId="66431523" sldId="324"/>
+            <ac:spMk id="5" creationId="{2EC9881C-5094-27FE-FD19-C65563BDE454}"/>
+          </ac:spMkLst>
+        </pc:spChg>
+      </pc:sldChg>
+      <pc:sldChg chg="modSp add mod">
+        <pc:chgData name="Pramod Naik" userId="ceb6df04-ef15-4d9b-a141-998a03559d75" providerId="ADAL" clId="{651BAC71-7343-484D-BD8F-9D1BA4F7D925}" dt="2025-08-01T19:09:02.107" v="1655" actId="14100"/>
+        <pc:sldMkLst>
+          <pc:docMk/>
+          <pc:sldMk cId="3235625713" sldId="325"/>
+        </pc:sldMkLst>
+        <pc:spChg chg="mod">
+          <ac:chgData name="Pramod Naik" userId="ceb6df04-ef15-4d9b-a141-998a03559d75" providerId="ADAL" clId="{651BAC71-7343-484D-BD8F-9D1BA4F7D925}" dt="2025-08-01T19:09:02.107" v="1655" actId="14100"/>
+          <ac:spMkLst>
+            <pc:docMk/>
+            <pc:sldMk cId="3235625713" sldId="325"/>
+            <ac:spMk id="2" creationId="{3D0A7BDB-2748-0826-E174-0236EC414A6F}"/>
+          </ac:spMkLst>
+        </pc:spChg>
+        <pc:spChg chg="mod">
+          <ac:chgData name="Pramod Naik" userId="ceb6df04-ef15-4d9b-a141-998a03559d75" providerId="ADAL" clId="{651BAC71-7343-484D-BD8F-9D1BA4F7D925}" dt="2025-08-01T19:08:59.467" v="1654" actId="1076"/>
+          <ac:spMkLst>
+            <pc:docMk/>
+            <pc:sldMk cId="3235625713" sldId="325"/>
+            <ac:spMk id="5" creationId="{E2ADE6EE-CF2D-73AE-CAA7-AF70D53541F0}"/>
+          </ac:spMkLst>
+        </pc:spChg>
+        <pc:grpChg chg="mod">
+          <ac:chgData name="Pramod Naik" userId="ceb6df04-ef15-4d9b-a141-998a03559d75" providerId="ADAL" clId="{651BAC71-7343-484D-BD8F-9D1BA4F7D925}" dt="2025-08-01T19:09:02.107" v="1655" actId="14100"/>
+          <ac:grpSpMkLst>
+            <pc:docMk/>
+            <pc:sldMk cId="3235625713" sldId="325"/>
+            <ac:grpSpMk id="3" creationId="{51D58B77-314C-268C-DBCD-0CFEEAE24694}"/>
+          </ac:grpSpMkLst>
+        </pc:grpChg>
+        <pc:picChg chg="mod">
+          <ac:chgData name="Pramod Naik" userId="ceb6df04-ef15-4d9b-a141-998a03559d75" providerId="ADAL" clId="{651BAC71-7343-484D-BD8F-9D1BA4F7D925}" dt="2025-08-01T19:09:02.107" v="1655" actId="14100"/>
+          <ac:picMkLst>
+            <pc:docMk/>
+            <pc:sldMk cId="3235625713" sldId="325"/>
+            <ac:picMk id="2050" creationId="{CDFF0C9E-4E55-3F5A-6641-4363B92084F3}"/>
+          </ac:picMkLst>
+        </pc:picChg>
+      </pc:sldChg>
+      <pc:sldChg chg="add">
+        <pc:chgData name="Pramod Naik" userId="ceb6df04-ef15-4d9b-a141-998a03559d75" providerId="ADAL" clId="{651BAC71-7343-484D-BD8F-9D1BA4F7D925}" dt="2025-08-01T18:36:58.434" v="1470"/>
+        <pc:sldMkLst>
+          <pc:docMk/>
+          <pc:sldMk cId="968009604" sldId="326"/>
+        </pc:sldMkLst>
+      </pc:sldChg>
+      <pc:sldChg chg="modSp add mod">
+        <pc:chgData name="Pramod Naik" userId="ceb6df04-ef15-4d9b-a141-998a03559d75" providerId="ADAL" clId="{651BAC71-7343-484D-BD8F-9D1BA4F7D925}" dt="2025-08-01T19:08:11.786" v="1641" actId="403"/>
+        <pc:sldMkLst>
+          <pc:docMk/>
+          <pc:sldMk cId="2726931928" sldId="327"/>
+        </pc:sldMkLst>
+        <pc:spChg chg="mod">
+          <ac:chgData name="Pramod Naik" userId="ceb6df04-ef15-4d9b-a141-998a03559d75" providerId="ADAL" clId="{651BAC71-7343-484D-BD8F-9D1BA4F7D925}" dt="2025-08-01T19:08:11.786" v="1641" actId="403"/>
+          <ac:spMkLst>
+            <pc:docMk/>
+            <pc:sldMk cId="2726931928" sldId="327"/>
+            <ac:spMk id="5" creationId="{875D1E8A-FBE9-5480-E87F-859EE9F1B9E2}"/>
+          </ac:spMkLst>
+        </pc:spChg>
+      </pc:sldChg>
+      <pc:sldChg chg="modSp add mod">
+        <pc:chgData name="Pramod Naik" userId="ceb6df04-ef15-4d9b-a141-998a03559d75" providerId="ADAL" clId="{651BAC71-7343-484D-BD8F-9D1BA4F7D925}" dt="2025-08-01T19:09:56.292" v="1665" actId="403"/>
+        <pc:sldMkLst>
+          <pc:docMk/>
+          <pc:sldMk cId="4165281687" sldId="328"/>
+        </pc:sldMkLst>
+        <pc:spChg chg="mod">
+          <ac:chgData name="Pramod Naik" userId="ceb6df04-ef15-4d9b-a141-998a03559d75" providerId="ADAL" clId="{651BAC71-7343-484D-BD8F-9D1BA4F7D925}" dt="2025-08-01T19:09:56.292" v="1665" actId="403"/>
+          <ac:spMkLst>
+            <pc:docMk/>
+            <pc:sldMk cId="4165281687" sldId="328"/>
+            <ac:spMk id="5" creationId="{8F1A5FFE-F701-0017-AE06-456932903012}"/>
+          </ac:spMkLst>
+        </pc:spChg>
+      </pc:sldChg>
+      <pc:sldChg chg="addSp delSp add mod">
+        <pc:chgData name="Pramod Naik" userId="ceb6df04-ef15-4d9b-a141-998a03559d75" providerId="ADAL" clId="{651BAC71-7343-484D-BD8F-9D1BA4F7D925}" dt="2025-08-01T18:38:03.402" v="1472" actId="22"/>
+        <pc:sldMkLst>
+          <pc:docMk/>
+          <pc:sldMk cId="2682781936" sldId="329"/>
+        </pc:sldMkLst>
+        <pc:picChg chg="add del">
+          <ac:chgData name="Pramod Naik" userId="ceb6df04-ef15-4d9b-a141-998a03559d75" providerId="ADAL" clId="{651BAC71-7343-484D-BD8F-9D1BA4F7D925}" dt="2025-08-01T18:38:03.402" v="1472" actId="22"/>
+          <ac:picMkLst>
+            <pc:docMk/>
+            <pc:sldMk cId="2682781936" sldId="329"/>
+            <ac:picMk id="3" creationId="{33B62AC5-4CD2-27CC-4BB3-ADD7FBA6540C}"/>
+          </ac:picMkLst>
+        </pc:picChg>
+      </pc:sldChg>
+      <pc:sldChg chg="modSp add mod">
+        <pc:chgData name="Pramod Naik" userId="ceb6df04-ef15-4d9b-a141-998a03559d75" providerId="ADAL" clId="{651BAC71-7343-484D-BD8F-9D1BA4F7D925}" dt="2025-08-01T18:43:43.163" v="1510" actId="1076"/>
+        <pc:sldMkLst>
+          <pc:docMk/>
+          <pc:sldMk cId="2091400849" sldId="331"/>
+        </pc:sldMkLst>
+        <pc:spChg chg="mod">
+          <ac:chgData name="Pramod Naik" userId="ceb6df04-ef15-4d9b-a141-998a03559d75" providerId="ADAL" clId="{651BAC71-7343-484D-BD8F-9D1BA4F7D925}" dt="2025-08-01T18:43:43.163" v="1510" actId="1076"/>
+          <ac:spMkLst>
+            <pc:docMk/>
+            <pc:sldMk cId="2091400849" sldId="331"/>
+            <ac:spMk id="3" creationId="{9F0895CA-7C46-22AD-E00F-C5B38FA3960D}"/>
+          </ac:spMkLst>
+        </pc:spChg>
+      </pc:sldChg>
+      <pc:sldChg chg="add del">
+        <pc:chgData name="Pramod Naik" userId="ceb6df04-ef15-4d9b-a141-998a03559d75" providerId="ADAL" clId="{651BAC71-7343-484D-BD8F-9D1BA4F7D925}" dt="2025-08-01T19:00:38.191" v="1537" actId="47"/>
+        <pc:sldMkLst>
+          <pc:docMk/>
+          <pc:sldMk cId="423782282" sldId="334"/>
         </pc:sldMkLst>
       </pc:sldChg>
       <pc:sldChg chg="modSp add mod">
@@ -318,30 +501,6 @@
             <ac:spMk id="3" creationId="{3E3F01BC-B929-1A2A-6CB0-06506B3136A6}"/>
           </ac:spMkLst>
         </pc:spChg>
-        <pc:spChg chg="add del">
-          <ac:chgData name="Pramod Naik" userId="ceb6df04-ef15-4d9b-a141-998a03559d75" providerId="ADAL" clId="{651BAC71-7343-484D-BD8F-9D1BA4F7D925}" dt="2025-07-26T13:57:20.746" v="813" actId="26606"/>
-          <ac:spMkLst>
-            <pc:docMk/>
-            <pc:sldMk cId="3317466845" sldId="409"/>
-            <ac:spMk id="1033" creationId="{8427DF8B-AF40-4916-BF81-7B4B1D6A063D}"/>
-          </ac:spMkLst>
-        </pc:spChg>
-        <pc:spChg chg="add del">
-          <ac:chgData name="Pramod Naik" userId="ceb6df04-ef15-4d9b-a141-998a03559d75" providerId="ADAL" clId="{651BAC71-7343-484D-BD8F-9D1BA4F7D925}" dt="2025-07-26T13:57:20.746" v="813" actId="26606"/>
-          <ac:spMkLst>
-            <pc:docMk/>
-            <pc:sldMk cId="3317466845" sldId="409"/>
-            <ac:spMk id="1035" creationId="{6AE0E191-47BD-46BD-846E-E994713F2C91}"/>
-          </ac:spMkLst>
-        </pc:spChg>
-        <pc:spChg chg="add del">
-          <ac:chgData name="Pramod Naik" userId="ceb6df04-ef15-4d9b-a141-998a03559d75" providerId="ADAL" clId="{651BAC71-7343-484D-BD8F-9D1BA4F7D925}" dt="2025-07-26T13:57:20.746" v="813" actId="26606"/>
-          <ac:spMkLst>
-            <pc:docMk/>
-            <pc:sldMk cId="3317466845" sldId="409"/>
-            <ac:spMk id="1037" creationId="{D60DC0FE-B192-4898-9A42-DD3CA1061184}"/>
-          </ac:spMkLst>
-        </pc:spChg>
         <pc:spChg chg="add">
           <ac:chgData name="Pramod Naik" userId="ceb6df04-ef15-4d9b-a141-998a03559d75" providerId="ADAL" clId="{651BAC71-7343-484D-BD8F-9D1BA4F7D925}" dt="2025-07-26T13:57:20.753" v="814" actId="26606"/>
           <ac:spMkLst>
@@ -366,14 +525,6 @@
             <ac:spMk id="1050" creationId="{F1D6E6C0-11C7-4A38-BD12-80741960B53C}"/>
           </ac:spMkLst>
         </pc:spChg>
-        <pc:grpChg chg="add del">
-          <ac:chgData name="Pramod Naik" userId="ceb6df04-ef15-4d9b-a141-998a03559d75" providerId="ADAL" clId="{651BAC71-7343-484D-BD8F-9D1BA4F7D925}" dt="2025-07-26T13:57:20.746" v="813" actId="26606"/>
-          <ac:grpSpMkLst>
-            <pc:docMk/>
-            <pc:sldMk cId="3317466845" sldId="409"/>
-            <ac:grpSpMk id="1039" creationId="{47154ABD-A760-4C29-A394-422706C2C032}"/>
-          </ac:grpSpMkLst>
-        </pc:grpChg>
         <pc:grpChg chg="add">
           <ac:chgData name="Pramod Naik" userId="ceb6df04-ef15-4d9b-a141-998a03559d75" providerId="ADAL" clId="{651BAC71-7343-484D-BD8F-9D1BA4F7D925}" dt="2025-07-26T13:57:20.753" v="814" actId="26606"/>
           <ac:grpSpMkLst>
@@ -388,14 +539,6 @@
             <pc:docMk/>
             <pc:sldMk cId="3317466845" sldId="409"/>
             <ac:picMk id="1028" creationId="{E3F965C0-DA94-0FF1-3320-A0342265CD4D}"/>
-          </ac:picMkLst>
-        </pc:picChg>
-        <pc:picChg chg="del">
-          <ac:chgData name="Pramod Naik" userId="ceb6df04-ef15-4d9b-a141-998a03559d75" providerId="ADAL" clId="{651BAC71-7343-484D-BD8F-9D1BA4F7D925}" dt="2025-07-26T13:54:51.182" v="769" actId="21"/>
-          <ac:picMkLst>
-            <pc:docMk/>
-            <pc:sldMk cId="3317466845" sldId="409"/>
-            <ac:picMk id="1029" creationId="{1453DF99-D4E8-29D6-5DB9-CAFEBC1FAE60}"/>
           </ac:picMkLst>
         </pc:picChg>
       </pc:sldChg>
@@ -457,13 +600,13 @@
         </pc:sldMkLst>
       </pc:sldChg>
       <pc:sldChg chg="modSp add mod ord">
-        <pc:chgData name="Pramod Naik" userId="ceb6df04-ef15-4d9b-a141-998a03559d75" providerId="ADAL" clId="{651BAC71-7343-484D-BD8F-9D1BA4F7D925}" dt="2025-07-26T15:02:52.938" v="1449" actId="113"/>
+        <pc:chgData name="Pramod Naik" userId="ceb6df04-ef15-4d9b-a141-998a03559d75" providerId="ADAL" clId="{651BAC71-7343-484D-BD8F-9D1BA4F7D925}" dt="2025-08-01T19:31:57.147" v="1874" actId="113"/>
         <pc:sldMkLst>
           <pc:docMk/>
           <pc:sldMk cId="1168041992" sldId="431"/>
         </pc:sldMkLst>
         <pc:spChg chg="mod">
-          <ac:chgData name="Pramod Naik" userId="ceb6df04-ef15-4d9b-a141-998a03559d75" providerId="ADAL" clId="{651BAC71-7343-484D-BD8F-9D1BA4F7D925}" dt="2025-07-26T15:02:52.938" v="1449" actId="113"/>
+          <ac:chgData name="Pramod Naik" userId="ceb6df04-ef15-4d9b-a141-998a03559d75" providerId="ADAL" clId="{651BAC71-7343-484D-BD8F-9D1BA4F7D925}" dt="2025-08-01T19:31:57.147" v="1874" actId="113"/>
           <ac:spMkLst>
             <pc:docMk/>
             <pc:sldMk cId="1168041992" sldId="431"/>
@@ -858,7 +1001,7 @@
         </pc:spChg>
       </pc:sldChg>
       <pc:sldChg chg="addSp delSp modSp add mod">
-        <pc:chgData name="Pramod Naik" userId="ceb6df04-ef15-4d9b-a141-998a03559d75" providerId="ADAL" clId="{651BAC71-7343-484D-BD8F-9D1BA4F7D925}" dt="2025-07-19T11:31:18.673" v="394" actId="207"/>
+        <pc:chgData name="Pramod Naik" userId="ceb6df04-ef15-4d9b-a141-998a03559d75" providerId="ADAL" clId="{651BAC71-7343-484D-BD8F-9D1BA4F7D925}" dt="2025-07-29T04:22:09.935" v="1451" actId="207"/>
         <pc:sldMkLst>
           <pc:docMk/>
           <pc:sldMk cId="3222895821" sldId="445"/>
@@ -872,7 +1015,7 @@
           </ac:spMkLst>
         </pc:spChg>
         <pc:graphicFrameChg chg="add mod modGraphic">
-          <ac:chgData name="Pramod Naik" userId="ceb6df04-ef15-4d9b-a141-998a03559d75" providerId="ADAL" clId="{651BAC71-7343-484D-BD8F-9D1BA4F7D925}" dt="2025-07-19T11:31:18.673" v="394" actId="207"/>
+          <ac:chgData name="Pramod Naik" userId="ceb6df04-ef15-4d9b-a141-998a03559d75" providerId="ADAL" clId="{651BAC71-7343-484D-BD8F-9D1BA4F7D925}" dt="2025-07-29T04:22:09.935" v="1451" actId="207"/>
           <ac:graphicFrameMkLst>
             <pc:docMk/>
             <pc:sldMk cId="3222895821" sldId="445"/>
@@ -1097,36 +1240,12 @@
           <pc:docMk/>
           <pc:sldMk cId="1732385389" sldId="459"/>
         </pc:sldMkLst>
-        <pc:spChg chg="add">
-          <ac:chgData name="Pramod Naik" userId="ceb6df04-ef15-4d9b-a141-998a03559d75" providerId="ADAL" clId="{651BAC71-7343-484D-BD8F-9D1BA4F7D925}" dt="2025-07-26T14:23:04.504" v="1114"/>
-          <ac:spMkLst>
-            <pc:docMk/>
-            <pc:sldMk cId="1732385389" sldId="459"/>
-            <ac:spMk id="2" creationId="{526E87E3-9B3F-B6CE-E4F5-E0EE9681E8D5}"/>
-          </ac:spMkLst>
-        </pc:spChg>
         <pc:spChg chg="mod">
           <ac:chgData name="Pramod Naik" userId="ceb6df04-ef15-4d9b-a141-998a03559d75" providerId="ADAL" clId="{651BAC71-7343-484D-BD8F-9D1BA4F7D925}" dt="2025-07-26T14:23:42.134" v="1138" actId="404"/>
           <ac:spMkLst>
             <pc:docMk/>
             <pc:sldMk cId="1732385389" sldId="459"/>
             <ac:spMk id="3" creationId="{A8FCD941-E122-8226-F9B6-9C8C5555C00E}"/>
-          </ac:spMkLst>
-        </pc:spChg>
-        <pc:spChg chg="add">
-          <ac:chgData name="Pramod Naik" userId="ceb6df04-ef15-4d9b-a141-998a03559d75" providerId="ADAL" clId="{651BAC71-7343-484D-BD8F-9D1BA4F7D925}" dt="2025-07-26T14:23:04.504" v="1114"/>
-          <ac:spMkLst>
-            <pc:docMk/>
-            <pc:sldMk cId="1732385389" sldId="459"/>
-            <ac:spMk id="4" creationId="{31A8BFB7-B2AA-4209-3493-C0771AED2359}"/>
-          </ac:spMkLst>
-        </pc:spChg>
-        <pc:spChg chg="add">
-          <ac:chgData name="Pramod Naik" userId="ceb6df04-ef15-4d9b-a141-998a03559d75" providerId="ADAL" clId="{651BAC71-7343-484D-BD8F-9D1BA4F7D925}" dt="2025-07-26T14:23:04.504" v="1114"/>
-          <ac:spMkLst>
-            <pc:docMk/>
-            <pc:sldMk cId="1732385389" sldId="459"/>
-            <ac:spMk id="5" creationId="{97C995B1-F54D-3B9C-C26F-72C2E6555E9C}"/>
           </ac:spMkLst>
         </pc:spChg>
         <pc:graphicFrameChg chg="add mod modGraphic">
@@ -1150,14 +1269,6 @@
             <pc:docMk/>
             <pc:sldMk cId="1052013540" sldId="460"/>
             <ac:spMk id="3" creationId="{AB767852-AFE1-D781-CDCE-015EEE2B4730}"/>
-          </ac:spMkLst>
-        </pc:spChg>
-        <pc:spChg chg="add">
-          <ac:chgData name="Pramod Naik" userId="ceb6df04-ef15-4d9b-a141-998a03559d75" providerId="ADAL" clId="{651BAC71-7343-484D-BD8F-9D1BA4F7D925}" dt="2025-07-26T14:26:33.881" v="1156"/>
-          <ac:spMkLst>
-            <pc:docMk/>
-            <pc:sldMk cId="1052013540" sldId="460"/>
-            <ac:spMk id="5" creationId="{521DD92C-7220-178B-FD11-0B2109AC62FF}"/>
           </ac:spMkLst>
         </pc:spChg>
         <pc:picChg chg="add mod">
@@ -1190,36 +1301,12 @@
           <pc:docMk/>
           <pc:sldMk cId="3001421746" sldId="462"/>
         </pc:sldMkLst>
-        <pc:spChg chg="add">
-          <ac:chgData name="Pramod Naik" userId="ceb6df04-ef15-4d9b-a141-998a03559d75" providerId="ADAL" clId="{651BAC71-7343-484D-BD8F-9D1BA4F7D925}" dt="2025-07-26T14:12:49.239" v="937"/>
-          <ac:spMkLst>
-            <pc:docMk/>
-            <pc:sldMk cId="3001421746" sldId="462"/>
-            <ac:spMk id="2" creationId="{4F7335AA-A6C6-7F88-3D87-AABC897DF654}"/>
-          </ac:spMkLst>
-        </pc:spChg>
         <pc:spChg chg="mod">
           <ac:chgData name="Pramod Naik" userId="ceb6df04-ef15-4d9b-a141-998a03559d75" providerId="ADAL" clId="{651BAC71-7343-484D-BD8F-9D1BA4F7D925}" dt="2025-07-26T14:15:15.032" v="1083"/>
           <ac:spMkLst>
             <pc:docMk/>
             <pc:sldMk cId="3001421746" sldId="462"/>
             <ac:spMk id="3" creationId="{DBA2CE4B-7356-F1BC-8070-BACA11E2AE2E}"/>
-          </ac:spMkLst>
-        </pc:spChg>
-        <pc:spChg chg="add">
-          <ac:chgData name="Pramod Naik" userId="ceb6df04-ef15-4d9b-a141-998a03559d75" providerId="ADAL" clId="{651BAC71-7343-484D-BD8F-9D1BA4F7D925}" dt="2025-07-26T14:12:49.239" v="937"/>
-          <ac:spMkLst>
-            <pc:docMk/>
-            <pc:sldMk cId="3001421746" sldId="462"/>
-            <ac:spMk id="4" creationId="{27022F6E-5D51-9916-DD5E-529394F0260E}"/>
-          </ac:spMkLst>
-        </pc:spChg>
-        <pc:spChg chg="add">
-          <ac:chgData name="Pramod Naik" userId="ceb6df04-ef15-4d9b-a141-998a03559d75" providerId="ADAL" clId="{651BAC71-7343-484D-BD8F-9D1BA4F7D925}" dt="2025-07-26T14:12:49.239" v="937"/>
-          <ac:spMkLst>
-            <pc:docMk/>
-            <pc:sldMk cId="3001421746" sldId="462"/>
-            <ac:spMk id="5" creationId="{1242B2F8-2C01-BE46-8CD1-A2BECCF82B2B}"/>
           </ac:spMkLst>
         </pc:spChg>
         <pc:graphicFrameChg chg="add mod modGraphic">
@@ -1243,54 +1330,6 @@
             <pc:docMk/>
             <pc:sldMk cId="1623994993" sldId="463"/>
             <ac:spMk id="3" creationId="{44FCEF53-22ED-BA5D-D809-895FC80982E5}"/>
-          </ac:spMkLst>
-        </pc:spChg>
-        <pc:spChg chg="add del">
-          <ac:chgData name="Pramod Naik" userId="ceb6df04-ef15-4d9b-a141-998a03559d75" providerId="ADAL" clId="{651BAC71-7343-484D-BD8F-9D1BA4F7D925}" dt="2025-07-26T14:18:18.135" v="1087" actId="26606"/>
-          <ac:spMkLst>
-            <pc:docMk/>
-            <pc:sldMk cId="1623994993" sldId="463"/>
-            <ac:spMk id="9" creationId="{4F8E18AC-903E-4B46-8CC0-FE20E612CE37}"/>
-          </ac:spMkLst>
-        </pc:spChg>
-        <pc:spChg chg="add del">
-          <ac:chgData name="Pramod Naik" userId="ceb6df04-ef15-4d9b-a141-998a03559d75" providerId="ADAL" clId="{651BAC71-7343-484D-BD8F-9D1BA4F7D925}" dt="2025-07-26T14:18:18.135" v="1087" actId="26606"/>
-          <ac:spMkLst>
-            <pc:docMk/>
-            <pc:sldMk cId="1623994993" sldId="463"/>
-            <ac:spMk id="11" creationId="{3DEE38FB-0763-470C-8A5E-44456B5130D7}"/>
-          </ac:spMkLst>
-        </pc:spChg>
-        <pc:spChg chg="add del">
-          <ac:chgData name="Pramod Naik" userId="ceb6df04-ef15-4d9b-a141-998a03559d75" providerId="ADAL" clId="{651BAC71-7343-484D-BD8F-9D1BA4F7D925}" dt="2025-07-26T14:18:18.135" v="1087" actId="26606"/>
-          <ac:spMkLst>
-            <pc:docMk/>
-            <pc:sldMk cId="1623994993" sldId="463"/>
-            <ac:spMk id="13" creationId="{F1D6E6C0-11C7-4A38-BD12-80741960B53C}"/>
-          </ac:spMkLst>
-        </pc:spChg>
-        <pc:spChg chg="add del">
-          <ac:chgData name="Pramod Naik" userId="ceb6df04-ef15-4d9b-a141-998a03559d75" providerId="ADAL" clId="{651BAC71-7343-484D-BD8F-9D1BA4F7D925}" dt="2025-07-26T14:18:18.876" v="1089" actId="26606"/>
-          <ac:spMkLst>
-            <pc:docMk/>
-            <pc:sldMk cId="1623994993" sldId="463"/>
-            <ac:spMk id="25" creationId="{8427DF8B-AF40-4916-BF81-7B4B1D6A063D}"/>
-          </ac:spMkLst>
-        </pc:spChg>
-        <pc:spChg chg="add del">
-          <ac:chgData name="Pramod Naik" userId="ceb6df04-ef15-4d9b-a141-998a03559d75" providerId="ADAL" clId="{651BAC71-7343-484D-BD8F-9D1BA4F7D925}" dt="2025-07-26T14:18:18.876" v="1089" actId="26606"/>
-          <ac:spMkLst>
-            <pc:docMk/>
-            <pc:sldMk cId="1623994993" sldId="463"/>
-            <ac:spMk id="26" creationId="{6AE0E191-47BD-46BD-846E-E994713F2C91}"/>
-          </ac:spMkLst>
-        </pc:spChg>
-        <pc:spChg chg="add del">
-          <ac:chgData name="Pramod Naik" userId="ceb6df04-ef15-4d9b-a141-998a03559d75" providerId="ADAL" clId="{651BAC71-7343-484D-BD8F-9D1BA4F7D925}" dt="2025-07-26T14:18:18.876" v="1089" actId="26606"/>
-          <ac:spMkLst>
-            <pc:docMk/>
-            <pc:sldMk cId="1623994993" sldId="463"/>
-            <ac:spMk id="27" creationId="{D60DC0FE-B192-4898-9A42-DD3CA1061184}"/>
           </ac:spMkLst>
         </pc:spChg>
         <pc:spChg chg="add">
@@ -1317,22 +1356,6 @@
             <ac:spMk id="37" creationId="{F1D6E6C0-11C7-4A38-BD12-80741960B53C}"/>
           </ac:spMkLst>
         </pc:spChg>
-        <pc:grpChg chg="add del">
-          <ac:chgData name="Pramod Naik" userId="ceb6df04-ef15-4d9b-a141-998a03559d75" providerId="ADAL" clId="{651BAC71-7343-484D-BD8F-9D1BA4F7D925}" dt="2025-07-26T14:18:18.135" v="1087" actId="26606"/>
-          <ac:grpSpMkLst>
-            <pc:docMk/>
-            <pc:sldMk cId="1623994993" sldId="463"/>
-            <ac:grpSpMk id="15" creationId="{2B16E781-E64A-4007-B0F1-5A50135A4276}"/>
-          </ac:grpSpMkLst>
-        </pc:grpChg>
-        <pc:grpChg chg="add del">
-          <ac:chgData name="Pramod Naik" userId="ceb6df04-ef15-4d9b-a141-998a03559d75" providerId="ADAL" clId="{651BAC71-7343-484D-BD8F-9D1BA4F7D925}" dt="2025-07-26T14:18:18.876" v="1089" actId="26606"/>
-          <ac:grpSpMkLst>
-            <pc:docMk/>
-            <pc:sldMk cId="1623994993" sldId="463"/>
-            <ac:grpSpMk id="28" creationId="{47154ABD-A760-4C29-A394-422706C2C032}"/>
-          </ac:grpSpMkLst>
-        </pc:grpChg>
         <pc:grpChg chg="add">
           <ac:chgData name="Pramod Naik" userId="ceb6df04-ef15-4d9b-a141-998a03559d75" providerId="ADAL" clId="{651BAC71-7343-484D-BD8F-9D1BA4F7D925}" dt="2025-07-26T14:18:18.881" v="1090" actId="26606"/>
           <ac:grpSpMkLst>
@@ -1356,14 +1379,6 @@
           <pc:docMk/>
           <pc:sldMk cId="965580324" sldId="464"/>
         </pc:sldMkLst>
-        <pc:spChg chg="del">
-          <ac:chgData name="Pramod Naik" userId="ceb6df04-ef15-4d9b-a141-998a03559d75" providerId="ADAL" clId="{651BAC71-7343-484D-BD8F-9D1BA4F7D925}" dt="2025-07-26T13:54:45.487" v="766" actId="478"/>
-          <ac:spMkLst>
-            <pc:docMk/>
-            <pc:sldMk cId="965580324" sldId="464"/>
-            <ac:spMk id="2" creationId="{4591A287-6502-793F-4972-CA0056016C80}"/>
-          </ac:spMkLst>
-        </pc:spChg>
         <pc:spChg chg="mod">
           <ac:chgData name="Pramod Naik" userId="ceb6df04-ef15-4d9b-a141-998a03559d75" providerId="ADAL" clId="{651BAC71-7343-484D-BD8F-9D1BA4F7D925}" dt="2025-07-26T14:00:37.130" v="857" actId="207"/>
           <ac:spMkLst>
@@ -1372,38 +1387,6 @@
             <ac:spMk id="3" creationId="{2E828F99-300F-2093-4EA7-5435B9E042B0}"/>
           </ac:spMkLst>
         </pc:spChg>
-        <pc:spChg chg="add del">
-          <ac:chgData name="Pramod Naik" userId="ceb6df04-ef15-4d9b-a141-998a03559d75" providerId="ADAL" clId="{651BAC71-7343-484D-BD8F-9D1BA4F7D925}" dt="2025-07-26T13:56:30.172" v="799" actId="26606"/>
-          <ac:spMkLst>
-            <pc:docMk/>
-            <pc:sldMk cId="965580324" sldId="464"/>
-            <ac:spMk id="1034" creationId="{4F8E18AC-903E-4B46-8CC0-FE20E612CE37}"/>
-          </ac:spMkLst>
-        </pc:spChg>
-        <pc:spChg chg="add del">
-          <ac:chgData name="Pramod Naik" userId="ceb6df04-ef15-4d9b-a141-998a03559d75" providerId="ADAL" clId="{651BAC71-7343-484D-BD8F-9D1BA4F7D925}" dt="2025-07-26T13:56:30.172" v="799" actId="26606"/>
-          <ac:spMkLst>
-            <pc:docMk/>
-            <pc:sldMk cId="965580324" sldId="464"/>
-            <ac:spMk id="1036" creationId="{3DEE38FB-0763-470C-8A5E-44456B5130D7}"/>
-          </ac:spMkLst>
-        </pc:spChg>
-        <pc:spChg chg="add del">
-          <ac:chgData name="Pramod Naik" userId="ceb6df04-ef15-4d9b-a141-998a03559d75" providerId="ADAL" clId="{651BAC71-7343-484D-BD8F-9D1BA4F7D925}" dt="2025-07-26T13:56:30.172" v="799" actId="26606"/>
-          <ac:spMkLst>
-            <pc:docMk/>
-            <pc:sldMk cId="965580324" sldId="464"/>
-            <ac:spMk id="1038" creationId="{F1D6E6C0-11C7-4A38-BD12-80741960B53C}"/>
-          </ac:spMkLst>
-        </pc:spChg>
-        <pc:grpChg chg="add del">
-          <ac:chgData name="Pramod Naik" userId="ceb6df04-ef15-4d9b-a141-998a03559d75" providerId="ADAL" clId="{651BAC71-7343-484D-BD8F-9D1BA4F7D925}" dt="2025-07-26T13:56:30.172" v="799" actId="26606"/>
-          <ac:grpSpMkLst>
-            <pc:docMk/>
-            <pc:sldMk cId="965580324" sldId="464"/>
-            <ac:grpSpMk id="1040" creationId="{2B16E781-E64A-4007-B0F1-5A50135A4276}"/>
-          </ac:grpSpMkLst>
-        </pc:grpChg>
         <pc:picChg chg="add mod">
           <ac:chgData name="Pramod Naik" userId="ceb6df04-ef15-4d9b-a141-998a03559d75" providerId="ADAL" clId="{651BAC71-7343-484D-BD8F-9D1BA4F7D925}" dt="2025-07-26T13:56:38.226" v="802" actId="1076"/>
           <ac:picMkLst>
@@ -1449,14 +1432,6 @@
           <pc:docMk/>
           <pc:sldMk cId="1747655399" sldId="467"/>
         </pc:sldMkLst>
-        <pc:spChg chg="del">
-          <ac:chgData name="Pramod Naik" userId="ceb6df04-ef15-4d9b-a141-998a03559d75" providerId="ADAL" clId="{651BAC71-7343-484D-BD8F-9D1BA4F7D925}" dt="2025-07-26T14:10:24.523" v="909" actId="478"/>
-          <ac:spMkLst>
-            <pc:docMk/>
-            <pc:sldMk cId="1747655399" sldId="467"/>
-            <ac:spMk id="2" creationId="{B2DC2EEA-5AB4-5B3B-EB75-5DE42A9E1CB7}"/>
-          </ac:spMkLst>
-        </pc:spChg>
         <pc:spChg chg="mod">
           <ac:chgData name="Pramod Naik" userId="ceb6df04-ef15-4d9b-a141-998a03559d75" providerId="ADAL" clId="{651BAC71-7343-484D-BD8F-9D1BA4F7D925}" dt="2025-07-26T14:11:08.738" v="927" actId="14"/>
           <ac:spMkLst>
@@ -1527,38 +1502,6 @@
           <pc:docMk/>
           <pc:sldMk cId="1649208557" sldId="468"/>
         </pc:sldMkLst>
-        <pc:spChg chg="add del">
-          <ac:chgData name="Pramod Naik" userId="ceb6df04-ef15-4d9b-a141-998a03559d75" providerId="ADAL" clId="{651BAC71-7343-484D-BD8F-9D1BA4F7D925}" dt="2025-07-26T14:24:29.022" v="1151"/>
-          <ac:spMkLst>
-            <pc:docMk/>
-            <pc:sldMk cId="1649208557" sldId="468"/>
-            <ac:spMk id="35" creationId="{BACE0DB3-50CD-1018-16CE-BF1D42C9B9BD}"/>
-          </ac:spMkLst>
-        </pc:spChg>
-        <pc:spChg chg="add del">
-          <ac:chgData name="Pramod Naik" userId="ceb6df04-ef15-4d9b-a141-998a03559d75" providerId="ADAL" clId="{651BAC71-7343-484D-BD8F-9D1BA4F7D925}" dt="2025-07-26T14:24:29.022" v="1151"/>
-          <ac:spMkLst>
-            <pc:docMk/>
-            <pc:sldMk cId="1649208557" sldId="468"/>
-            <ac:spMk id="36" creationId="{398BC429-D849-5AEE-09EB-1A721458E5A7}"/>
-          </ac:spMkLst>
-        </pc:spChg>
-        <pc:spChg chg="add del">
-          <ac:chgData name="Pramod Naik" userId="ceb6df04-ef15-4d9b-a141-998a03559d75" providerId="ADAL" clId="{651BAC71-7343-484D-BD8F-9D1BA4F7D925}" dt="2025-07-26T14:24:29.022" v="1151"/>
-          <ac:spMkLst>
-            <pc:docMk/>
-            <pc:sldMk cId="1649208557" sldId="468"/>
-            <ac:spMk id="37" creationId="{CF8A1CCA-4AD3-BFEF-E9E2-6877FD886FB8}"/>
-          </ac:spMkLst>
-        </pc:spChg>
-        <pc:grpChg chg="add del">
-          <ac:chgData name="Pramod Naik" userId="ceb6df04-ef15-4d9b-a141-998a03559d75" providerId="ADAL" clId="{651BAC71-7343-484D-BD8F-9D1BA4F7D925}" dt="2025-07-26T14:24:29.022" v="1151"/>
-          <ac:grpSpMkLst>
-            <pc:docMk/>
-            <pc:sldMk cId="1649208557" sldId="468"/>
-            <ac:grpSpMk id="38" creationId="{F5273EBE-7834-4DB5-C7C5-11C760E5DBF7}"/>
-          </ac:grpSpMkLst>
-        </pc:grpChg>
       </pc:sldChg>
       <pc:sldChg chg="addSp modSp add mod">
         <pc:chgData name="Pramod Naik" userId="ceb6df04-ef15-4d9b-a141-998a03559d75" providerId="ADAL" clId="{651BAC71-7343-484D-BD8F-9D1BA4F7D925}" dt="2025-07-26T14:54:14.367" v="1360" actId="27636"/>
@@ -1619,14 +1562,6 @@
           <pc:docMk/>
           <pc:sldMk cId="425432386" sldId="472"/>
         </pc:sldMkLst>
-        <pc:spChg chg="add mod">
-          <ac:chgData name="Pramod Naik" userId="ceb6df04-ef15-4d9b-a141-998a03559d75" providerId="ADAL" clId="{651BAC71-7343-484D-BD8F-9D1BA4F7D925}" dt="2025-07-26T14:59:37.290" v="1380"/>
-          <ac:spMkLst>
-            <pc:docMk/>
-            <pc:sldMk cId="425432386" sldId="472"/>
-            <ac:spMk id="2" creationId="{C80F1236-4415-DA87-7815-2B4A2526A80C}"/>
-          </ac:spMkLst>
-        </pc:spChg>
         <pc:spChg chg="add del mod">
           <ac:chgData name="Pramod Naik" userId="ceb6df04-ef15-4d9b-a141-998a03559d75" providerId="ADAL" clId="{651BAC71-7343-484D-BD8F-9D1BA4F7D925}" dt="2025-07-26T15:02:01.055" v="1447" actId="404"/>
           <ac:spMkLst>
@@ -1636,54 +1571,166 @@
           </ac:spMkLst>
         </pc:spChg>
       </pc:sldChg>
-      <pc:sldChg chg="add">
-        <pc:chgData name="Pramod Naik" userId="ceb6df04-ef15-4d9b-a141-998a03559d75" providerId="ADAL" clId="{651BAC71-7343-484D-BD8F-9D1BA4F7D925}" dt="2025-07-26T14:31:56.088" v="1177"/>
+      <pc:sldChg chg="addSp modSp add mod">
+        <pc:chgData name="Pramod Naik" userId="ceb6df04-ef15-4d9b-a141-998a03559d75" providerId="ADAL" clId="{651BAC71-7343-484D-BD8F-9D1BA4F7D925}" dt="2025-08-01T19:37:44.615" v="1889" actId="207"/>
         <pc:sldMkLst>
           <pc:docMk/>
           <pc:sldMk cId="4081877237" sldId="473"/>
         </pc:sldMkLst>
+        <pc:spChg chg="add">
+          <ac:chgData name="Pramod Naik" userId="ceb6df04-ef15-4d9b-a141-998a03559d75" providerId="ADAL" clId="{651BAC71-7343-484D-BD8F-9D1BA4F7D925}" dt="2025-08-01T19:37:18.366" v="1876"/>
+          <ac:spMkLst>
+            <pc:docMk/>
+            <pc:sldMk cId="4081877237" sldId="473"/>
+            <ac:spMk id="2" creationId="{1497EFC7-0505-9C44-A727-D174AB4EA504}"/>
+          </ac:spMkLst>
+        </pc:spChg>
+        <pc:spChg chg="mod">
+          <ac:chgData name="Pramod Naik" userId="ceb6df04-ef15-4d9b-a141-998a03559d75" providerId="ADAL" clId="{651BAC71-7343-484D-BD8F-9D1BA4F7D925}" dt="2025-08-01T19:37:44.615" v="1889" actId="207"/>
+          <ac:spMkLst>
+            <pc:docMk/>
+            <pc:sldMk cId="4081877237" sldId="473"/>
+            <ac:spMk id="3" creationId="{125105E5-803A-3B5A-745E-A94616BA6AFC}"/>
+          </ac:spMkLst>
+        </pc:spChg>
       </pc:sldChg>
-      <pc:sldChg chg="add">
-        <pc:chgData name="Pramod Naik" userId="ceb6df04-ef15-4d9b-a141-998a03559d75" providerId="ADAL" clId="{651BAC71-7343-484D-BD8F-9D1BA4F7D925}" dt="2025-07-26T14:31:56.274" v="1178"/>
+      <pc:sldChg chg="addSp add del mod">
+        <pc:chgData name="Pramod Naik" userId="ceb6df04-ef15-4d9b-a141-998a03559d75" providerId="ADAL" clId="{651BAC71-7343-484D-BD8F-9D1BA4F7D925}" dt="2025-08-01T18:38:26.604" v="1476" actId="47"/>
         <pc:sldMkLst>
           <pc:docMk/>
           <pc:sldMk cId="2453457549" sldId="474"/>
         </pc:sldMkLst>
+        <pc:picChg chg="add">
+          <ac:chgData name="Pramod Naik" userId="ceb6df04-ef15-4d9b-a141-998a03559d75" providerId="ADAL" clId="{651BAC71-7343-484D-BD8F-9D1BA4F7D925}" dt="2025-08-01T18:38:07.161" v="1473" actId="22"/>
+          <ac:picMkLst>
+            <pc:docMk/>
+            <pc:sldMk cId="2453457549" sldId="474"/>
+            <ac:picMk id="4" creationId="{694F0FA4-E990-4E04-7C48-06990F1CA22A}"/>
+          </ac:picMkLst>
+        </pc:picChg>
       </pc:sldChg>
-      <pc:sldChg chg="add">
-        <pc:chgData name="Pramod Naik" userId="ceb6df04-ef15-4d9b-a141-998a03559d75" providerId="ADAL" clId="{651BAC71-7343-484D-BD8F-9D1BA4F7D925}" dt="2025-07-26T14:31:56.422" v="1179"/>
+      <pc:sldChg chg="addSp add del mod">
+        <pc:chgData name="Pramod Naik" userId="ceb6df04-ef15-4d9b-a141-998a03559d75" providerId="ADAL" clId="{651BAC71-7343-484D-BD8F-9D1BA4F7D925}" dt="2025-08-01T18:38:28.450" v="1477" actId="47"/>
         <pc:sldMkLst>
           <pc:docMk/>
           <pc:sldMk cId="1695309701" sldId="475"/>
         </pc:sldMkLst>
+        <pc:picChg chg="add">
+          <ac:chgData name="Pramod Naik" userId="ceb6df04-ef15-4d9b-a141-998a03559d75" providerId="ADAL" clId="{651BAC71-7343-484D-BD8F-9D1BA4F7D925}" dt="2025-08-01T18:38:10.200" v="1474" actId="22"/>
+          <ac:picMkLst>
+            <pc:docMk/>
+            <pc:sldMk cId="1695309701" sldId="475"/>
+            <ac:picMk id="4" creationId="{FFAC80BA-61DA-A9BB-DF46-04A0567BA674}"/>
+          </ac:picMkLst>
+        </pc:picChg>
+        <pc:picChg chg="add">
+          <ac:chgData name="Pramod Naik" userId="ceb6df04-ef15-4d9b-a141-998a03559d75" providerId="ADAL" clId="{651BAC71-7343-484D-BD8F-9D1BA4F7D925}" dt="2025-08-01T18:38:13.297" v="1475" actId="22"/>
+          <ac:picMkLst>
+            <pc:docMk/>
+            <pc:sldMk cId="1695309701" sldId="475"/>
+            <ac:picMk id="6" creationId="{48E217E7-9723-8DC8-27C9-4A53E10188DF}"/>
+          </ac:picMkLst>
+        </pc:picChg>
       </pc:sldChg>
-      <pc:sldChg chg="add">
-        <pc:chgData name="Pramod Naik" userId="ceb6df04-ef15-4d9b-a141-998a03559d75" providerId="ADAL" clId="{651BAC71-7343-484D-BD8F-9D1BA4F7D925}" dt="2025-07-26T14:31:56.582" v="1180"/>
+      <pc:sldChg chg="modSp add mod">
+        <pc:chgData name="Pramod Naik" userId="ceb6df04-ef15-4d9b-a141-998a03559d75" providerId="ADAL" clId="{651BAC71-7343-484D-BD8F-9D1BA4F7D925}" dt="2025-08-01T19:00:30.493" v="1536" actId="20577"/>
         <pc:sldMkLst>
           <pc:docMk/>
           <pc:sldMk cId="1755531748" sldId="476"/>
         </pc:sldMkLst>
+        <pc:spChg chg="mod">
+          <ac:chgData name="Pramod Naik" userId="ceb6df04-ef15-4d9b-a141-998a03559d75" providerId="ADAL" clId="{651BAC71-7343-484D-BD8F-9D1BA4F7D925}" dt="2025-08-01T19:00:30.493" v="1536" actId="20577"/>
+          <ac:spMkLst>
+            <pc:docMk/>
+            <pc:sldMk cId="1755531748" sldId="476"/>
+            <ac:spMk id="3" creationId="{4AC14414-F583-CD61-B8DF-86B4EB847812}"/>
+          </ac:spMkLst>
+        </pc:spChg>
       </pc:sldChg>
-      <pc:sldChg chg="add">
-        <pc:chgData name="Pramod Naik" userId="ceb6df04-ef15-4d9b-a141-998a03559d75" providerId="ADAL" clId="{651BAC71-7343-484D-BD8F-9D1BA4F7D925}" dt="2025-07-26T14:31:56.719" v="1181"/>
+      <pc:sldChg chg="addSp delSp modSp add mod ord">
+        <pc:chgData name="Pramod Naik" userId="ceb6df04-ef15-4d9b-a141-998a03559d75" providerId="ADAL" clId="{651BAC71-7343-484D-BD8F-9D1BA4F7D925}" dt="2025-08-01T19:02:11.612" v="1572" actId="113"/>
         <pc:sldMkLst>
           <pc:docMk/>
           <pc:sldMk cId="738342721" sldId="477"/>
         </pc:sldMkLst>
+        <pc:spChg chg="mod">
+          <ac:chgData name="Pramod Naik" userId="ceb6df04-ef15-4d9b-a141-998a03559d75" providerId="ADAL" clId="{651BAC71-7343-484D-BD8F-9D1BA4F7D925}" dt="2025-08-01T19:02:11.612" v="1572" actId="113"/>
+          <ac:spMkLst>
+            <pc:docMk/>
+            <pc:sldMk cId="738342721" sldId="477"/>
+            <ac:spMk id="3" creationId="{73897975-1BBD-F063-A985-DAF5DA4365DB}"/>
+          </ac:spMkLst>
+        </pc:spChg>
+        <pc:spChg chg="add del">
+          <ac:chgData name="Pramod Naik" userId="ceb6df04-ef15-4d9b-a141-998a03559d75" providerId="ADAL" clId="{651BAC71-7343-484D-BD8F-9D1BA4F7D925}" dt="2025-08-01T19:00:47.621" v="1541" actId="22"/>
+          <ac:spMkLst>
+            <pc:docMk/>
+            <pc:sldMk cId="738342721" sldId="477"/>
+            <ac:spMk id="4" creationId="{1F4EBADC-DAC8-EFED-AD89-00FA822FE6C0}"/>
+          </ac:spMkLst>
+        </pc:spChg>
       </pc:sldChg>
-      <pc:sldChg chg="add">
-        <pc:chgData name="Pramod Naik" userId="ceb6df04-ef15-4d9b-a141-998a03559d75" providerId="ADAL" clId="{651BAC71-7343-484D-BD8F-9D1BA4F7D925}" dt="2025-07-26T14:31:56.866" v="1182"/>
+      <pc:sldChg chg="addSp modSp add mod ord">
+        <pc:chgData name="Pramod Naik" userId="ceb6df04-ef15-4d9b-a141-998a03559d75" providerId="ADAL" clId="{651BAC71-7343-484D-BD8F-9D1BA4F7D925}" dt="2025-08-01T19:03:46.872" v="1584"/>
         <pc:sldMkLst>
           <pc:docMk/>
           <pc:sldMk cId="2588920475" sldId="478"/>
         </pc:sldMkLst>
+        <pc:spChg chg="mod">
+          <ac:chgData name="Pramod Naik" userId="ceb6df04-ef15-4d9b-a141-998a03559d75" providerId="ADAL" clId="{651BAC71-7343-484D-BD8F-9D1BA4F7D925}" dt="2025-08-01T19:03:46.872" v="1584"/>
+          <ac:spMkLst>
+            <pc:docMk/>
+            <pc:sldMk cId="2588920475" sldId="478"/>
+            <ac:spMk id="3" creationId="{4492821A-3EA0-7E9F-D288-1F34FCFA68E2}"/>
+          </ac:spMkLst>
+        </pc:spChg>
+        <pc:picChg chg="add mod">
+          <ac:chgData name="Pramod Naik" userId="ceb6df04-ef15-4d9b-a141-998a03559d75" providerId="ADAL" clId="{651BAC71-7343-484D-BD8F-9D1BA4F7D925}" dt="2025-08-01T19:03:36.027" v="1579" actId="1076"/>
+          <ac:picMkLst>
+            <pc:docMk/>
+            <pc:sldMk cId="2588920475" sldId="478"/>
+            <ac:picMk id="4" creationId="{499ECD61-1DD6-AE82-1CBF-CE87D85EB246}"/>
+          </ac:picMkLst>
+        </pc:picChg>
       </pc:sldChg>
-      <pc:sldChg chg="add">
-        <pc:chgData name="Pramod Naik" userId="ceb6df04-ef15-4d9b-a141-998a03559d75" providerId="ADAL" clId="{651BAC71-7343-484D-BD8F-9D1BA4F7D925}" dt="2025-07-26T14:31:57.007" v="1183"/>
+      <pc:sldChg chg="addSp delSp modSp add mod ord">
+        <pc:chgData name="Pramod Naik" userId="ceb6df04-ef15-4d9b-a141-998a03559d75" providerId="ADAL" clId="{651BAC71-7343-484D-BD8F-9D1BA4F7D925}" dt="2025-08-01T19:05:09.489" v="1602" actId="14734"/>
         <pc:sldMkLst>
           <pc:docMk/>
           <pc:sldMk cId="3327637455" sldId="479"/>
         </pc:sldMkLst>
+        <pc:spChg chg="add del mod">
+          <ac:chgData name="Pramod Naik" userId="ceb6df04-ef15-4d9b-a141-998a03559d75" providerId="ADAL" clId="{651BAC71-7343-484D-BD8F-9D1BA4F7D925}" dt="2025-08-01T19:04:51.097" v="1593" actId="403"/>
+          <ac:spMkLst>
+            <pc:docMk/>
+            <pc:sldMk cId="3327637455" sldId="479"/>
+            <ac:spMk id="3" creationId="{1F8F4650-5E0E-7876-F84A-6AA83F880C09}"/>
+          </ac:spMkLst>
+        </pc:spChg>
+        <pc:spChg chg="add">
+          <ac:chgData name="Pramod Naik" userId="ceb6df04-ef15-4d9b-a141-998a03559d75" providerId="ADAL" clId="{651BAC71-7343-484D-BD8F-9D1BA4F7D925}" dt="2025-08-01T19:04:24.493" v="1587"/>
+          <ac:spMkLst>
+            <pc:docMk/>
+            <pc:sldMk cId="3327637455" sldId="479"/>
+            <ac:spMk id="4" creationId="{0238B891-F0A8-77DE-140A-5EF0D7DE77BA}"/>
+          </ac:spMkLst>
+        </pc:spChg>
+        <pc:graphicFrameChg chg="add mod">
+          <ac:chgData name="Pramod Naik" userId="ceb6df04-ef15-4d9b-a141-998a03559d75" providerId="ADAL" clId="{651BAC71-7343-484D-BD8F-9D1BA4F7D925}" dt="2025-08-01T19:04:26.788" v="1588"/>
+          <ac:graphicFrameMkLst>
+            <pc:docMk/>
+            <pc:sldMk cId="3327637455" sldId="479"/>
+            <ac:graphicFrameMk id="2" creationId="{6E75217A-2533-3954-EF04-6E1F3667319C}"/>
+          </ac:graphicFrameMkLst>
+        </pc:graphicFrameChg>
+        <pc:graphicFrameChg chg="add mod modGraphic">
+          <ac:chgData name="Pramod Naik" userId="ceb6df04-ef15-4d9b-a141-998a03559d75" providerId="ADAL" clId="{651BAC71-7343-484D-BD8F-9D1BA4F7D925}" dt="2025-08-01T19:05:09.489" v="1602" actId="14734"/>
+          <ac:graphicFrameMkLst>
+            <pc:docMk/>
+            <pc:sldMk cId="3327637455" sldId="479"/>
+            <ac:graphicFrameMk id="5" creationId="{F435F8C8-B583-8D9C-A454-8B5F185D5B61}"/>
+          </ac:graphicFrameMkLst>
+        </pc:graphicFrameChg>
       </pc:sldChg>
       <pc:sldChg chg="addSp modSp add mod">
         <pc:chgData name="Pramod Naik" userId="ceb6df04-ef15-4d9b-a141-998a03559d75" providerId="ADAL" clId="{651BAC71-7343-484D-BD8F-9D1BA4F7D925}" dt="2025-07-26T14:38:22.218" v="1260" actId="113"/>
@@ -1714,14 +1761,6 @@
           <pc:docMk/>
           <pc:sldMk cId="747504179" sldId="481"/>
         </pc:sldMkLst>
-        <pc:spChg chg="add">
-          <ac:chgData name="Pramod Naik" userId="ceb6df04-ef15-4d9b-a141-998a03559d75" providerId="ADAL" clId="{651BAC71-7343-484D-BD8F-9D1BA4F7D925}" dt="2025-07-26T14:35:56.364" v="1211"/>
-          <ac:spMkLst>
-            <pc:docMk/>
-            <pc:sldMk cId="747504179" sldId="481"/>
-            <ac:spMk id="2" creationId="{22F6F892-BC4E-9E65-4EAF-6BF5DA7DCF9B}"/>
-          </ac:spMkLst>
-        </pc:spChg>
         <pc:spChg chg="mod">
           <ac:chgData name="Pramod Naik" userId="ceb6df04-ef15-4d9b-a141-998a03559d75" providerId="ADAL" clId="{651BAC71-7343-484D-BD8F-9D1BA4F7D925}" dt="2025-07-26T14:36:52.590" v="1236" actId="113"/>
           <ac:spMkLst>
@@ -1739,6 +1778,52 @@
           </ac:picMkLst>
         </pc:picChg>
       </pc:sldChg>
+      <pc:sldChg chg="addSp modSp add mod">
+        <pc:chgData name="Pramod Naik" userId="ceb6df04-ef15-4d9b-a141-998a03559d75" providerId="ADAL" clId="{651BAC71-7343-484D-BD8F-9D1BA4F7D925}" dt="2025-08-01T19:11:24.567" v="1685" actId="207"/>
+        <pc:sldMkLst>
+          <pc:docMk/>
+          <pc:sldMk cId="4115018683" sldId="582"/>
+        </pc:sldMkLst>
+        <pc:spChg chg="add mod">
+          <ac:chgData name="Pramod Naik" userId="ceb6df04-ef15-4d9b-a141-998a03559d75" providerId="ADAL" clId="{651BAC71-7343-484D-BD8F-9D1BA4F7D925}" dt="2025-08-01T19:11:22.726" v="1684" actId="207"/>
+          <ac:spMkLst>
+            <pc:docMk/>
+            <pc:sldMk cId="4115018683" sldId="582"/>
+            <ac:spMk id="3" creationId="{31B25432-B42E-E7BC-B703-F92055994958}"/>
+          </ac:spMkLst>
+        </pc:spChg>
+        <pc:spChg chg="add mod">
+          <ac:chgData name="Pramod Naik" userId="ceb6df04-ef15-4d9b-a141-998a03559d75" providerId="ADAL" clId="{651BAC71-7343-484D-BD8F-9D1BA4F7D925}" dt="2025-08-01T19:11:24.567" v="1685" actId="207"/>
+          <ac:spMkLst>
+            <pc:docMk/>
+            <pc:sldMk cId="4115018683" sldId="582"/>
+            <ac:spMk id="5" creationId="{E18DD145-8005-4D1F-3D54-9EC56DBC4A06}"/>
+          </ac:spMkLst>
+        </pc:spChg>
+      </pc:sldChg>
+      <pc:sldChg chg="addSp modSp add mod">
+        <pc:chgData name="Pramod Naik" userId="ceb6df04-ef15-4d9b-a141-998a03559d75" providerId="ADAL" clId="{651BAC71-7343-484D-BD8F-9D1BA4F7D925}" dt="2025-08-01T18:46:22.260" v="1519"/>
+        <pc:sldMkLst>
+          <pc:docMk/>
+          <pc:sldMk cId="1452150392" sldId="583"/>
+        </pc:sldMkLst>
+        <pc:spChg chg="mod">
+          <ac:chgData name="Pramod Naik" userId="ceb6df04-ef15-4d9b-a141-998a03559d75" providerId="ADAL" clId="{651BAC71-7343-484D-BD8F-9D1BA4F7D925}" dt="2025-08-01T18:46:22.260" v="1519"/>
+          <ac:spMkLst>
+            <pc:docMk/>
+            <pc:sldMk cId="1452150392" sldId="583"/>
+            <ac:spMk id="4" creationId="{495198C9-6B6F-8B81-2D67-C7729E72FF6E}"/>
+          </ac:spMkLst>
+        </pc:spChg>
+        <pc:picChg chg="add mod">
+          <ac:chgData name="Pramod Naik" userId="ceb6df04-ef15-4d9b-a141-998a03559d75" providerId="ADAL" clId="{651BAC71-7343-484D-BD8F-9D1BA4F7D925}" dt="2025-08-01T18:45:42.092" v="1517" actId="1076"/>
+          <ac:picMkLst>
+            <pc:docMk/>
+            <pc:sldMk cId="1452150392" sldId="583"/>
+            <ac:picMk id="2" creationId="{15BA55CC-437B-A3A8-FE90-23D03B11D1DC}"/>
+          </ac:picMkLst>
+        </pc:picChg>
+      </pc:sldChg>
       <pc:sldChg chg="add">
         <pc:chgData name="Pramod Naik" userId="ceb6df04-ef15-4d9b-a141-998a03559d75" providerId="ADAL" clId="{651BAC71-7343-484D-BD8F-9D1BA4F7D925}" dt="2025-07-26T14:57:50.436" v="1377"/>
         <pc:sldMkLst>
@@ -1751,6 +1836,349 @@
         <pc:sldMkLst>
           <pc:docMk/>
           <pc:sldMk cId="1978932007" sldId="912"/>
+        </pc:sldMkLst>
+      </pc:sldChg>
+      <pc:sldChg chg="add del">
+        <pc:chgData name="Pramod Naik" userId="ceb6df04-ef15-4d9b-a141-998a03559d75" providerId="ADAL" clId="{651BAC71-7343-484D-BD8F-9D1BA4F7D925}" dt="2025-08-01T19:05:48.704" v="1604"/>
+        <pc:sldMkLst>
+          <pc:docMk/>
+          <pc:sldMk cId="3197772882" sldId="913"/>
+        </pc:sldMkLst>
+      </pc:sldChg>
+      <pc:sldChg chg="addSp delSp modSp new mod">
+        <pc:chgData name="Pramod Naik" userId="ceb6df04-ef15-4d9b-a141-998a03559d75" providerId="ADAL" clId="{651BAC71-7343-484D-BD8F-9D1BA4F7D925}" dt="2025-08-01T19:14:36.036" v="1738" actId="1076"/>
+        <pc:sldMkLst>
+          <pc:docMk/>
+          <pc:sldMk cId="4271306584" sldId="913"/>
+        </pc:sldMkLst>
+        <pc:spChg chg="del">
+          <ac:chgData name="Pramod Naik" userId="ceb6df04-ef15-4d9b-a141-998a03559d75" providerId="ADAL" clId="{651BAC71-7343-484D-BD8F-9D1BA4F7D925}" dt="2025-08-01T19:05:53.551" v="1606" actId="478"/>
+          <ac:spMkLst>
+            <pc:docMk/>
+            <pc:sldMk cId="4271306584" sldId="913"/>
+            <ac:spMk id="2" creationId="{365B3759-1B8E-910F-2C2B-6932B86A9786}"/>
+          </ac:spMkLst>
+        </pc:spChg>
+        <pc:spChg chg="mod">
+          <ac:chgData name="Pramod Naik" userId="ceb6df04-ef15-4d9b-a141-998a03559d75" providerId="ADAL" clId="{651BAC71-7343-484D-BD8F-9D1BA4F7D925}" dt="2025-08-01T19:14:31.613" v="1737" actId="403"/>
+          <ac:spMkLst>
+            <pc:docMk/>
+            <pc:sldMk cId="4271306584" sldId="913"/>
+            <ac:spMk id="3" creationId="{9A15462E-46E9-D2B4-2ED7-2FC504CE798F}"/>
+          </ac:spMkLst>
+        </pc:spChg>
+        <pc:graphicFrameChg chg="add mod modGraphic">
+          <ac:chgData name="Pramod Naik" userId="ceb6df04-ef15-4d9b-a141-998a03559d75" providerId="ADAL" clId="{651BAC71-7343-484D-BD8F-9D1BA4F7D925}" dt="2025-08-01T19:14:36.036" v="1738" actId="1076"/>
+          <ac:graphicFrameMkLst>
+            <pc:docMk/>
+            <pc:sldMk cId="4271306584" sldId="913"/>
+            <ac:graphicFrameMk id="4" creationId="{5DEB3E9B-424A-10DC-EB5B-8602F28CD8A8}"/>
+          </ac:graphicFrameMkLst>
+        </pc:graphicFrameChg>
+      </pc:sldChg>
+      <pc:sldChg chg="modSp add mod">
+        <pc:chgData name="Pramod Naik" userId="ceb6df04-ef15-4d9b-a141-998a03559d75" providerId="ADAL" clId="{651BAC71-7343-484D-BD8F-9D1BA4F7D925}" dt="2025-08-01T19:15:08.343" v="1743" actId="207"/>
+        <pc:sldMkLst>
+          <pc:docMk/>
+          <pc:sldMk cId="523843877" sldId="914"/>
+        </pc:sldMkLst>
+        <pc:spChg chg="mod">
+          <ac:chgData name="Pramod Naik" userId="ceb6df04-ef15-4d9b-a141-998a03559d75" providerId="ADAL" clId="{651BAC71-7343-484D-BD8F-9D1BA4F7D925}" dt="2025-08-01T19:15:08.343" v="1743" actId="207"/>
+          <ac:spMkLst>
+            <pc:docMk/>
+            <pc:sldMk cId="523843877" sldId="914"/>
+            <ac:spMk id="3" creationId="{FEE745EB-3581-F5A1-DF07-A9237DF7BEE6}"/>
+          </ac:spMkLst>
+        </pc:spChg>
+      </pc:sldChg>
+      <pc:sldChg chg="addSp modSp add mod">
+        <pc:chgData name="Pramod Naik" userId="ceb6df04-ef15-4d9b-a141-998a03559d75" providerId="ADAL" clId="{651BAC71-7343-484D-BD8F-9D1BA4F7D925}" dt="2025-08-01T19:19:08.281" v="1761" actId="1076"/>
+        <pc:sldMkLst>
+          <pc:docMk/>
+          <pc:sldMk cId="614986995" sldId="915"/>
+        </pc:sldMkLst>
+        <pc:spChg chg="mod">
+          <ac:chgData name="Pramod Naik" userId="ceb6df04-ef15-4d9b-a141-998a03559d75" providerId="ADAL" clId="{651BAC71-7343-484D-BD8F-9D1BA4F7D925}" dt="2025-08-01T19:19:08.281" v="1761" actId="1076"/>
+          <ac:spMkLst>
+            <pc:docMk/>
+            <pc:sldMk cId="614986995" sldId="915"/>
+            <ac:spMk id="3" creationId="{36726783-1FAE-4345-45AF-93027EE01B06}"/>
+          </ac:spMkLst>
+        </pc:spChg>
+        <pc:picChg chg="add mod">
+          <ac:chgData name="Pramod Naik" userId="ceb6df04-ef15-4d9b-a141-998a03559d75" providerId="ADAL" clId="{651BAC71-7343-484D-BD8F-9D1BA4F7D925}" dt="2025-08-01T19:19:00.750" v="1760" actId="1076"/>
+          <ac:picMkLst>
+            <pc:docMk/>
+            <pc:sldMk cId="614986995" sldId="915"/>
+            <ac:picMk id="4" creationId="{3C459CDD-13C9-3DDF-DC4C-A4125A7B4D49}"/>
+          </ac:picMkLst>
+        </pc:picChg>
+      </pc:sldChg>
+      <pc:sldChg chg="addSp modSp add mod">
+        <pc:chgData name="Pramod Naik" userId="ceb6df04-ef15-4d9b-a141-998a03559d75" providerId="ADAL" clId="{651BAC71-7343-484D-BD8F-9D1BA4F7D925}" dt="2025-08-01T19:20:13.616" v="1766" actId="113"/>
+        <pc:sldMkLst>
+          <pc:docMk/>
+          <pc:sldMk cId="4015808234" sldId="916"/>
+        </pc:sldMkLst>
+        <pc:spChg chg="mod">
+          <ac:chgData name="Pramod Naik" userId="ceb6df04-ef15-4d9b-a141-998a03559d75" providerId="ADAL" clId="{651BAC71-7343-484D-BD8F-9D1BA4F7D925}" dt="2025-08-01T19:20:13.616" v="1766" actId="113"/>
+          <ac:spMkLst>
+            <pc:docMk/>
+            <pc:sldMk cId="4015808234" sldId="916"/>
+            <ac:spMk id="3" creationId="{B132ED93-85B8-EC86-43D8-39C311614C96}"/>
+          </ac:spMkLst>
+        </pc:spChg>
+        <pc:picChg chg="add mod">
+          <ac:chgData name="Pramod Naik" userId="ceb6df04-ef15-4d9b-a141-998a03559d75" providerId="ADAL" clId="{651BAC71-7343-484D-BD8F-9D1BA4F7D925}" dt="2025-08-01T19:20:12.214" v="1765" actId="1076"/>
+          <ac:picMkLst>
+            <pc:docMk/>
+            <pc:sldMk cId="4015808234" sldId="916"/>
+            <ac:picMk id="4" creationId="{94C17D7C-F644-528E-F167-3382FEFA2E80}"/>
+          </ac:picMkLst>
+        </pc:picChg>
+      </pc:sldChg>
+      <pc:sldChg chg="addSp modSp add mod ord">
+        <pc:chgData name="Pramod Naik" userId="ceb6df04-ef15-4d9b-a141-998a03559d75" providerId="ADAL" clId="{651BAC71-7343-484D-BD8F-9D1BA4F7D925}" dt="2025-08-01T19:21:11.175" v="1774" actId="14100"/>
+        <pc:sldMkLst>
+          <pc:docMk/>
+          <pc:sldMk cId="2065699475" sldId="917"/>
+        </pc:sldMkLst>
+        <pc:spChg chg="mod">
+          <ac:chgData name="Pramod Naik" userId="ceb6df04-ef15-4d9b-a141-998a03559d75" providerId="ADAL" clId="{651BAC71-7343-484D-BD8F-9D1BA4F7D925}" dt="2025-08-01T19:20:36.237" v="1770" actId="113"/>
+          <ac:spMkLst>
+            <pc:docMk/>
+            <pc:sldMk cId="2065699475" sldId="917"/>
+            <ac:spMk id="3" creationId="{11EEA996-FB02-CC30-D945-C23FF7317D3E}"/>
+          </ac:spMkLst>
+        </pc:spChg>
+        <pc:picChg chg="add mod">
+          <ac:chgData name="Pramod Naik" userId="ceb6df04-ef15-4d9b-a141-998a03559d75" providerId="ADAL" clId="{651BAC71-7343-484D-BD8F-9D1BA4F7D925}" dt="2025-08-01T19:21:11.175" v="1774" actId="14100"/>
+          <ac:picMkLst>
+            <pc:docMk/>
+            <pc:sldMk cId="2065699475" sldId="917"/>
+            <ac:picMk id="4" creationId="{686FB017-1DED-E854-59CA-1CDD492B9817}"/>
+          </ac:picMkLst>
+        </pc:picChg>
+      </pc:sldChg>
+      <pc:sldChg chg="addSp delSp modSp add mod ord setBg">
+        <pc:chgData name="Pramod Naik" userId="ceb6df04-ef15-4d9b-a141-998a03559d75" providerId="ADAL" clId="{651BAC71-7343-484D-BD8F-9D1BA4F7D925}" dt="2025-08-01T19:25:39.005" v="1815" actId="403"/>
+        <pc:sldMkLst>
+          <pc:docMk/>
+          <pc:sldMk cId="1705284052" sldId="918"/>
+        </pc:sldMkLst>
+        <pc:spChg chg="mod">
+          <ac:chgData name="Pramod Naik" userId="ceb6df04-ef15-4d9b-a141-998a03559d75" providerId="ADAL" clId="{651BAC71-7343-484D-BD8F-9D1BA4F7D925}" dt="2025-08-01T19:25:39.005" v="1815" actId="403"/>
+          <ac:spMkLst>
+            <pc:docMk/>
+            <pc:sldMk cId="1705284052" sldId="918"/>
+            <ac:spMk id="3" creationId="{8B18970F-3DA7-1CC9-7CA0-1D4B2B303B27}"/>
+          </ac:spMkLst>
+        </pc:spChg>
+        <pc:spChg chg="add del">
+          <ac:chgData name="Pramod Naik" userId="ceb6df04-ef15-4d9b-a141-998a03559d75" providerId="ADAL" clId="{651BAC71-7343-484D-BD8F-9D1BA4F7D925}" dt="2025-08-01T19:24:14.109" v="1781" actId="26606"/>
+          <ac:spMkLst>
+            <pc:docMk/>
+            <pc:sldMk cId="1705284052" sldId="918"/>
+            <ac:spMk id="9" creationId="{34441C22-9EFD-4DE0-9245-E55F34A58290}"/>
+          </ac:spMkLst>
+        </pc:spChg>
+        <pc:spChg chg="add del">
+          <ac:chgData name="Pramod Naik" userId="ceb6df04-ef15-4d9b-a141-998a03559d75" providerId="ADAL" clId="{651BAC71-7343-484D-BD8F-9D1BA4F7D925}" dt="2025-08-01T19:24:14.109" v="1781" actId="26606"/>
+          <ac:spMkLst>
+            <pc:docMk/>
+            <pc:sldMk cId="1705284052" sldId="918"/>
+            <ac:spMk id="11" creationId="{2E3EC0C7-3371-4F0F-9092-DA8533F0C116}"/>
+          </ac:spMkLst>
+        </pc:spChg>
+        <pc:spChg chg="add del">
+          <ac:chgData name="Pramod Naik" userId="ceb6df04-ef15-4d9b-a141-998a03559d75" providerId="ADAL" clId="{651BAC71-7343-484D-BD8F-9D1BA4F7D925}" dt="2025-08-01T19:24:14.109" v="1781" actId="26606"/>
+          <ac:spMkLst>
+            <pc:docMk/>
+            <pc:sldMk cId="1705284052" sldId="918"/>
+            <ac:spMk id="13" creationId="{B5B75771-DE64-4E88-9F7A-F675EA3D3E5D}"/>
+          </ac:spMkLst>
+        </pc:spChg>
+        <pc:spChg chg="add del">
+          <ac:chgData name="Pramod Naik" userId="ceb6df04-ef15-4d9b-a141-998a03559d75" providerId="ADAL" clId="{651BAC71-7343-484D-BD8F-9D1BA4F7D925}" dt="2025-08-01T19:24:14.109" v="1781" actId="26606"/>
+          <ac:spMkLst>
+            <pc:docMk/>
+            <pc:sldMk cId="1705284052" sldId="918"/>
+            <ac:spMk id="23" creationId="{3B9D6F34-4F66-4AD6-8297-B393AD0A9BDE}"/>
+          </ac:spMkLst>
+        </pc:spChg>
+        <pc:grpChg chg="add del">
+          <ac:chgData name="Pramod Naik" userId="ceb6df04-ef15-4d9b-a141-998a03559d75" providerId="ADAL" clId="{651BAC71-7343-484D-BD8F-9D1BA4F7D925}" dt="2025-08-01T19:24:14.109" v="1781" actId="26606"/>
+          <ac:grpSpMkLst>
+            <pc:docMk/>
+            <pc:sldMk cId="1705284052" sldId="918"/>
+            <ac:grpSpMk id="15" creationId="{B75D38C4-A4CC-488E-85FD-0C69F36EA225}"/>
+          </ac:grpSpMkLst>
+        </pc:grpChg>
+        <pc:picChg chg="add mod">
+          <ac:chgData name="Pramod Naik" userId="ceb6df04-ef15-4d9b-a141-998a03559d75" providerId="ADAL" clId="{651BAC71-7343-484D-BD8F-9D1BA4F7D925}" dt="2025-08-01T19:24:17.864" v="1783" actId="1076"/>
+          <ac:picMkLst>
+            <pc:docMk/>
+            <pc:sldMk cId="1705284052" sldId="918"/>
+            <ac:picMk id="4" creationId="{103C952F-B911-2275-31C3-BEA00AE582E8}"/>
+          </ac:picMkLst>
+        </pc:picChg>
+        <pc:picChg chg="add del">
+          <ac:chgData name="Pramod Naik" userId="ceb6df04-ef15-4d9b-a141-998a03559d75" providerId="ADAL" clId="{651BAC71-7343-484D-BD8F-9D1BA4F7D925}" dt="2025-08-01T19:24:14.109" v="1781" actId="26606"/>
+          <ac:picMkLst>
+            <pc:docMk/>
+            <pc:sldMk cId="1705284052" sldId="918"/>
+            <ac:picMk id="25" creationId="{4A957378-4F2F-4F89-8202-553A431FFCE1}"/>
+          </ac:picMkLst>
+        </pc:picChg>
+        <pc:picChg chg="add del">
+          <ac:chgData name="Pramod Naik" userId="ceb6df04-ef15-4d9b-a141-998a03559d75" providerId="ADAL" clId="{651BAC71-7343-484D-BD8F-9D1BA4F7D925}" dt="2025-08-01T19:24:14.109" v="1781" actId="26606"/>
+          <ac:picMkLst>
+            <pc:docMk/>
+            <pc:sldMk cId="1705284052" sldId="918"/>
+            <ac:picMk id="27" creationId="{5EEF8CC5-3EC6-4753-94A5-A5787A5474EF}"/>
+          </ac:picMkLst>
+        </pc:picChg>
+      </pc:sldChg>
+      <pc:sldChg chg="addSp delSp modSp add mod setBg">
+        <pc:chgData name="Pramod Naik" userId="ceb6df04-ef15-4d9b-a141-998a03559d75" providerId="ADAL" clId="{651BAC71-7343-484D-BD8F-9D1BA4F7D925}" dt="2025-08-01T19:30:36.395" v="1852" actId="1076"/>
+        <pc:sldMkLst>
+          <pc:docMk/>
+          <pc:sldMk cId="3027574868" sldId="919"/>
+        </pc:sldMkLst>
+        <pc:spChg chg="mod">
+          <ac:chgData name="Pramod Naik" userId="ceb6df04-ef15-4d9b-a141-998a03559d75" providerId="ADAL" clId="{651BAC71-7343-484D-BD8F-9D1BA4F7D925}" dt="2025-08-01T19:30:07.864" v="1848" actId="20577"/>
+          <ac:spMkLst>
+            <pc:docMk/>
+            <pc:sldMk cId="3027574868" sldId="919"/>
+            <ac:spMk id="3" creationId="{6169888C-AC51-A56B-1157-9428C5EBE3FD}"/>
+          </ac:spMkLst>
+        </pc:spChg>
+        <pc:spChg chg="add del">
+          <ac:chgData name="Pramod Naik" userId="ceb6df04-ef15-4d9b-a141-998a03559d75" providerId="ADAL" clId="{651BAC71-7343-484D-BD8F-9D1BA4F7D925}" dt="2025-08-01T19:29:37.033" v="1832" actId="26606"/>
+          <ac:spMkLst>
+            <pc:docMk/>
+            <pc:sldMk cId="3027574868" sldId="919"/>
+            <ac:spMk id="9" creationId="{4F8E18AC-903E-4B46-8CC0-FE20E612CE37}"/>
+          </ac:spMkLst>
+        </pc:spChg>
+        <pc:spChg chg="add del">
+          <ac:chgData name="Pramod Naik" userId="ceb6df04-ef15-4d9b-a141-998a03559d75" providerId="ADAL" clId="{651BAC71-7343-484D-BD8F-9D1BA4F7D925}" dt="2025-08-01T19:29:37.033" v="1832" actId="26606"/>
+          <ac:spMkLst>
+            <pc:docMk/>
+            <pc:sldMk cId="3027574868" sldId="919"/>
+            <ac:spMk id="11" creationId="{3DEE38FB-0763-470C-8A5E-44456B5130D7}"/>
+          </ac:spMkLst>
+        </pc:spChg>
+        <pc:spChg chg="add del">
+          <ac:chgData name="Pramod Naik" userId="ceb6df04-ef15-4d9b-a141-998a03559d75" providerId="ADAL" clId="{651BAC71-7343-484D-BD8F-9D1BA4F7D925}" dt="2025-08-01T19:29:37.033" v="1832" actId="26606"/>
+          <ac:spMkLst>
+            <pc:docMk/>
+            <pc:sldMk cId="3027574868" sldId="919"/>
+            <ac:spMk id="13" creationId="{F1D6E6C0-11C7-4A38-BD12-80741960B53C}"/>
+          </ac:spMkLst>
+        </pc:spChg>
+        <pc:grpChg chg="add del">
+          <ac:chgData name="Pramod Naik" userId="ceb6df04-ef15-4d9b-a141-998a03559d75" providerId="ADAL" clId="{651BAC71-7343-484D-BD8F-9D1BA4F7D925}" dt="2025-08-01T19:29:37.033" v="1832" actId="26606"/>
+          <ac:grpSpMkLst>
+            <pc:docMk/>
+            <pc:sldMk cId="3027574868" sldId="919"/>
+            <ac:grpSpMk id="15" creationId="{2B16E781-E64A-4007-B0F1-5A50135A4276}"/>
+          </ac:grpSpMkLst>
+        </pc:grpChg>
+        <pc:picChg chg="add mod">
+          <ac:chgData name="Pramod Naik" userId="ceb6df04-ef15-4d9b-a141-998a03559d75" providerId="ADAL" clId="{651BAC71-7343-484D-BD8F-9D1BA4F7D925}" dt="2025-08-01T19:29:40.769" v="1834" actId="1076"/>
+          <ac:picMkLst>
+            <pc:docMk/>
+            <pc:sldMk cId="3027574868" sldId="919"/>
+            <ac:picMk id="4" creationId="{3B64DAB2-2AB0-074A-0B1E-4D4CACD90FFF}"/>
+          </ac:picMkLst>
+        </pc:picChg>
+        <pc:picChg chg="add mod">
+          <ac:chgData name="Pramod Naik" userId="ceb6df04-ef15-4d9b-a141-998a03559d75" providerId="ADAL" clId="{651BAC71-7343-484D-BD8F-9D1BA4F7D925}" dt="2025-08-01T19:30:36.395" v="1852" actId="1076"/>
+          <ac:picMkLst>
+            <pc:docMk/>
+            <pc:sldMk cId="3027574868" sldId="919"/>
+            <ac:picMk id="6" creationId="{DB926319-47D7-3FA7-BB95-35ED64EFFBC6}"/>
+          </ac:picMkLst>
+        </pc:picChg>
+      </pc:sldChg>
+      <pc:sldChg chg="addSp modSp add mod ord">
+        <pc:chgData name="Pramod Naik" userId="ceb6df04-ef15-4d9b-a141-998a03559d75" providerId="ADAL" clId="{651BAC71-7343-484D-BD8F-9D1BA4F7D925}" dt="2025-08-01T19:31:51.051" v="1873" actId="1076"/>
+        <pc:sldMkLst>
+          <pc:docMk/>
+          <pc:sldMk cId="171347959" sldId="920"/>
+        </pc:sldMkLst>
+        <pc:spChg chg="mod">
+          <ac:chgData name="Pramod Naik" userId="ceb6df04-ef15-4d9b-a141-998a03559d75" providerId="ADAL" clId="{651BAC71-7343-484D-BD8F-9D1BA4F7D925}" dt="2025-08-01T19:31:45.396" v="1872" actId="403"/>
+          <ac:spMkLst>
+            <pc:docMk/>
+            <pc:sldMk cId="171347959" sldId="920"/>
+            <ac:spMk id="3" creationId="{5701DD00-AE38-ED98-D830-969A769AF815}"/>
+          </ac:spMkLst>
+        </pc:spChg>
+        <pc:graphicFrameChg chg="add mod modGraphic">
+          <ac:chgData name="Pramod Naik" userId="ceb6df04-ef15-4d9b-a141-998a03559d75" providerId="ADAL" clId="{651BAC71-7343-484D-BD8F-9D1BA4F7D925}" dt="2025-08-01T19:31:51.051" v="1873" actId="1076"/>
+          <ac:graphicFrameMkLst>
+            <pc:docMk/>
+            <pc:sldMk cId="171347959" sldId="920"/>
+            <ac:graphicFrameMk id="2" creationId="{688914C4-8833-3DEA-23BF-AAB20E3881BF}"/>
+          </ac:graphicFrameMkLst>
+        </pc:graphicFrameChg>
+      </pc:sldChg>
+      <pc:sldChg chg="add">
+        <pc:chgData name="Pramod Naik" userId="ceb6df04-ef15-4d9b-a141-998a03559d75" providerId="ADAL" clId="{651BAC71-7343-484D-BD8F-9D1BA4F7D925}" dt="2025-08-01T19:25:43.540" v="1818"/>
+        <pc:sldMkLst>
+          <pc:docMk/>
+          <pc:sldMk cId="3043417450" sldId="921"/>
+        </pc:sldMkLst>
+      </pc:sldChg>
+      <pc:sldChg chg="add">
+        <pc:chgData name="Pramod Naik" userId="ceb6df04-ef15-4d9b-a141-998a03559d75" providerId="ADAL" clId="{651BAC71-7343-484D-BD8F-9D1BA4F7D925}" dt="2025-08-01T19:25:44.051" v="1819"/>
+        <pc:sldMkLst>
+          <pc:docMk/>
+          <pc:sldMk cId="3726074494" sldId="922"/>
+        </pc:sldMkLst>
+      </pc:sldChg>
+      <pc:sldChg chg="add">
+        <pc:chgData name="Pramod Naik" userId="ceb6df04-ef15-4d9b-a141-998a03559d75" providerId="ADAL" clId="{651BAC71-7343-484D-BD8F-9D1BA4F7D925}" dt="2025-08-01T19:25:44.081" v="1820"/>
+        <pc:sldMkLst>
+          <pc:docMk/>
+          <pc:sldMk cId="817254730" sldId="923"/>
+        </pc:sldMkLst>
+      </pc:sldChg>
+      <pc:sldChg chg="add">
+        <pc:chgData name="Pramod Naik" userId="ceb6df04-ef15-4d9b-a141-998a03559d75" providerId="ADAL" clId="{651BAC71-7343-484D-BD8F-9D1BA4F7D925}" dt="2025-08-01T19:25:44.129" v="1821"/>
+        <pc:sldMkLst>
+          <pc:docMk/>
+          <pc:sldMk cId="3803609951" sldId="924"/>
+        </pc:sldMkLst>
+      </pc:sldChg>
+      <pc:sldChg chg="add">
+        <pc:chgData name="Pramod Naik" userId="ceb6df04-ef15-4d9b-a141-998a03559d75" providerId="ADAL" clId="{651BAC71-7343-484D-BD8F-9D1BA4F7D925}" dt="2025-08-01T19:25:44.148" v="1822"/>
+        <pc:sldMkLst>
+          <pc:docMk/>
+          <pc:sldMk cId="1730698976" sldId="925"/>
+        </pc:sldMkLst>
+      </pc:sldChg>
+      <pc:sldChg chg="add">
+        <pc:chgData name="Pramod Naik" userId="ceb6df04-ef15-4d9b-a141-998a03559d75" providerId="ADAL" clId="{651BAC71-7343-484D-BD8F-9D1BA4F7D925}" dt="2025-08-01T19:25:44.194" v="1823"/>
+        <pc:sldMkLst>
+          <pc:docMk/>
+          <pc:sldMk cId="371604518" sldId="926"/>
+        </pc:sldMkLst>
+      </pc:sldChg>
+      <pc:sldChg chg="add">
+        <pc:chgData name="Pramod Naik" userId="ceb6df04-ef15-4d9b-a141-998a03559d75" providerId="ADAL" clId="{651BAC71-7343-484D-BD8F-9D1BA4F7D925}" dt="2025-08-01T19:25:44.223" v="1824"/>
+        <pc:sldMkLst>
+          <pc:docMk/>
+          <pc:sldMk cId="727797019" sldId="927"/>
+        </pc:sldMkLst>
+      </pc:sldChg>
+      <pc:sldChg chg="add">
+        <pc:chgData name="Pramod Naik" userId="ceb6df04-ef15-4d9b-a141-998a03559d75" providerId="ADAL" clId="{651BAC71-7343-484D-BD8F-9D1BA4F7D925}" dt="2025-08-01T19:25:44.247" v="1825"/>
+        <pc:sldMkLst>
+          <pc:docMk/>
+          <pc:sldMk cId="1429089744" sldId="928"/>
         </pc:sldMkLst>
       </pc:sldChg>
     </pc:docChg>
@@ -1840,7 +2268,7 @@
           <a:p>
             <a:fld id="{61532AF1-4615-4667-912A-829B12F8C4D2}" type="datetimeFigureOut">
               <a:rPr lang="en-IN" smtClean="0"/>
-              <a:t>26-07-2025</a:t>
+              <a:t>01-08-2025</a:t>
             </a:fld>
             <a:endParaRPr lang="en-IN"/>
           </a:p>
@@ -2257,7 +2685,7 @@
           <a:p>
             <a:fld id="{C43A76A3-ADC8-4477-8FC1-B9DD55D84908}" type="datetime1">
               <a:rPr lang="en-US" smtClean="0"/>
-              <a:t>7/26/2025</a:t>
+              <a:t>8/1/2025</a:t>
             </a:fld>
             <a:endParaRPr lang="en-US" dirty="0"/>
           </a:p>
@@ -2455,7 +2883,7 @@
           <a:p>
             <a:fld id="{D6762538-DC4D-4667-96E5-B3278DDF8B12}" type="datetime1">
               <a:rPr lang="en-US" smtClean="0"/>
-              <a:t>7/26/2025</a:t>
+              <a:t>8/1/2025</a:t>
             </a:fld>
             <a:endParaRPr lang="en-US"/>
           </a:p>
@@ -2663,7 +3091,7 @@
           <a:p>
             <a:fld id="{05880548-5C08-4BE3-B63E-F2BB63B0B00C}" type="datetime1">
               <a:rPr lang="en-US" smtClean="0"/>
-              <a:t>7/26/2025</a:t>
+              <a:t>8/1/2025</a:t>
             </a:fld>
             <a:endParaRPr lang="en-US"/>
           </a:p>
@@ -2861,7 +3289,7 @@
           <a:p>
             <a:fld id="{DE7F49BE-398D-479A-8A7E-5DDBCA61EDCB}" type="datetime1">
               <a:rPr lang="en-US" smtClean="0"/>
-              <a:t>7/26/2025</a:t>
+              <a:t>8/1/2025</a:t>
             </a:fld>
             <a:endParaRPr lang="en-US" dirty="0"/>
           </a:p>
@@ -3137,7 +3565,7 @@
           <a:p>
             <a:fld id="{CCD0C193-4974-4A1F-9C63-07D595E30D66}" type="datetime1">
               <a:rPr lang="en-US" smtClean="0"/>
-              <a:t>7/26/2025</a:t>
+              <a:t>8/1/2025</a:t>
             </a:fld>
             <a:endParaRPr lang="en-US"/>
           </a:p>
@@ -3404,7 +3832,7 @@
           <a:p>
             <a:fld id="{701AA87F-28D4-4BF0-B81F-877A89DFD5AC}" type="datetime1">
               <a:rPr lang="en-US" smtClean="0"/>
-              <a:t>7/26/2025</a:t>
+              <a:t>8/1/2025</a:t>
             </a:fld>
             <a:endParaRPr lang="en-US"/>
           </a:p>
@@ -3818,7 +4246,7 @@
           <a:p>
             <a:fld id="{A8A9F1F3-208B-49A3-B337-9C8ACEB3E0E1}" type="datetime1">
               <a:rPr lang="en-US" smtClean="0"/>
-              <a:t>7/26/2025</a:t>
+              <a:t>8/1/2025</a:t>
             </a:fld>
             <a:endParaRPr lang="en-US"/>
           </a:p>
@@ -3965,7 +4393,7 @@
           <a:p>
             <a:fld id="{27AF6CA6-7293-4AA2-A0E0-A3BF4416E786}" type="datetime1">
               <a:rPr lang="en-US" smtClean="0"/>
-              <a:t>7/26/2025</a:t>
+              <a:t>8/1/2025</a:t>
             </a:fld>
             <a:endParaRPr lang="en-US"/>
           </a:p>
@@ -4078,7 +4506,7 @@
           <a:p>
             <a:fld id="{98D87016-7BCD-46FB-8EE3-AB6C369108B4}" type="datetime1">
               <a:rPr lang="en-US" smtClean="0"/>
-              <a:t>7/26/2025</a:t>
+              <a:t>8/1/2025</a:t>
             </a:fld>
             <a:endParaRPr lang="en-US"/>
           </a:p>
@@ -4397,7 +4825,7 @@
           <a:p>
             <a:fld id="{A1547011-1FFC-4EF8-9A2E-53B4AD2ADBD4}" type="datetime1">
               <a:rPr lang="en-US" smtClean="0"/>
-              <a:t>7/26/2025</a:t>
+              <a:t>8/1/2025</a:t>
             </a:fld>
             <a:endParaRPr lang="en-US"/>
           </a:p>
@@ -4692,7 +5120,7 @@
           <a:p>
             <a:fld id="{9562EB47-45B4-4EF5-A743-B4885DD2F060}" type="datetime1">
               <a:rPr lang="en-US" smtClean="0"/>
-              <a:t>7/26/2025</a:t>
+              <a:t>8/1/2025</a:t>
             </a:fld>
             <a:endParaRPr lang="en-US"/>
           </a:p>
@@ -6077,7 +6505,7 @@
           <a:p>
             <a:fld id="{4A8D24A4-5FEC-4062-8995-EB21925B3B40}" type="datetime1">
               <a:rPr lang="en-US" smtClean="0"/>
-              <a:t>7/26/2025</a:t>
+              <a:t>8/1/2025</a:t>
             </a:fld>
             <a:endParaRPr lang="en-US" sz="1000" dirty="0"/>
           </a:p>
@@ -8667,7 +9095,7 @@
           <p:nvPr>
             <p:extLst>
               <p:ext uri="{D42A27DB-BD31-4B8C-83A1-F6EECF244321}">
-                <p14:modId xmlns:p14="http://schemas.microsoft.com/office/powerpoint/2010/main" val="4021874667"/>
+                <p14:modId xmlns:p14="http://schemas.microsoft.com/office/powerpoint/2010/main" val="1055088022"/>
               </p:ext>
             </p:extLst>
           </p:nvPr>
@@ -8850,7 +9278,7 @@
                       <a:r>
                         <a:rPr lang="en-IN" sz="2800" kern="100" dirty="0">
                           <a:solidFill>
-                            <a:srgbClr val="002060"/>
+                            <a:schemeClr val="bg1"/>
                           </a:solidFill>
                           <a:effectLst/>
                         </a:rPr>
@@ -8858,7 +9286,7 @@
                       </a:r>
                       <a:endParaRPr lang="en-IN" sz="2800" kern="100" dirty="0">
                         <a:solidFill>
-                          <a:srgbClr val="002060"/>
+                          <a:schemeClr val="bg1"/>
                         </a:solidFill>
                         <a:effectLst/>
                         <a:latin typeface="Aptos" panose="020B0004020202020204" pitchFamily="34" charset="0"/>
@@ -8923,7 +9351,7 @@
                       <a:r>
                         <a:rPr lang="en-IN" sz="2800" kern="100" dirty="0">
                           <a:solidFill>
-                            <a:srgbClr val="002060"/>
+                            <a:schemeClr val="bg1"/>
                           </a:solidFill>
                           <a:effectLst/>
                         </a:rPr>
@@ -8931,7 +9359,7 @@
                       </a:r>
                       <a:endParaRPr lang="en-IN" sz="2800" kern="100" dirty="0">
                         <a:solidFill>
-                          <a:srgbClr val="002060"/>
+                          <a:schemeClr val="bg1"/>
                         </a:solidFill>
                         <a:effectLst/>
                         <a:latin typeface="Aptos" panose="020B0004020202020204" pitchFamily="34" charset="0"/>
@@ -8994,12 +9422,24 @@
                         <a:buNone/>
                       </a:pPr>
                       <a:r>
-                        <a:rPr lang="en-IN" sz="2800" kern="100">
+                        <a:rPr lang="en-IN" sz="2800" kern="100" dirty="0" err="1">
                           <a:effectLst/>
                         </a:rPr>
-                        <a:t>LightGBM, CatBoost</a:t>
+                        <a:t>LightGBM</a:t>
                       </a:r>
-                      <a:endParaRPr lang="en-IN" sz="2800" kern="100">
+                      <a:r>
+                        <a:rPr lang="en-IN" sz="2800" kern="100" dirty="0">
+                          <a:effectLst/>
+                        </a:rPr>
+                        <a:t>, </a:t>
+                      </a:r>
+                      <a:r>
+                        <a:rPr lang="en-IN" sz="2800" kern="100" dirty="0" err="1">
+                          <a:effectLst/>
+                        </a:rPr>
+                        <a:t>CatBoost</a:t>
+                      </a:r>
+                      <a:endParaRPr lang="en-IN" sz="2800" kern="100" dirty="0">
                         <a:effectLst/>
                         <a:latin typeface="Aptos" panose="020B0004020202020204" pitchFamily="34" charset="0"/>
                         <a:ea typeface="Aptos" panose="020B0004020202020204" pitchFamily="34" charset="0"/>
@@ -24046,6 +24486,244 @@
         <p:cNvPr id="1" name="">
           <a:extLst>
             <a:ext uri="{FF2B5EF4-FFF2-40B4-BE49-F238E27FC236}">
+              <a16:creationId xmlns:a16="http://schemas.microsoft.com/office/drawing/2014/main" id="{D93773BD-E472-A44D-F7D5-62114F33F22D}"/>
+            </a:ext>
+          </a:extLst>
+        </p:cNvPr>
+        <p:cNvGrpSpPr/>
+        <p:nvPr/>
+      </p:nvGrpSpPr>
+      <p:grpSpPr>
+        <a:xfrm>
+          <a:off x="0" y="0"/>
+          <a:ext cx="0" cy="0"/>
+          <a:chOff x="0" y="0"/>
+          <a:chExt cx="0" cy="0"/>
+        </a:xfrm>
+      </p:grpSpPr>
+      <p:sp>
+        <p:nvSpPr>
+          <p:cNvPr id="5" name="TextBox 4">
+            <a:extLst>
+              <a:ext uri="{FF2B5EF4-FFF2-40B4-BE49-F238E27FC236}">
+                <a16:creationId xmlns:a16="http://schemas.microsoft.com/office/drawing/2014/main" id="{6F501116-4F2A-3D0D-6DF1-85DD8C9B28E5}"/>
+              </a:ext>
+            </a:extLst>
+          </p:cNvPr>
+          <p:cNvSpPr txBox="1"/>
+          <p:nvPr/>
+        </p:nvSpPr>
+        <p:spPr>
+          <a:xfrm>
+            <a:off x="812033" y="876645"/>
+            <a:ext cx="10567933" cy="4216539"/>
+          </a:xfrm>
+          <a:prstGeom prst="rect">
+            <a:avLst/>
+          </a:prstGeom>
+          <a:noFill/>
+        </p:spPr>
+        <p:txBody>
+          <a:bodyPr wrap="square" rtlCol="0">
+            <a:spAutoFit/>
+          </a:bodyPr>
+          <a:lstStyle/>
+          <a:p>
+            <a:r>
+              <a:rPr lang="en-US" sz="2800" b="1" dirty="0"/>
+              <a:t>Introduction:</a:t>
+            </a:r>
+          </a:p>
+          <a:p>
+            <a:r>
+              <a:rPr lang="en-US" sz="2000" dirty="0"/>
+              <a:t>	</a:t>
+            </a:r>
+            <a:r>
+              <a:rPr lang="en-US" sz="2400" dirty="0"/>
+              <a:t>Machine learning, as we have seen, </a:t>
+            </a:r>
+            <a:r>
+              <a:rPr lang="en-US" sz="2400" b="1" dirty="0">
+                <a:solidFill>
+                  <a:srgbClr val="C00000"/>
+                </a:solidFill>
+              </a:rPr>
+              <a:t>mimics the human form of learning</a:t>
+            </a:r>
+            <a:r>
+              <a:rPr lang="en-US" sz="2400" dirty="0"/>
+              <a:t>. On the other hand, human learning, or for that matter every action of a human being, is </a:t>
+            </a:r>
+            <a:r>
+              <a:rPr lang="en-US" sz="2400" b="1" dirty="0">
+                <a:solidFill>
+                  <a:srgbClr val="C00000"/>
+                </a:solidFill>
+              </a:rPr>
+              <a:t>controlled by the nervous system</a:t>
+            </a:r>
+            <a:r>
+              <a:rPr lang="en-US" sz="2400" dirty="0"/>
+              <a:t>. </a:t>
+            </a:r>
+          </a:p>
+          <a:p>
+            <a:r>
+              <a:rPr lang="en-US" sz="2400" dirty="0"/>
+              <a:t>	In </a:t>
+            </a:r>
+            <a:r>
+              <a:rPr lang="en-US" sz="2400" b="1" dirty="0">
+                <a:solidFill>
+                  <a:srgbClr val="C00000"/>
+                </a:solidFill>
+              </a:rPr>
+              <a:t>any human being</a:t>
+            </a:r>
+            <a:r>
+              <a:rPr lang="en-US" sz="2400" dirty="0"/>
+              <a:t>, the </a:t>
+            </a:r>
+            <a:r>
+              <a:rPr lang="en-US" sz="2400" b="1" dirty="0">
+                <a:solidFill>
+                  <a:schemeClr val="accent6">
+                    <a:lumMod val="60000"/>
+                    <a:lumOff val="40000"/>
+                  </a:schemeClr>
+                </a:solidFill>
+              </a:rPr>
+              <a:t>nervous system coordinates the different actions</a:t>
+            </a:r>
+            <a:r>
+              <a:rPr lang="en-US" sz="2400" dirty="0"/>
+              <a:t> </a:t>
+            </a:r>
+            <a:r>
+              <a:rPr lang="en-US" sz="2400" b="1" dirty="0">
+                <a:solidFill>
+                  <a:srgbClr val="C00000"/>
+                </a:solidFill>
+              </a:rPr>
+              <a:t>by transmitting signals</a:t>
+            </a:r>
+            <a:r>
+              <a:rPr lang="en-US" sz="2400" b="1" dirty="0"/>
+              <a:t> </a:t>
+            </a:r>
+            <a:r>
+              <a:rPr lang="en-US" sz="2400" dirty="0"/>
+              <a:t>to and from different parts of the body. </a:t>
+            </a:r>
+          </a:p>
+          <a:p>
+            <a:r>
+              <a:rPr lang="en-US" sz="2400" dirty="0"/>
+              <a:t>	</a:t>
+            </a:r>
+            <a:r>
+              <a:rPr lang="en-US" sz="2400" b="1" dirty="0">
+                <a:solidFill>
+                  <a:schemeClr val="accent5">
+                    <a:lumMod val="75000"/>
+                  </a:schemeClr>
+                </a:solidFill>
+              </a:rPr>
+              <a:t>The nervous system is constituted of </a:t>
+            </a:r>
+            <a:r>
+              <a:rPr lang="en-US" sz="2400" dirty="0"/>
+              <a:t>a special type of cell, called </a:t>
+            </a:r>
+            <a:r>
+              <a:rPr lang="en-US" sz="2400" b="1" dirty="0">
+                <a:solidFill>
+                  <a:srgbClr val="C00000"/>
+                </a:solidFill>
+              </a:rPr>
+              <a:t>neuron</a:t>
+            </a:r>
+            <a:r>
+              <a:rPr lang="en-US" sz="2400" dirty="0"/>
+              <a:t> or </a:t>
+            </a:r>
+            <a:r>
+              <a:rPr lang="en-US" sz="2400" b="1" dirty="0">
+                <a:solidFill>
+                  <a:srgbClr val="C00000"/>
+                </a:solidFill>
+              </a:rPr>
+              <a:t>nerve</a:t>
+            </a:r>
+            <a:r>
+              <a:rPr lang="en-US" sz="2400" dirty="0"/>
+              <a:t> </a:t>
+            </a:r>
+            <a:r>
+              <a:rPr lang="en-US" sz="2400" b="1" dirty="0">
+                <a:solidFill>
+                  <a:srgbClr val="C00000"/>
+                </a:solidFill>
+              </a:rPr>
+              <a:t>cell</a:t>
+            </a:r>
+            <a:r>
+              <a:rPr lang="en-US" sz="2400" dirty="0"/>
+              <a:t>, which has special structures allowing it to </a:t>
+            </a:r>
+            <a:r>
+              <a:rPr lang="en-US" sz="2400" b="1" dirty="0"/>
+              <a:t>receive</a:t>
+            </a:r>
+            <a:r>
+              <a:rPr lang="en-US" sz="2400" dirty="0"/>
+              <a:t> or </a:t>
+            </a:r>
+            <a:r>
+              <a:rPr lang="en-US" sz="2400" b="1" dirty="0"/>
+              <a:t>send</a:t>
+            </a:r>
+            <a:r>
+              <a:rPr lang="en-US" sz="2400" dirty="0"/>
+              <a:t> </a:t>
+            </a:r>
+            <a:r>
+              <a:rPr lang="en-US" sz="2400" b="1" dirty="0"/>
+              <a:t>signals</a:t>
+            </a:r>
+            <a:r>
+              <a:rPr lang="en-US" sz="2400" dirty="0"/>
+              <a:t> to other neurons. Neurons connect with each other to transmit signals to or receive signals from other neurons. This structure essentially forms </a:t>
+            </a:r>
+            <a:r>
+              <a:rPr lang="en-US" sz="2400" b="1" dirty="0"/>
+              <a:t>a network of neurons or a Neural Network.</a:t>
+            </a:r>
+          </a:p>
+        </p:txBody>
+      </p:sp>
+    </p:spTree>
+    <p:extLst>
+      <p:ext uri="{BB962C8B-B14F-4D97-AF65-F5344CB8AC3E}">
+        <p14:creationId xmlns:p14="http://schemas.microsoft.com/office/powerpoint/2010/main" val="3483828231"/>
+      </p:ext>
+    </p:extLst>
+  </p:cSld>
+  <p:clrMapOvr>
+    <a:masterClrMapping/>
+  </p:clrMapOvr>
+</p:sld>
+</file>
+
+<file path=ppt/slides/slide54.xml><?xml version="1.0" encoding="utf-8"?>
+<p:sld xmlns:a="http://schemas.openxmlformats.org/drawingml/2006/main" xmlns:r="http://schemas.openxmlformats.org/officeDocument/2006/relationships" xmlns:p="http://schemas.openxmlformats.org/presentationml/2006/main">
+  <p:cSld>
+    <p:spTree>
+      <p:nvGrpSpPr>
+        <p:cNvPr id="1" name="">
+          <a:extLst>
+            <a:ext uri="{FF2B5EF4-FFF2-40B4-BE49-F238E27FC236}">
               <a16:creationId xmlns:a16="http://schemas.microsoft.com/office/drawing/2014/main" id="{AF9D4F1B-40B3-6714-751C-C2212A1A546C}"/>
             </a:ext>
           </a:extLst>
@@ -24092,7 +24770,199 @@
             <a:pPr marL="0" indent="0">
               <a:buNone/>
             </a:pPr>
-            <a:endParaRPr lang="en-IN" sz="2400" dirty="0"/>
+            <a:r>
+              <a:rPr lang="en-IN" sz="2800" b="1" dirty="0"/>
+              <a:t>Introduction to Neural Networks:</a:t>
+            </a:r>
+          </a:p>
+          <a:p>
+            <a:r>
+              <a:rPr lang="en-US" sz="2800" dirty="0"/>
+              <a:t>A </a:t>
+            </a:r>
+            <a:r>
+              <a:rPr lang="en-US" sz="2800" b="1" dirty="0"/>
+              <a:t>Neural Network (NN)</a:t>
+            </a:r>
+            <a:r>
+              <a:rPr lang="en-US" sz="2800" dirty="0"/>
+              <a:t> is a computational model inspired by the way the </a:t>
+            </a:r>
+            <a:r>
+              <a:rPr lang="en-US" sz="2800" b="1" dirty="0">
+                <a:solidFill>
+                  <a:srgbClr val="C00000"/>
+                </a:solidFill>
+              </a:rPr>
+              <a:t>human brain works</a:t>
+            </a:r>
+            <a:r>
+              <a:rPr lang="en-US" sz="2800" dirty="0"/>
+              <a:t>. It consists of layers of interconnected "</a:t>
+            </a:r>
+            <a:r>
+              <a:rPr lang="en-US" sz="2800" b="1" dirty="0">
+                <a:solidFill>
+                  <a:srgbClr val="C00000"/>
+                </a:solidFill>
+              </a:rPr>
+              <a:t>neurons</a:t>
+            </a:r>
+            <a:r>
+              <a:rPr lang="en-US" sz="2800" dirty="0"/>
+              <a:t>" (also called </a:t>
+            </a:r>
+            <a:r>
+              <a:rPr lang="en-US" sz="2800" b="1" dirty="0"/>
+              <a:t>nodes</a:t>
+            </a:r>
+            <a:r>
+              <a:rPr lang="en-US" sz="2800" dirty="0"/>
+              <a:t>), and it is used to </a:t>
+            </a:r>
+            <a:r>
+              <a:rPr lang="en-US" sz="2800" b="1" dirty="0">
+                <a:solidFill>
+                  <a:srgbClr val="002060"/>
+                </a:solidFill>
+              </a:rPr>
+              <a:t>recognize patterns</a:t>
+            </a:r>
+            <a:r>
+              <a:rPr lang="en-US" sz="2800" dirty="0"/>
+              <a:t>, </a:t>
+            </a:r>
+            <a:r>
+              <a:rPr lang="en-US" sz="2800" b="1" dirty="0">
+                <a:solidFill>
+                  <a:srgbClr val="002060"/>
+                </a:solidFill>
+              </a:rPr>
+              <a:t>make</a:t>
+            </a:r>
+            <a:r>
+              <a:rPr lang="en-US" sz="2800" dirty="0"/>
+              <a:t> </a:t>
+            </a:r>
+            <a:r>
+              <a:rPr lang="en-US" sz="2800" b="1" dirty="0">
+                <a:solidFill>
+                  <a:srgbClr val="002060"/>
+                </a:solidFill>
+              </a:rPr>
+              <a:t>decisions</a:t>
+            </a:r>
+            <a:r>
+              <a:rPr lang="en-US" sz="2800" dirty="0"/>
+              <a:t>, and </a:t>
+            </a:r>
+            <a:r>
+              <a:rPr lang="en-US" sz="2800" b="1" dirty="0">
+                <a:solidFill>
+                  <a:srgbClr val="002060"/>
+                </a:solidFill>
+              </a:rPr>
+              <a:t>learn</a:t>
+            </a:r>
+            <a:r>
+              <a:rPr lang="en-US" sz="2800" dirty="0"/>
+              <a:t> </a:t>
+            </a:r>
+            <a:r>
+              <a:rPr lang="en-US" sz="2800" b="1" dirty="0">
+                <a:solidFill>
+                  <a:srgbClr val="002060"/>
+                </a:solidFill>
+              </a:rPr>
+              <a:t>from</a:t>
+            </a:r>
+            <a:r>
+              <a:rPr lang="en-US" sz="2800" dirty="0"/>
+              <a:t> </a:t>
+            </a:r>
+            <a:r>
+              <a:rPr lang="en-US" sz="2800" b="1" dirty="0">
+                <a:solidFill>
+                  <a:srgbClr val="002060"/>
+                </a:solidFill>
+              </a:rPr>
+              <a:t>data</a:t>
+            </a:r>
+            <a:r>
+              <a:rPr lang="en-US" sz="2800" dirty="0"/>
+              <a:t>.</a:t>
+            </a:r>
+          </a:p>
+          <a:p>
+            <a:r>
+              <a:rPr lang="en-US" sz="2800" dirty="0"/>
+              <a:t>Neural networks are the foundation of </a:t>
+            </a:r>
+            <a:r>
+              <a:rPr lang="en-US" sz="2800" b="1" dirty="0"/>
+              <a:t>Deep Learning</a:t>
+            </a:r>
+            <a:r>
+              <a:rPr lang="en-US" sz="2800" dirty="0"/>
+              <a:t>, a subset of Machine Learning.</a:t>
+            </a:r>
+          </a:p>
+          <a:p>
+            <a:pPr marL="0" indent="0">
+              <a:buNone/>
+            </a:pPr>
+            <a:endParaRPr lang="en-IN" sz="1200" b="1" dirty="0"/>
+          </a:p>
+          <a:p>
+            <a:pPr marL="0" indent="0">
+              <a:buNone/>
+            </a:pPr>
+            <a:r>
+              <a:rPr lang="en-US" sz="2800" b="1" dirty="0"/>
+              <a:t>What is Deep Learning?</a:t>
+            </a:r>
+          </a:p>
+          <a:p>
+            <a:pPr marL="0" indent="0">
+              <a:buNone/>
+            </a:pPr>
+            <a:r>
+              <a:rPr lang="en-US" sz="2800" dirty="0"/>
+              <a:t>Deep Learning is a </a:t>
+            </a:r>
+            <a:r>
+              <a:rPr lang="en-US" sz="2800" b="1" dirty="0">
+                <a:solidFill>
+                  <a:srgbClr val="C00000"/>
+                </a:solidFill>
+              </a:rPr>
+              <a:t>branch of Machine Learning </a:t>
+            </a:r>
+            <a:r>
+              <a:rPr lang="en-US" sz="2800" dirty="0"/>
+              <a:t>that uses </a:t>
+            </a:r>
+            <a:r>
+              <a:rPr lang="en-US" sz="2800" b="1" dirty="0"/>
+              <a:t>artificial neural networks </a:t>
+            </a:r>
+            <a:r>
+              <a:rPr lang="en-US" sz="2800" dirty="0"/>
+              <a:t>with </a:t>
+            </a:r>
+            <a:r>
+              <a:rPr lang="en-US" sz="2800" b="1" dirty="0">
+                <a:solidFill>
+                  <a:srgbClr val="C00000"/>
+                </a:solidFill>
+              </a:rPr>
+              <a:t>many layers </a:t>
+            </a:r>
+            <a:r>
+              <a:rPr lang="en-US" sz="2800" dirty="0"/>
+              <a:t>(hence "deep") to learn from data and make predictions or decisions.</a:t>
+            </a:r>
+            <a:endParaRPr lang="en-IN" sz="2800" dirty="0"/>
           </a:p>
         </p:txBody>
       </p:sp>
@@ -24100,77 +24970,6 @@
     <p:extLst>
       <p:ext uri="{BB962C8B-B14F-4D97-AF65-F5344CB8AC3E}">
         <p14:creationId xmlns:p14="http://schemas.microsoft.com/office/powerpoint/2010/main" val="4081877237"/>
-      </p:ext>
-    </p:extLst>
-  </p:cSld>
-  <p:clrMapOvr>
-    <a:masterClrMapping/>
-  </p:clrMapOvr>
-</p:sld>
-</file>
-
-<file path=ppt/slides/slide54.xml><?xml version="1.0" encoding="utf-8"?>
-<p:sld xmlns:a="http://schemas.openxmlformats.org/drawingml/2006/main" xmlns:r="http://schemas.openxmlformats.org/officeDocument/2006/relationships" xmlns:p="http://schemas.openxmlformats.org/presentationml/2006/main">
-  <p:cSld>
-    <p:spTree>
-      <p:nvGrpSpPr>
-        <p:cNvPr id="1" name="">
-          <a:extLst>
-            <a:ext uri="{FF2B5EF4-FFF2-40B4-BE49-F238E27FC236}">
-              <a16:creationId xmlns:a16="http://schemas.microsoft.com/office/drawing/2014/main" id="{C8CF36FF-A7EF-3CD3-BEBB-04BD77F32D35}"/>
-            </a:ext>
-          </a:extLst>
-        </p:cNvPr>
-        <p:cNvGrpSpPr/>
-        <p:nvPr/>
-      </p:nvGrpSpPr>
-      <p:grpSpPr>
-        <a:xfrm>
-          <a:off x="0" y="0"/>
-          <a:ext cx="0" cy="0"/>
-          <a:chOff x="0" y="0"/>
-          <a:chExt cx="0" cy="0"/>
-        </a:xfrm>
-      </p:grpSpPr>
-      <p:sp>
-        <p:nvSpPr>
-          <p:cNvPr id="3" name="Content Placeholder 2">
-            <a:extLst>
-              <a:ext uri="{FF2B5EF4-FFF2-40B4-BE49-F238E27FC236}">
-                <a16:creationId xmlns:a16="http://schemas.microsoft.com/office/drawing/2014/main" id="{E6EAE6F0-8F44-0A36-B82B-47620DB13204}"/>
-              </a:ext>
-            </a:extLst>
-          </p:cNvPr>
-          <p:cNvSpPr>
-            <a:spLocks noGrp="1"/>
-          </p:cNvSpPr>
-          <p:nvPr>
-            <p:ph idx="1"/>
-          </p:nvPr>
-        </p:nvSpPr>
-        <p:spPr>
-          <a:xfrm>
-            <a:off x="777240" y="707571"/>
-            <a:ext cx="10659110" cy="5469392"/>
-          </a:xfrm>
-        </p:spPr>
-        <p:txBody>
-          <a:bodyPr>
-            <a:normAutofit/>
-          </a:bodyPr>
-          <a:lstStyle/>
-          <a:p>
-            <a:pPr marL="0" indent="0">
-              <a:buNone/>
-            </a:pPr>
-            <a:endParaRPr lang="en-IN" sz="2400" dirty="0"/>
-          </a:p>
-        </p:txBody>
-      </p:sp>
-    </p:spTree>
-    <p:extLst>
-      <p:ext uri="{BB962C8B-B14F-4D97-AF65-F5344CB8AC3E}">
-        <p14:creationId xmlns:p14="http://schemas.microsoft.com/office/powerpoint/2010/main" val="2453457549"/>
       </p:ext>
     </p:extLst>
   </p:cSld>
@@ -24188,7 +24987,7 @@
         <p:cNvPr id="1" name="">
           <a:extLst>
             <a:ext uri="{FF2B5EF4-FFF2-40B4-BE49-F238E27FC236}">
-              <a16:creationId xmlns:a16="http://schemas.microsoft.com/office/drawing/2014/main" id="{49A2B8EF-6DA3-12C8-87FC-43A763B9A4AF}"/>
+              <a16:creationId xmlns:a16="http://schemas.microsoft.com/office/drawing/2014/main" id="{94BF50A6-0F47-4121-FB05-70B607146E9A}"/>
             </a:ext>
           </a:extLst>
         </p:cNvPr>
@@ -24205,43 +25004,226 @@
       </p:grpSpPr>
       <p:sp>
         <p:nvSpPr>
-          <p:cNvPr id="3" name="Content Placeholder 2">
+          <p:cNvPr id="5" name="TextBox 4">
             <a:extLst>
               <a:ext uri="{FF2B5EF4-FFF2-40B4-BE49-F238E27FC236}">
-                <a16:creationId xmlns:a16="http://schemas.microsoft.com/office/drawing/2014/main" id="{1BFE2C4E-E802-C33F-37CD-BA91E0BBB901}"/>
+                <a16:creationId xmlns:a16="http://schemas.microsoft.com/office/drawing/2014/main" id="{E2ADE6EE-CF2D-73AE-CAA7-AF70D53541F0}"/>
               </a:ext>
             </a:extLst>
           </p:cNvPr>
-          <p:cNvSpPr>
-            <a:spLocks noGrp="1"/>
-          </p:cNvSpPr>
-          <p:nvPr>
-            <p:ph idx="1"/>
-          </p:nvPr>
+          <p:cNvSpPr txBox="1"/>
+          <p:nvPr/>
         </p:nvSpPr>
         <p:spPr>
           <a:xfrm>
-            <a:off x="777240" y="707571"/>
-            <a:ext cx="10659110" cy="5469392"/>
+            <a:off x="530914" y="380999"/>
+            <a:ext cx="11452363" cy="1877437"/>
           </a:xfrm>
+          <a:prstGeom prst="rect">
+            <a:avLst/>
+          </a:prstGeom>
+          <a:noFill/>
         </p:spPr>
         <p:txBody>
-          <a:bodyPr>
-            <a:normAutofit/>
+          <a:bodyPr wrap="square">
+            <a:spAutoFit/>
           </a:bodyPr>
           <a:lstStyle/>
           <a:p>
-            <a:pPr marL="0" indent="0">
-              <a:buNone/>
+            <a:r>
+              <a:rPr lang="en-US" sz="2000" b="1" dirty="0"/>
+              <a:t>THE BIOLOGICAL NEURON : </a:t>
+            </a:r>
+            <a:r>
+              <a:rPr lang="en-US" sz="2400" dirty="0"/>
+              <a:t>The human nervous system is divided into two main parts:</a:t>
+            </a:r>
+          </a:p>
+          <a:p>
+            <a:pPr marL="342900" indent="-342900">
+              <a:buAutoNum type="arabicPeriod"/>
             </a:pPr>
-            <a:endParaRPr lang="en-IN" sz="2400" dirty="0"/>
+            <a:r>
+              <a:rPr lang="en-US" sz="2400" dirty="0"/>
+              <a:t>The </a:t>
+            </a:r>
+            <a:r>
+              <a:rPr lang="en-US" sz="2400" b="1" dirty="0"/>
+              <a:t>Central Nervous System (CNS): </a:t>
+            </a:r>
+            <a:r>
+              <a:rPr lang="en-US" sz="2400" dirty="0"/>
+              <a:t>which includes the </a:t>
+            </a:r>
+            <a:r>
+              <a:rPr lang="en-US" sz="2400" b="1" dirty="0">
+                <a:solidFill>
+                  <a:srgbClr val="C00000"/>
+                </a:solidFill>
+              </a:rPr>
+              <a:t>brain</a:t>
+            </a:r>
+            <a:r>
+              <a:rPr lang="en-US" sz="2400" dirty="0"/>
+              <a:t> and </a:t>
+            </a:r>
+            <a:r>
+              <a:rPr lang="en-US" sz="2400" b="1" dirty="0">
+                <a:solidFill>
+                  <a:srgbClr val="C00000"/>
+                </a:solidFill>
+              </a:rPr>
+              <a:t>spinal</a:t>
+            </a:r>
+            <a:r>
+              <a:rPr lang="en-US" sz="2400" dirty="0"/>
+              <a:t> </a:t>
+            </a:r>
+            <a:r>
+              <a:rPr lang="en-US" sz="2400" b="1" dirty="0">
+                <a:solidFill>
+                  <a:srgbClr val="C00000"/>
+                </a:solidFill>
+              </a:rPr>
+              <a:t>cord</a:t>
+            </a:r>
+            <a:r>
+              <a:rPr lang="en-US" sz="2400" dirty="0"/>
+              <a:t>.</a:t>
+            </a:r>
+          </a:p>
+          <a:p>
+            <a:pPr marL="342900" indent="-342900">
+              <a:buAutoNum type="arabicPeriod"/>
+            </a:pPr>
+            <a:r>
+              <a:rPr lang="en-US" sz="2400" dirty="0"/>
+              <a:t>The </a:t>
+            </a:r>
+            <a:r>
+              <a:rPr lang="en-US" sz="2400" b="1" dirty="0"/>
+              <a:t>Peripheral Nervous System:</a:t>
+            </a:r>
+            <a:r>
+              <a:rPr lang="en-US" sz="2400" dirty="0"/>
+              <a:t> which includes nerves and ganglia (clusters of nerve cells) outside the brain and spinal cord.</a:t>
+            </a:r>
+          </a:p>
+          <a:p>
+            <a:endParaRPr lang="en-US" sz="2000" b="1" dirty="0"/>
           </a:p>
         </p:txBody>
       </p:sp>
+      <p:grpSp>
+        <p:nvGrpSpPr>
+          <p:cNvPr id="3" name="Group 2">
+            <a:extLst>
+              <a:ext uri="{FF2B5EF4-FFF2-40B4-BE49-F238E27FC236}">
+                <a16:creationId xmlns:a16="http://schemas.microsoft.com/office/drawing/2014/main" id="{51D58B77-314C-268C-DBCD-0CFEEAE24694}"/>
+              </a:ext>
+            </a:extLst>
+          </p:cNvPr>
+          <p:cNvGrpSpPr/>
+          <p:nvPr/>
+        </p:nvGrpSpPr>
+        <p:grpSpPr>
+          <a:xfrm>
+            <a:off x="990600" y="2013857"/>
+            <a:ext cx="10258838" cy="4463144"/>
+            <a:chOff x="454714" y="2064389"/>
+            <a:chExt cx="10644810" cy="4701209"/>
+          </a:xfrm>
+        </p:grpSpPr>
+        <p:pic>
+          <p:nvPicPr>
+            <p:cNvPr id="2050" name="Picture 2">
+              <a:extLst>
+                <a:ext uri="{FF2B5EF4-FFF2-40B4-BE49-F238E27FC236}">
+                  <a16:creationId xmlns:a16="http://schemas.microsoft.com/office/drawing/2014/main" id="{CDFF0C9E-4E55-3F5A-6641-4363B92084F3}"/>
+                </a:ext>
+              </a:extLst>
+            </p:cNvPr>
+            <p:cNvPicPr>
+              <a:picLocks noChangeAspect="1" noChangeArrowheads="1"/>
+            </p:cNvPicPr>
+            <p:nvPr/>
+          </p:nvPicPr>
+          <p:blipFill rotWithShape="1">
+            <a:blip r:embed="rId2">
+              <a:extLst>
+                <a:ext uri="{28A0092B-C50C-407E-A947-70E740481C1C}">
+                  <a14:useLocalDpi xmlns:a14="http://schemas.microsoft.com/office/drawing/2010/main" val="0"/>
+                </a:ext>
+              </a:extLst>
+            </a:blip>
+            <a:srcRect l="7173" t="19564" r="5516" b="11885"/>
+            <a:stretch/>
+          </p:blipFill>
+          <p:spPr bwMode="auto">
+            <a:xfrm>
+              <a:off x="454714" y="2064389"/>
+              <a:ext cx="10644810" cy="4701209"/>
+            </a:xfrm>
+            <a:prstGeom prst="rect">
+              <a:avLst/>
+            </a:prstGeom>
+            <a:noFill/>
+            <a:extLst>
+              <a:ext uri="{909E8E84-426E-40DD-AFC4-6F175D3DCCD1}">
+                <a14:hiddenFill xmlns:a14="http://schemas.microsoft.com/office/drawing/2010/main">
+                  <a:solidFill>
+                    <a:srgbClr val="FFFFFF"/>
+                  </a:solidFill>
+                </a14:hiddenFill>
+              </a:ext>
+            </a:extLst>
+          </p:spPr>
+        </p:pic>
+        <p:sp>
+          <p:nvSpPr>
+            <p:cNvPr id="2" name="TextBox 1">
+              <a:extLst>
+                <a:ext uri="{FF2B5EF4-FFF2-40B4-BE49-F238E27FC236}">
+                  <a16:creationId xmlns:a16="http://schemas.microsoft.com/office/drawing/2014/main" id="{3D0A7BDB-2748-0826-E174-0236EC414A6F}"/>
+                </a:ext>
+              </a:extLst>
+            </p:cNvPr>
+            <p:cNvSpPr txBox="1"/>
+            <p:nvPr/>
+          </p:nvSpPr>
+          <p:spPr>
+            <a:xfrm>
+              <a:off x="6110917" y="2174651"/>
+              <a:ext cx="4514014" cy="534016"/>
+            </a:xfrm>
+            <a:prstGeom prst="rect">
+              <a:avLst/>
+            </a:prstGeom>
+            <a:noFill/>
+          </p:spPr>
+          <p:txBody>
+            <a:bodyPr wrap="square" rtlCol="0">
+              <a:spAutoFit/>
+            </a:bodyPr>
+            <a:lstStyle/>
+            <a:p>
+              <a:r>
+                <a:rPr lang="en-US" sz="2400" b="1" dirty="0">
+                  <a:solidFill>
+                    <a:srgbClr val="C00000"/>
+                  </a:solidFill>
+                  <a:latin typeface="Algerian" panose="04020705040A02060702" pitchFamily="82" charset="0"/>
+                </a:rPr>
+                <a:t>Structure of a 1 Neuron</a:t>
+              </a:r>
+            </a:p>
+          </p:txBody>
+        </p:sp>
+      </p:grpSp>
     </p:spTree>
     <p:extLst>
       <p:ext uri="{BB962C8B-B14F-4D97-AF65-F5344CB8AC3E}">
-        <p14:creationId xmlns:p14="http://schemas.microsoft.com/office/powerpoint/2010/main" val="1695309701"/>
+        <p14:creationId xmlns:p14="http://schemas.microsoft.com/office/powerpoint/2010/main" val="3235625713"/>
       </p:ext>
     </p:extLst>
   </p:cSld>
@@ -24259,7 +25241,7 @@
         <p:cNvPr id="1" name="">
           <a:extLst>
             <a:ext uri="{FF2B5EF4-FFF2-40B4-BE49-F238E27FC236}">
-              <a16:creationId xmlns:a16="http://schemas.microsoft.com/office/drawing/2014/main" id="{87C909F1-E443-4B01-D0D2-D7AF92EEEB14}"/>
+              <a16:creationId xmlns:a16="http://schemas.microsoft.com/office/drawing/2014/main" id="{A804B90B-4242-2927-31D4-248B5630C36B}"/>
             </a:ext>
           </a:extLst>
         </p:cNvPr>
@@ -24276,43 +25258,203 @@
       </p:grpSpPr>
       <p:sp>
         <p:nvSpPr>
-          <p:cNvPr id="3" name="Content Placeholder 2">
+          <p:cNvPr id="5" name="TextBox 4">
             <a:extLst>
               <a:ext uri="{FF2B5EF4-FFF2-40B4-BE49-F238E27FC236}">
-                <a16:creationId xmlns:a16="http://schemas.microsoft.com/office/drawing/2014/main" id="{4AC14414-F583-CD61-B8DF-86B4EB847812}"/>
+                <a16:creationId xmlns:a16="http://schemas.microsoft.com/office/drawing/2014/main" id="{2EA1581C-E6E8-0A9D-D449-50E497320B41}"/>
               </a:ext>
             </a:extLst>
           </p:cNvPr>
-          <p:cNvSpPr>
-            <a:spLocks noGrp="1"/>
-          </p:cNvSpPr>
-          <p:nvPr>
-            <p:ph idx="1"/>
-          </p:nvPr>
+          <p:cNvSpPr txBox="1"/>
+          <p:nvPr/>
         </p:nvSpPr>
         <p:spPr>
           <a:xfrm>
-            <a:off x="777240" y="707571"/>
-            <a:ext cx="10659110" cy="5469392"/>
+            <a:off x="514349" y="1316143"/>
+            <a:ext cx="10905711" cy="3046988"/>
           </a:xfrm>
+          <a:prstGeom prst="rect">
+            <a:avLst/>
+          </a:prstGeom>
+          <a:noFill/>
         </p:spPr>
         <p:txBody>
-          <a:bodyPr>
-            <a:normAutofit/>
+          <a:bodyPr wrap="square">
+            <a:spAutoFit/>
           </a:bodyPr>
           <a:lstStyle/>
           <a:p>
-            <a:pPr marL="0" indent="0">
-              <a:buNone/>
+            <a:r>
+              <a:rPr lang="en-US" sz="2400" b="1" dirty="0"/>
+              <a:t>Note:</a:t>
+            </a:r>
+          </a:p>
+          <a:p>
+            <a:pPr marL="342900" indent="-342900">
+              <a:buFont typeface="+mj-lt"/>
+              <a:buAutoNum type="arabicPeriod"/>
             </a:pPr>
-            <a:endParaRPr lang="en-IN" sz="2400" dirty="0"/>
+            <a:r>
+              <a:rPr lang="en-US" sz="2400" dirty="0"/>
+              <a:t>The </a:t>
+            </a:r>
+            <a:r>
+              <a:rPr lang="en-US" sz="2400" b="1" dirty="0"/>
+              <a:t>CNS</a:t>
+            </a:r>
+            <a:r>
+              <a:rPr lang="en-US" sz="2400" dirty="0"/>
+              <a:t> </a:t>
+            </a:r>
+            <a:r>
+              <a:rPr lang="en-US" sz="2400" b="1" dirty="0">
+                <a:solidFill>
+                  <a:srgbClr val="C00000"/>
+                </a:solidFill>
+              </a:rPr>
+              <a:t>integrates all information</a:t>
+            </a:r>
+            <a:r>
+              <a:rPr lang="en-US" sz="2400" dirty="0"/>
+              <a:t>, in the form of </a:t>
+            </a:r>
+            <a:r>
+              <a:rPr lang="en-US" sz="2400" b="1" dirty="0">
+                <a:solidFill>
+                  <a:srgbClr val="C00000"/>
+                </a:solidFill>
+              </a:rPr>
+              <a:t>signals</a:t>
+            </a:r>
+            <a:r>
+              <a:rPr lang="en-US" sz="2400" dirty="0"/>
+              <a:t>, from the different parts of the body. </a:t>
+            </a:r>
+          </a:p>
+          <a:p>
+            <a:pPr marL="342900" indent="-342900">
+              <a:buFont typeface="+mj-lt"/>
+              <a:buAutoNum type="arabicPeriod"/>
+            </a:pPr>
+            <a:r>
+              <a:rPr lang="en-US" sz="2400" dirty="0"/>
+              <a:t>The </a:t>
+            </a:r>
+            <a:r>
+              <a:rPr lang="en-US" sz="2400" b="1" dirty="0">
+                <a:solidFill>
+                  <a:srgbClr val="C00000"/>
+                </a:solidFill>
+              </a:rPr>
+              <a:t>periphera</a:t>
+            </a:r>
+            <a:r>
+              <a:rPr lang="en-US" sz="2400" dirty="0"/>
+              <a:t>l </a:t>
+            </a:r>
+            <a:r>
+              <a:rPr lang="en-US" sz="2400" b="1" dirty="0">
+                <a:solidFill>
+                  <a:srgbClr val="C00000"/>
+                </a:solidFill>
+              </a:rPr>
+              <a:t>nervous system</a:t>
+            </a:r>
+            <a:r>
+              <a:rPr lang="en-US" sz="2400" dirty="0"/>
+              <a:t>, on the other hand, </a:t>
+            </a:r>
+            <a:r>
+              <a:rPr lang="en-US" sz="2400" b="1" dirty="0">
+                <a:solidFill>
+                  <a:srgbClr val="C00000"/>
+                </a:solidFill>
+              </a:rPr>
+              <a:t>connects the CNS with the limbs and organs. </a:t>
+            </a:r>
+          </a:p>
+          <a:p>
+            <a:pPr marL="342900" indent="-342900">
+              <a:buFont typeface="+mj-lt"/>
+              <a:buAutoNum type="arabicPeriod"/>
+            </a:pPr>
+            <a:r>
+              <a:rPr lang="en-US" sz="2400" b="1" dirty="0">
+                <a:solidFill>
+                  <a:srgbClr val="C00000"/>
+                </a:solidFill>
+              </a:rPr>
+              <a:t>Neurons</a:t>
+            </a:r>
+            <a:r>
+              <a:rPr lang="en-US" sz="2400" dirty="0"/>
+              <a:t> are basic structural units of the CNS. </a:t>
+            </a:r>
+          </a:p>
+          <a:p>
+            <a:pPr marL="342900" indent="-342900">
+              <a:buFont typeface="+mj-lt"/>
+              <a:buAutoNum type="arabicPeriod"/>
+            </a:pPr>
+            <a:r>
+              <a:rPr lang="en-US" sz="2400" dirty="0"/>
+              <a:t>A neuron is able to </a:t>
+            </a:r>
+            <a:r>
+              <a:rPr lang="en-US" sz="2400" b="1" dirty="0">
+                <a:solidFill>
+                  <a:srgbClr val="C00000"/>
+                </a:solidFill>
+              </a:rPr>
+              <a:t>receive, process</a:t>
+            </a:r>
+            <a:r>
+              <a:rPr lang="en-US" sz="2400" dirty="0"/>
+              <a:t>, and </a:t>
+            </a:r>
+            <a:r>
+              <a:rPr lang="en-US" sz="2400" b="1" dirty="0">
+                <a:solidFill>
+                  <a:srgbClr val="C00000"/>
+                </a:solidFill>
+              </a:rPr>
+              <a:t>transmit</a:t>
+            </a:r>
+            <a:r>
+              <a:rPr lang="en-US" sz="2400" dirty="0"/>
+              <a:t> information in the form of </a:t>
+            </a:r>
+            <a:r>
+              <a:rPr lang="en-US" sz="2400" b="1" dirty="0">
+                <a:solidFill>
+                  <a:srgbClr val="C00000"/>
+                </a:solidFill>
+              </a:rPr>
+              <a:t>chemical</a:t>
+            </a:r>
+            <a:r>
+              <a:rPr lang="en-US" sz="2400" dirty="0"/>
+              <a:t> and </a:t>
+            </a:r>
+            <a:r>
+              <a:rPr lang="en-US" sz="2400" b="1" dirty="0">
+                <a:solidFill>
+                  <a:srgbClr val="C00000"/>
+                </a:solidFill>
+              </a:rPr>
+              <a:t>electrical</a:t>
+            </a:r>
+            <a:r>
+              <a:rPr lang="en-US" sz="2400" dirty="0"/>
+              <a:t> signals.</a:t>
+            </a:r>
           </a:p>
         </p:txBody>
       </p:sp>
     </p:spTree>
     <p:extLst>
       <p:ext uri="{BB962C8B-B14F-4D97-AF65-F5344CB8AC3E}">
-        <p14:creationId xmlns:p14="http://schemas.microsoft.com/office/powerpoint/2010/main" val="1755531748"/>
+        <p14:creationId xmlns:p14="http://schemas.microsoft.com/office/powerpoint/2010/main" val="968009604"/>
       </p:ext>
     </p:extLst>
   </p:cSld>
@@ -24330,7 +25472,7 @@
         <p:cNvPr id="1" name="">
           <a:extLst>
             <a:ext uri="{FF2B5EF4-FFF2-40B4-BE49-F238E27FC236}">
-              <a16:creationId xmlns:a16="http://schemas.microsoft.com/office/drawing/2014/main" id="{3F7EFAC7-3060-4E16-147D-B071F934EC2C}"/>
+              <a16:creationId xmlns:a16="http://schemas.microsoft.com/office/drawing/2014/main" id="{60362B46-45E1-FEBC-5B4A-6119F5C1FA56}"/>
             </a:ext>
           </a:extLst>
         </p:cNvPr>
@@ -24347,43 +25489,401 @@
       </p:grpSpPr>
       <p:sp>
         <p:nvSpPr>
-          <p:cNvPr id="3" name="Content Placeholder 2">
+          <p:cNvPr id="5" name="TextBox 4">
             <a:extLst>
               <a:ext uri="{FF2B5EF4-FFF2-40B4-BE49-F238E27FC236}">
-                <a16:creationId xmlns:a16="http://schemas.microsoft.com/office/drawing/2014/main" id="{73897975-1BBD-F063-A985-DAF5DA4365DB}"/>
+                <a16:creationId xmlns:a16="http://schemas.microsoft.com/office/drawing/2014/main" id="{875D1E8A-FBE9-5480-E87F-859EE9F1B9E2}"/>
               </a:ext>
             </a:extLst>
           </p:cNvPr>
-          <p:cNvSpPr>
-            <a:spLocks noGrp="1"/>
-          </p:cNvSpPr>
-          <p:nvPr>
-            <p:ph idx="1"/>
-          </p:nvPr>
+          <p:cNvSpPr txBox="1"/>
+          <p:nvPr/>
         </p:nvSpPr>
         <p:spPr>
           <a:xfrm>
-            <a:off x="777240" y="707571"/>
-            <a:ext cx="10659110" cy="5469392"/>
+            <a:off x="454301" y="458956"/>
+            <a:ext cx="11283398" cy="5878532"/>
           </a:xfrm>
+          <a:prstGeom prst="rect">
+            <a:avLst/>
+          </a:prstGeom>
+          <a:noFill/>
         </p:spPr>
         <p:txBody>
-          <a:bodyPr>
-            <a:normAutofit/>
+          <a:bodyPr wrap="square">
+            <a:spAutoFit/>
           </a:bodyPr>
           <a:lstStyle/>
           <a:p>
-            <a:pPr marL="0" indent="0">
-              <a:buNone/>
+            <a:r>
+              <a:rPr lang="en-US" sz="2400" dirty="0"/>
+              <a:t>A </a:t>
+            </a:r>
+            <a:r>
+              <a:rPr lang="en-US" sz="2400" b="1" dirty="0"/>
+              <a:t>Biological</a:t>
+            </a:r>
+            <a:r>
+              <a:rPr lang="en-US" sz="2400" dirty="0"/>
+              <a:t> </a:t>
+            </a:r>
+            <a:r>
+              <a:rPr lang="en-US" sz="2400" b="1" dirty="0"/>
+              <a:t>Neuron</a:t>
+            </a:r>
+            <a:r>
+              <a:rPr lang="en-US" sz="2400" dirty="0"/>
+              <a:t> has a </a:t>
+            </a:r>
+            <a:r>
+              <a:rPr lang="en-US" sz="2400" b="1" dirty="0">
+                <a:solidFill>
+                  <a:srgbClr val="C00000"/>
+                </a:solidFill>
+              </a:rPr>
+              <a:t>cell body </a:t>
+            </a:r>
+            <a:r>
+              <a:rPr lang="en-US" sz="2400" dirty="0"/>
+              <a:t>or </a:t>
+            </a:r>
+            <a:r>
+              <a:rPr lang="en-US" sz="2400" b="1" dirty="0">
+                <a:solidFill>
+                  <a:srgbClr val="C00000"/>
+                </a:solidFill>
+              </a:rPr>
+              <a:t>soma</a:t>
+            </a:r>
+            <a:r>
+              <a:rPr lang="en-US" sz="2400" dirty="0"/>
+              <a:t> to </a:t>
+            </a:r>
+            <a:r>
+              <a:rPr lang="en-US" sz="2400" b="1" dirty="0"/>
+              <a:t>process the impulses or signals</a:t>
+            </a:r>
+            <a:r>
+              <a:rPr lang="en-US" sz="2400" dirty="0"/>
+              <a:t>, </a:t>
+            </a:r>
+            <a:r>
+              <a:rPr lang="en-US" sz="2400" b="1" dirty="0"/>
+              <a:t>dendrites</a:t>
+            </a:r>
+            <a:r>
+              <a:rPr lang="en-US" sz="2400" dirty="0"/>
+              <a:t> to receive them, and an </a:t>
+            </a:r>
+            <a:r>
+              <a:rPr lang="en-US" sz="2400" b="1" dirty="0">
+                <a:solidFill>
+                  <a:srgbClr val="C00000"/>
+                </a:solidFill>
+              </a:rPr>
+              <a:t>axon</a:t>
+            </a:r>
+            <a:r>
+              <a:rPr lang="en-US" sz="2400" dirty="0"/>
+              <a:t> that transfers them to other neurons. 	</a:t>
+            </a:r>
+          </a:p>
+          <a:p>
+            <a:r>
+              <a:rPr lang="en-US" sz="2400" dirty="0"/>
+              <a:t>	The Above figure presents the structure of a neuron. It has </a:t>
+            </a:r>
+            <a:r>
+              <a:rPr lang="en-US" sz="2400" b="1" dirty="0"/>
+              <a:t>three</a:t>
+            </a:r>
+            <a:r>
+              <a:rPr lang="en-US" sz="2400" dirty="0"/>
+              <a:t> main parts to carry out its primary functionality of receiving and transmitting information:</a:t>
+            </a:r>
+          </a:p>
+          <a:p>
+            <a:r>
+              <a:rPr lang="en-US" sz="2400" dirty="0"/>
+              <a:t>A biological neuron has a cell body or soma to process the impulses, dendrites to receive them, and an axon that transfers them to other neurons. </a:t>
+            </a:r>
+          </a:p>
+          <a:p>
+            <a:pPr marL="342900" indent="-342900">
+              <a:buAutoNum type="arabicPeriod"/>
             </a:pPr>
-            <a:endParaRPr lang="en-IN" sz="2400" dirty="0"/>
+            <a:r>
+              <a:rPr lang="en-US" sz="2000" b="1" dirty="0"/>
+              <a:t>Dendrites :</a:t>
+            </a:r>
+            <a:r>
+              <a:rPr lang="en-US" sz="2000" dirty="0"/>
+              <a:t> to </a:t>
+            </a:r>
+            <a:r>
+              <a:rPr lang="en-US" sz="2000" b="1" dirty="0">
+                <a:solidFill>
+                  <a:srgbClr val="C00000"/>
+                </a:solidFill>
+              </a:rPr>
+              <a:t>receive signals </a:t>
+            </a:r>
+            <a:r>
+              <a:rPr lang="en-US" sz="2000" dirty="0"/>
+              <a:t>from neighboring or </a:t>
+            </a:r>
+            <a:r>
+              <a:rPr lang="en-US" sz="2000" b="0" i="0" dirty="0">
+                <a:solidFill>
+                  <a:srgbClr val="231F20"/>
+                </a:solidFill>
+                <a:effectLst/>
+                <a:latin typeface="circular-xx"/>
+              </a:rPr>
+              <a:t>surrounding  </a:t>
+            </a:r>
+            <a:r>
+              <a:rPr lang="en-US" sz="2000" dirty="0"/>
+              <a:t>neurons </a:t>
+            </a:r>
+            <a:r>
+              <a:rPr lang="en-US" sz="2000" b="0" i="0" dirty="0">
+                <a:solidFill>
+                  <a:srgbClr val="231F20"/>
+                </a:solidFill>
+                <a:effectLst/>
+                <a:latin typeface="circular-xx"/>
+              </a:rPr>
+              <a:t>and the </a:t>
+            </a:r>
+            <a:r>
+              <a:rPr lang="en-US" sz="2000" b="1" i="0" dirty="0">
+                <a:solidFill>
+                  <a:srgbClr val="C00000"/>
+                </a:solidFill>
+                <a:effectLst/>
+                <a:latin typeface="circular-xx"/>
+              </a:rPr>
+              <a:t>axon</a:t>
+            </a:r>
+            <a:r>
+              <a:rPr lang="en-US" sz="2000" b="0" i="0" dirty="0">
+                <a:solidFill>
+                  <a:srgbClr val="231F20"/>
+                </a:solidFill>
+                <a:effectLst/>
+                <a:latin typeface="circular-xx"/>
+              </a:rPr>
+              <a:t> </a:t>
+            </a:r>
+            <a:r>
+              <a:rPr lang="en-US" sz="2000" b="1" i="0" dirty="0">
+                <a:solidFill>
+                  <a:schemeClr val="accent5"/>
+                </a:solidFill>
+                <a:effectLst/>
+                <a:latin typeface="circular-xx"/>
+              </a:rPr>
+              <a:t>transmits the signal to the other neurons</a:t>
+            </a:r>
+            <a:r>
+              <a:rPr lang="en-US" sz="2000" b="1" dirty="0">
+                <a:solidFill>
+                  <a:schemeClr val="accent5"/>
+                </a:solidFill>
+              </a:rPr>
+              <a:t>. </a:t>
+            </a:r>
+          </a:p>
+          <a:p>
+            <a:pPr marL="342900" indent="-342900">
+              <a:buAutoNum type="arabicPeriod"/>
+            </a:pPr>
+            <a:r>
+              <a:rPr lang="en-US" sz="2000" b="1" dirty="0"/>
+              <a:t>Soma</a:t>
+            </a:r>
+            <a:r>
+              <a:rPr lang="en-US" sz="2000" dirty="0"/>
+              <a:t> : Main body of the neuron </a:t>
+            </a:r>
+            <a:r>
+              <a:rPr lang="en-US" sz="2000" b="1" dirty="0">
+                <a:solidFill>
+                  <a:srgbClr val="C00000"/>
+                </a:solidFill>
+              </a:rPr>
+              <a:t>which accumulates</a:t>
+            </a:r>
+            <a:r>
+              <a:rPr lang="en-US" sz="2000" b="1" dirty="0"/>
+              <a:t> </a:t>
+            </a:r>
+            <a:r>
+              <a:rPr lang="en-US" sz="2000" dirty="0"/>
+              <a:t>or </a:t>
+            </a:r>
+            <a:r>
+              <a:rPr lang="en-US" sz="2000" b="1" dirty="0">
+                <a:solidFill>
+                  <a:srgbClr val="C00000"/>
+                </a:solidFill>
+              </a:rPr>
+              <a:t>collects</a:t>
+            </a:r>
+            <a:r>
+              <a:rPr lang="en-US" sz="2000" dirty="0"/>
+              <a:t> the signals coming from </a:t>
+            </a:r>
+            <a:r>
+              <a:rPr lang="en-US" sz="2000" b="1" dirty="0">
+                <a:solidFill>
+                  <a:srgbClr val="C00000"/>
+                </a:solidFill>
+              </a:rPr>
+              <a:t>the different dendrites.</a:t>
+            </a:r>
+            <a:r>
+              <a:rPr lang="en-US" sz="2000" dirty="0"/>
+              <a:t> It ‘</a:t>
+            </a:r>
+            <a:r>
+              <a:rPr lang="en-US" sz="2000" b="1" dirty="0">
+                <a:solidFill>
+                  <a:srgbClr val="00B050"/>
+                </a:solidFill>
+              </a:rPr>
+              <a:t>fires</a:t>
+            </a:r>
+            <a:r>
+              <a:rPr lang="en-US" sz="2000" dirty="0"/>
+              <a:t>’ when a </a:t>
+            </a:r>
+            <a:r>
+              <a:rPr lang="en-US" sz="2000" b="1" dirty="0">
+                <a:solidFill>
+                  <a:srgbClr val="00B050"/>
+                </a:solidFill>
+              </a:rPr>
+              <a:t>sufficient amount of signal is Collected. </a:t>
+            </a:r>
+          </a:p>
+          <a:p>
+            <a:pPr marL="342900" indent="-342900">
+              <a:buAutoNum type="arabicPeriod"/>
+            </a:pPr>
+            <a:r>
+              <a:rPr lang="en-US" sz="2000" b="1" dirty="0"/>
+              <a:t>Axon</a:t>
+            </a:r>
+            <a:r>
+              <a:rPr lang="en-US" sz="2000" dirty="0"/>
+              <a:t> :The last part of the neuron which </a:t>
+            </a:r>
+            <a:r>
+              <a:rPr lang="en-US" sz="2000" b="1" dirty="0">
+                <a:solidFill>
+                  <a:srgbClr val="C00000"/>
+                </a:solidFill>
+              </a:rPr>
+              <a:t>receives signal from soma</a:t>
+            </a:r>
+            <a:r>
+              <a:rPr lang="en-US" sz="2000" b="1" dirty="0"/>
+              <a:t>, once the neuron ‘fires’ and </a:t>
+            </a:r>
+            <a:r>
+              <a:rPr lang="en-US" sz="2000" b="1" dirty="0">
+                <a:solidFill>
+                  <a:srgbClr val="C00000"/>
+                </a:solidFill>
+              </a:rPr>
+              <a:t>passes it </a:t>
+            </a:r>
+            <a:r>
+              <a:rPr lang="en-US" sz="2000" b="1" dirty="0"/>
+              <a:t>on to the </a:t>
+            </a:r>
+            <a:r>
+              <a:rPr lang="en-US" sz="2000" b="1" dirty="0">
+                <a:solidFill>
+                  <a:srgbClr val="C00000"/>
+                </a:solidFill>
+              </a:rPr>
+              <a:t>neighboring neurons through the axon terminals</a:t>
+            </a:r>
+            <a:r>
+              <a:rPr lang="en-US" sz="2000" dirty="0">
+                <a:solidFill>
+                  <a:srgbClr val="C00000"/>
+                </a:solidFill>
+              </a:rPr>
+              <a:t> </a:t>
+            </a:r>
+            <a:r>
+              <a:rPr lang="en-US" sz="2000" dirty="0"/>
+              <a:t>(to the adjacent dendrite of the neighboring neurons). </a:t>
+            </a:r>
+          </a:p>
+          <a:p>
+            <a:pPr marL="342900" indent="-342900">
+              <a:buAutoNum type="arabicPeriod"/>
+            </a:pPr>
+            <a:endParaRPr lang="en-US" sz="2000" dirty="0"/>
+          </a:p>
+          <a:p>
+            <a:r>
+              <a:rPr lang="en-US" sz="2000" dirty="0"/>
+              <a:t>	</a:t>
+            </a:r>
+            <a:r>
+              <a:rPr lang="en-US" sz="2400" dirty="0"/>
+              <a:t>There is a very small </a:t>
+            </a:r>
+            <a:r>
+              <a:rPr lang="en-US" sz="2400" b="1" dirty="0">
+                <a:solidFill>
+                  <a:srgbClr val="C00000"/>
+                </a:solidFill>
+              </a:rPr>
+              <a:t>gap</a:t>
+            </a:r>
+            <a:r>
+              <a:rPr lang="en-US" sz="2400" dirty="0"/>
+              <a:t> between the axon </a:t>
+            </a:r>
+            <a:r>
+              <a:rPr lang="en-US" sz="2400" b="1" dirty="0">
+                <a:solidFill>
+                  <a:srgbClr val="C00000"/>
+                </a:solidFill>
+              </a:rPr>
+              <a:t>terminal of one neuron and the adjacent dendrite of the neighboring neuron.</a:t>
+            </a:r>
+            <a:r>
+              <a:rPr lang="en-US" sz="2400" dirty="0"/>
+              <a:t> This small gap is known as </a:t>
+            </a:r>
+            <a:r>
+              <a:rPr lang="en-US" sz="2400" b="1" dirty="0">
+                <a:solidFill>
+                  <a:srgbClr val="FFC000"/>
+                </a:solidFill>
+              </a:rPr>
+              <a:t>synapse</a:t>
+            </a:r>
+            <a:r>
+              <a:rPr lang="en-US" sz="2400" dirty="0"/>
+              <a:t>. The signals transmitted through synapse may be excitatory or inhibitory.</a:t>
+            </a:r>
+            <a:endParaRPr lang="en-US" sz="2000" dirty="0"/>
           </a:p>
         </p:txBody>
       </p:sp>
     </p:spTree>
     <p:extLst>
       <p:ext uri="{BB962C8B-B14F-4D97-AF65-F5344CB8AC3E}">
-        <p14:creationId xmlns:p14="http://schemas.microsoft.com/office/powerpoint/2010/main" val="738342721"/>
+        <p14:creationId xmlns:p14="http://schemas.microsoft.com/office/powerpoint/2010/main" val="2726931928"/>
       </p:ext>
     </p:extLst>
   </p:cSld>
@@ -24401,7 +25901,7 @@
         <p:cNvPr id="1" name="">
           <a:extLst>
             <a:ext uri="{FF2B5EF4-FFF2-40B4-BE49-F238E27FC236}">
-              <a16:creationId xmlns:a16="http://schemas.microsoft.com/office/drawing/2014/main" id="{451BBBD0-5D67-62C0-59C6-C1423629F49E}"/>
+              <a16:creationId xmlns:a16="http://schemas.microsoft.com/office/drawing/2014/main" id="{1F00E23F-7B0D-2FC9-C862-2B7FA0A99203}"/>
             </a:ext>
           </a:extLst>
         </p:cNvPr>
@@ -24418,43 +25918,106 @@
       </p:grpSpPr>
       <p:sp>
         <p:nvSpPr>
-          <p:cNvPr id="3" name="Content Placeholder 2">
+          <p:cNvPr id="5" name="TextBox 4">
             <a:extLst>
               <a:ext uri="{FF2B5EF4-FFF2-40B4-BE49-F238E27FC236}">
-                <a16:creationId xmlns:a16="http://schemas.microsoft.com/office/drawing/2014/main" id="{4492821A-3EA0-7E9F-D288-1F34FCFA68E2}"/>
+                <a16:creationId xmlns:a16="http://schemas.microsoft.com/office/drawing/2014/main" id="{4CF04876-67F9-7B3A-8F10-50B0572E693D}"/>
               </a:ext>
             </a:extLst>
           </p:cNvPr>
-          <p:cNvSpPr>
-            <a:spLocks noGrp="1"/>
-          </p:cNvSpPr>
-          <p:nvPr>
-            <p:ph idx="1"/>
-          </p:nvPr>
+          <p:cNvSpPr txBox="1"/>
+          <p:nvPr/>
         </p:nvSpPr>
         <p:spPr>
           <a:xfrm>
-            <a:off x="777240" y="707571"/>
-            <a:ext cx="10659110" cy="5469392"/>
+            <a:off x="564044" y="1524864"/>
+            <a:ext cx="11323155" cy="2739211"/>
           </a:xfrm>
+          <a:prstGeom prst="rect">
+            <a:avLst/>
+          </a:prstGeom>
+          <a:noFill/>
         </p:spPr>
         <p:txBody>
-          <a:bodyPr>
-            <a:normAutofit/>
+          <a:bodyPr wrap="square">
+            <a:spAutoFit/>
           </a:bodyPr>
           <a:lstStyle/>
           <a:p>
-            <a:pPr marL="0" indent="0">
-              <a:buNone/>
-            </a:pPr>
-            <a:endParaRPr lang="en-IN" sz="2400" dirty="0"/>
+            <a:r>
+              <a:rPr lang="en-US" sz="2800" b="1" dirty="0"/>
+              <a:t>Why Understand Biological Neural Networks?</a:t>
+            </a:r>
+          </a:p>
+          <a:p>
+            <a:endParaRPr lang="en-US" sz="2400" dirty="0"/>
+          </a:p>
+          <a:p>
+            <a:r>
+              <a:rPr lang="en-US" sz="2400" dirty="0"/>
+              <a:t>	</a:t>
+            </a:r>
+            <a:r>
+              <a:rPr lang="en-US" sz="2400" b="1" dirty="0">
+                <a:solidFill>
+                  <a:srgbClr val="C00000"/>
+                </a:solidFill>
+              </a:rPr>
+              <a:t>For creating mathematical models </a:t>
+            </a:r>
+            <a:r>
+              <a:rPr lang="en-US" sz="2400" dirty="0"/>
+              <a:t>for </a:t>
+            </a:r>
+            <a:r>
+              <a:rPr lang="en-US" sz="2400" b="1" dirty="0">
+                <a:solidFill>
+                  <a:schemeClr val="accent1">
+                    <a:lumMod val="75000"/>
+                  </a:schemeClr>
+                </a:solidFill>
+              </a:rPr>
+              <a:t>artificial neural networks</a:t>
+            </a:r>
+            <a:r>
+              <a:rPr lang="en-US" sz="2400" dirty="0"/>
+              <a:t>, </a:t>
+            </a:r>
+            <a:r>
+              <a:rPr lang="en-US" sz="2400" b="1" dirty="0"/>
+              <a:t>theoretical analysis of biological neural networks</a:t>
+            </a:r>
+            <a:r>
+              <a:rPr lang="en-US" sz="2400" dirty="0"/>
+              <a:t> is essential as </a:t>
+            </a:r>
+            <a:r>
+              <a:rPr lang="en-US" sz="2400" b="1" dirty="0">
+                <a:solidFill>
+                  <a:srgbClr val="C00000"/>
+                </a:solidFill>
+              </a:rPr>
+              <a:t>they have a very close relationship</a:t>
+            </a:r>
+            <a:r>
+              <a:rPr lang="en-US" sz="2400" dirty="0"/>
+              <a:t>. 	And this understanding of the </a:t>
+            </a:r>
+            <a:r>
+              <a:rPr lang="en-US" sz="2400" b="1" dirty="0"/>
+              <a:t>brain’s neural networks </a:t>
+            </a:r>
+            <a:r>
+              <a:rPr lang="en-US" sz="2400" dirty="0"/>
+              <a:t>has opened horizons for the development of artificial neural network systems and adaptive systems designed to learn and adapt to the situations and inputs.</a:t>
+            </a:r>
           </a:p>
         </p:txBody>
       </p:sp>
     </p:spTree>
     <p:extLst>
       <p:ext uri="{BB962C8B-B14F-4D97-AF65-F5344CB8AC3E}">
-        <p14:creationId xmlns:p14="http://schemas.microsoft.com/office/powerpoint/2010/main" val="2588920475"/>
+        <p14:creationId xmlns:p14="http://schemas.microsoft.com/office/powerpoint/2010/main" val="2682781936"/>
       </p:ext>
     </p:extLst>
   </p:cSld>
@@ -24472,7 +26035,7 @@
         <p:cNvPr id="1" name="">
           <a:extLst>
             <a:ext uri="{FF2B5EF4-FFF2-40B4-BE49-F238E27FC236}">
-              <a16:creationId xmlns:a16="http://schemas.microsoft.com/office/drawing/2014/main" id="{025A9F84-B588-0F59-D7CB-4815B7265E39}"/>
+              <a16:creationId xmlns:a16="http://schemas.microsoft.com/office/drawing/2014/main" id="{1FBCD8D4-66D6-C4FC-D52B-D9E60F202A62}"/>
             </a:ext>
           </a:extLst>
         </p:cNvPr>
@@ -24489,43 +26052,542 @@
       </p:grpSpPr>
       <p:sp>
         <p:nvSpPr>
-          <p:cNvPr id="3" name="Content Placeholder 2">
+          <p:cNvPr id="5" name="TextBox 4">
             <a:extLst>
               <a:ext uri="{FF2B5EF4-FFF2-40B4-BE49-F238E27FC236}">
-                <a16:creationId xmlns:a16="http://schemas.microsoft.com/office/drawing/2014/main" id="{1F8F4650-5E0E-7876-F84A-6AA83F880C09}"/>
+                <a16:creationId xmlns:a16="http://schemas.microsoft.com/office/drawing/2014/main" id="{8F1A5FFE-F701-0017-AE06-456932903012}"/>
               </a:ext>
             </a:extLst>
           </p:cNvPr>
-          <p:cNvSpPr>
-            <a:spLocks noGrp="1"/>
-          </p:cNvSpPr>
-          <p:nvPr>
-            <p:ph idx="1"/>
-          </p:nvPr>
+          <p:cNvSpPr txBox="1"/>
+          <p:nvPr/>
         </p:nvSpPr>
         <p:spPr>
           <a:xfrm>
-            <a:off x="777240" y="707571"/>
-            <a:ext cx="10659110" cy="5469392"/>
+            <a:off x="566682" y="495657"/>
+            <a:ext cx="10648714" cy="6309420"/>
           </a:xfrm>
+          <a:prstGeom prst="rect">
+            <a:avLst/>
+          </a:prstGeom>
+          <a:noFill/>
         </p:spPr>
         <p:txBody>
-          <a:bodyPr>
-            <a:normAutofit/>
+          <a:bodyPr wrap="square">
+            <a:spAutoFit/>
           </a:bodyPr>
           <a:lstStyle/>
           <a:p>
-            <a:pPr marL="0" indent="0">
-              <a:buNone/>
+            <a:r>
+              <a:rPr lang="en-US" sz="2400" b="1" dirty="0">
+                <a:solidFill>
+                  <a:srgbClr val="002060"/>
+                </a:solidFill>
+              </a:rPr>
+              <a:t>Artificial Neuron </a:t>
+            </a:r>
+            <a:r>
+              <a:rPr lang="en-US" sz="2400" dirty="0">
+                <a:solidFill>
+                  <a:srgbClr val="002060"/>
+                </a:solidFill>
+              </a:rPr>
+              <a:t>or</a:t>
+            </a:r>
+            <a:r>
+              <a:rPr lang="en-US" sz="2400" b="1" dirty="0">
+                <a:solidFill>
+                  <a:srgbClr val="002060"/>
+                </a:solidFill>
+              </a:rPr>
+              <a:t> P</a:t>
+            </a:r>
+            <a:r>
+              <a:rPr lang="en-US" sz="2400" b="1" i="0" dirty="0">
+                <a:solidFill>
+                  <a:srgbClr val="002060"/>
+                </a:solidFill>
+                <a:effectLst/>
+                <a:latin typeface="Söhne"/>
+              </a:rPr>
+              <a:t>erceptron</a:t>
+            </a:r>
+            <a:r>
+              <a:rPr lang="en-US" sz="2400" b="0" i="0" dirty="0">
+                <a:solidFill>
+                  <a:srgbClr val="002060"/>
+                </a:solidFill>
+                <a:effectLst/>
+                <a:latin typeface="Söhne"/>
+              </a:rPr>
+              <a:t> </a:t>
+            </a:r>
+            <a:r>
+              <a:rPr lang="en-US" sz="2400" b="1" dirty="0">
+                <a:solidFill>
+                  <a:srgbClr val="002060"/>
+                </a:solidFill>
+              </a:rPr>
+              <a:t>:</a:t>
+            </a:r>
+          </a:p>
+          <a:p>
+            <a:r>
+              <a:rPr lang="en-US" b="0" i="0" dirty="0">
+                <a:solidFill>
+                  <a:srgbClr val="0D0D0D"/>
+                </a:solidFill>
+                <a:effectLst/>
+                <a:latin typeface="Söhne"/>
+              </a:rPr>
+              <a:t>	</a:t>
+            </a:r>
+            <a:r>
+              <a:rPr lang="en-US" sz="2400" b="0" i="0" dirty="0">
+                <a:solidFill>
+                  <a:srgbClr val="0D0D0D"/>
+                </a:solidFill>
+                <a:effectLst/>
+                <a:latin typeface="Söhne"/>
+              </a:rPr>
+              <a:t>An artificial neuron, often referred to as a </a:t>
+            </a:r>
+            <a:r>
+              <a:rPr lang="en-US" sz="2400" b="1" i="0" dirty="0">
+                <a:solidFill>
+                  <a:srgbClr val="0D0D0D"/>
+                </a:solidFill>
+                <a:effectLst/>
+                <a:latin typeface="Söhne"/>
+              </a:rPr>
+              <a:t>perceptron</a:t>
+            </a:r>
+            <a:r>
+              <a:rPr lang="en-US" sz="2400" b="0" i="0" dirty="0">
+                <a:solidFill>
+                  <a:srgbClr val="0D0D0D"/>
+                </a:solidFill>
+                <a:effectLst/>
+                <a:latin typeface="Söhne"/>
+              </a:rPr>
+              <a:t>, is a </a:t>
+            </a:r>
+            <a:r>
+              <a:rPr lang="en-US" sz="2400" b="1" i="0" dirty="0">
+                <a:solidFill>
+                  <a:srgbClr val="C00000"/>
+                </a:solidFill>
+                <a:effectLst/>
+                <a:latin typeface="Söhne"/>
+              </a:rPr>
+              <a:t>fundamental building block of </a:t>
+            </a:r>
+            <a:r>
+              <a:rPr lang="en-US" sz="2400" b="1" i="0" dirty="0">
+                <a:solidFill>
+                  <a:srgbClr val="0D0D0D"/>
+                </a:solidFill>
+                <a:effectLst/>
+                <a:latin typeface="Söhne"/>
+              </a:rPr>
+              <a:t>artificial neural networks (ANNs). </a:t>
+            </a:r>
+            <a:r>
+              <a:rPr lang="en-US" sz="2400" b="1" i="0" dirty="0">
+                <a:solidFill>
+                  <a:schemeClr val="accent1">
+                    <a:lumMod val="75000"/>
+                  </a:schemeClr>
+                </a:solidFill>
+                <a:effectLst/>
+                <a:latin typeface="Söhne"/>
+              </a:rPr>
+              <a:t>Modeled after biological neurons in the human brain</a:t>
+            </a:r>
+            <a:r>
+              <a:rPr lang="en-US" sz="2400" b="0" i="0" dirty="0">
+                <a:solidFill>
+                  <a:srgbClr val="0D0D0D"/>
+                </a:solidFill>
+                <a:effectLst/>
+                <a:latin typeface="Söhne"/>
+              </a:rPr>
+              <a:t>, artificial neurons are </a:t>
+            </a:r>
+            <a:r>
+              <a:rPr lang="en-US" sz="2400" b="1" i="0" dirty="0">
+                <a:solidFill>
+                  <a:srgbClr val="C00000"/>
+                </a:solidFill>
+                <a:effectLst/>
+                <a:latin typeface="Söhne"/>
+              </a:rPr>
+              <a:t>mathematical entities </a:t>
+            </a:r>
+            <a:r>
+              <a:rPr lang="en-US" sz="2400" b="0" i="0" dirty="0">
+                <a:solidFill>
+                  <a:srgbClr val="0D0D0D"/>
+                </a:solidFill>
+                <a:effectLst/>
+                <a:latin typeface="Söhne"/>
+              </a:rPr>
+              <a:t>designed to process and transmit information.</a:t>
+            </a:r>
+          </a:p>
+          <a:p>
+            <a:r>
+              <a:rPr lang="en-US" sz="2400" dirty="0">
+                <a:solidFill>
+                  <a:srgbClr val="0D0D0D"/>
+                </a:solidFill>
+                <a:latin typeface="Söhne"/>
+              </a:rPr>
+              <a:t>	</a:t>
+            </a:r>
+            <a:r>
+              <a:rPr lang="en-US" sz="2400" dirty="0"/>
+              <a:t> </a:t>
+            </a:r>
+            <a:r>
+              <a:rPr lang="en-US" sz="2400" b="1" dirty="0"/>
+              <a:t>The </a:t>
+            </a:r>
+            <a:r>
+              <a:rPr lang="en-US" sz="2400" b="1" dirty="0">
+                <a:solidFill>
+                  <a:srgbClr val="FFC000"/>
+                </a:solidFill>
+              </a:rPr>
+              <a:t>biological neural network </a:t>
+            </a:r>
+            <a:r>
+              <a:rPr lang="en-US" sz="2400" b="1" dirty="0"/>
+              <a:t>has been </a:t>
+            </a:r>
+            <a:r>
+              <a:rPr lang="en-US" sz="2400" b="1" dirty="0">
+                <a:solidFill>
+                  <a:srgbClr val="C00000"/>
+                </a:solidFill>
+              </a:rPr>
+              <a:t>modelled in the form of </a:t>
+            </a:r>
+            <a:r>
+              <a:rPr lang="en-US" sz="2400" b="1" dirty="0">
+                <a:solidFill>
+                  <a:srgbClr val="00B050"/>
+                </a:solidFill>
+              </a:rPr>
+              <a:t>ANN</a:t>
+            </a:r>
+            <a:r>
+              <a:rPr lang="en-US" sz="2400" b="1" dirty="0"/>
+              <a:t> with </a:t>
+            </a:r>
+            <a:r>
+              <a:rPr lang="en-US" sz="2400" b="1" dirty="0">
+                <a:solidFill>
+                  <a:srgbClr val="0070C0"/>
+                </a:solidFill>
+              </a:rPr>
+              <a:t>artificial neurons </a:t>
+            </a:r>
+            <a:r>
+              <a:rPr lang="en-US" sz="2400" b="1" dirty="0">
+                <a:solidFill>
+                  <a:srgbClr val="C00000"/>
+                </a:solidFill>
+              </a:rPr>
+              <a:t>simulating the function of biological neurons.</a:t>
+            </a:r>
+          </a:p>
+          <a:p>
+            <a:endParaRPr lang="en-US" b="1" dirty="0"/>
+          </a:p>
+          <a:p>
+            <a:r>
+              <a:rPr lang="en-US" sz="2400" b="1" dirty="0">
+                <a:solidFill>
+                  <a:srgbClr val="002060"/>
+                </a:solidFill>
+                <a:latin typeface="Söhne"/>
+              </a:rPr>
+              <a:t>A</a:t>
+            </a:r>
+            <a:r>
+              <a:rPr lang="en-US" sz="2400" b="1" i="0" dirty="0">
+                <a:solidFill>
+                  <a:srgbClr val="002060"/>
+                </a:solidFill>
+                <a:effectLst/>
+                <a:latin typeface="Söhne"/>
+              </a:rPr>
+              <a:t>rtificial Neural Network (ANN):</a:t>
+            </a:r>
+            <a:br>
+              <a:rPr lang="en-US" dirty="0"/>
+            </a:br>
+            <a:r>
+              <a:rPr lang="en-US" dirty="0"/>
+              <a:t>	</a:t>
+            </a:r>
+            <a:r>
+              <a:rPr lang="en-US" sz="2000" b="1" i="0" dirty="0">
+                <a:solidFill>
+                  <a:srgbClr val="0D0D0D"/>
+                </a:solidFill>
+                <a:effectLst/>
+                <a:latin typeface="Söhne"/>
+              </a:rPr>
+              <a:t>An artificial neural network (ANN</a:t>
+            </a:r>
+            <a:r>
+              <a:rPr lang="en-US" sz="2000" b="0" i="0" dirty="0">
+                <a:solidFill>
+                  <a:srgbClr val="0D0D0D"/>
+                </a:solidFill>
+                <a:effectLst/>
+                <a:latin typeface="Söhne"/>
+              </a:rPr>
+              <a:t>), often simply referred to as a </a:t>
+            </a:r>
+            <a:r>
+              <a:rPr lang="en-US" sz="2000" b="1" i="0" dirty="0">
+                <a:solidFill>
+                  <a:srgbClr val="0D0D0D"/>
+                </a:solidFill>
+                <a:effectLst/>
+                <a:latin typeface="Söhne"/>
+              </a:rPr>
+              <a:t>neural network</a:t>
+            </a:r>
+            <a:r>
+              <a:rPr lang="en-US" sz="2000" b="0" i="0" dirty="0">
+                <a:solidFill>
+                  <a:srgbClr val="0D0D0D"/>
+                </a:solidFill>
+                <a:effectLst/>
+                <a:latin typeface="Söhne"/>
+              </a:rPr>
+              <a:t>, is a </a:t>
+            </a:r>
+            <a:r>
+              <a:rPr lang="en-US" sz="2000" b="1" i="0" dirty="0">
+                <a:solidFill>
+                  <a:srgbClr val="C00000"/>
+                </a:solidFill>
+                <a:effectLst/>
+                <a:latin typeface="Söhne"/>
+              </a:rPr>
+              <a:t>computational model inspired by the structure and function of biological neural networks in the human brain. </a:t>
+            </a:r>
+            <a:r>
+              <a:rPr lang="en-US" sz="2000" b="0" i="0" dirty="0">
+                <a:solidFill>
+                  <a:srgbClr val="0D0D0D"/>
+                </a:solidFill>
+                <a:effectLst/>
+                <a:latin typeface="Söhne"/>
+              </a:rPr>
+              <a:t>It consists of </a:t>
+            </a:r>
+            <a:r>
+              <a:rPr lang="en-US" sz="2000" b="1" i="0" dirty="0">
+                <a:solidFill>
+                  <a:schemeClr val="accent2">
+                    <a:lumMod val="75000"/>
+                  </a:schemeClr>
+                </a:solidFill>
+                <a:effectLst/>
+                <a:latin typeface="Söhne"/>
+              </a:rPr>
+              <a:t>interconnected nodes</a:t>
+            </a:r>
+            <a:r>
+              <a:rPr lang="en-US" sz="2000" b="0" i="0" dirty="0">
+                <a:solidFill>
+                  <a:srgbClr val="0D0D0D"/>
+                </a:solidFill>
+                <a:effectLst/>
+                <a:latin typeface="Söhne"/>
+              </a:rPr>
+              <a:t>, called </a:t>
+            </a:r>
+            <a:r>
+              <a:rPr lang="en-US" sz="2000" b="1" i="0" dirty="0">
+                <a:solidFill>
+                  <a:schemeClr val="accent2">
+                    <a:lumMod val="75000"/>
+                  </a:schemeClr>
+                </a:solidFill>
+                <a:effectLst/>
+                <a:latin typeface="Söhne"/>
+              </a:rPr>
+              <a:t>neurons</a:t>
+            </a:r>
+            <a:r>
+              <a:rPr lang="en-US" sz="2000" b="0" i="0" dirty="0">
+                <a:solidFill>
+                  <a:srgbClr val="0D0D0D"/>
+                </a:solidFill>
+                <a:effectLst/>
+                <a:latin typeface="Söhne"/>
+              </a:rPr>
+              <a:t> or units, </a:t>
+            </a:r>
+            <a:r>
+              <a:rPr lang="en-US" sz="2000" b="1" i="0" dirty="0">
+                <a:solidFill>
+                  <a:schemeClr val="accent2">
+                    <a:lumMod val="75000"/>
+                  </a:schemeClr>
+                </a:solidFill>
+                <a:effectLst/>
+                <a:latin typeface="Söhne"/>
+              </a:rPr>
+              <a:t>organized</a:t>
+            </a:r>
+            <a:r>
+              <a:rPr lang="en-US" sz="2000" b="0" i="0" dirty="0">
+                <a:solidFill>
+                  <a:srgbClr val="0D0D0D"/>
+                </a:solidFill>
+                <a:effectLst/>
+                <a:latin typeface="Söhne"/>
+              </a:rPr>
+              <a:t> </a:t>
+            </a:r>
+            <a:r>
+              <a:rPr lang="en-US" sz="2000" b="1" i="0" dirty="0">
+                <a:solidFill>
+                  <a:schemeClr val="accent2">
+                    <a:lumMod val="75000"/>
+                  </a:schemeClr>
+                </a:solidFill>
+                <a:effectLst/>
+                <a:latin typeface="Söhne"/>
+              </a:rPr>
+              <a:t>in layers</a:t>
+            </a:r>
+            <a:r>
+              <a:rPr lang="en-US" sz="2000" b="0" i="0" dirty="0">
+                <a:solidFill>
+                  <a:srgbClr val="0D0D0D"/>
+                </a:solidFill>
+                <a:effectLst/>
+                <a:latin typeface="Söhne"/>
+              </a:rPr>
+              <a:t>. </a:t>
+            </a:r>
+            <a:r>
+              <a:rPr lang="en-US" sz="2000" b="1" i="0" dirty="0">
+                <a:solidFill>
+                  <a:srgbClr val="0D0D0D"/>
+                </a:solidFill>
+                <a:effectLst/>
+                <a:latin typeface="Söhne"/>
+              </a:rPr>
+              <a:t>ANN processes information in a manner similar to how the human brain operates</a:t>
+            </a:r>
+            <a:r>
+              <a:rPr lang="en-US" sz="2000" b="0" i="0" dirty="0">
+                <a:solidFill>
+                  <a:srgbClr val="0D0D0D"/>
+                </a:solidFill>
+                <a:effectLst/>
+                <a:latin typeface="Söhne"/>
+              </a:rPr>
+              <a:t>, enabling it to learn from data and make predictions or decisions.</a:t>
+            </a:r>
+            <a:endParaRPr lang="en-US" sz="2000" b="1" dirty="0"/>
+          </a:p>
+          <a:p>
+            <a:r>
+              <a:rPr lang="en-US" sz="2000" b="1" dirty="0">
+                <a:solidFill>
+                  <a:schemeClr val="accent2">
+                    <a:lumMod val="75000"/>
+                  </a:schemeClr>
+                </a:solidFill>
+                <a:latin typeface="Söhne"/>
+              </a:rPr>
+              <a:t>K</a:t>
+            </a:r>
+            <a:r>
+              <a:rPr lang="en-US" sz="2000" b="1" i="0" dirty="0">
+                <a:solidFill>
+                  <a:schemeClr val="accent2">
+                    <a:lumMod val="75000"/>
+                  </a:schemeClr>
+                </a:solidFill>
+                <a:effectLst/>
+                <a:latin typeface="Söhne"/>
+              </a:rPr>
+              <a:t>ey components and concepts of an ANN:</a:t>
+            </a:r>
+          </a:p>
+          <a:p>
+            <a:pPr marL="342900" indent="-342900">
+              <a:buAutoNum type="arabicPeriod"/>
             </a:pPr>
-            <a:endParaRPr lang="en-IN" sz="2400" dirty="0"/>
+            <a:r>
+              <a:rPr lang="en-US" sz="2000" b="1" i="0" dirty="0">
+                <a:solidFill>
+                  <a:srgbClr val="0D0D0D"/>
+                </a:solidFill>
+                <a:effectLst/>
+                <a:latin typeface="Söhne"/>
+              </a:rPr>
+              <a:t>Neurons (Nodes)</a:t>
+            </a:r>
+            <a:endParaRPr lang="en-US" sz="2000" dirty="0">
+              <a:solidFill>
+                <a:srgbClr val="0D0D0D"/>
+              </a:solidFill>
+              <a:latin typeface="Söhne"/>
+            </a:endParaRPr>
+          </a:p>
+          <a:p>
+            <a:pPr marL="342900" indent="-342900">
+              <a:buAutoNum type="arabicPeriod"/>
+            </a:pPr>
+            <a:r>
+              <a:rPr lang="en-US" sz="2000" b="1" i="0" dirty="0">
+                <a:solidFill>
+                  <a:srgbClr val="0D0D0D"/>
+                </a:solidFill>
+                <a:effectLst/>
+                <a:latin typeface="Söhne"/>
+              </a:rPr>
+              <a:t>Connections (Edges)</a:t>
+            </a:r>
+          </a:p>
+          <a:p>
+            <a:pPr marL="342900" indent="-342900">
+              <a:buAutoNum type="arabicPeriod"/>
+            </a:pPr>
+            <a:r>
+              <a:rPr lang="en-US" sz="2000" b="1" i="0" dirty="0">
+                <a:solidFill>
+                  <a:srgbClr val="0D0D0D"/>
+                </a:solidFill>
+                <a:effectLst/>
+                <a:latin typeface="Söhne"/>
+              </a:rPr>
+              <a:t>Layers</a:t>
+            </a:r>
+            <a:endParaRPr lang="en-US" sz="2000" b="1" dirty="0"/>
+          </a:p>
+          <a:p>
+            <a:endParaRPr lang="en-US" b="1" dirty="0"/>
           </a:p>
         </p:txBody>
       </p:sp>
     </p:spTree>
     <p:extLst>
       <p:ext uri="{BB962C8B-B14F-4D97-AF65-F5344CB8AC3E}">
-        <p14:creationId xmlns:p14="http://schemas.microsoft.com/office/powerpoint/2010/main" val="3327637455"/>
+        <p14:creationId xmlns:p14="http://schemas.microsoft.com/office/powerpoint/2010/main" val="4165281687"/>
       </p:ext>
     </p:extLst>
   </p:cSld>
@@ -24788,10 +26850,1262 @@
   <p:cSld>
     <p:spTree>
       <p:nvGrpSpPr>
+        <p:cNvPr id="1" name=""/>
+        <p:cNvGrpSpPr/>
+        <p:nvPr/>
+      </p:nvGrpSpPr>
+      <p:grpSpPr>
+        <a:xfrm>
+          <a:off x="0" y="0"/>
+          <a:ext cx="0" cy="0"/>
+          <a:chOff x="0" y="0"/>
+          <a:chExt cx="0" cy="0"/>
+        </a:xfrm>
+      </p:grpSpPr>
+      <p:sp>
+        <p:nvSpPr>
+          <p:cNvPr id="5" name="TextBox 4">
+            <a:extLst>
+              <a:ext uri="{FF2B5EF4-FFF2-40B4-BE49-F238E27FC236}">
+                <a16:creationId xmlns:a16="http://schemas.microsoft.com/office/drawing/2014/main" id="{2EC9881C-5094-27FE-FD19-C65563BDE454}"/>
+              </a:ext>
+            </a:extLst>
+          </p:cNvPr>
+          <p:cNvSpPr txBox="1"/>
+          <p:nvPr/>
+        </p:nvSpPr>
+        <p:spPr>
+          <a:xfrm>
+            <a:off x="439392" y="166568"/>
+            <a:ext cx="11313215" cy="6524863"/>
+          </a:xfrm>
+          <a:prstGeom prst="rect">
+            <a:avLst/>
+          </a:prstGeom>
+          <a:noFill/>
+        </p:spPr>
+        <p:txBody>
+          <a:bodyPr wrap="square">
+            <a:spAutoFit/>
+          </a:bodyPr>
+          <a:lstStyle/>
+          <a:p>
+            <a:r>
+              <a:rPr lang="en-US" sz="2400" b="1" dirty="0">
+                <a:solidFill>
+                  <a:srgbClr val="C00000"/>
+                </a:solidFill>
+              </a:rPr>
+              <a:t>Artificial Neural Networks: ANN</a:t>
+            </a:r>
+          </a:p>
+          <a:p>
+            <a:r>
+              <a:rPr lang="en-US" sz="2400" dirty="0"/>
+              <a:t>The human brain works like a </a:t>
+            </a:r>
+            <a:r>
+              <a:rPr lang="en-US" sz="2400" b="1" dirty="0">
+                <a:solidFill>
+                  <a:srgbClr val="C00000"/>
+                </a:solidFill>
+              </a:rPr>
+              <a:t>supercomputer</a:t>
+            </a:r>
+            <a:r>
+              <a:rPr lang="en-US" sz="2400" dirty="0"/>
+              <a:t>, allowing us to </a:t>
+            </a:r>
+            <a:r>
+              <a:rPr lang="en-US" sz="2400" b="1" dirty="0"/>
+              <a:t>make quick decisions and perform complex actions</a:t>
+            </a:r>
+            <a:r>
+              <a:rPr lang="en-US" sz="2400" dirty="0"/>
+              <a:t>. </a:t>
+            </a:r>
+            <a:r>
+              <a:rPr lang="en-US" sz="2400" b="1" dirty="0"/>
+              <a:t>For example, </a:t>
+            </a:r>
+            <a:r>
+              <a:rPr lang="en-US" sz="2400" dirty="0"/>
+              <a:t>think about a </a:t>
+            </a:r>
+            <a:r>
+              <a:rPr lang="en-US" sz="2400" b="1" dirty="0">
+                <a:solidFill>
+                  <a:srgbClr val="C00000"/>
+                </a:solidFill>
+              </a:rPr>
+              <a:t>cricket fielder </a:t>
+            </a:r>
+            <a:r>
+              <a:rPr lang="en-US" sz="2400" dirty="0"/>
+              <a:t>making a great catch. They have to calculate where the ball will land, how fast it's moving, and then decide when and where to jump to catch it. This requires a lot of </a:t>
+            </a:r>
+            <a:r>
+              <a:rPr lang="en-US" sz="2400" b="1" dirty="0"/>
+              <a:t>skill</a:t>
+            </a:r>
+            <a:r>
+              <a:rPr lang="en-US" sz="2400" dirty="0"/>
+              <a:t> and </a:t>
+            </a:r>
+            <a:r>
+              <a:rPr lang="en-US" sz="2400" b="1" dirty="0"/>
+              <a:t>quick</a:t>
+            </a:r>
+            <a:r>
+              <a:rPr lang="en-US" sz="2400" dirty="0"/>
+              <a:t> </a:t>
+            </a:r>
+            <a:r>
+              <a:rPr lang="en-US" sz="2400" b="1" dirty="0"/>
+              <a:t>thinking</a:t>
+            </a:r>
+            <a:r>
+              <a:rPr lang="en-US" sz="2400" dirty="0"/>
+              <a:t>.</a:t>
+            </a:r>
+          </a:p>
+          <a:p>
+            <a:endParaRPr lang="en-US" sz="2000" dirty="0"/>
+          </a:p>
+          <a:p>
+            <a:r>
+              <a:rPr lang="en-US" sz="2400" dirty="0"/>
+              <a:t>Even simpler tasks, like </a:t>
+            </a:r>
+            <a:r>
+              <a:rPr lang="en-US" sz="2400" b="1" dirty="0"/>
+              <a:t>swimming</a:t>
+            </a:r>
+            <a:r>
+              <a:rPr lang="en-US" sz="2400" dirty="0"/>
+              <a:t> in a pool, require a lot of coordination and decision-making. Your brain has to figure out the right body movements and breathing techniques to swim effectively, especially since water is much denser than air. Despite these challenges, our brains are able to handle these tasks </a:t>
+            </a:r>
+            <a:r>
+              <a:rPr lang="en-US" sz="2400" b="1" dirty="0">
+                <a:solidFill>
+                  <a:srgbClr val="C00000"/>
+                </a:solidFill>
+              </a:rPr>
+              <a:t>because of their complex network of neurons</a:t>
+            </a:r>
+            <a:r>
+              <a:rPr lang="en-US" sz="2400" dirty="0"/>
+              <a:t>, which allow us to process information and make decisions quickly.</a:t>
+            </a:r>
+          </a:p>
+          <a:p>
+            <a:endParaRPr lang="en-US" sz="2000" dirty="0"/>
+          </a:p>
+          <a:p>
+            <a:r>
+              <a:rPr lang="en-US" sz="2400" dirty="0"/>
+              <a:t>This amazing </a:t>
+            </a:r>
+            <a:r>
+              <a:rPr lang="en-US" sz="2400" b="1" dirty="0"/>
+              <a:t>ability of our brains</a:t>
+            </a:r>
+            <a:r>
+              <a:rPr lang="en-US" sz="2400" dirty="0"/>
+              <a:t> has inspired the </a:t>
+            </a:r>
+            <a:r>
+              <a:rPr lang="en-US" sz="2400" b="1" dirty="0">
+                <a:solidFill>
+                  <a:srgbClr val="C00000"/>
+                </a:solidFill>
+              </a:rPr>
+              <a:t>creation</a:t>
+            </a:r>
+            <a:r>
+              <a:rPr lang="en-US" sz="2400" dirty="0"/>
+              <a:t> of </a:t>
+            </a:r>
+            <a:r>
+              <a:rPr lang="en-US" sz="2400" b="1" dirty="0"/>
+              <a:t>Artificial Neural Networks (ANN). </a:t>
+            </a:r>
+            <a:r>
+              <a:rPr lang="en-US" sz="2400" dirty="0"/>
+              <a:t>These are like </a:t>
+            </a:r>
+            <a:r>
+              <a:rPr lang="en-US" sz="2400" b="1" dirty="0">
+                <a:solidFill>
+                  <a:srgbClr val="C00000"/>
+                </a:solidFill>
+              </a:rPr>
+              <a:t>computer models of the brain</a:t>
+            </a:r>
+            <a:r>
+              <a:rPr lang="en-US" sz="2400" dirty="0"/>
+              <a:t>, made up of </a:t>
+            </a:r>
+            <a:r>
+              <a:rPr lang="en-US" sz="2400" b="1" dirty="0"/>
+              <a:t>artificial neurons</a:t>
+            </a:r>
+            <a:r>
+              <a:rPr lang="en-US" sz="2400" dirty="0"/>
+              <a:t>. </a:t>
+            </a:r>
+            <a:r>
+              <a:rPr lang="en-US" sz="2400" b="1" dirty="0">
+                <a:solidFill>
+                  <a:srgbClr val="C00000"/>
+                </a:solidFill>
+              </a:rPr>
+              <a:t>They're designed to mimic how our brains work, </a:t>
+            </a:r>
+            <a:r>
+              <a:rPr lang="en-US" sz="2400" dirty="0"/>
+              <a:t>using </a:t>
+            </a:r>
+            <a:r>
+              <a:rPr lang="en-US" sz="2400" b="1" dirty="0">
+                <a:solidFill>
+                  <a:srgbClr val="C00000"/>
+                </a:solidFill>
+              </a:rPr>
+              <a:t>digital versions </a:t>
+            </a:r>
+            <a:r>
+              <a:rPr lang="en-US" sz="2400" dirty="0"/>
+              <a:t>of neurons to process information and make decisions. These artificial neurons are the basic building blocks of artificial neural networks.</a:t>
+            </a:r>
+          </a:p>
+          <a:p>
+            <a:endParaRPr lang="en-US" dirty="0"/>
+          </a:p>
+        </p:txBody>
+      </p:sp>
+    </p:spTree>
+    <p:extLst>
+      <p:ext uri="{BB962C8B-B14F-4D97-AF65-F5344CB8AC3E}">
+        <p14:creationId xmlns:p14="http://schemas.microsoft.com/office/powerpoint/2010/main" val="66431523"/>
+      </p:ext>
+    </p:extLst>
+  </p:cSld>
+  <p:clrMapOvr>
+    <a:masterClrMapping/>
+  </p:clrMapOvr>
+</p:sld>
+</file>
+
+<file path=ppt/slides/slide61.xml><?xml version="1.0" encoding="utf-8"?>
+<p:sld xmlns:a="http://schemas.openxmlformats.org/drawingml/2006/main" xmlns:r="http://schemas.openxmlformats.org/officeDocument/2006/relationships" xmlns:p="http://schemas.openxmlformats.org/presentationml/2006/main">
+  <p:cSld>
+    <p:spTree>
+      <p:nvGrpSpPr>
         <p:cNvPr id="1" name="">
           <a:extLst>
             <a:ext uri="{FF2B5EF4-FFF2-40B4-BE49-F238E27FC236}">
-              <a16:creationId xmlns:a16="http://schemas.microsoft.com/office/drawing/2014/main" id="{5190DFA2-8928-15AD-FE4B-D1A8C0A04113}"/>
+              <a16:creationId xmlns:a16="http://schemas.microsoft.com/office/drawing/2014/main" id="{08DA9DE3-862F-C78F-7801-E466CCF4733A}"/>
+            </a:ext>
+          </a:extLst>
+        </p:cNvPr>
+        <p:cNvGrpSpPr/>
+        <p:nvPr/>
+      </p:nvGrpSpPr>
+      <p:grpSpPr>
+        <a:xfrm>
+          <a:off x="0" y="0"/>
+          <a:ext cx="0" cy="0"/>
+          <a:chOff x="0" y="0"/>
+          <a:chExt cx="0" cy="0"/>
+        </a:xfrm>
+      </p:grpSpPr>
+      <p:pic>
+        <p:nvPicPr>
+          <p:cNvPr id="6" name="Picture 5">
+            <a:extLst>
+              <a:ext uri="{FF2B5EF4-FFF2-40B4-BE49-F238E27FC236}">
+                <a16:creationId xmlns:a16="http://schemas.microsoft.com/office/drawing/2014/main" id="{2794075A-58A0-298F-9FB6-910BBB3E56A1}"/>
+              </a:ext>
+            </a:extLst>
+          </p:cNvPr>
+          <p:cNvPicPr>
+            <a:picLocks noChangeAspect="1"/>
+          </p:cNvPicPr>
+          <p:nvPr/>
+        </p:nvPicPr>
+        <p:blipFill rotWithShape="1">
+          <a:blip r:embed="rId2">
+            <a:extLst>
+              <a:ext uri="{28A0092B-C50C-407E-A947-70E740481C1C}">
+                <a14:useLocalDpi xmlns:a14="http://schemas.microsoft.com/office/drawing/2010/main" val="0"/>
+              </a:ext>
+            </a:extLst>
+          </a:blip>
+          <a:srcRect t="3599" b="3599"/>
+          <a:stretch/>
+        </p:blipFill>
+        <p:spPr>
+          <a:xfrm>
+            <a:off x="1517817" y="2165508"/>
+            <a:ext cx="8878069" cy="4412975"/>
+          </a:xfrm>
+          <a:prstGeom prst="rect">
+            <a:avLst/>
+          </a:prstGeom>
+        </p:spPr>
+      </p:pic>
+      <p:sp>
+        <p:nvSpPr>
+          <p:cNvPr id="3" name="TextBox 2">
+            <a:extLst>
+              <a:ext uri="{FF2B5EF4-FFF2-40B4-BE49-F238E27FC236}">
+                <a16:creationId xmlns:a16="http://schemas.microsoft.com/office/drawing/2014/main" id="{24475C9C-CD67-A08C-A843-2413F03B96F0}"/>
+              </a:ext>
+            </a:extLst>
+          </p:cNvPr>
+          <p:cNvSpPr txBox="1"/>
+          <p:nvPr/>
+        </p:nvSpPr>
+        <p:spPr>
+          <a:xfrm>
+            <a:off x="702779" y="279517"/>
+            <a:ext cx="10786442" cy="3046988"/>
+          </a:xfrm>
+          <a:prstGeom prst="rect">
+            <a:avLst/>
+          </a:prstGeom>
+          <a:noFill/>
+        </p:spPr>
+        <p:txBody>
+          <a:bodyPr wrap="square">
+            <a:spAutoFit/>
+          </a:bodyPr>
+          <a:lstStyle/>
+          <a:p>
+            <a:r>
+              <a:rPr lang="en-US" sz="2400" b="1" dirty="0"/>
+              <a:t>NEURAL NETWORKS:</a:t>
+            </a:r>
+          </a:p>
+          <a:p>
+            <a:r>
+              <a:rPr lang="en-US" sz="2400" dirty="0"/>
+              <a:t>Neural Networks form the </a:t>
+            </a:r>
+            <a:r>
+              <a:rPr lang="en-US" sz="2400" b="1" dirty="0">
+                <a:solidFill>
+                  <a:srgbClr val="C00000"/>
+                </a:solidFill>
+              </a:rPr>
+              <a:t>base of Deep Learning</a:t>
+            </a:r>
+            <a:r>
+              <a:rPr lang="en-US" sz="2400" dirty="0"/>
+              <a:t>, Which is a sub-field of ML where the Algorithms are inspired by the structure of the </a:t>
+            </a:r>
+            <a:r>
+              <a:rPr lang="en-US" sz="2400" b="1" dirty="0">
+                <a:solidFill>
+                  <a:srgbClr val="C00000"/>
+                </a:solidFill>
+              </a:rPr>
+              <a:t>Human Brain</a:t>
+            </a:r>
+            <a:r>
+              <a:rPr lang="en-US" sz="2400" dirty="0"/>
+              <a:t>. </a:t>
+            </a:r>
+            <a:br>
+              <a:rPr lang="en-US" sz="2400" dirty="0"/>
+            </a:br>
+            <a:r>
+              <a:rPr lang="en-US" sz="2400" dirty="0"/>
+              <a:t>	Neural Networks </a:t>
+            </a:r>
+            <a:r>
+              <a:rPr lang="en-US" sz="2400" b="1" dirty="0">
+                <a:solidFill>
+                  <a:srgbClr val="C00000"/>
+                </a:solidFill>
+              </a:rPr>
+              <a:t>take in data </a:t>
+            </a:r>
+            <a:r>
+              <a:rPr lang="en-US" sz="2400" dirty="0"/>
+              <a:t>and </a:t>
+            </a:r>
+            <a:r>
+              <a:rPr lang="en-US" sz="2400" b="1" dirty="0"/>
+              <a:t>train themselves </a:t>
+            </a:r>
+            <a:r>
+              <a:rPr lang="en-US" sz="2400" dirty="0"/>
+              <a:t>to </a:t>
+            </a:r>
+            <a:r>
+              <a:rPr lang="en-US" sz="2400" b="1" dirty="0">
+                <a:solidFill>
+                  <a:srgbClr val="C00000"/>
+                </a:solidFill>
+              </a:rPr>
+              <a:t>recognize  the  patterns in this data</a:t>
+            </a:r>
+            <a:r>
+              <a:rPr lang="en-US" sz="2400" dirty="0"/>
+              <a:t> and then  </a:t>
+            </a:r>
+            <a:r>
+              <a:rPr lang="en-US" sz="2400" b="1" dirty="0">
+                <a:solidFill>
+                  <a:srgbClr val="C00000"/>
+                </a:solidFill>
+              </a:rPr>
+              <a:t>predicts  the output </a:t>
+            </a:r>
+            <a:r>
+              <a:rPr lang="en-US" sz="2400" dirty="0"/>
+              <a:t>for new set of </a:t>
+            </a:r>
+            <a:r>
+              <a:rPr lang="en-US" sz="2400" b="1" dirty="0">
+                <a:solidFill>
+                  <a:schemeClr val="accent6"/>
+                </a:solidFill>
+              </a:rPr>
+              <a:t>similar data </a:t>
+            </a:r>
+            <a:r>
+              <a:rPr lang="en-US" sz="2400" dirty="0"/>
+              <a:t>or </a:t>
+            </a:r>
+            <a:r>
+              <a:rPr lang="en-US" sz="2400" b="1" dirty="0">
+                <a:solidFill>
+                  <a:schemeClr val="accent6"/>
+                </a:solidFill>
+              </a:rPr>
+              <a:t>unseen data</a:t>
+            </a:r>
+            <a:r>
+              <a:rPr lang="en-US" sz="2400" dirty="0"/>
+              <a:t>. </a:t>
+            </a:r>
+          </a:p>
+          <a:p>
+            <a:endParaRPr lang="en-US" sz="2400" dirty="0"/>
+          </a:p>
+          <a:p>
+            <a:endParaRPr lang="en-US" sz="2400" dirty="0"/>
+          </a:p>
+        </p:txBody>
+      </p:sp>
+    </p:spTree>
+    <p:extLst>
+      <p:ext uri="{BB962C8B-B14F-4D97-AF65-F5344CB8AC3E}">
+        <p14:creationId xmlns:p14="http://schemas.microsoft.com/office/powerpoint/2010/main" val="628554678"/>
+      </p:ext>
+    </p:extLst>
+  </p:cSld>
+  <p:clrMapOvr>
+    <a:masterClrMapping/>
+  </p:clrMapOvr>
+</p:sld>
+</file>
+
+<file path=ppt/slides/slide62.xml><?xml version="1.0" encoding="utf-8"?>
+<p:sld xmlns:a="http://schemas.openxmlformats.org/drawingml/2006/main" xmlns:r="http://schemas.openxmlformats.org/officeDocument/2006/relationships" xmlns:p="http://schemas.openxmlformats.org/presentationml/2006/main">
+  <p:cSld>
+    <p:spTree>
+      <p:nvGrpSpPr>
+        <p:cNvPr id="1" name="">
+          <a:extLst>
+            <a:ext uri="{FF2B5EF4-FFF2-40B4-BE49-F238E27FC236}">
+              <a16:creationId xmlns:a16="http://schemas.microsoft.com/office/drawing/2014/main" id="{C844B1F7-3901-3079-465E-FDB98B039E38}"/>
+            </a:ext>
+          </a:extLst>
+        </p:cNvPr>
+        <p:cNvGrpSpPr/>
+        <p:nvPr/>
+      </p:nvGrpSpPr>
+      <p:grpSpPr>
+        <a:xfrm>
+          <a:off x="0" y="0"/>
+          <a:ext cx="0" cy="0"/>
+          <a:chOff x="0" y="0"/>
+          <a:chExt cx="0" cy="0"/>
+        </a:xfrm>
+      </p:grpSpPr>
+      <p:sp>
+        <p:nvSpPr>
+          <p:cNvPr id="3" name="TextBox 2">
+            <a:extLst>
+              <a:ext uri="{FF2B5EF4-FFF2-40B4-BE49-F238E27FC236}">
+                <a16:creationId xmlns:a16="http://schemas.microsoft.com/office/drawing/2014/main" id="{9F0895CA-7C46-22AD-E00F-C5B38FA3960D}"/>
+              </a:ext>
+            </a:extLst>
+          </p:cNvPr>
+          <p:cNvSpPr txBox="1"/>
+          <p:nvPr/>
+        </p:nvSpPr>
+        <p:spPr>
+          <a:xfrm>
+            <a:off x="702906" y="474345"/>
+            <a:ext cx="10786188" cy="5909310"/>
+          </a:xfrm>
+          <a:prstGeom prst="rect">
+            <a:avLst/>
+          </a:prstGeom>
+          <a:noFill/>
+        </p:spPr>
+        <p:txBody>
+          <a:bodyPr wrap="square">
+            <a:spAutoFit/>
+          </a:bodyPr>
+          <a:lstStyle/>
+          <a:p>
+            <a:pPr marL="342900" indent="-342900" algn="l">
+              <a:buAutoNum type="arabicPeriod"/>
+            </a:pPr>
+            <a:r>
+              <a:rPr lang="en-US" sz="2200" b="1" i="0" dirty="0">
+                <a:solidFill>
+                  <a:srgbClr val="0D0D0D"/>
+                </a:solidFill>
+                <a:effectLst/>
+                <a:latin typeface="Söhne"/>
+              </a:rPr>
+              <a:t>Neurons (Nodes):</a:t>
+            </a:r>
+            <a:r>
+              <a:rPr lang="en-US" sz="2200" b="0" i="0" dirty="0">
+                <a:solidFill>
+                  <a:srgbClr val="0D0D0D"/>
+                </a:solidFill>
+                <a:effectLst/>
+                <a:latin typeface="Söhne"/>
+              </a:rPr>
+              <a:t> </a:t>
+            </a:r>
+          </a:p>
+          <a:p>
+            <a:pPr lvl="1"/>
+            <a:r>
+              <a:rPr lang="en-US" sz="2200" dirty="0">
+                <a:solidFill>
+                  <a:srgbClr val="0D0D0D"/>
+                </a:solidFill>
+                <a:latin typeface="Söhne"/>
+              </a:rPr>
+              <a:t>	</a:t>
+            </a:r>
+            <a:r>
+              <a:rPr lang="en-US" sz="2200" b="0" i="0" dirty="0">
+                <a:solidFill>
+                  <a:srgbClr val="0D0D0D"/>
+                </a:solidFill>
+                <a:effectLst/>
+                <a:latin typeface="Söhne"/>
+              </a:rPr>
+              <a:t>Neurons are the </a:t>
+            </a:r>
+            <a:r>
+              <a:rPr lang="en-US" sz="2200" b="1" i="0" dirty="0">
+                <a:solidFill>
+                  <a:srgbClr val="00B050"/>
+                </a:solidFill>
+                <a:effectLst/>
+                <a:latin typeface="Söhne"/>
+              </a:rPr>
+              <a:t>basic computational </a:t>
+            </a:r>
+            <a:r>
+              <a:rPr lang="en-US" sz="2200" b="0" i="0" dirty="0">
+                <a:solidFill>
+                  <a:srgbClr val="0D0D0D"/>
+                </a:solidFill>
+                <a:effectLst/>
+                <a:latin typeface="Söhne"/>
+              </a:rPr>
+              <a:t>units of a neural network. Each neuron </a:t>
+            </a:r>
+            <a:r>
+              <a:rPr lang="en-US" sz="2200" b="1" i="0" dirty="0">
+                <a:solidFill>
+                  <a:srgbClr val="C00000"/>
+                </a:solidFill>
+                <a:effectLst/>
+                <a:latin typeface="Söhne"/>
+              </a:rPr>
+              <a:t>receives input signals from other neurons or external sources</a:t>
+            </a:r>
+            <a:r>
+              <a:rPr lang="en-US" sz="2200" b="0" i="0" dirty="0">
+                <a:solidFill>
+                  <a:srgbClr val="0D0D0D"/>
+                </a:solidFill>
+                <a:effectLst/>
+                <a:latin typeface="Söhne"/>
+              </a:rPr>
+              <a:t>, </a:t>
+            </a:r>
+            <a:r>
+              <a:rPr lang="en-US" sz="2200" b="1" i="0" dirty="0">
+                <a:solidFill>
+                  <a:schemeClr val="accent1"/>
+                </a:solidFill>
+                <a:effectLst/>
+                <a:latin typeface="Söhne"/>
+              </a:rPr>
+              <a:t>processes them</a:t>
+            </a:r>
+            <a:r>
+              <a:rPr lang="en-US" sz="2200" b="0" i="0" dirty="0">
+                <a:solidFill>
+                  <a:srgbClr val="0D0D0D"/>
+                </a:solidFill>
+                <a:effectLst/>
+                <a:latin typeface="Söhne"/>
+              </a:rPr>
+              <a:t>, and </a:t>
+            </a:r>
+            <a:r>
+              <a:rPr lang="en-US" sz="2200" b="1" i="0" dirty="0">
+                <a:solidFill>
+                  <a:srgbClr val="00B0F0"/>
+                </a:solidFill>
+                <a:effectLst/>
+                <a:latin typeface="Söhne"/>
+              </a:rPr>
+              <a:t>produces an output signal. 	</a:t>
+            </a:r>
+            <a:r>
+              <a:rPr lang="en-US" sz="2200" b="0" i="0" dirty="0">
+                <a:solidFill>
+                  <a:srgbClr val="0D0D0D"/>
+                </a:solidFill>
+                <a:effectLst/>
+                <a:latin typeface="Söhne"/>
+              </a:rPr>
+              <a:t>In artificial neural networks, </a:t>
+            </a:r>
+            <a:r>
+              <a:rPr lang="en-US" sz="2200" b="1" i="0" dirty="0">
+                <a:solidFill>
+                  <a:srgbClr val="0D0D0D"/>
+                </a:solidFill>
+                <a:effectLst/>
+                <a:latin typeface="Söhne"/>
+              </a:rPr>
+              <a:t>neurons are typically organized into layers: </a:t>
+            </a:r>
+            <a:r>
+              <a:rPr lang="en-US" sz="2200" b="1" i="0" dirty="0">
+                <a:solidFill>
+                  <a:srgbClr val="C00000"/>
+                </a:solidFill>
+                <a:effectLst/>
+                <a:latin typeface="Söhne"/>
+              </a:rPr>
+              <a:t>input layer, hidden layers (if any), and output layer.</a:t>
+            </a:r>
+          </a:p>
+          <a:p>
+            <a:pPr marL="342900" indent="-342900" algn="l">
+              <a:buAutoNum type="arabicPeriod"/>
+            </a:pPr>
+            <a:endParaRPr lang="en-US" sz="1400" b="0" i="0" dirty="0">
+              <a:solidFill>
+                <a:srgbClr val="0D0D0D"/>
+              </a:solidFill>
+              <a:effectLst/>
+              <a:latin typeface="Söhne"/>
+            </a:endParaRPr>
+          </a:p>
+          <a:p>
+            <a:pPr marL="342900" indent="-342900">
+              <a:buFontTx/>
+              <a:buAutoNum type="arabicPeriod"/>
+            </a:pPr>
+            <a:r>
+              <a:rPr lang="en-US" sz="2200" b="1" i="0" dirty="0">
+                <a:solidFill>
+                  <a:srgbClr val="0D0D0D"/>
+                </a:solidFill>
+                <a:effectLst/>
+                <a:latin typeface="Söhne"/>
+              </a:rPr>
+              <a:t>Connections (Edges):</a:t>
+            </a:r>
+            <a:r>
+              <a:rPr lang="en-US" sz="2200" b="0" i="0" dirty="0">
+                <a:solidFill>
+                  <a:srgbClr val="0D0D0D"/>
+                </a:solidFill>
+                <a:effectLst/>
+                <a:latin typeface="Söhne"/>
+              </a:rPr>
+              <a:t> </a:t>
+            </a:r>
+          </a:p>
+          <a:p>
+            <a:pPr lvl="1"/>
+            <a:r>
+              <a:rPr lang="en-US" sz="2200" dirty="0">
+                <a:solidFill>
+                  <a:srgbClr val="0D0D0D"/>
+                </a:solidFill>
+                <a:latin typeface="Söhne"/>
+              </a:rPr>
+              <a:t>	</a:t>
+            </a:r>
+            <a:r>
+              <a:rPr lang="en-US" sz="2200" b="0" i="0" dirty="0">
+                <a:solidFill>
+                  <a:srgbClr val="0D0D0D"/>
+                </a:solidFill>
+                <a:effectLst/>
+                <a:latin typeface="Söhne"/>
+              </a:rPr>
+              <a:t>Connections represent the </a:t>
+            </a:r>
+            <a:r>
+              <a:rPr lang="en-US" sz="2200" b="1" i="0" dirty="0">
+                <a:solidFill>
+                  <a:srgbClr val="00B050"/>
+                </a:solidFill>
+                <a:effectLst/>
+                <a:latin typeface="Söhne"/>
+              </a:rPr>
+              <a:t>flow of information between neurons in different layers</a:t>
+            </a:r>
+            <a:r>
+              <a:rPr lang="en-US" sz="2200" b="0" i="0" dirty="0">
+                <a:solidFill>
+                  <a:srgbClr val="0D0D0D"/>
+                </a:solidFill>
+                <a:effectLst/>
+                <a:latin typeface="Söhne"/>
+              </a:rPr>
+              <a:t>. Each connection is associated with a </a:t>
+            </a:r>
+            <a:r>
+              <a:rPr lang="en-US" sz="2200" b="1" i="0" dirty="0">
+                <a:solidFill>
+                  <a:srgbClr val="0D0D0D"/>
+                </a:solidFill>
+                <a:effectLst/>
+                <a:latin typeface="Söhne"/>
+              </a:rPr>
+              <a:t>weight</a:t>
+            </a:r>
+            <a:r>
+              <a:rPr lang="en-US" sz="2200" b="0" i="0" dirty="0">
+                <a:solidFill>
+                  <a:srgbClr val="0D0D0D"/>
+                </a:solidFill>
+                <a:effectLst/>
+                <a:latin typeface="Söhne"/>
+              </a:rPr>
+              <a:t> that </a:t>
+            </a:r>
+            <a:r>
+              <a:rPr lang="en-US" sz="2200" b="1" i="0" dirty="0">
+                <a:solidFill>
+                  <a:srgbClr val="C00000"/>
+                </a:solidFill>
+                <a:effectLst/>
+                <a:latin typeface="Söhne"/>
+              </a:rPr>
+              <a:t>determines the strength of the connection</a:t>
+            </a:r>
+            <a:r>
+              <a:rPr lang="en-US" sz="2200" b="0" i="0" dirty="0">
+                <a:solidFill>
+                  <a:srgbClr val="0D0D0D"/>
+                </a:solidFill>
+                <a:effectLst/>
+                <a:latin typeface="Söhne"/>
+              </a:rPr>
+              <a:t>. These </a:t>
+            </a:r>
+            <a:r>
+              <a:rPr lang="en-US" sz="2200" b="1" i="0" dirty="0">
+                <a:solidFill>
+                  <a:srgbClr val="0D0D0D"/>
+                </a:solidFill>
+                <a:effectLst/>
+                <a:latin typeface="Söhne"/>
+              </a:rPr>
+              <a:t>weights are </a:t>
+            </a:r>
+            <a:r>
+              <a:rPr lang="en-US" sz="2200" b="1" i="0" dirty="0">
+                <a:solidFill>
+                  <a:srgbClr val="C00000"/>
+                </a:solidFill>
+                <a:effectLst/>
+                <a:latin typeface="Söhne"/>
+              </a:rPr>
+              <a:t>adjusted during the learning process </a:t>
+            </a:r>
+            <a:r>
+              <a:rPr lang="en-US" sz="2200" b="1" i="0" dirty="0">
+                <a:solidFill>
+                  <a:srgbClr val="0D0D0D"/>
+                </a:solidFill>
+                <a:effectLst/>
+                <a:latin typeface="Söhne"/>
+              </a:rPr>
+              <a:t>t</a:t>
+            </a:r>
+            <a:r>
+              <a:rPr lang="en-US" sz="2200" b="0" i="0" dirty="0">
+                <a:solidFill>
+                  <a:srgbClr val="0D0D0D"/>
+                </a:solidFill>
+                <a:effectLst/>
+                <a:latin typeface="Söhne"/>
+              </a:rPr>
+              <a:t>o optimize the network's performance.</a:t>
+            </a:r>
+            <a:endParaRPr lang="en-US" sz="2200" dirty="0">
+              <a:solidFill>
+                <a:srgbClr val="0D0D0D"/>
+              </a:solidFill>
+              <a:latin typeface="Söhne"/>
+            </a:endParaRPr>
+          </a:p>
+          <a:p>
+            <a:pPr marL="342900" indent="-342900" algn="l">
+              <a:buAutoNum type="arabicPeriod"/>
+            </a:pPr>
+            <a:endParaRPr lang="en-US" sz="1200" b="0" i="0" dirty="0">
+              <a:solidFill>
+                <a:srgbClr val="0D0D0D"/>
+              </a:solidFill>
+              <a:effectLst/>
+              <a:latin typeface="Söhne"/>
+            </a:endParaRPr>
+          </a:p>
+          <a:p>
+            <a:pPr marL="342900" indent="-342900">
+              <a:buFontTx/>
+              <a:buAutoNum type="arabicPeriod"/>
+            </a:pPr>
+            <a:r>
+              <a:rPr lang="en-US" sz="2200" b="1" i="0" dirty="0">
+                <a:solidFill>
+                  <a:srgbClr val="0D0D0D"/>
+                </a:solidFill>
+                <a:effectLst/>
+                <a:latin typeface="Söhne"/>
+              </a:rPr>
+              <a:t>Layers:</a:t>
+            </a:r>
+            <a:r>
+              <a:rPr lang="en-US" sz="2200" b="0" i="0" dirty="0">
+                <a:solidFill>
+                  <a:srgbClr val="0D0D0D"/>
+                </a:solidFill>
+                <a:effectLst/>
+                <a:latin typeface="Söhne"/>
+              </a:rPr>
+              <a:t> </a:t>
+            </a:r>
+          </a:p>
+          <a:p>
+            <a:pPr lvl="1"/>
+            <a:r>
+              <a:rPr lang="en-US" sz="2200" dirty="0">
+                <a:solidFill>
+                  <a:srgbClr val="0D0D0D"/>
+                </a:solidFill>
+                <a:latin typeface="Söhne"/>
+              </a:rPr>
+              <a:t>	</a:t>
+            </a:r>
+            <a:r>
+              <a:rPr lang="en-US" sz="2200" b="0" i="0" dirty="0">
+                <a:solidFill>
+                  <a:srgbClr val="0D0D0D"/>
+                </a:solidFill>
+                <a:effectLst/>
+                <a:latin typeface="Söhne"/>
+              </a:rPr>
+              <a:t>A neural network is composed of </a:t>
+            </a:r>
+            <a:r>
+              <a:rPr lang="en-US" sz="2200" b="1" i="0" dirty="0">
+                <a:solidFill>
+                  <a:srgbClr val="C00000"/>
+                </a:solidFill>
+                <a:effectLst/>
+                <a:latin typeface="Söhne"/>
+              </a:rPr>
+              <a:t>multiple layers of neurons</a:t>
+            </a:r>
+            <a:r>
+              <a:rPr lang="en-US" sz="2200" b="0" i="0" dirty="0">
+                <a:solidFill>
+                  <a:srgbClr val="0D0D0D"/>
+                </a:solidFill>
+                <a:effectLst/>
+                <a:latin typeface="Söhne"/>
+              </a:rPr>
+              <a:t>. The </a:t>
+            </a:r>
+            <a:r>
+              <a:rPr lang="en-US" sz="2200" b="1" i="0" dirty="0">
+                <a:solidFill>
+                  <a:srgbClr val="00B0F0"/>
+                </a:solidFill>
+                <a:effectLst/>
+                <a:latin typeface="Söhne"/>
+              </a:rPr>
+              <a:t>input layer </a:t>
+            </a:r>
+            <a:r>
+              <a:rPr lang="en-US" sz="2200" b="0" i="0" dirty="0">
+                <a:solidFill>
+                  <a:srgbClr val="0D0D0D"/>
+                </a:solidFill>
+                <a:effectLst/>
+                <a:latin typeface="Söhne"/>
+              </a:rPr>
+              <a:t>receives input data, the </a:t>
+            </a:r>
+            <a:r>
+              <a:rPr lang="en-US" sz="2200" b="1" i="0" dirty="0">
+                <a:solidFill>
+                  <a:srgbClr val="00B0F0"/>
+                </a:solidFill>
+                <a:effectLst/>
+                <a:latin typeface="Söhne"/>
+              </a:rPr>
+              <a:t>output layer </a:t>
+            </a:r>
+            <a:r>
+              <a:rPr lang="en-US" sz="2200" b="0" i="0" dirty="0">
+                <a:solidFill>
+                  <a:srgbClr val="0D0D0D"/>
+                </a:solidFill>
+                <a:effectLst/>
+                <a:latin typeface="Söhne"/>
+              </a:rPr>
+              <a:t>produces the network's output, and one or more </a:t>
+            </a:r>
+            <a:r>
+              <a:rPr lang="en-US" sz="2200" b="1" i="0" dirty="0">
+                <a:solidFill>
+                  <a:srgbClr val="00B0F0"/>
+                </a:solidFill>
+                <a:effectLst/>
+                <a:latin typeface="Söhne"/>
+              </a:rPr>
+              <a:t>hidden layers </a:t>
+            </a:r>
+            <a:r>
+              <a:rPr lang="en-US" sz="2200" b="0" i="0" dirty="0">
+                <a:solidFill>
+                  <a:srgbClr val="0D0D0D"/>
+                </a:solidFill>
+                <a:effectLst/>
+                <a:latin typeface="Söhne"/>
+              </a:rPr>
+              <a:t>(if present) </a:t>
+            </a:r>
+            <a:r>
+              <a:rPr lang="en-US" sz="2200" b="1" i="0" dirty="0">
+                <a:solidFill>
+                  <a:srgbClr val="0D0D0D"/>
+                </a:solidFill>
+                <a:effectLst/>
+                <a:latin typeface="Söhne"/>
+              </a:rPr>
+              <a:t>perform intermediate computations. </a:t>
+            </a:r>
+            <a:r>
+              <a:rPr lang="en-US" sz="2200" b="0" i="0" dirty="0">
+                <a:solidFill>
+                  <a:srgbClr val="0D0D0D"/>
+                </a:solidFill>
+                <a:effectLst/>
+                <a:latin typeface="Söhne"/>
+              </a:rPr>
+              <a:t>The number of layers and the number of neurons in each layer can vary depending on the </a:t>
+            </a:r>
+            <a:r>
+              <a:rPr lang="en-US" sz="2200" b="1" i="0" dirty="0">
+                <a:solidFill>
+                  <a:srgbClr val="C00000"/>
+                </a:solidFill>
+                <a:effectLst/>
+                <a:latin typeface="Söhne"/>
+              </a:rPr>
+              <a:t>complexity of the problem </a:t>
+            </a:r>
+            <a:r>
+              <a:rPr lang="en-US" sz="2200" b="1" i="0" dirty="0">
+                <a:solidFill>
+                  <a:srgbClr val="0D0D0D"/>
+                </a:solidFill>
+                <a:effectLst/>
+                <a:latin typeface="Söhne"/>
+              </a:rPr>
+              <a:t>and </a:t>
+            </a:r>
+            <a:r>
+              <a:rPr lang="en-US" sz="2200" b="1" i="0" dirty="0">
+                <a:solidFill>
+                  <a:srgbClr val="C00000"/>
+                </a:solidFill>
+                <a:effectLst/>
+                <a:latin typeface="Söhne"/>
+              </a:rPr>
+              <a:t>the architecture of the network</a:t>
+            </a:r>
+            <a:r>
+              <a:rPr lang="en-US" sz="2200" b="1" i="0" dirty="0">
+                <a:solidFill>
+                  <a:srgbClr val="0D0D0D"/>
+                </a:solidFill>
+                <a:effectLst/>
+                <a:latin typeface="Söhne"/>
+              </a:rPr>
+              <a:t>.</a:t>
+            </a:r>
+          </a:p>
+        </p:txBody>
+      </p:sp>
+    </p:spTree>
+    <p:extLst>
+      <p:ext uri="{BB962C8B-B14F-4D97-AF65-F5344CB8AC3E}">
+        <p14:creationId xmlns:p14="http://schemas.microsoft.com/office/powerpoint/2010/main" val="2091400849"/>
+      </p:ext>
+    </p:extLst>
+  </p:cSld>
+  <p:clrMapOvr>
+    <a:masterClrMapping/>
+  </p:clrMapOvr>
+</p:sld>
+</file>
+
+<file path=ppt/slides/slide63.xml><?xml version="1.0" encoding="utf-8"?>
+<p:sld xmlns:a="http://schemas.openxmlformats.org/drawingml/2006/main" xmlns:r="http://schemas.openxmlformats.org/officeDocument/2006/relationships" xmlns:p="http://schemas.openxmlformats.org/presentationml/2006/main">
+  <p:cSld>
+    <p:spTree>
+      <p:nvGrpSpPr>
+        <p:cNvPr id="1" name=""/>
+        <p:cNvGrpSpPr/>
+        <p:nvPr/>
+      </p:nvGrpSpPr>
+      <p:grpSpPr>
+        <a:xfrm>
+          <a:off x="0" y="0"/>
+          <a:ext cx="0" cy="0"/>
+          <a:chOff x="0" y="0"/>
+          <a:chExt cx="0" cy="0"/>
+        </a:xfrm>
+      </p:grpSpPr>
+      <p:sp>
+        <p:nvSpPr>
+          <p:cNvPr id="4" name="TextBox 3">
+            <a:extLst>
+              <a:ext uri="{FF2B5EF4-FFF2-40B4-BE49-F238E27FC236}">
+                <a16:creationId xmlns:a16="http://schemas.microsoft.com/office/drawing/2014/main" id="{495198C9-6B6F-8B81-2D67-C7729E72FF6E}"/>
+              </a:ext>
+            </a:extLst>
+          </p:cNvPr>
+          <p:cNvSpPr txBox="1"/>
+          <p:nvPr/>
+        </p:nvSpPr>
+        <p:spPr>
+          <a:xfrm>
+            <a:off x="683079" y="327745"/>
+            <a:ext cx="10261730" cy="2800767"/>
+          </a:xfrm>
+          <a:prstGeom prst="rect">
+            <a:avLst/>
+          </a:prstGeom>
+          <a:noFill/>
+        </p:spPr>
+        <p:txBody>
+          <a:bodyPr wrap="square">
+            <a:spAutoFit/>
+          </a:bodyPr>
+          <a:lstStyle/>
+          <a:p>
+            <a:r>
+              <a:rPr lang="en-US" sz="2400" b="1" i="0" dirty="0">
+                <a:solidFill>
+                  <a:srgbClr val="C00000"/>
+                </a:solidFill>
+                <a:effectLst/>
+                <a:latin typeface="Söhne"/>
+              </a:rPr>
+              <a:t>Structure of an Artificial Neural Network: </a:t>
+            </a:r>
+            <a:r>
+              <a:rPr lang="en-US" sz="2400" b="1" dirty="0">
+                <a:solidFill>
+                  <a:srgbClr val="00B050"/>
+                </a:solidFill>
+              </a:rPr>
+              <a:t>is a Network of Neurons</a:t>
+            </a:r>
+            <a:endParaRPr lang="en-US" sz="2400" b="1" i="0" dirty="0">
+              <a:solidFill>
+                <a:srgbClr val="C00000"/>
+              </a:solidFill>
+              <a:effectLst/>
+              <a:latin typeface="Söhne"/>
+            </a:endParaRPr>
+          </a:p>
+          <a:p>
+            <a:r>
+              <a:rPr lang="en-US" dirty="0">
+                <a:solidFill>
+                  <a:srgbClr val="0D0D0D"/>
+                </a:solidFill>
+                <a:latin typeface="Söhne"/>
+              </a:rPr>
+              <a:t>	</a:t>
+            </a:r>
+            <a:r>
+              <a:rPr lang="en-US" sz="2000" b="0" i="0" dirty="0">
+                <a:solidFill>
+                  <a:srgbClr val="0D0D0D"/>
+                </a:solidFill>
+                <a:effectLst/>
+                <a:latin typeface="Söhne"/>
+              </a:rPr>
+              <a:t>The architecture of an artificial neural network (ANN) refers to its structural layout, including the arrangement of neurons (nodes) and the connections between them. The architecture determines how information flows through the network and how computations are performed. </a:t>
+            </a:r>
+          </a:p>
+          <a:p>
+            <a:endParaRPr lang="en-US" dirty="0">
+              <a:solidFill>
+                <a:srgbClr val="0D0D0D"/>
+              </a:solidFill>
+              <a:latin typeface="Söhne"/>
+            </a:endParaRPr>
+          </a:p>
+          <a:p>
+            <a:pPr marL="342900" indent="-342900">
+              <a:buFont typeface="+mj-lt"/>
+              <a:buAutoNum type="arabicPeriod"/>
+            </a:pPr>
+            <a:r>
+              <a:rPr lang="en-US" b="1" i="0" dirty="0">
+                <a:solidFill>
+                  <a:srgbClr val="0D0D0D"/>
+                </a:solidFill>
+                <a:effectLst/>
+                <a:latin typeface="Söhne"/>
+              </a:rPr>
+              <a:t>Input Layer</a:t>
+            </a:r>
+          </a:p>
+          <a:p>
+            <a:pPr marL="342900" indent="-342900">
+              <a:buFont typeface="+mj-lt"/>
+              <a:buAutoNum type="arabicPeriod"/>
+            </a:pPr>
+            <a:r>
+              <a:rPr lang="en-US" b="1" dirty="0">
+                <a:solidFill>
+                  <a:srgbClr val="0D0D0D"/>
+                </a:solidFill>
+                <a:latin typeface="Söhne"/>
+              </a:rPr>
+              <a:t>Hidden Layer</a:t>
+            </a:r>
+          </a:p>
+          <a:p>
+            <a:pPr marL="342900" indent="-342900">
+              <a:buFont typeface="+mj-lt"/>
+              <a:buAutoNum type="arabicPeriod"/>
+            </a:pPr>
+            <a:r>
+              <a:rPr lang="en-US" b="1" i="0" dirty="0">
+                <a:solidFill>
+                  <a:srgbClr val="0D0D0D"/>
+                </a:solidFill>
+                <a:effectLst/>
+                <a:latin typeface="Söhne"/>
+              </a:rPr>
+              <a:t>Output Layer</a:t>
+            </a:r>
+            <a:endParaRPr lang="en-US" b="0" i="0" dirty="0">
+              <a:solidFill>
+                <a:srgbClr val="0D0D0D"/>
+              </a:solidFill>
+              <a:effectLst/>
+              <a:latin typeface="Söhne"/>
+            </a:endParaRPr>
+          </a:p>
+        </p:txBody>
+      </p:sp>
+      <p:pic>
+        <p:nvPicPr>
+          <p:cNvPr id="2" name="Picture 1">
+            <a:extLst>
+              <a:ext uri="{FF2B5EF4-FFF2-40B4-BE49-F238E27FC236}">
+                <a16:creationId xmlns:a16="http://schemas.microsoft.com/office/drawing/2014/main" id="{15BA55CC-437B-A3A8-FE90-23D03B11D1DC}"/>
+              </a:ext>
+            </a:extLst>
+          </p:cNvPr>
+          <p:cNvPicPr>
+            <a:picLocks noChangeAspect="1"/>
+          </p:cNvPicPr>
+          <p:nvPr/>
+        </p:nvPicPr>
+        <p:blipFill>
+          <a:blip r:embed="rId2">
+            <a:extLst>
+              <a:ext uri="{28A0092B-C50C-407E-A947-70E740481C1C}">
+                <a14:useLocalDpi xmlns:a14="http://schemas.microsoft.com/office/drawing/2010/main" val="0"/>
+              </a:ext>
+            </a:extLst>
+          </a:blip>
+          <a:stretch>
+            <a:fillRect/>
+          </a:stretch>
+        </p:blipFill>
+        <p:spPr>
+          <a:xfrm>
+            <a:off x="2534513" y="1728128"/>
+            <a:ext cx="8304345" cy="4865369"/>
+          </a:xfrm>
+          <a:prstGeom prst="rect">
+            <a:avLst/>
+          </a:prstGeom>
+        </p:spPr>
+      </p:pic>
+    </p:spTree>
+    <p:extLst>
+      <p:ext uri="{BB962C8B-B14F-4D97-AF65-F5344CB8AC3E}">
+        <p14:creationId xmlns:p14="http://schemas.microsoft.com/office/powerpoint/2010/main" val="1452150392"/>
+      </p:ext>
+    </p:extLst>
+  </p:cSld>
+  <p:clrMapOvr>
+    <a:masterClrMapping/>
+  </p:clrMapOvr>
+</p:sld>
+</file>
+
+<file path=ppt/slides/slide64.xml><?xml version="1.0" encoding="utf-8"?>
+<p:sld xmlns:a="http://schemas.openxmlformats.org/drawingml/2006/main" xmlns:r="http://schemas.openxmlformats.org/officeDocument/2006/relationships" xmlns:p="http://schemas.openxmlformats.org/presentationml/2006/main">
+  <p:cSld>
+    <p:spTree>
+      <p:nvGrpSpPr>
+        <p:cNvPr id="1" name="">
+          <a:extLst>
+            <a:ext uri="{FF2B5EF4-FFF2-40B4-BE49-F238E27FC236}">
+              <a16:creationId xmlns:a16="http://schemas.microsoft.com/office/drawing/2014/main" id="{87C909F1-E443-4B01-D0D2-D7AF92EEEB14}"/>
             </a:ext>
           </a:extLst>
         </p:cNvPr>
@@ -24811,7 +28125,7 @@
           <p:cNvPr id="3" name="Content Placeholder 2">
             <a:extLst>
               <a:ext uri="{FF2B5EF4-FFF2-40B4-BE49-F238E27FC236}">
-                <a16:creationId xmlns:a16="http://schemas.microsoft.com/office/drawing/2014/main" id="{C3ABE3FE-A23C-4562-9B10-31F89A23712E}"/>
+                <a16:creationId xmlns:a16="http://schemas.microsoft.com/office/drawing/2014/main" id="{4AC14414-F583-CD61-B8DF-86B4EB847812}"/>
               </a:ext>
             </a:extLst>
           </p:cNvPr>
@@ -24824,8 +28138,8 @@
         </p:nvSpPr>
         <p:spPr>
           <a:xfrm>
-            <a:off x="743688" y="1001485"/>
-            <a:ext cx="10900568" cy="4974772"/>
+            <a:off x="777240" y="707571"/>
+            <a:ext cx="10659110" cy="5469392"/>
           </a:xfrm>
         </p:spPr>
         <p:txBody>
@@ -24838,114 +28152,1731 @@
               <a:buNone/>
             </a:pPr>
             <a:r>
-              <a:rPr lang="en-US" sz="3200" b="1" dirty="0">
-                <a:solidFill>
-                  <a:srgbClr val="C00000"/>
-                </a:solidFill>
-              </a:rPr>
-              <a:t>Module-4: </a:t>
-            </a:r>
-            <a:r>
-              <a:rPr lang="en-US" sz="3200" b="1" dirty="0">
-                <a:solidFill>
-                  <a:schemeClr val="accent3">
-                    <a:lumMod val="50000"/>
-                  </a:schemeClr>
-                </a:solidFill>
-              </a:rPr>
-              <a:t>Advanced Machine Learning Techniques: </a:t>
+              <a:rPr lang="en-US" sz="2400" b="1" dirty="0" err="1"/>
+              <a:t>Smple</a:t>
+            </a:r>
+            <a:r>
+              <a:rPr lang="en-US" sz="2400" b="1" dirty="0"/>
+              <a:t> Real-world example: Handwritten Digit Recognition (0–9)</a:t>
+            </a:r>
+          </a:p>
+          <a:p>
+            <a:r>
+              <a:rPr lang="en-US" sz="2400" b="1" dirty="0"/>
+              <a:t>Problem: </a:t>
+            </a:r>
+            <a:r>
+              <a:rPr lang="en-US" sz="2400" dirty="0"/>
+              <a:t>Given an image of a handwritten digit, predict what digit (0 to 9) it represents.</a:t>
             </a:r>
           </a:p>
           <a:p>
             <a:pPr marL="0" indent="0">
               <a:buNone/>
             </a:pPr>
-            <a:r>
-              <a:rPr lang="en-US" sz="3200" b="1" dirty="0"/>
-              <a:t>Ensemble Methods: Bagging and Boosting</a:t>
-            </a:r>
-            <a:r>
-              <a:rPr lang="en-US" sz="3200" dirty="0"/>
-              <a:t>, </a:t>
-            </a:r>
-            <a:r>
-              <a:rPr lang="en-US" sz="3200" b="1" dirty="0"/>
-              <a:t>Gradient Boosting Machines (GBM)</a:t>
-            </a:r>
-            <a:r>
-              <a:rPr lang="en-US" sz="3200" dirty="0"/>
-              <a:t>, </a:t>
-            </a:r>
-            <a:r>
-              <a:rPr lang="en-US" sz="3200" b="1" dirty="0"/>
-              <a:t>Extreme Gradient Boosting (</a:t>
-            </a:r>
-            <a:r>
-              <a:rPr lang="en-US" sz="3200" b="1" dirty="0" err="1"/>
-              <a:t>XGBoost</a:t>
-            </a:r>
-            <a:r>
-              <a:rPr lang="en-US" sz="3200" b="1" dirty="0"/>
-              <a:t>).  </a:t>
-            </a:r>
+            <a:endParaRPr lang="en-US" sz="2400" b="1" dirty="0"/>
           </a:p>
           <a:p>
             <a:pPr marL="0" indent="0">
               <a:buNone/>
             </a:pPr>
             <a:r>
-              <a:rPr lang="en-US" sz="3200" b="1" dirty="0"/>
-              <a:t>Support Vector Machines (SVM): Linear and non-linear SVM</a:t>
-            </a:r>
-            <a:r>
-              <a:rPr lang="en-US" sz="3200" dirty="0"/>
-              <a:t>, </a:t>
-            </a:r>
-            <a:r>
-              <a:rPr lang="en-US" sz="3200" b="1" dirty="0"/>
-              <a:t>Kernel trick</a:t>
-            </a:r>
-            <a:r>
-              <a:rPr lang="en-US" sz="3200" dirty="0"/>
-              <a:t>, </a:t>
-            </a:r>
-            <a:r>
-              <a:rPr lang="en-US" sz="3200" b="1" dirty="0"/>
-              <a:t>Model evaluation and tuning</a:t>
-            </a:r>
-            <a:r>
-              <a:rPr lang="en-US" sz="3200" dirty="0"/>
-              <a:t>.  </a:t>
+              <a:rPr lang="en-US" sz="2400" b="1" dirty="0"/>
+              <a:t>Input Layer (</a:t>
+            </a:r>
+            <a:r>
+              <a:rPr lang="en-US" sz="2400" b="1" dirty="0" err="1"/>
+              <a:t>i</a:t>
+            </a:r>
+            <a:r>
+              <a:rPr lang="en-US" sz="2400" b="1" dirty="0"/>
+              <a:t>):</a:t>
+            </a:r>
+          </a:p>
+          <a:p>
+            <a:r>
+              <a:rPr lang="en-US" sz="2400" dirty="0"/>
+              <a:t>Each input neuron represents a </a:t>
+            </a:r>
+            <a:r>
+              <a:rPr lang="en-US" sz="2400" b="1" dirty="0"/>
+              <a:t>pixel</a:t>
+            </a:r>
+            <a:r>
+              <a:rPr lang="en-US" sz="2400" dirty="0"/>
+              <a:t> from the image.</a:t>
+            </a:r>
+          </a:p>
+          <a:p>
+            <a:r>
+              <a:rPr lang="en-US" sz="2400" dirty="0"/>
+              <a:t>If we use a </a:t>
+            </a:r>
+            <a:r>
+              <a:rPr lang="en-US" sz="2400" b="1" dirty="0"/>
+              <a:t>28×28 grayscale image</a:t>
+            </a:r>
+            <a:r>
+              <a:rPr lang="en-US" sz="2400" dirty="0"/>
+              <a:t>, we have </a:t>
+            </a:r>
+            <a:r>
+              <a:rPr lang="en-US" sz="2400" b="1" dirty="0"/>
+              <a:t>784 input values</a:t>
+            </a:r>
+            <a:r>
+              <a:rPr lang="en-US" sz="2400" dirty="0"/>
+              <a:t> (28×28).</a:t>
+            </a:r>
+          </a:p>
+          <a:p>
+            <a:r>
+              <a:rPr lang="en-US" sz="2400" dirty="0"/>
+              <a:t>So, </a:t>
+            </a:r>
+            <a:r>
+              <a:rPr lang="en-US" sz="2400" b="1" dirty="0"/>
+              <a:t>Input 1 to Input n</a:t>
+            </a:r>
+            <a:r>
+              <a:rPr lang="en-US" sz="2400" dirty="0"/>
+              <a:t> = pixel values (0 to 255 scaled between 0 and 1).</a:t>
             </a:r>
           </a:p>
           <a:p>
             <a:pPr marL="0" indent="0">
               <a:buNone/>
             </a:pPr>
-            <a:r>
-              <a:rPr lang="en-US" sz="3200" b="1" dirty="0"/>
-              <a:t>Neural Networks and Deep Learning: </a:t>
-            </a:r>
-            <a:r>
-              <a:rPr lang="en-US" sz="3200" dirty="0"/>
-              <a:t>Introduction to neural networks, Building and training neural networks using TensorFlow and </a:t>
-            </a:r>
-            <a:r>
-              <a:rPr lang="en-US" sz="3200" dirty="0" err="1"/>
-              <a:t>Keras</a:t>
-            </a:r>
-            <a:r>
-              <a:rPr lang="en-US" sz="3200" dirty="0"/>
-              <a:t>, Convolutional Neural Networks (CNN) and Recurrent Neural Networks (RNN). </a:t>
-            </a:r>
-            <a:endParaRPr lang="en-IN" sz="3200" dirty="0"/>
+            <a:endParaRPr lang="en-US" sz="2400" dirty="0"/>
+          </a:p>
+          <a:p>
+            <a:pPr marL="0" indent="0">
+              <a:buNone/>
+            </a:pPr>
+            <a:endParaRPr lang="en-IN" sz="2400" dirty="0"/>
           </a:p>
         </p:txBody>
       </p:sp>
     </p:spTree>
     <p:extLst>
       <p:ext uri="{BB962C8B-B14F-4D97-AF65-F5344CB8AC3E}">
-        <p14:creationId xmlns:p14="http://schemas.microsoft.com/office/powerpoint/2010/main" val="1168041992"/>
+        <p14:creationId xmlns:p14="http://schemas.microsoft.com/office/powerpoint/2010/main" val="1755531748"/>
+      </p:ext>
+    </p:extLst>
+  </p:cSld>
+  <p:clrMapOvr>
+    <a:masterClrMapping/>
+  </p:clrMapOvr>
+</p:sld>
+</file>
+
+<file path=ppt/slides/slide65.xml><?xml version="1.0" encoding="utf-8"?>
+<p:sld xmlns:a="http://schemas.openxmlformats.org/drawingml/2006/main" xmlns:r="http://schemas.openxmlformats.org/officeDocument/2006/relationships" xmlns:p="http://schemas.openxmlformats.org/presentationml/2006/main">
+  <p:cSld>
+    <p:spTree>
+      <p:nvGrpSpPr>
+        <p:cNvPr id="1" name="">
+          <a:extLst>
+            <a:ext uri="{FF2B5EF4-FFF2-40B4-BE49-F238E27FC236}">
+              <a16:creationId xmlns:a16="http://schemas.microsoft.com/office/drawing/2014/main" id="{3F7EFAC7-3060-4E16-147D-B071F934EC2C}"/>
+            </a:ext>
+          </a:extLst>
+        </p:cNvPr>
+        <p:cNvGrpSpPr/>
+        <p:nvPr/>
+      </p:nvGrpSpPr>
+      <p:grpSpPr>
+        <a:xfrm>
+          <a:off x="0" y="0"/>
+          <a:ext cx="0" cy="0"/>
+          <a:chOff x="0" y="0"/>
+          <a:chExt cx="0" cy="0"/>
+        </a:xfrm>
+      </p:grpSpPr>
+      <p:sp>
+        <p:nvSpPr>
+          <p:cNvPr id="3" name="Content Placeholder 2">
+            <a:extLst>
+              <a:ext uri="{FF2B5EF4-FFF2-40B4-BE49-F238E27FC236}">
+                <a16:creationId xmlns:a16="http://schemas.microsoft.com/office/drawing/2014/main" id="{73897975-1BBD-F063-A985-DAF5DA4365DB}"/>
+              </a:ext>
+            </a:extLst>
+          </p:cNvPr>
+          <p:cNvSpPr>
+            <a:spLocks noGrp="1"/>
+          </p:cNvSpPr>
+          <p:nvPr>
+            <p:ph idx="1"/>
+          </p:nvPr>
+        </p:nvSpPr>
+        <p:spPr>
+          <a:xfrm>
+            <a:off x="777240" y="707571"/>
+            <a:ext cx="10659110" cy="5469392"/>
+          </a:xfrm>
+        </p:spPr>
+        <p:txBody>
+          <a:bodyPr>
+            <a:normAutofit/>
+          </a:bodyPr>
+          <a:lstStyle/>
+          <a:p>
+            <a:pPr marL="0" indent="0">
+              <a:buNone/>
+            </a:pPr>
+            <a:r>
+              <a:rPr lang="en-US" sz="2800" b="1" dirty="0"/>
+              <a:t>2. Hidden Layers (h₁, h₂, ..., hₙ):</a:t>
+            </a:r>
+          </a:p>
+          <a:p>
+            <a:r>
+              <a:rPr lang="en-US" sz="2800" dirty="0"/>
+              <a:t>These layers do the computation.</a:t>
+            </a:r>
+          </a:p>
+          <a:p>
+            <a:r>
+              <a:rPr lang="en-US" sz="2800" dirty="0"/>
+              <a:t>They apply weights, biases, and activation functions to learn features like curves, corners, and shapes in the digit.</a:t>
+            </a:r>
+          </a:p>
+          <a:p>
+            <a:r>
+              <a:rPr lang="en-US" sz="2800" b="1" dirty="0"/>
+              <a:t>Example:</a:t>
+            </a:r>
+          </a:p>
+          <a:p>
+            <a:pPr lvl="1"/>
+            <a:r>
+              <a:rPr lang="en-US" sz="2800" dirty="0"/>
+              <a:t>First hidden layer might </a:t>
+            </a:r>
+            <a:r>
+              <a:rPr lang="en-US" sz="2800" b="1" dirty="0"/>
+              <a:t>detect edges</a:t>
+            </a:r>
+            <a:r>
+              <a:rPr lang="en-US" sz="2800" dirty="0"/>
+              <a:t>,</a:t>
+            </a:r>
+          </a:p>
+          <a:p>
+            <a:pPr lvl="1"/>
+            <a:r>
+              <a:rPr lang="en-US" sz="2800" dirty="0"/>
+              <a:t>Second one might </a:t>
+            </a:r>
+            <a:r>
+              <a:rPr lang="en-US" sz="2800" b="1" dirty="0"/>
+              <a:t>identify round </a:t>
+            </a:r>
+            <a:r>
+              <a:rPr lang="en-US" sz="2800" dirty="0"/>
+              <a:t>or </a:t>
+            </a:r>
+            <a:r>
+              <a:rPr lang="en-US" sz="2800" b="1" dirty="0"/>
+              <a:t>straight shapes</a:t>
+            </a:r>
+            <a:r>
+              <a:rPr lang="en-US" sz="2800" dirty="0"/>
+              <a:t>,</a:t>
+            </a:r>
+          </a:p>
+          <a:p>
+            <a:pPr lvl="1"/>
+            <a:r>
+              <a:rPr lang="en-US" sz="2800" dirty="0"/>
+              <a:t>Deeper layers combine this into </a:t>
+            </a:r>
+            <a:r>
+              <a:rPr lang="en-US" sz="2800" b="1" dirty="0"/>
+              <a:t>understanding</a:t>
+            </a:r>
+            <a:r>
+              <a:rPr lang="en-US" sz="2800" dirty="0"/>
+              <a:t> “Is this a 3 or an 8?”</a:t>
+            </a:r>
+          </a:p>
+          <a:p>
+            <a:pPr marL="0" indent="0">
+              <a:buNone/>
+            </a:pPr>
+            <a:endParaRPr lang="en-US" sz="2800" dirty="0"/>
+          </a:p>
+          <a:p>
+            <a:pPr marL="0" indent="0">
+              <a:buNone/>
+            </a:pPr>
+            <a:endParaRPr lang="en-IN" sz="2800" dirty="0"/>
+          </a:p>
+        </p:txBody>
+      </p:sp>
+    </p:spTree>
+    <p:extLst>
+      <p:ext uri="{BB962C8B-B14F-4D97-AF65-F5344CB8AC3E}">
+        <p14:creationId xmlns:p14="http://schemas.microsoft.com/office/powerpoint/2010/main" val="738342721"/>
+      </p:ext>
+    </p:extLst>
+  </p:cSld>
+  <p:clrMapOvr>
+    <a:masterClrMapping/>
+  </p:clrMapOvr>
+</p:sld>
+</file>
+
+<file path=ppt/slides/slide66.xml><?xml version="1.0" encoding="utf-8"?>
+<p:sld xmlns:a="http://schemas.openxmlformats.org/drawingml/2006/main" xmlns:r="http://schemas.openxmlformats.org/officeDocument/2006/relationships" xmlns:p="http://schemas.openxmlformats.org/presentationml/2006/main">
+  <p:cSld>
+    <p:spTree>
+      <p:nvGrpSpPr>
+        <p:cNvPr id="1" name="">
+          <a:extLst>
+            <a:ext uri="{FF2B5EF4-FFF2-40B4-BE49-F238E27FC236}">
+              <a16:creationId xmlns:a16="http://schemas.microsoft.com/office/drawing/2014/main" id="{451BBBD0-5D67-62C0-59C6-C1423629F49E}"/>
+            </a:ext>
+          </a:extLst>
+        </p:cNvPr>
+        <p:cNvGrpSpPr/>
+        <p:nvPr/>
+      </p:nvGrpSpPr>
+      <p:grpSpPr>
+        <a:xfrm>
+          <a:off x="0" y="0"/>
+          <a:ext cx="0" cy="0"/>
+          <a:chOff x="0" y="0"/>
+          <a:chExt cx="0" cy="0"/>
+        </a:xfrm>
+      </p:grpSpPr>
+      <p:sp>
+        <p:nvSpPr>
+          <p:cNvPr id="3" name="Content Placeholder 2">
+            <a:extLst>
+              <a:ext uri="{FF2B5EF4-FFF2-40B4-BE49-F238E27FC236}">
+                <a16:creationId xmlns:a16="http://schemas.microsoft.com/office/drawing/2014/main" id="{4492821A-3EA0-7E9F-D288-1F34FCFA68E2}"/>
+              </a:ext>
+            </a:extLst>
+          </p:cNvPr>
+          <p:cNvSpPr>
+            <a:spLocks noGrp="1"/>
+          </p:cNvSpPr>
+          <p:nvPr>
+            <p:ph idx="1"/>
+          </p:nvPr>
+        </p:nvSpPr>
+        <p:spPr>
+          <a:xfrm>
+            <a:off x="777240" y="707571"/>
+            <a:ext cx="10659110" cy="5469392"/>
+          </a:xfrm>
+        </p:spPr>
+        <p:txBody>
+          <a:bodyPr>
+            <a:normAutofit/>
+          </a:bodyPr>
+          <a:lstStyle/>
+          <a:p>
+            <a:pPr marL="0" indent="0">
+              <a:buNone/>
+            </a:pPr>
+            <a:r>
+              <a:rPr lang="en-US" sz="2800" b="1" dirty="0"/>
+              <a:t>3. Output Layer (o):</a:t>
+            </a:r>
+          </a:p>
+          <a:p>
+            <a:r>
+              <a:rPr lang="en-US" sz="2800" dirty="0"/>
+              <a:t>Contains </a:t>
+            </a:r>
+            <a:r>
+              <a:rPr lang="en-US" sz="2800" b="1" dirty="0"/>
+              <a:t>10 neurons</a:t>
+            </a:r>
+            <a:r>
+              <a:rPr lang="en-US" sz="2800" dirty="0"/>
+              <a:t>, one for each digit (0 to 9).</a:t>
+            </a:r>
+          </a:p>
+          <a:p>
+            <a:r>
+              <a:rPr lang="en-US" sz="2800" dirty="0"/>
+              <a:t>Uses a </a:t>
+            </a:r>
+            <a:r>
+              <a:rPr lang="en-US" sz="2800" b="1" dirty="0" err="1"/>
+              <a:t>softmax</a:t>
+            </a:r>
+            <a:r>
+              <a:rPr lang="en-US" sz="2800" b="1" dirty="0"/>
+              <a:t> activation function</a:t>
+            </a:r>
+            <a:r>
+              <a:rPr lang="en-US" sz="2800" dirty="0"/>
+              <a:t> to give </a:t>
+            </a:r>
+            <a:r>
+              <a:rPr lang="en-US" sz="2800" b="1" dirty="0"/>
+              <a:t>probability scores</a:t>
+            </a:r>
+            <a:r>
+              <a:rPr lang="en-US" sz="2800" dirty="0"/>
+              <a:t> for each digit.</a:t>
+            </a:r>
+          </a:p>
+          <a:p>
+            <a:r>
+              <a:rPr lang="en-US" sz="2800" b="1" dirty="0"/>
+              <a:t>Output example:</a:t>
+            </a:r>
+          </a:p>
+          <a:p>
+            <a:endParaRPr lang="en-US" sz="2800" b="1" dirty="0"/>
+          </a:p>
+          <a:p>
+            <a:endParaRPr lang="en-US" sz="2800" b="1" dirty="0"/>
+          </a:p>
+          <a:p>
+            <a:endParaRPr lang="en-US" sz="2800" b="1" dirty="0"/>
+          </a:p>
+          <a:p>
+            <a:r>
+              <a:rPr lang="en-US" sz="2800" dirty="0"/>
+              <a:t>Here, the highest probability (0.91) is at index 3 → the model predicts the digit is </a:t>
+            </a:r>
+            <a:r>
+              <a:rPr lang="en-US" sz="2800" b="1" dirty="0"/>
+              <a:t>3</a:t>
+            </a:r>
+            <a:r>
+              <a:rPr lang="en-US" sz="2800" dirty="0"/>
+              <a:t>.</a:t>
+            </a:r>
+            <a:endParaRPr lang="en-US" sz="2800" b="1" dirty="0"/>
+          </a:p>
+          <a:p>
+            <a:pPr marL="0" indent="0">
+              <a:buNone/>
+            </a:pPr>
+            <a:endParaRPr lang="en-US" sz="2800" b="1" dirty="0"/>
+          </a:p>
+          <a:p>
+            <a:pPr marL="0" indent="0">
+              <a:buNone/>
+            </a:pPr>
+            <a:endParaRPr lang="en-US" sz="2800" b="1" dirty="0"/>
+          </a:p>
+          <a:p>
+            <a:pPr marL="0" indent="0">
+              <a:buNone/>
+            </a:pPr>
+            <a:endParaRPr lang="en-IN" sz="2800" dirty="0"/>
+          </a:p>
+        </p:txBody>
+      </p:sp>
+      <p:pic>
+        <p:nvPicPr>
+          <p:cNvPr id="4" name="Picture 3">
+            <a:extLst>
+              <a:ext uri="{FF2B5EF4-FFF2-40B4-BE49-F238E27FC236}">
+                <a16:creationId xmlns:a16="http://schemas.microsoft.com/office/drawing/2014/main" id="{499ECD61-1DD6-AE82-1CBF-CE87D85EB246}"/>
+              </a:ext>
+            </a:extLst>
+          </p:cNvPr>
+          <p:cNvPicPr>
+            <a:picLocks noChangeAspect="1"/>
+          </p:cNvPicPr>
+          <p:nvPr/>
+        </p:nvPicPr>
+        <p:blipFill>
+          <a:blip r:embed="rId2"/>
+          <a:stretch>
+            <a:fillRect/>
+          </a:stretch>
+        </p:blipFill>
+        <p:spPr>
+          <a:xfrm>
+            <a:off x="1487923" y="3429000"/>
+            <a:ext cx="9789676" cy="711817"/>
+          </a:xfrm>
+          <a:prstGeom prst="rect">
+            <a:avLst/>
+          </a:prstGeom>
+        </p:spPr>
+      </p:pic>
+    </p:spTree>
+    <p:extLst>
+      <p:ext uri="{BB962C8B-B14F-4D97-AF65-F5344CB8AC3E}">
+        <p14:creationId xmlns:p14="http://schemas.microsoft.com/office/powerpoint/2010/main" val="2588920475"/>
+      </p:ext>
+    </p:extLst>
+  </p:cSld>
+  <p:clrMapOvr>
+    <a:masterClrMapping/>
+  </p:clrMapOvr>
+</p:sld>
+</file>
+
+<file path=ppt/slides/slide67.xml><?xml version="1.0" encoding="utf-8"?>
+<p:sld xmlns:a="http://schemas.openxmlformats.org/drawingml/2006/main" xmlns:r="http://schemas.openxmlformats.org/officeDocument/2006/relationships" xmlns:p="http://schemas.openxmlformats.org/presentationml/2006/main">
+  <p:cSld>
+    <p:spTree>
+      <p:nvGrpSpPr>
+        <p:cNvPr id="1" name="">
+          <a:extLst>
+            <a:ext uri="{FF2B5EF4-FFF2-40B4-BE49-F238E27FC236}">
+              <a16:creationId xmlns:a16="http://schemas.microsoft.com/office/drawing/2014/main" id="{025A9F84-B588-0F59-D7CB-4815B7265E39}"/>
+            </a:ext>
+          </a:extLst>
+        </p:cNvPr>
+        <p:cNvGrpSpPr/>
+        <p:nvPr/>
+      </p:nvGrpSpPr>
+      <p:grpSpPr>
+        <a:xfrm>
+          <a:off x="0" y="0"/>
+          <a:ext cx="0" cy="0"/>
+          <a:chOff x="0" y="0"/>
+          <a:chExt cx="0" cy="0"/>
+        </a:xfrm>
+      </p:grpSpPr>
+      <p:sp>
+        <p:nvSpPr>
+          <p:cNvPr id="3" name="Content Placeholder 2">
+            <a:extLst>
+              <a:ext uri="{FF2B5EF4-FFF2-40B4-BE49-F238E27FC236}">
+                <a16:creationId xmlns:a16="http://schemas.microsoft.com/office/drawing/2014/main" id="{1F8F4650-5E0E-7876-F84A-6AA83F880C09}"/>
+              </a:ext>
+            </a:extLst>
+          </p:cNvPr>
+          <p:cNvSpPr>
+            <a:spLocks noGrp="1"/>
+          </p:cNvSpPr>
+          <p:nvPr>
+            <p:ph idx="1"/>
+          </p:nvPr>
+        </p:nvSpPr>
+        <p:spPr>
+          <a:xfrm>
+            <a:off x="777240" y="707571"/>
+            <a:ext cx="10659110" cy="5469392"/>
+          </a:xfrm>
+        </p:spPr>
+        <p:txBody>
+          <a:bodyPr>
+            <a:normAutofit/>
+          </a:bodyPr>
+          <a:lstStyle/>
+          <a:p>
+            <a:pPr marL="0" indent="0">
+              <a:buNone/>
+            </a:pPr>
+            <a:r>
+              <a:rPr lang="en-IN" sz="2800" b="1" dirty="0"/>
+              <a:t>Summary of Each Layer in the Diagram:</a:t>
+            </a:r>
+            <a:endParaRPr lang="en-IN" sz="3200" dirty="0"/>
+          </a:p>
+        </p:txBody>
+      </p:sp>
+      <p:graphicFrame>
+        <p:nvGraphicFramePr>
+          <p:cNvPr id="5" name="Table 4">
+            <a:extLst>
+              <a:ext uri="{FF2B5EF4-FFF2-40B4-BE49-F238E27FC236}">
+                <a16:creationId xmlns:a16="http://schemas.microsoft.com/office/drawing/2014/main" id="{F435F8C8-B583-8D9C-A454-8B5F185D5B61}"/>
+              </a:ext>
+            </a:extLst>
+          </p:cNvPr>
+          <p:cNvGraphicFramePr>
+            <a:graphicFrameLocks noGrp="1"/>
+          </p:cNvGraphicFramePr>
+          <p:nvPr>
+            <p:extLst>
+              <p:ext uri="{D42A27DB-BD31-4B8C-83A1-F6EECF244321}">
+                <p14:modId xmlns:p14="http://schemas.microsoft.com/office/powerpoint/2010/main" val="3268271972"/>
+              </p:ext>
+            </p:extLst>
+          </p:nvPr>
+        </p:nvGraphicFramePr>
+        <p:xfrm>
+          <a:off x="991188" y="1525972"/>
+          <a:ext cx="10423570" cy="4189027"/>
+        </p:xfrm>
+        <a:graphic>
+          <a:graphicData uri="http://schemas.openxmlformats.org/drawingml/2006/table">
+            <a:tbl>
+              <a:tblPr firstRow="1" firstCol="1" bandRow="1">
+                <a:tableStyleId>{5C22544A-7EE6-4342-B048-85BDC9FD1C3A}</a:tableStyleId>
+              </a:tblPr>
+              <a:tblGrid>
+                <a:gridCol w="2862355">
+                  <a:extLst>
+                    <a:ext uri="{9D8B030D-6E8A-4147-A177-3AD203B41FA5}">
+                      <a16:colId xmlns:a16="http://schemas.microsoft.com/office/drawing/2014/main" val="1723617380"/>
+                    </a:ext>
+                  </a:extLst>
+                </a:gridCol>
+                <a:gridCol w="4085921">
+                  <a:extLst>
+                    <a:ext uri="{9D8B030D-6E8A-4147-A177-3AD203B41FA5}">
+                      <a16:colId xmlns:a16="http://schemas.microsoft.com/office/drawing/2014/main" val="1812195808"/>
+                    </a:ext>
+                  </a:extLst>
+                </a:gridCol>
+                <a:gridCol w="3475294">
+                  <a:extLst>
+                    <a:ext uri="{9D8B030D-6E8A-4147-A177-3AD203B41FA5}">
+                      <a16:colId xmlns:a16="http://schemas.microsoft.com/office/drawing/2014/main" val="1967425504"/>
+                    </a:ext>
+                  </a:extLst>
+                </a:gridCol>
+              </a:tblGrid>
+              <a:tr h="643287">
+                <a:tc>
+                  <a:txBody>
+                    <a:bodyPr/>
+                    <a:lstStyle/>
+                    <a:p>
+                      <a:pPr>
+                        <a:lnSpc>
+                          <a:spcPct val="115000"/>
+                        </a:lnSpc>
+                        <a:spcAft>
+                          <a:spcPts val="800"/>
+                        </a:spcAft>
+                        <a:buNone/>
+                      </a:pPr>
+                      <a:r>
+                        <a:rPr lang="en-IN" sz="2400" kern="100">
+                          <a:effectLst/>
+                        </a:rPr>
+                        <a:t>Layer</a:t>
+                      </a:r>
+                      <a:endParaRPr lang="en-IN" sz="2400" kern="100">
+                        <a:effectLst/>
+                        <a:latin typeface="Aptos" panose="020B0004020202020204" pitchFamily="34" charset="0"/>
+                        <a:ea typeface="Aptos" panose="020B0004020202020204" pitchFamily="34" charset="0"/>
+                        <a:cs typeface="Times New Roman" panose="02020603050405020304" pitchFamily="18" charset="0"/>
+                      </a:endParaRPr>
+                    </a:p>
+                  </a:txBody>
+                  <a:tcPr marL="68580" marR="68580" marT="0" marB="0"/>
+                </a:tc>
+                <a:tc>
+                  <a:txBody>
+                    <a:bodyPr/>
+                    <a:lstStyle/>
+                    <a:p>
+                      <a:pPr>
+                        <a:lnSpc>
+                          <a:spcPct val="115000"/>
+                        </a:lnSpc>
+                        <a:spcAft>
+                          <a:spcPts val="800"/>
+                        </a:spcAft>
+                        <a:buNone/>
+                      </a:pPr>
+                      <a:r>
+                        <a:rPr lang="en-IN" sz="2400" kern="100">
+                          <a:effectLst/>
+                        </a:rPr>
+                        <a:t>What it does</a:t>
+                      </a:r>
+                      <a:endParaRPr lang="en-IN" sz="2400" kern="100">
+                        <a:effectLst/>
+                        <a:latin typeface="Aptos" panose="020B0004020202020204" pitchFamily="34" charset="0"/>
+                        <a:ea typeface="Aptos" panose="020B0004020202020204" pitchFamily="34" charset="0"/>
+                        <a:cs typeface="Times New Roman" panose="02020603050405020304" pitchFamily="18" charset="0"/>
+                      </a:endParaRPr>
+                    </a:p>
+                  </a:txBody>
+                  <a:tcPr marL="68580" marR="68580" marT="0" marB="0"/>
+                </a:tc>
+                <a:tc>
+                  <a:txBody>
+                    <a:bodyPr/>
+                    <a:lstStyle/>
+                    <a:p>
+                      <a:pPr>
+                        <a:lnSpc>
+                          <a:spcPct val="115000"/>
+                        </a:lnSpc>
+                        <a:spcAft>
+                          <a:spcPts val="800"/>
+                        </a:spcAft>
+                        <a:buNone/>
+                      </a:pPr>
+                      <a:r>
+                        <a:rPr lang="en-IN" sz="2400" kern="100">
+                          <a:effectLst/>
+                        </a:rPr>
+                        <a:t>In our example</a:t>
+                      </a:r>
+                      <a:endParaRPr lang="en-IN" sz="2400" kern="100">
+                        <a:effectLst/>
+                        <a:latin typeface="Aptos" panose="020B0004020202020204" pitchFamily="34" charset="0"/>
+                        <a:ea typeface="Aptos" panose="020B0004020202020204" pitchFamily="34" charset="0"/>
+                        <a:cs typeface="Times New Roman" panose="02020603050405020304" pitchFamily="18" charset="0"/>
+                      </a:endParaRPr>
+                    </a:p>
+                  </a:txBody>
+                  <a:tcPr marL="68580" marR="68580" marT="0" marB="0"/>
+                </a:tc>
+                <a:extLst>
+                  <a:ext uri="{0D108BD9-81ED-4DB2-BD59-A6C34878D82A}">
+                    <a16:rowId xmlns:a16="http://schemas.microsoft.com/office/drawing/2014/main" val="1418720522"/>
+                  </a:ext>
+                </a:extLst>
+              </a:tr>
+              <a:tr h="1321592">
+                <a:tc>
+                  <a:txBody>
+                    <a:bodyPr/>
+                    <a:lstStyle/>
+                    <a:p>
+                      <a:pPr>
+                        <a:lnSpc>
+                          <a:spcPct val="115000"/>
+                        </a:lnSpc>
+                        <a:spcAft>
+                          <a:spcPts val="800"/>
+                        </a:spcAft>
+                        <a:buNone/>
+                      </a:pPr>
+                      <a:r>
+                        <a:rPr lang="en-IN" sz="2400" kern="100">
+                          <a:effectLst/>
+                        </a:rPr>
+                        <a:t>Input Layer</a:t>
+                      </a:r>
+                      <a:endParaRPr lang="en-IN" sz="2400" kern="100">
+                        <a:effectLst/>
+                        <a:latin typeface="Aptos" panose="020B0004020202020204" pitchFamily="34" charset="0"/>
+                        <a:ea typeface="Aptos" panose="020B0004020202020204" pitchFamily="34" charset="0"/>
+                        <a:cs typeface="Times New Roman" panose="02020603050405020304" pitchFamily="18" charset="0"/>
+                      </a:endParaRPr>
+                    </a:p>
+                  </a:txBody>
+                  <a:tcPr marL="68580" marR="68580" marT="0" marB="0"/>
+                </a:tc>
+                <a:tc>
+                  <a:txBody>
+                    <a:bodyPr/>
+                    <a:lstStyle/>
+                    <a:p>
+                      <a:pPr>
+                        <a:lnSpc>
+                          <a:spcPct val="115000"/>
+                        </a:lnSpc>
+                        <a:spcAft>
+                          <a:spcPts val="800"/>
+                        </a:spcAft>
+                        <a:buNone/>
+                      </a:pPr>
+                      <a:r>
+                        <a:rPr lang="en-IN" sz="2400" kern="100" dirty="0">
+                          <a:effectLst/>
+                        </a:rPr>
+                        <a:t>Takes image pixel values</a:t>
+                      </a:r>
+                      <a:endParaRPr lang="en-IN" sz="2400" kern="100" dirty="0">
+                        <a:effectLst/>
+                        <a:latin typeface="Aptos" panose="020B0004020202020204" pitchFamily="34" charset="0"/>
+                        <a:ea typeface="Aptos" panose="020B0004020202020204" pitchFamily="34" charset="0"/>
+                        <a:cs typeface="Times New Roman" panose="02020603050405020304" pitchFamily="18" charset="0"/>
+                      </a:endParaRPr>
+                    </a:p>
+                  </a:txBody>
+                  <a:tcPr marL="68580" marR="68580" marT="0" marB="0"/>
+                </a:tc>
+                <a:tc>
+                  <a:txBody>
+                    <a:bodyPr/>
+                    <a:lstStyle/>
+                    <a:p>
+                      <a:pPr>
+                        <a:lnSpc>
+                          <a:spcPct val="115000"/>
+                        </a:lnSpc>
+                        <a:spcAft>
+                          <a:spcPts val="800"/>
+                        </a:spcAft>
+                        <a:buNone/>
+                      </a:pPr>
+                      <a:r>
+                        <a:rPr lang="en-IN" sz="2400" kern="100">
+                          <a:effectLst/>
+                        </a:rPr>
+                        <a:t>784 pixels from a 28×28 image</a:t>
+                      </a:r>
+                      <a:endParaRPr lang="en-IN" sz="2400" kern="100">
+                        <a:effectLst/>
+                        <a:latin typeface="Aptos" panose="020B0004020202020204" pitchFamily="34" charset="0"/>
+                        <a:ea typeface="Aptos" panose="020B0004020202020204" pitchFamily="34" charset="0"/>
+                        <a:cs typeface="Times New Roman" panose="02020603050405020304" pitchFamily="18" charset="0"/>
+                      </a:endParaRPr>
+                    </a:p>
+                  </a:txBody>
+                  <a:tcPr marL="68580" marR="68580" marT="0" marB="0"/>
+                </a:tc>
+                <a:extLst>
+                  <a:ext uri="{0D108BD9-81ED-4DB2-BD59-A6C34878D82A}">
+                    <a16:rowId xmlns:a16="http://schemas.microsoft.com/office/drawing/2014/main" val="1131616120"/>
+                  </a:ext>
+                </a:extLst>
+              </a:tr>
+              <a:tr h="1321592">
+                <a:tc>
+                  <a:txBody>
+                    <a:bodyPr/>
+                    <a:lstStyle/>
+                    <a:p>
+                      <a:pPr>
+                        <a:lnSpc>
+                          <a:spcPct val="115000"/>
+                        </a:lnSpc>
+                        <a:spcAft>
+                          <a:spcPts val="800"/>
+                        </a:spcAft>
+                        <a:buNone/>
+                      </a:pPr>
+                      <a:r>
+                        <a:rPr lang="en-IN" sz="2400" kern="100">
+                          <a:effectLst/>
+                        </a:rPr>
+                        <a:t>Hidden Layers</a:t>
+                      </a:r>
+                      <a:endParaRPr lang="en-IN" sz="2400" kern="100">
+                        <a:effectLst/>
+                        <a:latin typeface="Aptos" panose="020B0004020202020204" pitchFamily="34" charset="0"/>
+                        <a:ea typeface="Aptos" panose="020B0004020202020204" pitchFamily="34" charset="0"/>
+                        <a:cs typeface="Times New Roman" panose="02020603050405020304" pitchFamily="18" charset="0"/>
+                      </a:endParaRPr>
+                    </a:p>
+                  </a:txBody>
+                  <a:tcPr marL="68580" marR="68580" marT="0" marB="0"/>
+                </a:tc>
+                <a:tc>
+                  <a:txBody>
+                    <a:bodyPr/>
+                    <a:lstStyle/>
+                    <a:p>
+                      <a:pPr>
+                        <a:lnSpc>
+                          <a:spcPct val="115000"/>
+                        </a:lnSpc>
+                        <a:spcAft>
+                          <a:spcPts val="800"/>
+                        </a:spcAft>
+                        <a:buNone/>
+                      </a:pPr>
+                      <a:r>
+                        <a:rPr lang="en-IN" sz="2400" kern="100">
+                          <a:effectLst/>
+                        </a:rPr>
+                        <a:t>Detect patterns and features</a:t>
+                      </a:r>
+                      <a:endParaRPr lang="en-IN" sz="2400" kern="100">
+                        <a:effectLst/>
+                        <a:latin typeface="Aptos" panose="020B0004020202020204" pitchFamily="34" charset="0"/>
+                        <a:ea typeface="Aptos" panose="020B0004020202020204" pitchFamily="34" charset="0"/>
+                        <a:cs typeface="Times New Roman" panose="02020603050405020304" pitchFamily="18" charset="0"/>
+                      </a:endParaRPr>
+                    </a:p>
+                  </a:txBody>
+                  <a:tcPr marL="68580" marR="68580" marT="0" marB="0"/>
+                </a:tc>
+                <a:tc>
+                  <a:txBody>
+                    <a:bodyPr/>
+                    <a:lstStyle/>
+                    <a:p>
+                      <a:pPr>
+                        <a:lnSpc>
+                          <a:spcPct val="115000"/>
+                        </a:lnSpc>
+                        <a:spcAft>
+                          <a:spcPts val="800"/>
+                        </a:spcAft>
+                        <a:buNone/>
+                      </a:pPr>
+                      <a:r>
+                        <a:rPr lang="en-IN" sz="2400" kern="100">
+                          <a:effectLst/>
+                        </a:rPr>
+                        <a:t>Edges, curves, parts of digits</a:t>
+                      </a:r>
+                      <a:endParaRPr lang="en-IN" sz="2400" kern="100">
+                        <a:effectLst/>
+                        <a:latin typeface="Aptos" panose="020B0004020202020204" pitchFamily="34" charset="0"/>
+                        <a:ea typeface="Aptos" panose="020B0004020202020204" pitchFamily="34" charset="0"/>
+                        <a:cs typeface="Times New Roman" panose="02020603050405020304" pitchFamily="18" charset="0"/>
+                      </a:endParaRPr>
+                    </a:p>
+                  </a:txBody>
+                  <a:tcPr marL="68580" marR="68580" marT="0" marB="0"/>
+                </a:tc>
+                <a:extLst>
+                  <a:ext uri="{0D108BD9-81ED-4DB2-BD59-A6C34878D82A}">
+                    <a16:rowId xmlns:a16="http://schemas.microsoft.com/office/drawing/2014/main" val="3679564297"/>
+                  </a:ext>
+                </a:extLst>
+              </a:tr>
+              <a:tr h="902556">
+                <a:tc>
+                  <a:txBody>
+                    <a:bodyPr/>
+                    <a:lstStyle/>
+                    <a:p>
+                      <a:pPr>
+                        <a:lnSpc>
+                          <a:spcPct val="115000"/>
+                        </a:lnSpc>
+                        <a:spcAft>
+                          <a:spcPts val="800"/>
+                        </a:spcAft>
+                        <a:buNone/>
+                      </a:pPr>
+                      <a:r>
+                        <a:rPr lang="en-IN" sz="2400" kern="100">
+                          <a:effectLst/>
+                        </a:rPr>
+                        <a:t>Output Layer</a:t>
+                      </a:r>
+                      <a:endParaRPr lang="en-IN" sz="2400" kern="100">
+                        <a:effectLst/>
+                        <a:latin typeface="Aptos" panose="020B0004020202020204" pitchFamily="34" charset="0"/>
+                        <a:ea typeface="Aptos" panose="020B0004020202020204" pitchFamily="34" charset="0"/>
+                        <a:cs typeface="Times New Roman" panose="02020603050405020304" pitchFamily="18" charset="0"/>
+                      </a:endParaRPr>
+                    </a:p>
+                  </a:txBody>
+                  <a:tcPr marL="68580" marR="68580" marT="0" marB="0"/>
+                </a:tc>
+                <a:tc>
+                  <a:txBody>
+                    <a:bodyPr/>
+                    <a:lstStyle/>
+                    <a:p>
+                      <a:pPr>
+                        <a:lnSpc>
+                          <a:spcPct val="115000"/>
+                        </a:lnSpc>
+                        <a:spcAft>
+                          <a:spcPts val="800"/>
+                        </a:spcAft>
+                        <a:buNone/>
+                      </a:pPr>
+                      <a:r>
+                        <a:rPr lang="en-IN" sz="2400" kern="100">
+                          <a:effectLst/>
+                        </a:rPr>
+                        <a:t>Predicts the digit</a:t>
+                      </a:r>
+                      <a:endParaRPr lang="en-IN" sz="2400" kern="100">
+                        <a:effectLst/>
+                        <a:latin typeface="Aptos" panose="020B0004020202020204" pitchFamily="34" charset="0"/>
+                        <a:ea typeface="Aptos" panose="020B0004020202020204" pitchFamily="34" charset="0"/>
+                        <a:cs typeface="Times New Roman" panose="02020603050405020304" pitchFamily="18" charset="0"/>
+                      </a:endParaRPr>
+                    </a:p>
+                  </a:txBody>
+                  <a:tcPr marL="68580" marR="68580" marT="0" marB="0"/>
+                </a:tc>
+                <a:tc>
+                  <a:txBody>
+                    <a:bodyPr/>
+                    <a:lstStyle/>
+                    <a:p>
+                      <a:pPr>
+                        <a:lnSpc>
+                          <a:spcPct val="115000"/>
+                        </a:lnSpc>
+                        <a:spcAft>
+                          <a:spcPts val="800"/>
+                        </a:spcAft>
+                        <a:buNone/>
+                      </a:pPr>
+                      <a:r>
+                        <a:rPr lang="en-IN" sz="2400" kern="100" dirty="0">
+                          <a:effectLst/>
+                        </a:rPr>
+                        <a:t>0 to 9, based on confidence</a:t>
+                      </a:r>
+                      <a:endParaRPr lang="en-IN" sz="2400" kern="100" dirty="0">
+                        <a:effectLst/>
+                        <a:latin typeface="Aptos" panose="020B0004020202020204" pitchFamily="34" charset="0"/>
+                        <a:ea typeface="Aptos" panose="020B0004020202020204" pitchFamily="34" charset="0"/>
+                        <a:cs typeface="Times New Roman" panose="02020603050405020304" pitchFamily="18" charset="0"/>
+                      </a:endParaRPr>
+                    </a:p>
+                  </a:txBody>
+                  <a:tcPr marL="68580" marR="68580" marT="0" marB="0"/>
+                </a:tc>
+                <a:extLst>
+                  <a:ext uri="{0D108BD9-81ED-4DB2-BD59-A6C34878D82A}">
+                    <a16:rowId xmlns:a16="http://schemas.microsoft.com/office/drawing/2014/main" val="662337604"/>
+                  </a:ext>
+                </a:extLst>
+              </a:tr>
+            </a:tbl>
+          </a:graphicData>
+        </a:graphic>
+      </p:graphicFrame>
+    </p:spTree>
+    <p:extLst>
+      <p:ext uri="{BB962C8B-B14F-4D97-AF65-F5344CB8AC3E}">
+        <p14:creationId xmlns:p14="http://schemas.microsoft.com/office/powerpoint/2010/main" val="3327637455"/>
+      </p:ext>
+    </p:extLst>
+  </p:cSld>
+  <p:clrMapOvr>
+    <a:masterClrMapping/>
+  </p:clrMapOvr>
+</p:sld>
+</file>
+
+<file path=ppt/slides/slide68.xml><?xml version="1.0" encoding="utf-8"?>
+<p:sld xmlns:a="http://schemas.openxmlformats.org/drawingml/2006/main" xmlns:r="http://schemas.openxmlformats.org/officeDocument/2006/relationships" xmlns:p="http://schemas.openxmlformats.org/presentationml/2006/main">
+  <p:cSld>
+    <p:spTree>
+      <p:nvGrpSpPr>
+        <p:cNvPr id="1" name=""/>
+        <p:cNvGrpSpPr/>
+        <p:nvPr/>
+      </p:nvGrpSpPr>
+      <p:grpSpPr>
+        <a:xfrm>
+          <a:off x="0" y="0"/>
+          <a:ext cx="0" cy="0"/>
+          <a:chOff x="0" y="0"/>
+          <a:chExt cx="0" cy="0"/>
+        </a:xfrm>
+      </p:grpSpPr>
+      <p:pic>
+        <p:nvPicPr>
+          <p:cNvPr id="6" name="Picture 5">
+            <a:extLst>
+              <a:ext uri="{FF2B5EF4-FFF2-40B4-BE49-F238E27FC236}">
+                <a16:creationId xmlns:a16="http://schemas.microsoft.com/office/drawing/2014/main" id="{0B408453-E184-BE0D-CF2B-A15EB5337F2F}"/>
+              </a:ext>
+            </a:extLst>
+          </p:cNvPr>
+          <p:cNvPicPr>
+            <a:picLocks noChangeAspect="1"/>
+          </p:cNvPicPr>
+          <p:nvPr/>
+        </p:nvPicPr>
+        <p:blipFill>
+          <a:blip r:embed="rId2">
+            <a:extLst>
+              <a:ext uri="{28A0092B-C50C-407E-A947-70E740481C1C}">
+                <a14:useLocalDpi xmlns:a14="http://schemas.microsoft.com/office/drawing/2010/main" val="0"/>
+              </a:ext>
+            </a:extLst>
+          </a:blip>
+          <a:stretch>
+            <a:fillRect/>
+          </a:stretch>
+        </p:blipFill>
+        <p:spPr>
+          <a:xfrm>
+            <a:off x="502438" y="994199"/>
+            <a:ext cx="11126164" cy="4869602"/>
+          </a:xfrm>
+          <a:prstGeom prst="rect">
+            <a:avLst/>
+          </a:prstGeom>
+        </p:spPr>
+      </p:pic>
+      <p:sp>
+        <p:nvSpPr>
+          <p:cNvPr id="3" name="TextBox 2">
+            <a:extLst>
+              <a:ext uri="{FF2B5EF4-FFF2-40B4-BE49-F238E27FC236}">
+                <a16:creationId xmlns:a16="http://schemas.microsoft.com/office/drawing/2014/main" id="{31B25432-B42E-E7BC-B703-F92055994958}"/>
+              </a:ext>
+            </a:extLst>
+          </p:cNvPr>
+          <p:cNvSpPr txBox="1"/>
+          <p:nvPr/>
+        </p:nvSpPr>
+        <p:spPr>
+          <a:xfrm>
+            <a:off x="7239000" y="544677"/>
+            <a:ext cx="4128345" cy="523220"/>
+          </a:xfrm>
+          <a:prstGeom prst="rect">
+            <a:avLst/>
+          </a:prstGeom>
+          <a:noFill/>
+        </p:spPr>
+        <p:txBody>
+          <a:bodyPr wrap="square">
+            <a:spAutoFit/>
+          </a:bodyPr>
+          <a:lstStyle/>
+          <a:p>
+            <a:r>
+              <a:rPr lang="en-US" sz="2800" b="1" dirty="0">
+                <a:solidFill>
+                  <a:srgbClr val="002060"/>
+                </a:solidFill>
+              </a:rPr>
+              <a:t>Artificial Neural Networks</a:t>
+            </a:r>
+          </a:p>
+        </p:txBody>
+      </p:sp>
+      <p:sp>
+        <p:nvSpPr>
+          <p:cNvPr id="5" name="TextBox 4">
+            <a:extLst>
+              <a:ext uri="{FF2B5EF4-FFF2-40B4-BE49-F238E27FC236}">
+                <a16:creationId xmlns:a16="http://schemas.microsoft.com/office/drawing/2014/main" id="{E18DD145-8005-4D1F-3D54-9EC56DBC4A06}"/>
+              </a:ext>
+            </a:extLst>
+          </p:cNvPr>
+          <p:cNvSpPr txBox="1"/>
+          <p:nvPr/>
+        </p:nvSpPr>
+        <p:spPr>
+          <a:xfrm>
+            <a:off x="1831523" y="544677"/>
+            <a:ext cx="2860221" cy="523220"/>
+          </a:xfrm>
+          <a:prstGeom prst="rect">
+            <a:avLst/>
+          </a:prstGeom>
+          <a:noFill/>
+        </p:spPr>
+        <p:txBody>
+          <a:bodyPr wrap="square">
+            <a:spAutoFit/>
+          </a:bodyPr>
+          <a:lstStyle/>
+          <a:p>
+            <a:r>
+              <a:rPr lang="en-US" sz="2800" b="1" kern="1200" dirty="0">
+                <a:solidFill>
+                  <a:srgbClr val="002060"/>
+                </a:solidFill>
+                <a:effectLst/>
+                <a:latin typeface="Calibri" panose="020F0502020204030204" pitchFamily="34" charset="0"/>
+                <a:ea typeface="+mn-ea"/>
+                <a:cs typeface="+mn-cs"/>
+              </a:rPr>
+              <a:t>Biological</a:t>
+            </a:r>
+            <a:r>
+              <a:rPr lang="en-US" sz="2800" kern="1200" dirty="0">
+                <a:solidFill>
+                  <a:srgbClr val="002060"/>
+                </a:solidFill>
+                <a:effectLst/>
+                <a:latin typeface="Calibri" panose="020F0502020204030204" pitchFamily="34" charset="0"/>
+                <a:ea typeface="+mn-ea"/>
+                <a:cs typeface="+mn-cs"/>
+              </a:rPr>
+              <a:t> </a:t>
+            </a:r>
+            <a:r>
+              <a:rPr lang="en-US" sz="2800" b="1" kern="1200" dirty="0">
+                <a:solidFill>
+                  <a:srgbClr val="002060"/>
+                </a:solidFill>
+                <a:effectLst/>
+                <a:latin typeface="Calibri" panose="020F0502020204030204" pitchFamily="34" charset="0"/>
+                <a:ea typeface="+mn-ea"/>
+                <a:cs typeface="+mn-cs"/>
+              </a:rPr>
+              <a:t>Neuron</a:t>
+            </a:r>
+            <a:r>
+              <a:rPr lang="en-US" sz="2800" kern="1200" dirty="0">
+                <a:solidFill>
+                  <a:srgbClr val="002060"/>
+                </a:solidFill>
+                <a:effectLst/>
+                <a:latin typeface="Calibri" panose="020F0502020204030204" pitchFamily="34" charset="0"/>
+                <a:ea typeface="+mn-ea"/>
+                <a:cs typeface="+mn-cs"/>
+              </a:rPr>
+              <a:t> </a:t>
+            </a:r>
+            <a:endParaRPr lang="en-IN" sz="2800" dirty="0">
+              <a:solidFill>
+                <a:srgbClr val="002060"/>
+              </a:solidFill>
+            </a:endParaRPr>
+          </a:p>
+        </p:txBody>
+      </p:sp>
+    </p:spTree>
+    <p:extLst>
+      <p:ext uri="{BB962C8B-B14F-4D97-AF65-F5344CB8AC3E}">
+        <p14:creationId xmlns:p14="http://schemas.microsoft.com/office/powerpoint/2010/main" val="4115018683"/>
+      </p:ext>
+    </p:extLst>
+  </p:cSld>
+  <p:clrMapOvr>
+    <a:masterClrMapping/>
+  </p:clrMapOvr>
+</p:sld>
+</file>
+
+<file path=ppt/slides/slide69.xml><?xml version="1.0" encoding="utf-8"?>
+<p:sld xmlns:a="http://schemas.openxmlformats.org/drawingml/2006/main" xmlns:r="http://schemas.openxmlformats.org/officeDocument/2006/relationships" xmlns:p="http://schemas.openxmlformats.org/presentationml/2006/main">
+  <p:cSld>
+    <p:spTree>
+      <p:nvGrpSpPr>
+        <p:cNvPr id="1" name=""/>
+        <p:cNvGrpSpPr/>
+        <p:nvPr/>
+      </p:nvGrpSpPr>
+      <p:grpSpPr>
+        <a:xfrm>
+          <a:off x="0" y="0"/>
+          <a:ext cx="0" cy="0"/>
+          <a:chOff x="0" y="0"/>
+          <a:chExt cx="0" cy="0"/>
+        </a:xfrm>
+      </p:grpSpPr>
+      <p:sp>
+        <p:nvSpPr>
+          <p:cNvPr id="3" name="Content Placeholder 2">
+            <a:extLst>
+              <a:ext uri="{FF2B5EF4-FFF2-40B4-BE49-F238E27FC236}">
+                <a16:creationId xmlns:a16="http://schemas.microsoft.com/office/drawing/2014/main" id="{9A15462E-46E9-D2B4-2ED7-2FC504CE798F}"/>
+              </a:ext>
+            </a:extLst>
+          </p:cNvPr>
+          <p:cNvSpPr>
+            <a:spLocks noGrp="1"/>
+          </p:cNvSpPr>
+          <p:nvPr>
+            <p:ph idx="1"/>
+          </p:nvPr>
+        </p:nvSpPr>
+        <p:spPr>
+          <a:xfrm>
+            <a:off x="777240" y="849086"/>
+            <a:ext cx="10659110" cy="5327877"/>
+          </a:xfrm>
+        </p:spPr>
+        <p:txBody>
+          <a:bodyPr>
+            <a:normAutofit/>
+          </a:bodyPr>
+          <a:lstStyle/>
+          <a:p>
+            <a:pPr marL="0" indent="0">
+              <a:buNone/>
+            </a:pPr>
+            <a:r>
+              <a:rPr lang="en-US" sz="2800" b="1" dirty="0"/>
+              <a:t>Building and Training Neural Networks using </a:t>
+            </a:r>
+            <a:r>
+              <a:rPr lang="en-US" sz="2800" b="1" dirty="0">
+                <a:solidFill>
+                  <a:srgbClr val="C00000"/>
+                </a:solidFill>
+              </a:rPr>
+              <a:t>TensorFlow</a:t>
+            </a:r>
+            <a:r>
+              <a:rPr lang="en-US" sz="2800" b="1" dirty="0"/>
+              <a:t> and </a:t>
+            </a:r>
+            <a:r>
+              <a:rPr lang="en-US" sz="2800" b="1" dirty="0" err="1">
+                <a:solidFill>
+                  <a:srgbClr val="C00000"/>
+                </a:solidFill>
+              </a:rPr>
+              <a:t>Keras</a:t>
+            </a:r>
+            <a:endParaRPr lang="en-US" sz="2800" b="1" dirty="0">
+              <a:solidFill>
+                <a:srgbClr val="C00000"/>
+              </a:solidFill>
+            </a:endParaRPr>
+          </a:p>
+          <a:p>
+            <a:pPr marL="0" indent="0">
+              <a:buNone/>
+            </a:pPr>
+            <a:r>
+              <a:rPr lang="en-US" sz="2400" b="1" dirty="0"/>
+              <a:t>What are TensorFlow and </a:t>
+            </a:r>
+            <a:r>
+              <a:rPr lang="en-US" sz="2400" b="1" dirty="0" err="1"/>
+              <a:t>Keras</a:t>
+            </a:r>
+            <a:r>
+              <a:rPr lang="en-US" sz="2400" b="1" dirty="0"/>
+              <a:t>?</a:t>
+            </a:r>
+          </a:p>
+          <a:p>
+            <a:pPr marL="0" indent="0">
+              <a:buNone/>
+            </a:pPr>
+            <a:endParaRPr lang="en-IN" sz="2400" b="1" dirty="0">
+              <a:solidFill>
+                <a:srgbClr val="C00000"/>
+              </a:solidFill>
+            </a:endParaRPr>
+          </a:p>
+          <a:p>
+            <a:pPr marL="0" indent="0">
+              <a:buNone/>
+            </a:pPr>
+            <a:endParaRPr lang="en-IN" sz="2400" b="1" dirty="0">
+              <a:solidFill>
+                <a:srgbClr val="C00000"/>
+              </a:solidFill>
+            </a:endParaRPr>
+          </a:p>
+          <a:p>
+            <a:pPr marL="0" indent="0">
+              <a:buNone/>
+            </a:pPr>
+            <a:endParaRPr lang="en-IN" sz="2400" b="1" dirty="0">
+              <a:solidFill>
+                <a:srgbClr val="C00000"/>
+              </a:solidFill>
+            </a:endParaRPr>
+          </a:p>
+          <a:p>
+            <a:pPr marL="0" indent="0">
+              <a:buNone/>
+            </a:pPr>
+            <a:endParaRPr lang="en-IN" sz="2400" b="1" dirty="0">
+              <a:solidFill>
+                <a:srgbClr val="C00000"/>
+              </a:solidFill>
+            </a:endParaRPr>
+          </a:p>
+          <a:p>
+            <a:pPr marL="0" indent="0">
+              <a:buNone/>
+            </a:pPr>
+            <a:endParaRPr lang="en-IN" sz="2400" b="1" dirty="0">
+              <a:solidFill>
+                <a:srgbClr val="C00000"/>
+              </a:solidFill>
+            </a:endParaRPr>
+          </a:p>
+          <a:p>
+            <a:pPr marL="0" indent="0">
+              <a:buNone/>
+            </a:pPr>
+            <a:endParaRPr lang="en-IN" sz="2400" b="1" dirty="0">
+              <a:solidFill>
+                <a:srgbClr val="C00000"/>
+              </a:solidFill>
+            </a:endParaRPr>
+          </a:p>
+          <a:p>
+            <a:pPr marL="0" indent="0">
+              <a:buNone/>
+            </a:pPr>
+            <a:endParaRPr lang="en-US" sz="2400" dirty="0"/>
+          </a:p>
+          <a:p>
+            <a:pPr marL="0" indent="0">
+              <a:buNone/>
+            </a:pPr>
+            <a:r>
+              <a:rPr lang="en-US" sz="2400" dirty="0"/>
+              <a:t>Think of </a:t>
+            </a:r>
+            <a:r>
+              <a:rPr lang="en-US" sz="2400" b="1" dirty="0"/>
+              <a:t>TensorFlow as the engine</a:t>
+            </a:r>
+            <a:r>
+              <a:rPr lang="en-US" sz="2400" dirty="0"/>
+              <a:t>, and </a:t>
+            </a:r>
+            <a:r>
+              <a:rPr lang="en-US" sz="2400" b="1" dirty="0" err="1"/>
+              <a:t>Keras</a:t>
+            </a:r>
+            <a:r>
+              <a:rPr lang="en-US" sz="2400" b="1" dirty="0"/>
+              <a:t> as the user-friendly steering wheel</a:t>
+            </a:r>
+            <a:r>
+              <a:rPr lang="en-US" sz="2400" dirty="0"/>
+              <a:t>.</a:t>
+            </a:r>
+            <a:endParaRPr lang="en-IN" sz="2400" b="1" dirty="0">
+              <a:solidFill>
+                <a:srgbClr val="C00000"/>
+              </a:solidFill>
+            </a:endParaRPr>
+          </a:p>
+        </p:txBody>
+      </p:sp>
+      <p:graphicFrame>
+        <p:nvGraphicFramePr>
+          <p:cNvPr id="4" name="Table 3">
+            <a:extLst>
+              <a:ext uri="{FF2B5EF4-FFF2-40B4-BE49-F238E27FC236}">
+                <a16:creationId xmlns:a16="http://schemas.microsoft.com/office/drawing/2014/main" id="{5DEB3E9B-424A-10DC-EB5B-8602F28CD8A8}"/>
+              </a:ext>
+            </a:extLst>
+          </p:cNvPr>
+          <p:cNvGraphicFramePr>
+            <a:graphicFrameLocks noGrp="1"/>
+          </p:cNvGraphicFramePr>
+          <p:nvPr>
+            <p:extLst>
+              <p:ext uri="{D42A27DB-BD31-4B8C-83A1-F6EECF244321}">
+                <p14:modId xmlns:p14="http://schemas.microsoft.com/office/powerpoint/2010/main" val="596336048"/>
+              </p:ext>
+            </p:extLst>
+          </p:nvPr>
+        </p:nvGraphicFramePr>
+        <p:xfrm>
+          <a:off x="1001690" y="2217506"/>
+          <a:ext cx="10210210" cy="2147665"/>
+        </p:xfrm>
+        <a:graphic>
+          <a:graphicData uri="http://schemas.openxmlformats.org/drawingml/2006/table">
+            <a:tbl>
+              <a:tblPr firstRow="1" firstCol="1" bandRow="1">
+                <a:tableStyleId>{5C22544A-7EE6-4342-B048-85BDC9FD1C3A}</a:tableStyleId>
+              </a:tblPr>
+              <a:tblGrid>
+                <a:gridCol w="2035038">
+                  <a:extLst>
+                    <a:ext uri="{9D8B030D-6E8A-4147-A177-3AD203B41FA5}">
+                      <a16:colId xmlns:a16="http://schemas.microsoft.com/office/drawing/2014/main" val="6534079"/>
+                    </a:ext>
+                  </a:extLst>
+                </a:gridCol>
+                <a:gridCol w="4572017">
+                  <a:extLst>
+                    <a:ext uri="{9D8B030D-6E8A-4147-A177-3AD203B41FA5}">
+                      <a16:colId xmlns:a16="http://schemas.microsoft.com/office/drawing/2014/main" val="344316579"/>
+                    </a:ext>
+                  </a:extLst>
+                </a:gridCol>
+                <a:gridCol w="3603155">
+                  <a:extLst>
+                    <a:ext uri="{9D8B030D-6E8A-4147-A177-3AD203B41FA5}">
+                      <a16:colId xmlns:a16="http://schemas.microsoft.com/office/drawing/2014/main" val="1323157218"/>
+                    </a:ext>
+                  </a:extLst>
+                </a:gridCol>
+              </a:tblGrid>
+              <a:tr h="420379">
+                <a:tc>
+                  <a:txBody>
+                    <a:bodyPr/>
+                    <a:lstStyle/>
+                    <a:p>
+                      <a:pPr>
+                        <a:lnSpc>
+                          <a:spcPct val="115000"/>
+                        </a:lnSpc>
+                        <a:spcAft>
+                          <a:spcPts val="800"/>
+                        </a:spcAft>
+                        <a:buNone/>
+                      </a:pPr>
+                      <a:r>
+                        <a:rPr lang="en-IN" sz="2400" kern="100">
+                          <a:effectLst/>
+                        </a:rPr>
+                        <a:t>Tool</a:t>
+                      </a:r>
+                      <a:endParaRPr lang="en-IN" sz="2400" kern="100">
+                        <a:effectLst/>
+                        <a:latin typeface="Aptos" panose="020B0004020202020204" pitchFamily="34" charset="0"/>
+                        <a:ea typeface="Aptos" panose="020B0004020202020204" pitchFamily="34" charset="0"/>
+                        <a:cs typeface="Times New Roman" panose="02020603050405020304" pitchFamily="18" charset="0"/>
+                      </a:endParaRPr>
+                    </a:p>
+                  </a:txBody>
+                  <a:tcPr marL="68580" marR="68580" marT="0" marB="0"/>
+                </a:tc>
+                <a:tc>
+                  <a:txBody>
+                    <a:bodyPr/>
+                    <a:lstStyle/>
+                    <a:p>
+                      <a:pPr>
+                        <a:lnSpc>
+                          <a:spcPct val="115000"/>
+                        </a:lnSpc>
+                        <a:spcAft>
+                          <a:spcPts val="800"/>
+                        </a:spcAft>
+                        <a:buNone/>
+                      </a:pPr>
+                      <a:r>
+                        <a:rPr lang="en-IN" sz="2400" kern="100">
+                          <a:effectLst/>
+                        </a:rPr>
+                        <a:t>What it is</a:t>
+                      </a:r>
+                      <a:endParaRPr lang="en-IN" sz="2400" kern="100">
+                        <a:effectLst/>
+                        <a:latin typeface="Aptos" panose="020B0004020202020204" pitchFamily="34" charset="0"/>
+                        <a:ea typeface="Aptos" panose="020B0004020202020204" pitchFamily="34" charset="0"/>
+                        <a:cs typeface="Times New Roman" panose="02020603050405020304" pitchFamily="18" charset="0"/>
+                      </a:endParaRPr>
+                    </a:p>
+                  </a:txBody>
+                  <a:tcPr marL="68580" marR="68580" marT="0" marB="0"/>
+                </a:tc>
+                <a:tc>
+                  <a:txBody>
+                    <a:bodyPr/>
+                    <a:lstStyle/>
+                    <a:p>
+                      <a:pPr>
+                        <a:lnSpc>
+                          <a:spcPct val="115000"/>
+                        </a:lnSpc>
+                        <a:spcAft>
+                          <a:spcPts val="800"/>
+                        </a:spcAft>
+                        <a:buNone/>
+                      </a:pPr>
+                      <a:r>
+                        <a:rPr lang="en-IN" sz="2400" kern="100">
+                          <a:effectLst/>
+                        </a:rPr>
+                        <a:t>Purpose</a:t>
+                      </a:r>
+                      <a:endParaRPr lang="en-IN" sz="2400" kern="100">
+                        <a:effectLst/>
+                        <a:latin typeface="Aptos" panose="020B0004020202020204" pitchFamily="34" charset="0"/>
+                        <a:ea typeface="Aptos" panose="020B0004020202020204" pitchFamily="34" charset="0"/>
+                        <a:cs typeface="Times New Roman" panose="02020603050405020304" pitchFamily="18" charset="0"/>
+                      </a:endParaRPr>
+                    </a:p>
+                  </a:txBody>
+                  <a:tcPr marL="68580" marR="68580" marT="0" marB="0"/>
+                </a:tc>
+                <a:extLst>
+                  <a:ext uri="{0D108BD9-81ED-4DB2-BD59-A6C34878D82A}">
+                    <a16:rowId xmlns:a16="http://schemas.microsoft.com/office/drawing/2014/main" val="291637699"/>
+                  </a:ext>
+                </a:extLst>
+              </a:tr>
+              <a:tr h="863643">
+                <a:tc>
+                  <a:txBody>
+                    <a:bodyPr/>
+                    <a:lstStyle/>
+                    <a:p>
+                      <a:pPr>
+                        <a:lnSpc>
+                          <a:spcPct val="115000"/>
+                        </a:lnSpc>
+                        <a:spcAft>
+                          <a:spcPts val="800"/>
+                        </a:spcAft>
+                        <a:buNone/>
+                      </a:pPr>
+                      <a:r>
+                        <a:rPr lang="en-IN" sz="2400" kern="100" dirty="0">
+                          <a:effectLst/>
+                        </a:rPr>
+                        <a:t>TensorFlow</a:t>
+                      </a:r>
+                      <a:endParaRPr lang="en-IN" sz="2400" kern="100" dirty="0">
+                        <a:effectLst/>
+                        <a:latin typeface="Aptos" panose="020B0004020202020204" pitchFamily="34" charset="0"/>
+                        <a:ea typeface="Aptos" panose="020B0004020202020204" pitchFamily="34" charset="0"/>
+                        <a:cs typeface="Times New Roman" panose="02020603050405020304" pitchFamily="18" charset="0"/>
+                      </a:endParaRPr>
+                    </a:p>
+                  </a:txBody>
+                  <a:tcPr marL="68580" marR="68580" marT="0" marB="0"/>
+                </a:tc>
+                <a:tc>
+                  <a:txBody>
+                    <a:bodyPr/>
+                    <a:lstStyle/>
+                    <a:p>
+                      <a:pPr>
+                        <a:lnSpc>
+                          <a:spcPct val="115000"/>
+                        </a:lnSpc>
+                        <a:spcAft>
+                          <a:spcPts val="800"/>
+                        </a:spcAft>
+                        <a:buNone/>
+                      </a:pPr>
+                      <a:r>
+                        <a:rPr lang="en-IN" sz="2400" kern="100" dirty="0">
+                          <a:effectLst/>
+                        </a:rPr>
+                        <a:t>An open-source ML library by Google</a:t>
+                      </a:r>
+                      <a:endParaRPr lang="en-IN" sz="2400" kern="100" dirty="0">
+                        <a:effectLst/>
+                        <a:latin typeface="Aptos" panose="020B0004020202020204" pitchFamily="34" charset="0"/>
+                        <a:ea typeface="Aptos" panose="020B0004020202020204" pitchFamily="34" charset="0"/>
+                        <a:cs typeface="Times New Roman" panose="02020603050405020304" pitchFamily="18" charset="0"/>
+                      </a:endParaRPr>
+                    </a:p>
+                  </a:txBody>
+                  <a:tcPr marL="68580" marR="68580" marT="0" marB="0"/>
+                </a:tc>
+                <a:tc>
+                  <a:txBody>
+                    <a:bodyPr/>
+                    <a:lstStyle/>
+                    <a:p>
+                      <a:pPr>
+                        <a:lnSpc>
+                          <a:spcPct val="115000"/>
+                        </a:lnSpc>
+                        <a:spcAft>
+                          <a:spcPts val="800"/>
+                        </a:spcAft>
+                        <a:buNone/>
+                      </a:pPr>
+                      <a:r>
+                        <a:rPr lang="en-IN" sz="2400" kern="100">
+                          <a:effectLst/>
+                        </a:rPr>
+                        <a:t>To build and train ML models</a:t>
+                      </a:r>
+                      <a:endParaRPr lang="en-IN" sz="2400" kern="100">
+                        <a:effectLst/>
+                        <a:latin typeface="Aptos" panose="020B0004020202020204" pitchFamily="34" charset="0"/>
+                        <a:ea typeface="Aptos" panose="020B0004020202020204" pitchFamily="34" charset="0"/>
+                        <a:cs typeface="Times New Roman" panose="02020603050405020304" pitchFamily="18" charset="0"/>
+                      </a:endParaRPr>
+                    </a:p>
+                  </a:txBody>
+                  <a:tcPr marL="68580" marR="68580" marT="0" marB="0"/>
+                </a:tc>
+                <a:extLst>
+                  <a:ext uri="{0D108BD9-81ED-4DB2-BD59-A6C34878D82A}">
+                    <a16:rowId xmlns:a16="http://schemas.microsoft.com/office/drawing/2014/main" val="557529135"/>
+                  </a:ext>
+                </a:extLst>
+              </a:tr>
+              <a:tr h="863643">
+                <a:tc>
+                  <a:txBody>
+                    <a:bodyPr/>
+                    <a:lstStyle/>
+                    <a:p>
+                      <a:pPr>
+                        <a:lnSpc>
+                          <a:spcPct val="115000"/>
+                        </a:lnSpc>
+                        <a:spcAft>
+                          <a:spcPts val="800"/>
+                        </a:spcAft>
+                        <a:buNone/>
+                      </a:pPr>
+                      <a:r>
+                        <a:rPr lang="en-IN" sz="2400" kern="100" dirty="0" err="1">
+                          <a:effectLst/>
+                        </a:rPr>
+                        <a:t>Keras</a:t>
+                      </a:r>
+                      <a:endParaRPr lang="en-IN" sz="2400" kern="100" dirty="0">
+                        <a:effectLst/>
+                        <a:latin typeface="Aptos" panose="020B0004020202020204" pitchFamily="34" charset="0"/>
+                        <a:ea typeface="Aptos" panose="020B0004020202020204" pitchFamily="34" charset="0"/>
+                        <a:cs typeface="Times New Roman" panose="02020603050405020304" pitchFamily="18" charset="0"/>
+                      </a:endParaRPr>
+                    </a:p>
+                  </a:txBody>
+                  <a:tcPr marL="68580" marR="68580" marT="0" marB="0"/>
+                </a:tc>
+                <a:tc>
+                  <a:txBody>
+                    <a:bodyPr/>
+                    <a:lstStyle/>
+                    <a:p>
+                      <a:pPr>
+                        <a:lnSpc>
+                          <a:spcPct val="115000"/>
+                        </a:lnSpc>
+                        <a:spcAft>
+                          <a:spcPts val="800"/>
+                        </a:spcAft>
+                        <a:buNone/>
+                      </a:pPr>
+                      <a:r>
+                        <a:rPr lang="en-IN" sz="2400" kern="100">
+                          <a:effectLst/>
+                        </a:rPr>
+                        <a:t>A high-level API running on top of TensorFlow</a:t>
+                      </a:r>
+                      <a:endParaRPr lang="en-IN" sz="2400" kern="100">
+                        <a:effectLst/>
+                        <a:latin typeface="Aptos" panose="020B0004020202020204" pitchFamily="34" charset="0"/>
+                        <a:ea typeface="Aptos" panose="020B0004020202020204" pitchFamily="34" charset="0"/>
+                        <a:cs typeface="Times New Roman" panose="02020603050405020304" pitchFamily="18" charset="0"/>
+                      </a:endParaRPr>
+                    </a:p>
+                  </a:txBody>
+                  <a:tcPr marL="68580" marR="68580" marT="0" marB="0"/>
+                </a:tc>
+                <a:tc>
+                  <a:txBody>
+                    <a:bodyPr/>
+                    <a:lstStyle/>
+                    <a:p>
+                      <a:pPr>
+                        <a:lnSpc>
+                          <a:spcPct val="115000"/>
+                        </a:lnSpc>
+                        <a:spcAft>
+                          <a:spcPts val="800"/>
+                        </a:spcAft>
+                        <a:buNone/>
+                      </a:pPr>
+                      <a:r>
+                        <a:rPr lang="en-IN" sz="2400" kern="100" dirty="0">
+                          <a:effectLst/>
+                        </a:rPr>
+                        <a:t>Makes building neural networks easy</a:t>
+                      </a:r>
+                      <a:endParaRPr lang="en-IN" sz="2400" kern="100" dirty="0">
+                        <a:effectLst/>
+                        <a:latin typeface="Aptos" panose="020B0004020202020204" pitchFamily="34" charset="0"/>
+                        <a:ea typeface="Aptos" panose="020B0004020202020204" pitchFamily="34" charset="0"/>
+                        <a:cs typeface="Times New Roman" panose="02020603050405020304" pitchFamily="18" charset="0"/>
+                      </a:endParaRPr>
+                    </a:p>
+                  </a:txBody>
+                  <a:tcPr marL="68580" marR="68580" marT="0" marB="0"/>
+                </a:tc>
+                <a:extLst>
+                  <a:ext uri="{0D108BD9-81ED-4DB2-BD59-A6C34878D82A}">
+                    <a16:rowId xmlns:a16="http://schemas.microsoft.com/office/drawing/2014/main" val="143798918"/>
+                  </a:ext>
+                </a:extLst>
+              </a:tr>
+            </a:tbl>
+          </a:graphicData>
+        </a:graphic>
+      </p:graphicFrame>
+    </p:spTree>
+    <p:extLst>
+      <p:ext uri="{BB962C8B-B14F-4D97-AF65-F5344CB8AC3E}">
+        <p14:creationId xmlns:p14="http://schemas.microsoft.com/office/powerpoint/2010/main" val="4271306584"/>
       </p:ext>
     </p:extLst>
   </p:cSld>
@@ -26565,6 +31496,2122 @@
 </p:sld>
 </file>
 
+<file path=ppt/slides/slide70.xml><?xml version="1.0" encoding="utf-8"?>
+<p:sld xmlns:a="http://schemas.openxmlformats.org/drawingml/2006/main" xmlns:r="http://schemas.openxmlformats.org/officeDocument/2006/relationships" xmlns:p="http://schemas.openxmlformats.org/presentationml/2006/main">
+  <p:cSld>
+    <p:spTree>
+      <p:nvGrpSpPr>
+        <p:cNvPr id="1" name="">
+          <a:extLst>
+            <a:ext uri="{FF2B5EF4-FFF2-40B4-BE49-F238E27FC236}">
+              <a16:creationId xmlns:a16="http://schemas.microsoft.com/office/drawing/2014/main" id="{BED56D3B-2DDF-3C4D-7795-196F62118F85}"/>
+            </a:ext>
+          </a:extLst>
+        </p:cNvPr>
+        <p:cNvGrpSpPr/>
+        <p:nvPr/>
+      </p:nvGrpSpPr>
+      <p:grpSpPr>
+        <a:xfrm>
+          <a:off x="0" y="0"/>
+          <a:ext cx="0" cy="0"/>
+          <a:chOff x="0" y="0"/>
+          <a:chExt cx="0" cy="0"/>
+        </a:xfrm>
+      </p:grpSpPr>
+      <p:sp>
+        <p:nvSpPr>
+          <p:cNvPr id="3" name="Content Placeholder 2">
+            <a:extLst>
+              <a:ext uri="{FF2B5EF4-FFF2-40B4-BE49-F238E27FC236}">
+                <a16:creationId xmlns:a16="http://schemas.microsoft.com/office/drawing/2014/main" id="{FEE745EB-3581-F5A1-DF07-A9237DF7BEE6}"/>
+              </a:ext>
+            </a:extLst>
+          </p:cNvPr>
+          <p:cNvSpPr>
+            <a:spLocks noGrp="1"/>
+          </p:cNvSpPr>
+          <p:nvPr>
+            <p:ph idx="1"/>
+          </p:nvPr>
+        </p:nvSpPr>
+        <p:spPr>
+          <a:xfrm>
+            <a:off x="777240" y="849086"/>
+            <a:ext cx="10659110" cy="5327877"/>
+          </a:xfrm>
+        </p:spPr>
+        <p:txBody>
+          <a:bodyPr>
+            <a:normAutofit/>
+          </a:bodyPr>
+          <a:lstStyle/>
+          <a:p>
+            <a:pPr marL="0" indent="0">
+              <a:buNone/>
+            </a:pPr>
+            <a:r>
+              <a:rPr lang="en-US" sz="2800" b="1" dirty="0"/>
+              <a:t>Neural Network Workflow (Big Picture)</a:t>
+            </a:r>
+          </a:p>
+          <a:p>
+            <a:pPr marL="457200" indent="-457200">
+              <a:buFont typeface="+mj-lt"/>
+              <a:buAutoNum type="arabicPeriod"/>
+            </a:pPr>
+            <a:r>
+              <a:rPr lang="en-US" sz="2800" b="1" dirty="0">
+                <a:solidFill>
+                  <a:srgbClr val="C00000"/>
+                </a:solidFill>
+              </a:rPr>
+              <a:t>Import</a:t>
+            </a:r>
+            <a:r>
+              <a:rPr lang="en-US" sz="2800" b="1" dirty="0"/>
+              <a:t> libraries</a:t>
+            </a:r>
+            <a:endParaRPr lang="en-US" sz="2800" dirty="0"/>
+          </a:p>
+          <a:p>
+            <a:pPr marL="457200" indent="-457200">
+              <a:buFont typeface="+mj-lt"/>
+              <a:buAutoNum type="arabicPeriod"/>
+            </a:pPr>
+            <a:r>
+              <a:rPr lang="en-US" sz="2800" b="1" dirty="0"/>
+              <a:t>Prepare data</a:t>
+            </a:r>
+            <a:endParaRPr lang="en-US" sz="2800" dirty="0"/>
+          </a:p>
+          <a:p>
+            <a:pPr marL="457200" indent="-457200">
+              <a:buFont typeface="+mj-lt"/>
+              <a:buAutoNum type="arabicPeriod"/>
+            </a:pPr>
+            <a:r>
+              <a:rPr lang="en-US" sz="2800" b="1" dirty="0"/>
+              <a:t>Build the model</a:t>
+            </a:r>
+            <a:endParaRPr lang="en-US" sz="2800" dirty="0"/>
+          </a:p>
+          <a:p>
+            <a:pPr marL="457200" indent="-457200">
+              <a:buFont typeface="+mj-lt"/>
+              <a:buAutoNum type="arabicPeriod"/>
+            </a:pPr>
+            <a:r>
+              <a:rPr lang="en-US" sz="2800" b="1" dirty="0"/>
+              <a:t>Compile the model</a:t>
+            </a:r>
+            <a:endParaRPr lang="en-US" sz="2800" dirty="0"/>
+          </a:p>
+          <a:p>
+            <a:pPr marL="457200" indent="-457200">
+              <a:buFont typeface="+mj-lt"/>
+              <a:buAutoNum type="arabicPeriod"/>
+            </a:pPr>
+            <a:r>
+              <a:rPr lang="en-US" sz="2800" b="1" dirty="0"/>
+              <a:t>Train the model</a:t>
+            </a:r>
+            <a:endParaRPr lang="en-US" sz="2800" dirty="0"/>
+          </a:p>
+          <a:p>
+            <a:pPr marL="457200" indent="-457200">
+              <a:buFont typeface="+mj-lt"/>
+              <a:buAutoNum type="arabicPeriod"/>
+            </a:pPr>
+            <a:r>
+              <a:rPr lang="en-US" sz="2800" b="1" dirty="0"/>
+              <a:t>Evaluate the model</a:t>
+            </a:r>
+            <a:endParaRPr lang="en-US" sz="2800" dirty="0"/>
+          </a:p>
+          <a:p>
+            <a:pPr marL="457200" indent="-457200">
+              <a:buFont typeface="+mj-lt"/>
+              <a:buAutoNum type="arabicPeriod"/>
+            </a:pPr>
+            <a:r>
+              <a:rPr lang="en-US" sz="2800" b="1" dirty="0"/>
+              <a:t>Make predictions</a:t>
+            </a:r>
+            <a:endParaRPr lang="en-US" sz="2800" dirty="0"/>
+          </a:p>
+          <a:p>
+            <a:pPr marL="0" indent="0">
+              <a:buNone/>
+            </a:pPr>
+            <a:endParaRPr lang="en-IN" sz="2800" dirty="0"/>
+          </a:p>
+        </p:txBody>
+      </p:sp>
+    </p:spTree>
+    <p:extLst>
+      <p:ext uri="{BB962C8B-B14F-4D97-AF65-F5344CB8AC3E}">
+        <p14:creationId xmlns:p14="http://schemas.microsoft.com/office/powerpoint/2010/main" val="523843877"/>
+      </p:ext>
+    </p:extLst>
+  </p:cSld>
+  <p:clrMapOvr>
+    <a:masterClrMapping/>
+  </p:clrMapOvr>
+</p:sld>
+</file>
+
+<file path=ppt/slides/slide71.xml><?xml version="1.0" encoding="utf-8"?>
+<p:sld xmlns:a="http://schemas.openxmlformats.org/drawingml/2006/main" xmlns:r="http://schemas.openxmlformats.org/officeDocument/2006/relationships" xmlns:p="http://schemas.openxmlformats.org/presentationml/2006/main">
+  <p:cSld>
+    <p:spTree>
+      <p:nvGrpSpPr>
+        <p:cNvPr id="1" name="">
+          <a:extLst>
+            <a:ext uri="{FF2B5EF4-FFF2-40B4-BE49-F238E27FC236}">
+              <a16:creationId xmlns:a16="http://schemas.microsoft.com/office/drawing/2014/main" id="{773CC874-C466-6E95-2222-658B1B028192}"/>
+            </a:ext>
+          </a:extLst>
+        </p:cNvPr>
+        <p:cNvGrpSpPr/>
+        <p:nvPr/>
+      </p:nvGrpSpPr>
+      <p:grpSpPr>
+        <a:xfrm>
+          <a:off x="0" y="0"/>
+          <a:ext cx="0" cy="0"/>
+          <a:chOff x="0" y="0"/>
+          <a:chExt cx="0" cy="0"/>
+        </a:xfrm>
+      </p:grpSpPr>
+      <p:sp>
+        <p:nvSpPr>
+          <p:cNvPr id="3" name="Content Placeholder 2">
+            <a:extLst>
+              <a:ext uri="{FF2B5EF4-FFF2-40B4-BE49-F238E27FC236}">
+                <a16:creationId xmlns:a16="http://schemas.microsoft.com/office/drawing/2014/main" id="{36726783-1FAE-4345-45AF-93027EE01B06}"/>
+              </a:ext>
+            </a:extLst>
+          </p:cNvPr>
+          <p:cNvSpPr>
+            <a:spLocks noGrp="1"/>
+          </p:cNvSpPr>
+          <p:nvPr>
+            <p:ph idx="1"/>
+          </p:nvPr>
+        </p:nvSpPr>
+        <p:spPr>
+          <a:xfrm>
+            <a:off x="994955" y="250372"/>
+            <a:ext cx="10659110" cy="5872163"/>
+          </a:xfrm>
+        </p:spPr>
+        <p:txBody>
+          <a:bodyPr>
+            <a:normAutofit/>
+          </a:bodyPr>
+          <a:lstStyle/>
+          <a:p>
+            <a:pPr marL="0" indent="0">
+              <a:buNone/>
+            </a:pPr>
+            <a:r>
+              <a:rPr lang="en-US" sz="2400" b="1" dirty="0"/>
+              <a:t>Simple Example</a:t>
+            </a:r>
+            <a:r>
+              <a:rPr lang="en-US" sz="2400" dirty="0"/>
+              <a:t>: </a:t>
+            </a:r>
+            <a:r>
+              <a:rPr lang="en-US" sz="2400" b="1" dirty="0">
+                <a:solidFill>
+                  <a:srgbClr val="002060"/>
+                </a:solidFill>
+              </a:rPr>
+              <a:t>Classifying handwritten digits </a:t>
+            </a:r>
+            <a:r>
+              <a:rPr lang="en-US" sz="2400" dirty="0"/>
+              <a:t>(</a:t>
+            </a:r>
+            <a:r>
+              <a:rPr lang="en-US" sz="2400" b="1" dirty="0">
+                <a:solidFill>
+                  <a:srgbClr val="C00000"/>
+                </a:solidFill>
+              </a:rPr>
+              <a:t>MNIST</a:t>
+            </a:r>
+            <a:r>
+              <a:rPr lang="en-US" sz="2400" dirty="0"/>
+              <a:t> dataset)</a:t>
+            </a:r>
+          </a:p>
+          <a:p>
+            <a:pPr marL="0" indent="0">
+              <a:buNone/>
+            </a:pPr>
+            <a:endParaRPr lang="en-IN" sz="2400" dirty="0"/>
+          </a:p>
+        </p:txBody>
+      </p:sp>
+      <p:pic>
+        <p:nvPicPr>
+          <p:cNvPr id="4" name="Picture 3">
+            <a:extLst>
+              <a:ext uri="{FF2B5EF4-FFF2-40B4-BE49-F238E27FC236}">
+                <a16:creationId xmlns:a16="http://schemas.microsoft.com/office/drawing/2014/main" id="{3C459CDD-13C9-3DDF-DC4C-A4125A7B4D49}"/>
+              </a:ext>
+            </a:extLst>
+          </p:cNvPr>
+          <p:cNvPicPr>
+            <a:picLocks noChangeAspect="1"/>
+          </p:cNvPicPr>
+          <p:nvPr/>
+        </p:nvPicPr>
+        <p:blipFill>
+          <a:blip r:embed="rId2"/>
+          <a:stretch>
+            <a:fillRect/>
+          </a:stretch>
+        </p:blipFill>
+        <p:spPr>
+          <a:xfrm>
+            <a:off x="1251240" y="866348"/>
+            <a:ext cx="9013987" cy="5470320"/>
+          </a:xfrm>
+          <a:prstGeom prst="rect">
+            <a:avLst/>
+          </a:prstGeom>
+        </p:spPr>
+      </p:pic>
+    </p:spTree>
+    <p:extLst>
+      <p:ext uri="{BB962C8B-B14F-4D97-AF65-F5344CB8AC3E}">
+        <p14:creationId xmlns:p14="http://schemas.microsoft.com/office/powerpoint/2010/main" val="614986995"/>
+      </p:ext>
+    </p:extLst>
+  </p:cSld>
+  <p:clrMapOvr>
+    <a:masterClrMapping/>
+  </p:clrMapOvr>
+</p:sld>
+</file>
+
+<file path=ppt/slides/slide72.xml><?xml version="1.0" encoding="utf-8"?>
+<p:sld xmlns:a="http://schemas.openxmlformats.org/drawingml/2006/main" xmlns:r="http://schemas.openxmlformats.org/officeDocument/2006/relationships" xmlns:p="http://schemas.openxmlformats.org/presentationml/2006/main">
+  <p:cSld>
+    <p:spTree>
+      <p:nvGrpSpPr>
+        <p:cNvPr id="1" name="">
+          <a:extLst>
+            <a:ext uri="{FF2B5EF4-FFF2-40B4-BE49-F238E27FC236}">
+              <a16:creationId xmlns:a16="http://schemas.microsoft.com/office/drawing/2014/main" id="{2DAF1174-67C4-A354-A7A5-A39A88F8B0E5}"/>
+            </a:ext>
+          </a:extLst>
+        </p:cNvPr>
+        <p:cNvGrpSpPr/>
+        <p:nvPr/>
+      </p:nvGrpSpPr>
+      <p:grpSpPr>
+        <a:xfrm>
+          <a:off x="0" y="0"/>
+          <a:ext cx="0" cy="0"/>
+          <a:chOff x="0" y="0"/>
+          <a:chExt cx="0" cy="0"/>
+        </a:xfrm>
+      </p:grpSpPr>
+      <p:sp>
+        <p:nvSpPr>
+          <p:cNvPr id="3" name="Content Placeholder 2">
+            <a:extLst>
+              <a:ext uri="{FF2B5EF4-FFF2-40B4-BE49-F238E27FC236}">
+                <a16:creationId xmlns:a16="http://schemas.microsoft.com/office/drawing/2014/main" id="{B132ED93-85B8-EC86-43D8-39C311614C96}"/>
+              </a:ext>
+            </a:extLst>
+          </p:cNvPr>
+          <p:cNvSpPr>
+            <a:spLocks noGrp="1"/>
+          </p:cNvSpPr>
+          <p:nvPr>
+            <p:ph idx="1"/>
+          </p:nvPr>
+        </p:nvSpPr>
+        <p:spPr>
+          <a:xfrm>
+            <a:off x="777240" y="849086"/>
+            <a:ext cx="10659110" cy="5327877"/>
+          </a:xfrm>
+        </p:spPr>
+        <p:txBody>
+          <a:bodyPr>
+            <a:normAutofit/>
+          </a:bodyPr>
+          <a:lstStyle/>
+          <a:p>
+            <a:pPr marL="0" indent="0">
+              <a:buNone/>
+            </a:pPr>
+            <a:r>
+              <a:rPr lang="en-US" sz="2400" b="1" dirty="0"/>
+              <a:t>Build the Neural Network Model</a:t>
+            </a:r>
+          </a:p>
+          <a:p>
+            <a:pPr marL="0" indent="0">
+              <a:buNone/>
+            </a:pPr>
+            <a:endParaRPr lang="en-IN" sz="2400" b="1" dirty="0"/>
+          </a:p>
+        </p:txBody>
+      </p:sp>
+      <p:pic>
+        <p:nvPicPr>
+          <p:cNvPr id="4" name="Picture 3">
+            <a:extLst>
+              <a:ext uri="{FF2B5EF4-FFF2-40B4-BE49-F238E27FC236}">
+                <a16:creationId xmlns:a16="http://schemas.microsoft.com/office/drawing/2014/main" id="{94C17D7C-F644-528E-F167-3382FEFA2E80}"/>
+              </a:ext>
+            </a:extLst>
+          </p:cNvPr>
+          <p:cNvPicPr>
+            <a:picLocks noChangeAspect="1"/>
+          </p:cNvPicPr>
+          <p:nvPr/>
+        </p:nvPicPr>
+        <p:blipFill>
+          <a:blip r:embed="rId2"/>
+          <a:stretch>
+            <a:fillRect/>
+          </a:stretch>
+        </p:blipFill>
+        <p:spPr>
+          <a:xfrm>
+            <a:off x="0" y="1741815"/>
+            <a:ext cx="12192000" cy="2264028"/>
+          </a:xfrm>
+          <a:prstGeom prst="rect">
+            <a:avLst/>
+          </a:prstGeom>
+        </p:spPr>
+      </p:pic>
+    </p:spTree>
+    <p:extLst>
+      <p:ext uri="{BB962C8B-B14F-4D97-AF65-F5344CB8AC3E}">
+        <p14:creationId xmlns:p14="http://schemas.microsoft.com/office/powerpoint/2010/main" val="4015808234"/>
+      </p:ext>
+    </p:extLst>
+  </p:cSld>
+  <p:clrMapOvr>
+    <a:masterClrMapping/>
+  </p:clrMapOvr>
+</p:sld>
+</file>
+
+<file path=ppt/slides/slide73.xml><?xml version="1.0" encoding="utf-8"?>
+<p:sld xmlns:a="http://schemas.openxmlformats.org/drawingml/2006/main" xmlns:r="http://schemas.openxmlformats.org/officeDocument/2006/relationships" xmlns:p="http://schemas.openxmlformats.org/presentationml/2006/main">
+  <p:cSld>
+    <p:spTree>
+      <p:nvGrpSpPr>
+        <p:cNvPr id="1" name="">
+          <a:extLst>
+            <a:ext uri="{FF2B5EF4-FFF2-40B4-BE49-F238E27FC236}">
+              <a16:creationId xmlns:a16="http://schemas.microsoft.com/office/drawing/2014/main" id="{1D290A5C-657A-F850-F308-5D43964CDEEE}"/>
+            </a:ext>
+          </a:extLst>
+        </p:cNvPr>
+        <p:cNvGrpSpPr/>
+        <p:nvPr/>
+      </p:nvGrpSpPr>
+      <p:grpSpPr>
+        <a:xfrm>
+          <a:off x="0" y="0"/>
+          <a:ext cx="0" cy="0"/>
+          <a:chOff x="0" y="0"/>
+          <a:chExt cx="0" cy="0"/>
+        </a:xfrm>
+      </p:grpSpPr>
+      <p:sp>
+        <p:nvSpPr>
+          <p:cNvPr id="3" name="Content Placeholder 2">
+            <a:extLst>
+              <a:ext uri="{FF2B5EF4-FFF2-40B4-BE49-F238E27FC236}">
+                <a16:creationId xmlns:a16="http://schemas.microsoft.com/office/drawing/2014/main" id="{11EEA996-FB02-CC30-D945-C23FF7317D3E}"/>
+              </a:ext>
+            </a:extLst>
+          </p:cNvPr>
+          <p:cNvSpPr>
+            <a:spLocks noGrp="1"/>
+          </p:cNvSpPr>
+          <p:nvPr>
+            <p:ph idx="1"/>
+          </p:nvPr>
+        </p:nvSpPr>
+        <p:spPr>
+          <a:xfrm>
+            <a:off x="777240" y="849086"/>
+            <a:ext cx="10659110" cy="5327877"/>
+          </a:xfrm>
+        </p:spPr>
+        <p:txBody>
+          <a:bodyPr>
+            <a:normAutofit/>
+          </a:bodyPr>
+          <a:lstStyle/>
+          <a:p>
+            <a:pPr marL="0" indent="0">
+              <a:buNone/>
+            </a:pPr>
+            <a:r>
+              <a:rPr lang="en-IN" sz="2400" b="1" dirty="0"/>
+              <a:t>Compile the Model</a:t>
+            </a:r>
+          </a:p>
+        </p:txBody>
+      </p:sp>
+      <p:pic>
+        <p:nvPicPr>
+          <p:cNvPr id="4" name="Picture 3">
+            <a:extLst>
+              <a:ext uri="{FF2B5EF4-FFF2-40B4-BE49-F238E27FC236}">
+                <a16:creationId xmlns:a16="http://schemas.microsoft.com/office/drawing/2014/main" id="{686FB017-1DED-E854-59CA-1CDD492B9817}"/>
+              </a:ext>
+            </a:extLst>
+          </p:cNvPr>
+          <p:cNvPicPr>
+            <a:picLocks noChangeAspect="1"/>
+          </p:cNvPicPr>
+          <p:nvPr/>
+        </p:nvPicPr>
+        <p:blipFill>
+          <a:blip r:embed="rId2"/>
+          <a:stretch>
+            <a:fillRect/>
+          </a:stretch>
+        </p:blipFill>
+        <p:spPr>
+          <a:xfrm>
+            <a:off x="1132114" y="1673638"/>
+            <a:ext cx="7870372" cy="3018137"/>
+          </a:xfrm>
+          <a:prstGeom prst="rect">
+            <a:avLst/>
+          </a:prstGeom>
+        </p:spPr>
+      </p:pic>
+    </p:spTree>
+    <p:extLst>
+      <p:ext uri="{BB962C8B-B14F-4D97-AF65-F5344CB8AC3E}">
+        <p14:creationId xmlns:p14="http://schemas.microsoft.com/office/powerpoint/2010/main" val="2065699475"/>
+      </p:ext>
+    </p:extLst>
+  </p:cSld>
+  <p:clrMapOvr>
+    <a:masterClrMapping/>
+  </p:clrMapOvr>
+</p:sld>
+</file>
+
+<file path=ppt/slides/slide74.xml><?xml version="1.0" encoding="utf-8"?>
+<p:sld xmlns:a="http://schemas.openxmlformats.org/drawingml/2006/main" xmlns:r="http://schemas.openxmlformats.org/officeDocument/2006/relationships" xmlns:p="http://schemas.openxmlformats.org/presentationml/2006/main">
+  <p:cSld>
+    <p:spTree>
+      <p:nvGrpSpPr>
+        <p:cNvPr id="1" name="">
+          <a:extLst>
+            <a:ext uri="{FF2B5EF4-FFF2-40B4-BE49-F238E27FC236}">
+              <a16:creationId xmlns:a16="http://schemas.microsoft.com/office/drawing/2014/main" id="{2D072D7C-046D-27DC-E02D-EC99518753C0}"/>
+            </a:ext>
+          </a:extLst>
+        </p:cNvPr>
+        <p:cNvGrpSpPr/>
+        <p:nvPr/>
+      </p:nvGrpSpPr>
+      <p:grpSpPr>
+        <a:xfrm>
+          <a:off x="0" y="0"/>
+          <a:ext cx="0" cy="0"/>
+          <a:chOff x="0" y="0"/>
+          <a:chExt cx="0" cy="0"/>
+        </a:xfrm>
+      </p:grpSpPr>
+      <p:sp>
+        <p:nvSpPr>
+          <p:cNvPr id="3" name="Content Placeholder 2">
+            <a:extLst>
+              <a:ext uri="{FF2B5EF4-FFF2-40B4-BE49-F238E27FC236}">
+                <a16:creationId xmlns:a16="http://schemas.microsoft.com/office/drawing/2014/main" id="{8B18970F-3DA7-1CC9-7CA0-1D4B2B303B27}"/>
+              </a:ext>
+            </a:extLst>
+          </p:cNvPr>
+          <p:cNvSpPr>
+            <a:spLocks noGrp="1"/>
+          </p:cNvSpPr>
+          <p:nvPr>
+            <p:ph idx="1"/>
+          </p:nvPr>
+        </p:nvSpPr>
+        <p:spPr>
+          <a:xfrm>
+            <a:off x="777240" y="849086"/>
+            <a:ext cx="10659110" cy="5327877"/>
+          </a:xfrm>
+        </p:spPr>
+        <p:txBody>
+          <a:bodyPr>
+            <a:normAutofit/>
+          </a:bodyPr>
+          <a:lstStyle/>
+          <a:p>
+            <a:pPr marL="0" indent="0">
+              <a:buNone/>
+            </a:pPr>
+            <a:r>
+              <a:rPr lang="en-IN" sz="2800" b="1" dirty="0"/>
+              <a:t>Train the Model:</a:t>
+            </a:r>
+          </a:p>
+          <a:p>
+            <a:pPr marL="0" indent="0">
+              <a:buNone/>
+            </a:pPr>
+            <a:endParaRPr lang="en-IN" sz="2400" b="1" dirty="0"/>
+          </a:p>
+          <a:p>
+            <a:pPr marL="0" indent="0">
+              <a:buNone/>
+            </a:pPr>
+            <a:endParaRPr lang="en-IN" sz="2400" b="1" dirty="0"/>
+          </a:p>
+          <a:p>
+            <a:pPr marL="0" indent="0">
+              <a:buNone/>
+            </a:pPr>
+            <a:endParaRPr lang="en-IN" sz="2400" b="1" dirty="0"/>
+          </a:p>
+          <a:p>
+            <a:pPr marL="0" indent="0">
+              <a:buNone/>
+            </a:pPr>
+            <a:endParaRPr lang="en-IN" sz="2400" b="1" dirty="0"/>
+          </a:p>
+          <a:p>
+            <a:pPr marL="0" indent="0">
+              <a:buNone/>
+            </a:pPr>
+            <a:endParaRPr lang="en-IN" sz="2400" b="1" dirty="0"/>
+          </a:p>
+          <a:p>
+            <a:pPr marL="0" indent="0">
+              <a:buNone/>
+            </a:pPr>
+            <a:r>
+              <a:rPr lang="en-US" sz="2400" dirty="0"/>
+              <a:t>Trains the model with training data for 5 passes (epochs). Epochs tells the model to go through the </a:t>
+            </a:r>
+            <a:r>
+              <a:rPr lang="en-US" sz="2400" b="1" dirty="0"/>
+              <a:t>entire training dataset</a:t>
+            </a:r>
+            <a:r>
+              <a:rPr lang="en-US" sz="2400" dirty="0"/>
+              <a:t> </a:t>
+            </a:r>
+            <a:r>
+              <a:rPr lang="en-US" sz="2400" b="1" dirty="0"/>
+              <a:t>5 times</a:t>
+            </a:r>
+            <a:r>
+              <a:rPr lang="en-US" sz="2400" dirty="0"/>
+              <a:t>.</a:t>
+            </a:r>
+          </a:p>
+          <a:p>
+            <a:pPr marL="0" indent="0">
+              <a:buNone/>
+            </a:pPr>
+            <a:endParaRPr lang="en-IN" sz="2400" b="1" dirty="0"/>
+          </a:p>
+        </p:txBody>
+      </p:sp>
+      <p:pic>
+        <p:nvPicPr>
+          <p:cNvPr id="4" name="Picture 3">
+            <a:extLst>
+              <a:ext uri="{FF2B5EF4-FFF2-40B4-BE49-F238E27FC236}">
+                <a16:creationId xmlns:a16="http://schemas.microsoft.com/office/drawing/2014/main" id="{103C952F-B911-2275-31C3-BEA00AE582E8}"/>
+              </a:ext>
+            </a:extLst>
+          </p:cNvPr>
+          <p:cNvPicPr>
+            <a:picLocks noChangeAspect="1"/>
+          </p:cNvPicPr>
+          <p:nvPr/>
+        </p:nvPicPr>
+        <p:blipFill>
+          <a:blip r:embed="rId2"/>
+          <a:stretch>
+            <a:fillRect/>
+          </a:stretch>
+        </p:blipFill>
+        <p:spPr>
+          <a:xfrm>
+            <a:off x="1256581" y="2073113"/>
+            <a:ext cx="8573220" cy="882771"/>
+          </a:xfrm>
+          <a:prstGeom prst="rect">
+            <a:avLst/>
+          </a:prstGeom>
+        </p:spPr>
+      </p:pic>
+    </p:spTree>
+    <p:extLst>
+      <p:ext uri="{BB962C8B-B14F-4D97-AF65-F5344CB8AC3E}">
+        <p14:creationId xmlns:p14="http://schemas.microsoft.com/office/powerpoint/2010/main" val="1705284052"/>
+      </p:ext>
+    </p:extLst>
+  </p:cSld>
+  <p:clrMapOvr>
+    <a:masterClrMapping/>
+  </p:clrMapOvr>
+</p:sld>
+</file>
+
+<file path=ppt/slides/slide75.xml><?xml version="1.0" encoding="utf-8"?>
+<p:sld xmlns:a="http://schemas.openxmlformats.org/drawingml/2006/main" xmlns:r="http://schemas.openxmlformats.org/officeDocument/2006/relationships" xmlns:p="http://schemas.openxmlformats.org/presentationml/2006/main">
+  <p:cSld>
+    <p:spTree>
+      <p:nvGrpSpPr>
+        <p:cNvPr id="1" name="">
+          <a:extLst>
+            <a:ext uri="{FF2B5EF4-FFF2-40B4-BE49-F238E27FC236}">
+              <a16:creationId xmlns:a16="http://schemas.microsoft.com/office/drawing/2014/main" id="{C1411910-9690-CA3B-A591-EDB3B39B3FB8}"/>
+            </a:ext>
+          </a:extLst>
+        </p:cNvPr>
+        <p:cNvGrpSpPr/>
+        <p:nvPr/>
+      </p:nvGrpSpPr>
+      <p:grpSpPr>
+        <a:xfrm>
+          <a:off x="0" y="0"/>
+          <a:ext cx="0" cy="0"/>
+          <a:chOff x="0" y="0"/>
+          <a:chExt cx="0" cy="0"/>
+        </a:xfrm>
+      </p:grpSpPr>
+      <p:sp>
+        <p:nvSpPr>
+          <p:cNvPr id="3" name="Content Placeholder 2">
+            <a:extLst>
+              <a:ext uri="{FF2B5EF4-FFF2-40B4-BE49-F238E27FC236}">
+                <a16:creationId xmlns:a16="http://schemas.microsoft.com/office/drawing/2014/main" id="{6169888C-AC51-A56B-1157-9428C5EBE3FD}"/>
+              </a:ext>
+            </a:extLst>
+          </p:cNvPr>
+          <p:cNvSpPr>
+            <a:spLocks noGrp="1"/>
+          </p:cNvSpPr>
+          <p:nvPr>
+            <p:ph idx="1"/>
+          </p:nvPr>
+        </p:nvSpPr>
+        <p:spPr>
+          <a:xfrm>
+            <a:off x="777240" y="849086"/>
+            <a:ext cx="10659110" cy="5327877"/>
+          </a:xfrm>
+        </p:spPr>
+        <p:txBody>
+          <a:bodyPr>
+            <a:normAutofit/>
+          </a:bodyPr>
+          <a:lstStyle/>
+          <a:p>
+            <a:pPr marL="0" indent="0">
+              <a:buNone/>
+            </a:pPr>
+            <a:r>
+              <a:rPr lang="en-IN" sz="2800" b="1" dirty="0"/>
+              <a:t>Evaluate the Model</a:t>
+            </a:r>
+          </a:p>
+          <a:p>
+            <a:pPr marL="0" indent="0">
+              <a:buNone/>
+            </a:pPr>
+            <a:endParaRPr lang="en-IN" sz="2800" b="1" dirty="0"/>
+          </a:p>
+          <a:p>
+            <a:pPr marL="0" indent="0">
+              <a:buNone/>
+            </a:pPr>
+            <a:endParaRPr lang="en-IN" sz="2800" b="1" dirty="0"/>
+          </a:p>
+          <a:p>
+            <a:pPr marL="0" indent="0">
+              <a:buNone/>
+            </a:pPr>
+            <a:endParaRPr lang="en-IN" sz="2800" b="1" dirty="0"/>
+          </a:p>
+          <a:p>
+            <a:pPr marL="0" indent="0">
+              <a:buNone/>
+            </a:pPr>
+            <a:endParaRPr lang="en-IN" sz="2800" b="1" dirty="0"/>
+          </a:p>
+          <a:p>
+            <a:pPr marL="0" indent="0">
+              <a:buNone/>
+            </a:pPr>
+            <a:r>
+              <a:rPr lang="en-IN" sz="2800" b="1" dirty="0"/>
+              <a:t>Make Predictions:</a:t>
+            </a:r>
+          </a:p>
+          <a:p>
+            <a:pPr marL="0" indent="0">
+              <a:buNone/>
+            </a:pPr>
+            <a:endParaRPr lang="en-IN" sz="2800" b="1" dirty="0"/>
+          </a:p>
+          <a:p>
+            <a:pPr marL="0" indent="0">
+              <a:buNone/>
+            </a:pPr>
+            <a:endParaRPr lang="en-IN" sz="2800" b="1" dirty="0"/>
+          </a:p>
+          <a:p>
+            <a:pPr marL="0" indent="0">
+              <a:buNone/>
+            </a:pPr>
+            <a:endParaRPr lang="en-IN" sz="2800" b="1" dirty="0"/>
+          </a:p>
+          <a:p>
+            <a:pPr marL="0" indent="0">
+              <a:buNone/>
+            </a:pPr>
+            <a:endParaRPr lang="en-IN" sz="2800" b="1" dirty="0"/>
+          </a:p>
+          <a:p>
+            <a:pPr marL="0" indent="0">
+              <a:buNone/>
+            </a:pPr>
+            <a:endParaRPr lang="en-IN" sz="2800" b="1" dirty="0"/>
+          </a:p>
+          <a:p>
+            <a:pPr marL="0" indent="0">
+              <a:buNone/>
+            </a:pPr>
+            <a:endParaRPr lang="en-IN" sz="2800" b="1" dirty="0"/>
+          </a:p>
+          <a:p>
+            <a:pPr marL="0" indent="0">
+              <a:buNone/>
+            </a:pPr>
+            <a:endParaRPr lang="en-IN" sz="2800" b="1" dirty="0"/>
+          </a:p>
+        </p:txBody>
+      </p:sp>
+      <p:pic>
+        <p:nvPicPr>
+          <p:cNvPr id="4" name="Picture 3">
+            <a:extLst>
+              <a:ext uri="{FF2B5EF4-FFF2-40B4-BE49-F238E27FC236}">
+                <a16:creationId xmlns:a16="http://schemas.microsoft.com/office/drawing/2014/main" id="{3B64DAB2-2AB0-074A-0B1E-4D4CACD90FFF}"/>
+              </a:ext>
+            </a:extLst>
+          </p:cNvPr>
+          <p:cNvPicPr>
+            <a:picLocks noChangeAspect="1"/>
+          </p:cNvPicPr>
+          <p:nvPr/>
+        </p:nvPicPr>
+        <p:blipFill>
+          <a:blip r:embed="rId2"/>
+          <a:stretch>
+            <a:fillRect/>
+          </a:stretch>
+        </p:blipFill>
+        <p:spPr>
+          <a:xfrm>
+            <a:off x="1136210" y="1639752"/>
+            <a:ext cx="8595619" cy="1136245"/>
+          </a:xfrm>
+          <a:prstGeom prst="rect">
+            <a:avLst/>
+          </a:prstGeom>
+        </p:spPr>
+      </p:pic>
+      <p:pic>
+        <p:nvPicPr>
+          <p:cNvPr id="6" name="Picture 5">
+            <a:extLst>
+              <a:ext uri="{FF2B5EF4-FFF2-40B4-BE49-F238E27FC236}">
+                <a16:creationId xmlns:a16="http://schemas.microsoft.com/office/drawing/2014/main" id="{DB926319-47D7-3FA7-BB95-35ED64EFFBC6}"/>
+              </a:ext>
+            </a:extLst>
+          </p:cNvPr>
+          <p:cNvPicPr>
+            <a:picLocks noChangeAspect="1"/>
+          </p:cNvPicPr>
+          <p:nvPr/>
+        </p:nvPicPr>
+        <p:blipFill>
+          <a:blip r:embed="rId3"/>
+          <a:stretch>
+            <a:fillRect/>
+          </a:stretch>
+        </p:blipFill>
+        <p:spPr>
+          <a:xfrm>
+            <a:off x="1136210" y="4188364"/>
+            <a:ext cx="10504805" cy="1029884"/>
+          </a:xfrm>
+          <a:prstGeom prst="rect">
+            <a:avLst/>
+          </a:prstGeom>
+        </p:spPr>
+      </p:pic>
+    </p:spTree>
+    <p:extLst>
+      <p:ext uri="{BB962C8B-B14F-4D97-AF65-F5344CB8AC3E}">
+        <p14:creationId xmlns:p14="http://schemas.microsoft.com/office/powerpoint/2010/main" val="3027574868"/>
+      </p:ext>
+    </p:extLst>
+  </p:cSld>
+  <p:clrMapOvr>
+    <a:masterClrMapping/>
+  </p:clrMapOvr>
+</p:sld>
+</file>
+
+<file path=ppt/slides/slide76.xml><?xml version="1.0" encoding="utf-8"?>
+<p:sld xmlns:a="http://schemas.openxmlformats.org/drawingml/2006/main" xmlns:r="http://schemas.openxmlformats.org/officeDocument/2006/relationships" xmlns:p="http://schemas.openxmlformats.org/presentationml/2006/main">
+  <p:cSld>
+    <p:spTree>
+      <p:nvGrpSpPr>
+        <p:cNvPr id="1" name="">
+          <a:extLst>
+            <a:ext uri="{FF2B5EF4-FFF2-40B4-BE49-F238E27FC236}">
+              <a16:creationId xmlns:a16="http://schemas.microsoft.com/office/drawing/2014/main" id="{9D959338-5C47-C55A-F86B-7DE3EC7650A3}"/>
+            </a:ext>
+          </a:extLst>
+        </p:cNvPr>
+        <p:cNvGrpSpPr/>
+        <p:nvPr/>
+      </p:nvGrpSpPr>
+      <p:grpSpPr>
+        <a:xfrm>
+          <a:off x="0" y="0"/>
+          <a:ext cx="0" cy="0"/>
+          <a:chOff x="0" y="0"/>
+          <a:chExt cx="0" cy="0"/>
+        </a:xfrm>
+      </p:grpSpPr>
+      <p:sp>
+        <p:nvSpPr>
+          <p:cNvPr id="3" name="Content Placeholder 2">
+            <a:extLst>
+              <a:ext uri="{FF2B5EF4-FFF2-40B4-BE49-F238E27FC236}">
+                <a16:creationId xmlns:a16="http://schemas.microsoft.com/office/drawing/2014/main" id="{5701DD00-AE38-ED98-D830-969A769AF815}"/>
+              </a:ext>
+            </a:extLst>
+          </p:cNvPr>
+          <p:cNvSpPr>
+            <a:spLocks noGrp="1"/>
+          </p:cNvSpPr>
+          <p:nvPr>
+            <p:ph idx="1"/>
+          </p:nvPr>
+        </p:nvSpPr>
+        <p:spPr>
+          <a:xfrm>
+            <a:off x="777240" y="849086"/>
+            <a:ext cx="10659110" cy="5327877"/>
+          </a:xfrm>
+        </p:spPr>
+        <p:txBody>
+          <a:bodyPr>
+            <a:normAutofit/>
+          </a:bodyPr>
+          <a:lstStyle/>
+          <a:p>
+            <a:pPr marL="0" indent="0">
+              <a:buNone/>
+            </a:pPr>
+            <a:r>
+              <a:rPr lang="en-IN" sz="2800" b="1" dirty="0"/>
+              <a:t>Summary</a:t>
+            </a:r>
+          </a:p>
+        </p:txBody>
+      </p:sp>
+      <p:graphicFrame>
+        <p:nvGraphicFramePr>
+          <p:cNvPr id="2" name="Table 1">
+            <a:extLst>
+              <a:ext uri="{FF2B5EF4-FFF2-40B4-BE49-F238E27FC236}">
+                <a16:creationId xmlns:a16="http://schemas.microsoft.com/office/drawing/2014/main" id="{688914C4-8833-3DEA-23BF-AAB20E3881BF}"/>
+              </a:ext>
+            </a:extLst>
+          </p:cNvPr>
+          <p:cNvGraphicFramePr>
+            <a:graphicFrameLocks noGrp="1"/>
+          </p:cNvGraphicFramePr>
+          <p:nvPr>
+            <p:extLst>
+              <p:ext uri="{D42A27DB-BD31-4B8C-83A1-F6EECF244321}">
+                <p14:modId xmlns:p14="http://schemas.microsoft.com/office/powerpoint/2010/main" val="3903624382"/>
+              </p:ext>
+            </p:extLst>
+          </p:nvPr>
+        </p:nvGraphicFramePr>
+        <p:xfrm>
+          <a:off x="704214" y="1496767"/>
+          <a:ext cx="10805161" cy="4680196"/>
+        </p:xfrm>
+        <a:graphic>
+          <a:graphicData uri="http://schemas.openxmlformats.org/drawingml/2006/table">
+            <a:tbl>
+              <a:tblPr firstRow="1" firstCol="1" bandRow="1">
+                <a:tableStyleId>{5C22544A-7EE6-4342-B048-85BDC9FD1C3A}</a:tableStyleId>
+              </a:tblPr>
+              <a:tblGrid>
+                <a:gridCol w="2815046">
+                  <a:extLst>
+                    <a:ext uri="{9D8B030D-6E8A-4147-A177-3AD203B41FA5}">
+                      <a16:colId xmlns:a16="http://schemas.microsoft.com/office/drawing/2014/main" val="1656815422"/>
+                    </a:ext>
+                  </a:extLst>
+                </a:gridCol>
+                <a:gridCol w="4387596">
+                  <a:extLst>
+                    <a:ext uri="{9D8B030D-6E8A-4147-A177-3AD203B41FA5}">
+                      <a16:colId xmlns:a16="http://schemas.microsoft.com/office/drawing/2014/main" val="683126715"/>
+                    </a:ext>
+                  </a:extLst>
+                </a:gridCol>
+                <a:gridCol w="3602519">
+                  <a:extLst>
+                    <a:ext uri="{9D8B030D-6E8A-4147-A177-3AD203B41FA5}">
+                      <a16:colId xmlns:a16="http://schemas.microsoft.com/office/drawing/2014/main" val="2738377563"/>
+                    </a:ext>
+                  </a:extLst>
+                </a:gridCol>
+              </a:tblGrid>
+              <a:tr h="462979">
+                <a:tc>
+                  <a:txBody>
+                    <a:bodyPr/>
+                    <a:lstStyle/>
+                    <a:p>
+                      <a:pPr>
+                        <a:lnSpc>
+                          <a:spcPct val="115000"/>
+                        </a:lnSpc>
+                        <a:spcAft>
+                          <a:spcPts val="800"/>
+                        </a:spcAft>
+                        <a:buNone/>
+                      </a:pPr>
+                      <a:r>
+                        <a:rPr lang="en-IN" sz="2400" kern="100" dirty="0">
+                          <a:effectLst/>
+                        </a:rPr>
+                        <a:t>Step</a:t>
+                      </a:r>
+                      <a:endParaRPr lang="en-IN" sz="2400" kern="100" dirty="0">
+                        <a:effectLst/>
+                        <a:latin typeface="Aptos" panose="020B0004020202020204" pitchFamily="34" charset="0"/>
+                        <a:ea typeface="Aptos" panose="020B0004020202020204" pitchFamily="34" charset="0"/>
+                        <a:cs typeface="Times New Roman" panose="02020603050405020304" pitchFamily="18" charset="0"/>
+                      </a:endParaRPr>
+                    </a:p>
+                  </a:txBody>
+                  <a:tcPr marL="68580" marR="68580" marT="0" marB="0"/>
+                </a:tc>
+                <a:tc>
+                  <a:txBody>
+                    <a:bodyPr/>
+                    <a:lstStyle/>
+                    <a:p>
+                      <a:pPr>
+                        <a:lnSpc>
+                          <a:spcPct val="115000"/>
+                        </a:lnSpc>
+                        <a:spcAft>
+                          <a:spcPts val="800"/>
+                        </a:spcAft>
+                        <a:buNone/>
+                      </a:pPr>
+                      <a:r>
+                        <a:rPr lang="en-IN" sz="2400" kern="100">
+                          <a:effectLst/>
+                        </a:rPr>
+                        <a:t>What You Do</a:t>
+                      </a:r>
+                      <a:endParaRPr lang="en-IN" sz="2400" kern="100">
+                        <a:effectLst/>
+                        <a:latin typeface="Aptos" panose="020B0004020202020204" pitchFamily="34" charset="0"/>
+                        <a:ea typeface="Aptos" panose="020B0004020202020204" pitchFamily="34" charset="0"/>
+                        <a:cs typeface="Times New Roman" panose="02020603050405020304" pitchFamily="18" charset="0"/>
+                      </a:endParaRPr>
+                    </a:p>
+                  </a:txBody>
+                  <a:tcPr marL="68580" marR="68580" marT="0" marB="0"/>
+                </a:tc>
+                <a:tc>
+                  <a:txBody>
+                    <a:bodyPr/>
+                    <a:lstStyle/>
+                    <a:p>
+                      <a:pPr>
+                        <a:lnSpc>
+                          <a:spcPct val="115000"/>
+                        </a:lnSpc>
+                        <a:spcAft>
+                          <a:spcPts val="800"/>
+                        </a:spcAft>
+                        <a:buNone/>
+                      </a:pPr>
+                      <a:r>
+                        <a:rPr lang="en-IN" sz="2400" kern="100">
+                          <a:effectLst/>
+                        </a:rPr>
+                        <a:t>In Our Example</a:t>
+                      </a:r>
+                      <a:endParaRPr lang="en-IN" sz="2400" kern="100">
+                        <a:effectLst/>
+                        <a:latin typeface="Aptos" panose="020B0004020202020204" pitchFamily="34" charset="0"/>
+                        <a:ea typeface="Aptos" panose="020B0004020202020204" pitchFamily="34" charset="0"/>
+                        <a:cs typeface="Times New Roman" panose="02020603050405020304" pitchFamily="18" charset="0"/>
+                      </a:endParaRPr>
+                    </a:p>
+                  </a:txBody>
+                  <a:tcPr marL="68580" marR="68580" marT="0" marB="0"/>
+                </a:tc>
+                <a:extLst>
+                  <a:ext uri="{0D108BD9-81ED-4DB2-BD59-A6C34878D82A}">
+                    <a16:rowId xmlns:a16="http://schemas.microsoft.com/office/drawing/2014/main" val="3588314625"/>
+                  </a:ext>
+                </a:extLst>
+              </a:tr>
+              <a:tr h="462979">
+                <a:tc>
+                  <a:txBody>
+                    <a:bodyPr/>
+                    <a:lstStyle/>
+                    <a:p>
+                      <a:pPr>
+                        <a:lnSpc>
+                          <a:spcPct val="115000"/>
+                        </a:lnSpc>
+                        <a:spcAft>
+                          <a:spcPts val="800"/>
+                        </a:spcAft>
+                        <a:buNone/>
+                      </a:pPr>
+                      <a:r>
+                        <a:rPr lang="en-IN" sz="2400" kern="100" dirty="0">
+                          <a:effectLst/>
+                        </a:rPr>
+                        <a:t>1. Import</a:t>
+                      </a:r>
+                      <a:endParaRPr lang="en-IN" sz="2400" kern="100" dirty="0">
+                        <a:effectLst/>
+                        <a:latin typeface="Aptos" panose="020B0004020202020204" pitchFamily="34" charset="0"/>
+                        <a:ea typeface="Aptos" panose="020B0004020202020204" pitchFamily="34" charset="0"/>
+                        <a:cs typeface="Times New Roman" panose="02020603050405020304" pitchFamily="18" charset="0"/>
+                      </a:endParaRPr>
+                    </a:p>
+                  </a:txBody>
+                  <a:tcPr marL="68580" marR="68580" marT="0" marB="0"/>
+                </a:tc>
+                <a:tc>
+                  <a:txBody>
+                    <a:bodyPr/>
+                    <a:lstStyle/>
+                    <a:p>
+                      <a:pPr>
+                        <a:lnSpc>
+                          <a:spcPct val="115000"/>
+                        </a:lnSpc>
+                        <a:spcAft>
+                          <a:spcPts val="800"/>
+                        </a:spcAft>
+                        <a:buNone/>
+                      </a:pPr>
+                      <a:r>
+                        <a:rPr lang="en-IN" sz="2400" kern="100">
+                          <a:effectLst/>
+                        </a:rPr>
+                        <a:t>Load TensorFlow/Keras</a:t>
+                      </a:r>
+                      <a:endParaRPr lang="en-IN" sz="2400" kern="100">
+                        <a:effectLst/>
+                        <a:latin typeface="Aptos" panose="020B0004020202020204" pitchFamily="34" charset="0"/>
+                        <a:ea typeface="Aptos" panose="020B0004020202020204" pitchFamily="34" charset="0"/>
+                        <a:cs typeface="Times New Roman" panose="02020603050405020304" pitchFamily="18" charset="0"/>
+                      </a:endParaRPr>
+                    </a:p>
+                  </a:txBody>
+                  <a:tcPr marL="68580" marR="68580" marT="0" marB="0"/>
+                </a:tc>
+                <a:tc>
+                  <a:txBody>
+                    <a:bodyPr/>
+                    <a:lstStyle/>
+                    <a:p>
+                      <a:pPr>
+                        <a:lnSpc>
+                          <a:spcPct val="115000"/>
+                        </a:lnSpc>
+                        <a:spcAft>
+                          <a:spcPts val="800"/>
+                        </a:spcAft>
+                        <a:buNone/>
+                      </a:pPr>
+                      <a:r>
+                        <a:rPr lang="en-IN" sz="2400" kern="100">
+                          <a:effectLst/>
+                        </a:rPr>
+                        <a:t>import tensorflow as tf</a:t>
+                      </a:r>
+                      <a:endParaRPr lang="en-IN" sz="2400" kern="100">
+                        <a:effectLst/>
+                        <a:latin typeface="Aptos" panose="020B0004020202020204" pitchFamily="34" charset="0"/>
+                        <a:ea typeface="Aptos" panose="020B0004020202020204" pitchFamily="34" charset="0"/>
+                        <a:cs typeface="Times New Roman" panose="02020603050405020304" pitchFamily="18" charset="0"/>
+                      </a:endParaRPr>
+                    </a:p>
+                  </a:txBody>
+                  <a:tcPr marL="68580" marR="68580" marT="0" marB="0"/>
+                </a:tc>
+                <a:extLst>
+                  <a:ext uri="{0D108BD9-81ED-4DB2-BD59-A6C34878D82A}">
+                    <a16:rowId xmlns:a16="http://schemas.microsoft.com/office/drawing/2014/main" val="1538029862"/>
+                  </a:ext>
+                </a:extLst>
+              </a:tr>
+              <a:tr h="462979">
+                <a:tc>
+                  <a:txBody>
+                    <a:bodyPr/>
+                    <a:lstStyle/>
+                    <a:p>
+                      <a:pPr>
+                        <a:lnSpc>
+                          <a:spcPct val="115000"/>
+                        </a:lnSpc>
+                        <a:spcAft>
+                          <a:spcPts val="800"/>
+                        </a:spcAft>
+                        <a:buNone/>
+                      </a:pPr>
+                      <a:r>
+                        <a:rPr lang="en-IN" sz="2400" kern="100">
+                          <a:effectLst/>
+                        </a:rPr>
+                        <a:t>2. Load Data</a:t>
+                      </a:r>
+                      <a:endParaRPr lang="en-IN" sz="2400" kern="100">
+                        <a:effectLst/>
+                        <a:latin typeface="Aptos" panose="020B0004020202020204" pitchFamily="34" charset="0"/>
+                        <a:ea typeface="Aptos" panose="020B0004020202020204" pitchFamily="34" charset="0"/>
+                        <a:cs typeface="Times New Roman" panose="02020603050405020304" pitchFamily="18" charset="0"/>
+                      </a:endParaRPr>
+                    </a:p>
+                  </a:txBody>
+                  <a:tcPr marL="68580" marR="68580" marT="0" marB="0"/>
+                </a:tc>
+                <a:tc>
+                  <a:txBody>
+                    <a:bodyPr/>
+                    <a:lstStyle/>
+                    <a:p>
+                      <a:pPr>
+                        <a:lnSpc>
+                          <a:spcPct val="115000"/>
+                        </a:lnSpc>
+                        <a:spcAft>
+                          <a:spcPts val="800"/>
+                        </a:spcAft>
+                        <a:buNone/>
+                      </a:pPr>
+                      <a:r>
+                        <a:rPr lang="en-IN" sz="2400" kern="100">
+                          <a:effectLst/>
+                        </a:rPr>
+                        <a:t>Use built-in dataset</a:t>
+                      </a:r>
+                      <a:endParaRPr lang="en-IN" sz="2400" kern="100">
+                        <a:effectLst/>
+                        <a:latin typeface="Aptos" panose="020B0004020202020204" pitchFamily="34" charset="0"/>
+                        <a:ea typeface="Aptos" panose="020B0004020202020204" pitchFamily="34" charset="0"/>
+                        <a:cs typeface="Times New Roman" panose="02020603050405020304" pitchFamily="18" charset="0"/>
+                      </a:endParaRPr>
+                    </a:p>
+                  </a:txBody>
+                  <a:tcPr marL="68580" marR="68580" marT="0" marB="0"/>
+                </a:tc>
+                <a:tc>
+                  <a:txBody>
+                    <a:bodyPr/>
+                    <a:lstStyle/>
+                    <a:p>
+                      <a:pPr>
+                        <a:lnSpc>
+                          <a:spcPct val="115000"/>
+                        </a:lnSpc>
+                        <a:spcAft>
+                          <a:spcPts val="800"/>
+                        </a:spcAft>
+                        <a:buNone/>
+                      </a:pPr>
+                      <a:r>
+                        <a:rPr lang="en-IN" sz="2400" kern="100">
+                          <a:effectLst/>
+                        </a:rPr>
+                        <a:t>MNIST digits</a:t>
+                      </a:r>
+                      <a:endParaRPr lang="en-IN" sz="2400" kern="100">
+                        <a:effectLst/>
+                        <a:latin typeface="Aptos" panose="020B0004020202020204" pitchFamily="34" charset="0"/>
+                        <a:ea typeface="Aptos" panose="020B0004020202020204" pitchFamily="34" charset="0"/>
+                        <a:cs typeface="Times New Roman" panose="02020603050405020304" pitchFamily="18" charset="0"/>
+                      </a:endParaRPr>
+                    </a:p>
+                  </a:txBody>
+                  <a:tcPr marL="68580" marR="68580" marT="0" marB="0"/>
+                </a:tc>
+                <a:extLst>
+                  <a:ext uri="{0D108BD9-81ED-4DB2-BD59-A6C34878D82A}">
+                    <a16:rowId xmlns:a16="http://schemas.microsoft.com/office/drawing/2014/main" val="1249428276"/>
+                  </a:ext>
+                </a:extLst>
+              </a:tr>
+              <a:tr h="951161">
+                <a:tc>
+                  <a:txBody>
+                    <a:bodyPr/>
+                    <a:lstStyle/>
+                    <a:p>
+                      <a:pPr>
+                        <a:lnSpc>
+                          <a:spcPct val="115000"/>
+                        </a:lnSpc>
+                        <a:spcAft>
+                          <a:spcPts val="800"/>
+                        </a:spcAft>
+                        <a:buNone/>
+                      </a:pPr>
+                      <a:r>
+                        <a:rPr lang="en-IN" sz="2400" kern="100">
+                          <a:effectLst/>
+                        </a:rPr>
+                        <a:t>3. Build Model</a:t>
+                      </a:r>
+                      <a:endParaRPr lang="en-IN" sz="2400" kern="100">
+                        <a:effectLst/>
+                        <a:latin typeface="Aptos" panose="020B0004020202020204" pitchFamily="34" charset="0"/>
+                        <a:ea typeface="Aptos" panose="020B0004020202020204" pitchFamily="34" charset="0"/>
+                        <a:cs typeface="Times New Roman" panose="02020603050405020304" pitchFamily="18" charset="0"/>
+                      </a:endParaRPr>
+                    </a:p>
+                  </a:txBody>
+                  <a:tcPr marL="68580" marR="68580" marT="0" marB="0"/>
+                </a:tc>
+                <a:tc>
+                  <a:txBody>
+                    <a:bodyPr/>
+                    <a:lstStyle/>
+                    <a:p>
+                      <a:pPr>
+                        <a:lnSpc>
+                          <a:spcPct val="115000"/>
+                        </a:lnSpc>
+                        <a:spcAft>
+                          <a:spcPts val="800"/>
+                        </a:spcAft>
+                        <a:buNone/>
+                      </a:pPr>
+                      <a:r>
+                        <a:rPr lang="en-IN" sz="2400" kern="100" dirty="0">
+                          <a:effectLst/>
+                        </a:rPr>
+                        <a:t>Use Sequential and layers</a:t>
+                      </a:r>
+                      <a:endParaRPr lang="en-IN" sz="2400" kern="100" dirty="0">
+                        <a:effectLst/>
+                        <a:latin typeface="Aptos" panose="020B0004020202020204" pitchFamily="34" charset="0"/>
+                        <a:ea typeface="Aptos" panose="020B0004020202020204" pitchFamily="34" charset="0"/>
+                        <a:cs typeface="Times New Roman" panose="02020603050405020304" pitchFamily="18" charset="0"/>
+                      </a:endParaRPr>
+                    </a:p>
+                  </a:txBody>
+                  <a:tcPr marL="68580" marR="68580" marT="0" marB="0"/>
+                </a:tc>
+                <a:tc>
+                  <a:txBody>
+                    <a:bodyPr/>
+                    <a:lstStyle/>
+                    <a:p>
+                      <a:pPr>
+                        <a:lnSpc>
+                          <a:spcPct val="115000"/>
+                        </a:lnSpc>
+                        <a:spcAft>
+                          <a:spcPts val="800"/>
+                        </a:spcAft>
+                        <a:buNone/>
+                      </a:pPr>
+                      <a:r>
+                        <a:rPr lang="en-IN" sz="2400" kern="100">
+                          <a:effectLst/>
+                        </a:rPr>
+                        <a:t>Flatten → Dense (ReLU) → Dense (Softmax)</a:t>
+                      </a:r>
+                      <a:endParaRPr lang="en-IN" sz="2400" kern="100">
+                        <a:effectLst/>
+                        <a:latin typeface="Aptos" panose="020B0004020202020204" pitchFamily="34" charset="0"/>
+                        <a:ea typeface="Aptos" panose="020B0004020202020204" pitchFamily="34" charset="0"/>
+                        <a:cs typeface="Times New Roman" panose="02020603050405020304" pitchFamily="18" charset="0"/>
+                      </a:endParaRPr>
+                    </a:p>
+                  </a:txBody>
+                  <a:tcPr marL="68580" marR="68580" marT="0" marB="0"/>
+                </a:tc>
+                <a:extLst>
+                  <a:ext uri="{0D108BD9-81ED-4DB2-BD59-A6C34878D82A}">
+                    <a16:rowId xmlns:a16="http://schemas.microsoft.com/office/drawing/2014/main" val="3677153125"/>
+                  </a:ext>
+                </a:extLst>
+              </a:tr>
+              <a:tr h="951161">
+                <a:tc>
+                  <a:txBody>
+                    <a:bodyPr/>
+                    <a:lstStyle/>
+                    <a:p>
+                      <a:pPr>
+                        <a:lnSpc>
+                          <a:spcPct val="115000"/>
+                        </a:lnSpc>
+                        <a:spcAft>
+                          <a:spcPts val="800"/>
+                        </a:spcAft>
+                        <a:buNone/>
+                      </a:pPr>
+                      <a:r>
+                        <a:rPr lang="en-IN" sz="2400" kern="100">
+                          <a:effectLst/>
+                        </a:rPr>
+                        <a:t>4. Compile</a:t>
+                      </a:r>
+                      <a:endParaRPr lang="en-IN" sz="2400" kern="100">
+                        <a:effectLst/>
+                        <a:latin typeface="Aptos" panose="020B0004020202020204" pitchFamily="34" charset="0"/>
+                        <a:ea typeface="Aptos" panose="020B0004020202020204" pitchFamily="34" charset="0"/>
+                        <a:cs typeface="Times New Roman" panose="02020603050405020304" pitchFamily="18" charset="0"/>
+                      </a:endParaRPr>
+                    </a:p>
+                  </a:txBody>
+                  <a:tcPr marL="68580" marR="68580" marT="0" marB="0"/>
+                </a:tc>
+                <a:tc>
+                  <a:txBody>
+                    <a:bodyPr/>
+                    <a:lstStyle/>
+                    <a:p>
+                      <a:pPr>
+                        <a:lnSpc>
+                          <a:spcPct val="115000"/>
+                        </a:lnSpc>
+                        <a:spcAft>
+                          <a:spcPts val="800"/>
+                        </a:spcAft>
+                        <a:buNone/>
+                      </a:pPr>
+                      <a:r>
+                        <a:rPr lang="en-IN" sz="2400" kern="100" dirty="0">
+                          <a:effectLst/>
+                        </a:rPr>
+                        <a:t>Choose loss, optimizer, metrics</a:t>
+                      </a:r>
+                      <a:endParaRPr lang="en-IN" sz="2400" kern="100" dirty="0">
+                        <a:effectLst/>
+                        <a:latin typeface="Aptos" panose="020B0004020202020204" pitchFamily="34" charset="0"/>
+                        <a:ea typeface="Aptos" panose="020B0004020202020204" pitchFamily="34" charset="0"/>
+                        <a:cs typeface="Times New Roman" panose="02020603050405020304" pitchFamily="18" charset="0"/>
+                      </a:endParaRPr>
+                    </a:p>
+                  </a:txBody>
+                  <a:tcPr marL="68580" marR="68580" marT="0" marB="0"/>
+                </a:tc>
+                <a:tc>
+                  <a:txBody>
+                    <a:bodyPr/>
+                    <a:lstStyle/>
+                    <a:p>
+                      <a:pPr>
+                        <a:lnSpc>
+                          <a:spcPct val="115000"/>
+                        </a:lnSpc>
+                        <a:spcAft>
+                          <a:spcPts val="800"/>
+                        </a:spcAft>
+                        <a:buNone/>
+                      </a:pPr>
+                      <a:r>
+                        <a:rPr lang="en-IN" sz="2400" kern="100">
+                          <a:effectLst/>
+                        </a:rPr>
+                        <a:t>Adam, accuracy</a:t>
+                      </a:r>
+                      <a:endParaRPr lang="en-IN" sz="2400" kern="100">
+                        <a:effectLst/>
+                        <a:latin typeface="Aptos" panose="020B0004020202020204" pitchFamily="34" charset="0"/>
+                        <a:ea typeface="Aptos" panose="020B0004020202020204" pitchFamily="34" charset="0"/>
+                        <a:cs typeface="Times New Roman" panose="02020603050405020304" pitchFamily="18" charset="0"/>
+                      </a:endParaRPr>
+                    </a:p>
+                  </a:txBody>
+                  <a:tcPr marL="68580" marR="68580" marT="0" marB="0"/>
+                </a:tc>
+                <a:extLst>
+                  <a:ext uri="{0D108BD9-81ED-4DB2-BD59-A6C34878D82A}">
+                    <a16:rowId xmlns:a16="http://schemas.microsoft.com/office/drawing/2014/main" val="1572066416"/>
+                  </a:ext>
+                </a:extLst>
+              </a:tr>
+              <a:tr h="462979">
+                <a:tc>
+                  <a:txBody>
+                    <a:bodyPr/>
+                    <a:lstStyle/>
+                    <a:p>
+                      <a:pPr>
+                        <a:lnSpc>
+                          <a:spcPct val="115000"/>
+                        </a:lnSpc>
+                        <a:spcAft>
+                          <a:spcPts val="800"/>
+                        </a:spcAft>
+                        <a:buNone/>
+                      </a:pPr>
+                      <a:r>
+                        <a:rPr lang="en-IN" sz="2400" kern="100">
+                          <a:effectLst/>
+                        </a:rPr>
+                        <a:t>5. Train</a:t>
+                      </a:r>
+                      <a:endParaRPr lang="en-IN" sz="2400" kern="100">
+                        <a:effectLst/>
+                        <a:latin typeface="Aptos" panose="020B0004020202020204" pitchFamily="34" charset="0"/>
+                        <a:ea typeface="Aptos" panose="020B0004020202020204" pitchFamily="34" charset="0"/>
+                        <a:cs typeface="Times New Roman" panose="02020603050405020304" pitchFamily="18" charset="0"/>
+                      </a:endParaRPr>
+                    </a:p>
+                  </a:txBody>
+                  <a:tcPr marL="68580" marR="68580" marT="0" marB="0"/>
+                </a:tc>
+                <a:tc>
+                  <a:txBody>
+                    <a:bodyPr/>
+                    <a:lstStyle/>
+                    <a:p>
+                      <a:pPr>
+                        <a:lnSpc>
+                          <a:spcPct val="115000"/>
+                        </a:lnSpc>
+                        <a:spcAft>
+                          <a:spcPts val="800"/>
+                        </a:spcAft>
+                        <a:buNone/>
+                      </a:pPr>
+                      <a:r>
+                        <a:rPr lang="en-IN" sz="2400" kern="100">
+                          <a:effectLst/>
+                        </a:rPr>
+                        <a:t>Fit model with data</a:t>
+                      </a:r>
+                      <a:endParaRPr lang="en-IN" sz="2400" kern="100">
+                        <a:effectLst/>
+                        <a:latin typeface="Aptos" panose="020B0004020202020204" pitchFamily="34" charset="0"/>
+                        <a:ea typeface="Aptos" panose="020B0004020202020204" pitchFamily="34" charset="0"/>
+                        <a:cs typeface="Times New Roman" panose="02020603050405020304" pitchFamily="18" charset="0"/>
+                      </a:endParaRPr>
+                    </a:p>
+                  </a:txBody>
+                  <a:tcPr marL="68580" marR="68580" marT="0" marB="0"/>
+                </a:tc>
+                <a:tc>
+                  <a:txBody>
+                    <a:bodyPr/>
+                    <a:lstStyle/>
+                    <a:p>
+                      <a:pPr>
+                        <a:lnSpc>
+                          <a:spcPct val="115000"/>
+                        </a:lnSpc>
+                        <a:spcAft>
+                          <a:spcPts val="800"/>
+                        </a:spcAft>
+                        <a:buNone/>
+                      </a:pPr>
+                      <a:r>
+                        <a:rPr lang="en-IN" sz="2400" kern="100">
+                          <a:effectLst/>
+                        </a:rPr>
+                        <a:t>.fit()</a:t>
+                      </a:r>
+                      <a:endParaRPr lang="en-IN" sz="2400" kern="100">
+                        <a:effectLst/>
+                        <a:latin typeface="Aptos" panose="020B0004020202020204" pitchFamily="34" charset="0"/>
+                        <a:ea typeface="Aptos" panose="020B0004020202020204" pitchFamily="34" charset="0"/>
+                        <a:cs typeface="Times New Roman" panose="02020603050405020304" pitchFamily="18" charset="0"/>
+                      </a:endParaRPr>
+                    </a:p>
+                  </a:txBody>
+                  <a:tcPr marL="68580" marR="68580" marT="0" marB="0"/>
+                </a:tc>
+                <a:extLst>
+                  <a:ext uri="{0D108BD9-81ED-4DB2-BD59-A6C34878D82A}">
+                    <a16:rowId xmlns:a16="http://schemas.microsoft.com/office/drawing/2014/main" val="451316372"/>
+                  </a:ext>
+                </a:extLst>
+              </a:tr>
+              <a:tr h="462979">
+                <a:tc>
+                  <a:txBody>
+                    <a:bodyPr/>
+                    <a:lstStyle/>
+                    <a:p>
+                      <a:pPr>
+                        <a:lnSpc>
+                          <a:spcPct val="115000"/>
+                        </a:lnSpc>
+                        <a:spcAft>
+                          <a:spcPts val="800"/>
+                        </a:spcAft>
+                        <a:buNone/>
+                      </a:pPr>
+                      <a:r>
+                        <a:rPr lang="en-IN" sz="2400" kern="100">
+                          <a:effectLst/>
+                        </a:rPr>
+                        <a:t>6. Evaluate</a:t>
+                      </a:r>
+                      <a:endParaRPr lang="en-IN" sz="2400" kern="100">
+                        <a:effectLst/>
+                        <a:latin typeface="Aptos" panose="020B0004020202020204" pitchFamily="34" charset="0"/>
+                        <a:ea typeface="Aptos" panose="020B0004020202020204" pitchFamily="34" charset="0"/>
+                        <a:cs typeface="Times New Roman" panose="02020603050405020304" pitchFamily="18" charset="0"/>
+                      </a:endParaRPr>
+                    </a:p>
+                  </a:txBody>
+                  <a:tcPr marL="68580" marR="68580" marT="0" marB="0"/>
+                </a:tc>
+                <a:tc>
+                  <a:txBody>
+                    <a:bodyPr/>
+                    <a:lstStyle/>
+                    <a:p>
+                      <a:pPr>
+                        <a:lnSpc>
+                          <a:spcPct val="115000"/>
+                        </a:lnSpc>
+                        <a:spcAft>
+                          <a:spcPts val="800"/>
+                        </a:spcAft>
+                        <a:buNone/>
+                      </a:pPr>
+                      <a:r>
+                        <a:rPr lang="en-IN" sz="2400" kern="100">
+                          <a:effectLst/>
+                        </a:rPr>
+                        <a:t>Test accuracy</a:t>
+                      </a:r>
+                      <a:endParaRPr lang="en-IN" sz="2400" kern="100">
+                        <a:effectLst/>
+                        <a:latin typeface="Aptos" panose="020B0004020202020204" pitchFamily="34" charset="0"/>
+                        <a:ea typeface="Aptos" panose="020B0004020202020204" pitchFamily="34" charset="0"/>
+                        <a:cs typeface="Times New Roman" panose="02020603050405020304" pitchFamily="18" charset="0"/>
+                      </a:endParaRPr>
+                    </a:p>
+                  </a:txBody>
+                  <a:tcPr marL="68580" marR="68580" marT="0" marB="0"/>
+                </a:tc>
+                <a:tc>
+                  <a:txBody>
+                    <a:bodyPr/>
+                    <a:lstStyle/>
+                    <a:p>
+                      <a:pPr>
+                        <a:lnSpc>
+                          <a:spcPct val="115000"/>
+                        </a:lnSpc>
+                        <a:spcAft>
+                          <a:spcPts val="800"/>
+                        </a:spcAft>
+                        <a:buNone/>
+                      </a:pPr>
+                      <a:r>
+                        <a:rPr lang="en-IN" sz="2400" kern="100">
+                          <a:effectLst/>
+                        </a:rPr>
+                        <a:t>.evaluate()</a:t>
+                      </a:r>
+                      <a:endParaRPr lang="en-IN" sz="2400" kern="100">
+                        <a:effectLst/>
+                        <a:latin typeface="Aptos" panose="020B0004020202020204" pitchFamily="34" charset="0"/>
+                        <a:ea typeface="Aptos" panose="020B0004020202020204" pitchFamily="34" charset="0"/>
+                        <a:cs typeface="Times New Roman" panose="02020603050405020304" pitchFamily="18" charset="0"/>
+                      </a:endParaRPr>
+                    </a:p>
+                  </a:txBody>
+                  <a:tcPr marL="68580" marR="68580" marT="0" marB="0"/>
+                </a:tc>
+                <a:extLst>
+                  <a:ext uri="{0D108BD9-81ED-4DB2-BD59-A6C34878D82A}">
+                    <a16:rowId xmlns:a16="http://schemas.microsoft.com/office/drawing/2014/main" val="2011179325"/>
+                  </a:ext>
+                </a:extLst>
+              </a:tr>
+              <a:tr h="462979">
+                <a:tc>
+                  <a:txBody>
+                    <a:bodyPr/>
+                    <a:lstStyle/>
+                    <a:p>
+                      <a:pPr>
+                        <a:lnSpc>
+                          <a:spcPct val="115000"/>
+                        </a:lnSpc>
+                        <a:spcAft>
+                          <a:spcPts val="800"/>
+                        </a:spcAft>
+                        <a:buNone/>
+                      </a:pPr>
+                      <a:r>
+                        <a:rPr lang="en-IN" sz="2400" kern="100">
+                          <a:effectLst/>
+                        </a:rPr>
+                        <a:t>7. Predict</a:t>
+                      </a:r>
+                      <a:endParaRPr lang="en-IN" sz="2400" kern="100">
+                        <a:effectLst/>
+                        <a:latin typeface="Aptos" panose="020B0004020202020204" pitchFamily="34" charset="0"/>
+                        <a:ea typeface="Aptos" panose="020B0004020202020204" pitchFamily="34" charset="0"/>
+                        <a:cs typeface="Times New Roman" panose="02020603050405020304" pitchFamily="18" charset="0"/>
+                      </a:endParaRPr>
+                    </a:p>
+                  </a:txBody>
+                  <a:tcPr marL="68580" marR="68580" marT="0" marB="0"/>
+                </a:tc>
+                <a:tc>
+                  <a:txBody>
+                    <a:bodyPr/>
+                    <a:lstStyle/>
+                    <a:p>
+                      <a:pPr>
+                        <a:lnSpc>
+                          <a:spcPct val="115000"/>
+                        </a:lnSpc>
+                        <a:spcAft>
+                          <a:spcPts val="800"/>
+                        </a:spcAft>
+                        <a:buNone/>
+                      </a:pPr>
+                      <a:r>
+                        <a:rPr lang="en-IN" sz="2400" kern="100">
+                          <a:effectLst/>
+                        </a:rPr>
+                        <a:t>Use .predict() for new data</a:t>
+                      </a:r>
+                      <a:endParaRPr lang="en-IN" sz="2400" kern="100">
+                        <a:effectLst/>
+                        <a:latin typeface="Aptos" panose="020B0004020202020204" pitchFamily="34" charset="0"/>
+                        <a:ea typeface="Aptos" panose="020B0004020202020204" pitchFamily="34" charset="0"/>
+                        <a:cs typeface="Times New Roman" panose="02020603050405020304" pitchFamily="18" charset="0"/>
+                      </a:endParaRPr>
+                    </a:p>
+                  </a:txBody>
+                  <a:tcPr marL="68580" marR="68580" marT="0" marB="0"/>
+                </a:tc>
+                <a:tc>
+                  <a:txBody>
+                    <a:bodyPr/>
+                    <a:lstStyle/>
+                    <a:p>
+                      <a:pPr>
+                        <a:lnSpc>
+                          <a:spcPct val="115000"/>
+                        </a:lnSpc>
+                        <a:spcAft>
+                          <a:spcPts val="800"/>
+                        </a:spcAft>
+                        <a:buNone/>
+                      </a:pPr>
+                      <a:r>
+                        <a:rPr lang="en-IN" sz="2400" kern="100" dirty="0">
+                          <a:effectLst/>
+                        </a:rPr>
+                        <a:t>Output digit</a:t>
+                      </a:r>
+                      <a:endParaRPr lang="en-IN" sz="2400" kern="100" dirty="0">
+                        <a:effectLst/>
+                        <a:latin typeface="Aptos" panose="020B0004020202020204" pitchFamily="34" charset="0"/>
+                        <a:ea typeface="Aptos" panose="020B0004020202020204" pitchFamily="34" charset="0"/>
+                        <a:cs typeface="Times New Roman" panose="02020603050405020304" pitchFamily="18" charset="0"/>
+                      </a:endParaRPr>
+                    </a:p>
+                  </a:txBody>
+                  <a:tcPr marL="68580" marR="68580" marT="0" marB="0"/>
+                </a:tc>
+                <a:extLst>
+                  <a:ext uri="{0D108BD9-81ED-4DB2-BD59-A6C34878D82A}">
+                    <a16:rowId xmlns:a16="http://schemas.microsoft.com/office/drawing/2014/main" val="717827471"/>
+                  </a:ext>
+                </a:extLst>
+              </a:tr>
+            </a:tbl>
+          </a:graphicData>
+        </a:graphic>
+      </p:graphicFrame>
+    </p:spTree>
+    <p:extLst>
+      <p:ext uri="{BB962C8B-B14F-4D97-AF65-F5344CB8AC3E}">
+        <p14:creationId xmlns:p14="http://schemas.microsoft.com/office/powerpoint/2010/main" val="171347959"/>
+      </p:ext>
+    </p:extLst>
+  </p:cSld>
+  <p:clrMapOvr>
+    <a:masterClrMapping/>
+  </p:clrMapOvr>
+</p:sld>
+</file>
+
+<file path=ppt/slides/slide77.xml><?xml version="1.0" encoding="utf-8"?>
+<p:sld xmlns:a="http://schemas.openxmlformats.org/drawingml/2006/main" xmlns:r="http://schemas.openxmlformats.org/officeDocument/2006/relationships" xmlns:p="http://schemas.openxmlformats.org/presentationml/2006/main">
+  <p:cSld>
+    <p:spTree>
+      <p:nvGrpSpPr>
+        <p:cNvPr id="1" name="">
+          <a:extLst>
+            <a:ext uri="{FF2B5EF4-FFF2-40B4-BE49-F238E27FC236}">
+              <a16:creationId xmlns:a16="http://schemas.microsoft.com/office/drawing/2014/main" id="{5190DFA2-8928-15AD-FE4B-D1A8C0A04113}"/>
+            </a:ext>
+          </a:extLst>
+        </p:cNvPr>
+        <p:cNvGrpSpPr/>
+        <p:nvPr/>
+      </p:nvGrpSpPr>
+      <p:grpSpPr>
+        <a:xfrm>
+          <a:off x="0" y="0"/>
+          <a:ext cx="0" cy="0"/>
+          <a:chOff x="0" y="0"/>
+          <a:chExt cx="0" cy="0"/>
+        </a:xfrm>
+      </p:grpSpPr>
+      <p:sp>
+        <p:nvSpPr>
+          <p:cNvPr id="3" name="Content Placeholder 2">
+            <a:extLst>
+              <a:ext uri="{FF2B5EF4-FFF2-40B4-BE49-F238E27FC236}">
+                <a16:creationId xmlns:a16="http://schemas.microsoft.com/office/drawing/2014/main" id="{C3ABE3FE-A23C-4562-9B10-31F89A23712E}"/>
+              </a:ext>
+            </a:extLst>
+          </p:cNvPr>
+          <p:cNvSpPr>
+            <a:spLocks noGrp="1"/>
+          </p:cNvSpPr>
+          <p:nvPr>
+            <p:ph idx="1"/>
+          </p:nvPr>
+        </p:nvSpPr>
+        <p:spPr>
+          <a:xfrm>
+            <a:off x="743688" y="1001485"/>
+            <a:ext cx="10900568" cy="4974772"/>
+          </a:xfrm>
+        </p:spPr>
+        <p:txBody>
+          <a:bodyPr>
+            <a:normAutofit/>
+          </a:bodyPr>
+          <a:lstStyle/>
+          <a:p>
+            <a:pPr marL="0" indent="0">
+              <a:buNone/>
+            </a:pPr>
+            <a:r>
+              <a:rPr lang="en-US" sz="3200" b="1" dirty="0">
+                <a:solidFill>
+                  <a:srgbClr val="C00000"/>
+                </a:solidFill>
+              </a:rPr>
+              <a:t>Module-4: </a:t>
+            </a:r>
+            <a:r>
+              <a:rPr lang="en-US" sz="3200" b="1" dirty="0">
+                <a:solidFill>
+                  <a:schemeClr val="accent3">
+                    <a:lumMod val="50000"/>
+                  </a:schemeClr>
+                </a:solidFill>
+              </a:rPr>
+              <a:t>Advanced Machine Learning Techniques: </a:t>
+            </a:r>
+          </a:p>
+          <a:p>
+            <a:pPr marL="0" indent="0">
+              <a:buNone/>
+            </a:pPr>
+            <a:r>
+              <a:rPr lang="en-US" sz="3200" b="1" dirty="0"/>
+              <a:t>Ensemble Methods: Bagging and Boosting</a:t>
+            </a:r>
+            <a:r>
+              <a:rPr lang="en-US" sz="3200" dirty="0"/>
+              <a:t>, </a:t>
+            </a:r>
+            <a:r>
+              <a:rPr lang="en-US" sz="3200" b="1" dirty="0"/>
+              <a:t>Gradient Boosting Machines (GBM)</a:t>
+            </a:r>
+            <a:r>
+              <a:rPr lang="en-US" sz="3200" dirty="0"/>
+              <a:t>, </a:t>
+            </a:r>
+            <a:r>
+              <a:rPr lang="en-US" sz="3200" b="1" dirty="0"/>
+              <a:t>Extreme Gradient Boosting (</a:t>
+            </a:r>
+            <a:r>
+              <a:rPr lang="en-US" sz="3200" b="1" dirty="0" err="1"/>
+              <a:t>XGBoost</a:t>
+            </a:r>
+            <a:r>
+              <a:rPr lang="en-US" sz="3200" b="1" dirty="0"/>
+              <a:t>).  </a:t>
+            </a:r>
+          </a:p>
+          <a:p>
+            <a:pPr marL="0" indent="0">
+              <a:buNone/>
+            </a:pPr>
+            <a:r>
+              <a:rPr lang="en-US" sz="3200" b="1" dirty="0"/>
+              <a:t>Support Vector Machines (SVM): Linear and non-linear SVM</a:t>
+            </a:r>
+            <a:r>
+              <a:rPr lang="en-US" sz="3200" dirty="0"/>
+              <a:t>, </a:t>
+            </a:r>
+            <a:r>
+              <a:rPr lang="en-US" sz="3200" b="1" dirty="0"/>
+              <a:t>Kernel trick</a:t>
+            </a:r>
+            <a:r>
+              <a:rPr lang="en-US" sz="3200" dirty="0"/>
+              <a:t>, </a:t>
+            </a:r>
+            <a:r>
+              <a:rPr lang="en-US" sz="3200" b="1" dirty="0"/>
+              <a:t>Model evaluation and tuning</a:t>
+            </a:r>
+            <a:r>
+              <a:rPr lang="en-US" sz="3200" dirty="0"/>
+              <a:t>.  </a:t>
+            </a:r>
+          </a:p>
+          <a:p>
+            <a:pPr marL="0" indent="0">
+              <a:buNone/>
+            </a:pPr>
+            <a:r>
+              <a:rPr lang="en-US" sz="3200" b="1" dirty="0"/>
+              <a:t>Neural Networks and Deep Learning: Introduction to neural networks</a:t>
+            </a:r>
+            <a:r>
+              <a:rPr lang="en-US" sz="3200" dirty="0"/>
+              <a:t>, </a:t>
+            </a:r>
+            <a:r>
+              <a:rPr lang="en-US" sz="3200" b="1" dirty="0"/>
+              <a:t>Building and training neural networks using TensorFlow and </a:t>
+            </a:r>
+            <a:r>
+              <a:rPr lang="en-US" sz="3200" b="1" dirty="0" err="1"/>
+              <a:t>Keras</a:t>
+            </a:r>
+            <a:r>
+              <a:rPr lang="en-US" sz="3200" dirty="0"/>
+              <a:t>, Convolutional Neural Networks (CNN) and Recurrent Neural Networks (RNN). </a:t>
+            </a:r>
+            <a:endParaRPr lang="en-IN" sz="3200" dirty="0"/>
+          </a:p>
+        </p:txBody>
+      </p:sp>
+    </p:spTree>
+    <p:extLst>
+      <p:ext uri="{BB962C8B-B14F-4D97-AF65-F5344CB8AC3E}">
+        <p14:creationId xmlns:p14="http://schemas.microsoft.com/office/powerpoint/2010/main" val="1168041992"/>
+      </p:ext>
+    </p:extLst>
+  </p:cSld>
+  <p:clrMapOvr>
+    <a:masterClrMapping/>
+  </p:clrMapOvr>
+</p:sld>
+</file>
+
+<file path=ppt/slides/slide78.xml><?xml version="1.0" encoding="utf-8"?>
+<p:sld xmlns:a="http://schemas.openxmlformats.org/drawingml/2006/main" xmlns:r="http://schemas.openxmlformats.org/officeDocument/2006/relationships" xmlns:p="http://schemas.openxmlformats.org/presentationml/2006/main">
+  <p:cSld>
+    <p:spTree>
+      <p:nvGrpSpPr>
+        <p:cNvPr id="1" name="">
+          <a:extLst>
+            <a:ext uri="{FF2B5EF4-FFF2-40B4-BE49-F238E27FC236}">
+              <a16:creationId xmlns:a16="http://schemas.microsoft.com/office/drawing/2014/main" id="{E6D74122-3232-081F-9EAC-E203711EFD29}"/>
+            </a:ext>
+          </a:extLst>
+        </p:cNvPr>
+        <p:cNvGrpSpPr/>
+        <p:nvPr/>
+      </p:nvGrpSpPr>
+      <p:grpSpPr>
+        <a:xfrm>
+          <a:off x="0" y="0"/>
+          <a:ext cx="0" cy="0"/>
+          <a:chOff x="0" y="0"/>
+          <a:chExt cx="0" cy="0"/>
+        </a:xfrm>
+      </p:grpSpPr>
+      <p:sp>
+        <p:nvSpPr>
+          <p:cNvPr id="3" name="Content Placeholder 2">
+            <a:extLst>
+              <a:ext uri="{FF2B5EF4-FFF2-40B4-BE49-F238E27FC236}">
+                <a16:creationId xmlns:a16="http://schemas.microsoft.com/office/drawing/2014/main" id="{A2B5BDBC-71CE-669F-0392-D6C5AC321E9F}"/>
+              </a:ext>
+            </a:extLst>
+          </p:cNvPr>
+          <p:cNvSpPr>
+            <a:spLocks noGrp="1"/>
+          </p:cNvSpPr>
+          <p:nvPr>
+            <p:ph idx="1"/>
+          </p:nvPr>
+        </p:nvSpPr>
+        <p:spPr>
+          <a:xfrm>
+            <a:off x="777240" y="849086"/>
+            <a:ext cx="10659110" cy="5327877"/>
+          </a:xfrm>
+        </p:spPr>
+        <p:txBody>
+          <a:bodyPr>
+            <a:normAutofit/>
+          </a:bodyPr>
+          <a:lstStyle/>
+          <a:p>
+            <a:pPr marL="0" indent="0">
+              <a:buNone/>
+            </a:pPr>
+            <a:endParaRPr lang="en-IN" sz="2400" dirty="0"/>
+          </a:p>
+        </p:txBody>
+      </p:sp>
+    </p:spTree>
+    <p:extLst>
+      <p:ext uri="{BB962C8B-B14F-4D97-AF65-F5344CB8AC3E}">
+        <p14:creationId xmlns:p14="http://schemas.microsoft.com/office/powerpoint/2010/main" val="3043417450"/>
+      </p:ext>
+    </p:extLst>
+  </p:cSld>
+  <p:clrMapOvr>
+    <a:masterClrMapping/>
+  </p:clrMapOvr>
+</p:sld>
+</file>
+
+<file path=ppt/slides/slide79.xml><?xml version="1.0" encoding="utf-8"?>
+<p:sld xmlns:a="http://schemas.openxmlformats.org/drawingml/2006/main" xmlns:r="http://schemas.openxmlformats.org/officeDocument/2006/relationships" xmlns:p="http://schemas.openxmlformats.org/presentationml/2006/main">
+  <p:cSld>
+    <p:spTree>
+      <p:nvGrpSpPr>
+        <p:cNvPr id="1" name="">
+          <a:extLst>
+            <a:ext uri="{FF2B5EF4-FFF2-40B4-BE49-F238E27FC236}">
+              <a16:creationId xmlns:a16="http://schemas.microsoft.com/office/drawing/2014/main" id="{01994D0E-78D9-58C6-2939-A79DD409F8E2}"/>
+            </a:ext>
+          </a:extLst>
+        </p:cNvPr>
+        <p:cNvGrpSpPr/>
+        <p:nvPr/>
+      </p:nvGrpSpPr>
+      <p:grpSpPr>
+        <a:xfrm>
+          <a:off x="0" y="0"/>
+          <a:ext cx="0" cy="0"/>
+          <a:chOff x="0" y="0"/>
+          <a:chExt cx="0" cy="0"/>
+        </a:xfrm>
+      </p:grpSpPr>
+      <p:sp>
+        <p:nvSpPr>
+          <p:cNvPr id="3" name="Content Placeholder 2">
+            <a:extLst>
+              <a:ext uri="{FF2B5EF4-FFF2-40B4-BE49-F238E27FC236}">
+                <a16:creationId xmlns:a16="http://schemas.microsoft.com/office/drawing/2014/main" id="{C2B18FA9-47B9-0269-A72C-8C45AC633C36}"/>
+              </a:ext>
+            </a:extLst>
+          </p:cNvPr>
+          <p:cNvSpPr>
+            <a:spLocks noGrp="1"/>
+          </p:cNvSpPr>
+          <p:nvPr>
+            <p:ph idx="1"/>
+          </p:nvPr>
+        </p:nvSpPr>
+        <p:spPr>
+          <a:xfrm>
+            <a:off x="777240" y="849086"/>
+            <a:ext cx="10659110" cy="5327877"/>
+          </a:xfrm>
+        </p:spPr>
+        <p:txBody>
+          <a:bodyPr>
+            <a:normAutofit/>
+          </a:bodyPr>
+          <a:lstStyle/>
+          <a:p>
+            <a:pPr marL="0" indent="0">
+              <a:buNone/>
+            </a:pPr>
+            <a:endParaRPr lang="en-IN" sz="2400" dirty="0"/>
+          </a:p>
+        </p:txBody>
+      </p:sp>
+    </p:spTree>
+    <p:extLst>
+      <p:ext uri="{BB962C8B-B14F-4D97-AF65-F5344CB8AC3E}">
+        <p14:creationId xmlns:p14="http://schemas.microsoft.com/office/powerpoint/2010/main" val="3726074494"/>
+      </p:ext>
+    </p:extLst>
+  </p:cSld>
+  <p:clrMapOvr>
+    <a:masterClrMapping/>
+  </p:clrMapOvr>
+</p:sld>
+</file>
+
 <file path=ppt/slides/slide8.xml><?xml version="1.0" encoding="utf-8"?>
 <p:sld xmlns:a="http://schemas.openxmlformats.org/drawingml/2006/main" xmlns:r="http://schemas.openxmlformats.org/officeDocument/2006/relationships" xmlns:p="http://schemas.openxmlformats.org/presentationml/2006/main">
   <p:cSld>
@@ -27284,6 +34331,432 @@
 </p:sld>
 </file>
 
+<file path=ppt/slides/slide80.xml><?xml version="1.0" encoding="utf-8"?>
+<p:sld xmlns:a="http://schemas.openxmlformats.org/drawingml/2006/main" xmlns:r="http://schemas.openxmlformats.org/officeDocument/2006/relationships" xmlns:p="http://schemas.openxmlformats.org/presentationml/2006/main">
+  <p:cSld>
+    <p:spTree>
+      <p:nvGrpSpPr>
+        <p:cNvPr id="1" name="">
+          <a:extLst>
+            <a:ext uri="{FF2B5EF4-FFF2-40B4-BE49-F238E27FC236}">
+              <a16:creationId xmlns:a16="http://schemas.microsoft.com/office/drawing/2014/main" id="{7777EF1D-68CF-C078-DE79-45C21E6BEFC5}"/>
+            </a:ext>
+          </a:extLst>
+        </p:cNvPr>
+        <p:cNvGrpSpPr/>
+        <p:nvPr/>
+      </p:nvGrpSpPr>
+      <p:grpSpPr>
+        <a:xfrm>
+          <a:off x="0" y="0"/>
+          <a:ext cx="0" cy="0"/>
+          <a:chOff x="0" y="0"/>
+          <a:chExt cx="0" cy="0"/>
+        </a:xfrm>
+      </p:grpSpPr>
+      <p:sp>
+        <p:nvSpPr>
+          <p:cNvPr id="3" name="Content Placeholder 2">
+            <a:extLst>
+              <a:ext uri="{FF2B5EF4-FFF2-40B4-BE49-F238E27FC236}">
+                <a16:creationId xmlns:a16="http://schemas.microsoft.com/office/drawing/2014/main" id="{DF2C08E8-599A-77B2-CD19-3887AAB5A3D3}"/>
+              </a:ext>
+            </a:extLst>
+          </p:cNvPr>
+          <p:cNvSpPr>
+            <a:spLocks noGrp="1"/>
+          </p:cNvSpPr>
+          <p:nvPr>
+            <p:ph idx="1"/>
+          </p:nvPr>
+        </p:nvSpPr>
+        <p:spPr>
+          <a:xfrm>
+            <a:off x="777240" y="849086"/>
+            <a:ext cx="10659110" cy="5327877"/>
+          </a:xfrm>
+        </p:spPr>
+        <p:txBody>
+          <a:bodyPr>
+            <a:normAutofit/>
+          </a:bodyPr>
+          <a:lstStyle/>
+          <a:p>
+            <a:pPr marL="0" indent="0">
+              <a:buNone/>
+            </a:pPr>
+            <a:endParaRPr lang="en-IN" sz="2400" dirty="0"/>
+          </a:p>
+        </p:txBody>
+      </p:sp>
+    </p:spTree>
+    <p:extLst>
+      <p:ext uri="{BB962C8B-B14F-4D97-AF65-F5344CB8AC3E}">
+        <p14:creationId xmlns:p14="http://schemas.microsoft.com/office/powerpoint/2010/main" val="817254730"/>
+      </p:ext>
+    </p:extLst>
+  </p:cSld>
+  <p:clrMapOvr>
+    <a:masterClrMapping/>
+  </p:clrMapOvr>
+</p:sld>
+</file>
+
+<file path=ppt/slides/slide81.xml><?xml version="1.0" encoding="utf-8"?>
+<p:sld xmlns:a="http://schemas.openxmlformats.org/drawingml/2006/main" xmlns:r="http://schemas.openxmlformats.org/officeDocument/2006/relationships" xmlns:p="http://schemas.openxmlformats.org/presentationml/2006/main">
+  <p:cSld>
+    <p:spTree>
+      <p:nvGrpSpPr>
+        <p:cNvPr id="1" name="">
+          <a:extLst>
+            <a:ext uri="{FF2B5EF4-FFF2-40B4-BE49-F238E27FC236}">
+              <a16:creationId xmlns:a16="http://schemas.microsoft.com/office/drawing/2014/main" id="{BBCD6653-3CE1-D00B-30FC-C206E7D570D2}"/>
+            </a:ext>
+          </a:extLst>
+        </p:cNvPr>
+        <p:cNvGrpSpPr/>
+        <p:nvPr/>
+      </p:nvGrpSpPr>
+      <p:grpSpPr>
+        <a:xfrm>
+          <a:off x="0" y="0"/>
+          <a:ext cx="0" cy="0"/>
+          <a:chOff x="0" y="0"/>
+          <a:chExt cx="0" cy="0"/>
+        </a:xfrm>
+      </p:grpSpPr>
+      <p:sp>
+        <p:nvSpPr>
+          <p:cNvPr id="3" name="Content Placeholder 2">
+            <a:extLst>
+              <a:ext uri="{FF2B5EF4-FFF2-40B4-BE49-F238E27FC236}">
+                <a16:creationId xmlns:a16="http://schemas.microsoft.com/office/drawing/2014/main" id="{CFB568B0-04EB-9AE9-5A4F-525A087DE156}"/>
+              </a:ext>
+            </a:extLst>
+          </p:cNvPr>
+          <p:cNvSpPr>
+            <a:spLocks noGrp="1"/>
+          </p:cNvSpPr>
+          <p:nvPr>
+            <p:ph idx="1"/>
+          </p:nvPr>
+        </p:nvSpPr>
+        <p:spPr>
+          <a:xfrm>
+            <a:off x="777240" y="849086"/>
+            <a:ext cx="10659110" cy="5327877"/>
+          </a:xfrm>
+        </p:spPr>
+        <p:txBody>
+          <a:bodyPr>
+            <a:normAutofit/>
+          </a:bodyPr>
+          <a:lstStyle/>
+          <a:p>
+            <a:pPr marL="0" indent="0">
+              <a:buNone/>
+            </a:pPr>
+            <a:endParaRPr lang="en-IN" sz="2400" dirty="0"/>
+          </a:p>
+        </p:txBody>
+      </p:sp>
+    </p:spTree>
+    <p:extLst>
+      <p:ext uri="{BB962C8B-B14F-4D97-AF65-F5344CB8AC3E}">
+        <p14:creationId xmlns:p14="http://schemas.microsoft.com/office/powerpoint/2010/main" val="3803609951"/>
+      </p:ext>
+    </p:extLst>
+  </p:cSld>
+  <p:clrMapOvr>
+    <a:masterClrMapping/>
+  </p:clrMapOvr>
+</p:sld>
+</file>
+
+<file path=ppt/slides/slide82.xml><?xml version="1.0" encoding="utf-8"?>
+<p:sld xmlns:a="http://schemas.openxmlformats.org/drawingml/2006/main" xmlns:r="http://schemas.openxmlformats.org/officeDocument/2006/relationships" xmlns:p="http://schemas.openxmlformats.org/presentationml/2006/main">
+  <p:cSld>
+    <p:spTree>
+      <p:nvGrpSpPr>
+        <p:cNvPr id="1" name="">
+          <a:extLst>
+            <a:ext uri="{FF2B5EF4-FFF2-40B4-BE49-F238E27FC236}">
+              <a16:creationId xmlns:a16="http://schemas.microsoft.com/office/drawing/2014/main" id="{E78829AD-93F5-C3EA-B7FB-922C7BC20E80}"/>
+            </a:ext>
+          </a:extLst>
+        </p:cNvPr>
+        <p:cNvGrpSpPr/>
+        <p:nvPr/>
+      </p:nvGrpSpPr>
+      <p:grpSpPr>
+        <a:xfrm>
+          <a:off x="0" y="0"/>
+          <a:ext cx="0" cy="0"/>
+          <a:chOff x="0" y="0"/>
+          <a:chExt cx="0" cy="0"/>
+        </a:xfrm>
+      </p:grpSpPr>
+      <p:sp>
+        <p:nvSpPr>
+          <p:cNvPr id="3" name="Content Placeholder 2">
+            <a:extLst>
+              <a:ext uri="{FF2B5EF4-FFF2-40B4-BE49-F238E27FC236}">
+                <a16:creationId xmlns:a16="http://schemas.microsoft.com/office/drawing/2014/main" id="{7E7DF167-239B-5BE7-D147-856CAA5A2B07}"/>
+              </a:ext>
+            </a:extLst>
+          </p:cNvPr>
+          <p:cNvSpPr>
+            <a:spLocks noGrp="1"/>
+          </p:cNvSpPr>
+          <p:nvPr>
+            <p:ph idx="1"/>
+          </p:nvPr>
+        </p:nvSpPr>
+        <p:spPr>
+          <a:xfrm>
+            <a:off x="777240" y="849086"/>
+            <a:ext cx="10659110" cy="5327877"/>
+          </a:xfrm>
+        </p:spPr>
+        <p:txBody>
+          <a:bodyPr>
+            <a:normAutofit/>
+          </a:bodyPr>
+          <a:lstStyle/>
+          <a:p>
+            <a:pPr marL="0" indent="0">
+              <a:buNone/>
+            </a:pPr>
+            <a:endParaRPr lang="en-IN" sz="2400" dirty="0"/>
+          </a:p>
+        </p:txBody>
+      </p:sp>
+    </p:spTree>
+    <p:extLst>
+      <p:ext uri="{BB962C8B-B14F-4D97-AF65-F5344CB8AC3E}">
+        <p14:creationId xmlns:p14="http://schemas.microsoft.com/office/powerpoint/2010/main" val="1730698976"/>
+      </p:ext>
+    </p:extLst>
+  </p:cSld>
+  <p:clrMapOvr>
+    <a:masterClrMapping/>
+  </p:clrMapOvr>
+</p:sld>
+</file>
+
+<file path=ppt/slides/slide83.xml><?xml version="1.0" encoding="utf-8"?>
+<p:sld xmlns:a="http://schemas.openxmlformats.org/drawingml/2006/main" xmlns:r="http://schemas.openxmlformats.org/officeDocument/2006/relationships" xmlns:p="http://schemas.openxmlformats.org/presentationml/2006/main">
+  <p:cSld>
+    <p:spTree>
+      <p:nvGrpSpPr>
+        <p:cNvPr id="1" name="">
+          <a:extLst>
+            <a:ext uri="{FF2B5EF4-FFF2-40B4-BE49-F238E27FC236}">
+              <a16:creationId xmlns:a16="http://schemas.microsoft.com/office/drawing/2014/main" id="{DFBE55E8-2B21-7E5B-9132-7C6C72DB5300}"/>
+            </a:ext>
+          </a:extLst>
+        </p:cNvPr>
+        <p:cNvGrpSpPr/>
+        <p:nvPr/>
+      </p:nvGrpSpPr>
+      <p:grpSpPr>
+        <a:xfrm>
+          <a:off x="0" y="0"/>
+          <a:ext cx="0" cy="0"/>
+          <a:chOff x="0" y="0"/>
+          <a:chExt cx="0" cy="0"/>
+        </a:xfrm>
+      </p:grpSpPr>
+      <p:sp>
+        <p:nvSpPr>
+          <p:cNvPr id="3" name="Content Placeholder 2">
+            <a:extLst>
+              <a:ext uri="{FF2B5EF4-FFF2-40B4-BE49-F238E27FC236}">
+                <a16:creationId xmlns:a16="http://schemas.microsoft.com/office/drawing/2014/main" id="{C3011717-5A7E-C8A9-2AF4-18CE1E038CA3}"/>
+              </a:ext>
+            </a:extLst>
+          </p:cNvPr>
+          <p:cNvSpPr>
+            <a:spLocks noGrp="1"/>
+          </p:cNvSpPr>
+          <p:nvPr>
+            <p:ph idx="1"/>
+          </p:nvPr>
+        </p:nvSpPr>
+        <p:spPr>
+          <a:xfrm>
+            <a:off x="777240" y="849086"/>
+            <a:ext cx="10659110" cy="5327877"/>
+          </a:xfrm>
+        </p:spPr>
+        <p:txBody>
+          <a:bodyPr>
+            <a:normAutofit/>
+          </a:bodyPr>
+          <a:lstStyle/>
+          <a:p>
+            <a:pPr marL="0" indent="0">
+              <a:buNone/>
+            </a:pPr>
+            <a:endParaRPr lang="en-IN" sz="2400" dirty="0"/>
+          </a:p>
+        </p:txBody>
+      </p:sp>
+    </p:spTree>
+    <p:extLst>
+      <p:ext uri="{BB962C8B-B14F-4D97-AF65-F5344CB8AC3E}">
+        <p14:creationId xmlns:p14="http://schemas.microsoft.com/office/powerpoint/2010/main" val="371604518"/>
+      </p:ext>
+    </p:extLst>
+  </p:cSld>
+  <p:clrMapOvr>
+    <a:masterClrMapping/>
+  </p:clrMapOvr>
+</p:sld>
+</file>
+
+<file path=ppt/slides/slide84.xml><?xml version="1.0" encoding="utf-8"?>
+<p:sld xmlns:a="http://schemas.openxmlformats.org/drawingml/2006/main" xmlns:r="http://schemas.openxmlformats.org/officeDocument/2006/relationships" xmlns:p="http://schemas.openxmlformats.org/presentationml/2006/main">
+  <p:cSld>
+    <p:spTree>
+      <p:nvGrpSpPr>
+        <p:cNvPr id="1" name="">
+          <a:extLst>
+            <a:ext uri="{FF2B5EF4-FFF2-40B4-BE49-F238E27FC236}">
+              <a16:creationId xmlns:a16="http://schemas.microsoft.com/office/drawing/2014/main" id="{F66B6C6F-C925-4F15-59C1-635DB2C11B77}"/>
+            </a:ext>
+          </a:extLst>
+        </p:cNvPr>
+        <p:cNvGrpSpPr/>
+        <p:nvPr/>
+      </p:nvGrpSpPr>
+      <p:grpSpPr>
+        <a:xfrm>
+          <a:off x="0" y="0"/>
+          <a:ext cx="0" cy="0"/>
+          <a:chOff x="0" y="0"/>
+          <a:chExt cx="0" cy="0"/>
+        </a:xfrm>
+      </p:grpSpPr>
+      <p:sp>
+        <p:nvSpPr>
+          <p:cNvPr id="3" name="Content Placeholder 2">
+            <a:extLst>
+              <a:ext uri="{FF2B5EF4-FFF2-40B4-BE49-F238E27FC236}">
+                <a16:creationId xmlns:a16="http://schemas.microsoft.com/office/drawing/2014/main" id="{6BE96954-24C0-14D5-3DC7-541893F7458C}"/>
+              </a:ext>
+            </a:extLst>
+          </p:cNvPr>
+          <p:cNvSpPr>
+            <a:spLocks noGrp="1"/>
+          </p:cNvSpPr>
+          <p:nvPr>
+            <p:ph idx="1"/>
+          </p:nvPr>
+        </p:nvSpPr>
+        <p:spPr>
+          <a:xfrm>
+            <a:off x="777240" y="849086"/>
+            <a:ext cx="10659110" cy="5327877"/>
+          </a:xfrm>
+        </p:spPr>
+        <p:txBody>
+          <a:bodyPr>
+            <a:normAutofit/>
+          </a:bodyPr>
+          <a:lstStyle/>
+          <a:p>
+            <a:pPr marL="0" indent="0">
+              <a:buNone/>
+            </a:pPr>
+            <a:endParaRPr lang="en-IN" sz="2400" dirty="0"/>
+          </a:p>
+        </p:txBody>
+      </p:sp>
+    </p:spTree>
+    <p:extLst>
+      <p:ext uri="{BB962C8B-B14F-4D97-AF65-F5344CB8AC3E}">
+        <p14:creationId xmlns:p14="http://schemas.microsoft.com/office/powerpoint/2010/main" val="727797019"/>
+      </p:ext>
+    </p:extLst>
+  </p:cSld>
+  <p:clrMapOvr>
+    <a:masterClrMapping/>
+  </p:clrMapOvr>
+</p:sld>
+</file>
+
+<file path=ppt/slides/slide85.xml><?xml version="1.0" encoding="utf-8"?>
+<p:sld xmlns:a="http://schemas.openxmlformats.org/drawingml/2006/main" xmlns:r="http://schemas.openxmlformats.org/officeDocument/2006/relationships" xmlns:p="http://schemas.openxmlformats.org/presentationml/2006/main">
+  <p:cSld>
+    <p:spTree>
+      <p:nvGrpSpPr>
+        <p:cNvPr id="1" name="">
+          <a:extLst>
+            <a:ext uri="{FF2B5EF4-FFF2-40B4-BE49-F238E27FC236}">
+              <a16:creationId xmlns:a16="http://schemas.microsoft.com/office/drawing/2014/main" id="{AB9EB865-D1CD-902A-48E7-3BAA39BE9FC7}"/>
+            </a:ext>
+          </a:extLst>
+        </p:cNvPr>
+        <p:cNvGrpSpPr/>
+        <p:nvPr/>
+      </p:nvGrpSpPr>
+      <p:grpSpPr>
+        <a:xfrm>
+          <a:off x="0" y="0"/>
+          <a:ext cx="0" cy="0"/>
+          <a:chOff x="0" y="0"/>
+          <a:chExt cx="0" cy="0"/>
+        </a:xfrm>
+      </p:grpSpPr>
+      <p:sp>
+        <p:nvSpPr>
+          <p:cNvPr id="3" name="Content Placeholder 2">
+            <a:extLst>
+              <a:ext uri="{FF2B5EF4-FFF2-40B4-BE49-F238E27FC236}">
+                <a16:creationId xmlns:a16="http://schemas.microsoft.com/office/drawing/2014/main" id="{A0EBF16B-2586-71F4-B57E-0BA5626E845F}"/>
+              </a:ext>
+            </a:extLst>
+          </p:cNvPr>
+          <p:cNvSpPr>
+            <a:spLocks noGrp="1"/>
+          </p:cNvSpPr>
+          <p:nvPr>
+            <p:ph idx="1"/>
+          </p:nvPr>
+        </p:nvSpPr>
+        <p:spPr>
+          <a:xfrm>
+            <a:off x="777240" y="849086"/>
+            <a:ext cx="10659110" cy="5327877"/>
+          </a:xfrm>
+        </p:spPr>
+        <p:txBody>
+          <a:bodyPr>
+            <a:normAutofit/>
+          </a:bodyPr>
+          <a:lstStyle/>
+          <a:p>
+            <a:pPr marL="0" indent="0">
+              <a:buNone/>
+            </a:pPr>
+            <a:endParaRPr lang="en-IN" sz="2400" dirty="0"/>
+          </a:p>
+        </p:txBody>
+      </p:sp>
+    </p:spTree>
+    <p:extLst>
+      <p:ext uri="{BB962C8B-B14F-4D97-AF65-F5344CB8AC3E}">
+        <p14:creationId xmlns:p14="http://schemas.microsoft.com/office/powerpoint/2010/main" val="1429089744"/>
+      </p:ext>
+    </p:extLst>
+  </p:cSld>
+  <p:clrMapOvr>
+    <a:masterClrMapping/>
+  </p:clrMapOvr>
+</p:sld>
+</file>
+
 <file path=ppt/slides/slide9.xml><?xml version="1.0" encoding="utf-8"?>
 <p:sld xmlns:a="http://schemas.openxmlformats.org/drawingml/2006/main" xmlns:r="http://schemas.openxmlformats.org/officeDocument/2006/relationships" xmlns:p="http://schemas.openxmlformats.org/presentationml/2006/main">
   <p:cSld>

--- a/Theory Class-Notes/Unit-4 Advanced Machine Learning Techniques.pptx
+++ b/Theory Class-Notes/Unit-4 Advanced Machine Learning Techniques.pptx
@@ -5,7 +5,7 @@
     <p:sldMasterId id="2147483710" r:id="rId1"/>
   </p:sldMasterIdLst>
   <p:notesMasterIdLst>
-    <p:notesMasterId r:id="rId87"/>
+    <p:notesMasterId r:id="rId95"/>
   </p:notesMasterIdLst>
   <p:sldIdLst>
     <p:sldId id="429" r:id="rId2"/>
@@ -60,39 +60,47 @@
     <p:sldId id="894" r:id="rId51"/>
     <p:sldId id="472" r:id="rId52"/>
     <p:sldId id="912" r:id="rId53"/>
-    <p:sldId id="319" r:id="rId54"/>
-    <p:sldId id="473" r:id="rId55"/>
-    <p:sldId id="325" r:id="rId56"/>
-    <p:sldId id="326" r:id="rId57"/>
-    <p:sldId id="327" r:id="rId58"/>
-    <p:sldId id="329" r:id="rId59"/>
-    <p:sldId id="328" r:id="rId60"/>
-    <p:sldId id="324" r:id="rId61"/>
-    <p:sldId id="320" r:id="rId62"/>
-    <p:sldId id="331" r:id="rId63"/>
-    <p:sldId id="583" r:id="rId64"/>
-    <p:sldId id="476" r:id="rId65"/>
-    <p:sldId id="477" r:id="rId66"/>
-    <p:sldId id="478" r:id="rId67"/>
-    <p:sldId id="479" r:id="rId68"/>
-    <p:sldId id="582" r:id="rId69"/>
-    <p:sldId id="913" r:id="rId70"/>
-    <p:sldId id="914" r:id="rId71"/>
-    <p:sldId id="915" r:id="rId72"/>
-    <p:sldId id="916" r:id="rId73"/>
-    <p:sldId id="917" r:id="rId74"/>
-    <p:sldId id="918" r:id="rId75"/>
-    <p:sldId id="919" r:id="rId76"/>
-    <p:sldId id="920" r:id="rId77"/>
-    <p:sldId id="431" r:id="rId78"/>
-    <p:sldId id="921" r:id="rId79"/>
-    <p:sldId id="922" r:id="rId80"/>
-    <p:sldId id="923" r:id="rId81"/>
+    <p:sldId id="473" r:id="rId54"/>
+    <p:sldId id="929" r:id="rId55"/>
+    <p:sldId id="319" r:id="rId56"/>
+    <p:sldId id="922" r:id="rId57"/>
+    <p:sldId id="325" r:id="rId58"/>
+    <p:sldId id="326" r:id="rId59"/>
+    <p:sldId id="327" r:id="rId60"/>
+    <p:sldId id="329" r:id="rId61"/>
+    <p:sldId id="328" r:id="rId62"/>
+    <p:sldId id="324" r:id="rId63"/>
+    <p:sldId id="320" r:id="rId64"/>
+    <p:sldId id="331" r:id="rId65"/>
+    <p:sldId id="583" r:id="rId66"/>
+    <p:sldId id="476" r:id="rId67"/>
+    <p:sldId id="477" r:id="rId68"/>
+    <p:sldId id="478" r:id="rId69"/>
+    <p:sldId id="479" r:id="rId70"/>
+    <p:sldId id="582" r:id="rId71"/>
+    <p:sldId id="913" r:id="rId72"/>
+    <p:sldId id="914" r:id="rId73"/>
+    <p:sldId id="915" r:id="rId74"/>
+    <p:sldId id="916" r:id="rId75"/>
+    <p:sldId id="917" r:id="rId76"/>
+    <p:sldId id="918" r:id="rId77"/>
+    <p:sldId id="919" r:id="rId78"/>
+    <p:sldId id="920" r:id="rId79"/>
+    <p:sldId id="923" r:id="rId80"/>
+    <p:sldId id="921" r:id="rId81"/>
     <p:sldId id="924" r:id="rId82"/>
     <p:sldId id="925" r:id="rId83"/>
     <p:sldId id="926" r:id="rId84"/>
     <p:sldId id="927" r:id="rId85"/>
-    <p:sldId id="928" r:id="rId86"/>
+    <p:sldId id="930" r:id="rId86"/>
+    <p:sldId id="931" r:id="rId87"/>
+    <p:sldId id="593" r:id="rId88"/>
+    <p:sldId id="594" r:id="rId89"/>
+    <p:sldId id="932" r:id="rId90"/>
+    <p:sldId id="933" r:id="rId91"/>
+    <p:sldId id="934" r:id="rId92"/>
+    <p:sldId id="431" r:id="rId93"/>
+    <p:sldId id="928" r:id="rId94"/>
   </p:sldIdLst>
   <p:sldSz cx="12192000" cy="6858000"/>
   <p:notesSz cx="6858000" cy="9144000"/>
@@ -202,7 +210,7 @@
 <file path=ppt/revisionInfo.xml><?xml version="1.0" encoding="utf-8"?>
 <p1510:revInfo xmlns:a="http://schemas.openxmlformats.org/drawingml/2006/main" xmlns:r="http://schemas.openxmlformats.org/officeDocument/2006/relationships" xmlns:p1510="http://schemas.microsoft.com/office/powerpoint/2015/10/main">
   <p1510:revLst>
-    <p1510:client id="{651BAC71-7343-484D-BD8F-9D1BA4F7D925}" v="66" dt="2025-08-01T19:37:25.533"/>
+    <p1510:client id="{651BAC71-7343-484D-BD8F-9D1BA4F7D925}" v="118" dt="2025-08-02T17:53:46.649"/>
   </p1510:revLst>
 </p1510:revInfo>
 </file>
@@ -212,7 +220,7 @@
   <pc:docChgLst>
     <pc:chgData name="Pramod Naik" userId="ceb6df04-ef15-4d9b-a141-998a03559d75" providerId="ADAL" clId="{651BAC71-7343-484D-BD8F-9D1BA4F7D925}"/>
     <pc:docChg chg="undo custSel addSld delSld modSld sldOrd">
-      <pc:chgData name="Pramod Naik" userId="ceb6df04-ef15-4d9b-a141-998a03559d75" providerId="ADAL" clId="{651BAC71-7343-484D-BD8F-9D1BA4F7D925}" dt="2025-08-01T19:37:44.615" v="1889" actId="207"/>
+      <pc:chgData name="Pramod Naik" userId="ceb6df04-ef15-4d9b-a141-998a03559d75" providerId="ADAL" clId="{651BAC71-7343-484D-BD8F-9D1BA4F7D925}" dt="2025-08-02T17:55:06.614" v="2202" actId="47"/>
       <pc:docMkLst>
         <pc:docMk/>
       </pc:docMkLst>
@@ -238,13 +246,13 @@
         </pc:sldMkLst>
       </pc:sldChg>
       <pc:sldChg chg="modSp add mod ord">
-        <pc:chgData name="Pramod Naik" userId="ceb6df04-ef15-4d9b-a141-998a03559d75" providerId="ADAL" clId="{651BAC71-7343-484D-BD8F-9D1BA4F7D925}" dt="2025-08-01T18:34:41.668" v="1469" actId="403"/>
+        <pc:chgData name="Pramod Naik" userId="ceb6df04-ef15-4d9b-a141-998a03559d75" providerId="ADAL" clId="{651BAC71-7343-484D-BD8F-9D1BA4F7D925}" dt="2025-08-02T06:16:43.383" v="1932" actId="20577"/>
         <pc:sldMkLst>
           <pc:docMk/>
           <pc:sldMk cId="3483828231" sldId="319"/>
         </pc:sldMkLst>
         <pc:spChg chg="mod">
-          <ac:chgData name="Pramod Naik" userId="ceb6df04-ef15-4d9b-a141-998a03559d75" providerId="ADAL" clId="{651BAC71-7343-484D-BD8F-9D1BA4F7D925}" dt="2025-08-01T18:34:41.668" v="1469" actId="403"/>
+          <ac:chgData name="Pramod Naik" userId="ceb6df04-ef15-4d9b-a141-998a03559d75" providerId="ADAL" clId="{651BAC71-7343-484D-BD8F-9D1BA4F7D925}" dt="2025-08-02T06:16:43.383" v="1932" actId="20577"/>
           <ac:spMkLst>
             <pc:docMk/>
             <pc:sldMk cId="3483828231" sldId="319"/>
@@ -600,13 +608,13 @@
         </pc:sldMkLst>
       </pc:sldChg>
       <pc:sldChg chg="modSp add mod ord">
-        <pc:chgData name="Pramod Naik" userId="ceb6df04-ef15-4d9b-a141-998a03559d75" providerId="ADAL" clId="{651BAC71-7343-484D-BD8F-9D1BA4F7D925}" dt="2025-08-01T19:31:57.147" v="1874" actId="113"/>
+        <pc:chgData name="Pramod Naik" userId="ceb6df04-ef15-4d9b-a141-998a03559d75" providerId="ADAL" clId="{651BAC71-7343-484D-BD8F-9D1BA4F7D925}" dt="2025-08-02T17:55:00.868" v="2199" actId="113"/>
         <pc:sldMkLst>
           <pc:docMk/>
           <pc:sldMk cId="1168041992" sldId="431"/>
         </pc:sldMkLst>
         <pc:spChg chg="mod">
-          <ac:chgData name="Pramod Naik" userId="ceb6df04-ef15-4d9b-a141-998a03559d75" providerId="ADAL" clId="{651BAC71-7343-484D-BD8F-9D1BA4F7D925}" dt="2025-08-01T19:31:57.147" v="1874" actId="113"/>
+          <ac:chgData name="Pramod Naik" userId="ceb6df04-ef15-4d9b-a141-998a03559d75" providerId="ADAL" clId="{651BAC71-7343-484D-BD8F-9D1BA4F7D925}" dt="2025-08-02T17:55:00.868" v="2199" actId="113"/>
           <ac:spMkLst>
             <pc:docMk/>
             <pc:sldMk cId="1168041992" sldId="431"/>
@@ -1281,13 +1289,13 @@
         </pc:picChg>
       </pc:sldChg>
       <pc:sldChg chg="modSp add mod ord">
-        <pc:chgData name="Pramod Naik" userId="ceb6df04-ef15-4d9b-a141-998a03559d75" providerId="ADAL" clId="{651BAC71-7343-484D-BD8F-9D1BA4F7D925}" dt="2025-07-26T14:33:40.640" v="1202" actId="404"/>
+        <pc:chgData name="Pramod Naik" userId="ceb6df04-ef15-4d9b-a141-998a03559d75" providerId="ADAL" clId="{651BAC71-7343-484D-BD8F-9D1BA4F7D925}" dt="2025-08-02T04:36:01.131" v="1921" actId="113"/>
         <pc:sldMkLst>
           <pc:docMk/>
           <pc:sldMk cId="980298274" sldId="461"/>
         </pc:sldMkLst>
         <pc:spChg chg="mod">
-          <ac:chgData name="Pramod Naik" userId="ceb6df04-ef15-4d9b-a141-998a03559d75" providerId="ADAL" clId="{651BAC71-7343-484D-BD8F-9D1BA4F7D925}" dt="2025-07-26T14:33:40.640" v="1202" actId="404"/>
+          <ac:chgData name="Pramod Naik" userId="ceb6df04-ef15-4d9b-a141-998a03559d75" providerId="ADAL" clId="{651BAC71-7343-484D-BD8F-9D1BA4F7D925}" dt="2025-08-02T04:36:01.131" v="1921" actId="113"/>
           <ac:spMkLst>
             <pc:docMk/>
             <pc:sldMk cId="980298274" sldId="461"/>
@@ -1571,8 +1579,8 @@
           </ac:spMkLst>
         </pc:spChg>
       </pc:sldChg>
-      <pc:sldChg chg="addSp modSp add mod">
-        <pc:chgData name="Pramod Naik" userId="ceb6df04-ef15-4d9b-a141-998a03559d75" providerId="ADAL" clId="{651BAC71-7343-484D-BD8F-9D1BA4F7D925}" dt="2025-08-01T19:37:44.615" v="1889" actId="207"/>
+      <pc:sldChg chg="addSp modSp add mod ord">
+        <pc:chgData name="Pramod Naik" userId="ceb6df04-ef15-4d9b-a141-998a03559d75" providerId="ADAL" clId="{651BAC71-7343-484D-BD8F-9D1BA4F7D925}" dt="2025-08-02T06:21:16.824" v="1966" actId="14100"/>
         <pc:sldMkLst>
           <pc:docMk/>
           <pc:sldMk cId="4081877237" sldId="473"/>
@@ -1586,7 +1594,7 @@
           </ac:spMkLst>
         </pc:spChg>
         <pc:spChg chg="mod">
-          <ac:chgData name="Pramod Naik" userId="ceb6df04-ef15-4d9b-a141-998a03559d75" providerId="ADAL" clId="{651BAC71-7343-484D-BD8F-9D1BA4F7D925}" dt="2025-08-01T19:37:44.615" v="1889" actId="207"/>
+          <ac:chgData name="Pramod Naik" userId="ceb6df04-ef15-4d9b-a141-998a03559d75" providerId="ADAL" clId="{651BAC71-7343-484D-BD8F-9D1BA4F7D925}" dt="2025-08-02T06:21:16.824" v="1966" actId="14100"/>
           <ac:spMkLst>
             <pc:docMk/>
             <pc:sldMk cId="4081877237" sldId="473"/>
@@ -1823,6 +1831,34 @@
             <ac:picMk id="2" creationId="{15BA55CC-437B-A3A8-FE90-23D03B11D1DC}"/>
           </ac:picMkLst>
         </pc:picChg>
+      </pc:sldChg>
+      <pc:sldChg chg="add del">
+        <pc:chgData name="Pramod Naik" userId="ceb6df04-ef15-4d9b-a141-998a03559d75" providerId="ADAL" clId="{651BAC71-7343-484D-BD8F-9D1BA4F7D925}" dt="2025-08-02T17:52:49.575" v="2190" actId="2696"/>
+        <pc:sldMkLst>
+          <pc:docMk/>
+          <pc:sldMk cId="926057502" sldId="593"/>
+        </pc:sldMkLst>
+      </pc:sldChg>
+      <pc:sldChg chg="add">
+        <pc:chgData name="Pramod Naik" userId="ceb6df04-ef15-4d9b-a141-998a03559d75" providerId="ADAL" clId="{651BAC71-7343-484D-BD8F-9D1BA4F7D925}" dt="2025-08-02T17:53:02.734" v="2191"/>
+        <pc:sldMkLst>
+          <pc:docMk/>
+          <pc:sldMk cId="1905388139" sldId="593"/>
+        </pc:sldMkLst>
+      </pc:sldChg>
+      <pc:sldChg chg="add">
+        <pc:chgData name="Pramod Naik" userId="ceb6df04-ef15-4d9b-a141-998a03559d75" providerId="ADAL" clId="{651BAC71-7343-484D-BD8F-9D1BA4F7D925}" dt="2025-08-02T17:53:02.734" v="2191"/>
+        <pc:sldMkLst>
+          <pc:docMk/>
+          <pc:sldMk cId="312407068" sldId="594"/>
+        </pc:sldMkLst>
+      </pc:sldChg>
+      <pc:sldChg chg="add del">
+        <pc:chgData name="Pramod Naik" userId="ceb6df04-ef15-4d9b-a141-998a03559d75" providerId="ADAL" clId="{651BAC71-7343-484D-BD8F-9D1BA4F7D925}" dt="2025-08-02T17:52:49.575" v="2190" actId="2696"/>
+        <pc:sldMkLst>
+          <pc:docMk/>
+          <pc:sldMk cId="1679715329" sldId="594"/>
+        </pc:sldMkLst>
       </pc:sldChg>
       <pc:sldChg chg="add">
         <pc:chgData name="Pramod Naik" userId="ceb6df04-ef15-4d9b-a141-998a03559d75" providerId="ADAL" clId="{651BAC71-7343-484D-BD8F-9D1BA4F7D925}" dt="2025-07-26T14:57:50.436" v="1377"/>
@@ -2125,60 +2161,346 @@
           </ac:graphicFrameMkLst>
         </pc:graphicFrameChg>
       </pc:sldChg>
-      <pc:sldChg chg="add">
-        <pc:chgData name="Pramod Naik" userId="ceb6df04-ef15-4d9b-a141-998a03559d75" providerId="ADAL" clId="{651BAC71-7343-484D-BD8F-9D1BA4F7D925}" dt="2025-08-01T19:25:43.540" v="1818"/>
+      <pc:sldChg chg="addSp delSp modSp add mod ord">
+        <pc:chgData name="Pramod Naik" userId="ceb6df04-ef15-4d9b-a141-998a03559d75" providerId="ADAL" clId="{651BAC71-7343-484D-BD8F-9D1BA4F7D925}" dt="2025-08-02T17:46:31.892" v="2137" actId="14100"/>
         <pc:sldMkLst>
           <pc:docMk/>
           <pc:sldMk cId="3043417450" sldId="921"/>
         </pc:sldMkLst>
+        <pc:spChg chg="add mod">
+          <ac:chgData name="Pramod Naik" userId="ceb6df04-ef15-4d9b-a141-998a03559d75" providerId="ADAL" clId="{651BAC71-7343-484D-BD8F-9D1BA4F7D925}" dt="2025-08-02T17:17:49.463" v="1970"/>
+          <ac:spMkLst>
+            <pc:docMk/>
+            <pc:sldMk cId="3043417450" sldId="921"/>
+            <ac:spMk id="2" creationId="{AF069127-C9AE-CCCD-FFCC-99C5A31FDDBB}"/>
+          </ac:spMkLst>
+        </pc:spChg>
+        <pc:spChg chg="add del mod">
+          <ac:chgData name="Pramod Naik" userId="ceb6df04-ef15-4d9b-a141-998a03559d75" providerId="ADAL" clId="{651BAC71-7343-484D-BD8F-9D1BA4F7D925}" dt="2025-08-02T17:46:31.892" v="2137" actId="14100"/>
+          <ac:spMkLst>
+            <pc:docMk/>
+            <pc:sldMk cId="3043417450" sldId="921"/>
+            <ac:spMk id="3" creationId="{A2B5BDBC-71CE-669F-0392-D6C5AC321E9F}"/>
+          </ac:spMkLst>
+        </pc:spChg>
       </pc:sldChg>
-      <pc:sldChg chg="add">
-        <pc:chgData name="Pramod Naik" userId="ceb6df04-ef15-4d9b-a141-998a03559d75" providerId="ADAL" clId="{651BAC71-7343-484D-BD8F-9D1BA4F7D925}" dt="2025-08-01T19:25:44.051" v="1819"/>
+      <pc:sldChg chg="addSp modSp add mod">
+        <pc:chgData name="Pramod Naik" userId="ceb6df04-ef15-4d9b-a141-998a03559d75" providerId="ADAL" clId="{651BAC71-7343-484D-BD8F-9D1BA4F7D925}" dt="2025-08-01T19:47:10.274" v="1920" actId="164"/>
+        <pc:sldMkLst>
+          <pc:docMk/>
+          <pc:sldMk cId="981926684" sldId="922"/>
+        </pc:sldMkLst>
+        <pc:spChg chg="add">
+          <ac:chgData name="Pramod Naik" userId="ceb6df04-ef15-4d9b-a141-998a03559d75" providerId="ADAL" clId="{651BAC71-7343-484D-BD8F-9D1BA4F7D925}" dt="2025-08-01T19:45:46.707" v="1909"/>
+          <ac:spMkLst>
+            <pc:docMk/>
+            <pc:sldMk cId="981926684" sldId="922"/>
+            <ac:spMk id="2" creationId="{CC43F9F8-B524-EA56-D1CA-6E374ADEC164}"/>
+          </ac:spMkLst>
+        </pc:spChg>
+        <pc:spChg chg="mod">
+          <ac:chgData name="Pramod Naik" userId="ceb6df04-ef15-4d9b-a141-998a03559d75" providerId="ADAL" clId="{651BAC71-7343-484D-BD8F-9D1BA4F7D925}" dt="2025-08-01T19:46:47.562" v="1913" actId="14100"/>
+          <ac:spMkLst>
+            <pc:docMk/>
+            <pc:sldMk cId="981926684" sldId="922"/>
+            <ac:spMk id="3" creationId="{C2B18FA9-47B9-0269-A72C-8C45AC633C36}"/>
+          </ac:spMkLst>
+        </pc:spChg>
+        <pc:grpChg chg="add mod">
+          <ac:chgData name="Pramod Naik" userId="ceb6df04-ef15-4d9b-a141-998a03559d75" providerId="ADAL" clId="{651BAC71-7343-484D-BD8F-9D1BA4F7D925}" dt="2025-08-01T19:47:10.274" v="1920" actId="164"/>
+          <ac:grpSpMkLst>
+            <pc:docMk/>
+            <pc:sldMk cId="981926684" sldId="922"/>
+            <ac:grpSpMk id="8" creationId="{CFCB5793-FAD9-C812-5D23-D755DBD5A914}"/>
+          </ac:grpSpMkLst>
+        </pc:grpChg>
+        <pc:picChg chg="add mod">
+          <ac:chgData name="Pramod Naik" userId="ceb6df04-ef15-4d9b-a141-998a03559d75" providerId="ADAL" clId="{651BAC71-7343-484D-BD8F-9D1BA4F7D925}" dt="2025-08-01T19:47:10.274" v="1920" actId="164"/>
+          <ac:picMkLst>
+            <pc:docMk/>
+            <pc:sldMk cId="981926684" sldId="922"/>
+            <ac:picMk id="5" creationId="{A10942C8-AE48-A0FB-E549-B74CB68AD94E}"/>
+          </ac:picMkLst>
+        </pc:picChg>
+        <pc:picChg chg="add mod">
+          <ac:chgData name="Pramod Naik" userId="ceb6df04-ef15-4d9b-a141-998a03559d75" providerId="ADAL" clId="{651BAC71-7343-484D-BD8F-9D1BA4F7D925}" dt="2025-08-01T19:47:10.274" v="1920" actId="164"/>
+          <ac:picMkLst>
+            <pc:docMk/>
+            <pc:sldMk cId="981926684" sldId="922"/>
+            <ac:picMk id="7" creationId="{BA00725B-286E-166E-C4ED-D3FD77B56DBB}"/>
+          </ac:picMkLst>
+        </pc:picChg>
+      </pc:sldChg>
+      <pc:sldChg chg="modSp add del mod">
+        <pc:chgData name="Pramod Naik" userId="ceb6df04-ef15-4d9b-a141-998a03559d75" providerId="ADAL" clId="{651BAC71-7343-484D-BD8F-9D1BA4F7D925}" dt="2025-08-01T19:44:32.987" v="1905" actId="2696"/>
         <pc:sldMkLst>
           <pc:docMk/>
           <pc:sldMk cId="3726074494" sldId="922"/>
         </pc:sldMkLst>
+        <pc:spChg chg="mod">
+          <ac:chgData name="Pramod Naik" userId="ceb6df04-ef15-4d9b-a141-998a03559d75" providerId="ADAL" clId="{651BAC71-7343-484D-BD8F-9D1BA4F7D925}" dt="2025-08-01T19:44:29.629" v="1904" actId="20577"/>
+          <ac:spMkLst>
+            <pc:docMk/>
+            <pc:sldMk cId="3726074494" sldId="922"/>
+            <ac:spMk id="3" creationId="{C2B18FA9-47B9-0269-A72C-8C45AC633C36}"/>
+          </ac:spMkLst>
+        </pc:spChg>
       </pc:sldChg>
-      <pc:sldChg chg="add">
-        <pc:chgData name="Pramod Naik" userId="ceb6df04-ef15-4d9b-a141-998a03559d75" providerId="ADAL" clId="{651BAC71-7343-484D-BD8F-9D1BA4F7D925}" dt="2025-08-01T19:25:44.081" v="1820"/>
+      <pc:sldChg chg="modSp add mod ord">
+        <pc:chgData name="Pramod Naik" userId="ceb6df04-ef15-4d9b-a141-998a03559d75" providerId="ADAL" clId="{651BAC71-7343-484D-BD8F-9D1BA4F7D925}" dt="2025-08-02T17:24:39.809" v="2023"/>
         <pc:sldMkLst>
           <pc:docMk/>
           <pc:sldMk cId="817254730" sldId="923"/>
         </pc:sldMkLst>
+        <pc:spChg chg="mod">
+          <ac:chgData name="Pramod Naik" userId="ceb6df04-ef15-4d9b-a141-998a03559d75" providerId="ADAL" clId="{651BAC71-7343-484D-BD8F-9D1BA4F7D925}" dt="2025-08-02T17:24:36.388" v="2021" actId="20577"/>
+          <ac:spMkLst>
+            <pc:docMk/>
+            <pc:sldMk cId="817254730" sldId="923"/>
+            <ac:spMk id="3" creationId="{DF2C08E8-599A-77B2-CD19-3887AAB5A3D3}"/>
+          </ac:spMkLst>
+        </pc:spChg>
       </pc:sldChg>
-      <pc:sldChg chg="add">
-        <pc:chgData name="Pramod Naik" userId="ceb6df04-ef15-4d9b-a141-998a03559d75" providerId="ADAL" clId="{651BAC71-7343-484D-BD8F-9D1BA4F7D925}" dt="2025-08-01T19:25:44.129" v="1821"/>
+      <pc:sldChg chg="addSp modSp add mod">
+        <pc:chgData name="Pramod Naik" userId="ceb6df04-ef15-4d9b-a141-998a03559d75" providerId="ADAL" clId="{651BAC71-7343-484D-BD8F-9D1BA4F7D925}" dt="2025-08-02T17:31:12.131" v="2063" actId="403"/>
         <pc:sldMkLst>
           <pc:docMk/>
           <pc:sldMk cId="3803609951" sldId="924"/>
         </pc:sldMkLst>
+        <pc:spChg chg="add">
+          <ac:chgData name="Pramod Naik" userId="ceb6df04-ef15-4d9b-a141-998a03559d75" providerId="ADAL" clId="{651BAC71-7343-484D-BD8F-9D1BA4F7D925}" dt="2025-08-02T17:28:04.831" v="2029"/>
+          <ac:spMkLst>
+            <pc:docMk/>
+            <pc:sldMk cId="3803609951" sldId="924"/>
+            <ac:spMk id="2" creationId="{75FEB591-B0DD-1AC4-04E0-2BB1421EDF6D}"/>
+          </ac:spMkLst>
+        </pc:spChg>
+        <pc:spChg chg="mod">
+          <ac:chgData name="Pramod Naik" userId="ceb6df04-ef15-4d9b-a141-998a03559d75" providerId="ADAL" clId="{651BAC71-7343-484D-BD8F-9D1BA4F7D925}" dt="2025-08-02T17:31:12.131" v="2063" actId="403"/>
+          <ac:spMkLst>
+            <pc:docMk/>
+            <pc:sldMk cId="3803609951" sldId="924"/>
+            <ac:spMk id="3" creationId="{CFB568B0-04EB-9AE9-5A4F-525A087DE156}"/>
+          </ac:spMkLst>
+        </pc:spChg>
+        <pc:spChg chg="add">
+          <ac:chgData name="Pramod Naik" userId="ceb6df04-ef15-4d9b-a141-998a03559d75" providerId="ADAL" clId="{651BAC71-7343-484D-BD8F-9D1BA4F7D925}" dt="2025-08-02T17:28:04.831" v="2029"/>
+          <ac:spMkLst>
+            <pc:docMk/>
+            <pc:sldMk cId="3803609951" sldId="924"/>
+            <ac:spMk id="4" creationId="{AFB4724A-340B-B7CE-02F7-AE9900CD7D7F}"/>
+          </ac:spMkLst>
+        </pc:spChg>
+        <pc:spChg chg="add">
+          <ac:chgData name="Pramod Naik" userId="ceb6df04-ef15-4d9b-a141-998a03559d75" providerId="ADAL" clId="{651BAC71-7343-484D-BD8F-9D1BA4F7D925}" dt="2025-08-02T17:28:04.831" v="2029"/>
+          <ac:spMkLst>
+            <pc:docMk/>
+            <pc:sldMk cId="3803609951" sldId="924"/>
+            <ac:spMk id="5" creationId="{FAB79432-5F30-B9FB-D7C3-DE605BF29226}"/>
+          </ac:spMkLst>
+        </pc:spChg>
       </pc:sldChg>
-      <pc:sldChg chg="add">
-        <pc:chgData name="Pramod Naik" userId="ceb6df04-ef15-4d9b-a141-998a03559d75" providerId="ADAL" clId="{651BAC71-7343-484D-BD8F-9D1BA4F7D925}" dt="2025-08-01T19:25:44.148" v="1822"/>
+      <pc:sldChg chg="addSp modSp add mod">
+        <pc:chgData name="Pramod Naik" userId="ceb6df04-ef15-4d9b-a141-998a03559d75" providerId="ADAL" clId="{651BAC71-7343-484D-BD8F-9D1BA4F7D925}" dt="2025-08-02T17:34:18.016" v="2070" actId="1076"/>
         <pc:sldMkLst>
           <pc:docMk/>
           <pc:sldMk cId="1730698976" sldId="925"/>
         </pc:sldMkLst>
+        <pc:spChg chg="mod">
+          <ac:chgData name="Pramod Naik" userId="ceb6df04-ef15-4d9b-a141-998a03559d75" providerId="ADAL" clId="{651BAC71-7343-484D-BD8F-9D1BA4F7D925}" dt="2025-08-02T17:34:00.802" v="2067" actId="20577"/>
+          <ac:spMkLst>
+            <pc:docMk/>
+            <pc:sldMk cId="1730698976" sldId="925"/>
+            <ac:spMk id="3" creationId="{7E7DF167-239B-5BE7-D147-856CAA5A2B07}"/>
+          </ac:spMkLst>
+        </pc:spChg>
+        <pc:picChg chg="add mod">
+          <ac:chgData name="Pramod Naik" userId="ceb6df04-ef15-4d9b-a141-998a03559d75" providerId="ADAL" clId="{651BAC71-7343-484D-BD8F-9D1BA4F7D925}" dt="2025-08-02T17:34:18.016" v="2070" actId="1076"/>
+          <ac:picMkLst>
+            <pc:docMk/>
+            <pc:sldMk cId="1730698976" sldId="925"/>
+            <ac:picMk id="4" creationId="{DC1FCBEB-C910-12C6-66A5-F37B5D2910A3}"/>
+          </ac:picMkLst>
+        </pc:picChg>
       </pc:sldChg>
-      <pc:sldChg chg="add">
-        <pc:chgData name="Pramod Naik" userId="ceb6df04-ef15-4d9b-a141-998a03559d75" providerId="ADAL" clId="{651BAC71-7343-484D-BD8F-9D1BA4F7D925}" dt="2025-08-01T19:25:44.194" v="1823"/>
+      <pc:sldChg chg="addSp delSp modSp add mod">
+        <pc:chgData name="Pramod Naik" userId="ceb6df04-ef15-4d9b-a141-998a03559d75" providerId="ADAL" clId="{651BAC71-7343-484D-BD8F-9D1BA4F7D925}" dt="2025-08-02T17:42:09.282" v="2090" actId="5793"/>
         <pc:sldMkLst>
           <pc:docMk/>
           <pc:sldMk cId="371604518" sldId="926"/>
         </pc:sldMkLst>
+        <pc:spChg chg="add mod">
+          <ac:chgData name="Pramod Naik" userId="ceb6df04-ef15-4d9b-a141-998a03559d75" providerId="ADAL" clId="{651BAC71-7343-484D-BD8F-9D1BA4F7D925}" dt="2025-08-02T17:34:29.474" v="2072"/>
+          <ac:spMkLst>
+            <pc:docMk/>
+            <pc:sldMk cId="371604518" sldId="926"/>
+            <ac:spMk id="2" creationId="{B9843A75-80B9-67C7-40C1-E3657F5902D8}"/>
+          </ac:spMkLst>
+        </pc:spChg>
+        <pc:spChg chg="add del mod">
+          <ac:chgData name="Pramod Naik" userId="ceb6df04-ef15-4d9b-a141-998a03559d75" providerId="ADAL" clId="{651BAC71-7343-484D-BD8F-9D1BA4F7D925}" dt="2025-08-02T17:42:09.282" v="2090" actId="5793"/>
+          <ac:spMkLst>
+            <pc:docMk/>
+            <pc:sldMk cId="371604518" sldId="926"/>
+            <ac:spMk id="3" creationId="{C3011717-5A7E-C8A9-2AF4-18CE1E038CA3}"/>
+          </ac:spMkLst>
+        </pc:spChg>
       </pc:sldChg>
-      <pc:sldChg chg="add">
-        <pc:chgData name="Pramod Naik" userId="ceb6df04-ef15-4d9b-a141-998a03559d75" providerId="ADAL" clId="{651BAC71-7343-484D-BD8F-9D1BA4F7D925}" dt="2025-08-01T19:25:44.223" v="1824"/>
+      <pc:sldChg chg="modSp add mod ord">
+        <pc:chgData name="Pramod Naik" userId="ceb6df04-ef15-4d9b-a141-998a03559d75" providerId="ADAL" clId="{651BAC71-7343-484D-BD8F-9D1BA4F7D925}" dt="2025-08-02T17:42:45.329" v="2104" actId="20577"/>
         <pc:sldMkLst>
           <pc:docMk/>
           <pc:sldMk cId="727797019" sldId="927"/>
         </pc:sldMkLst>
+        <pc:spChg chg="mod">
+          <ac:chgData name="Pramod Naik" userId="ceb6df04-ef15-4d9b-a141-998a03559d75" providerId="ADAL" clId="{651BAC71-7343-484D-BD8F-9D1BA4F7D925}" dt="2025-08-02T17:42:45.329" v="2104" actId="20577"/>
+          <ac:spMkLst>
+            <pc:docMk/>
+            <pc:sldMk cId="727797019" sldId="927"/>
+            <ac:spMk id="3" creationId="{6BE96954-24C0-14D5-3DC7-541893F7458C}"/>
+          </ac:spMkLst>
+        </pc:spChg>
       </pc:sldChg>
       <pc:sldChg chg="add">
         <pc:chgData name="Pramod Naik" userId="ceb6df04-ef15-4d9b-a141-998a03559d75" providerId="ADAL" clId="{651BAC71-7343-484D-BD8F-9D1BA4F7D925}" dt="2025-08-01T19:25:44.247" v="1825"/>
         <pc:sldMkLst>
           <pc:docMk/>
           <pc:sldMk cId="1429089744" sldId="928"/>
+        </pc:sldMkLst>
+      </pc:sldChg>
+      <pc:sldChg chg="add">
+        <pc:chgData name="Pramod Naik" userId="ceb6df04-ef15-4d9b-a141-998a03559d75" providerId="ADAL" clId="{651BAC71-7343-484D-BD8F-9D1BA4F7D925}" dt="2025-08-02T06:20:42.517" v="1947"/>
+        <pc:sldMkLst>
+          <pc:docMk/>
+          <pc:sldMk cId="594504810" sldId="929"/>
+        </pc:sldMkLst>
+      </pc:sldChg>
+      <pc:sldChg chg="addSp delSp modSp add mod">
+        <pc:chgData name="Pramod Naik" userId="ceb6df04-ef15-4d9b-a141-998a03559d75" providerId="ADAL" clId="{651BAC71-7343-484D-BD8F-9D1BA4F7D925}" dt="2025-08-02T17:44:11.011" v="2115" actId="14100"/>
+        <pc:sldMkLst>
+          <pc:docMk/>
+          <pc:sldMk cId="1182689897" sldId="930"/>
+        </pc:sldMkLst>
+        <pc:spChg chg="add mod">
+          <ac:chgData name="Pramod Naik" userId="ceb6df04-ef15-4d9b-a141-998a03559d75" providerId="ADAL" clId="{651BAC71-7343-484D-BD8F-9D1BA4F7D925}" dt="2025-08-02T17:43:47.494" v="2106"/>
+          <ac:spMkLst>
+            <pc:docMk/>
+            <pc:sldMk cId="1182689897" sldId="930"/>
+            <ac:spMk id="2" creationId="{646F8FAC-CDC2-FBA7-92BE-45C704F1179F}"/>
+          </ac:spMkLst>
+        </pc:spChg>
+        <pc:spChg chg="add del mod">
+          <ac:chgData name="Pramod Naik" userId="ceb6df04-ef15-4d9b-a141-998a03559d75" providerId="ADAL" clId="{651BAC71-7343-484D-BD8F-9D1BA4F7D925}" dt="2025-08-02T17:44:11.011" v="2115" actId="14100"/>
+          <ac:spMkLst>
+            <pc:docMk/>
+            <pc:sldMk cId="1182689897" sldId="930"/>
+            <ac:spMk id="3" creationId="{F7EB70AF-9870-5C53-60AA-139B4BC2B1CF}"/>
+          </ac:spMkLst>
+        </pc:spChg>
+      </pc:sldChg>
+      <pc:sldChg chg="addSp modSp add mod">
+        <pc:chgData name="Pramod Naik" userId="ceb6df04-ef15-4d9b-a141-998a03559d75" providerId="ADAL" clId="{651BAC71-7343-484D-BD8F-9D1BA4F7D925}" dt="2025-08-02T17:45:10.140" v="2128" actId="14734"/>
+        <pc:sldMkLst>
+          <pc:docMk/>
+          <pc:sldMk cId="1180542444" sldId="931"/>
+        </pc:sldMkLst>
+        <pc:spChg chg="mod">
+          <ac:chgData name="Pramod Naik" userId="ceb6df04-ef15-4d9b-a141-998a03559d75" providerId="ADAL" clId="{651BAC71-7343-484D-BD8F-9D1BA4F7D925}" dt="2025-08-02T17:44:50.503" v="2120" actId="403"/>
+          <ac:spMkLst>
+            <pc:docMk/>
+            <pc:sldMk cId="1180542444" sldId="931"/>
+            <ac:spMk id="3" creationId="{81F18575-B2FA-A7AF-EB97-4DF513307B63}"/>
+          </ac:spMkLst>
+        </pc:spChg>
+        <pc:graphicFrameChg chg="add mod modGraphic">
+          <ac:chgData name="Pramod Naik" userId="ceb6df04-ef15-4d9b-a141-998a03559d75" providerId="ADAL" clId="{651BAC71-7343-484D-BD8F-9D1BA4F7D925}" dt="2025-08-02T17:45:10.140" v="2128" actId="14734"/>
+          <ac:graphicFrameMkLst>
+            <pc:docMk/>
+            <pc:sldMk cId="1180542444" sldId="931"/>
+            <ac:graphicFrameMk id="2" creationId="{4B999EEB-4E80-14C9-36DD-6AFCB1347882}"/>
+          </ac:graphicFrameMkLst>
+        </pc:graphicFrameChg>
+      </pc:sldChg>
+      <pc:sldChg chg="addSp delSp modSp add mod">
+        <pc:chgData name="Pramod Naik" userId="ceb6df04-ef15-4d9b-a141-998a03559d75" providerId="ADAL" clId="{651BAC71-7343-484D-BD8F-9D1BA4F7D925}" dt="2025-08-02T17:54:26.084" v="2198" actId="27636"/>
+        <pc:sldMkLst>
+          <pc:docMk/>
+          <pc:sldMk cId="268459834" sldId="932"/>
+        </pc:sldMkLst>
+        <pc:spChg chg="add mod">
+          <ac:chgData name="Pramod Naik" userId="ceb6df04-ef15-4d9b-a141-998a03559d75" providerId="ADAL" clId="{651BAC71-7343-484D-BD8F-9D1BA4F7D925}" dt="2025-08-02T17:47:35.986" v="2139"/>
+          <ac:spMkLst>
+            <pc:docMk/>
+            <pc:sldMk cId="268459834" sldId="932"/>
+            <ac:spMk id="2" creationId="{97D7731B-649A-B25B-F42B-278769791EBE}"/>
+          </ac:spMkLst>
+        </pc:spChg>
+        <pc:spChg chg="add del mod">
+          <ac:chgData name="Pramod Naik" userId="ceb6df04-ef15-4d9b-a141-998a03559d75" providerId="ADAL" clId="{651BAC71-7343-484D-BD8F-9D1BA4F7D925}" dt="2025-08-02T17:54:26.084" v="2198" actId="27636"/>
+          <ac:spMkLst>
+            <pc:docMk/>
+            <pc:sldMk cId="268459834" sldId="932"/>
+            <ac:spMk id="3" creationId="{E1BF9C27-0E4B-760B-80E7-2BC770750734}"/>
+          </ac:spMkLst>
+        </pc:spChg>
+      </pc:sldChg>
+      <pc:sldChg chg="addSp modSp add mod">
+        <pc:chgData name="Pramod Naik" userId="ceb6df04-ef15-4d9b-a141-998a03559d75" providerId="ADAL" clId="{651BAC71-7343-484D-BD8F-9D1BA4F7D925}" dt="2025-08-02T17:51:37.960" v="2171" actId="403"/>
+        <pc:sldMkLst>
+          <pc:docMk/>
+          <pc:sldMk cId="4154944966" sldId="933"/>
+        </pc:sldMkLst>
+        <pc:spChg chg="mod">
+          <ac:chgData name="Pramod Naik" userId="ceb6df04-ef15-4d9b-a141-998a03559d75" providerId="ADAL" clId="{651BAC71-7343-484D-BD8F-9D1BA4F7D925}" dt="2025-08-02T17:51:37.960" v="2171" actId="403"/>
+          <ac:spMkLst>
+            <pc:docMk/>
+            <pc:sldMk cId="4154944966" sldId="933"/>
+            <ac:spMk id="3" creationId="{30024AB5-300F-A50B-74E4-15D2D67FF9F5}"/>
+          </ac:spMkLst>
+        </pc:spChg>
+        <pc:graphicFrameChg chg="add mod modGraphic">
+          <ac:chgData name="Pramod Naik" userId="ceb6df04-ef15-4d9b-a141-998a03559d75" providerId="ADAL" clId="{651BAC71-7343-484D-BD8F-9D1BA4F7D925}" dt="2025-08-02T17:49:48.423" v="2170" actId="14734"/>
+          <ac:graphicFrameMkLst>
+            <pc:docMk/>
+            <pc:sldMk cId="4154944966" sldId="933"/>
+            <ac:graphicFrameMk id="2" creationId="{18BF573A-301D-9FAF-FEA8-CB150E64CB05}"/>
+          </ac:graphicFrameMkLst>
+        </pc:graphicFrameChg>
+      </pc:sldChg>
+      <pc:sldChg chg="modSp add mod">
+        <pc:chgData name="Pramod Naik" userId="ceb6df04-ef15-4d9b-a141-998a03559d75" providerId="ADAL" clId="{651BAC71-7343-484D-BD8F-9D1BA4F7D925}" dt="2025-08-02T17:52:41.342" v="2186" actId="207"/>
+        <pc:sldMkLst>
+          <pc:docMk/>
+          <pc:sldMk cId="3175839415" sldId="934"/>
+        </pc:sldMkLst>
+        <pc:spChg chg="mod">
+          <ac:chgData name="Pramod Naik" userId="ceb6df04-ef15-4d9b-a141-998a03559d75" providerId="ADAL" clId="{651BAC71-7343-484D-BD8F-9D1BA4F7D925}" dt="2025-08-02T17:52:41.342" v="2186" actId="207"/>
+          <ac:spMkLst>
+            <pc:docMk/>
+            <pc:sldMk cId="3175839415" sldId="934"/>
+            <ac:spMk id="3" creationId="{2E856828-5EBA-6582-853F-094D63D9CF5C}"/>
+          </ac:spMkLst>
+        </pc:spChg>
+      </pc:sldChg>
+      <pc:sldChg chg="add del">
+        <pc:chgData name="Pramod Naik" userId="ceb6df04-ef15-4d9b-a141-998a03559d75" providerId="ADAL" clId="{651BAC71-7343-484D-BD8F-9D1BA4F7D925}" dt="2025-08-02T17:55:06.614" v="2202" actId="47"/>
+        <pc:sldMkLst>
+          <pc:docMk/>
+          <pc:sldMk cId="2878153878" sldId="935"/>
+        </pc:sldMkLst>
+      </pc:sldChg>
+      <pc:sldChg chg="add del">
+        <pc:chgData name="Pramod Naik" userId="ceb6df04-ef15-4d9b-a141-998a03559d75" providerId="ADAL" clId="{651BAC71-7343-484D-BD8F-9D1BA4F7D925}" dt="2025-08-02T17:55:05.439" v="2201" actId="47"/>
+        <pc:sldMkLst>
+          <pc:docMk/>
+          <pc:sldMk cId="2563565179" sldId="936"/>
+        </pc:sldMkLst>
+      </pc:sldChg>
+      <pc:sldChg chg="add del">
+        <pc:chgData name="Pramod Naik" userId="ceb6df04-ef15-4d9b-a141-998a03559d75" providerId="ADAL" clId="{651BAC71-7343-484D-BD8F-9D1BA4F7D925}" dt="2025-08-02T17:55:05.021" v="2200" actId="47"/>
+        <pc:sldMkLst>
+          <pc:docMk/>
+          <pc:sldMk cId="1217754854" sldId="937"/>
         </pc:sldMkLst>
       </pc:sldChg>
     </pc:docChg>
@@ -2268,7 +2590,7 @@
           <a:p>
             <a:fld id="{61532AF1-4615-4667-912A-829B12F8C4D2}" type="datetimeFigureOut">
               <a:rPr lang="en-IN" smtClean="0"/>
-              <a:t>01-08-2025</a:t>
+              <a:t>02-08-2025</a:t>
             </a:fld>
             <a:endParaRPr lang="en-IN"/>
           </a:p>
@@ -2685,7 +3007,7 @@
           <a:p>
             <a:fld id="{C43A76A3-ADC8-4477-8FC1-B9DD55D84908}" type="datetime1">
               <a:rPr lang="en-US" smtClean="0"/>
-              <a:t>8/1/2025</a:t>
+              <a:t>8/2/2025</a:t>
             </a:fld>
             <a:endParaRPr lang="en-US" dirty="0"/>
           </a:p>
@@ -2883,7 +3205,7 @@
           <a:p>
             <a:fld id="{D6762538-DC4D-4667-96E5-B3278DDF8B12}" type="datetime1">
               <a:rPr lang="en-US" smtClean="0"/>
-              <a:t>8/1/2025</a:t>
+              <a:t>8/2/2025</a:t>
             </a:fld>
             <a:endParaRPr lang="en-US"/>
           </a:p>
@@ -3091,7 +3413,7 @@
           <a:p>
             <a:fld id="{05880548-5C08-4BE3-B63E-F2BB63B0B00C}" type="datetime1">
               <a:rPr lang="en-US" smtClean="0"/>
-              <a:t>8/1/2025</a:t>
+              <a:t>8/2/2025</a:t>
             </a:fld>
             <a:endParaRPr lang="en-US"/>
           </a:p>
@@ -3289,7 +3611,7 @@
           <a:p>
             <a:fld id="{DE7F49BE-398D-479A-8A7E-5DDBCA61EDCB}" type="datetime1">
               <a:rPr lang="en-US" smtClean="0"/>
-              <a:t>8/1/2025</a:t>
+              <a:t>8/2/2025</a:t>
             </a:fld>
             <a:endParaRPr lang="en-US" dirty="0"/>
           </a:p>
@@ -3565,7 +3887,7 @@
           <a:p>
             <a:fld id="{CCD0C193-4974-4A1F-9C63-07D595E30D66}" type="datetime1">
               <a:rPr lang="en-US" smtClean="0"/>
-              <a:t>8/1/2025</a:t>
+              <a:t>8/2/2025</a:t>
             </a:fld>
             <a:endParaRPr lang="en-US"/>
           </a:p>
@@ -3832,7 +4154,7 @@
           <a:p>
             <a:fld id="{701AA87F-28D4-4BF0-B81F-877A89DFD5AC}" type="datetime1">
               <a:rPr lang="en-US" smtClean="0"/>
-              <a:t>8/1/2025</a:t>
+              <a:t>8/2/2025</a:t>
             </a:fld>
             <a:endParaRPr lang="en-US"/>
           </a:p>
@@ -4246,7 +4568,7 @@
           <a:p>
             <a:fld id="{A8A9F1F3-208B-49A3-B337-9C8ACEB3E0E1}" type="datetime1">
               <a:rPr lang="en-US" smtClean="0"/>
-              <a:t>8/1/2025</a:t>
+              <a:t>8/2/2025</a:t>
             </a:fld>
             <a:endParaRPr lang="en-US"/>
           </a:p>
@@ -4393,7 +4715,7 @@
           <a:p>
             <a:fld id="{27AF6CA6-7293-4AA2-A0E0-A3BF4416E786}" type="datetime1">
               <a:rPr lang="en-US" smtClean="0"/>
-              <a:t>8/1/2025</a:t>
+              <a:t>8/2/2025</a:t>
             </a:fld>
             <a:endParaRPr lang="en-US"/>
           </a:p>
@@ -4506,7 +4828,7 @@
           <a:p>
             <a:fld id="{98D87016-7BCD-46FB-8EE3-AB6C369108B4}" type="datetime1">
               <a:rPr lang="en-US" smtClean="0"/>
-              <a:t>8/1/2025</a:t>
+              <a:t>8/2/2025</a:t>
             </a:fld>
             <a:endParaRPr lang="en-US"/>
           </a:p>
@@ -4825,7 +5147,7 @@
           <a:p>
             <a:fld id="{A1547011-1FFC-4EF8-9A2E-53B4AD2ADBD4}" type="datetime1">
               <a:rPr lang="en-US" smtClean="0"/>
-              <a:t>8/1/2025</a:t>
+              <a:t>8/2/2025</a:t>
             </a:fld>
             <a:endParaRPr lang="en-US"/>
           </a:p>
@@ -5120,7 +5442,7 @@
           <a:p>
             <a:fld id="{9562EB47-45B4-4EF5-A743-B4885DD2F060}" type="datetime1">
               <a:rPr lang="en-US" smtClean="0"/>
-              <a:t>8/1/2025</a:t>
+              <a:t>8/2/2025</a:t>
             </a:fld>
             <a:endParaRPr lang="en-US"/>
           </a:p>
@@ -6505,7 +6827,7 @@
           <a:p>
             <a:fld id="{4A8D24A4-5FEC-4062-8995-EB21925B3B40}" type="datetime1">
               <a:rPr lang="en-US" smtClean="0"/>
-              <a:t>8/1/2025</a:t>
+              <a:t>8/2/2025</a:t>
             </a:fld>
             <a:endParaRPr lang="en-US" sz="1000" dirty="0"/>
           </a:p>
@@ -20076,7 +20398,15 @@
             </a:pPr>
             <a:r>
               <a:rPr lang="en-US" sz="2400" dirty="0"/>
-              <a:t>So we can apply a linear separator in high dimensions even if the data is non-linear in low dimensions.</a:t>
+              <a:t>So we can apply a </a:t>
+            </a:r>
+            <a:r>
+              <a:rPr lang="en-US" sz="2400" b="1" dirty="0"/>
+              <a:t>linear separator in high dimensions </a:t>
+            </a:r>
+            <a:r>
+              <a:rPr lang="en-US" sz="2400" dirty="0"/>
+              <a:t>even if the data is non-linear in low dimensions.</a:t>
             </a:r>
           </a:p>
           <a:p>
@@ -24486,6 +24816,361 @@
         <p:cNvPr id="1" name="">
           <a:extLst>
             <a:ext uri="{FF2B5EF4-FFF2-40B4-BE49-F238E27FC236}">
+              <a16:creationId xmlns:a16="http://schemas.microsoft.com/office/drawing/2014/main" id="{AF9D4F1B-40B3-6714-751C-C2212A1A546C}"/>
+            </a:ext>
+          </a:extLst>
+        </p:cNvPr>
+        <p:cNvGrpSpPr/>
+        <p:nvPr/>
+      </p:nvGrpSpPr>
+      <p:grpSpPr>
+        <a:xfrm>
+          <a:off x="0" y="0"/>
+          <a:ext cx="0" cy="0"/>
+          <a:chOff x="0" y="0"/>
+          <a:chExt cx="0" cy="0"/>
+        </a:xfrm>
+      </p:grpSpPr>
+      <p:sp>
+        <p:nvSpPr>
+          <p:cNvPr id="3" name="Content Placeholder 2">
+            <a:extLst>
+              <a:ext uri="{FF2B5EF4-FFF2-40B4-BE49-F238E27FC236}">
+                <a16:creationId xmlns:a16="http://schemas.microsoft.com/office/drawing/2014/main" id="{125105E5-803A-3B5A-745E-A94616BA6AFC}"/>
+              </a:ext>
+            </a:extLst>
+          </p:cNvPr>
+          <p:cNvSpPr>
+            <a:spLocks noGrp="1"/>
+          </p:cNvSpPr>
+          <p:nvPr>
+            <p:ph idx="1"/>
+          </p:nvPr>
+        </p:nvSpPr>
+        <p:spPr>
+          <a:xfrm>
+            <a:off x="777240" y="2471057"/>
+            <a:ext cx="10659110" cy="3705906"/>
+          </a:xfrm>
+        </p:spPr>
+        <p:txBody>
+          <a:bodyPr>
+            <a:normAutofit/>
+          </a:bodyPr>
+          <a:lstStyle/>
+          <a:p>
+            <a:pPr marL="0" indent="0" algn="ctr">
+              <a:buNone/>
+            </a:pPr>
+            <a:r>
+              <a:rPr lang="en-IN" sz="5400" b="1" dirty="0"/>
+              <a:t>Introduction to Neural Networks</a:t>
+            </a:r>
+            <a:endParaRPr lang="en-IN" sz="3600" dirty="0"/>
+          </a:p>
+          <a:p>
+            <a:pPr marL="0" indent="0" algn="ctr">
+              <a:buNone/>
+            </a:pPr>
+            <a:endParaRPr lang="en-IN" sz="3600" b="1" dirty="0"/>
+          </a:p>
+        </p:txBody>
+      </p:sp>
+    </p:spTree>
+    <p:extLst>
+      <p:ext uri="{BB962C8B-B14F-4D97-AF65-F5344CB8AC3E}">
+        <p14:creationId xmlns:p14="http://schemas.microsoft.com/office/powerpoint/2010/main" val="4081877237"/>
+      </p:ext>
+    </p:extLst>
+  </p:cSld>
+  <p:clrMapOvr>
+    <a:masterClrMapping/>
+  </p:clrMapOvr>
+</p:sld>
+</file>
+
+<file path=ppt/slides/slide54.xml><?xml version="1.0" encoding="utf-8"?>
+<p:sld xmlns:a="http://schemas.openxmlformats.org/drawingml/2006/main" xmlns:r="http://schemas.openxmlformats.org/officeDocument/2006/relationships" xmlns:p="http://schemas.openxmlformats.org/presentationml/2006/main">
+  <p:cSld>
+    <p:spTree>
+      <p:nvGrpSpPr>
+        <p:cNvPr id="1" name="">
+          <a:extLst>
+            <a:ext uri="{FF2B5EF4-FFF2-40B4-BE49-F238E27FC236}">
+              <a16:creationId xmlns:a16="http://schemas.microsoft.com/office/drawing/2014/main" id="{6932A958-5151-1F8B-15F0-CC99C902CC79}"/>
+            </a:ext>
+          </a:extLst>
+        </p:cNvPr>
+        <p:cNvGrpSpPr/>
+        <p:nvPr/>
+      </p:nvGrpSpPr>
+      <p:grpSpPr>
+        <a:xfrm>
+          <a:off x="0" y="0"/>
+          <a:ext cx="0" cy="0"/>
+          <a:chOff x="0" y="0"/>
+          <a:chExt cx="0" cy="0"/>
+        </a:xfrm>
+      </p:grpSpPr>
+      <p:sp>
+        <p:nvSpPr>
+          <p:cNvPr id="3" name="Content Placeholder 2">
+            <a:extLst>
+              <a:ext uri="{FF2B5EF4-FFF2-40B4-BE49-F238E27FC236}">
+                <a16:creationId xmlns:a16="http://schemas.microsoft.com/office/drawing/2014/main" id="{E9031C2B-D462-0DD8-1E4F-8F86A1090D7F}"/>
+              </a:ext>
+            </a:extLst>
+          </p:cNvPr>
+          <p:cNvSpPr>
+            <a:spLocks noGrp="1"/>
+          </p:cNvSpPr>
+          <p:nvPr>
+            <p:ph idx="1"/>
+          </p:nvPr>
+        </p:nvSpPr>
+        <p:spPr>
+          <a:xfrm>
+            <a:off x="777240" y="707571"/>
+            <a:ext cx="10659110" cy="5469392"/>
+          </a:xfrm>
+        </p:spPr>
+        <p:txBody>
+          <a:bodyPr>
+            <a:normAutofit/>
+          </a:bodyPr>
+          <a:lstStyle/>
+          <a:p>
+            <a:pPr marL="0" indent="0">
+              <a:buNone/>
+            </a:pPr>
+            <a:r>
+              <a:rPr lang="en-US" sz="2800" b="1" dirty="0"/>
+              <a:t>What is Deep Learning?</a:t>
+            </a:r>
+          </a:p>
+          <a:p>
+            <a:pPr marL="0" indent="0">
+              <a:buNone/>
+            </a:pPr>
+            <a:r>
+              <a:rPr lang="en-US" sz="2800" dirty="0"/>
+              <a:t>Deep Learning is a </a:t>
+            </a:r>
+            <a:r>
+              <a:rPr lang="en-US" sz="2800" b="1" dirty="0">
+                <a:solidFill>
+                  <a:srgbClr val="C00000"/>
+                </a:solidFill>
+              </a:rPr>
+              <a:t>branch of Machine Learning </a:t>
+            </a:r>
+            <a:r>
+              <a:rPr lang="en-US" sz="2800" dirty="0"/>
+              <a:t>that uses </a:t>
+            </a:r>
+            <a:r>
+              <a:rPr lang="en-US" sz="2800" b="1" dirty="0"/>
+              <a:t>artificial neural networks </a:t>
+            </a:r>
+            <a:r>
+              <a:rPr lang="en-US" sz="2800" dirty="0"/>
+              <a:t>with </a:t>
+            </a:r>
+            <a:r>
+              <a:rPr lang="en-US" sz="2800" b="1" dirty="0">
+                <a:solidFill>
+                  <a:srgbClr val="C00000"/>
+                </a:solidFill>
+              </a:rPr>
+              <a:t>many layers </a:t>
+            </a:r>
+            <a:r>
+              <a:rPr lang="en-US" sz="2800" dirty="0"/>
+              <a:t>(hence "deep") to learn from data and make predictions or decisions.</a:t>
+            </a:r>
+            <a:endParaRPr lang="en-IN" sz="2800" dirty="0"/>
+          </a:p>
+          <a:p>
+            <a:pPr marL="0" indent="0">
+              <a:buNone/>
+            </a:pPr>
+            <a:endParaRPr lang="en-US" sz="2800" dirty="0"/>
+          </a:p>
+          <a:p>
+            <a:pPr marL="0" indent="0">
+              <a:buNone/>
+            </a:pPr>
+            <a:r>
+              <a:rPr lang="en-IN" sz="2800" b="1"/>
+              <a:t>Neural </a:t>
+            </a:r>
+            <a:r>
+              <a:rPr lang="en-IN" sz="2800" b="1" dirty="0"/>
+              <a:t>Networks:</a:t>
+            </a:r>
+            <a:endParaRPr lang="en-US" sz="2800" dirty="0"/>
+          </a:p>
+          <a:p>
+            <a:r>
+              <a:rPr lang="en-US" sz="2800" dirty="0"/>
+              <a:t>A </a:t>
+            </a:r>
+            <a:r>
+              <a:rPr lang="en-US" sz="2800" b="1" dirty="0"/>
+              <a:t>Neural Network (NN)</a:t>
+            </a:r>
+            <a:r>
+              <a:rPr lang="en-US" sz="2800" dirty="0"/>
+              <a:t> is a computational model inspired by the way the </a:t>
+            </a:r>
+            <a:r>
+              <a:rPr lang="en-US" sz="2800" b="1" dirty="0">
+                <a:solidFill>
+                  <a:srgbClr val="C00000"/>
+                </a:solidFill>
+              </a:rPr>
+              <a:t>human brain works</a:t>
+            </a:r>
+            <a:r>
+              <a:rPr lang="en-US" sz="2800" dirty="0"/>
+              <a:t>. It consists of layers of interconnected "</a:t>
+            </a:r>
+            <a:r>
+              <a:rPr lang="en-US" sz="2800" b="1" dirty="0">
+                <a:solidFill>
+                  <a:srgbClr val="C00000"/>
+                </a:solidFill>
+              </a:rPr>
+              <a:t>neurons</a:t>
+            </a:r>
+            <a:r>
+              <a:rPr lang="en-US" sz="2800" dirty="0"/>
+              <a:t>" (also called </a:t>
+            </a:r>
+            <a:r>
+              <a:rPr lang="en-US" sz="2800" b="1" dirty="0"/>
+              <a:t>nodes</a:t>
+            </a:r>
+            <a:r>
+              <a:rPr lang="en-US" sz="2800" dirty="0"/>
+              <a:t>), and it is used to </a:t>
+            </a:r>
+            <a:r>
+              <a:rPr lang="en-US" sz="2800" b="1" dirty="0">
+                <a:solidFill>
+                  <a:srgbClr val="002060"/>
+                </a:solidFill>
+              </a:rPr>
+              <a:t>recognize patterns</a:t>
+            </a:r>
+            <a:r>
+              <a:rPr lang="en-US" sz="2800" dirty="0"/>
+              <a:t>, </a:t>
+            </a:r>
+            <a:r>
+              <a:rPr lang="en-US" sz="2800" b="1" dirty="0">
+                <a:solidFill>
+                  <a:srgbClr val="002060"/>
+                </a:solidFill>
+              </a:rPr>
+              <a:t>make</a:t>
+            </a:r>
+            <a:r>
+              <a:rPr lang="en-US" sz="2800" dirty="0"/>
+              <a:t> </a:t>
+            </a:r>
+            <a:r>
+              <a:rPr lang="en-US" sz="2800" b="1" dirty="0">
+                <a:solidFill>
+                  <a:srgbClr val="002060"/>
+                </a:solidFill>
+              </a:rPr>
+              <a:t>decisions</a:t>
+            </a:r>
+            <a:r>
+              <a:rPr lang="en-US" sz="2800" dirty="0"/>
+              <a:t>, and </a:t>
+            </a:r>
+            <a:r>
+              <a:rPr lang="en-US" sz="2800" b="1" dirty="0">
+                <a:solidFill>
+                  <a:srgbClr val="002060"/>
+                </a:solidFill>
+              </a:rPr>
+              <a:t>learn</a:t>
+            </a:r>
+            <a:r>
+              <a:rPr lang="en-US" sz="2800" dirty="0"/>
+              <a:t> </a:t>
+            </a:r>
+            <a:r>
+              <a:rPr lang="en-US" sz="2800" b="1" dirty="0">
+                <a:solidFill>
+                  <a:srgbClr val="002060"/>
+                </a:solidFill>
+              </a:rPr>
+              <a:t>from</a:t>
+            </a:r>
+            <a:r>
+              <a:rPr lang="en-US" sz="2800" dirty="0"/>
+              <a:t> </a:t>
+            </a:r>
+            <a:r>
+              <a:rPr lang="en-US" sz="2800" b="1" dirty="0">
+                <a:solidFill>
+                  <a:srgbClr val="002060"/>
+                </a:solidFill>
+              </a:rPr>
+              <a:t>data</a:t>
+            </a:r>
+            <a:r>
+              <a:rPr lang="en-US" sz="2800" dirty="0"/>
+              <a:t>.</a:t>
+            </a:r>
+          </a:p>
+          <a:p>
+            <a:r>
+              <a:rPr lang="en-US" sz="2800" dirty="0"/>
+              <a:t>Neural networks are the foundation of </a:t>
+            </a:r>
+            <a:r>
+              <a:rPr lang="en-US" sz="2800" b="1" dirty="0"/>
+              <a:t>Deep Learning</a:t>
+            </a:r>
+            <a:r>
+              <a:rPr lang="en-US" sz="2800" dirty="0"/>
+              <a:t>, a subset of Machine Learning.</a:t>
+            </a:r>
+          </a:p>
+          <a:p>
+            <a:pPr marL="0" indent="0">
+              <a:buNone/>
+            </a:pPr>
+            <a:endParaRPr lang="en-IN" sz="1200" b="1" dirty="0"/>
+          </a:p>
+        </p:txBody>
+      </p:sp>
+    </p:spTree>
+    <p:extLst>
+      <p:ext uri="{BB962C8B-B14F-4D97-AF65-F5344CB8AC3E}">
+        <p14:creationId xmlns:p14="http://schemas.microsoft.com/office/powerpoint/2010/main" val="594504810"/>
+      </p:ext>
+    </p:extLst>
+  </p:cSld>
+  <p:clrMapOvr>
+    <a:masterClrMapping/>
+  </p:clrMapOvr>
+</p:sld>
+</file>
+
+<file path=ppt/slides/slide55.xml><?xml version="1.0" encoding="utf-8"?>
+<p:sld xmlns:a="http://schemas.openxmlformats.org/drawingml/2006/main" xmlns:r="http://schemas.openxmlformats.org/officeDocument/2006/relationships" xmlns:p="http://schemas.openxmlformats.org/presentationml/2006/main">
+  <p:cSld>
+    <p:spTree>
+      <p:nvGrpSpPr>
+        <p:cNvPr id="1" name="">
+          <a:extLst>
+            <a:ext uri="{FF2B5EF4-FFF2-40B4-BE49-F238E27FC236}">
               <a16:creationId xmlns:a16="http://schemas.microsoft.com/office/drawing/2014/main" id="{D93773BD-E472-A44D-F7D5-62114F33F22D}"/>
             </a:ext>
           </a:extLst>
@@ -24531,7 +25216,7 @@
           <a:p>
             <a:r>
               <a:rPr lang="en-US" sz="2800" b="1" dirty="0"/>
-              <a:t>Introduction:</a:t>
+              <a:t>Why ANN:</a:t>
             </a:r>
           </a:p>
           <a:p>
@@ -24716,7 +25401,7 @@
 </p:sld>
 </file>
 
-<file path=ppt/slides/slide54.xml><?xml version="1.0" encoding="utf-8"?>
+<file path=ppt/slides/slide56.xml><?xml version="1.0" encoding="utf-8"?>
 <p:sld xmlns:a="http://schemas.openxmlformats.org/drawingml/2006/main" xmlns:r="http://schemas.openxmlformats.org/officeDocument/2006/relationships" xmlns:p="http://schemas.openxmlformats.org/presentationml/2006/main">
   <p:cSld>
     <p:spTree>
@@ -24724,7 +25409,7 @@
         <p:cNvPr id="1" name="">
           <a:extLst>
             <a:ext uri="{FF2B5EF4-FFF2-40B4-BE49-F238E27FC236}">
-              <a16:creationId xmlns:a16="http://schemas.microsoft.com/office/drawing/2014/main" id="{AF9D4F1B-40B3-6714-751C-C2212A1A546C}"/>
+              <a16:creationId xmlns:a16="http://schemas.microsoft.com/office/drawing/2014/main" id="{01994D0E-78D9-58C6-2939-A79DD409F8E2}"/>
             </a:ext>
           </a:extLst>
         </p:cNvPr>
@@ -24744,7 +25429,7 @@
           <p:cNvPr id="3" name="Content Placeholder 2">
             <a:extLst>
               <a:ext uri="{FF2B5EF4-FFF2-40B4-BE49-F238E27FC236}">
-                <a16:creationId xmlns:a16="http://schemas.microsoft.com/office/drawing/2014/main" id="{125105E5-803A-3B5A-745E-A94616BA6AFC}"/>
+                <a16:creationId xmlns:a16="http://schemas.microsoft.com/office/drawing/2014/main" id="{C2B18FA9-47B9-0269-A72C-8C45AC633C36}"/>
               </a:ext>
             </a:extLst>
           </p:cNvPr>
@@ -24757,8 +25442,8 @@
         </p:nvSpPr>
         <p:spPr>
           <a:xfrm>
-            <a:off x="777240" y="707571"/>
-            <a:ext cx="10659110" cy="5469392"/>
+            <a:off x="777240" y="489858"/>
+            <a:ext cx="10659110" cy="5687106"/>
           </a:xfrm>
         </p:spPr>
         <p:txBody>
@@ -24771,205 +25456,135 @@
               <a:buNone/>
             </a:pPr>
             <a:r>
-              <a:rPr lang="en-IN" sz="2800" b="1" dirty="0"/>
-              <a:t>Introduction to Neural Networks:</a:t>
-            </a:r>
-          </a:p>
-          <a:p>
-            <a:r>
-              <a:rPr lang="en-US" sz="2800" dirty="0"/>
-              <a:t>A </a:t>
-            </a:r>
-            <a:r>
-              <a:rPr lang="en-US" sz="2800" b="1" dirty="0"/>
-              <a:t>Neural Network (NN)</a:t>
-            </a:r>
-            <a:r>
-              <a:rPr lang="en-US" sz="2800" dirty="0"/>
-              <a:t> is a computational model inspired by the way the </a:t>
-            </a:r>
-            <a:r>
               <a:rPr lang="en-US" sz="2800" b="1" dirty="0">
                 <a:solidFill>
-                  <a:srgbClr val="C00000"/>
-                </a:solidFill>
-              </a:rPr>
-              <a:t>human brain works</a:t>
-            </a:r>
-            <a:r>
-              <a:rPr lang="en-US" sz="2800" dirty="0"/>
-              <a:t>. It consists of layers of interconnected "</a:t>
-            </a:r>
-            <a:r>
-              <a:rPr lang="en-US" sz="2800" b="1" dirty="0">
-                <a:solidFill>
-                  <a:srgbClr val="C00000"/>
-                </a:solidFill>
-              </a:rPr>
-              <a:t>neurons</a:t>
-            </a:r>
-            <a:r>
-              <a:rPr lang="en-US" sz="2800" dirty="0"/>
-              <a:t>" (also called </a:t>
-            </a:r>
-            <a:r>
-              <a:rPr lang="en-US" sz="2800" b="1" dirty="0"/>
-              <a:t>nodes</a:t>
-            </a:r>
-            <a:r>
-              <a:rPr lang="en-US" sz="2800" dirty="0"/>
-              <a:t>), and it is used to </a:t>
-            </a:r>
-            <a:r>
-              <a:rPr lang="en-US" sz="2800" b="1" dirty="0">
-                <a:solidFill>
                   <a:srgbClr val="002060"/>
                 </a:solidFill>
               </a:rPr>
-              <a:t>recognize patterns</a:t>
-            </a:r>
-            <a:r>
-              <a:rPr lang="en-US" sz="2800" dirty="0"/>
-              <a:t>, </a:t>
-            </a:r>
-            <a:r>
-              <a:rPr lang="en-US" sz="2800" b="1" dirty="0">
-                <a:solidFill>
-                  <a:srgbClr val="002060"/>
-                </a:solidFill>
-              </a:rPr>
-              <a:t>make</a:t>
-            </a:r>
-            <a:r>
-              <a:rPr lang="en-US" sz="2800" dirty="0"/>
-              <a:t> </a:t>
-            </a:r>
-            <a:r>
-              <a:rPr lang="en-US" sz="2800" b="1" dirty="0">
-                <a:solidFill>
-                  <a:srgbClr val="002060"/>
-                </a:solidFill>
-              </a:rPr>
-              <a:t>decisions</a:t>
-            </a:r>
-            <a:r>
-              <a:rPr lang="en-US" sz="2800" dirty="0"/>
-              <a:t>, and </a:t>
-            </a:r>
-            <a:r>
-              <a:rPr lang="en-US" sz="2800" b="1" dirty="0">
-                <a:solidFill>
-                  <a:srgbClr val="002060"/>
-                </a:solidFill>
-              </a:rPr>
-              <a:t>learn</a:t>
-            </a:r>
-            <a:r>
-              <a:rPr lang="en-US" sz="2800" dirty="0"/>
-              <a:t> </a:t>
-            </a:r>
-            <a:r>
-              <a:rPr lang="en-US" sz="2800" b="1" dirty="0">
-                <a:solidFill>
-                  <a:srgbClr val="002060"/>
-                </a:solidFill>
-              </a:rPr>
-              <a:t>from</a:t>
-            </a:r>
-            <a:r>
-              <a:rPr lang="en-US" sz="2800" dirty="0"/>
-              <a:t> </a:t>
-            </a:r>
-            <a:r>
-              <a:rPr lang="en-US" sz="2800" b="1" dirty="0">
-                <a:solidFill>
-                  <a:srgbClr val="002060"/>
-                </a:solidFill>
-              </a:rPr>
-              <a:t>data</a:t>
-            </a:r>
-            <a:r>
-              <a:rPr lang="en-US" sz="2800" dirty="0"/>
-              <a:t>.</a:t>
-            </a:r>
-          </a:p>
-          <a:p>
-            <a:r>
-              <a:rPr lang="en-US" sz="2800" dirty="0"/>
-              <a:t>Neural networks are the foundation of </a:t>
-            </a:r>
-            <a:r>
-              <a:rPr lang="en-US" sz="2800" b="1" dirty="0"/>
-              <a:t>Deep Learning</a:t>
-            </a:r>
-            <a:r>
-              <a:rPr lang="en-US" sz="2800" dirty="0"/>
-              <a:t>, a subset of Machine Learning.</a:t>
+              <a:t>ML vs DL</a:t>
             </a:r>
           </a:p>
           <a:p>
             <a:pPr marL="0" indent="0">
               <a:buNone/>
             </a:pPr>
-            <a:endParaRPr lang="en-IN" sz="1200" b="1" dirty="0"/>
-          </a:p>
-          <a:p>
-            <a:pPr marL="0" indent="0">
-              <a:buNone/>
-            </a:pPr>
+            <a:r>
+              <a:rPr lang="en-US" sz="2800" dirty="0"/>
+              <a:t>If </a:t>
+            </a:r>
             <a:r>
               <a:rPr lang="en-US" sz="2800" b="1" dirty="0"/>
-              <a:t>What is Deep Learning?</a:t>
-            </a:r>
-          </a:p>
-          <a:p>
-            <a:pPr marL="0" indent="0">
-              <a:buNone/>
-            </a:pPr>
+              <a:t>Machine Learning</a:t>
+            </a:r>
             <a:r>
               <a:rPr lang="en-US" sz="2800" dirty="0"/>
-              <a:t>Deep Learning is a </a:t>
-            </a:r>
-            <a:r>
-              <a:rPr lang="en-US" sz="2800" b="1" dirty="0">
-                <a:solidFill>
-                  <a:srgbClr val="C00000"/>
-                </a:solidFill>
-              </a:rPr>
-              <a:t>branch of Machine Learning </a:t>
+              <a:t> is like teaching a child how to solve math using a formula, </a:t>
+            </a:r>
+            <a:r>
+              <a:rPr lang="en-US" sz="2800" b="1" dirty="0"/>
+              <a:t>Deep Learning</a:t>
             </a:r>
             <a:r>
               <a:rPr lang="en-US" sz="2800" dirty="0"/>
-              <a:t>that uses </a:t>
+              <a:t> is like letting the child </a:t>
             </a:r>
             <a:r>
               <a:rPr lang="en-US" sz="2800" b="1" dirty="0"/>
-              <a:t>artificial neural networks </a:t>
+              <a:t>learn patterns from many examples</a:t>
             </a:r>
             <a:r>
               <a:rPr lang="en-US" sz="2800" dirty="0"/>
-              <a:t>with </a:t>
-            </a:r>
-            <a:r>
-              <a:rPr lang="en-US" sz="2800" b="1" dirty="0">
-                <a:solidFill>
-                  <a:srgbClr val="C00000"/>
-                </a:solidFill>
-              </a:rPr>
-              <a:t>many layers </a:t>
-            </a:r>
-            <a:r>
-              <a:rPr lang="en-US" sz="2800" dirty="0"/>
-              <a:t>(hence "deep") to learn from data and make predictions or decisions.</a:t>
+              <a:t>, without giving them the formula — and they eventually figure it out.</a:t>
             </a:r>
             <a:endParaRPr lang="en-IN" sz="2800" dirty="0"/>
           </a:p>
         </p:txBody>
       </p:sp>
+      <p:grpSp>
+        <p:nvGrpSpPr>
+          <p:cNvPr id="8" name="Group 7">
+            <a:extLst>
+              <a:ext uri="{FF2B5EF4-FFF2-40B4-BE49-F238E27FC236}">
+                <a16:creationId xmlns:a16="http://schemas.microsoft.com/office/drawing/2014/main" id="{CFCB5793-FAD9-C812-5D23-D755DBD5A914}"/>
+              </a:ext>
+            </a:extLst>
+          </p:cNvPr>
+          <p:cNvGrpSpPr/>
+          <p:nvPr/>
+        </p:nvGrpSpPr>
+        <p:grpSpPr>
+          <a:xfrm>
+            <a:off x="2547257" y="2634368"/>
+            <a:ext cx="7097485" cy="4061993"/>
+            <a:chOff x="2547257" y="2634368"/>
+            <a:chExt cx="7097485" cy="4061993"/>
+          </a:xfrm>
+        </p:grpSpPr>
+        <p:pic>
+          <p:nvPicPr>
+            <p:cNvPr id="5" name="Picture 4">
+              <a:extLst>
+                <a:ext uri="{FF2B5EF4-FFF2-40B4-BE49-F238E27FC236}">
+                  <a16:creationId xmlns:a16="http://schemas.microsoft.com/office/drawing/2014/main" id="{A10942C8-AE48-A0FB-E549-B74CB68AD94E}"/>
+                </a:ext>
+              </a:extLst>
+            </p:cNvPr>
+            <p:cNvPicPr>
+              <a:picLocks noChangeAspect="1"/>
+            </p:cNvPicPr>
+            <p:nvPr/>
+          </p:nvPicPr>
+          <p:blipFill>
+            <a:blip r:embed="rId2"/>
+            <a:stretch>
+              <a:fillRect/>
+            </a:stretch>
+          </p:blipFill>
+          <p:spPr>
+            <a:xfrm>
+              <a:off x="2547257" y="2634368"/>
+              <a:ext cx="7097485" cy="3733774"/>
+            </a:xfrm>
+            <a:prstGeom prst="rect">
+              <a:avLst/>
+            </a:prstGeom>
+          </p:spPr>
+        </p:pic>
+        <p:pic>
+          <p:nvPicPr>
+            <p:cNvPr id="7" name="Picture 6">
+              <a:extLst>
+                <a:ext uri="{FF2B5EF4-FFF2-40B4-BE49-F238E27FC236}">
+                  <a16:creationId xmlns:a16="http://schemas.microsoft.com/office/drawing/2014/main" id="{BA00725B-286E-166E-C4ED-D3FD77B56DBB}"/>
+                </a:ext>
+              </a:extLst>
+            </p:cNvPr>
+            <p:cNvPicPr>
+              <a:picLocks noChangeAspect="1"/>
+            </p:cNvPicPr>
+            <p:nvPr/>
+          </p:nvPicPr>
+          <p:blipFill>
+            <a:blip r:embed="rId3"/>
+            <a:stretch>
+              <a:fillRect/>
+            </a:stretch>
+          </p:blipFill>
+          <p:spPr>
+            <a:xfrm>
+              <a:off x="7051266" y="5586154"/>
+              <a:ext cx="1875019" cy="1110207"/>
+            </a:xfrm>
+            <a:prstGeom prst="rect">
+              <a:avLst/>
+            </a:prstGeom>
+          </p:spPr>
+        </p:pic>
+      </p:grpSp>
     </p:spTree>
     <p:extLst>
       <p:ext uri="{BB962C8B-B14F-4D97-AF65-F5344CB8AC3E}">
-        <p14:creationId xmlns:p14="http://schemas.microsoft.com/office/powerpoint/2010/main" val="4081877237"/>
+        <p14:creationId xmlns:p14="http://schemas.microsoft.com/office/powerpoint/2010/main" val="981926684"/>
       </p:ext>
     </p:extLst>
   </p:cSld>
@@ -24979,7 +25594,7 @@
 </p:sld>
 </file>
 
-<file path=ppt/slides/slide55.xml><?xml version="1.0" encoding="utf-8"?>
+<file path=ppt/slides/slide57.xml><?xml version="1.0" encoding="utf-8"?>
 <p:sld xmlns:a="http://schemas.openxmlformats.org/drawingml/2006/main" xmlns:r="http://schemas.openxmlformats.org/officeDocument/2006/relationships" xmlns:p="http://schemas.openxmlformats.org/presentationml/2006/main">
   <p:cSld>
     <p:spTree>
@@ -25233,7 +25848,7 @@
 </p:sld>
 </file>
 
-<file path=ppt/slides/slide56.xml><?xml version="1.0" encoding="utf-8"?>
+<file path=ppt/slides/slide58.xml><?xml version="1.0" encoding="utf-8"?>
 <p:sld xmlns:a="http://schemas.openxmlformats.org/drawingml/2006/main" xmlns:r="http://schemas.openxmlformats.org/officeDocument/2006/relationships" xmlns:p="http://schemas.openxmlformats.org/presentationml/2006/main">
   <p:cSld>
     <p:spTree>
@@ -25464,7 +26079,7 @@
 </p:sld>
 </file>
 
-<file path=ppt/slides/slide57.xml><?xml version="1.0" encoding="utf-8"?>
+<file path=ppt/slides/slide59.xml><?xml version="1.0" encoding="utf-8"?>
 <p:sld xmlns:a="http://schemas.openxmlformats.org/drawingml/2006/main" xmlns:r="http://schemas.openxmlformats.org/officeDocument/2006/relationships" xmlns:p="http://schemas.openxmlformats.org/presentationml/2006/main">
   <p:cSld>
     <p:spTree>
@@ -25884,710 +26499,6 @@
     <p:extLst>
       <p:ext uri="{BB962C8B-B14F-4D97-AF65-F5344CB8AC3E}">
         <p14:creationId xmlns:p14="http://schemas.microsoft.com/office/powerpoint/2010/main" val="2726931928"/>
-      </p:ext>
-    </p:extLst>
-  </p:cSld>
-  <p:clrMapOvr>
-    <a:masterClrMapping/>
-  </p:clrMapOvr>
-</p:sld>
-</file>
-
-<file path=ppt/slides/slide58.xml><?xml version="1.0" encoding="utf-8"?>
-<p:sld xmlns:a="http://schemas.openxmlformats.org/drawingml/2006/main" xmlns:r="http://schemas.openxmlformats.org/officeDocument/2006/relationships" xmlns:p="http://schemas.openxmlformats.org/presentationml/2006/main">
-  <p:cSld>
-    <p:spTree>
-      <p:nvGrpSpPr>
-        <p:cNvPr id="1" name="">
-          <a:extLst>
-            <a:ext uri="{FF2B5EF4-FFF2-40B4-BE49-F238E27FC236}">
-              <a16:creationId xmlns:a16="http://schemas.microsoft.com/office/drawing/2014/main" id="{1F00E23F-7B0D-2FC9-C862-2B7FA0A99203}"/>
-            </a:ext>
-          </a:extLst>
-        </p:cNvPr>
-        <p:cNvGrpSpPr/>
-        <p:nvPr/>
-      </p:nvGrpSpPr>
-      <p:grpSpPr>
-        <a:xfrm>
-          <a:off x="0" y="0"/>
-          <a:ext cx="0" cy="0"/>
-          <a:chOff x="0" y="0"/>
-          <a:chExt cx="0" cy="0"/>
-        </a:xfrm>
-      </p:grpSpPr>
-      <p:sp>
-        <p:nvSpPr>
-          <p:cNvPr id="5" name="TextBox 4">
-            <a:extLst>
-              <a:ext uri="{FF2B5EF4-FFF2-40B4-BE49-F238E27FC236}">
-                <a16:creationId xmlns:a16="http://schemas.microsoft.com/office/drawing/2014/main" id="{4CF04876-67F9-7B3A-8F10-50B0572E693D}"/>
-              </a:ext>
-            </a:extLst>
-          </p:cNvPr>
-          <p:cNvSpPr txBox="1"/>
-          <p:nvPr/>
-        </p:nvSpPr>
-        <p:spPr>
-          <a:xfrm>
-            <a:off x="564044" y="1524864"/>
-            <a:ext cx="11323155" cy="2739211"/>
-          </a:xfrm>
-          <a:prstGeom prst="rect">
-            <a:avLst/>
-          </a:prstGeom>
-          <a:noFill/>
-        </p:spPr>
-        <p:txBody>
-          <a:bodyPr wrap="square">
-            <a:spAutoFit/>
-          </a:bodyPr>
-          <a:lstStyle/>
-          <a:p>
-            <a:r>
-              <a:rPr lang="en-US" sz="2800" b="1" dirty="0"/>
-              <a:t>Why Understand Biological Neural Networks?</a:t>
-            </a:r>
-          </a:p>
-          <a:p>
-            <a:endParaRPr lang="en-US" sz="2400" dirty="0"/>
-          </a:p>
-          <a:p>
-            <a:r>
-              <a:rPr lang="en-US" sz="2400" dirty="0"/>
-              <a:t>	</a:t>
-            </a:r>
-            <a:r>
-              <a:rPr lang="en-US" sz="2400" b="1" dirty="0">
-                <a:solidFill>
-                  <a:srgbClr val="C00000"/>
-                </a:solidFill>
-              </a:rPr>
-              <a:t>For creating mathematical models </a:t>
-            </a:r>
-            <a:r>
-              <a:rPr lang="en-US" sz="2400" dirty="0"/>
-              <a:t>for </a:t>
-            </a:r>
-            <a:r>
-              <a:rPr lang="en-US" sz="2400" b="1" dirty="0">
-                <a:solidFill>
-                  <a:schemeClr val="accent1">
-                    <a:lumMod val="75000"/>
-                  </a:schemeClr>
-                </a:solidFill>
-              </a:rPr>
-              <a:t>artificial neural networks</a:t>
-            </a:r>
-            <a:r>
-              <a:rPr lang="en-US" sz="2400" dirty="0"/>
-              <a:t>, </a:t>
-            </a:r>
-            <a:r>
-              <a:rPr lang="en-US" sz="2400" b="1" dirty="0"/>
-              <a:t>theoretical analysis of biological neural networks</a:t>
-            </a:r>
-            <a:r>
-              <a:rPr lang="en-US" sz="2400" dirty="0"/>
-              <a:t> is essential as </a:t>
-            </a:r>
-            <a:r>
-              <a:rPr lang="en-US" sz="2400" b="1" dirty="0">
-                <a:solidFill>
-                  <a:srgbClr val="C00000"/>
-                </a:solidFill>
-              </a:rPr>
-              <a:t>they have a very close relationship</a:t>
-            </a:r>
-            <a:r>
-              <a:rPr lang="en-US" sz="2400" dirty="0"/>
-              <a:t>. 	And this understanding of the </a:t>
-            </a:r>
-            <a:r>
-              <a:rPr lang="en-US" sz="2400" b="1" dirty="0"/>
-              <a:t>brain’s neural networks </a:t>
-            </a:r>
-            <a:r>
-              <a:rPr lang="en-US" sz="2400" dirty="0"/>
-              <a:t>has opened horizons for the development of artificial neural network systems and adaptive systems designed to learn and adapt to the situations and inputs.</a:t>
-            </a:r>
-          </a:p>
-        </p:txBody>
-      </p:sp>
-    </p:spTree>
-    <p:extLst>
-      <p:ext uri="{BB962C8B-B14F-4D97-AF65-F5344CB8AC3E}">
-        <p14:creationId xmlns:p14="http://schemas.microsoft.com/office/powerpoint/2010/main" val="2682781936"/>
-      </p:ext>
-    </p:extLst>
-  </p:cSld>
-  <p:clrMapOvr>
-    <a:masterClrMapping/>
-  </p:clrMapOvr>
-</p:sld>
-</file>
-
-<file path=ppt/slides/slide59.xml><?xml version="1.0" encoding="utf-8"?>
-<p:sld xmlns:a="http://schemas.openxmlformats.org/drawingml/2006/main" xmlns:r="http://schemas.openxmlformats.org/officeDocument/2006/relationships" xmlns:p="http://schemas.openxmlformats.org/presentationml/2006/main">
-  <p:cSld>
-    <p:spTree>
-      <p:nvGrpSpPr>
-        <p:cNvPr id="1" name="">
-          <a:extLst>
-            <a:ext uri="{FF2B5EF4-FFF2-40B4-BE49-F238E27FC236}">
-              <a16:creationId xmlns:a16="http://schemas.microsoft.com/office/drawing/2014/main" id="{1FBCD8D4-66D6-C4FC-D52B-D9E60F202A62}"/>
-            </a:ext>
-          </a:extLst>
-        </p:cNvPr>
-        <p:cNvGrpSpPr/>
-        <p:nvPr/>
-      </p:nvGrpSpPr>
-      <p:grpSpPr>
-        <a:xfrm>
-          <a:off x="0" y="0"/>
-          <a:ext cx="0" cy="0"/>
-          <a:chOff x="0" y="0"/>
-          <a:chExt cx="0" cy="0"/>
-        </a:xfrm>
-      </p:grpSpPr>
-      <p:sp>
-        <p:nvSpPr>
-          <p:cNvPr id="5" name="TextBox 4">
-            <a:extLst>
-              <a:ext uri="{FF2B5EF4-FFF2-40B4-BE49-F238E27FC236}">
-                <a16:creationId xmlns:a16="http://schemas.microsoft.com/office/drawing/2014/main" id="{8F1A5FFE-F701-0017-AE06-456932903012}"/>
-              </a:ext>
-            </a:extLst>
-          </p:cNvPr>
-          <p:cNvSpPr txBox="1"/>
-          <p:nvPr/>
-        </p:nvSpPr>
-        <p:spPr>
-          <a:xfrm>
-            <a:off x="566682" y="495657"/>
-            <a:ext cx="10648714" cy="6309420"/>
-          </a:xfrm>
-          <a:prstGeom prst="rect">
-            <a:avLst/>
-          </a:prstGeom>
-          <a:noFill/>
-        </p:spPr>
-        <p:txBody>
-          <a:bodyPr wrap="square">
-            <a:spAutoFit/>
-          </a:bodyPr>
-          <a:lstStyle/>
-          <a:p>
-            <a:r>
-              <a:rPr lang="en-US" sz="2400" b="1" dirty="0">
-                <a:solidFill>
-                  <a:srgbClr val="002060"/>
-                </a:solidFill>
-              </a:rPr>
-              <a:t>Artificial Neuron </a:t>
-            </a:r>
-            <a:r>
-              <a:rPr lang="en-US" sz="2400" dirty="0">
-                <a:solidFill>
-                  <a:srgbClr val="002060"/>
-                </a:solidFill>
-              </a:rPr>
-              <a:t>or</a:t>
-            </a:r>
-            <a:r>
-              <a:rPr lang="en-US" sz="2400" b="1" dirty="0">
-                <a:solidFill>
-                  <a:srgbClr val="002060"/>
-                </a:solidFill>
-              </a:rPr>
-              <a:t> P</a:t>
-            </a:r>
-            <a:r>
-              <a:rPr lang="en-US" sz="2400" b="1" i="0" dirty="0">
-                <a:solidFill>
-                  <a:srgbClr val="002060"/>
-                </a:solidFill>
-                <a:effectLst/>
-                <a:latin typeface="Söhne"/>
-              </a:rPr>
-              <a:t>erceptron</a:t>
-            </a:r>
-            <a:r>
-              <a:rPr lang="en-US" sz="2400" b="0" i="0" dirty="0">
-                <a:solidFill>
-                  <a:srgbClr val="002060"/>
-                </a:solidFill>
-                <a:effectLst/>
-                <a:latin typeface="Söhne"/>
-              </a:rPr>
-              <a:t> </a:t>
-            </a:r>
-            <a:r>
-              <a:rPr lang="en-US" sz="2400" b="1" dirty="0">
-                <a:solidFill>
-                  <a:srgbClr val="002060"/>
-                </a:solidFill>
-              </a:rPr>
-              <a:t>:</a:t>
-            </a:r>
-          </a:p>
-          <a:p>
-            <a:r>
-              <a:rPr lang="en-US" b="0" i="0" dirty="0">
-                <a:solidFill>
-                  <a:srgbClr val="0D0D0D"/>
-                </a:solidFill>
-                <a:effectLst/>
-                <a:latin typeface="Söhne"/>
-              </a:rPr>
-              <a:t>	</a:t>
-            </a:r>
-            <a:r>
-              <a:rPr lang="en-US" sz="2400" b="0" i="0" dirty="0">
-                <a:solidFill>
-                  <a:srgbClr val="0D0D0D"/>
-                </a:solidFill>
-                <a:effectLst/>
-                <a:latin typeface="Söhne"/>
-              </a:rPr>
-              <a:t>An artificial neuron, often referred to as a </a:t>
-            </a:r>
-            <a:r>
-              <a:rPr lang="en-US" sz="2400" b="1" i="0" dirty="0">
-                <a:solidFill>
-                  <a:srgbClr val="0D0D0D"/>
-                </a:solidFill>
-                <a:effectLst/>
-                <a:latin typeface="Söhne"/>
-              </a:rPr>
-              <a:t>perceptron</a:t>
-            </a:r>
-            <a:r>
-              <a:rPr lang="en-US" sz="2400" b="0" i="0" dirty="0">
-                <a:solidFill>
-                  <a:srgbClr val="0D0D0D"/>
-                </a:solidFill>
-                <a:effectLst/>
-                <a:latin typeface="Söhne"/>
-              </a:rPr>
-              <a:t>, is a </a:t>
-            </a:r>
-            <a:r>
-              <a:rPr lang="en-US" sz="2400" b="1" i="0" dirty="0">
-                <a:solidFill>
-                  <a:srgbClr val="C00000"/>
-                </a:solidFill>
-                <a:effectLst/>
-                <a:latin typeface="Söhne"/>
-              </a:rPr>
-              <a:t>fundamental building block of </a:t>
-            </a:r>
-            <a:r>
-              <a:rPr lang="en-US" sz="2400" b="1" i="0" dirty="0">
-                <a:solidFill>
-                  <a:srgbClr val="0D0D0D"/>
-                </a:solidFill>
-                <a:effectLst/>
-                <a:latin typeface="Söhne"/>
-              </a:rPr>
-              <a:t>artificial neural networks (ANNs). </a:t>
-            </a:r>
-            <a:r>
-              <a:rPr lang="en-US" sz="2400" b="1" i="0" dirty="0">
-                <a:solidFill>
-                  <a:schemeClr val="accent1">
-                    <a:lumMod val="75000"/>
-                  </a:schemeClr>
-                </a:solidFill>
-                <a:effectLst/>
-                <a:latin typeface="Söhne"/>
-              </a:rPr>
-              <a:t>Modeled after biological neurons in the human brain</a:t>
-            </a:r>
-            <a:r>
-              <a:rPr lang="en-US" sz="2400" b="0" i="0" dirty="0">
-                <a:solidFill>
-                  <a:srgbClr val="0D0D0D"/>
-                </a:solidFill>
-                <a:effectLst/>
-                <a:latin typeface="Söhne"/>
-              </a:rPr>
-              <a:t>, artificial neurons are </a:t>
-            </a:r>
-            <a:r>
-              <a:rPr lang="en-US" sz="2400" b="1" i="0" dirty="0">
-                <a:solidFill>
-                  <a:srgbClr val="C00000"/>
-                </a:solidFill>
-                <a:effectLst/>
-                <a:latin typeface="Söhne"/>
-              </a:rPr>
-              <a:t>mathematical entities </a:t>
-            </a:r>
-            <a:r>
-              <a:rPr lang="en-US" sz="2400" b="0" i="0" dirty="0">
-                <a:solidFill>
-                  <a:srgbClr val="0D0D0D"/>
-                </a:solidFill>
-                <a:effectLst/>
-                <a:latin typeface="Söhne"/>
-              </a:rPr>
-              <a:t>designed to process and transmit information.</a:t>
-            </a:r>
-          </a:p>
-          <a:p>
-            <a:r>
-              <a:rPr lang="en-US" sz="2400" dirty="0">
-                <a:solidFill>
-                  <a:srgbClr val="0D0D0D"/>
-                </a:solidFill>
-                <a:latin typeface="Söhne"/>
-              </a:rPr>
-              <a:t>	</a:t>
-            </a:r>
-            <a:r>
-              <a:rPr lang="en-US" sz="2400" dirty="0"/>
-              <a:t> </a:t>
-            </a:r>
-            <a:r>
-              <a:rPr lang="en-US" sz="2400" b="1" dirty="0"/>
-              <a:t>The </a:t>
-            </a:r>
-            <a:r>
-              <a:rPr lang="en-US" sz="2400" b="1" dirty="0">
-                <a:solidFill>
-                  <a:srgbClr val="FFC000"/>
-                </a:solidFill>
-              </a:rPr>
-              <a:t>biological neural network </a:t>
-            </a:r>
-            <a:r>
-              <a:rPr lang="en-US" sz="2400" b="1" dirty="0"/>
-              <a:t>has been </a:t>
-            </a:r>
-            <a:r>
-              <a:rPr lang="en-US" sz="2400" b="1" dirty="0">
-                <a:solidFill>
-                  <a:srgbClr val="C00000"/>
-                </a:solidFill>
-              </a:rPr>
-              <a:t>modelled in the form of </a:t>
-            </a:r>
-            <a:r>
-              <a:rPr lang="en-US" sz="2400" b="1" dirty="0">
-                <a:solidFill>
-                  <a:srgbClr val="00B050"/>
-                </a:solidFill>
-              </a:rPr>
-              <a:t>ANN</a:t>
-            </a:r>
-            <a:r>
-              <a:rPr lang="en-US" sz="2400" b="1" dirty="0"/>
-              <a:t> with </a:t>
-            </a:r>
-            <a:r>
-              <a:rPr lang="en-US" sz="2400" b="1" dirty="0">
-                <a:solidFill>
-                  <a:srgbClr val="0070C0"/>
-                </a:solidFill>
-              </a:rPr>
-              <a:t>artificial neurons </a:t>
-            </a:r>
-            <a:r>
-              <a:rPr lang="en-US" sz="2400" b="1" dirty="0">
-                <a:solidFill>
-                  <a:srgbClr val="C00000"/>
-                </a:solidFill>
-              </a:rPr>
-              <a:t>simulating the function of biological neurons.</a:t>
-            </a:r>
-          </a:p>
-          <a:p>
-            <a:endParaRPr lang="en-US" b="1" dirty="0"/>
-          </a:p>
-          <a:p>
-            <a:r>
-              <a:rPr lang="en-US" sz="2400" b="1" dirty="0">
-                <a:solidFill>
-                  <a:srgbClr val="002060"/>
-                </a:solidFill>
-                <a:latin typeface="Söhne"/>
-              </a:rPr>
-              <a:t>A</a:t>
-            </a:r>
-            <a:r>
-              <a:rPr lang="en-US" sz="2400" b="1" i="0" dirty="0">
-                <a:solidFill>
-                  <a:srgbClr val="002060"/>
-                </a:solidFill>
-                <a:effectLst/>
-                <a:latin typeface="Söhne"/>
-              </a:rPr>
-              <a:t>rtificial Neural Network (ANN):</a:t>
-            </a:r>
-            <a:br>
-              <a:rPr lang="en-US" dirty="0"/>
-            </a:br>
-            <a:r>
-              <a:rPr lang="en-US" dirty="0"/>
-              <a:t>	</a:t>
-            </a:r>
-            <a:r>
-              <a:rPr lang="en-US" sz="2000" b="1" i="0" dirty="0">
-                <a:solidFill>
-                  <a:srgbClr val="0D0D0D"/>
-                </a:solidFill>
-                <a:effectLst/>
-                <a:latin typeface="Söhne"/>
-              </a:rPr>
-              <a:t>An artificial neural network (ANN</a:t>
-            </a:r>
-            <a:r>
-              <a:rPr lang="en-US" sz="2000" b="0" i="0" dirty="0">
-                <a:solidFill>
-                  <a:srgbClr val="0D0D0D"/>
-                </a:solidFill>
-                <a:effectLst/>
-                <a:latin typeface="Söhne"/>
-              </a:rPr>
-              <a:t>), often simply referred to as a </a:t>
-            </a:r>
-            <a:r>
-              <a:rPr lang="en-US" sz="2000" b="1" i="0" dirty="0">
-                <a:solidFill>
-                  <a:srgbClr val="0D0D0D"/>
-                </a:solidFill>
-                <a:effectLst/>
-                <a:latin typeface="Söhne"/>
-              </a:rPr>
-              <a:t>neural network</a:t>
-            </a:r>
-            <a:r>
-              <a:rPr lang="en-US" sz="2000" b="0" i="0" dirty="0">
-                <a:solidFill>
-                  <a:srgbClr val="0D0D0D"/>
-                </a:solidFill>
-                <a:effectLst/>
-                <a:latin typeface="Söhne"/>
-              </a:rPr>
-              <a:t>, is a </a:t>
-            </a:r>
-            <a:r>
-              <a:rPr lang="en-US" sz="2000" b="1" i="0" dirty="0">
-                <a:solidFill>
-                  <a:srgbClr val="C00000"/>
-                </a:solidFill>
-                <a:effectLst/>
-                <a:latin typeface="Söhne"/>
-              </a:rPr>
-              <a:t>computational model inspired by the structure and function of biological neural networks in the human brain. </a:t>
-            </a:r>
-            <a:r>
-              <a:rPr lang="en-US" sz="2000" b="0" i="0" dirty="0">
-                <a:solidFill>
-                  <a:srgbClr val="0D0D0D"/>
-                </a:solidFill>
-                <a:effectLst/>
-                <a:latin typeface="Söhne"/>
-              </a:rPr>
-              <a:t>It consists of </a:t>
-            </a:r>
-            <a:r>
-              <a:rPr lang="en-US" sz="2000" b="1" i="0" dirty="0">
-                <a:solidFill>
-                  <a:schemeClr val="accent2">
-                    <a:lumMod val="75000"/>
-                  </a:schemeClr>
-                </a:solidFill>
-                <a:effectLst/>
-                <a:latin typeface="Söhne"/>
-              </a:rPr>
-              <a:t>interconnected nodes</a:t>
-            </a:r>
-            <a:r>
-              <a:rPr lang="en-US" sz="2000" b="0" i="0" dirty="0">
-                <a:solidFill>
-                  <a:srgbClr val="0D0D0D"/>
-                </a:solidFill>
-                <a:effectLst/>
-                <a:latin typeface="Söhne"/>
-              </a:rPr>
-              <a:t>, called </a:t>
-            </a:r>
-            <a:r>
-              <a:rPr lang="en-US" sz="2000" b="1" i="0" dirty="0">
-                <a:solidFill>
-                  <a:schemeClr val="accent2">
-                    <a:lumMod val="75000"/>
-                  </a:schemeClr>
-                </a:solidFill>
-                <a:effectLst/>
-                <a:latin typeface="Söhne"/>
-              </a:rPr>
-              <a:t>neurons</a:t>
-            </a:r>
-            <a:r>
-              <a:rPr lang="en-US" sz="2000" b="0" i="0" dirty="0">
-                <a:solidFill>
-                  <a:srgbClr val="0D0D0D"/>
-                </a:solidFill>
-                <a:effectLst/>
-                <a:latin typeface="Söhne"/>
-              </a:rPr>
-              <a:t> or units, </a:t>
-            </a:r>
-            <a:r>
-              <a:rPr lang="en-US" sz="2000" b="1" i="0" dirty="0">
-                <a:solidFill>
-                  <a:schemeClr val="accent2">
-                    <a:lumMod val="75000"/>
-                  </a:schemeClr>
-                </a:solidFill>
-                <a:effectLst/>
-                <a:latin typeface="Söhne"/>
-              </a:rPr>
-              <a:t>organized</a:t>
-            </a:r>
-            <a:r>
-              <a:rPr lang="en-US" sz="2000" b="0" i="0" dirty="0">
-                <a:solidFill>
-                  <a:srgbClr val="0D0D0D"/>
-                </a:solidFill>
-                <a:effectLst/>
-                <a:latin typeface="Söhne"/>
-              </a:rPr>
-              <a:t> </a:t>
-            </a:r>
-            <a:r>
-              <a:rPr lang="en-US" sz="2000" b="1" i="0" dirty="0">
-                <a:solidFill>
-                  <a:schemeClr val="accent2">
-                    <a:lumMod val="75000"/>
-                  </a:schemeClr>
-                </a:solidFill>
-                <a:effectLst/>
-                <a:latin typeface="Söhne"/>
-              </a:rPr>
-              <a:t>in layers</a:t>
-            </a:r>
-            <a:r>
-              <a:rPr lang="en-US" sz="2000" b="0" i="0" dirty="0">
-                <a:solidFill>
-                  <a:srgbClr val="0D0D0D"/>
-                </a:solidFill>
-                <a:effectLst/>
-                <a:latin typeface="Söhne"/>
-              </a:rPr>
-              <a:t>. </a:t>
-            </a:r>
-            <a:r>
-              <a:rPr lang="en-US" sz="2000" b="1" i="0" dirty="0">
-                <a:solidFill>
-                  <a:srgbClr val="0D0D0D"/>
-                </a:solidFill>
-                <a:effectLst/>
-                <a:latin typeface="Söhne"/>
-              </a:rPr>
-              <a:t>ANN processes information in a manner similar to how the human brain operates</a:t>
-            </a:r>
-            <a:r>
-              <a:rPr lang="en-US" sz="2000" b="0" i="0" dirty="0">
-                <a:solidFill>
-                  <a:srgbClr val="0D0D0D"/>
-                </a:solidFill>
-                <a:effectLst/>
-                <a:latin typeface="Söhne"/>
-              </a:rPr>
-              <a:t>, enabling it to learn from data and make predictions or decisions.</a:t>
-            </a:r>
-            <a:endParaRPr lang="en-US" sz="2000" b="1" dirty="0"/>
-          </a:p>
-          <a:p>
-            <a:r>
-              <a:rPr lang="en-US" sz="2000" b="1" dirty="0">
-                <a:solidFill>
-                  <a:schemeClr val="accent2">
-                    <a:lumMod val="75000"/>
-                  </a:schemeClr>
-                </a:solidFill>
-                <a:latin typeface="Söhne"/>
-              </a:rPr>
-              <a:t>K</a:t>
-            </a:r>
-            <a:r>
-              <a:rPr lang="en-US" sz="2000" b="1" i="0" dirty="0">
-                <a:solidFill>
-                  <a:schemeClr val="accent2">
-                    <a:lumMod val="75000"/>
-                  </a:schemeClr>
-                </a:solidFill>
-                <a:effectLst/>
-                <a:latin typeface="Söhne"/>
-              </a:rPr>
-              <a:t>ey components and concepts of an ANN:</a:t>
-            </a:r>
-          </a:p>
-          <a:p>
-            <a:pPr marL="342900" indent="-342900">
-              <a:buAutoNum type="arabicPeriod"/>
-            </a:pPr>
-            <a:r>
-              <a:rPr lang="en-US" sz="2000" b="1" i="0" dirty="0">
-                <a:solidFill>
-                  <a:srgbClr val="0D0D0D"/>
-                </a:solidFill>
-                <a:effectLst/>
-                <a:latin typeface="Söhne"/>
-              </a:rPr>
-              <a:t>Neurons (Nodes)</a:t>
-            </a:r>
-            <a:endParaRPr lang="en-US" sz="2000" dirty="0">
-              <a:solidFill>
-                <a:srgbClr val="0D0D0D"/>
-              </a:solidFill>
-              <a:latin typeface="Söhne"/>
-            </a:endParaRPr>
-          </a:p>
-          <a:p>
-            <a:pPr marL="342900" indent="-342900">
-              <a:buAutoNum type="arabicPeriod"/>
-            </a:pPr>
-            <a:r>
-              <a:rPr lang="en-US" sz="2000" b="1" i="0" dirty="0">
-                <a:solidFill>
-                  <a:srgbClr val="0D0D0D"/>
-                </a:solidFill>
-                <a:effectLst/>
-                <a:latin typeface="Söhne"/>
-              </a:rPr>
-              <a:t>Connections (Edges)</a:t>
-            </a:r>
-          </a:p>
-          <a:p>
-            <a:pPr marL="342900" indent="-342900">
-              <a:buAutoNum type="arabicPeriod"/>
-            </a:pPr>
-            <a:r>
-              <a:rPr lang="en-US" sz="2000" b="1" i="0" dirty="0">
-                <a:solidFill>
-                  <a:srgbClr val="0D0D0D"/>
-                </a:solidFill>
-                <a:effectLst/>
-                <a:latin typeface="Söhne"/>
-              </a:rPr>
-              <a:t>Layers</a:t>
-            </a:r>
-            <a:endParaRPr lang="en-US" sz="2000" b="1" dirty="0"/>
-          </a:p>
-          <a:p>
-            <a:endParaRPr lang="en-US" b="1" dirty="0"/>
-          </a:p>
-        </p:txBody>
-      </p:sp>
-    </p:spTree>
-    <p:extLst>
-      <p:ext uri="{BB962C8B-B14F-4D97-AF65-F5344CB8AC3E}">
-        <p14:creationId xmlns:p14="http://schemas.microsoft.com/office/powerpoint/2010/main" val="4165281687"/>
       </p:ext>
     </p:extLst>
   </p:cSld>
@@ -26850,6 +26761,710 @@
   <p:cSld>
     <p:spTree>
       <p:nvGrpSpPr>
+        <p:cNvPr id="1" name="">
+          <a:extLst>
+            <a:ext uri="{FF2B5EF4-FFF2-40B4-BE49-F238E27FC236}">
+              <a16:creationId xmlns:a16="http://schemas.microsoft.com/office/drawing/2014/main" id="{1F00E23F-7B0D-2FC9-C862-2B7FA0A99203}"/>
+            </a:ext>
+          </a:extLst>
+        </p:cNvPr>
+        <p:cNvGrpSpPr/>
+        <p:nvPr/>
+      </p:nvGrpSpPr>
+      <p:grpSpPr>
+        <a:xfrm>
+          <a:off x="0" y="0"/>
+          <a:ext cx="0" cy="0"/>
+          <a:chOff x="0" y="0"/>
+          <a:chExt cx="0" cy="0"/>
+        </a:xfrm>
+      </p:grpSpPr>
+      <p:sp>
+        <p:nvSpPr>
+          <p:cNvPr id="5" name="TextBox 4">
+            <a:extLst>
+              <a:ext uri="{FF2B5EF4-FFF2-40B4-BE49-F238E27FC236}">
+                <a16:creationId xmlns:a16="http://schemas.microsoft.com/office/drawing/2014/main" id="{4CF04876-67F9-7B3A-8F10-50B0572E693D}"/>
+              </a:ext>
+            </a:extLst>
+          </p:cNvPr>
+          <p:cNvSpPr txBox="1"/>
+          <p:nvPr/>
+        </p:nvSpPr>
+        <p:spPr>
+          <a:xfrm>
+            <a:off x="564044" y="1524864"/>
+            <a:ext cx="11323155" cy="2739211"/>
+          </a:xfrm>
+          <a:prstGeom prst="rect">
+            <a:avLst/>
+          </a:prstGeom>
+          <a:noFill/>
+        </p:spPr>
+        <p:txBody>
+          <a:bodyPr wrap="square">
+            <a:spAutoFit/>
+          </a:bodyPr>
+          <a:lstStyle/>
+          <a:p>
+            <a:r>
+              <a:rPr lang="en-US" sz="2800" b="1" dirty="0"/>
+              <a:t>Why Understand Biological Neural Networks?</a:t>
+            </a:r>
+          </a:p>
+          <a:p>
+            <a:endParaRPr lang="en-US" sz="2400" dirty="0"/>
+          </a:p>
+          <a:p>
+            <a:r>
+              <a:rPr lang="en-US" sz="2400" dirty="0"/>
+              <a:t>	</a:t>
+            </a:r>
+            <a:r>
+              <a:rPr lang="en-US" sz="2400" b="1" dirty="0">
+                <a:solidFill>
+                  <a:srgbClr val="C00000"/>
+                </a:solidFill>
+              </a:rPr>
+              <a:t>For creating mathematical models </a:t>
+            </a:r>
+            <a:r>
+              <a:rPr lang="en-US" sz="2400" dirty="0"/>
+              <a:t>for </a:t>
+            </a:r>
+            <a:r>
+              <a:rPr lang="en-US" sz="2400" b="1" dirty="0">
+                <a:solidFill>
+                  <a:schemeClr val="accent1">
+                    <a:lumMod val="75000"/>
+                  </a:schemeClr>
+                </a:solidFill>
+              </a:rPr>
+              <a:t>artificial neural networks</a:t>
+            </a:r>
+            <a:r>
+              <a:rPr lang="en-US" sz="2400" dirty="0"/>
+              <a:t>, </a:t>
+            </a:r>
+            <a:r>
+              <a:rPr lang="en-US" sz="2400" b="1" dirty="0"/>
+              <a:t>theoretical analysis of biological neural networks</a:t>
+            </a:r>
+            <a:r>
+              <a:rPr lang="en-US" sz="2400" dirty="0"/>
+              <a:t> is essential as </a:t>
+            </a:r>
+            <a:r>
+              <a:rPr lang="en-US" sz="2400" b="1" dirty="0">
+                <a:solidFill>
+                  <a:srgbClr val="C00000"/>
+                </a:solidFill>
+              </a:rPr>
+              <a:t>they have a very close relationship</a:t>
+            </a:r>
+            <a:r>
+              <a:rPr lang="en-US" sz="2400" dirty="0"/>
+              <a:t>. 	And this understanding of the </a:t>
+            </a:r>
+            <a:r>
+              <a:rPr lang="en-US" sz="2400" b="1" dirty="0"/>
+              <a:t>brain’s neural networks </a:t>
+            </a:r>
+            <a:r>
+              <a:rPr lang="en-US" sz="2400" dirty="0"/>
+              <a:t>has opened horizons for the development of artificial neural network systems and adaptive systems designed to learn and adapt to the situations and inputs.</a:t>
+            </a:r>
+          </a:p>
+        </p:txBody>
+      </p:sp>
+    </p:spTree>
+    <p:extLst>
+      <p:ext uri="{BB962C8B-B14F-4D97-AF65-F5344CB8AC3E}">
+        <p14:creationId xmlns:p14="http://schemas.microsoft.com/office/powerpoint/2010/main" val="2682781936"/>
+      </p:ext>
+    </p:extLst>
+  </p:cSld>
+  <p:clrMapOvr>
+    <a:masterClrMapping/>
+  </p:clrMapOvr>
+</p:sld>
+</file>
+
+<file path=ppt/slides/slide61.xml><?xml version="1.0" encoding="utf-8"?>
+<p:sld xmlns:a="http://schemas.openxmlformats.org/drawingml/2006/main" xmlns:r="http://schemas.openxmlformats.org/officeDocument/2006/relationships" xmlns:p="http://schemas.openxmlformats.org/presentationml/2006/main">
+  <p:cSld>
+    <p:spTree>
+      <p:nvGrpSpPr>
+        <p:cNvPr id="1" name="">
+          <a:extLst>
+            <a:ext uri="{FF2B5EF4-FFF2-40B4-BE49-F238E27FC236}">
+              <a16:creationId xmlns:a16="http://schemas.microsoft.com/office/drawing/2014/main" id="{1FBCD8D4-66D6-C4FC-D52B-D9E60F202A62}"/>
+            </a:ext>
+          </a:extLst>
+        </p:cNvPr>
+        <p:cNvGrpSpPr/>
+        <p:nvPr/>
+      </p:nvGrpSpPr>
+      <p:grpSpPr>
+        <a:xfrm>
+          <a:off x="0" y="0"/>
+          <a:ext cx="0" cy="0"/>
+          <a:chOff x="0" y="0"/>
+          <a:chExt cx="0" cy="0"/>
+        </a:xfrm>
+      </p:grpSpPr>
+      <p:sp>
+        <p:nvSpPr>
+          <p:cNvPr id="5" name="TextBox 4">
+            <a:extLst>
+              <a:ext uri="{FF2B5EF4-FFF2-40B4-BE49-F238E27FC236}">
+                <a16:creationId xmlns:a16="http://schemas.microsoft.com/office/drawing/2014/main" id="{8F1A5FFE-F701-0017-AE06-456932903012}"/>
+              </a:ext>
+            </a:extLst>
+          </p:cNvPr>
+          <p:cNvSpPr txBox="1"/>
+          <p:nvPr/>
+        </p:nvSpPr>
+        <p:spPr>
+          <a:xfrm>
+            <a:off x="566682" y="495657"/>
+            <a:ext cx="10648714" cy="6309420"/>
+          </a:xfrm>
+          <a:prstGeom prst="rect">
+            <a:avLst/>
+          </a:prstGeom>
+          <a:noFill/>
+        </p:spPr>
+        <p:txBody>
+          <a:bodyPr wrap="square">
+            <a:spAutoFit/>
+          </a:bodyPr>
+          <a:lstStyle/>
+          <a:p>
+            <a:r>
+              <a:rPr lang="en-US" sz="2400" b="1" dirty="0">
+                <a:solidFill>
+                  <a:srgbClr val="002060"/>
+                </a:solidFill>
+              </a:rPr>
+              <a:t>Artificial Neuron </a:t>
+            </a:r>
+            <a:r>
+              <a:rPr lang="en-US" sz="2400" dirty="0">
+                <a:solidFill>
+                  <a:srgbClr val="002060"/>
+                </a:solidFill>
+              </a:rPr>
+              <a:t>or</a:t>
+            </a:r>
+            <a:r>
+              <a:rPr lang="en-US" sz="2400" b="1" dirty="0">
+                <a:solidFill>
+                  <a:srgbClr val="002060"/>
+                </a:solidFill>
+              </a:rPr>
+              <a:t> P</a:t>
+            </a:r>
+            <a:r>
+              <a:rPr lang="en-US" sz="2400" b="1" i="0" dirty="0">
+                <a:solidFill>
+                  <a:srgbClr val="002060"/>
+                </a:solidFill>
+                <a:effectLst/>
+                <a:latin typeface="Söhne"/>
+              </a:rPr>
+              <a:t>erceptron</a:t>
+            </a:r>
+            <a:r>
+              <a:rPr lang="en-US" sz="2400" b="0" i="0" dirty="0">
+                <a:solidFill>
+                  <a:srgbClr val="002060"/>
+                </a:solidFill>
+                <a:effectLst/>
+                <a:latin typeface="Söhne"/>
+              </a:rPr>
+              <a:t> </a:t>
+            </a:r>
+            <a:r>
+              <a:rPr lang="en-US" sz="2400" b="1" dirty="0">
+                <a:solidFill>
+                  <a:srgbClr val="002060"/>
+                </a:solidFill>
+              </a:rPr>
+              <a:t>:</a:t>
+            </a:r>
+          </a:p>
+          <a:p>
+            <a:r>
+              <a:rPr lang="en-US" b="0" i="0" dirty="0">
+                <a:solidFill>
+                  <a:srgbClr val="0D0D0D"/>
+                </a:solidFill>
+                <a:effectLst/>
+                <a:latin typeface="Söhne"/>
+              </a:rPr>
+              <a:t>	</a:t>
+            </a:r>
+            <a:r>
+              <a:rPr lang="en-US" sz="2400" b="0" i="0" dirty="0">
+                <a:solidFill>
+                  <a:srgbClr val="0D0D0D"/>
+                </a:solidFill>
+                <a:effectLst/>
+                <a:latin typeface="Söhne"/>
+              </a:rPr>
+              <a:t>An artificial neuron, often referred to as a </a:t>
+            </a:r>
+            <a:r>
+              <a:rPr lang="en-US" sz="2400" b="1" i="0" dirty="0">
+                <a:solidFill>
+                  <a:srgbClr val="0D0D0D"/>
+                </a:solidFill>
+                <a:effectLst/>
+                <a:latin typeface="Söhne"/>
+              </a:rPr>
+              <a:t>perceptron</a:t>
+            </a:r>
+            <a:r>
+              <a:rPr lang="en-US" sz="2400" b="0" i="0" dirty="0">
+                <a:solidFill>
+                  <a:srgbClr val="0D0D0D"/>
+                </a:solidFill>
+                <a:effectLst/>
+                <a:latin typeface="Söhne"/>
+              </a:rPr>
+              <a:t>, is a </a:t>
+            </a:r>
+            <a:r>
+              <a:rPr lang="en-US" sz="2400" b="1" i="0" dirty="0">
+                <a:solidFill>
+                  <a:srgbClr val="C00000"/>
+                </a:solidFill>
+                <a:effectLst/>
+                <a:latin typeface="Söhne"/>
+              </a:rPr>
+              <a:t>fundamental building block of </a:t>
+            </a:r>
+            <a:r>
+              <a:rPr lang="en-US" sz="2400" b="1" i="0" dirty="0">
+                <a:solidFill>
+                  <a:srgbClr val="0D0D0D"/>
+                </a:solidFill>
+                <a:effectLst/>
+                <a:latin typeface="Söhne"/>
+              </a:rPr>
+              <a:t>artificial neural networks (ANNs). </a:t>
+            </a:r>
+            <a:r>
+              <a:rPr lang="en-US" sz="2400" b="1" i="0" dirty="0">
+                <a:solidFill>
+                  <a:schemeClr val="accent1">
+                    <a:lumMod val="75000"/>
+                  </a:schemeClr>
+                </a:solidFill>
+                <a:effectLst/>
+                <a:latin typeface="Söhne"/>
+              </a:rPr>
+              <a:t>Modeled after biological neurons in the human brain</a:t>
+            </a:r>
+            <a:r>
+              <a:rPr lang="en-US" sz="2400" b="0" i="0" dirty="0">
+                <a:solidFill>
+                  <a:srgbClr val="0D0D0D"/>
+                </a:solidFill>
+                <a:effectLst/>
+                <a:latin typeface="Söhne"/>
+              </a:rPr>
+              <a:t>, artificial neurons are </a:t>
+            </a:r>
+            <a:r>
+              <a:rPr lang="en-US" sz="2400" b="1" i="0" dirty="0">
+                <a:solidFill>
+                  <a:srgbClr val="C00000"/>
+                </a:solidFill>
+                <a:effectLst/>
+                <a:latin typeface="Söhne"/>
+              </a:rPr>
+              <a:t>mathematical entities </a:t>
+            </a:r>
+            <a:r>
+              <a:rPr lang="en-US" sz="2400" b="0" i="0" dirty="0">
+                <a:solidFill>
+                  <a:srgbClr val="0D0D0D"/>
+                </a:solidFill>
+                <a:effectLst/>
+                <a:latin typeface="Söhne"/>
+              </a:rPr>
+              <a:t>designed to process and transmit information.</a:t>
+            </a:r>
+          </a:p>
+          <a:p>
+            <a:r>
+              <a:rPr lang="en-US" sz="2400" dirty="0">
+                <a:solidFill>
+                  <a:srgbClr val="0D0D0D"/>
+                </a:solidFill>
+                <a:latin typeface="Söhne"/>
+              </a:rPr>
+              <a:t>	</a:t>
+            </a:r>
+            <a:r>
+              <a:rPr lang="en-US" sz="2400" dirty="0"/>
+              <a:t> </a:t>
+            </a:r>
+            <a:r>
+              <a:rPr lang="en-US" sz="2400" b="1" dirty="0"/>
+              <a:t>The </a:t>
+            </a:r>
+            <a:r>
+              <a:rPr lang="en-US" sz="2400" b="1" dirty="0">
+                <a:solidFill>
+                  <a:srgbClr val="FFC000"/>
+                </a:solidFill>
+              </a:rPr>
+              <a:t>biological neural network </a:t>
+            </a:r>
+            <a:r>
+              <a:rPr lang="en-US" sz="2400" b="1" dirty="0"/>
+              <a:t>has been </a:t>
+            </a:r>
+            <a:r>
+              <a:rPr lang="en-US" sz="2400" b="1" dirty="0">
+                <a:solidFill>
+                  <a:srgbClr val="C00000"/>
+                </a:solidFill>
+              </a:rPr>
+              <a:t>modelled in the form of </a:t>
+            </a:r>
+            <a:r>
+              <a:rPr lang="en-US" sz="2400" b="1" dirty="0">
+                <a:solidFill>
+                  <a:srgbClr val="00B050"/>
+                </a:solidFill>
+              </a:rPr>
+              <a:t>ANN</a:t>
+            </a:r>
+            <a:r>
+              <a:rPr lang="en-US" sz="2400" b="1" dirty="0"/>
+              <a:t> with </a:t>
+            </a:r>
+            <a:r>
+              <a:rPr lang="en-US" sz="2400" b="1" dirty="0">
+                <a:solidFill>
+                  <a:srgbClr val="0070C0"/>
+                </a:solidFill>
+              </a:rPr>
+              <a:t>artificial neurons </a:t>
+            </a:r>
+            <a:r>
+              <a:rPr lang="en-US" sz="2400" b="1" dirty="0">
+                <a:solidFill>
+                  <a:srgbClr val="C00000"/>
+                </a:solidFill>
+              </a:rPr>
+              <a:t>simulating the function of biological neurons.</a:t>
+            </a:r>
+          </a:p>
+          <a:p>
+            <a:endParaRPr lang="en-US" b="1" dirty="0"/>
+          </a:p>
+          <a:p>
+            <a:r>
+              <a:rPr lang="en-US" sz="2400" b="1" dirty="0">
+                <a:solidFill>
+                  <a:srgbClr val="002060"/>
+                </a:solidFill>
+                <a:latin typeface="Söhne"/>
+              </a:rPr>
+              <a:t>A</a:t>
+            </a:r>
+            <a:r>
+              <a:rPr lang="en-US" sz="2400" b="1" i="0" dirty="0">
+                <a:solidFill>
+                  <a:srgbClr val="002060"/>
+                </a:solidFill>
+                <a:effectLst/>
+                <a:latin typeface="Söhne"/>
+              </a:rPr>
+              <a:t>rtificial Neural Network (ANN):</a:t>
+            </a:r>
+            <a:br>
+              <a:rPr lang="en-US" dirty="0"/>
+            </a:br>
+            <a:r>
+              <a:rPr lang="en-US" dirty="0"/>
+              <a:t>	</a:t>
+            </a:r>
+            <a:r>
+              <a:rPr lang="en-US" sz="2000" b="1" i="0" dirty="0">
+                <a:solidFill>
+                  <a:srgbClr val="0D0D0D"/>
+                </a:solidFill>
+                <a:effectLst/>
+                <a:latin typeface="Söhne"/>
+              </a:rPr>
+              <a:t>An artificial neural network (ANN</a:t>
+            </a:r>
+            <a:r>
+              <a:rPr lang="en-US" sz="2000" b="0" i="0" dirty="0">
+                <a:solidFill>
+                  <a:srgbClr val="0D0D0D"/>
+                </a:solidFill>
+                <a:effectLst/>
+                <a:latin typeface="Söhne"/>
+              </a:rPr>
+              <a:t>), often simply referred to as a </a:t>
+            </a:r>
+            <a:r>
+              <a:rPr lang="en-US" sz="2000" b="1" i="0" dirty="0">
+                <a:solidFill>
+                  <a:srgbClr val="0D0D0D"/>
+                </a:solidFill>
+                <a:effectLst/>
+                <a:latin typeface="Söhne"/>
+              </a:rPr>
+              <a:t>neural network</a:t>
+            </a:r>
+            <a:r>
+              <a:rPr lang="en-US" sz="2000" b="0" i="0" dirty="0">
+                <a:solidFill>
+                  <a:srgbClr val="0D0D0D"/>
+                </a:solidFill>
+                <a:effectLst/>
+                <a:latin typeface="Söhne"/>
+              </a:rPr>
+              <a:t>, is a </a:t>
+            </a:r>
+            <a:r>
+              <a:rPr lang="en-US" sz="2000" b="1" i="0" dirty="0">
+                <a:solidFill>
+                  <a:srgbClr val="C00000"/>
+                </a:solidFill>
+                <a:effectLst/>
+                <a:latin typeface="Söhne"/>
+              </a:rPr>
+              <a:t>computational model inspired by the structure and function of biological neural networks in the human brain. </a:t>
+            </a:r>
+            <a:r>
+              <a:rPr lang="en-US" sz="2000" b="0" i="0" dirty="0">
+                <a:solidFill>
+                  <a:srgbClr val="0D0D0D"/>
+                </a:solidFill>
+                <a:effectLst/>
+                <a:latin typeface="Söhne"/>
+              </a:rPr>
+              <a:t>It consists of </a:t>
+            </a:r>
+            <a:r>
+              <a:rPr lang="en-US" sz="2000" b="1" i="0" dirty="0">
+                <a:solidFill>
+                  <a:schemeClr val="accent2">
+                    <a:lumMod val="75000"/>
+                  </a:schemeClr>
+                </a:solidFill>
+                <a:effectLst/>
+                <a:latin typeface="Söhne"/>
+              </a:rPr>
+              <a:t>interconnected nodes</a:t>
+            </a:r>
+            <a:r>
+              <a:rPr lang="en-US" sz="2000" b="0" i="0" dirty="0">
+                <a:solidFill>
+                  <a:srgbClr val="0D0D0D"/>
+                </a:solidFill>
+                <a:effectLst/>
+                <a:latin typeface="Söhne"/>
+              </a:rPr>
+              <a:t>, called </a:t>
+            </a:r>
+            <a:r>
+              <a:rPr lang="en-US" sz="2000" b="1" i="0" dirty="0">
+                <a:solidFill>
+                  <a:schemeClr val="accent2">
+                    <a:lumMod val="75000"/>
+                  </a:schemeClr>
+                </a:solidFill>
+                <a:effectLst/>
+                <a:latin typeface="Söhne"/>
+              </a:rPr>
+              <a:t>neurons</a:t>
+            </a:r>
+            <a:r>
+              <a:rPr lang="en-US" sz="2000" b="0" i="0" dirty="0">
+                <a:solidFill>
+                  <a:srgbClr val="0D0D0D"/>
+                </a:solidFill>
+                <a:effectLst/>
+                <a:latin typeface="Söhne"/>
+              </a:rPr>
+              <a:t> or units, </a:t>
+            </a:r>
+            <a:r>
+              <a:rPr lang="en-US" sz="2000" b="1" i="0" dirty="0">
+                <a:solidFill>
+                  <a:schemeClr val="accent2">
+                    <a:lumMod val="75000"/>
+                  </a:schemeClr>
+                </a:solidFill>
+                <a:effectLst/>
+                <a:latin typeface="Söhne"/>
+              </a:rPr>
+              <a:t>organized</a:t>
+            </a:r>
+            <a:r>
+              <a:rPr lang="en-US" sz="2000" b="0" i="0" dirty="0">
+                <a:solidFill>
+                  <a:srgbClr val="0D0D0D"/>
+                </a:solidFill>
+                <a:effectLst/>
+                <a:latin typeface="Söhne"/>
+              </a:rPr>
+              <a:t> </a:t>
+            </a:r>
+            <a:r>
+              <a:rPr lang="en-US" sz="2000" b="1" i="0" dirty="0">
+                <a:solidFill>
+                  <a:schemeClr val="accent2">
+                    <a:lumMod val="75000"/>
+                  </a:schemeClr>
+                </a:solidFill>
+                <a:effectLst/>
+                <a:latin typeface="Söhne"/>
+              </a:rPr>
+              <a:t>in layers</a:t>
+            </a:r>
+            <a:r>
+              <a:rPr lang="en-US" sz="2000" b="0" i="0" dirty="0">
+                <a:solidFill>
+                  <a:srgbClr val="0D0D0D"/>
+                </a:solidFill>
+                <a:effectLst/>
+                <a:latin typeface="Söhne"/>
+              </a:rPr>
+              <a:t>. </a:t>
+            </a:r>
+            <a:r>
+              <a:rPr lang="en-US" sz="2000" b="1" i="0" dirty="0">
+                <a:solidFill>
+                  <a:srgbClr val="0D0D0D"/>
+                </a:solidFill>
+                <a:effectLst/>
+                <a:latin typeface="Söhne"/>
+              </a:rPr>
+              <a:t>ANN processes information in a manner similar to how the human brain operates</a:t>
+            </a:r>
+            <a:r>
+              <a:rPr lang="en-US" sz="2000" b="0" i="0" dirty="0">
+                <a:solidFill>
+                  <a:srgbClr val="0D0D0D"/>
+                </a:solidFill>
+                <a:effectLst/>
+                <a:latin typeface="Söhne"/>
+              </a:rPr>
+              <a:t>, enabling it to learn from data and make predictions or decisions.</a:t>
+            </a:r>
+            <a:endParaRPr lang="en-US" sz="2000" b="1" dirty="0"/>
+          </a:p>
+          <a:p>
+            <a:r>
+              <a:rPr lang="en-US" sz="2000" b="1" dirty="0">
+                <a:solidFill>
+                  <a:schemeClr val="accent2">
+                    <a:lumMod val="75000"/>
+                  </a:schemeClr>
+                </a:solidFill>
+                <a:latin typeface="Söhne"/>
+              </a:rPr>
+              <a:t>K</a:t>
+            </a:r>
+            <a:r>
+              <a:rPr lang="en-US" sz="2000" b="1" i="0" dirty="0">
+                <a:solidFill>
+                  <a:schemeClr val="accent2">
+                    <a:lumMod val="75000"/>
+                  </a:schemeClr>
+                </a:solidFill>
+                <a:effectLst/>
+                <a:latin typeface="Söhne"/>
+              </a:rPr>
+              <a:t>ey components and concepts of an ANN:</a:t>
+            </a:r>
+          </a:p>
+          <a:p>
+            <a:pPr marL="342900" indent="-342900">
+              <a:buAutoNum type="arabicPeriod"/>
+            </a:pPr>
+            <a:r>
+              <a:rPr lang="en-US" sz="2000" b="1" i="0" dirty="0">
+                <a:solidFill>
+                  <a:srgbClr val="0D0D0D"/>
+                </a:solidFill>
+                <a:effectLst/>
+                <a:latin typeface="Söhne"/>
+              </a:rPr>
+              <a:t>Neurons (Nodes)</a:t>
+            </a:r>
+            <a:endParaRPr lang="en-US" sz="2000" dirty="0">
+              <a:solidFill>
+                <a:srgbClr val="0D0D0D"/>
+              </a:solidFill>
+              <a:latin typeface="Söhne"/>
+            </a:endParaRPr>
+          </a:p>
+          <a:p>
+            <a:pPr marL="342900" indent="-342900">
+              <a:buAutoNum type="arabicPeriod"/>
+            </a:pPr>
+            <a:r>
+              <a:rPr lang="en-US" sz="2000" b="1" i="0" dirty="0">
+                <a:solidFill>
+                  <a:srgbClr val="0D0D0D"/>
+                </a:solidFill>
+                <a:effectLst/>
+                <a:latin typeface="Söhne"/>
+              </a:rPr>
+              <a:t>Connections (Edges)</a:t>
+            </a:r>
+          </a:p>
+          <a:p>
+            <a:pPr marL="342900" indent="-342900">
+              <a:buAutoNum type="arabicPeriod"/>
+            </a:pPr>
+            <a:r>
+              <a:rPr lang="en-US" sz="2000" b="1" i="0" dirty="0">
+                <a:solidFill>
+                  <a:srgbClr val="0D0D0D"/>
+                </a:solidFill>
+                <a:effectLst/>
+                <a:latin typeface="Söhne"/>
+              </a:rPr>
+              <a:t>Layers</a:t>
+            </a:r>
+            <a:endParaRPr lang="en-US" sz="2000" b="1" dirty="0"/>
+          </a:p>
+          <a:p>
+            <a:endParaRPr lang="en-US" b="1" dirty="0"/>
+          </a:p>
+        </p:txBody>
+      </p:sp>
+    </p:spTree>
+    <p:extLst>
+      <p:ext uri="{BB962C8B-B14F-4D97-AF65-F5344CB8AC3E}">
+        <p14:creationId xmlns:p14="http://schemas.microsoft.com/office/powerpoint/2010/main" val="4165281687"/>
+      </p:ext>
+    </p:extLst>
+  </p:cSld>
+  <p:clrMapOvr>
+    <a:masterClrMapping/>
+  </p:clrMapOvr>
+</p:sld>
+</file>
+
+<file path=ppt/slides/slide62.xml><?xml version="1.0" encoding="utf-8"?>
+<p:sld xmlns:a="http://schemas.openxmlformats.org/drawingml/2006/main" xmlns:r="http://schemas.openxmlformats.org/officeDocument/2006/relationships" xmlns:p="http://schemas.openxmlformats.org/presentationml/2006/main">
+  <p:cSld>
+    <p:spTree>
+      <p:nvGrpSpPr>
         <p:cNvPr id="1" name=""/>
         <p:cNvGrpSpPr/>
         <p:nvPr/>
@@ -27097,7 +27712,7 @@
 </p:sld>
 </file>
 
-<file path=ppt/slides/slide61.xml><?xml version="1.0" encoding="utf-8"?>
+<file path=ppt/slides/slide63.xml><?xml version="1.0" encoding="utf-8"?>
 <p:sld xmlns:a="http://schemas.openxmlformats.org/drawingml/2006/main" xmlns:r="http://schemas.openxmlformats.org/officeDocument/2006/relationships" xmlns:p="http://schemas.openxmlformats.org/presentationml/2006/main">
   <p:cSld>
     <p:spTree>
@@ -27314,7 +27929,7 @@
 </p:sld>
 </file>
 
-<file path=ppt/slides/slide62.xml><?xml version="1.0" encoding="utf-8"?>
+<file path=ppt/slides/slide64.xml><?xml version="1.0" encoding="utf-8"?>
 <p:sld xmlns:a="http://schemas.openxmlformats.org/drawingml/2006/main" xmlns:r="http://schemas.openxmlformats.org/officeDocument/2006/relationships" xmlns:p="http://schemas.openxmlformats.org/presentationml/2006/main">
   <p:cSld>
     <p:spTree>
@@ -27892,7 +28507,7 @@
 </p:sld>
 </file>
 
-<file path=ppt/slides/slide63.xml><?xml version="1.0" encoding="utf-8"?>
+<file path=ppt/slides/slide65.xml><?xml version="1.0" encoding="utf-8"?>
 <p:sld xmlns:a="http://schemas.openxmlformats.org/drawingml/2006/main" xmlns:r="http://schemas.openxmlformats.org/officeDocument/2006/relationships" xmlns:p="http://schemas.openxmlformats.org/presentationml/2006/main">
   <p:cSld>
     <p:spTree>
@@ -28097,7 +28712,7 @@
 </p:sld>
 </file>
 
-<file path=ppt/slides/slide64.xml><?xml version="1.0" encoding="utf-8"?>
+<file path=ppt/slides/slide66.xml><?xml version="1.0" encoding="utf-8"?>
 <p:sld xmlns:a="http://schemas.openxmlformats.org/drawingml/2006/main" xmlns:r="http://schemas.openxmlformats.org/officeDocument/2006/relationships" xmlns:p="http://schemas.openxmlformats.org/presentationml/2006/main">
   <p:cSld>
     <p:spTree>
@@ -28270,7 +28885,7 @@
 </p:sld>
 </file>
 
-<file path=ppt/slides/slide65.xml><?xml version="1.0" encoding="utf-8"?>
+<file path=ppt/slides/slide67.xml><?xml version="1.0" encoding="utf-8"?>
 <p:sld xmlns:a="http://schemas.openxmlformats.org/drawingml/2006/main" xmlns:r="http://schemas.openxmlformats.org/officeDocument/2006/relationships" xmlns:p="http://schemas.openxmlformats.org/presentationml/2006/main">
   <p:cSld>
     <p:spTree>
@@ -28427,7 +29042,7 @@
 </p:sld>
 </file>
 
-<file path=ppt/slides/slide66.xml><?xml version="1.0" encoding="utf-8"?>
+<file path=ppt/slides/slide68.xml><?xml version="1.0" encoding="utf-8"?>
 <p:sld xmlns:a="http://schemas.openxmlformats.org/drawingml/2006/main" xmlns:r="http://schemas.openxmlformats.org/officeDocument/2006/relationships" xmlns:p="http://schemas.openxmlformats.org/presentationml/2006/main">
   <p:cSld>
     <p:spTree>
@@ -28619,7 +29234,7 @@
 </p:sld>
 </file>
 
-<file path=ppt/slides/slide67.xml><?xml version="1.0" encoding="utf-8"?>
+<file path=ppt/slides/slide69.xml><?xml version="1.0" encoding="utf-8"?>
 <p:sld xmlns:a="http://schemas.openxmlformats.org/drawingml/2006/main" xmlns:r="http://schemas.openxmlformats.org/officeDocument/2006/relationships" xmlns:p="http://schemas.openxmlformats.org/presentationml/2006/main">
   <p:cSld>
     <p:spTree>
@@ -29130,753 +29745,6 @@
     <p:extLst>
       <p:ext uri="{BB962C8B-B14F-4D97-AF65-F5344CB8AC3E}">
         <p14:creationId xmlns:p14="http://schemas.microsoft.com/office/powerpoint/2010/main" val="3327637455"/>
-      </p:ext>
-    </p:extLst>
-  </p:cSld>
-  <p:clrMapOvr>
-    <a:masterClrMapping/>
-  </p:clrMapOvr>
-</p:sld>
-</file>
-
-<file path=ppt/slides/slide68.xml><?xml version="1.0" encoding="utf-8"?>
-<p:sld xmlns:a="http://schemas.openxmlformats.org/drawingml/2006/main" xmlns:r="http://schemas.openxmlformats.org/officeDocument/2006/relationships" xmlns:p="http://schemas.openxmlformats.org/presentationml/2006/main">
-  <p:cSld>
-    <p:spTree>
-      <p:nvGrpSpPr>
-        <p:cNvPr id="1" name=""/>
-        <p:cNvGrpSpPr/>
-        <p:nvPr/>
-      </p:nvGrpSpPr>
-      <p:grpSpPr>
-        <a:xfrm>
-          <a:off x="0" y="0"/>
-          <a:ext cx="0" cy="0"/>
-          <a:chOff x="0" y="0"/>
-          <a:chExt cx="0" cy="0"/>
-        </a:xfrm>
-      </p:grpSpPr>
-      <p:pic>
-        <p:nvPicPr>
-          <p:cNvPr id="6" name="Picture 5">
-            <a:extLst>
-              <a:ext uri="{FF2B5EF4-FFF2-40B4-BE49-F238E27FC236}">
-                <a16:creationId xmlns:a16="http://schemas.microsoft.com/office/drawing/2014/main" id="{0B408453-E184-BE0D-CF2B-A15EB5337F2F}"/>
-              </a:ext>
-            </a:extLst>
-          </p:cNvPr>
-          <p:cNvPicPr>
-            <a:picLocks noChangeAspect="1"/>
-          </p:cNvPicPr>
-          <p:nvPr/>
-        </p:nvPicPr>
-        <p:blipFill>
-          <a:blip r:embed="rId2">
-            <a:extLst>
-              <a:ext uri="{28A0092B-C50C-407E-A947-70E740481C1C}">
-                <a14:useLocalDpi xmlns:a14="http://schemas.microsoft.com/office/drawing/2010/main" val="0"/>
-              </a:ext>
-            </a:extLst>
-          </a:blip>
-          <a:stretch>
-            <a:fillRect/>
-          </a:stretch>
-        </p:blipFill>
-        <p:spPr>
-          <a:xfrm>
-            <a:off x="502438" y="994199"/>
-            <a:ext cx="11126164" cy="4869602"/>
-          </a:xfrm>
-          <a:prstGeom prst="rect">
-            <a:avLst/>
-          </a:prstGeom>
-        </p:spPr>
-      </p:pic>
-      <p:sp>
-        <p:nvSpPr>
-          <p:cNvPr id="3" name="TextBox 2">
-            <a:extLst>
-              <a:ext uri="{FF2B5EF4-FFF2-40B4-BE49-F238E27FC236}">
-                <a16:creationId xmlns:a16="http://schemas.microsoft.com/office/drawing/2014/main" id="{31B25432-B42E-E7BC-B703-F92055994958}"/>
-              </a:ext>
-            </a:extLst>
-          </p:cNvPr>
-          <p:cNvSpPr txBox="1"/>
-          <p:nvPr/>
-        </p:nvSpPr>
-        <p:spPr>
-          <a:xfrm>
-            <a:off x="7239000" y="544677"/>
-            <a:ext cx="4128345" cy="523220"/>
-          </a:xfrm>
-          <a:prstGeom prst="rect">
-            <a:avLst/>
-          </a:prstGeom>
-          <a:noFill/>
-        </p:spPr>
-        <p:txBody>
-          <a:bodyPr wrap="square">
-            <a:spAutoFit/>
-          </a:bodyPr>
-          <a:lstStyle/>
-          <a:p>
-            <a:r>
-              <a:rPr lang="en-US" sz="2800" b="1" dirty="0">
-                <a:solidFill>
-                  <a:srgbClr val="002060"/>
-                </a:solidFill>
-              </a:rPr>
-              <a:t>Artificial Neural Networks</a:t>
-            </a:r>
-          </a:p>
-        </p:txBody>
-      </p:sp>
-      <p:sp>
-        <p:nvSpPr>
-          <p:cNvPr id="5" name="TextBox 4">
-            <a:extLst>
-              <a:ext uri="{FF2B5EF4-FFF2-40B4-BE49-F238E27FC236}">
-                <a16:creationId xmlns:a16="http://schemas.microsoft.com/office/drawing/2014/main" id="{E18DD145-8005-4D1F-3D54-9EC56DBC4A06}"/>
-              </a:ext>
-            </a:extLst>
-          </p:cNvPr>
-          <p:cNvSpPr txBox="1"/>
-          <p:nvPr/>
-        </p:nvSpPr>
-        <p:spPr>
-          <a:xfrm>
-            <a:off x="1831523" y="544677"/>
-            <a:ext cx="2860221" cy="523220"/>
-          </a:xfrm>
-          <a:prstGeom prst="rect">
-            <a:avLst/>
-          </a:prstGeom>
-          <a:noFill/>
-        </p:spPr>
-        <p:txBody>
-          <a:bodyPr wrap="square">
-            <a:spAutoFit/>
-          </a:bodyPr>
-          <a:lstStyle/>
-          <a:p>
-            <a:r>
-              <a:rPr lang="en-US" sz="2800" b="1" kern="1200" dirty="0">
-                <a:solidFill>
-                  <a:srgbClr val="002060"/>
-                </a:solidFill>
-                <a:effectLst/>
-                <a:latin typeface="Calibri" panose="020F0502020204030204" pitchFamily="34" charset="0"/>
-                <a:ea typeface="+mn-ea"/>
-                <a:cs typeface="+mn-cs"/>
-              </a:rPr>
-              <a:t>Biological</a:t>
-            </a:r>
-            <a:r>
-              <a:rPr lang="en-US" sz="2800" kern="1200" dirty="0">
-                <a:solidFill>
-                  <a:srgbClr val="002060"/>
-                </a:solidFill>
-                <a:effectLst/>
-                <a:latin typeface="Calibri" panose="020F0502020204030204" pitchFamily="34" charset="0"/>
-                <a:ea typeface="+mn-ea"/>
-                <a:cs typeface="+mn-cs"/>
-              </a:rPr>
-              <a:t> </a:t>
-            </a:r>
-            <a:r>
-              <a:rPr lang="en-US" sz="2800" b="1" kern="1200" dirty="0">
-                <a:solidFill>
-                  <a:srgbClr val="002060"/>
-                </a:solidFill>
-                <a:effectLst/>
-                <a:latin typeface="Calibri" panose="020F0502020204030204" pitchFamily="34" charset="0"/>
-                <a:ea typeface="+mn-ea"/>
-                <a:cs typeface="+mn-cs"/>
-              </a:rPr>
-              <a:t>Neuron</a:t>
-            </a:r>
-            <a:r>
-              <a:rPr lang="en-US" sz="2800" kern="1200" dirty="0">
-                <a:solidFill>
-                  <a:srgbClr val="002060"/>
-                </a:solidFill>
-                <a:effectLst/>
-                <a:latin typeface="Calibri" panose="020F0502020204030204" pitchFamily="34" charset="0"/>
-                <a:ea typeface="+mn-ea"/>
-                <a:cs typeface="+mn-cs"/>
-              </a:rPr>
-              <a:t> </a:t>
-            </a:r>
-            <a:endParaRPr lang="en-IN" sz="2800" dirty="0">
-              <a:solidFill>
-                <a:srgbClr val="002060"/>
-              </a:solidFill>
-            </a:endParaRPr>
-          </a:p>
-        </p:txBody>
-      </p:sp>
-    </p:spTree>
-    <p:extLst>
-      <p:ext uri="{BB962C8B-B14F-4D97-AF65-F5344CB8AC3E}">
-        <p14:creationId xmlns:p14="http://schemas.microsoft.com/office/powerpoint/2010/main" val="4115018683"/>
-      </p:ext>
-    </p:extLst>
-  </p:cSld>
-  <p:clrMapOvr>
-    <a:masterClrMapping/>
-  </p:clrMapOvr>
-</p:sld>
-</file>
-
-<file path=ppt/slides/slide69.xml><?xml version="1.0" encoding="utf-8"?>
-<p:sld xmlns:a="http://schemas.openxmlformats.org/drawingml/2006/main" xmlns:r="http://schemas.openxmlformats.org/officeDocument/2006/relationships" xmlns:p="http://schemas.openxmlformats.org/presentationml/2006/main">
-  <p:cSld>
-    <p:spTree>
-      <p:nvGrpSpPr>
-        <p:cNvPr id="1" name=""/>
-        <p:cNvGrpSpPr/>
-        <p:nvPr/>
-      </p:nvGrpSpPr>
-      <p:grpSpPr>
-        <a:xfrm>
-          <a:off x="0" y="0"/>
-          <a:ext cx="0" cy="0"/>
-          <a:chOff x="0" y="0"/>
-          <a:chExt cx="0" cy="0"/>
-        </a:xfrm>
-      </p:grpSpPr>
-      <p:sp>
-        <p:nvSpPr>
-          <p:cNvPr id="3" name="Content Placeholder 2">
-            <a:extLst>
-              <a:ext uri="{FF2B5EF4-FFF2-40B4-BE49-F238E27FC236}">
-                <a16:creationId xmlns:a16="http://schemas.microsoft.com/office/drawing/2014/main" id="{9A15462E-46E9-D2B4-2ED7-2FC504CE798F}"/>
-              </a:ext>
-            </a:extLst>
-          </p:cNvPr>
-          <p:cNvSpPr>
-            <a:spLocks noGrp="1"/>
-          </p:cNvSpPr>
-          <p:nvPr>
-            <p:ph idx="1"/>
-          </p:nvPr>
-        </p:nvSpPr>
-        <p:spPr>
-          <a:xfrm>
-            <a:off x="777240" y="849086"/>
-            <a:ext cx="10659110" cy="5327877"/>
-          </a:xfrm>
-        </p:spPr>
-        <p:txBody>
-          <a:bodyPr>
-            <a:normAutofit/>
-          </a:bodyPr>
-          <a:lstStyle/>
-          <a:p>
-            <a:pPr marL="0" indent="0">
-              <a:buNone/>
-            </a:pPr>
-            <a:r>
-              <a:rPr lang="en-US" sz="2800" b="1" dirty="0"/>
-              <a:t>Building and Training Neural Networks using </a:t>
-            </a:r>
-            <a:r>
-              <a:rPr lang="en-US" sz="2800" b="1" dirty="0">
-                <a:solidFill>
-                  <a:srgbClr val="C00000"/>
-                </a:solidFill>
-              </a:rPr>
-              <a:t>TensorFlow</a:t>
-            </a:r>
-            <a:r>
-              <a:rPr lang="en-US" sz="2800" b="1" dirty="0"/>
-              <a:t> and </a:t>
-            </a:r>
-            <a:r>
-              <a:rPr lang="en-US" sz="2800" b="1" dirty="0" err="1">
-                <a:solidFill>
-                  <a:srgbClr val="C00000"/>
-                </a:solidFill>
-              </a:rPr>
-              <a:t>Keras</a:t>
-            </a:r>
-            <a:endParaRPr lang="en-US" sz="2800" b="1" dirty="0">
-              <a:solidFill>
-                <a:srgbClr val="C00000"/>
-              </a:solidFill>
-            </a:endParaRPr>
-          </a:p>
-          <a:p>
-            <a:pPr marL="0" indent="0">
-              <a:buNone/>
-            </a:pPr>
-            <a:r>
-              <a:rPr lang="en-US" sz="2400" b="1" dirty="0"/>
-              <a:t>What are TensorFlow and </a:t>
-            </a:r>
-            <a:r>
-              <a:rPr lang="en-US" sz="2400" b="1" dirty="0" err="1"/>
-              <a:t>Keras</a:t>
-            </a:r>
-            <a:r>
-              <a:rPr lang="en-US" sz="2400" b="1" dirty="0"/>
-              <a:t>?</a:t>
-            </a:r>
-          </a:p>
-          <a:p>
-            <a:pPr marL="0" indent="0">
-              <a:buNone/>
-            </a:pPr>
-            <a:endParaRPr lang="en-IN" sz="2400" b="1" dirty="0">
-              <a:solidFill>
-                <a:srgbClr val="C00000"/>
-              </a:solidFill>
-            </a:endParaRPr>
-          </a:p>
-          <a:p>
-            <a:pPr marL="0" indent="0">
-              <a:buNone/>
-            </a:pPr>
-            <a:endParaRPr lang="en-IN" sz="2400" b="1" dirty="0">
-              <a:solidFill>
-                <a:srgbClr val="C00000"/>
-              </a:solidFill>
-            </a:endParaRPr>
-          </a:p>
-          <a:p>
-            <a:pPr marL="0" indent="0">
-              <a:buNone/>
-            </a:pPr>
-            <a:endParaRPr lang="en-IN" sz="2400" b="1" dirty="0">
-              <a:solidFill>
-                <a:srgbClr val="C00000"/>
-              </a:solidFill>
-            </a:endParaRPr>
-          </a:p>
-          <a:p>
-            <a:pPr marL="0" indent="0">
-              <a:buNone/>
-            </a:pPr>
-            <a:endParaRPr lang="en-IN" sz="2400" b="1" dirty="0">
-              <a:solidFill>
-                <a:srgbClr val="C00000"/>
-              </a:solidFill>
-            </a:endParaRPr>
-          </a:p>
-          <a:p>
-            <a:pPr marL="0" indent="0">
-              <a:buNone/>
-            </a:pPr>
-            <a:endParaRPr lang="en-IN" sz="2400" b="1" dirty="0">
-              <a:solidFill>
-                <a:srgbClr val="C00000"/>
-              </a:solidFill>
-            </a:endParaRPr>
-          </a:p>
-          <a:p>
-            <a:pPr marL="0" indent="0">
-              <a:buNone/>
-            </a:pPr>
-            <a:endParaRPr lang="en-IN" sz="2400" b="1" dirty="0">
-              <a:solidFill>
-                <a:srgbClr val="C00000"/>
-              </a:solidFill>
-            </a:endParaRPr>
-          </a:p>
-          <a:p>
-            <a:pPr marL="0" indent="0">
-              <a:buNone/>
-            </a:pPr>
-            <a:endParaRPr lang="en-US" sz="2400" dirty="0"/>
-          </a:p>
-          <a:p>
-            <a:pPr marL="0" indent="0">
-              <a:buNone/>
-            </a:pPr>
-            <a:r>
-              <a:rPr lang="en-US" sz="2400" dirty="0"/>
-              <a:t>Think of </a:t>
-            </a:r>
-            <a:r>
-              <a:rPr lang="en-US" sz="2400" b="1" dirty="0"/>
-              <a:t>TensorFlow as the engine</a:t>
-            </a:r>
-            <a:r>
-              <a:rPr lang="en-US" sz="2400" dirty="0"/>
-              <a:t>, and </a:t>
-            </a:r>
-            <a:r>
-              <a:rPr lang="en-US" sz="2400" b="1" dirty="0" err="1"/>
-              <a:t>Keras</a:t>
-            </a:r>
-            <a:r>
-              <a:rPr lang="en-US" sz="2400" b="1" dirty="0"/>
-              <a:t> as the user-friendly steering wheel</a:t>
-            </a:r>
-            <a:r>
-              <a:rPr lang="en-US" sz="2400" dirty="0"/>
-              <a:t>.</a:t>
-            </a:r>
-            <a:endParaRPr lang="en-IN" sz="2400" b="1" dirty="0">
-              <a:solidFill>
-                <a:srgbClr val="C00000"/>
-              </a:solidFill>
-            </a:endParaRPr>
-          </a:p>
-        </p:txBody>
-      </p:sp>
-      <p:graphicFrame>
-        <p:nvGraphicFramePr>
-          <p:cNvPr id="4" name="Table 3">
-            <a:extLst>
-              <a:ext uri="{FF2B5EF4-FFF2-40B4-BE49-F238E27FC236}">
-                <a16:creationId xmlns:a16="http://schemas.microsoft.com/office/drawing/2014/main" id="{5DEB3E9B-424A-10DC-EB5B-8602F28CD8A8}"/>
-              </a:ext>
-            </a:extLst>
-          </p:cNvPr>
-          <p:cNvGraphicFramePr>
-            <a:graphicFrameLocks noGrp="1"/>
-          </p:cNvGraphicFramePr>
-          <p:nvPr>
-            <p:extLst>
-              <p:ext uri="{D42A27DB-BD31-4B8C-83A1-F6EECF244321}">
-                <p14:modId xmlns:p14="http://schemas.microsoft.com/office/powerpoint/2010/main" val="596336048"/>
-              </p:ext>
-            </p:extLst>
-          </p:nvPr>
-        </p:nvGraphicFramePr>
-        <p:xfrm>
-          <a:off x="1001690" y="2217506"/>
-          <a:ext cx="10210210" cy="2147665"/>
-        </p:xfrm>
-        <a:graphic>
-          <a:graphicData uri="http://schemas.openxmlformats.org/drawingml/2006/table">
-            <a:tbl>
-              <a:tblPr firstRow="1" firstCol="1" bandRow="1">
-                <a:tableStyleId>{5C22544A-7EE6-4342-B048-85BDC9FD1C3A}</a:tableStyleId>
-              </a:tblPr>
-              <a:tblGrid>
-                <a:gridCol w="2035038">
-                  <a:extLst>
-                    <a:ext uri="{9D8B030D-6E8A-4147-A177-3AD203B41FA5}">
-                      <a16:colId xmlns:a16="http://schemas.microsoft.com/office/drawing/2014/main" val="6534079"/>
-                    </a:ext>
-                  </a:extLst>
-                </a:gridCol>
-                <a:gridCol w="4572017">
-                  <a:extLst>
-                    <a:ext uri="{9D8B030D-6E8A-4147-A177-3AD203B41FA5}">
-                      <a16:colId xmlns:a16="http://schemas.microsoft.com/office/drawing/2014/main" val="344316579"/>
-                    </a:ext>
-                  </a:extLst>
-                </a:gridCol>
-                <a:gridCol w="3603155">
-                  <a:extLst>
-                    <a:ext uri="{9D8B030D-6E8A-4147-A177-3AD203B41FA5}">
-                      <a16:colId xmlns:a16="http://schemas.microsoft.com/office/drawing/2014/main" val="1323157218"/>
-                    </a:ext>
-                  </a:extLst>
-                </a:gridCol>
-              </a:tblGrid>
-              <a:tr h="420379">
-                <a:tc>
-                  <a:txBody>
-                    <a:bodyPr/>
-                    <a:lstStyle/>
-                    <a:p>
-                      <a:pPr>
-                        <a:lnSpc>
-                          <a:spcPct val="115000"/>
-                        </a:lnSpc>
-                        <a:spcAft>
-                          <a:spcPts val="800"/>
-                        </a:spcAft>
-                        <a:buNone/>
-                      </a:pPr>
-                      <a:r>
-                        <a:rPr lang="en-IN" sz="2400" kern="100">
-                          <a:effectLst/>
-                        </a:rPr>
-                        <a:t>Tool</a:t>
-                      </a:r>
-                      <a:endParaRPr lang="en-IN" sz="2400" kern="100">
-                        <a:effectLst/>
-                        <a:latin typeface="Aptos" panose="020B0004020202020204" pitchFamily="34" charset="0"/>
-                        <a:ea typeface="Aptos" panose="020B0004020202020204" pitchFamily="34" charset="0"/>
-                        <a:cs typeface="Times New Roman" panose="02020603050405020304" pitchFamily="18" charset="0"/>
-                      </a:endParaRPr>
-                    </a:p>
-                  </a:txBody>
-                  <a:tcPr marL="68580" marR="68580" marT="0" marB="0"/>
-                </a:tc>
-                <a:tc>
-                  <a:txBody>
-                    <a:bodyPr/>
-                    <a:lstStyle/>
-                    <a:p>
-                      <a:pPr>
-                        <a:lnSpc>
-                          <a:spcPct val="115000"/>
-                        </a:lnSpc>
-                        <a:spcAft>
-                          <a:spcPts val="800"/>
-                        </a:spcAft>
-                        <a:buNone/>
-                      </a:pPr>
-                      <a:r>
-                        <a:rPr lang="en-IN" sz="2400" kern="100">
-                          <a:effectLst/>
-                        </a:rPr>
-                        <a:t>What it is</a:t>
-                      </a:r>
-                      <a:endParaRPr lang="en-IN" sz="2400" kern="100">
-                        <a:effectLst/>
-                        <a:latin typeface="Aptos" panose="020B0004020202020204" pitchFamily="34" charset="0"/>
-                        <a:ea typeface="Aptos" panose="020B0004020202020204" pitchFamily="34" charset="0"/>
-                        <a:cs typeface="Times New Roman" panose="02020603050405020304" pitchFamily="18" charset="0"/>
-                      </a:endParaRPr>
-                    </a:p>
-                  </a:txBody>
-                  <a:tcPr marL="68580" marR="68580" marT="0" marB="0"/>
-                </a:tc>
-                <a:tc>
-                  <a:txBody>
-                    <a:bodyPr/>
-                    <a:lstStyle/>
-                    <a:p>
-                      <a:pPr>
-                        <a:lnSpc>
-                          <a:spcPct val="115000"/>
-                        </a:lnSpc>
-                        <a:spcAft>
-                          <a:spcPts val="800"/>
-                        </a:spcAft>
-                        <a:buNone/>
-                      </a:pPr>
-                      <a:r>
-                        <a:rPr lang="en-IN" sz="2400" kern="100">
-                          <a:effectLst/>
-                        </a:rPr>
-                        <a:t>Purpose</a:t>
-                      </a:r>
-                      <a:endParaRPr lang="en-IN" sz="2400" kern="100">
-                        <a:effectLst/>
-                        <a:latin typeface="Aptos" panose="020B0004020202020204" pitchFamily="34" charset="0"/>
-                        <a:ea typeface="Aptos" panose="020B0004020202020204" pitchFamily="34" charset="0"/>
-                        <a:cs typeface="Times New Roman" panose="02020603050405020304" pitchFamily="18" charset="0"/>
-                      </a:endParaRPr>
-                    </a:p>
-                  </a:txBody>
-                  <a:tcPr marL="68580" marR="68580" marT="0" marB="0"/>
-                </a:tc>
-                <a:extLst>
-                  <a:ext uri="{0D108BD9-81ED-4DB2-BD59-A6C34878D82A}">
-                    <a16:rowId xmlns:a16="http://schemas.microsoft.com/office/drawing/2014/main" val="291637699"/>
-                  </a:ext>
-                </a:extLst>
-              </a:tr>
-              <a:tr h="863643">
-                <a:tc>
-                  <a:txBody>
-                    <a:bodyPr/>
-                    <a:lstStyle/>
-                    <a:p>
-                      <a:pPr>
-                        <a:lnSpc>
-                          <a:spcPct val="115000"/>
-                        </a:lnSpc>
-                        <a:spcAft>
-                          <a:spcPts val="800"/>
-                        </a:spcAft>
-                        <a:buNone/>
-                      </a:pPr>
-                      <a:r>
-                        <a:rPr lang="en-IN" sz="2400" kern="100" dirty="0">
-                          <a:effectLst/>
-                        </a:rPr>
-                        <a:t>TensorFlow</a:t>
-                      </a:r>
-                      <a:endParaRPr lang="en-IN" sz="2400" kern="100" dirty="0">
-                        <a:effectLst/>
-                        <a:latin typeface="Aptos" panose="020B0004020202020204" pitchFamily="34" charset="0"/>
-                        <a:ea typeface="Aptos" panose="020B0004020202020204" pitchFamily="34" charset="0"/>
-                        <a:cs typeface="Times New Roman" panose="02020603050405020304" pitchFamily="18" charset="0"/>
-                      </a:endParaRPr>
-                    </a:p>
-                  </a:txBody>
-                  <a:tcPr marL="68580" marR="68580" marT="0" marB="0"/>
-                </a:tc>
-                <a:tc>
-                  <a:txBody>
-                    <a:bodyPr/>
-                    <a:lstStyle/>
-                    <a:p>
-                      <a:pPr>
-                        <a:lnSpc>
-                          <a:spcPct val="115000"/>
-                        </a:lnSpc>
-                        <a:spcAft>
-                          <a:spcPts val="800"/>
-                        </a:spcAft>
-                        <a:buNone/>
-                      </a:pPr>
-                      <a:r>
-                        <a:rPr lang="en-IN" sz="2400" kern="100" dirty="0">
-                          <a:effectLst/>
-                        </a:rPr>
-                        <a:t>An open-source ML library by Google</a:t>
-                      </a:r>
-                      <a:endParaRPr lang="en-IN" sz="2400" kern="100" dirty="0">
-                        <a:effectLst/>
-                        <a:latin typeface="Aptos" panose="020B0004020202020204" pitchFamily="34" charset="0"/>
-                        <a:ea typeface="Aptos" panose="020B0004020202020204" pitchFamily="34" charset="0"/>
-                        <a:cs typeface="Times New Roman" panose="02020603050405020304" pitchFamily="18" charset="0"/>
-                      </a:endParaRPr>
-                    </a:p>
-                  </a:txBody>
-                  <a:tcPr marL="68580" marR="68580" marT="0" marB="0"/>
-                </a:tc>
-                <a:tc>
-                  <a:txBody>
-                    <a:bodyPr/>
-                    <a:lstStyle/>
-                    <a:p>
-                      <a:pPr>
-                        <a:lnSpc>
-                          <a:spcPct val="115000"/>
-                        </a:lnSpc>
-                        <a:spcAft>
-                          <a:spcPts val="800"/>
-                        </a:spcAft>
-                        <a:buNone/>
-                      </a:pPr>
-                      <a:r>
-                        <a:rPr lang="en-IN" sz="2400" kern="100">
-                          <a:effectLst/>
-                        </a:rPr>
-                        <a:t>To build and train ML models</a:t>
-                      </a:r>
-                      <a:endParaRPr lang="en-IN" sz="2400" kern="100">
-                        <a:effectLst/>
-                        <a:latin typeface="Aptos" panose="020B0004020202020204" pitchFamily="34" charset="0"/>
-                        <a:ea typeface="Aptos" panose="020B0004020202020204" pitchFamily="34" charset="0"/>
-                        <a:cs typeface="Times New Roman" panose="02020603050405020304" pitchFamily="18" charset="0"/>
-                      </a:endParaRPr>
-                    </a:p>
-                  </a:txBody>
-                  <a:tcPr marL="68580" marR="68580" marT="0" marB="0"/>
-                </a:tc>
-                <a:extLst>
-                  <a:ext uri="{0D108BD9-81ED-4DB2-BD59-A6C34878D82A}">
-                    <a16:rowId xmlns:a16="http://schemas.microsoft.com/office/drawing/2014/main" val="557529135"/>
-                  </a:ext>
-                </a:extLst>
-              </a:tr>
-              <a:tr h="863643">
-                <a:tc>
-                  <a:txBody>
-                    <a:bodyPr/>
-                    <a:lstStyle/>
-                    <a:p>
-                      <a:pPr>
-                        <a:lnSpc>
-                          <a:spcPct val="115000"/>
-                        </a:lnSpc>
-                        <a:spcAft>
-                          <a:spcPts val="800"/>
-                        </a:spcAft>
-                        <a:buNone/>
-                      </a:pPr>
-                      <a:r>
-                        <a:rPr lang="en-IN" sz="2400" kern="100" dirty="0" err="1">
-                          <a:effectLst/>
-                        </a:rPr>
-                        <a:t>Keras</a:t>
-                      </a:r>
-                      <a:endParaRPr lang="en-IN" sz="2400" kern="100" dirty="0">
-                        <a:effectLst/>
-                        <a:latin typeface="Aptos" panose="020B0004020202020204" pitchFamily="34" charset="0"/>
-                        <a:ea typeface="Aptos" panose="020B0004020202020204" pitchFamily="34" charset="0"/>
-                        <a:cs typeface="Times New Roman" panose="02020603050405020304" pitchFamily="18" charset="0"/>
-                      </a:endParaRPr>
-                    </a:p>
-                  </a:txBody>
-                  <a:tcPr marL="68580" marR="68580" marT="0" marB="0"/>
-                </a:tc>
-                <a:tc>
-                  <a:txBody>
-                    <a:bodyPr/>
-                    <a:lstStyle/>
-                    <a:p>
-                      <a:pPr>
-                        <a:lnSpc>
-                          <a:spcPct val="115000"/>
-                        </a:lnSpc>
-                        <a:spcAft>
-                          <a:spcPts val="800"/>
-                        </a:spcAft>
-                        <a:buNone/>
-                      </a:pPr>
-                      <a:r>
-                        <a:rPr lang="en-IN" sz="2400" kern="100">
-                          <a:effectLst/>
-                        </a:rPr>
-                        <a:t>A high-level API running on top of TensorFlow</a:t>
-                      </a:r>
-                      <a:endParaRPr lang="en-IN" sz="2400" kern="100">
-                        <a:effectLst/>
-                        <a:latin typeface="Aptos" panose="020B0004020202020204" pitchFamily="34" charset="0"/>
-                        <a:ea typeface="Aptos" panose="020B0004020202020204" pitchFamily="34" charset="0"/>
-                        <a:cs typeface="Times New Roman" panose="02020603050405020304" pitchFamily="18" charset="0"/>
-                      </a:endParaRPr>
-                    </a:p>
-                  </a:txBody>
-                  <a:tcPr marL="68580" marR="68580" marT="0" marB="0"/>
-                </a:tc>
-                <a:tc>
-                  <a:txBody>
-                    <a:bodyPr/>
-                    <a:lstStyle/>
-                    <a:p>
-                      <a:pPr>
-                        <a:lnSpc>
-                          <a:spcPct val="115000"/>
-                        </a:lnSpc>
-                        <a:spcAft>
-                          <a:spcPts val="800"/>
-                        </a:spcAft>
-                        <a:buNone/>
-                      </a:pPr>
-                      <a:r>
-                        <a:rPr lang="en-IN" sz="2400" kern="100" dirty="0">
-                          <a:effectLst/>
-                        </a:rPr>
-                        <a:t>Makes building neural networks easy</a:t>
-                      </a:r>
-                      <a:endParaRPr lang="en-IN" sz="2400" kern="100" dirty="0">
-                        <a:effectLst/>
-                        <a:latin typeface="Aptos" panose="020B0004020202020204" pitchFamily="34" charset="0"/>
-                        <a:ea typeface="Aptos" panose="020B0004020202020204" pitchFamily="34" charset="0"/>
-                        <a:cs typeface="Times New Roman" panose="02020603050405020304" pitchFamily="18" charset="0"/>
-                      </a:endParaRPr>
-                    </a:p>
-                  </a:txBody>
-                  <a:tcPr marL="68580" marR="68580" marT="0" marB="0"/>
-                </a:tc>
-                <a:extLst>
-                  <a:ext uri="{0D108BD9-81ED-4DB2-BD59-A6C34878D82A}">
-                    <a16:rowId xmlns:a16="http://schemas.microsoft.com/office/drawing/2014/main" val="143798918"/>
-                  </a:ext>
-                </a:extLst>
-              </a:tr>
-            </a:tbl>
-          </a:graphicData>
-        </a:graphic>
-      </p:graphicFrame>
-    </p:spTree>
-    <p:extLst>
-      <p:ext uri="{BB962C8B-B14F-4D97-AF65-F5344CB8AC3E}">
-        <p14:creationId xmlns:p14="http://schemas.microsoft.com/office/powerpoint/2010/main" val="4271306584"/>
       </p:ext>
     </p:extLst>
   </p:cSld>
@@ -31501,6 +31369,753 @@
   <p:cSld>
     <p:spTree>
       <p:nvGrpSpPr>
+        <p:cNvPr id="1" name=""/>
+        <p:cNvGrpSpPr/>
+        <p:nvPr/>
+      </p:nvGrpSpPr>
+      <p:grpSpPr>
+        <a:xfrm>
+          <a:off x="0" y="0"/>
+          <a:ext cx="0" cy="0"/>
+          <a:chOff x="0" y="0"/>
+          <a:chExt cx="0" cy="0"/>
+        </a:xfrm>
+      </p:grpSpPr>
+      <p:pic>
+        <p:nvPicPr>
+          <p:cNvPr id="6" name="Picture 5">
+            <a:extLst>
+              <a:ext uri="{FF2B5EF4-FFF2-40B4-BE49-F238E27FC236}">
+                <a16:creationId xmlns:a16="http://schemas.microsoft.com/office/drawing/2014/main" id="{0B408453-E184-BE0D-CF2B-A15EB5337F2F}"/>
+              </a:ext>
+            </a:extLst>
+          </p:cNvPr>
+          <p:cNvPicPr>
+            <a:picLocks noChangeAspect="1"/>
+          </p:cNvPicPr>
+          <p:nvPr/>
+        </p:nvPicPr>
+        <p:blipFill>
+          <a:blip r:embed="rId2">
+            <a:extLst>
+              <a:ext uri="{28A0092B-C50C-407E-A947-70E740481C1C}">
+                <a14:useLocalDpi xmlns:a14="http://schemas.microsoft.com/office/drawing/2010/main" val="0"/>
+              </a:ext>
+            </a:extLst>
+          </a:blip>
+          <a:stretch>
+            <a:fillRect/>
+          </a:stretch>
+        </p:blipFill>
+        <p:spPr>
+          <a:xfrm>
+            <a:off x="502438" y="994199"/>
+            <a:ext cx="11126164" cy="4869602"/>
+          </a:xfrm>
+          <a:prstGeom prst="rect">
+            <a:avLst/>
+          </a:prstGeom>
+        </p:spPr>
+      </p:pic>
+      <p:sp>
+        <p:nvSpPr>
+          <p:cNvPr id="3" name="TextBox 2">
+            <a:extLst>
+              <a:ext uri="{FF2B5EF4-FFF2-40B4-BE49-F238E27FC236}">
+                <a16:creationId xmlns:a16="http://schemas.microsoft.com/office/drawing/2014/main" id="{31B25432-B42E-E7BC-B703-F92055994958}"/>
+              </a:ext>
+            </a:extLst>
+          </p:cNvPr>
+          <p:cNvSpPr txBox="1"/>
+          <p:nvPr/>
+        </p:nvSpPr>
+        <p:spPr>
+          <a:xfrm>
+            <a:off x="7239000" y="544677"/>
+            <a:ext cx="4128345" cy="523220"/>
+          </a:xfrm>
+          <a:prstGeom prst="rect">
+            <a:avLst/>
+          </a:prstGeom>
+          <a:noFill/>
+        </p:spPr>
+        <p:txBody>
+          <a:bodyPr wrap="square">
+            <a:spAutoFit/>
+          </a:bodyPr>
+          <a:lstStyle/>
+          <a:p>
+            <a:r>
+              <a:rPr lang="en-US" sz="2800" b="1" dirty="0">
+                <a:solidFill>
+                  <a:srgbClr val="002060"/>
+                </a:solidFill>
+              </a:rPr>
+              <a:t>Artificial Neural Networks</a:t>
+            </a:r>
+          </a:p>
+        </p:txBody>
+      </p:sp>
+      <p:sp>
+        <p:nvSpPr>
+          <p:cNvPr id="5" name="TextBox 4">
+            <a:extLst>
+              <a:ext uri="{FF2B5EF4-FFF2-40B4-BE49-F238E27FC236}">
+                <a16:creationId xmlns:a16="http://schemas.microsoft.com/office/drawing/2014/main" id="{E18DD145-8005-4D1F-3D54-9EC56DBC4A06}"/>
+              </a:ext>
+            </a:extLst>
+          </p:cNvPr>
+          <p:cNvSpPr txBox="1"/>
+          <p:nvPr/>
+        </p:nvSpPr>
+        <p:spPr>
+          <a:xfrm>
+            <a:off x="1831523" y="544677"/>
+            <a:ext cx="2860221" cy="523220"/>
+          </a:xfrm>
+          <a:prstGeom prst="rect">
+            <a:avLst/>
+          </a:prstGeom>
+          <a:noFill/>
+        </p:spPr>
+        <p:txBody>
+          <a:bodyPr wrap="square">
+            <a:spAutoFit/>
+          </a:bodyPr>
+          <a:lstStyle/>
+          <a:p>
+            <a:r>
+              <a:rPr lang="en-US" sz="2800" b="1" kern="1200" dirty="0">
+                <a:solidFill>
+                  <a:srgbClr val="002060"/>
+                </a:solidFill>
+                <a:effectLst/>
+                <a:latin typeface="Calibri" panose="020F0502020204030204" pitchFamily="34" charset="0"/>
+                <a:ea typeface="+mn-ea"/>
+                <a:cs typeface="+mn-cs"/>
+              </a:rPr>
+              <a:t>Biological</a:t>
+            </a:r>
+            <a:r>
+              <a:rPr lang="en-US" sz="2800" kern="1200" dirty="0">
+                <a:solidFill>
+                  <a:srgbClr val="002060"/>
+                </a:solidFill>
+                <a:effectLst/>
+                <a:latin typeface="Calibri" panose="020F0502020204030204" pitchFamily="34" charset="0"/>
+                <a:ea typeface="+mn-ea"/>
+                <a:cs typeface="+mn-cs"/>
+              </a:rPr>
+              <a:t> </a:t>
+            </a:r>
+            <a:r>
+              <a:rPr lang="en-US" sz="2800" b="1" kern="1200" dirty="0">
+                <a:solidFill>
+                  <a:srgbClr val="002060"/>
+                </a:solidFill>
+                <a:effectLst/>
+                <a:latin typeface="Calibri" panose="020F0502020204030204" pitchFamily="34" charset="0"/>
+                <a:ea typeface="+mn-ea"/>
+                <a:cs typeface="+mn-cs"/>
+              </a:rPr>
+              <a:t>Neuron</a:t>
+            </a:r>
+            <a:r>
+              <a:rPr lang="en-US" sz="2800" kern="1200" dirty="0">
+                <a:solidFill>
+                  <a:srgbClr val="002060"/>
+                </a:solidFill>
+                <a:effectLst/>
+                <a:latin typeface="Calibri" panose="020F0502020204030204" pitchFamily="34" charset="0"/>
+                <a:ea typeface="+mn-ea"/>
+                <a:cs typeface="+mn-cs"/>
+              </a:rPr>
+              <a:t> </a:t>
+            </a:r>
+            <a:endParaRPr lang="en-IN" sz="2800" dirty="0">
+              <a:solidFill>
+                <a:srgbClr val="002060"/>
+              </a:solidFill>
+            </a:endParaRPr>
+          </a:p>
+        </p:txBody>
+      </p:sp>
+    </p:spTree>
+    <p:extLst>
+      <p:ext uri="{BB962C8B-B14F-4D97-AF65-F5344CB8AC3E}">
+        <p14:creationId xmlns:p14="http://schemas.microsoft.com/office/powerpoint/2010/main" val="4115018683"/>
+      </p:ext>
+    </p:extLst>
+  </p:cSld>
+  <p:clrMapOvr>
+    <a:masterClrMapping/>
+  </p:clrMapOvr>
+</p:sld>
+</file>
+
+<file path=ppt/slides/slide71.xml><?xml version="1.0" encoding="utf-8"?>
+<p:sld xmlns:a="http://schemas.openxmlformats.org/drawingml/2006/main" xmlns:r="http://schemas.openxmlformats.org/officeDocument/2006/relationships" xmlns:p="http://schemas.openxmlformats.org/presentationml/2006/main">
+  <p:cSld>
+    <p:spTree>
+      <p:nvGrpSpPr>
+        <p:cNvPr id="1" name=""/>
+        <p:cNvGrpSpPr/>
+        <p:nvPr/>
+      </p:nvGrpSpPr>
+      <p:grpSpPr>
+        <a:xfrm>
+          <a:off x="0" y="0"/>
+          <a:ext cx="0" cy="0"/>
+          <a:chOff x="0" y="0"/>
+          <a:chExt cx="0" cy="0"/>
+        </a:xfrm>
+      </p:grpSpPr>
+      <p:sp>
+        <p:nvSpPr>
+          <p:cNvPr id="3" name="Content Placeholder 2">
+            <a:extLst>
+              <a:ext uri="{FF2B5EF4-FFF2-40B4-BE49-F238E27FC236}">
+                <a16:creationId xmlns:a16="http://schemas.microsoft.com/office/drawing/2014/main" id="{9A15462E-46E9-D2B4-2ED7-2FC504CE798F}"/>
+              </a:ext>
+            </a:extLst>
+          </p:cNvPr>
+          <p:cNvSpPr>
+            <a:spLocks noGrp="1"/>
+          </p:cNvSpPr>
+          <p:nvPr>
+            <p:ph idx="1"/>
+          </p:nvPr>
+        </p:nvSpPr>
+        <p:spPr>
+          <a:xfrm>
+            <a:off x="777240" y="849086"/>
+            <a:ext cx="10659110" cy="5327877"/>
+          </a:xfrm>
+        </p:spPr>
+        <p:txBody>
+          <a:bodyPr>
+            <a:normAutofit/>
+          </a:bodyPr>
+          <a:lstStyle/>
+          <a:p>
+            <a:pPr marL="0" indent="0">
+              <a:buNone/>
+            </a:pPr>
+            <a:r>
+              <a:rPr lang="en-US" sz="2800" b="1" dirty="0"/>
+              <a:t>Building and Training Neural Networks using </a:t>
+            </a:r>
+            <a:r>
+              <a:rPr lang="en-US" sz="2800" b="1" dirty="0">
+                <a:solidFill>
+                  <a:srgbClr val="C00000"/>
+                </a:solidFill>
+              </a:rPr>
+              <a:t>TensorFlow</a:t>
+            </a:r>
+            <a:r>
+              <a:rPr lang="en-US" sz="2800" b="1" dirty="0"/>
+              <a:t> and </a:t>
+            </a:r>
+            <a:r>
+              <a:rPr lang="en-US" sz="2800" b="1" dirty="0" err="1">
+                <a:solidFill>
+                  <a:srgbClr val="C00000"/>
+                </a:solidFill>
+              </a:rPr>
+              <a:t>Keras</a:t>
+            </a:r>
+            <a:endParaRPr lang="en-US" sz="2800" b="1" dirty="0">
+              <a:solidFill>
+                <a:srgbClr val="C00000"/>
+              </a:solidFill>
+            </a:endParaRPr>
+          </a:p>
+          <a:p>
+            <a:pPr marL="0" indent="0">
+              <a:buNone/>
+            </a:pPr>
+            <a:r>
+              <a:rPr lang="en-US" sz="2400" b="1" dirty="0"/>
+              <a:t>What are TensorFlow and </a:t>
+            </a:r>
+            <a:r>
+              <a:rPr lang="en-US" sz="2400" b="1" dirty="0" err="1"/>
+              <a:t>Keras</a:t>
+            </a:r>
+            <a:r>
+              <a:rPr lang="en-US" sz="2400" b="1" dirty="0"/>
+              <a:t>?</a:t>
+            </a:r>
+          </a:p>
+          <a:p>
+            <a:pPr marL="0" indent="0">
+              <a:buNone/>
+            </a:pPr>
+            <a:endParaRPr lang="en-IN" sz="2400" b="1" dirty="0">
+              <a:solidFill>
+                <a:srgbClr val="C00000"/>
+              </a:solidFill>
+            </a:endParaRPr>
+          </a:p>
+          <a:p>
+            <a:pPr marL="0" indent="0">
+              <a:buNone/>
+            </a:pPr>
+            <a:endParaRPr lang="en-IN" sz="2400" b="1" dirty="0">
+              <a:solidFill>
+                <a:srgbClr val="C00000"/>
+              </a:solidFill>
+            </a:endParaRPr>
+          </a:p>
+          <a:p>
+            <a:pPr marL="0" indent="0">
+              <a:buNone/>
+            </a:pPr>
+            <a:endParaRPr lang="en-IN" sz="2400" b="1" dirty="0">
+              <a:solidFill>
+                <a:srgbClr val="C00000"/>
+              </a:solidFill>
+            </a:endParaRPr>
+          </a:p>
+          <a:p>
+            <a:pPr marL="0" indent="0">
+              <a:buNone/>
+            </a:pPr>
+            <a:endParaRPr lang="en-IN" sz="2400" b="1" dirty="0">
+              <a:solidFill>
+                <a:srgbClr val="C00000"/>
+              </a:solidFill>
+            </a:endParaRPr>
+          </a:p>
+          <a:p>
+            <a:pPr marL="0" indent="0">
+              <a:buNone/>
+            </a:pPr>
+            <a:endParaRPr lang="en-IN" sz="2400" b="1" dirty="0">
+              <a:solidFill>
+                <a:srgbClr val="C00000"/>
+              </a:solidFill>
+            </a:endParaRPr>
+          </a:p>
+          <a:p>
+            <a:pPr marL="0" indent="0">
+              <a:buNone/>
+            </a:pPr>
+            <a:endParaRPr lang="en-IN" sz="2400" b="1" dirty="0">
+              <a:solidFill>
+                <a:srgbClr val="C00000"/>
+              </a:solidFill>
+            </a:endParaRPr>
+          </a:p>
+          <a:p>
+            <a:pPr marL="0" indent="0">
+              <a:buNone/>
+            </a:pPr>
+            <a:endParaRPr lang="en-US" sz="2400" dirty="0"/>
+          </a:p>
+          <a:p>
+            <a:pPr marL="0" indent="0">
+              <a:buNone/>
+            </a:pPr>
+            <a:r>
+              <a:rPr lang="en-US" sz="2400" dirty="0"/>
+              <a:t>Think of </a:t>
+            </a:r>
+            <a:r>
+              <a:rPr lang="en-US" sz="2400" b="1" dirty="0"/>
+              <a:t>TensorFlow as the engine</a:t>
+            </a:r>
+            <a:r>
+              <a:rPr lang="en-US" sz="2400" dirty="0"/>
+              <a:t>, and </a:t>
+            </a:r>
+            <a:r>
+              <a:rPr lang="en-US" sz="2400" b="1" dirty="0" err="1"/>
+              <a:t>Keras</a:t>
+            </a:r>
+            <a:r>
+              <a:rPr lang="en-US" sz="2400" b="1" dirty="0"/>
+              <a:t> as the user-friendly steering wheel</a:t>
+            </a:r>
+            <a:r>
+              <a:rPr lang="en-US" sz="2400" dirty="0"/>
+              <a:t>.</a:t>
+            </a:r>
+            <a:endParaRPr lang="en-IN" sz="2400" b="1" dirty="0">
+              <a:solidFill>
+                <a:srgbClr val="C00000"/>
+              </a:solidFill>
+            </a:endParaRPr>
+          </a:p>
+        </p:txBody>
+      </p:sp>
+      <p:graphicFrame>
+        <p:nvGraphicFramePr>
+          <p:cNvPr id="4" name="Table 3">
+            <a:extLst>
+              <a:ext uri="{FF2B5EF4-FFF2-40B4-BE49-F238E27FC236}">
+                <a16:creationId xmlns:a16="http://schemas.microsoft.com/office/drawing/2014/main" id="{5DEB3E9B-424A-10DC-EB5B-8602F28CD8A8}"/>
+              </a:ext>
+            </a:extLst>
+          </p:cNvPr>
+          <p:cNvGraphicFramePr>
+            <a:graphicFrameLocks noGrp="1"/>
+          </p:cNvGraphicFramePr>
+          <p:nvPr>
+            <p:extLst>
+              <p:ext uri="{D42A27DB-BD31-4B8C-83A1-F6EECF244321}">
+                <p14:modId xmlns:p14="http://schemas.microsoft.com/office/powerpoint/2010/main" val="596336048"/>
+              </p:ext>
+            </p:extLst>
+          </p:nvPr>
+        </p:nvGraphicFramePr>
+        <p:xfrm>
+          <a:off x="1001690" y="2217506"/>
+          <a:ext cx="10210210" cy="2147665"/>
+        </p:xfrm>
+        <a:graphic>
+          <a:graphicData uri="http://schemas.openxmlformats.org/drawingml/2006/table">
+            <a:tbl>
+              <a:tblPr firstRow="1" firstCol="1" bandRow="1">
+                <a:tableStyleId>{5C22544A-7EE6-4342-B048-85BDC9FD1C3A}</a:tableStyleId>
+              </a:tblPr>
+              <a:tblGrid>
+                <a:gridCol w="2035038">
+                  <a:extLst>
+                    <a:ext uri="{9D8B030D-6E8A-4147-A177-3AD203B41FA5}">
+                      <a16:colId xmlns:a16="http://schemas.microsoft.com/office/drawing/2014/main" val="6534079"/>
+                    </a:ext>
+                  </a:extLst>
+                </a:gridCol>
+                <a:gridCol w="4572017">
+                  <a:extLst>
+                    <a:ext uri="{9D8B030D-6E8A-4147-A177-3AD203B41FA5}">
+                      <a16:colId xmlns:a16="http://schemas.microsoft.com/office/drawing/2014/main" val="344316579"/>
+                    </a:ext>
+                  </a:extLst>
+                </a:gridCol>
+                <a:gridCol w="3603155">
+                  <a:extLst>
+                    <a:ext uri="{9D8B030D-6E8A-4147-A177-3AD203B41FA5}">
+                      <a16:colId xmlns:a16="http://schemas.microsoft.com/office/drawing/2014/main" val="1323157218"/>
+                    </a:ext>
+                  </a:extLst>
+                </a:gridCol>
+              </a:tblGrid>
+              <a:tr h="420379">
+                <a:tc>
+                  <a:txBody>
+                    <a:bodyPr/>
+                    <a:lstStyle/>
+                    <a:p>
+                      <a:pPr>
+                        <a:lnSpc>
+                          <a:spcPct val="115000"/>
+                        </a:lnSpc>
+                        <a:spcAft>
+                          <a:spcPts val="800"/>
+                        </a:spcAft>
+                        <a:buNone/>
+                      </a:pPr>
+                      <a:r>
+                        <a:rPr lang="en-IN" sz="2400" kern="100">
+                          <a:effectLst/>
+                        </a:rPr>
+                        <a:t>Tool</a:t>
+                      </a:r>
+                      <a:endParaRPr lang="en-IN" sz="2400" kern="100">
+                        <a:effectLst/>
+                        <a:latin typeface="Aptos" panose="020B0004020202020204" pitchFamily="34" charset="0"/>
+                        <a:ea typeface="Aptos" panose="020B0004020202020204" pitchFamily="34" charset="0"/>
+                        <a:cs typeface="Times New Roman" panose="02020603050405020304" pitchFamily="18" charset="0"/>
+                      </a:endParaRPr>
+                    </a:p>
+                  </a:txBody>
+                  <a:tcPr marL="68580" marR="68580" marT="0" marB="0"/>
+                </a:tc>
+                <a:tc>
+                  <a:txBody>
+                    <a:bodyPr/>
+                    <a:lstStyle/>
+                    <a:p>
+                      <a:pPr>
+                        <a:lnSpc>
+                          <a:spcPct val="115000"/>
+                        </a:lnSpc>
+                        <a:spcAft>
+                          <a:spcPts val="800"/>
+                        </a:spcAft>
+                        <a:buNone/>
+                      </a:pPr>
+                      <a:r>
+                        <a:rPr lang="en-IN" sz="2400" kern="100">
+                          <a:effectLst/>
+                        </a:rPr>
+                        <a:t>What it is</a:t>
+                      </a:r>
+                      <a:endParaRPr lang="en-IN" sz="2400" kern="100">
+                        <a:effectLst/>
+                        <a:latin typeface="Aptos" panose="020B0004020202020204" pitchFamily="34" charset="0"/>
+                        <a:ea typeface="Aptos" panose="020B0004020202020204" pitchFamily="34" charset="0"/>
+                        <a:cs typeface="Times New Roman" panose="02020603050405020304" pitchFamily="18" charset="0"/>
+                      </a:endParaRPr>
+                    </a:p>
+                  </a:txBody>
+                  <a:tcPr marL="68580" marR="68580" marT="0" marB="0"/>
+                </a:tc>
+                <a:tc>
+                  <a:txBody>
+                    <a:bodyPr/>
+                    <a:lstStyle/>
+                    <a:p>
+                      <a:pPr>
+                        <a:lnSpc>
+                          <a:spcPct val="115000"/>
+                        </a:lnSpc>
+                        <a:spcAft>
+                          <a:spcPts val="800"/>
+                        </a:spcAft>
+                        <a:buNone/>
+                      </a:pPr>
+                      <a:r>
+                        <a:rPr lang="en-IN" sz="2400" kern="100">
+                          <a:effectLst/>
+                        </a:rPr>
+                        <a:t>Purpose</a:t>
+                      </a:r>
+                      <a:endParaRPr lang="en-IN" sz="2400" kern="100">
+                        <a:effectLst/>
+                        <a:latin typeface="Aptos" panose="020B0004020202020204" pitchFamily="34" charset="0"/>
+                        <a:ea typeface="Aptos" panose="020B0004020202020204" pitchFamily="34" charset="0"/>
+                        <a:cs typeface="Times New Roman" panose="02020603050405020304" pitchFamily="18" charset="0"/>
+                      </a:endParaRPr>
+                    </a:p>
+                  </a:txBody>
+                  <a:tcPr marL="68580" marR="68580" marT="0" marB="0"/>
+                </a:tc>
+                <a:extLst>
+                  <a:ext uri="{0D108BD9-81ED-4DB2-BD59-A6C34878D82A}">
+                    <a16:rowId xmlns:a16="http://schemas.microsoft.com/office/drawing/2014/main" val="291637699"/>
+                  </a:ext>
+                </a:extLst>
+              </a:tr>
+              <a:tr h="863643">
+                <a:tc>
+                  <a:txBody>
+                    <a:bodyPr/>
+                    <a:lstStyle/>
+                    <a:p>
+                      <a:pPr>
+                        <a:lnSpc>
+                          <a:spcPct val="115000"/>
+                        </a:lnSpc>
+                        <a:spcAft>
+                          <a:spcPts val="800"/>
+                        </a:spcAft>
+                        <a:buNone/>
+                      </a:pPr>
+                      <a:r>
+                        <a:rPr lang="en-IN" sz="2400" kern="100" dirty="0">
+                          <a:effectLst/>
+                        </a:rPr>
+                        <a:t>TensorFlow</a:t>
+                      </a:r>
+                      <a:endParaRPr lang="en-IN" sz="2400" kern="100" dirty="0">
+                        <a:effectLst/>
+                        <a:latin typeface="Aptos" panose="020B0004020202020204" pitchFamily="34" charset="0"/>
+                        <a:ea typeface="Aptos" panose="020B0004020202020204" pitchFamily="34" charset="0"/>
+                        <a:cs typeface="Times New Roman" panose="02020603050405020304" pitchFamily="18" charset="0"/>
+                      </a:endParaRPr>
+                    </a:p>
+                  </a:txBody>
+                  <a:tcPr marL="68580" marR="68580" marT="0" marB="0"/>
+                </a:tc>
+                <a:tc>
+                  <a:txBody>
+                    <a:bodyPr/>
+                    <a:lstStyle/>
+                    <a:p>
+                      <a:pPr>
+                        <a:lnSpc>
+                          <a:spcPct val="115000"/>
+                        </a:lnSpc>
+                        <a:spcAft>
+                          <a:spcPts val="800"/>
+                        </a:spcAft>
+                        <a:buNone/>
+                      </a:pPr>
+                      <a:r>
+                        <a:rPr lang="en-IN" sz="2400" kern="100" dirty="0">
+                          <a:effectLst/>
+                        </a:rPr>
+                        <a:t>An open-source ML library by Google</a:t>
+                      </a:r>
+                      <a:endParaRPr lang="en-IN" sz="2400" kern="100" dirty="0">
+                        <a:effectLst/>
+                        <a:latin typeface="Aptos" panose="020B0004020202020204" pitchFamily="34" charset="0"/>
+                        <a:ea typeface="Aptos" panose="020B0004020202020204" pitchFamily="34" charset="0"/>
+                        <a:cs typeface="Times New Roman" panose="02020603050405020304" pitchFamily="18" charset="0"/>
+                      </a:endParaRPr>
+                    </a:p>
+                  </a:txBody>
+                  <a:tcPr marL="68580" marR="68580" marT="0" marB="0"/>
+                </a:tc>
+                <a:tc>
+                  <a:txBody>
+                    <a:bodyPr/>
+                    <a:lstStyle/>
+                    <a:p>
+                      <a:pPr>
+                        <a:lnSpc>
+                          <a:spcPct val="115000"/>
+                        </a:lnSpc>
+                        <a:spcAft>
+                          <a:spcPts val="800"/>
+                        </a:spcAft>
+                        <a:buNone/>
+                      </a:pPr>
+                      <a:r>
+                        <a:rPr lang="en-IN" sz="2400" kern="100">
+                          <a:effectLst/>
+                        </a:rPr>
+                        <a:t>To build and train ML models</a:t>
+                      </a:r>
+                      <a:endParaRPr lang="en-IN" sz="2400" kern="100">
+                        <a:effectLst/>
+                        <a:latin typeface="Aptos" panose="020B0004020202020204" pitchFamily="34" charset="0"/>
+                        <a:ea typeface="Aptos" panose="020B0004020202020204" pitchFamily="34" charset="0"/>
+                        <a:cs typeface="Times New Roman" panose="02020603050405020304" pitchFamily="18" charset="0"/>
+                      </a:endParaRPr>
+                    </a:p>
+                  </a:txBody>
+                  <a:tcPr marL="68580" marR="68580" marT="0" marB="0"/>
+                </a:tc>
+                <a:extLst>
+                  <a:ext uri="{0D108BD9-81ED-4DB2-BD59-A6C34878D82A}">
+                    <a16:rowId xmlns:a16="http://schemas.microsoft.com/office/drawing/2014/main" val="557529135"/>
+                  </a:ext>
+                </a:extLst>
+              </a:tr>
+              <a:tr h="863643">
+                <a:tc>
+                  <a:txBody>
+                    <a:bodyPr/>
+                    <a:lstStyle/>
+                    <a:p>
+                      <a:pPr>
+                        <a:lnSpc>
+                          <a:spcPct val="115000"/>
+                        </a:lnSpc>
+                        <a:spcAft>
+                          <a:spcPts val="800"/>
+                        </a:spcAft>
+                        <a:buNone/>
+                      </a:pPr>
+                      <a:r>
+                        <a:rPr lang="en-IN" sz="2400" kern="100" dirty="0" err="1">
+                          <a:effectLst/>
+                        </a:rPr>
+                        <a:t>Keras</a:t>
+                      </a:r>
+                      <a:endParaRPr lang="en-IN" sz="2400" kern="100" dirty="0">
+                        <a:effectLst/>
+                        <a:latin typeface="Aptos" panose="020B0004020202020204" pitchFamily="34" charset="0"/>
+                        <a:ea typeface="Aptos" panose="020B0004020202020204" pitchFamily="34" charset="0"/>
+                        <a:cs typeface="Times New Roman" panose="02020603050405020304" pitchFamily="18" charset="0"/>
+                      </a:endParaRPr>
+                    </a:p>
+                  </a:txBody>
+                  <a:tcPr marL="68580" marR="68580" marT="0" marB="0"/>
+                </a:tc>
+                <a:tc>
+                  <a:txBody>
+                    <a:bodyPr/>
+                    <a:lstStyle/>
+                    <a:p>
+                      <a:pPr>
+                        <a:lnSpc>
+                          <a:spcPct val="115000"/>
+                        </a:lnSpc>
+                        <a:spcAft>
+                          <a:spcPts val="800"/>
+                        </a:spcAft>
+                        <a:buNone/>
+                      </a:pPr>
+                      <a:r>
+                        <a:rPr lang="en-IN" sz="2400" kern="100">
+                          <a:effectLst/>
+                        </a:rPr>
+                        <a:t>A high-level API running on top of TensorFlow</a:t>
+                      </a:r>
+                      <a:endParaRPr lang="en-IN" sz="2400" kern="100">
+                        <a:effectLst/>
+                        <a:latin typeface="Aptos" panose="020B0004020202020204" pitchFamily="34" charset="0"/>
+                        <a:ea typeface="Aptos" panose="020B0004020202020204" pitchFamily="34" charset="0"/>
+                        <a:cs typeface="Times New Roman" panose="02020603050405020304" pitchFamily="18" charset="0"/>
+                      </a:endParaRPr>
+                    </a:p>
+                  </a:txBody>
+                  <a:tcPr marL="68580" marR="68580" marT="0" marB="0"/>
+                </a:tc>
+                <a:tc>
+                  <a:txBody>
+                    <a:bodyPr/>
+                    <a:lstStyle/>
+                    <a:p>
+                      <a:pPr>
+                        <a:lnSpc>
+                          <a:spcPct val="115000"/>
+                        </a:lnSpc>
+                        <a:spcAft>
+                          <a:spcPts val="800"/>
+                        </a:spcAft>
+                        <a:buNone/>
+                      </a:pPr>
+                      <a:r>
+                        <a:rPr lang="en-IN" sz="2400" kern="100" dirty="0">
+                          <a:effectLst/>
+                        </a:rPr>
+                        <a:t>Makes building neural networks easy</a:t>
+                      </a:r>
+                      <a:endParaRPr lang="en-IN" sz="2400" kern="100" dirty="0">
+                        <a:effectLst/>
+                        <a:latin typeface="Aptos" panose="020B0004020202020204" pitchFamily="34" charset="0"/>
+                        <a:ea typeface="Aptos" panose="020B0004020202020204" pitchFamily="34" charset="0"/>
+                        <a:cs typeface="Times New Roman" panose="02020603050405020304" pitchFamily="18" charset="0"/>
+                      </a:endParaRPr>
+                    </a:p>
+                  </a:txBody>
+                  <a:tcPr marL="68580" marR="68580" marT="0" marB="0"/>
+                </a:tc>
+                <a:extLst>
+                  <a:ext uri="{0D108BD9-81ED-4DB2-BD59-A6C34878D82A}">
+                    <a16:rowId xmlns:a16="http://schemas.microsoft.com/office/drawing/2014/main" val="143798918"/>
+                  </a:ext>
+                </a:extLst>
+              </a:tr>
+            </a:tbl>
+          </a:graphicData>
+        </a:graphic>
+      </p:graphicFrame>
+    </p:spTree>
+    <p:extLst>
+      <p:ext uri="{BB962C8B-B14F-4D97-AF65-F5344CB8AC3E}">
+        <p14:creationId xmlns:p14="http://schemas.microsoft.com/office/powerpoint/2010/main" val="4271306584"/>
+      </p:ext>
+    </p:extLst>
+  </p:cSld>
+  <p:clrMapOvr>
+    <a:masterClrMapping/>
+  </p:clrMapOvr>
+</p:sld>
+</file>
+
+<file path=ppt/slides/slide72.xml><?xml version="1.0" encoding="utf-8"?>
+<p:sld xmlns:a="http://schemas.openxmlformats.org/drawingml/2006/main" xmlns:r="http://schemas.openxmlformats.org/officeDocument/2006/relationships" xmlns:p="http://schemas.openxmlformats.org/presentationml/2006/main">
+  <p:cSld>
+    <p:spTree>
+      <p:nvGrpSpPr>
         <p:cNvPr id="1" name="">
           <a:extLst>
             <a:ext uri="{FF2B5EF4-FFF2-40B4-BE49-F238E27FC236}">
@@ -31661,7 +32276,7 @@
 </p:sld>
 </file>
 
-<file path=ppt/slides/slide71.xml><?xml version="1.0" encoding="utf-8"?>
+<file path=ppt/slides/slide73.xml><?xml version="1.0" encoding="utf-8"?>
 <p:sld xmlns:a="http://schemas.openxmlformats.org/drawingml/2006/main" xmlns:r="http://schemas.openxmlformats.org/officeDocument/2006/relationships" xmlns:p="http://schemas.openxmlformats.org/presentationml/2006/main">
   <p:cSld>
     <p:spTree>
@@ -31799,7 +32414,7 @@
 </p:sld>
 </file>
 
-<file path=ppt/slides/slide72.xml><?xml version="1.0" encoding="utf-8"?>
+<file path=ppt/slides/slide74.xml><?xml version="1.0" encoding="utf-8"?>
 <p:sld xmlns:a="http://schemas.openxmlformats.org/drawingml/2006/main" xmlns:r="http://schemas.openxmlformats.org/officeDocument/2006/relationships" xmlns:p="http://schemas.openxmlformats.org/presentationml/2006/main">
   <p:cSld>
     <p:spTree>
@@ -31909,7 +32524,7 @@
 </p:sld>
 </file>
 
-<file path=ppt/slides/slide73.xml><?xml version="1.0" encoding="utf-8"?>
+<file path=ppt/slides/slide75.xml><?xml version="1.0" encoding="utf-8"?>
 <p:sld xmlns:a="http://schemas.openxmlformats.org/drawingml/2006/main" xmlns:r="http://schemas.openxmlformats.org/officeDocument/2006/relationships" xmlns:p="http://schemas.openxmlformats.org/presentationml/2006/main">
   <p:cSld>
     <p:spTree>
@@ -32013,7 +32628,7 @@
 </p:sld>
 </file>
 
-<file path=ppt/slides/slide74.xml><?xml version="1.0" encoding="utf-8"?>
+<file path=ppt/slides/slide76.xml><?xml version="1.0" encoding="utf-8"?>
 <p:sld xmlns:a="http://schemas.openxmlformats.org/drawingml/2006/main" xmlns:r="http://schemas.openxmlformats.org/officeDocument/2006/relationships" xmlns:p="http://schemas.openxmlformats.org/presentationml/2006/main">
   <p:cSld>
     <p:spTree>
@@ -32178,7 +32793,7 @@
 </p:sld>
 </file>
 
-<file path=ppt/slides/slide75.xml><?xml version="1.0" encoding="utf-8"?>
+<file path=ppt/slides/slide77.xml><?xml version="1.0" encoding="utf-8"?>
 <p:sld xmlns:a="http://schemas.openxmlformats.org/drawingml/2006/main" xmlns:r="http://schemas.openxmlformats.org/officeDocument/2006/relationships" xmlns:p="http://schemas.openxmlformats.org/presentationml/2006/main">
   <p:cSld>
     <p:spTree>
@@ -32387,7 +33002,7 @@
 </p:sld>
 </file>
 
-<file path=ppt/slides/slide76.xml><?xml version="1.0" encoding="utf-8"?>
+<file path=ppt/slides/slide78.xml><?xml version="1.0" encoding="utf-8"?>
 <p:sld xmlns:a="http://schemas.openxmlformats.org/drawingml/2006/main" xmlns:r="http://schemas.openxmlformats.org/officeDocument/2006/relationships" xmlns:p="http://schemas.openxmlformats.org/presentationml/2006/main">
   <p:cSld>
     <p:spTree>
@@ -33294,7 +33909,7 @@
 </p:sld>
 </file>
 
-<file path=ppt/slides/slide77.xml><?xml version="1.0" encoding="utf-8"?>
+<file path=ppt/slides/slide79.xml><?xml version="1.0" encoding="utf-8"?>
 <p:sld xmlns:a="http://schemas.openxmlformats.org/drawingml/2006/main" xmlns:r="http://schemas.openxmlformats.org/officeDocument/2006/relationships" xmlns:p="http://schemas.openxmlformats.org/presentationml/2006/main">
   <p:cSld>
     <p:spTree>
@@ -33302,7 +33917,7 @@
         <p:cNvPr id="1" name="">
           <a:extLst>
             <a:ext uri="{FF2B5EF4-FFF2-40B4-BE49-F238E27FC236}">
-              <a16:creationId xmlns:a16="http://schemas.microsoft.com/office/drawing/2014/main" id="{5190DFA2-8928-15AD-FE4B-D1A8C0A04113}"/>
+              <a16:creationId xmlns:a16="http://schemas.microsoft.com/office/drawing/2014/main" id="{7777EF1D-68CF-C078-DE79-45C21E6BEFC5}"/>
             </a:ext>
           </a:extLst>
         </p:cNvPr>
@@ -33322,183 +33937,7 @@
           <p:cNvPr id="3" name="Content Placeholder 2">
             <a:extLst>
               <a:ext uri="{FF2B5EF4-FFF2-40B4-BE49-F238E27FC236}">
-                <a16:creationId xmlns:a16="http://schemas.microsoft.com/office/drawing/2014/main" id="{C3ABE3FE-A23C-4562-9B10-31F89A23712E}"/>
-              </a:ext>
-            </a:extLst>
-          </p:cNvPr>
-          <p:cNvSpPr>
-            <a:spLocks noGrp="1"/>
-          </p:cNvSpPr>
-          <p:nvPr>
-            <p:ph idx="1"/>
-          </p:nvPr>
-        </p:nvSpPr>
-        <p:spPr>
-          <a:xfrm>
-            <a:off x="743688" y="1001485"/>
-            <a:ext cx="10900568" cy="4974772"/>
-          </a:xfrm>
-        </p:spPr>
-        <p:txBody>
-          <a:bodyPr>
-            <a:normAutofit/>
-          </a:bodyPr>
-          <a:lstStyle/>
-          <a:p>
-            <a:pPr marL="0" indent="0">
-              <a:buNone/>
-            </a:pPr>
-            <a:r>
-              <a:rPr lang="en-US" sz="3200" b="1" dirty="0">
-                <a:solidFill>
-                  <a:srgbClr val="C00000"/>
-                </a:solidFill>
-              </a:rPr>
-              <a:t>Module-4: </a:t>
-            </a:r>
-            <a:r>
-              <a:rPr lang="en-US" sz="3200" b="1" dirty="0">
-                <a:solidFill>
-                  <a:schemeClr val="accent3">
-                    <a:lumMod val="50000"/>
-                  </a:schemeClr>
-                </a:solidFill>
-              </a:rPr>
-              <a:t>Advanced Machine Learning Techniques: </a:t>
-            </a:r>
-          </a:p>
-          <a:p>
-            <a:pPr marL="0" indent="0">
-              <a:buNone/>
-            </a:pPr>
-            <a:r>
-              <a:rPr lang="en-US" sz="3200" b="1" dirty="0"/>
-              <a:t>Ensemble Methods: Bagging and Boosting</a:t>
-            </a:r>
-            <a:r>
-              <a:rPr lang="en-US" sz="3200" dirty="0"/>
-              <a:t>, </a:t>
-            </a:r>
-            <a:r>
-              <a:rPr lang="en-US" sz="3200" b="1" dirty="0"/>
-              <a:t>Gradient Boosting Machines (GBM)</a:t>
-            </a:r>
-            <a:r>
-              <a:rPr lang="en-US" sz="3200" dirty="0"/>
-              <a:t>, </a:t>
-            </a:r>
-            <a:r>
-              <a:rPr lang="en-US" sz="3200" b="1" dirty="0"/>
-              <a:t>Extreme Gradient Boosting (</a:t>
-            </a:r>
-            <a:r>
-              <a:rPr lang="en-US" sz="3200" b="1" dirty="0" err="1"/>
-              <a:t>XGBoost</a:t>
-            </a:r>
-            <a:r>
-              <a:rPr lang="en-US" sz="3200" b="1" dirty="0"/>
-              <a:t>).  </a:t>
-            </a:r>
-          </a:p>
-          <a:p>
-            <a:pPr marL="0" indent="0">
-              <a:buNone/>
-            </a:pPr>
-            <a:r>
-              <a:rPr lang="en-US" sz="3200" b="1" dirty="0"/>
-              <a:t>Support Vector Machines (SVM): Linear and non-linear SVM</a:t>
-            </a:r>
-            <a:r>
-              <a:rPr lang="en-US" sz="3200" dirty="0"/>
-              <a:t>, </a:t>
-            </a:r>
-            <a:r>
-              <a:rPr lang="en-US" sz="3200" b="1" dirty="0"/>
-              <a:t>Kernel trick</a:t>
-            </a:r>
-            <a:r>
-              <a:rPr lang="en-US" sz="3200" dirty="0"/>
-              <a:t>, </a:t>
-            </a:r>
-            <a:r>
-              <a:rPr lang="en-US" sz="3200" b="1" dirty="0"/>
-              <a:t>Model evaluation and tuning</a:t>
-            </a:r>
-            <a:r>
-              <a:rPr lang="en-US" sz="3200" dirty="0"/>
-              <a:t>.  </a:t>
-            </a:r>
-          </a:p>
-          <a:p>
-            <a:pPr marL="0" indent="0">
-              <a:buNone/>
-            </a:pPr>
-            <a:r>
-              <a:rPr lang="en-US" sz="3200" b="1" dirty="0"/>
-              <a:t>Neural Networks and Deep Learning: Introduction to neural networks</a:t>
-            </a:r>
-            <a:r>
-              <a:rPr lang="en-US" sz="3200" dirty="0"/>
-              <a:t>, </a:t>
-            </a:r>
-            <a:r>
-              <a:rPr lang="en-US" sz="3200" b="1" dirty="0"/>
-              <a:t>Building and training neural networks using TensorFlow and </a:t>
-            </a:r>
-            <a:r>
-              <a:rPr lang="en-US" sz="3200" b="1" dirty="0" err="1"/>
-              <a:t>Keras</a:t>
-            </a:r>
-            <a:r>
-              <a:rPr lang="en-US" sz="3200" dirty="0"/>
-              <a:t>, Convolutional Neural Networks (CNN) and Recurrent Neural Networks (RNN). </a:t>
-            </a:r>
-            <a:endParaRPr lang="en-IN" sz="3200" dirty="0"/>
-          </a:p>
-        </p:txBody>
-      </p:sp>
-    </p:spTree>
-    <p:extLst>
-      <p:ext uri="{BB962C8B-B14F-4D97-AF65-F5344CB8AC3E}">
-        <p14:creationId xmlns:p14="http://schemas.microsoft.com/office/powerpoint/2010/main" val="1168041992"/>
-      </p:ext>
-    </p:extLst>
-  </p:cSld>
-  <p:clrMapOvr>
-    <a:masterClrMapping/>
-  </p:clrMapOvr>
-</p:sld>
-</file>
-
-<file path=ppt/slides/slide78.xml><?xml version="1.0" encoding="utf-8"?>
-<p:sld xmlns:a="http://schemas.openxmlformats.org/drawingml/2006/main" xmlns:r="http://schemas.openxmlformats.org/officeDocument/2006/relationships" xmlns:p="http://schemas.openxmlformats.org/presentationml/2006/main">
-  <p:cSld>
-    <p:spTree>
-      <p:nvGrpSpPr>
-        <p:cNvPr id="1" name="">
-          <a:extLst>
-            <a:ext uri="{FF2B5EF4-FFF2-40B4-BE49-F238E27FC236}">
-              <a16:creationId xmlns:a16="http://schemas.microsoft.com/office/drawing/2014/main" id="{E6D74122-3232-081F-9EAC-E203711EFD29}"/>
-            </a:ext>
-          </a:extLst>
-        </p:cNvPr>
-        <p:cNvGrpSpPr/>
-        <p:nvPr/>
-      </p:nvGrpSpPr>
-      <p:grpSpPr>
-        <a:xfrm>
-          <a:off x="0" y="0"/>
-          <a:ext cx="0" cy="0"/>
-          <a:chOff x="0" y="0"/>
-          <a:chExt cx="0" cy="0"/>
-        </a:xfrm>
-      </p:grpSpPr>
-      <p:sp>
-        <p:nvSpPr>
-          <p:cNvPr id="3" name="Content Placeholder 2">
-            <a:extLst>
-              <a:ext uri="{FF2B5EF4-FFF2-40B4-BE49-F238E27FC236}">
-                <a16:creationId xmlns:a16="http://schemas.microsoft.com/office/drawing/2014/main" id="{A2B5BDBC-71CE-669F-0392-D6C5AC321E9F}"/>
+                <a16:creationId xmlns:a16="http://schemas.microsoft.com/office/drawing/2014/main" id="{DF2C08E8-599A-77B2-CD19-3887AAB5A3D3}"/>
               </a:ext>
             </a:extLst>
           </p:cNvPr>
@@ -33524,6 +33963,260 @@
             <a:pPr marL="0" indent="0">
               <a:buNone/>
             </a:pPr>
+            <a:r>
+              <a:rPr lang="en-US" sz="3200" b="1" dirty="0">
+                <a:solidFill>
+                  <a:srgbClr val="002060"/>
+                </a:solidFill>
+              </a:rPr>
+              <a:t>Architectures in Deep Learning</a:t>
+            </a:r>
+            <a:r>
+              <a:rPr lang="en-US" sz="3200" b="1" dirty="0">
+                <a:solidFill>
+                  <a:srgbClr val="002060"/>
+                </a:solidFill>
+                <a:latin typeface="Söhne"/>
+              </a:rPr>
+              <a:t>:</a:t>
+            </a:r>
+          </a:p>
+          <a:p>
+            <a:pPr marL="0" indent="0">
+              <a:buNone/>
+            </a:pPr>
+            <a:r>
+              <a:rPr lang="en-US" sz="2400" dirty="0">
+                <a:solidFill>
+                  <a:srgbClr val="0D0D0D"/>
+                </a:solidFill>
+                <a:latin typeface="Söhne"/>
+              </a:rPr>
+              <a:t>Deep learning </a:t>
+            </a:r>
+            <a:r>
+              <a:rPr lang="en-US" sz="2400" b="1" dirty="0">
+                <a:solidFill>
+                  <a:srgbClr val="0D0D0D"/>
+                </a:solidFill>
+                <a:latin typeface="Söhne"/>
+              </a:rPr>
+              <a:t>encompasses a wide range of neural network architectures, </a:t>
+            </a:r>
+            <a:r>
+              <a:rPr lang="en-US" sz="2400" dirty="0">
+                <a:solidFill>
+                  <a:srgbClr val="0D0D0D"/>
+                </a:solidFill>
+                <a:latin typeface="Söhne"/>
+              </a:rPr>
+              <a:t>each</a:t>
+            </a:r>
+            <a:r>
+              <a:rPr lang="en-US" sz="2400" b="1" dirty="0">
+                <a:solidFill>
+                  <a:srgbClr val="0D0D0D"/>
+                </a:solidFill>
+                <a:latin typeface="Söhne"/>
+              </a:rPr>
+              <a:t> </a:t>
+            </a:r>
+            <a:r>
+              <a:rPr lang="en-US" sz="2400" dirty="0">
+                <a:solidFill>
+                  <a:srgbClr val="0D0D0D"/>
+                </a:solidFill>
+                <a:latin typeface="Söhne"/>
+              </a:rPr>
+              <a:t>designed to </a:t>
+            </a:r>
+            <a:r>
+              <a:rPr lang="en-US" sz="2400" b="1" dirty="0">
+                <a:solidFill>
+                  <a:srgbClr val="C00000"/>
+                </a:solidFill>
+                <a:latin typeface="Söhne"/>
+              </a:rPr>
+              <a:t>solve specific types of problems</a:t>
+            </a:r>
+            <a:r>
+              <a:rPr lang="en-US" sz="2400" dirty="0">
+                <a:solidFill>
+                  <a:srgbClr val="0D0D0D"/>
+                </a:solidFill>
+                <a:latin typeface="Söhne"/>
+              </a:rPr>
+              <a:t> and </a:t>
+            </a:r>
+            <a:r>
+              <a:rPr lang="en-US" sz="2400" b="1" dirty="0">
+                <a:solidFill>
+                  <a:srgbClr val="C00000"/>
+                </a:solidFill>
+                <a:latin typeface="Söhne"/>
+              </a:rPr>
+              <a:t>address various challenges in machine learning</a:t>
+            </a:r>
+            <a:r>
+              <a:rPr lang="en-US" sz="2400" dirty="0">
+                <a:solidFill>
+                  <a:srgbClr val="0D0D0D"/>
+                </a:solidFill>
+                <a:latin typeface="Söhne"/>
+              </a:rPr>
+              <a:t>. These architectures differ in </a:t>
+            </a:r>
+            <a:r>
+              <a:rPr lang="en-US" sz="2400" b="1" dirty="0">
+                <a:solidFill>
+                  <a:srgbClr val="C00000"/>
+                </a:solidFill>
+                <a:latin typeface="Söhne"/>
+              </a:rPr>
+              <a:t>their structure,</a:t>
+            </a:r>
+            <a:r>
+              <a:rPr lang="en-US" sz="2400" dirty="0">
+                <a:solidFill>
+                  <a:srgbClr val="C00000"/>
+                </a:solidFill>
+                <a:latin typeface="Söhne"/>
+              </a:rPr>
+              <a:t> </a:t>
+            </a:r>
+            <a:r>
+              <a:rPr lang="en-US" sz="2400" b="1" dirty="0">
+                <a:solidFill>
+                  <a:srgbClr val="C00000"/>
+                </a:solidFill>
+                <a:latin typeface="Söhne"/>
+              </a:rPr>
+              <a:t>connectivity</a:t>
+            </a:r>
+            <a:r>
+              <a:rPr lang="en-US" sz="2400" dirty="0">
+                <a:solidFill>
+                  <a:srgbClr val="0D0D0D"/>
+                </a:solidFill>
+                <a:latin typeface="Söhne"/>
+              </a:rPr>
+              <a:t>, and </a:t>
+            </a:r>
+            <a:r>
+              <a:rPr lang="en-US" sz="2400" b="1" dirty="0">
+                <a:solidFill>
+                  <a:srgbClr val="C00000"/>
+                </a:solidFill>
+                <a:latin typeface="Söhne"/>
+              </a:rPr>
+              <a:t>functionality</a:t>
+            </a:r>
+            <a:r>
+              <a:rPr lang="en-US" sz="2400" dirty="0">
+                <a:solidFill>
+                  <a:srgbClr val="0D0D0D"/>
+                </a:solidFill>
+                <a:latin typeface="Söhne"/>
+              </a:rPr>
+              <a:t>, </a:t>
+            </a:r>
+            <a:r>
+              <a:rPr lang="en-US" sz="2400" b="1" dirty="0">
+                <a:solidFill>
+                  <a:srgbClr val="00B050"/>
+                </a:solidFill>
+                <a:latin typeface="Söhne"/>
+              </a:rPr>
+              <a:t>allowing them to excel in different domains and tasks. </a:t>
+            </a:r>
+          </a:p>
+          <a:p>
+            <a:endParaRPr lang="en-US" sz="2400" dirty="0">
+              <a:solidFill>
+                <a:srgbClr val="0D0D0D"/>
+              </a:solidFill>
+              <a:latin typeface="Söhne"/>
+            </a:endParaRPr>
+          </a:p>
+          <a:p>
+            <a:pPr marL="0" indent="0">
+              <a:buNone/>
+            </a:pPr>
+            <a:r>
+              <a:rPr lang="en-US" sz="2800" b="1" dirty="0">
+                <a:solidFill>
+                  <a:srgbClr val="0D0D0D"/>
+                </a:solidFill>
+                <a:latin typeface="Söhne"/>
+              </a:rPr>
+              <a:t>Here are some popular Techniques in deep learning:</a:t>
+            </a:r>
+          </a:p>
+          <a:p>
+            <a:pPr marL="342900" indent="-342900">
+              <a:buAutoNum type="arabicPeriod"/>
+            </a:pPr>
+            <a:r>
+              <a:rPr lang="en-US" sz="2400" b="1" dirty="0"/>
+              <a:t>Deep Neural Network</a:t>
+            </a:r>
+          </a:p>
+          <a:p>
+            <a:pPr marL="342900" indent="-342900">
+              <a:buFontTx/>
+              <a:buAutoNum type="arabicPeriod"/>
+            </a:pPr>
+            <a:r>
+              <a:rPr lang="en-US" sz="2400" b="1" dirty="0">
+                <a:solidFill>
+                  <a:srgbClr val="0D0D0D"/>
+                </a:solidFill>
+                <a:latin typeface="Söhne"/>
+              </a:rPr>
+              <a:t>Convolutional Neural Networks (CNNs)</a:t>
+            </a:r>
+            <a:endParaRPr lang="en-US" sz="2400" dirty="0">
+              <a:solidFill>
+                <a:srgbClr val="0D0D0D"/>
+              </a:solidFill>
+              <a:latin typeface="Söhne"/>
+            </a:endParaRPr>
+          </a:p>
+          <a:p>
+            <a:pPr marL="342900" indent="-342900">
+              <a:buFontTx/>
+              <a:buAutoNum type="arabicPeriod"/>
+            </a:pPr>
+            <a:r>
+              <a:rPr lang="en-US" sz="2400" b="1" dirty="0">
+                <a:solidFill>
+                  <a:srgbClr val="0D0D0D"/>
+                </a:solidFill>
+                <a:latin typeface="Söhne"/>
+              </a:rPr>
+              <a:t>Recurrent Neural Networks (RNNs)</a:t>
+            </a:r>
+            <a:endParaRPr lang="en-US" sz="2400" dirty="0">
+              <a:solidFill>
+                <a:srgbClr val="0D0D0D"/>
+              </a:solidFill>
+              <a:latin typeface="Söhne"/>
+            </a:endParaRPr>
+          </a:p>
+          <a:p>
+            <a:pPr marL="342900" indent="-342900">
+              <a:buFontTx/>
+              <a:buAutoNum type="arabicPeriod"/>
+            </a:pPr>
+            <a:r>
+              <a:rPr lang="en-US" sz="2400" b="1" dirty="0"/>
+              <a:t>Deep Belief Network(DBN) </a:t>
+            </a:r>
+          </a:p>
+          <a:p>
+            <a:pPr marL="0" indent="0">
+              <a:buNone/>
+            </a:pPr>
             <a:endParaRPr lang="en-IN" sz="2400" dirty="0"/>
           </a:p>
         </p:txBody>
@@ -33531,78 +34224,7 @@
     </p:spTree>
     <p:extLst>
       <p:ext uri="{BB962C8B-B14F-4D97-AF65-F5344CB8AC3E}">
-        <p14:creationId xmlns:p14="http://schemas.microsoft.com/office/powerpoint/2010/main" val="3043417450"/>
-      </p:ext>
-    </p:extLst>
-  </p:cSld>
-  <p:clrMapOvr>
-    <a:masterClrMapping/>
-  </p:clrMapOvr>
-</p:sld>
-</file>
-
-<file path=ppt/slides/slide79.xml><?xml version="1.0" encoding="utf-8"?>
-<p:sld xmlns:a="http://schemas.openxmlformats.org/drawingml/2006/main" xmlns:r="http://schemas.openxmlformats.org/officeDocument/2006/relationships" xmlns:p="http://schemas.openxmlformats.org/presentationml/2006/main">
-  <p:cSld>
-    <p:spTree>
-      <p:nvGrpSpPr>
-        <p:cNvPr id="1" name="">
-          <a:extLst>
-            <a:ext uri="{FF2B5EF4-FFF2-40B4-BE49-F238E27FC236}">
-              <a16:creationId xmlns:a16="http://schemas.microsoft.com/office/drawing/2014/main" id="{01994D0E-78D9-58C6-2939-A79DD409F8E2}"/>
-            </a:ext>
-          </a:extLst>
-        </p:cNvPr>
-        <p:cNvGrpSpPr/>
-        <p:nvPr/>
-      </p:nvGrpSpPr>
-      <p:grpSpPr>
-        <a:xfrm>
-          <a:off x="0" y="0"/>
-          <a:ext cx="0" cy="0"/>
-          <a:chOff x="0" y="0"/>
-          <a:chExt cx="0" cy="0"/>
-        </a:xfrm>
-      </p:grpSpPr>
-      <p:sp>
-        <p:nvSpPr>
-          <p:cNvPr id="3" name="Content Placeholder 2">
-            <a:extLst>
-              <a:ext uri="{FF2B5EF4-FFF2-40B4-BE49-F238E27FC236}">
-                <a16:creationId xmlns:a16="http://schemas.microsoft.com/office/drawing/2014/main" id="{C2B18FA9-47B9-0269-A72C-8C45AC633C36}"/>
-              </a:ext>
-            </a:extLst>
-          </p:cNvPr>
-          <p:cNvSpPr>
-            <a:spLocks noGrp="1"/>
-          </p:cNvSpPr>
-          <p:nvPr>
-            <p:ph idx="1"/>
-          </p:nvPr>
-        </p:nvSpPr>
-        <p:spPr>
-          <a:xfrm>
-            <a:off x="777240" y="849086"/>
-            <a:ext cx="10659110" cy="5327877"/>
-          </a:xfrm>
-        </p:spPr>
-        <p:txBody>
-          <a:bodyPr>
-            <a:normAutofit/>
-          </a:bodyPr>
-          <a:lstStyle/>
-          <a:p>
-            <a:pPr marL="0" indent="0">
-              <a:buNone/>
-            </a:pPr>
-            <a:endParaRPr lang="en-IN" sz="2400" dirty="0"/>
-          </a:p>
-        </p:txBody>
-      </p:sp>
-    </p:spTree>
-    <p:extLst>
-      <p:ext uri="{BB962C8B-B14F-4D97-AF65-F5344CB8AC3E}">
-        <p14:creationId xmlns:p14="http://schemas.microsoft.com/office/powerpoint/2010/main" val="3726074494"/>
+        <p14:creationId xmlns:p14="http://schemas.microsoft.com/office/powerpoint/2010/main" val="817254730"/>
       </p:ext>
     </p:extLst>
   </p:cSld>
@@ -34339,7 +34961,7 @@
         <p:cNvPr id="1" name="">
           <a:extLst>
             <a:ext uri="{FF2B5EF4-FFF2-40B4-BE49-F238E27FC236}">
-              <a16:creationId xmlns:a16="http://schemas.microsoft.com/office/drawing/2014/main" id="{7777EF1D-68CF-C078-DE79-45C21E6BEFC5}"/>
+              <a16:creationId xmlns:a16="http://schemas.microsoft.com/office/drawing/2014/main" id="{E6D74122-3232-081F-9EAC-E203711EFD29}"/>
             </a:ext>
           </a:extLst>
         </p:cNvPr>
@@ -34359,7 +34981,7 @@
           <p:cNvPr id="3" name="Content Placeholder 2">
             <a:extLst>
               <a:ext uri="{FF2B5EF4-FFF2-40B4-BE49-F238E27FC236}">
-                <a16:creationId xmlns:a16="http://schemas.microsoft.com/office/drawing/2014/main" id="{DF2C08E8-599A-77B2-CD19-3887AAB5A3D3}"/>
+                <a16:creationId xmlns:a16="http://schemas.microsoft.com/office/drawing/2014/main" id="{A2B5BDBC-71CE-669F-0392-D6C5AC321E9F}"/>
               </a:ext>
             </a:extLst>
           </p:cNvPr>
@@ -34372,15 +34994,286 @@
         </p:nvSpPr>
         <p:spPr>
           <a:xfrm>
-            <a:off x="777240" y="849086"/>
-            <a:ext cx="10659110" cy="5327877"/>
+            <a:off x="777240" y="555171"/>
+            <a:ext cx="10659110" cy="5965371"/>
           </a:xfrm>
         </p:spPr>
         <p:txBody>
           <a:bodyPr>
-            <a:normAutofit/>
+            <a:normAutofit fontScale="92500" lnSpcReduction="10000"/>
           </a:bodyPr>
           <a:lstStyle/>
+          <a:p>
+            <a:pPr marL="0" indent="0">
+              <a:buNone/>
+            </a:pPr>
+            <a:r>
+              <a:rPr lang="en-US" sz="2800" b="1" dirty="0">
+                <a:solidFill>
+                  <a:srgbClr val="002060"/>
+                </a:solidFill>
+              </a:rPr>
+              <a:t>Convolutional Neural Network (CNN)</a:t>
+            </a:r>
+          </a:p>
+          <a:p>
+            <a:pPr marL="0" indent="0">
+              <a:buNone/>
+            </a:pPr>
+            <a:r>
+              <a:rPr lang="en-US" sz="2600" dirty="0"/>
+              <a:t>A Convolutional Neural Network (CNN) is a </a:t>
+            </a:r>
+            <a:r>
+              <a:rPr lang="en-US" sz="2600" b="1" dirty="0"/>
+              <a:t>type of deep learning model </a:t>
+            </a:r>
+            <a:r>
+              <a:rPr lang="en-US" sz="2600" dirty="0"/>
+              <a:t>that is specially designed to </a:t>
+            </a:r>
+            <a:r>
+              <a:rPr lang="en-US" sz="2600" b="1" dirty="0">
+                <a:solidFill>
+                  <a:srgbClr val="C00000"/>
+                </a:solidFill>
+              </a:rPr>
+              <a:t>process image data </a:t>
+            </a:r>
+            <a:r>
+              <a:rPr lang="en-US" sz="2600" dirty="0"/>
+              <a:t>(or grid-like data such as audio or video).</a:t>
+            </a:r>
+          </a:p>
+          <a:p>
+            <a:pPr marL="0" indent="0">
+              <a:buNone/>
+            </a:pPr>
+            <a:r>
+              <a:rPr lang="en-US" sz="2600" dirty="0"/>
+              <a:t>CNNs are very good at </a:t>
+            </a:r>
+            <a:r>
+              <a:rPr lang="en-US" sz="2600" b="1" dirty="0">
+                <a:solidFill>
+                  <a:srgbClr val="0070C0"/>
+                </a:solidFill>
+              </a:rPr>
+              <a:t>recognizing patterns in images </a:t>
+            </a:r>
+            <a:r>
+              <a:rPr lang="en-US" sz="2600" dirty="0"/>
+              <a:t>— like edges, colors, shapes, and objects.</a:t>
+            </a:r>
+          </a:p>
+          <a:p>
+            <a:pPr marL="0" indent="0">
+              <a:buNone/>
+            </a:pPr>
+            <a:endParaRPr lang="en-US" sz="1400" dirty="0"/>
+          </a:p>
+          <a:p>
+            <a:pPr marL="0" indent="0">
+              <a:buNone/>
+            </a:pPr>
+            <a:r>
+              <a:rPr lang="en-US" sz="2400" b="1" dirty="0"/>
+              <a:t>Why use </a:t>
+            </a:r>
+            <a:r>
+              <a:rPr lang="en-US" sz="2400" b="1" dirty="0">
+                <a:solidFill>
+                  <a:srgbClr val="C00000"/>
+                </a:solidFill>
+              </a:rPr>
+              <a:t>CNNs</a:t>
+            </a:r>
+            <a:r>
+              <a:rPr lang="en-US" sz="2400" b="1" dirty="0"/>
+              <a:t> instead of regular Neural Networks (</a:t>
+            </a:r>
+            <a:r>
+              <a:rPr lang="en-US" sz="2400" b="1" dirty="0">
+                <a:solidFill>
+                  <a:srgbClr val="C00000"/>
+                </a:solidFill>
+              </a:rPr>
+              <a:t>ANNs</a:t>
+            </a:r>
+            <a:r>
+              <a:rPr lang="en-US" sz="2400" b="1" dirty="0"/>
+              <a:t>)?</a:t>
+            </a:r>
+          </a:p>
+          <a:p>
+            <a:r>
+              <a:rPr lang="en-US" sz="2400" dirty="0"/>
+              <a:t>ANNs treat </a:t>
+            </a:r>
+            <a:r>
+              <a:rPr lang="en-US" sz="2400" b="1" dirty="0"/>
+              <a:t>image pixels as just numbers </a:t>
+            </a:r>
+            <a:r>
+              <a:rPr lang="en-US" sz="2400" dirty="0"/>
+              <a:t>— they don’t understand </a:t>
+            </a:r>
+            <a:r>
+              <a:rPr lang="en-US" sz="2400" b="1" dirty="0">
+                <a:solidFill>
+                  <a:srgbClr val="C00000"/>
+                </a:solidFill>
+              </a:rPr>
+              <a:t>spatial</a:t>
+            </a:r>
+            <a:r>
+              <a:rPr lang="en-US" sz="2400" dirty="0"/>
+              <a:t> </a:t>
+            </a:r>
+            <a:r>
+              <a:rPr lang="en-US" sz="2400" b="1" dirty="0">
+                <a:solidFill>
+                  <a:srgbClr val="C00000"/>
+                </a:solidFill>
+              </a:rPr>
+              <a:t>patterns</a:t>
+            </a:r>
+            <a:r>
+              <a:rPr lang="en-US" sz="2400" dirty="0"/>
+              <a:t> (e.g., nearby pixels forming a shape).</a:t>
+            </a:r>
+          </a:p>
+          <a:p>
+            <a:r>
+              <a:rPr lang="en-US" sz="2400" dirty="0"/>
+              <a:t>CNNs preserve </a:t>
+            </a:r>
+            <a:r>
+              <a:rPr lang="en-US" sz="2400" b="1" dirty="0">
+                <a:solidFill>
+                  <a:srgbClr val="C00000"/>
+                </a:solidFill>
+              </a:rPr>
+              <a:t>spatial relationships </a:t>
+            </a:r>
+            <a:r>
+              <a:rPr lang="en-US" sz="2400" dirty="0"/>
+              <a:t>(like "</a:t>
+            </a:r>
+            <a:r>
+              <a:rPr lang="en-US" sz="2400" b="1" dirty="0"/>
+              <a:t>a nose is near the eyes</a:t>
+            </a:r>
+            <a:r>
+              <a:rPr lang="en-US" sz="2400" dirty="0"/>
+              <a:t>") and are more efficient for image tasks.</a:t>
+            </a:r>
+          </a:p>
+          <a:p>
+            <a:r>
+              <a:rPr lang="en-US" sz="2400" dirty="0">
+                <a:solidFill>
+                  <a:srgbClr val="0D0D0D"/>
+                </a:solidFill>
+                <a:latin typeface="Söhne"/>
+              </a:rPr>
+              <a:t>CNNs are known for their ability to automatically learn relevant features </a:t>
+            </a:r>
+            <a:r>
+              <a:rPr lang="en-US" sz="2400" b="1" dirty="0">
+                <a:solidFill>
+                  <a:srgbClr val="C00000"/>
+                </a:solidFill>
+                <a:latin typeface="Söhne"/>
+              </a:rPr>
+              <a:t>from raw pixel data</a:t>
+            </a:r>
+            <a:r>
+              <a:rPr lang="en-US" sz="2400" dirty="0">
+                <a:solidFill>
+                  <a:srgbClr val="0D0D0D"/>
+                </a:solidFill>
+                <a:latin typeface="Söhne"/>
+              </a:rPr>
+              <a:t>, making them highly effective for tasks like </a:t>
+            </a:r>
+            <a:r>
+              <a:rPr lang="en-US" sz="2400" b="1" dirty="0">
+                <a:solidFill>
+                  <a:schemeClr val="accent2"/>
+                </a:solidFill>
+                <a:latin typeface="Söhne"/>
+              </a:rPr>
+              <a:t>image classification</a:t>
+            </a:r>
+            <a:r>
+              <a:rPr lang="en-US" sz="2400" dirty="0">
+                <a:solidFill>
+                  <a:srgbClr val="0D0D0D"/>
+                </a:solidFill>
+                <a:latin typeface="Söhne"/>
+              </a:rPr>
+              <a:t>, </a:t>
+            </a:r>
+            <a:r>
+              <a:rPr lang="en-US" sz="2400" b="1" dirty="0">
+                <a:solidFill>
+                  <a:schemeClr val="accent2"/>
+                </a:solidFill>
+                <a:latin typeface="Söhne"/>
+              </a:rPr>
+              <a:t>object detection</a:t>
+            </a:r>
+            <a:r>
+              <a:rPr lang="en-US" sz="2400" dirty="0">
+                <a:solidFill>
+                  <a:srgbClr val="0D0D0D"/>
+                </a:solidFill>
+                <a:latin typeface="Söhne"/>
+              </a:rPr>
+              <a:t>, and </a:t>
+            </a:r>
+            <a:r>
+              <a:rPr lang="en-US" sz="2400" b="1" dirty="0">
+                <a:solidFill>
+                  <a:schemeClr val="accent2"/>
+                </a:solidFill>
+                <a:latin typeface="Söhne"/>
+              </a:rPr>
+              <a:t>image segmentation</a:t>
+            </a:r>
+            <a:r>
+              <a:rPr lang="en-US" sz="2400" dirty="0">
+                <a:solidFill>
+                  <a:srgbClr val="0D0D0D"/>
+                </a:solidFill>
+                <a:latin typeface="Söhne"/>
+              </a:rPr>
+              <a:t>.</a:t>
+            </a:r>
+          </a:p>
+          <a:p>
+            <a:r>
+              <a:rPr lang="en-US" sz="2400" dirty="0">
+                <a:solidFill>
+                  <a:srgbClr val="0D0D0D"/>
+                </a:solidFill>
+                <a:latin typeface="Söhne"/>
+              </a:rPr>
+              <a:t>CNNs are powerful deep learning models designed to recognize patterns in images.</a:t>
+            </a:r>
+          </a:p>
+          <a:p>
+            <a:r>
+              <a:rPr lang="en-US" sz="2400" dirty="0">
+                <a:solidFill>
+                  <a:srgbClr val="0D0D0D"/>
+                </a:solidFill>
+                <a:latin typeface="Söhne"/>
+              </a:rPr>
+              <a:t>They use convolution, pooling, and fully connected layers to extract and learn from features efficiently.</a:t>
+            </a:r>
+          </a:p>
           <a:p>
             <a:pPr marL="0" indent="0">
               <a:buNone/>
@@ -34392,7 +35285,7 @@
     </p:spTree>
     <p:extLst>
       <p:ext uri="{BB962C8B-B14F-4D97-AF65-F5344CB8AC3E}">
-        <p14:creationId xmlns:p14="http://schemas.microsoft.com/office/powerpoint/2010/main" val="817254730"/>
+        <p14:creationId xmlns:p14="http://schemas.microsoft.com/office/powerpoint/2010/main" val="3043417450"/>
       </p:ext>
     </p:extLst>
   </p:cSld>
@@ -34443,20 +35336,156 @@
         </p:nvSpPr>
         <p:spPr>
           <a:xfrm>
-            <a:off x="777240" y="849086"/>
-            <a:ext cx="10659110" cy="5327877"/>
+            <a:off x="777240" y="631372"/>
+            <a:ext cx="10659110" cy="5545592"/>
           </a:xfrm>
         </p:spPr>
         <p:txBody>
           <a:bodyPr>
-            <a:normAutofit/>
+            <a:normAutofit fontScale="92500" lnSpcReduction="10000"/>
           </a:bodyPr>
           <a:lstStyle/>
           <a:p>
             <a:pPr marL="0" indent="0">
               <a:buNone/>
             </a:pPr>
-            <a:endParaRPr lang="en-IN" sz="2400" dirty="0"/>
+            <a:r>
+              <a:rPr lang="en-IN" sz="2600" b="1" dirty="0"/>
+              <a:t>Structure of a CNN</a:t>
+            </a:r>
+          </a:p>
+          <a:p>
+            <a:pPr marL="0" indent="0">
+              <a:buNone/>
+            </a:pPr>
+            <a:r>
+              <a:rPr lang="en-US" sz="2600" b="1" dirty="0"/>
+              <a:t> 1. Input Layer:</a:t>
+            </a:r>
+          </a:p>
+          <a:p>
+            <a:r>
+              <a:rPr lang="en-US" sz="2600" dirty="0"/>
+              <a:t>Takes an image (e.g., 28×28 pixels for MNIST digits).</a:t>
+            </a:r>
+          </a:p>
+          <a:p>
+            <a:r>
+              <a:rPr lang="en-US" sz="2600" b="1" dirty="0"/>
+              <a:t>Input format: </a:t>
+            </a:r>
+            <a:r>
+              <a:rPr lang="en-US" sz="2600" dirty="0"/>
+              <a:t>Height × Width × Channels (e.g., 28×28×1 for grayscale, or 28×28×3 for color).</a:t>
+            </a:r>
+          </a:p>
+          <a:p>
+            <a:pPr marL="0" indent="0">
+              <a:buNone/>
+            </a:pPr>
+            <a:endParaRPr lang="en-US" sz="2600" b="1" dirty="0"/>
+          </a:p>
+          <a:p>
+            <a:pPr marL="0" indent="0">
+              <a:buNone/>
+            </a:pPr>
+            <a:r>
+              <a:rPr lang="en-US" sz="2600" b="1" dirty="0"/>
+              <a:t>2. Convolution Layer</a:t>
+            </a:r>
+          </a:p>
+          <a:p>
+            <a:r>
+              <a:rPr lang="en-US" sz="2600" b="1" dirty="0">
+                <a:solidFill>
+                  <a:srgbClr val="C00000"/>
+                </a:solidFill>
+              </a:rPr>
+              <a:t>Main building block </a:t>
+            </a:r>
+            <a:r>
+              <a:rPr lang="en-US" sz="2600" dirty="0"/>
+              <a:t>of CNN.</a:t>
+            </a:r>
+          </a:p>
+          <a:p>
+            <a:r>
+              <a:rPr lang="en-US" sz="2600" dirty="0"/>
+              <a:t>Applies </a:t>
+            </a:r>
+            <a:r>
+              <a:rPr lang="en-US" sz="2600" b="1" dirty="0"/>
+              <a:t>filters</a:t>
+            </a:r>
+            <a:r>
+              <a:rPr lang="en-US" sz="2600" dirty="0"/>
+              <a:t> (kernels) to </a:t>
+            </a:r>
+            <a:r>
+              <a:rPr lang="en-US" sz="2600" b="1" dirty="0"/>
+              <a:t>scan the image </a:t>
+            </a:r>
+            <a:r>
+              <a:rPr lang="en-US" sz="2600" dirty="0"/>
+              <a:t>and </a:t>
+            </a:r>
+            <a:r>
+              <a:rPr lang="en-US" sz="2600" b="1" dirty="0"/>
+              <a:t>detect</a:t>
+            </a:r>
+            <a:r>
+              <a:rPr lang="en-US" sz="2600" dirty="0"/>
+              <a:t> </a:t>
+            </a:r>
+            <a:r>
+              <a:rPr lang="en-US" sz="2600" b="1" dirty="0"/>
+              <a:t>features</a:t>
+            </a:r>
+            <a:r>
+              <a:rPr lang="en-US" sz="2600" dirty="0"/>
+              <a:t> like edges, corners, textures.</a:t>
+            </a:r>
+          </a:p>
+          <a:p>
+            <a:r>
+              <a:rPr lang="en-US" sz="2600" dirty="0"/>
+              <a:t>Outputs a feature map.</a:t>
+            </a:r>
+          </a:p>
+          <a:p>
+            <a:pPr marL="0" indent="0">
+              <a:buNone/>
+            </a:pPr>
+            <a:endParaRPr lang="en-US" sz="2600" dirty="0"/>
+          </a:p>
+          <a:p>
+            <a:pPr marL="0" indent="0">
+              <a:buNone/>
+            </a:pPr>
+            <a:r>
+              <a:rPr lang="en-US" sz="2600" dirty="0"/>
+              <a:t>💡 Think of a filter like a </a:t>
+            </a:r>
+            <a:r>
+              <a:rPr lang="en-US" sz="2600" b="1" dirty="0"/>
+              <a:t>small window </a:t>
+            </a:r>
+            <a:r>
+              <a:rPr lang="en-US" sz="2600" dirty="0"/>
+              <a:t>that moves across the image and highlights patterns.</a:t>
+            </a:r>
+          </a:p>
+          <a:p>
+            <a:pPr marL="0" indent="0">
+              <a:buNone/>
+            </a:pPr>
+            <a:endParaRPr lang="en-US" sz="2400" b="1" dirty="0"/>
+          </a:p>
+          <a:p>
+            <a:pPr marL="0" indent="0">
+              <a:buNone/>
+            </a:pPr>
+            <a:endParaRPr lang="en-IN" sz="2400" b="1" dirty="0"/>
           </a:p>
         </p:txBody>
       </p:sp>
@@ -34527,10 +35556,77 @@
             <a:pPr marL="0" indent="0">
               <a:buNone/>
             </a:pPr>
+            <a:r>
+              <a:rPr lang="en-US" sz="2400" b="1" dirty="0"/>
+              <a:t>3. Activation Function (ReLU)</a:t>
+            </a:r>
+          </a:p>
+          <a:p>
+            <a:r>
+              <a:rPr lang="en-US" sz="2400" dirty="0"/>
+              <a:t>Applies </a:t>
+            </a:r>
+            <a:r>
+              <a:rPr lang="en-US" sz="2400" b="1" dirty="0"/>
+              <a:t>non-linearity</a:t>
+            </a:r>
+            <a:r>
+              <a:rPr lang="en-US" sz="2400" dirty="0"/>
+              <a:t> so the model can learn complex patterns.</a:t>
+            </a:r>
+          </a:p>
+          <a:p>
+            <a:r>
+              <a:rPr lang="en-US" sz="2400" dirty="0"/>
+              <a:t>Usually, </a:t>
+            </a:r>
+            <a:r>
+              <a:rPr lang="en-US" sz="2400" b="1" dirty="0"/>
+              <a:t>ReLU</a:t>
+            </a:r>
+            <a:r>
+              <a:rPr lang="en-US" sz="2400" dirty="0"/>
+              <a:t> (Rectified Linear Unit) is used:</a:t>
+            </a:r>
+          </a:p>
+          <a:p>
+            <a:pPr marL="0" indent="0">
+              <a:buNone/>
+            </a:pPr>
             <a:endParaRPr lang="en-IN" sz="2400" dirty="0"/>
           </a:p>
         </p:txBody>
       </p:sp>
+      <p:pic>
+        <p:nvPicPr>
+          <p:cNvPr id="4" name="Picture 3">
+            <a:extLst>
+              <a:ext uri="{FF2B5EF4-FFF2-40B4-BE49-F238E27FC236}">
+                <a16:creationId xmlns:a16="http://schemas.microsoft.com/office/drawing/2014/main" id="{DC1FCBEB-C910-12C6-66A5-F37B5D2910A3}"/>
+              </a:ext>
+            </a:extLst>
+          </p:cNvPr>
+          <p:cNvPicPr>
+            <a:picLocks noChangeAspect="1"/>
+          </p:cNvPicPr>
+          <p:nvPr/>
+        </p:nvPicPr>
+        <p:blipFill>
+          <a:blip r:embed="rId2"/>
+          <a:stretch>
+            <a:fillRect/>
+          </a:stretch>
+        </p:blipFill>
+        <p:spPr>
+          <a:xfrm>
+            <a:off x="3236828" y="2502368"/>
+            <a:ext cx="3425229" cy="926632"/>
+          </a:xfrm>
+          <a:prstGeom prst="rect">
+            <a:avLst/>
+          </a:prstGeom>
+        </p:spPr>
+      </p:pic>
     </p:spTree>
     <p:extLst>
       <p:ext uri="{BB962C8B-B14F-4D97-AF65-F5344CB8AC3E}">
@@ -34594,6 +35690,87 @@
             <a:normAutofit/>
           </a:bodyPr>
           <a:lstStyle/>
+          <a:p>
+            <a:pPr marL="0" indent="0">
+              <a:buNone/>
+            </a:pPr>
+            <a:r>
+              <a:rPr lang="en-US" sz="2400" b="1" dirty="0"/>
+              <a:t>4. Pooling Layer</a:t>
+            </a:r>
+          </a:p>
+          <a:p>
+            <a:r>
+              <a:rPr lang="en-US" sz="2400" dirty="0"/>
+              <a:t>Reduces the </a:t>
+            </a:r>
+            <a:r>
+              <a:rPr lang="en-US" sz="2400" b="1" dirty="0"/>
+              <a:t>size of the feature maps </a:t>
+            </a:r>
+            <a:r>
+              <a:rPr lang="en-US" sz="2400" dirty="0"/>
+              <a:t>(i.e., dimensionality), making the model faster and less prone to overfitting.</a:t>
+            </a:r>
+          </a:p>
+          <a:p>
+            <a:r>
+              <a:rPr lang="en-US" sz="2400" b="1" dirty="0"/>
+              <a:t>Most common: </a:t>
+            </a:r>
+            <a:r>
+              <a:rPr lang="en-US" sz="2400" dirty="0"/>
+              <a:t>Max Pooling (takes the largest value from a region).</a:t>
+            </a:r>
+          </a:p>
+          <a:p>
+            <a:pPr marL="0" indent="0">
+              <a:buNone/>
+            </a:pPr>
+            <a:endParaRPr lang="en-US" sz="2400" dirty="0"/>
+          </a:p>
+          <a:p>
+            <a:pPr marL="0" indent="0">
+              <a:buNone/>
+            </a:pPr>
+            <a:r>
+              <a:rPr lang="en-US" sz="2400" dirty="0"/>
+              <a:t>💡 Think of pooling as </a:t>
+            </a:r>
+            <a:r>
+              <a:rPr lang="en-US" sz="2400" b="1" dirty="0"/>
+              <a:t>shrinking the image </a:t>
+            </a:r>
+            <a:r>
+              <a:rPr lang="en-US" sz="2400" dirty="0"/>
+              <a:t>while keeping the </a:t>
+            </a:r>
+            <a:r>
+              <a:rPr lang="en-US" sz="2400" b="1" dirty="0"/>
+              <a:t>most important parts</a:t>
+            </a:r>
+          </a:p>
+          <a:p>
+            <a:pPr marL="0" indent="0">
+              <a:buNone/>
+            </a:pPr>
+            <a:endParaRPr lang="en-US" sz="2400" b="1" dirty="0"/>
+          </a:p>
+          <a:p>
+            <a:pPr marL="0" indent="0">
+              <a:buNone/>
+            </a:pPr>
+            <a:r>
+              <a:rPr lang="en-US" sz="2400" b="1" dirty="0"/>
+              <a:t>5. Flatten Layer</a:t>
+            </a:r>
+          </a:p>
+          <a:p>
+            <a:r>
+              <a:rPr lang="en-US" sz="2400" dirty="0"/>
+              <a:t>Converts the 2D feature maps into a 1D vector to feed into a fully connected layer.</a:t>
+            </a:r>
+          </a:p>
           <a:p>
             <a:pPr marL="0" indent="0">
               <a:buNone/>
@@ -34669,6 +35846,60 @@
             <a:pPr marL="0" indent="0">
               <a:buNone/>
             </a:pPr>
+            <a:r>
+              <a:rPr lang="en-US" sz="2400" b="1" dirty="0"/>
+              <a:t>6. Fully Connected (Dense) Layer</a:t>
+            </a:r>
+          </a:p>
+          <a:p>
+            <a:r>
+              <a:rPr lang="en-US" sz="2400" dirty="0"/>
+              <a:t>Works like a regular neural network — combines learned features to make predictions (e.g., classifying an image as a cat, dog, etc.).</a:t>
+            </a:r>
+          </a:p>
+          <a:p>
+            <a:pPr marL="0" indent="0">
+              <a:buNone/>
+            </a:pPr>
+            <a:endParaRPr lang="en-US" sz="2400" b="1" dirty="0"/>
+          </a:p>
+          <a:p>
+            <a:pPr marL="0" indent="0">
+              <a:buNone/>
+            </a:pPr>
+            <a:r>
+              <a:rPr lang="en-US" sz="2400" b="1" dirty="0"/>
+              <a:t>7. Output Layer</a:t>
+            </a:r>
+          </a:p>
+          <a:p>
+            <a:r>
+              <a:rPr lang="en-US" sz="2400" dirty="0"/>
+              <a:t>Usually uses </a:t>
+            </a:r>
+            <a:r>
+              <a:rPr lang="en-US" sz="2400" b="1" dirty="0" err="1"/>
+              <a:t>softmax</a:t>
+            </a:r>
+            <a:r>
+              <a:rPr lang="en-US" sz="2400" b="1" dirty="0"/>
+              <a:t> activation</a:t>
+            </a:r>
+            <a:r>
+              <a:rPr lang="en-US" sz="2400" dirty="0"/>
+              <a:t> for classification tasks.</a:t>
+            </a:r>
+          </a:p>
+          <a:p>
+            <a:r>
+              <a:rPr lang="en-US" sz="2400" dirty="0"/>
+              <a:t>Gives probability for each class (e.g., digits 0–9 in MNIST).</a:t>
+            </a:r>
+          </a:p>
+          <a:p>
+            <a:pPr marL="0" indent="0">
+              <a:buNone/>
+            </a:pPr>
             <a:endParaRPr lang="en-IN" sz="2400" dirty="0"/>
           </a:p>
         </p:txBody>
@@ -34694,7 +35925,7 @@
         <p:cNvPr id="1" name="">
           <a:extLst>
             <a:ext uri="{FF2B5EF4-FFF2-40B4-BE49-F238E27FC236}">
-              <a16:creationId xmlns:a16="http://schemas.microsoft.com/office/drawing/2014/main" id="{AB9EB865-D1CD-902A-48E7-3BAA39BE9FC7}"/>
+              <a16:creationId xmlns:a16="http://schemas.microsoft.com/office/drawing/2014/main" id="{20AFD2B7-4C9A-F7DC-85E4-5E7C85BDE195}"/>
             </a:ext>
           </a:extLst>
         </p:cNvPr>
@@ -34714,7 +35945,142 @@
           <p:cNvPr id="3" name="Content Placeholder 2">
             <a:extLst>
               <a:ext uri="{FF2B5EF4-FFF2-40B4-BE49-F238E27FC236}">
-                <a16:creationId xmlns:a16="http://schemas.microsoft.com/office/drawing/2014/main" id="{A0EBF16B-2586-71F4-B57E-0BA5626E845F}"/>
+                <a16:creationId xmlns:a16="http://schemas.microsoft.com/office/drawing/2014/main" id="{F7EB70AF-9870-5C53-60AA-139B4BC2B1CF}"/>
+              </a:ext>
+            </a:extLst>
+          </p:cNvPr>
+          <p:cNvSpPr>
+            <a:spLocks noGrp="1"/>
+          </p:cNvSpPr>
+          <p:nvPr>
+            <p:ph idx="1"/>
+          </p:nvPr>
+        </p:nvSpPr>
+        <p:spPr>
+          <a:xfrm>
+            <a:off x="777240" y="1023257"/>
+            <a:ext cx="10659110" cy="5153706"/>
+          </a:xfrm>
+        </p:spPr>
+        <p:txBody>
+          <a:bodyPr>
+            <a:normAutofit/>
+          </a:bodyPr>
+          <a:lstStyle/>
+          <a:p>
+            <a:pPr marL="0" indent="0">
+              <a:buNone/>
+            </a:pPr>
+            <a:r>
+              <a:rPr lang="en-US" sz="2800" b="1" dirty="0"/>
+              <a:t>Real-life Example: Image Classification</a:t>
+            </a:r>
+          </a:p>
+          <a:p>
+            <a:pPr marL="0" indent="0">
+              <a:buNone/>
+            </a:pPr>
+            <a:r>
+              <a:rPr lang="en-US" sz="2800" dirty="0"/>
+              <a:t>Predicting whether an image is a cat or a dog.</a:t>
+            </a:r>
+          </a:p>
+          <a:p>
+            <a:pPr marL="457200" indent="-457200">
+              <a:buFont typeface="+mj-lt"/>
+              <a:buAutoNum type="arabicPeriod"/>
+            </a:pPr>
+            <a:r>
+              <a:rPr lang="en-US" sz="2800" dirty="0"/>
+              <a:t>Input image → [Cat]</a:t>
+            </a:r>
+          </a:p>
+          <a:p>
+            <a:pPr marL="457200" indent="-457200">
+              <a:buFont typeface="+mj-lt"/>
+              <a:buAutoNum type="arabicPeriod"/>
+            </a:pPr>
+            <a:r>
+              <a:rPr lang="en-US" sz="2800" dirty="0"/>
+              <a:t>CNN learns edges, eyes, ears, whiskers</a:t>
+            </a:r>
+          </a:p>
+          <a:p>
+            <a:pPr marL="457200" indent="-457200">
+              <a:buFont typeface="+mj-lt"/>
+              <a:buAutoNum type="arabicPeriod"/>
+            </a:pPr>
+            <a:r>
+              <a:rPr lang="en-US" sz="2800" dirty="0"/>
+              <a:t>Pooling keeps important features</a:t>
+            </a:r>
+          </a:p>
+          <a:p>
+            <a:pPr marL="457200" indent="-457200">
+              <a:buFont typeface="+mj-lt"/>
+              <a:buAutoNum type="arabicPeriod"/>
+            </a:pPr>
+            <a:r>
+              <a:rPr lang="en-US" sz="2800" dirty="0"/>
+              <a:t>Dense layer decides → High probability for "cat"</a:t>
+            </a:r>
+          </a:p>
+          <a:p>
+            <a:pPr marL="0" indent="0">
+              <a:buNone/>
+            </a:pPr>
+            <a:endParaRPr lang="en-US" sz="2800" dirty="0"/>
+          </a:p>
+          <a:p>
+            <a:pPr marL="0" indent="0">
+              <a:buNone/>
+            </a:pPr>
+            <a:endParaRPr lang="en-IN" sz="2800" dirty="0"/>
+          </a:p>
+        </p:txBody>
+      </p:sp>
+    </p:spTree>
+    <p:extLst>
+      <p:ext uri="{BB962C8B-B14F-4D97-AF65-F5344CB8AC3E}">
+        <p14:creationId xmlns:p14="http://schemas.microsoft.com/office/powerpoint/2010/main" val="1182689897"/>
+      </p:ext>
+    </p:extLst>
+  </p:cSld>
+  <p:clrMapOvr>
+    <a:masterClrMapping/>
+  </p:clrMapOvr>
+</p:sld>
+</file>
+
+<file path=ppt/slides/slide86.xml><?xml version="1.0" encoding="utf-8"?>
+<p:sld xmlns:a="http://schemas.openxmlformats.org/drawingml/2006/main" xmlns:r="http://schemas.openxmlformats.org/officeDocument/2006/relationships" xmlns:p="http://schemas.openxmlformats.org/presentationml/2006/main">
+  <p:cSld>
+    <p:spTree>
+      <p:nvGrpSpPr>
+        <p:cNvPr id="1" name="">
+          <a:extLst>
+            <a:ext uri="{FF2B5EF4-FFF2-40B4-BE49-F238E27FC236}">
+              <a16:creationId xmlns:a16="http://schemas.microsoft.com/office/drawing/2014/main" id="{4441BABD-1C78-47F7-BE8C-B334B354BE57}"/>
+            </a:ext>
+          </a:extLst>
+        </p:cNvPr>
+        <p:cNvGrpSpPr/>
+        <p:nvPr/>
+      </p:nvGrpSpPr>
+      <p:grpSpPr>
+        <a:xfrm>
+          <a:off x="0" y="0"/>
+          <a:ext cx="0" cy="0"/>
+          <a:chOff x="0" y="0"/>
+          <a:chExt cx="0" cy="0"/>
+        </a:xfrm>
+      </p:grpSpPr>
+      <p:sp>
+        <p:nvSpPr>
+          <p:cNvPr id="3" name="Content Placeholder 2">
+            <a:extLst>
+              <a:ext uri="{FF2B5EF4-FFF2-40B4-BE49-F238E27FC236}">
+                <a16:creationId xmlns:a16="http://schemas.microsoft.com/office/drawing/2014/main" id="{81F18575-B2FA-A7AF-EB97-4DF513307B63}"/>
               </a:ext>
             </a:extLst>
           </p:cNvPr>
@@ -34740,14 +36106,1292 @@
             <a:pPr marL="0" indent="0">
               <a:buNone/>
             </a:pPr>
-            <a:endParaRPr lang="en-IN" sz="2400" dirty="0"/>
+            <a:r>
+              <a:rPr lang="en-IN" sz="2800" b="1" dirty="0"/>
+              <a:t>Applications of CNNs</a:t>
+            </a:r>
+          </a:p>
+        </p:txBody>
+      </p:sp>
+      <p:graphicFrame>
+        <p:nvGraphicFramePr>
+          <p:cNvPr id="2" name="Table 1">
+            <a:extLst>
+              <a:ext uri="{FF2B5EF4-FFF2-40B4-BE49-F238E27FC236}">
+                <a16:creationId xmlns:a16="http://schemas.microsoft.com/office/drawing/2014/main" id="{4B999EEB-4E80-14C9-36DD-6AFCB1347882}"/>
+              </a:ext>
+            </a:extLst>
+          </p:cNvPr>
+          <p:cNvGraphicFramePr>
+            <a:graphicFrameLocks noGrp="1"/>
+          </p:cNvGraphicFramePr>
+          <p:nvPr>
+            <p:extLst>
+              <p:ext uri="{D42A27DB-BD31-4B8C-83A1-F6EECF244321}">
+                <p14:modId xmlns:p14="http://schemas.microsoft.com/office/powerpoint/2010/main" val="1441368783"/>
+              </p:ext>
+            </p:extLst>
+          </p:nvPr>
+        </p:nvGraphicFramePr>
+        <p:xfrm>
+          <a:off x="1023845" y="1795656"/>
+          <a:ext cx="9611498" cy="3919344"/>
+        </p:xfrm>
+        <a:graphic>
+          <a:graphicData uri="http://schemas.openxmlformats.org/drawingml/2006/table">
+            <a:tbl>
+              <a:tblPr firstRow="1" firstCol="1" bandRow="1">
+                <a:tableStyleId>{5C22544A-7EE6-4342-B048-85BDC9FD1C3A}</a:tableStyleId>
+              </a:tblPr>
+              <a:tblGrid>
+                <a:gridCol w="3134498">
+                  <a:extLst>
+                    <a:ext uri="{9D8B030D-6E8A-4147-A177-3AD203B41FA5}">
+                      <a16:colId xmlns:a16="http://schemas.microsoft.com/office/drawing/2014/main" val="878744483"/>
+                    </a:ext>
+                  </a:extLst>
+                </a:gridCol>
+                <a:gridCol w="6477000">
+                  <a:extLst>
+                    <a:ext uri="{9D8B030D-6E8A-4147-A177-3AD203B41FA5}">
+                      <a16:colId xmlns:a16="http://schemas.microsoft.com/office/drawing/2014/main" val="3179223296"/>
+                    </a:ext>
+                  </a:extLst>
+                </a:gridCol>
+              </a:tblGrid>
+              <a:tr h="653224">
+                <a:tc>
+                  <a:txBody>
+                    <a:bodyPr/>
+                    <a:lstStyle/>
+                    <a:p>
+                      <a:pPr>
+                        <a:lnSpc>
+                          <a:spcPct val="115000"/>
+                        </a:lnSpc>
+                        <a:spcAft>
+                          <a:spcPts val="800"/>
+                        </a:spcAft>
+                        <a:buNone/>
+                      </a:pPr>
+                      <a:r>
+                        <a:rPr lang="en-IN" sz="2400" kern="100">
+                          <a:effectLst/>
+                        </a:rPr>
+                        <a:t>Application</a:t>
+                      </a:r>
+                      <a:endParaRPr lang="en-IN" sz="2400" kern="100">
+                        <a:effectLst/>
+                        <a:latin typeface="Aptos" panose="020B0004020202020204" pitchFamily="34" charset="0"/>
+                        <a:ea typeface="Aptos" panose="020B0004020202020204" pitchFamily="34" charset="0"/>
+                        <a:cs typeface="Times New Roman" panose="02020603050405020304" pitchFamily="18" charset="0"/>
+                      </a:endParaRPr>
+                    </a:p>
+                  </a:txBody>
+                  <a:tcPr marL="68580" marR="68580" marT="0" marB="0"/>
+                </a:tc>
+                <a:tc>
+                  <a:txBody>
+                    <a:bodyPr/>
+                    <a:lstStyle/>
+                    <a:p>
+                      <a:pPr>
+                        <a:lnSpc>
+                          <a:spcPct val="115000"/>
+                        </a:lnSpc>
+                        <a:spcAft>
+                          <a:spcPts val="800"/>
+                        </a:spcAft>
+                        <a:buNone/>
+                      </a:pPr>
+                      <a:r>
+                        <a:rPr lang="en-IN" sz="2400" kern="100" dirty="0">
+                          <a:effectLst/>
+                        </a:rPr>
+                        <a:t>Use Case</a:t>
+                      </a:r>
+                      <a:endParaRPr lang="en-IN" sz="2400" kern="100" dirty="0">
+                        <a:effectLst/>
+                        <a:latin typeface="Aptos" panose="020B0004020202020204" pitchFamily="34" charset="0"/>
+                        <a:ea typeface="Aptos" panose="020B0004020202020204" pitchFamily="34" charset="0"/>
+                        <a:cs typeface="Times New Roman" panose="02020603050405020304" pitchFamily="18" charset="0"/>
+                      </a:endParaRPr>
+                    </a:p>
+                  </a:txBody>
+                  <a:tcPr marL="68580" marR="68580" marT="0" marB="0"/>
+                </a:tc>
+                <a:extLst>
+                  <a:ext uri="{0D108BD9-81ED-4DB2-BD59-A6C34878D82A}">
+                    <a16:rowId xmlns:a16="http://schemas.microsoft.com/office/drawing/2014/main" val="816201320"/>
+                  </a:ext>
+                </a:extLst>
+              </a:tr>
+              <a:tr h="653224">
+                <a:tc>
+                  <a:txBody>
+                    <a:bodyPr/>
+                    <a:lstStyle/>
+                    <a:p>
+                      <a:pPr>
+                        <a:lnSpc>
+                          <a:spcPct val="115000"/>
+                        </a:lnSpc>
+                        <a:spcAft>
+                          <a:spcPts val="800"/>
+                        </a:spcAft>
+                        <a:buNone/>
+                      </a:pPr>
+                      <a:r>
+                        <a:rPr lang="en-IN" sz="2400" kern="100" dirty="0">
+                          <a:effectLst/>
+                        </a:rPr>
+                        <a:t>Image recognition</a:t>
+                      </a:r>
+                      <a:endParaRPr lang="en-IN" sz="2400" kern="100" dirty="0">
+                        <a:effectLst/>
+                        <a:latin typeface="Aptos" panose="020B0004020202020204" pitchFamily="34" charset="0"/>
+                        <a:ea typeface="Aptos" panose="020B0004020202020204" pitchFamily="34" charset="0"/>
+                        <a:cs typeface="Times New Roman" panose="02020603050405020304" pitchFamily="18" charset="0"/>
+                      </a:endParaRPr>
+                    </a:p>
+                  </a:txBody>
+                  <a:tcPr marL="68580" marR="68580" marT="0" marB="0"/>
+                </a:tc>
+                <a:tc>
+                  <a:txBody>
+                    <a:bodyPr/>
+                    <a:lstStyle/>
+                    <a:p>
+                      <a:pPr>
+                        <a:lnSpc>
+                          <a:spcPct val="115000"/>
+                        </a:lnSpc>
+                        <a:spcAft>
+                          <a:spcPts val="800"/>
+                        </a:spcAft>
+                        <a:buNone/>
+                      </a:pPr>
+                      <a:r>
+                        <a:rPr lang="en-IN" sz="2400" kern="100" dirty="0">
+                          <a:effectLst/>
+                        </a:rPr>
+                        <a:t>Face detection, object detection</a:t>
+                      </a:r>
+                      <a:endParaRPr lang="en-IN" sz="2400" kern="100" dirty="0">
+                        <a:effectLst/>
+                        <a:latin typeface="Aptos" panose="020B0004020202020204" pitchFamily="34" charset="0"/>
+                        <a:ea typeface="Aptos" panose="020B0004020202020204" pitchFamily="34" charset="0"/>
+                        <a:cs typeface="Times New Roman" panose="02020603050405020304" pitchFamily="18" charset="0"/>
+                      </a:endParaRPr>
+                    </a:p>
+                  </a:txBody>
+                  <a:tcPr marL="68580" marR="68580" marT="0" marB="0"/>
+                </a:tc>
+                <a:extLst>
+                  <a:ext uri="{0D108BD9-81ED-4DB2-BD59-A6C34878D82A}">
+                    <a16:rowId xmlns:a16="http://schemas.microsoft.com/office/drawing/2014/main" val="242470449"/>
+                  </a:ext>
+                </a:extLst>
+              </a:tr>
+              <a:tr h="653224">
+                <a:tc>
+                  <a:txBody>
+                    <a:bodyPr/>
+                    <a:lstStyle/>
+                    <a:p>
+                      <a:pPr>
+                        <a:lnSpc>
+                          <a:spcPct val="115000"/>
+                        </a:lnSpc>
+                        <a:spcAft>
+                          <a:spcPts val="800"/>
+                        </a:spcAft>
+                        <a:buNone/>
+                      </a:pPr>
+                      <a:r>
+                        <a:rPr lang="en-IN" sz="2400" kern="100">
+                          <a:effectLst/>
+                        </a:rPr>
+                        <a:t>Medical imaging</a:t>
+                      </a:r>
+                      <a:endParaRPr lang="en-IN" sz="2400" kern="100">
+                        <a:effectLst/>
+                        <a:latin typeface="Aptos" panose="020B0004020202020204" pitchFamily="34" charset="0"/>
+                        <a:ea typeface="Aptos" panose="020B0004020202020204" pitchFamily="34" charset="0"/>
+                        <a:cs typeface="Times New Roman" panose="02020603050405020304" pitchFamily="18" charset="0"/>
+                      </a:endParaRPr>
+                    </a:p>
+                  </a:txBody>
+                  <a:tcPr marL="68580" marR="68580" marT="0" marB="0"/>
+                </a:tc>
+                <a:tc>
+                  <a:txBody>
+                    <a:bodyPr/>
+                    <a:lstStyle/>
+                    <a:p>
+                      <a:pPr>
+                        <a:lnSpc>
+                          <a:spcPct val="115000"/>
+                        </a:lnSpc>
+                        <a:spcAft>
+                          <a:spcPts val="800"/>
+                        </a:spcAft>
+                        <a:buNone/>
+                      </a:pPr>
+                      <a:r>
+                        <a:rPr lang="en-IN" sz="2400" kern="100" dirty="0" err="1">
+                          <a:effectLst/>
+                        </a:rPr>
+                        <a:t>Tumor</a:t>
+                      </a:r>
+                      <a:r>
+                        <a:rPr lang="en-IN" sz="2400" kern="100" dirty="0">
+                          <a:effectLst/>
+                        </a:rPr>
+                        <a:t> detection from X-rays</a:t>
+                      </a:r>
+                      <a:endParaRPr lang="en-IN" sz="2400" kern="100" dirty="0">
+                        <a:effectLst/>
+                        <a:latin typeface="Aptos" panose="020B0004020202020204" pitchFamily="34" charset="0"/>
+                        <a:ea typeface="Aptos" panose="020B0004020202020204" pitchFamily="34" charset="0"/>
+                        <a:cs typeface="Times New Roman" panose="02020603050405020304" pitchFamily="18" charset="0"/>
+                      </a:endParaRPr>
+                    </a:p>
+                  </a:txBody>
+                  <a:tcPr marL="68580" marR="68580" marT="0" marB="0"/>
+                </a:tc>
+                <a:extLst>
+                  <a:ext uri="{0D108BD9-81ED-4DB2-BD59-A6C34878D82A}">
+                    <a16:rowId xmlns:a16="http://schemas.microsoft.com/office/drawing/2014/main" val="4030364373"/>
+                  </a:ext>
+                </a:extLst>
+              </a:tr>
+              <a:tr h="653224">
+                <a:tc>
+                  <a:txBody>
+                    <a:bodyPr/>
+                    <a:lstStyle/>
+                    <a:p>
+                      <a:pPr>
+                        <a:lnSpc>
+                          <a:spcPct val="115000"/>
+                        </a:lnSpc>
+                        <a:spcAft>
+                          <a:spcPts val="800"/>
+                        </a:spcAft>
+                        <a:buNone/>
+                      </a:pPr>
+                      <a:r>
+                        <a:rPr lang="en-IN" sz="2400" kern="100">
+                          <a:effectLst/>
+                        </a:rPr>
+                        <a:t>Self-driving cars</a:t>
+                      </a:r>
+                      <a:endParaRPr lang="en-IN" sz="2400" kern="100">
+                        <a:effectLst/>
+                        <a:latin typeface="Aptos" panose="020B0004020202020204" pitchFamily="34" charset="0"/>
+                        <a:ea typeface="Aptos" panose="020B0004020202020204" pitchFamily="34" charset="0"/>
+                        <a:cs typeface="Times New Roman" panose="02020603050405020304" pitchFamily="18" charset="0"/>
+                      </a:endParaRPr>
+                    </a:p>
+                  </a:txBody>
+                  <a:tcPr marL="68580" marR="68580" marT="0" marB="0"/>
+                </a:tc>
+                <a:tc>
+                  <a:txBody>
+                    <a:bodyPr/>
+                    <a:lstStyle/>
+                    <a:p>
+                      <a:pPr>
+                        <a:lnSpc>
+                          <a:spcPct val="115000"/>
+                        </a:lnSpc>
+                        <a:spcAft>
+                          <a:spcPts val="800"/>
+                        </a:spcAft>
+                        <a:buNone/>
+                      </a:pPr>
+                      <a:r>
+                        <a:rPr lang="en-IN" sz="2400" kern="100">
+                          <a:effectLst/>
+                        </a:rPr>
+                        <a:t>Recognizing road signs, lanes</a:t>
+                      </a:r>
+                      <a:endParaRPr lang="en-IN" sz="2400" kern="100">
+                        <a:effectLst/>
+                        <a:latin typeface="Aptos" panose="020B0004020202020204" pitchFamily="34" charset="0"/>
+                        <a:ea typeface="Aptos" panose="020B0004020202020204" pitchFamily="34" charset="0"/>
+                        <a:cs typeface="Times New Roman" panose="02020603050405020304" pitchFamily="18" charset="0"/>
+                      </a:endParaRPr>
+                    </a:p>
+                  </a:txBody>
+                  <a:tcPr marL="68580" marR="68580" marT="0" marB="0"/>
+                </a:tc>
+                <a:extLst>
+                  <a:ext uri="{0D108BD9-81ED-4DB2-BD59-A6C34878D82A}">
+                    <a16:rowId xmlns:a16="http://schemas.microsoft.com/office/drawing/2014/main" val="1315855937"/>
+                  </a:ext>
+                </a:extLst>
+              </a:tr>
+              <a:tr h="653224">
+                <a:tc>
+                  <a:txBody>
+                    <a:bodyPr/>
+                    <a:lstStyle/>
+                    <a:p>
+                      <a:pPr>
+                        <a:lnSpc>
+                          <a:spcPct val="115000"/>
+                        </a:lnSpc>
+                        <a:spcAft>
+                          <a:spcPts val="800"/>
+                        </a:spcAft>
+                        <a:buNone/>
+                      </a:pPr>
+                      <a:r>
+                        <a:rPr lang="en-IN" sz="2400" kern="100">
+                          <a:effectLst/>
+                        </a:rPr>
+                        <a:t>Security</a:t>
+                      </a:r>
+                      <a:endParaRPr lang="en-IN" sz="2400" kern="100">
+                        <a:effectLst/>
+                        <a:latin typeface="Aptos" panose="020B0004020202020204" pitchFamily="34" charset="0"/>
+                        <a:ea typeface="Aptos" panose="020B0004020202020204" pitchFamily="34" charset="0"/>
+                        <a:cs typeface="Times New Roman" panose="02020603050405020304" pitchFamily="18" charset="0"/>
+                      </a:endParaRPr>
+                    </a:p>
+                  </a:txBody>
+                  <a:tcPr marL="68580" marR="68580" marT="0" marB="0"/>
+                </a:tc>
+                <a:tc>
+                  <a:txBody>
+                    <a:bodyPr/>
+                    <a:lstStyle/>
+                    <a:p>
+                      <a:pPr>
+                        <a:lnSpc>
+                          <a:spcPct val="115000"/>
+                        </a:lnSpc>
+                        <a:spcAft>
+                          <a:spcPts val="800"/>
+                        </a:spcAft>
+                        <a:buNone/>
+                      </a:pPr>
+                      <a:r>
+                        <a:rPr lang="en-IN" sz="2400" kern="100">
+                          <a:effectLst/>
+                        </a:rPr>
+                        <a:t>Facial recognition, surveillance</a:t>
+                      </a:r>
+                      <a:endParaRPr lang="en-IN" sz="2400" kern="100">
+                        <a:effectLst/>
+                        <a:latin typeface="Aptos" panose="020B0004020202020204" pitchFamily="34" charset="0"/>
+                        <a:ea typeface="Aptos" panose="020B0004020202020204" pitchFamily="34" charset="0"/>
+                        <a:cs typeface="Times New Roman" panose="02020603050405020304" pitchFamily="18" charset="0"/>
+                      </a:endParaRPr>
+                    </a:p>
+                  </a:txBody>
+                  <a:tcPr marL="68580" marR="68580" marT="0" marB="0"/>
+                </a:tc>
+                <a:extLst>
+                  <a:ext uri="{0D108BD9-81ED-4DB2-BD59-A6C34878D82A}">
+                    <a16:rowId xmlns:a16="http://schemas.microsoft.com/office/drawing/2014/main" val="2203129283"/>
+                  </a:ext>
+                </a:extLst>
+              </a:tr>
+              <a:tr h="653224">
+                <a:tc>
+                  <a:txBody>
+                    <a:bodyPr/>
+                    <a:lstStyle/>
+                    <a:p>
+                      <a:pPr>
+                        <a:lnSpc>
+                          <a:spcPct val="115000"/>
+                        </a:lnSpc>
+                        <a:spcAft>
+                          <a:spcPts val="800"/>
+                        </a:spcAft>
+                        <a:buNone/>
+                      </a:pPr>
+                      <a:r>
+                        <a:rPr lang="en-IN" sz="2400" kern="100">
+                          <a:effectLst/>
+                        </a:rPr>
+                        <a:t>Augmented Reality</a:t>
+                      </a:r>
+                      <a:endParaRPr lang="en-IN" sz="2400" kern="100">
+                        <a:effectLst/>
+                        <a:latin typeface="Aptos" panose="020B0004020202020204" pitchFamily="34" charset="0"/>
+                        <a:ea typeface="Aptos" panose="020B0004020202020204" pitchFamily="34" charset="0"/>
+                        <a:cs typeface="Times New Roman" panose="02020603050405020304" pitchFamily="18" charset="0"/>
+                      </a:endParaRPr>
+                    </a:p>
+                  </a:txBody>
+                  <a:tcPr marL="68580" marR="68580" marT="0" marB="0"/>
+                </a:tc>
+                <a:tc>
+                  <a:txBody>
+                    <a:bodyPr/>
+                    <a:lstStyle/>
+                    <a:p>
+                      <a:pPr>
+                        <a:lnSpc>
+                          <a:spcPct val="115000"/>
+                        </a:lnSpc>
+                        <a:spcAft>
+                          <a:spcPts val="800"/>
+                        </a:spcAft>
+                        <a:buNone/>
+                      </a:pPr>
+                      <a:r>
+                        <a:rPr lang="en-IN" sz="2400" kern="100" dirty="0">
+                          <a:effectLst/>
+                        </a:rPr>
+                        <a:t>Real-time object tracking</a:t>
+                      </a:r>
+                      <a:endParaRPr lang="en-IN" sz="2400" kern="100" dirty="0">
+                        <a:effectLst/>
+                        <a:latin typeface="Aptos" panose="020B0004020202020204" pitchFamily="34" charset="0"/>
+                        <a:ea typeface="Aptos" panose="020B0004020202020204" pitchFamily="34" charset="0"/>
+                        <a:cs typeface="Times New Roman" panose="02020603050405020304" pitchFamily="18" charset="0"/>
+                      </a:endParaRPr>
+                    </a:p>
+                  </a:txBody>
+                  <a:tcPr marL="68580" marR="68580" marT="0" marB="0"/>
+                </a:tc>
+                <a:extLst>
+                  <a:ext uri="{0D108BD9-81ED-4DB2-BD59-A6C34878D82A}">
+                    <a16:rowId xmlns:a16="http://schemas.microsoft.com/office/drawing/2014/main" val="2401529627"/>
+                  </a:ext>
+                </a:extLst>
+              </a:tr>
+            </a:tbl>
+          </a:graphicData>
+        </a:graphic>
+      </p:graphicFrame>
+    </p:spTree>
+    <p:extLst>
+      <p:ext uri="{BB962C8B-B14F-4D97-AF65-F5344CB8AC3E}">
+        <p14:creationId xmlns:p14="http://schemas.microsoft.com/office/powerpoint/2010/main" val="1180542444"/>
+      </p:ext>
+    </p:extLst>
+  </p:cSld>
+  <p:clrMapOvr>
+    <a:masterClrMapping/>
+  </p:clrMapOvr>
+</p:sld>
+</file>
+
+<file path=ppt/slides/slide87.xml><?xml version="1.0" encoding="utf-8"?>
+<p:sld xmlns:a="http://schemas.openxmlformats.org/drawingml/2006/main" xmlns:r="http://schemas.openxmlformats.org/officeDocument/2006/relationships" xmlns:p="http://schemas.openxmlformats.org/presentationml/2006/main">
+  <p:cSld>
+    <p:spTree>
+      <p:nvGrpSpPr>
+        <p:cNvPr id="1" name=""/>
+        <p:cNvGrpSpPr/>
+        <p:nvPr/>
+      </p:nvGrpSpPr>
+      <p:grpSpPr>
+        <a:xfrm>
+          <a:off x="0" y="0"/>
+          <a:ext cx="0" cy="0"/>
+          <a:chOff x="0" y="0"/>
+          <a:chExt cx="0" cy="0"/>
+        </a:xfrm>
+      </p:grpSpPr>
+      <p:sp>
+        <p:nvSpPr>
+          <p:cNvPr id="5" name="TextBox 4">
+            <a:extLst>
+              <a:ext uri="{FF2B5EF4-FFF2-40B4-BE49-F238E27FC236}">
+                <a16:creationId xmlns:a16="http://schemas.microsoft.com/office/drawing/2014/main" id="{B1C6ABA6-75A6-6C46-58EB-7F3E43F6927A}"/>
+              </a:ext>
+            </a:extLst>
+          </p:cNvPr>
+          <p:cNvSpPr txBox="1"/>
+          <p:nvPr/>
+        </p:nvSpPr>
+        <p:spPr>
+          <a:xfrm>
+            <a:off x="578540" y="347517"/>
+            <a:ext cx="11034919" cy="3707169"/>
+          </a:xfrm>
+          <a:prstGeom prst="rect">
+            <a:avLst/>
+          </a:prstGeom>
+          <a:noFill/>
+        </p:spPr>
+        <p:txBody>
+          <a:bodyPr wrap="square">
+            <a:spAutoFit/>
+          </a:bodyPr>
+          <a:lstStyle/>
+          <a:p>
+            <a:r>
+              <a:rPr lang="en-US" sz="2800" b="1" dirty="0">
+                <a:solidFill>
+                  <a:srgbClr val="C00000"/>
+                </a:solidFill>
+              </a:rPr>
+              <a:t>Activation Function:</a:t>
+            </a:r>
+          </a:p>
+          <a:p>
+            <a:pPr marL="285750" indent="-285750">
+              <a:lnSpc>
+                <a:spcPct val="150000"/>
+              </a:lnSpc>
+              <a:buFont typeface="Arial" panose="020B0604020202020204" pitchFamily="34" charset="0"/>
+              <a:buChar char="•"/>
+            </a:pPr>
+            <a:r>
+              <a:rPr lang="en-US" sz="2000" dirty="0"/>
+              <a:t>The Activation Function is </a:t>
+            </a:r>
+            <a:r>
+              <a:rPr lang="en-US" sz="2000" b="1" dirty="0">
+                <a:solidFill>
+                  <a:srgbClr val="C00000"/>
+                </a:solidFill>
+              </a:rPr>
+              <a:t>applied </a:t>
+            </a:r>
+            <a:r>
+              <a:rPr lang="en-US" sz="2000" dirty="0"/>
+              <a:t>over the </a:t>
+            </a:r>
+            <a:r>
+              <a:rPr lang="en-US" sz="2000" b="1" dirty="0">
+                <a:solidFill>
+                  <a:srgbClr val="C00000"/>
+                </a:solidFill>
+              </a:rPr>
+              <a:t>net input</a:t>
+            </a:r>
+            <a:r>
+              <a:rPr lang="en-US" sz="2000" b="1" dirty="0"/>
+              <a:t> </a:t>
+            </a:r>
+            <a:r>
+              <a:rPr lang="en-US" sz="2000" dirty="0" err="1"/>
+              <a:t>i.e</a:t>
+            </a:r>
+            <a:r>
+              <a:rPr lang="en-US" sz="2000" dirty="0"/>
+              <a:t>, </a:t>
+            </a:r>
+            <a:r>
+              <a:rPr lang="en-US" sz="2000" b="1" dirty="0" err="1">
+                <a:solidFill>
+                  <a:srgbClr val="C00000"/>
+                </a:solidFill>
+              </a:rPr>
+              <a:t>ysum</a:t>
+            </a:r>
+            <a:r>
+              <a:rPr lang="en-US" sz="2000" dirty="0"/>
+              <a:t> </a:t>
+            </a:r>
+            <a:r>
+              <a:rPr lang="en-US" sz="2000" b="1" dirty="0">
+                <a:solidFill>
+                  <a:srgbClr val="00B0F0"/>
+                </a:solidFill>
+              </a:rPr>
+              <a:t>to calculate the output of an ANN.</a:t>
+            </a:r>
+          </a:p>
+          <a:p>
+            <a:pPr marL="285750" indent="-285750">
+              <a:lnSpc>
+                <a:spcPct val="150000"/>
+              </a:lnSpc>
+              <a:buFont typeface="Arial" panose="020B0604020202020204" pitchFamily="34" charset="0"/>
+              <a:buChar char="•"/>
+            </a:pPr>
+            <a:r>
+              <a:rPr lang="en-US" sz="2000" dirty="0"/>
+              <a:t>The activation function is a </a:t>
+            </a:r>
+            <a:r>
+              <a:rPr lang="en-US" sz="2000" b="1" dirty="0">
+                <a:solidFill>
+                  <a:srgbClr val="C00000"/>
+                </a:solidFill>
+              </a:rPr>
+              <a:t>mathematical "Gate" </a:t>
+            </a:r>
+            <a:r>
+              <a:rPr lang="en-US" sz="2000" dirty="0"/>
+              <a:t>in </a:t>
+            </a:r>
+            <a:r>
+              <a:rPr lang="en-US" sz="2000" b="1" dirty="0"/>
+              <a:t>between the </a:t>
+            </a:r>
+            <a:r>
+              <a:rPr lang="en-US" sz="2000" b="1" dirty="0">
+                <a:solidFill>
+                  <a:schemeClr val="accent1"/>
+                </a:solidFill>
+              </a:rPr>
+              <a:t>input feeding in the current node </a:t>
+            </a:r>
+            <a:r>
+              <a:rPr lang="en-US" sz="2000" b="1" dirty="0"/>
+              <a:t>and </a:t>
+            </a:r>
+            <a:r>
+              <a:rPr lang="en-US" sz="2000" b="1" dirty="0">
+                <a:solidFill>
+                  <a:schemeClr val="accent1"/>
+                </a:solidFill>
+              </a:rPr>
+              <a:t>it's output to the next layer</a:t>
+            </a:r>
+            <a:r>
+              <a:rPr lang="en-US" sz="2000" b="1" dirty="0"/>
+              <a:t>.</a:t>
+            </a:r>
+          </a:p>
+          <a:p>
+            <a:pPr marL="285750" indent="-285750">
+              <a:lnSpc>
+                <a:spcPct val="150000"/>
+              </a:lnSpc>
+              <a:buFont typeface="Arial" panose="020B0604020202020204" pitchFamily="34" charset="0"/>
+              <a:buChar char="•"/>
+            </a:pPr>
+            <a:r>
+              <a:rPr lang="en-US" sz="2000" dirty="0"/>
+              <a:t>As simple as</a:t>
+            </a:r>
+            <a:r>
+              <a:rPr lang="en-US" sz="2000" b="1" dirty="0">
+                <a:solidFill>
+                  <a:srgbClr val="C00000"/>
+                </a:solidFill>
+              </a:rPr>
+              <a:t>, If I give you a problem and ask you to solve and tell me the answer, if and only if your answer is greater than 5.</a:t>
+            </a:r>
+          </a:p>
+          <a:p>
+            <a:pPr marL="285750" indent="-285750">
+              <a:lnSpc>
+                <a:spcPct val="150000"/>
+              </a:lnSpc>
+              <a:buFont typeface="Arial" panose="020B0604020202020204" pitchFamily="34" charset="0"/>
+              <a:buChar char="•"/>
+            </a:pPr>
+            <a:r>
+              <a:rPr lang="en-US" sz="2000" b="1" dirty="0">
+                <a:solidFill>
+                  <a:srgbClr val="7030A0"/>
+                </a:solidFill>
+              </a:rPr>
+              <a:t>So we are adding some criteria to the submission of the answer</a:t>
+            </a:r>
+            <a:r>
+              <a:rPr lang="en-US" sz="2000" dirty="0"/>
+              <a:t>; if it meets that then only produce the output. This is called as </a:t>
+            </a:r>
+            <a:r>
+              <a:rPr lang="en-US" sz="2000" b="1" dirty="0">
+                <a:solidFill>
+                  <a:srgbClr val="00B050"/>
+                </a:solidFill>
+              </a:rPr>
+              <a:t>Threshold Value.</a:t>
+            </a:r>
+          </a:p>
+        </p:txBody>
+      </p:sp>
+      <p:grpSp>
+        <p:nvGrpSpPr>
+          <p:cNvPr id="2" name="Group 1">
+            <a:extLst>
+              <a:ext uri="{FF2B5EF4-FFF2-40B4-BE49-F238E27FC236}">
+                <a16:creationId xmlns:a16="http://schemas.microsoft.com/office/drawing/2014/main" id="{9E7D3BB9-03D5-E560-5BD5-CFCC23896E65}"/>
+              </a:ext>
+            </a:extLst>
+          </p:cNvPr>
+          <p:cNvGrpSpPr/>
+          <p:nvPr/>
+        </p:nvGrpSpPr>
+        <p:grpSpPr>
+          <a:xfrm>
+            <a:off x="967795" y="3942655"/>
+            <a:ext cx="9910970" cy="2408265"/>
+            <a:chOff x="1140515" y="2743775"/>
+            <a:chExt cx="9910970" cy="2408265"/>
+          </a:xfrm>
+        </p:grpSpPr>
+        <p:pic>
+          <p:nvPicPr>
+            <p:cNvPr id="3" name="Picture 2">
+              <a:extLst>
+                <a:ext uri="{FF2B5EF4-FFF2-40B4-BE49-F238E27FC236}">
+                  <a16:creationId xmlns:a16="http://schemas.microsoft.com/office/drawing/2014/main" id="{F1629B1D-EC73-1BA6-6277-2F885585C91A}"/>
+                </a:ext>
+              </a:extLst>
+            </p:cNvPr>
+            <p:cNvPicPr>
+              <a:picLocks noChangeAspect="1"/>
+            </p:cNvPicPr>
+            <p:nvPr/>
+          </p:nvPicPr>
+          <p:blipFill>
+            <a:blip r:embed="rId2">
+              <a:extLst>
+                <a:ext uri="{28A0092B-C50C-407E-A947-70E740481C1C}">
+                  <a14:useLocalDpi xmlns:a14="http://schemas.microsoft.com/office/drawing/2010/main" val="0"/>
+                </a:ext>
+              </a:extLst>
+            </a:blip>
+            <a:stretch>
+              <a:fillRect/>
+            </a:stretch>
+          </p:blipFill>
+          <p:spPr>
+            <a:xfrm>
+              <a:off x="7484275" y="2743775"/>
+              <a:ext cx="3567210" cy="2408265"/>
+            </a:xfrm>
+            <a:prstGeom prst="rect">
+              <a:avLst/>
+            </a:prstGeom>
+          </p:spPr>
+        </p:pic>
+        <p:sp>
+          <p:nvSpPr>
+            <p:cNvPr id="4" name="TextBox 3">
+              <a:extLst>
+                <a:ext uri="{FF2B5EF4-FFF2-40B4-BE49-F238E27FC236}">
+                  <a16:creationId xmlns:a16="http://schemas.microsoft.com/office/drawing/2014/main" id="{67BBA341-2053-8987-64A6-7CF26BDC97DD}"/>
+                </a:ext>
+              </a:extLst>
+            </p:cNvPr>
+            <p:cNvSpPr txBox="1"/>
+            <p:nvPr/>
+          </p:nvSpPr>
+          <p:spPr>
+            <a:xfrm>
+              <a:off x="1140515" y="3264212"/>
+              <a:ext cx="6097656" cy="1631216"/>
+            </a:xfrm>
+            <a:prstGeom prst="rect">
+              <a:avLst/>
+            </a:prstGeom>
+            <a:noFill/>
+          </p:spPr>
+          <p:txBody>
+            <a:bodyPr wrap="square">
+              <a:spAutoFit/>
+            </a:bodyPr>
+            <a:lstStyle/>
+            <a:p>
+              <a:r>
+                <a:rPr lang="en-US" sz="2000" b="1" dirty="0">
+                  <a:solidFill>
+                    <a:srgbClr val="C00000"/>
+                  </a:solidFill>
+                </a:rPr>
+                <a:t>Pre-Activation Function: (Summation Junction)</a:t>
+              </a:r>
+            </a:p>
+            <a:p>
+              <a:r>
+                <a:rPr lang="en-US" sz="2000" b="1" dirty="0"/>
+                <a:t>	</a:t>
+              </a:r>
+              <a:r>
+                <a:rPr lang="en-US" sz="2000" dirty="0"/>
+                <a:t>It is basically the </a:t>
+              </a:r>
+              <a:r>
+                <a:rPr lang="en-US" sz="2000" b="1" dirty="0">
+                  <a:solidFill>
+                    <a:srgbClr val="7030A0"/>
+                  </a:solidFill>
+                </a:rPr>
+                <a:t>summation of all the input as the net input</a:t>
+              </a:r>
+              <a:r>
+                <a:rPr lang="en-US" sz="2000" dirty="0"/>
+                <a:t> and it passes the input to the function which is called as Activation function.</a:t>
+              </a:r>
+              <a:endParaRPr lang="en-US" sz="2000" b="1" dirty="0"/>
+            </a:p>
+            <a:p>
+              <a:pPr lvl="1"/>
+              <a:r>
+                <a:rPr lang="en-US" sz="2000" dirty="0"/>
+                <a:t>	</a:t>
+              </a:r>
+            </a:p>
+          </p:txBody>
+        </p:sp>
+      </p:grpSp>
+    </p:spTree>
+    <p:extLst>
+      <p:ext uri="{BB962C8B-B14F-4D97-AF65-F5344CB8AC3E}">
+        <p14:creationId xmlns:p14="http://schemas.microsoft.com/office/powerpoint/2010/main" val="1905388139"/>
+      </p:ext>
+    </p:extLst>
+  </p:cSld>
+  <p:clrMapOvr>
+    <a:masterClrMapping/>
+  </p:clrMapOvr>
+</p:sld>
+</file>
+
+<file path=ppt/slides/slide88.xml><?xml version="1.0" encoding="utf-8"?>
+<p:sld xmlns:a="http://schemas.openxmlformats.org/drawingml/2006/main" xmlns:r="http://schemas.openxmlformats.org/officeDocument/2006/relationships" xmlns:p="http://schemas.openxmlformats.org/presentationml/2006/main">
+  <p:cSld>
+    <p:spTree>
+      <p:nvGrpSpPr>
+        <p:cNvPr id="1" name="">
+          <a:extLst>
+            <a:ext uri="{FF2B5EF4-FFF2-40B4-BE49-F238E27FC236}">
+              <a16:creationId xmlns:a16="http://schemas.microsoft.com/office/drawing/2014/main" id="{43D6DF48-BB0A-ABF7-2CFB-D6407C86AAE2}"/>
+            </a:ext>
+          </a:extLst>
+        </p:cNvPr>
+        <p:cNvGrpSpPr/>
+        <p:nvPr/>
+      </p:nvGrpSpPr>
+      <p:grpSpPr>
+        <a:xfrm>
+          <a:off x="0" y="0"/>
+          <a:ext cx="0" cy="0"/>
+          <a:chOff x="0" y="0"/>
+          <a:chExt cx="0" cy="0"/>
+        </a:xfrm>
+      </p:grpSpPr>
+      <p:sp>
+        <p:nvSpPr>
+          <p:cNvPr id="3" name="TextBox 2">
+            <a:extLst>
+              <a:ext uri="{FF2B5EF4-FFF2-40B4-BE49-F238E27FC236}">
+                <a16:creationId xmlns:a16="http://schemas.microsoft.com/office/drawing/2014/main" id="{E611AAA2-5133-AB7A-599B-35EC46DDC8C4}"/>
+              </a:ext>
+            </a:extLst>
+          </p:cNvPr>
+          <p:cNvSpPr txBox="1"/>
+          <p:nvPr/>
+        </p:nvSpPr>
+        <p:spPr>
+          <a:xfrm>
+            <a:off x="951670" y="856785"/>
+            <a:ext cx="10368999" cy="4031873"/>
+          </a:xfrm>
+          <a:prstGeom prst="rect">
+            <a:avLst/>
+          </a:prstGeom>
+          <a:noFill/>
+        </p:spPr>
+        <p:txBody>
+          <a:bodyPr wrap="square">
+            <a:spAutoFit/>
+          </a:bodyPr>
+          <a:lstStyle/>
+          <a:p>
+            <a:r>
+              <a:rPr lang="en-US" sz="2200" b="1" dirty="0">
+                <a:solidFill>
+                  <a:srgbClr val="C00000"/>
+                </a:solidFill>
+              </a:rPr>
+              <a:t>Why do we need Activation Function?</a:t>
+            </a:r>
+          </a:p>
+          <a:p>
+            <a:endParaRPr lang="en-US" dirty="0"/>
+          </a:p>
+          <a:p>
+            <a:r>
+              <a:rPr lang="en-US" sz="2400" dirty="0"/>
+              <a:t>We use Activation Function </a:t>
+            </a:r>
+            <a:r>
+              <a:rPr lang="en-US" sz="2400" b="1" dirty="0">
+                <a:solidFill>
+                  <a:srgbClr val="C00000"/>
+                </a:solidFill>
+              </a:rPr>
+              <a:t>to achieve non-linearity</a:t>
+            </a:r>
+            <a:r>
+              <a:rPr lang="en-US" sz="2400" dirty="0"/>
+              <a:t>.</a:t>
+            </a:r>
+          </a:p>
+          <a:p>
+            <a:endParaRPr lang="en-US" sz="2400" dirty="0"/>
+          </a:p>
+          <a:p>
+            <a:r>
+              <a:rPr lang="en-US" sz="2400" dirty="0"/>
+              <a:t>	Nonlinear function are used to achieve the advantages of multilayer network, when an input passes through the multilayer network </a:t>
+            </a:r>
+            <a:r>
+              <a:rPr lang="en-US" sz="2400" b="1" dirty="0">
+                <a:solidFill>
+                  <a:srgbClr val="C00000"/>
+                </a:solidFill>
+              </a:rPr>
+              <a:t>with linear activation function, the output remains same as that it could be obtained using a single layer network.</a:t>
+            </a:r>
+          </a:p>
+          <a:p>
+            <a:endParaRPr lang="en-US" sz="2400" dirty="0"/>
+          </a:p>
+          <a:p>
+            <a:r>
+              <a:rPr lang="en-US" sz="2400" dirty="0"/>
+              <a:t>	If we do not apply activation function then </a:t>
+            </a:r>
+            <a:r>
+              <a:rPr lang="en-US" sz="2400" b="1" dirty="0">
+                <a:solidFill>
+                  <a:srgbClr val="C00000"/>
+                </a:solidFill>
+              </a:rPr>
+              <a:t>the </a:t>
+            </a:r>
+            <a:r>
+              <a:rPr lang="en-US" sz="2400" b="1" dirty="0" err="1">
+                <a:solidFill>
+                  <a:srgbClr val="C00000"/>
+                </a:solidFill>
+              </a:rPr>
+              <a:t>ouput</a:t>
+            </a:r>
+            <a:r>
+              <a:rPr lang="en-US" sz="2400" b="1" dirty="0">
+                <a:solidFill>
+                  <a:srgbClr val="C00000"/>
+                </a:solidFill>
+              </a:rPr>
+              <a:t> would be linear </a:t>
+            </a:r>
+            <a:r>
+              <a:rPr lang="en-US" sz="2400" b="1" dirty="0" err="1">
+                <a:solidFill>
+                  <a:srgbClr val="C00000"/>
+                </a:solidFill>
+              </a:rPr>
+              <a:t>funciton</a:t>
+            </a:r>
+            <a:r>
+              <a:rPr lang="en-US" sz="2400" b="1" dirty="0">
+                <a:solidFill>
+                  <a:srgbClr val="C00000"/>
+                </a:solidFill>
+              </a:rPr>
+              <a:t>, </a:t>
+            </a:r>
+            <a:r>
+              <a:rPr lang="en-US" sz="2400" dirty="0"/>
+              <a:t>and that will be a Simple Linear Regression Model.</a:t>
+            </a:r>
           </a:p>
         </p:txBody>
       </p:sp>
     </p:spTree>
     <p:extLst>
       <p:ext uri="{BB962C8B-B14F-4D97-AF65-F5344CB8AC3E}">
-        <p14:creationId xmlns:p14="http://schemas.microsoft.com/office/powerpoint/2010/main" val="1429089744"/>
+        <p14:creationId xmlns:p14="http://schemas.microsoft.com/office/powerpoint/2010/main" val="312407068"/>
+      </p:ext>
+    </p:extLst>
+  </p:cSld>
+  <p:clrMapOvr>
+    <a:masterClrMapping/>
+  </p:clrMapOvr>
+</p:sld>
+</file>
+
+<file path=ppt/slides/slide89.xml><?xml version="1.0" encoding="utf-8"?>
+<p:sld xmlns:a="http://schemas.openxmlformats.org/drawingml/2006/main" xmlns:r="http://schemas.openxmlformats.org/officeDocument/2006/relationships" xmlns:p="http://schemas.openxmlformats.org/presentationml/2006/main">
+  <p:cSld>
+    <p:spTree>
+      <p:nvGrpSpPr>
+        <p:cNvPr id="1" name="">
+          <a:extLst>
+            <a:ext uri="{FF2B5EF4-FFF2-40B4-BE49-F238E27FC236}">
+              <a16:creationId xmlns:a16="http://schemas.microsoft.com/office/drawing/2014/main" id="{A2FA73A2-171C-334F-BB3E-7A1FB22A68F7}"/>
+            </a:ext>
+          </a:extLst>
+        </p:cNvPr>
+        <p:cNvGrpSpPr/>
+        <p:nvPr/>
+      </p:nvGrpSpPr>
+      <p:grpSpPr>
+        <a:xfrm>
+          <a:off x="0" y="0"/>
+          <a:ext cx="0" cy="0"/>
+          <a:chOff x="0" y="0"/>
+          <a:chExt cx="0" cy="0"/>
+        </a:xfrm>
+      </p:grpSpPr>
+      <p:sp>
+        <p:nvSpPr>
+          <p:cNvPr id="3" name="Content Placeholder 2">
+            <a:extLst>
+              <a:ext uri="{FF2B5EF4-FFF2-40B4-BE49-F238E27FC236}">
+                <a16:creationId xmlns:a16="http://schemas.microsoft.com/office/drawing/2014/main" id="{E1BF9C27-0E4B-760B-80E7-2BC770750734}"/>
+              </a:ext>
+            </a:extLst>
+          </p:cNvPr>
+          <p:cNvSpPr>
+            <a:spLocks noGrp="1"/>
+          </p:cNvSpPr>
+          <p:nvPr>
+            <p:ph idx="1"/>
+          </p:nvPr>
+        </p:nvSpPr>
+        <p:spPr>
+          <a:xfrm>
+            <a:off x="777240" y="849086"/>
+            <a:ext cx="10659110" cy="5327877"/>
+          </a:xfrm>
+        </p:spPr>
+        <p:txBody>
+          <a:bodyPr>
+            <a:normAutofit/>
+          </a:bodyPr>
+          <a:lstStyle/>
+          <a:p>
+            <a:pPr marL="0" indent="0">
+              <a:buNone/>
+            </a:pPr>
+            <a:r>
+              <a:rPr lang="en-US" sz="2800" b="1" dirty="0"/>
+              <a:t>Recurrent Neural Network (RNN)</a:t>
+            </a:r>
+          </a:p>
+          <a:p>
+            <a:pPr marL="0" indent="0">
+              <a:buNone/>
+            </a:pPr>
+            <a:r>
+              <a:rPr lang="en-US" sz="2400" dirty="0"/>
+              <a:t>A Recurrent Neural Network (RNN) is a type of neural network designed to process </a:t>
+            </a:r>
+            <a:r>
+              <a:rPr lang="en-US" sz="2400" b="1" dirty="0">
+                <a:solidFill>
+                  <a:srgbClr val="C00000"/>
+                </a:solidFill>
+              </a:rPr>
+              <a:t>sequential</a:t>
+            </a:r>
+            <a:r>
+              <a:rPr lang="en-US" sz="2400" dirty="0"/>
+              <a:t> or </a:t>
+            </a:r>
+            <a:r>
+              <a:rPr lang="en-US" sz="2400" b="1" dirty="0">
+                <a:solidFill>
+                  <a:srgbClr val="C00000"/>
+                </a:solidFill>
+              </a:rPr>
+              <a:t>time-series data</a:t>
+            </a:r>
+            <a:r>
+              <a:rPr lang="en-US" sz="2400" dirty="0"/>
+              <a:t>, where the </a:t>
+            </a:r>
+            <a:r>
+              <a:rPr lang="en-US" sz="2400" b="1" dirty="0"/>
+              <a:t>order of data matters</a:t>
+            </a:r>
+            <a:r>
+              <a:rPr lang="en-US" sz="2400" dirty="0"/>
+              <a:t>.</a:t>
+            </a:r>
+          </a:p>
+          <a:p>
+            <a:r>
+              <a:rPr lang="en-US" sz="2400" dirty="0"/>
+              <a:t>Unlike traditional neural networks, RNNs have a "</a:t>
+            </a:r>
+            <a:r>
+              <a:rPr lang="en-US" sz="2400" b="1" dirty="0">
+                <a:solidFill>
+                  <a:srgbClr val="C00000"/>
+                </a:solidFill>
+              </a:rPr>
+              <a:t>memory</a:t>
+            </a:r>
+            <a:r>
+              <a:rPr lang="en-US" sz="2400" dirty="0"/>
+              <a:t>" — they </a:t>
+            </a:r>
+            <a:r>
+              <a:rPr lang="en-US" sz="2400" b="1" dirty="0"/>
+              <a:t>remember past information</a:t>
+            </a:r>
+            <a:r>
+              <a:rPr lang="en-US" sz="2400" dirty="0"/>
+              <a:t> and use it to influence the current output.</a:t>
+            </a:r>
+          </a:p>
+          <a:p>
+            <a:r>
+              <a:rPr lang="en-US" sz="2400" dirty="0"/>
+              <a:t>RNNs are used when the current input depends on previous inputs.</a:t>
+            </a:r>
+          </a:p>
+          <a:p>
+            <a:r>
+              <a:rPr lang="en-US" sz="2400" dirty="0">
+                <a:solidFill>
+                  <a:srgbClr val="0D0D0D"/>
+                </a:solidFill>
+                <a:latin typeface="Söhne"/>
+              </a:rPr>
+              <a:t>They have recurrent connections that allow </a:t>
+            </a:r>
+            <a:r>
+              <a:rPr lang="en-US" sz="2400" b="1" dirty="0">
+                <a:solidFill>
+                  <a:srgbClr val="C00000"/>
+                </a:solidFill>
+                <a:latin typeface="Söhne"/>
+              </a:rPr>
+              <a:t>information to persist over</a:t>
+            </a:r>
+            <a:r>
+              <a:rPr lang="en-US" sz="2400" dirty="0">
+                <a:solidFill>
+                  <a:srgbClr val="C00000"/>
+                </a:solidFill>
+                <a:latin typeface="Söhne"/>
+              </a:rPr>
+              <a:t> </a:t>
+            </a:r>
+            <a:r>
+              <a:rPr lang="en-US" sz="2400" b="1" dirty="0">
+                <a:solidFill>
+                  <a:srgbClr val="C00000"/>
+                </a:solidFill>
+                <a:latin typeface="Söhne"/>
+              </a:rPr>
+              <a:t>time</a:t>
+            </a:r>
+            <a:r>
+              <a:rPr lang="en-US" sz="2400" dirty="0">
+                <a:solidFill>
+                  <a:srgbClr val="0D0D0D"/>
+                </a:solidFill>
+                <a:latin typeface="Söhne"/>
+              </a:rPr>
+              <a:t>, enabling them to capture temporal dependencies in data.</a:t>
+            </a:r>
+          </a:p>
+          <a:p>
+            <a:r>
+              <a:rPr lang="en-US" sz="2400" dirty="0">
+                <a:solidFill>
+                  <a:srgbClr val="0D0D0D"/>
+                </a:solidFill>
+                <a:latin typeface="Söhne"/>
+              </a:rPr>
+              <a:t>RNNs are commonly used for tasks such as </a:t>
+            </a:r>
+            <a:r>
+              <a:rPr lang="en-US" sz="2400" b="1" dirty="0">
+                <a:solidFill>
+                  <a:srgbClr val="C00000"/>
+                </a:solidFill>
+                <a:latin typeface="Söhne"/>
+              </a:rPr>
+              <a:t>natural language processing </a:t>
+            </a:r>
+            <a:r>
+              <a:rPr lang="en-US" sz="2400" dirty="0">
+                <a:solidFill>
+                  <a:srgbClr val="0D0D0D"/>
+                </a:solidFill>
+                <a:latin typeface="Söhne"/>
+              </a:rPr>
+              <a:t>(e.g., language modeling, machine translation), </a:t>
+            </a:r>
+            <a:r>
+              <a:rPr lang="en-US" sz="2400" b="1" dirty="0">
+                <a:solidFill>
+                  <a:srgbClr val="C00000"/>
+                </a:solidFill>
+                <a:latin typeface="Söhne"/>
+              </a:rPr>
+              <a:t>speech recognition</a:t>
+            </a:r>
+            <a:r>
+              <a:rPr lang="en-US" sz="2400" dirty="0">
+                <a:solidFill>
+                  <a:srgbClr val="0D0D0D"/>
+                </a:solidFill>
+                <a:latin typeface="Söhne"/>
+              </a:rPr>
+              <a:t>, and </a:t>
+            </a:r>
+            <a:r>
+              <a:rPr lang="en-US" sz="2400" b="1" dirty="0">
+                <a:solidFill>
+                  <a:srgbClr val="C00000"/>
+                </a:solidFill>
+                <a:latin typeface="Söhne"/>
+              </a:rPr>
+              <a:t>sequence generation</a:t>
+            </a:r>
+            <a:r>
+              <a:rPr lang="en-US" sz="2400" dirty="0">
+                <a:solidFill>
+                  <a:srgbClr val="0D0D0D"/>
+                </a:solidFill>
+                <a:latin typeface="Söhne"/>
+              </a:rPr>
+              <a:t>.</a:t>
+            </a:r>
+          </a:p>
+          <a:p>
+            <a:r>
+              <a:rPr lang="en-US" sz="2400" dirty="0"/>
+              <a:t>They are </a:t>
+            </a:r>
+            <a:r>
+              <a:rPr lang="en-US" sz="2400" b="1" dirty="0">
+                <a:solidFill>
+                  <a:srgbClr val="00B0F0"/>
+                </a:solidFill>
+              </a:rPr>
+              <a:t>able to remember important things about the input they received and hence enables them to be more precise.</a:t>
+            </a:r>
+          </a:p>
+          <a:p>
+            <a:endParaRPr lang="en-US" sz="2400" dirty="0"/>
+          </a:p>
+          <a:p>
+            <a:pPr marL="0" indent="0">
+              <a:buNone/>
+            </a:pPr>
+            <a:endParaRPr lang="en-US" sz="2400" dirty="0"/>
+          </a:p>
+          <a:p>
+            <a:pPr marL="0" indent="0">
+              <a:buNone/>
+            </a:pPr>
+            <a:endParaRPr lang="en-IN" sz="2400" dirty="0"/>
+          </a:p>
+        </p:txBody>
+      </p:sp>
+    </p:spTree>
+    <p:extLst>
+      <p:ext uri="{BB962C8B-B14F-4D97-AF65-F5344CB8AC3E}">
+        <p14:creationId xmlns:p14="http://schemas.microsoft.com/office/powerpoint/2010/main" val="268459834"/>
       </p:ext>
     </p:extLst>
   </p:cSld>
@@ -34987,6 +37631,899 @@
     <p:extLst>
       <p:ext uri="{BB962C8B-B14F-4D97-AF65-F5344CB8AC3E}">
         <p14:creationId xmlns:p14="http://schemas.microsoft.com/office/powerpoint/2010/main" val="1451302775"/>
+      </p:ext>
+    </p:extLst>
+  </p:cSld>
+  <p:clrMapOvr>
+    <a:masterClrMapping/>
+  </p:clrMapOvr>
+</p:sld>
+</file>
+
+<file path=ppt/slides/slide90.xml><?xml version="1.0" encoding="utf-8"?>
+<p:sld xmlns:a="http://schemas.openxmlformats.org/drawingml/2006/main" xmlns:r="http://schemas.openxmlformats.org/officeDocument/2006/relationships" xmlns:p="http://schemas.openxmlformats.org/presentationml/2006/main">
+  <p:cSld>
+    <p:spTree>
+      <p:nvGrpSpPr>
+        <p:cNvPr id="1" name="">
+          <a:extLst>
+            <a:ext uri="{FF2B5EF4-FFF2-40B4-BE49-F238E27FC236}">
+              <a16:creationId xmlns:a16="http://schemas.microsoft.com/office/drawing/2014/main" id="{472A7B6A-3297-140A-D126-071B683D7F92}"/>
+            </a:ext>
+          </a:extLst>
+        </p:cNvPr>
+        <p:cNvGrpSpPr/>
+        <p:nvPr/>
+      </p:nvGrpSpPr>
+      <p:grpSpPr>
+        <a:xfrm>
+          <a:off x="0" y="0"/>
+          <a:ext cx="0" cy="0"/>
+          <a:chOff x="0" y="0"/>
+          <a:chExt cx="0" cy="0"/>
+        </a:xfrm>
+      </p:grpSpPr>
+      <p:sp>
+        <p:nvSpPr>
+          <p:cNvPr id="3" name="Content Placeholder 2">
+            <a:extLst>
+              <a:ext uri="{FF2B5EF4-FFF2-40B4-BE49-F238E27FC236}">
+                <a16:creationId xmlns:a16="http://schemas.microsoft.com/office/drawing/2014/main" id="{30024AB5-300F-A50B-74E4-15D2D67FF9F5}"/>
+              </a:ext>
+            </a:extLst>
+          </p:cNvPr>
+          <p:cNvSpPr>
+            <a:spLocks noGrp="1"/>
+          </p:cNvSpPr>
+          <p:nvPr>
+            <p:ph idx="1"/>
+          </p:nvPr>
+        </p:nvSpPr>
+        <p:spPr>
+          <a:xfrm>
+            <a:off x="777240" y="849086"/>
+            <a:ext cx="10659110" cy="5327877"/>
+          </a:xfrm>
+        </p:spPr>
+        <p:txBody>
+          <a:bodyPr>
+            <a:normAutofit/>
+          </a:bodyPr>
+          <a:lstStyle/>
+          <a:p>
+            <a:pPr marL="0" indent="0">
+              <a:buNone/>
+            </a:pPr>
+            <a:r>
+              <a:rPr lang="en-IN" sz="2800" b="1" dirty="0"/>
+              <a:t>Real-Life Examples:</a:t>
+            </a:r>
+          </a:p>
+        </p:txBody>
+      </p:sp>
+      <p:graphicFrame>
+        <p:nvGraphicFramePr>
+          <p:cNvPr id="2" name="Table 1">
+            <a:extLst>
+              <a:ext uri="{FF2B5EF4-FFF2-40B4-BE49-F238E27FC236}">
+                <a16:creationId xmlns:a16="http://schemas.microsoft.com/office/drawing/2014/main" id="{18BF573A-301D-9FAF-FEA8-CB150E64CB05}"/>
+              </a:ext>
+            </a:extLst>
+          </p:cNvPr>
+          <p:cNvGraphicFramePr>
+            <a:graphicFrameLocks noGrp="1"/>
+          </p:cNvGraphicFramePr>
+          <p:nvPr>
+            <p:extLst>
+              <p:ext uri="{D42A27DB-BD31-4B8C-83A1-F6EECF244321}">
+                <p14:modId xmlns:p14="http://schemas.microsoft.com/office/powerpoint/2010/main" val="244519476"/>
+              </p:ext>
+            </p:extLst>
+          </p:nvPr>
+        </p:nvGraphicFramePr>
+        <p:xfrm>
+          <a:off x="1110932" y="1658963"/>
+          <a:ext cx="9927182" cy="3936293"/>
+        </p:xfrm>
+        <a:graphic>
+          <a:graphicData uri="http://schemas.openxmlformats.org/drawingml/2006/table">
+            <a:tbl>
+              <a:tblPr firstRow="1" firstCol="1" bandRow="1">
+                <a:tableStyleId>{5C22544A-7EE6-4342-B048-85BDC9FD1C3A}</a:tableStyleId>
+              </a:tblPr>
+              <a:tblGrid>
+                <a:gridCol w="3624354">
+                  <a:extLst>
+                    <a:ext uri="{9D8B030D-6E8A-4147-A177-3AD203B41FA5}">
+                      <a16:colId xmlns:a16="http://schemas.microsoft.com/office/drawing/2014/main" val="1674766265"/>
+                    </a:ext>
+                  </a:extLst>
+                </a:gridCol>
+                <a:gridCol w="6302828">
+                  <a:extLst>
+                    <a:ext uri="{9D8B030D-6E8A-4147-A177-3AD203B41FA5}">
+                      <a16:colId xmlns:a16="http://schemas.microsoft.com/office/drawing/2014/main" val="2336180396"/>
+                    </a:ext>
+                  </a:extLst>
+                </a:gridCol>
+              </a:tblGrid>
+              <a:tr h="650150">
+                <a:tc>
+                  <a:txBody>
+                    <a:bodyPr/>
+                    <a:lstStyle/>
+                    <a:p>
+                      <a:pPr>
+                        <a:lnSpc>
+                          <a:spcPct val="115000"/>
+                        </a:lnSpc>
+                        <a:spcAft>
+                          <a:spcPts val="800"/>
+                        </a:spcAft>
+                        <a:buNone/>
+                      </a:pPr>
+                      <a:r>
+                        <a:rPr lang="en-IN" sz="2400" kern="100">
+                          <a:effectLst/>
+                        </a:rPr>
+                        <a:t>Application</a:t>
+                      </a:r>
+                      <a:endParaRPr lang="en-IN" sz="2400" kern="100">
+                        <a:effectLst/>
+                        <a:latin typeface="Aptos" panose="020B0004020202020204" pitchFamily="34" charset="0"/>
+                        <a:ea typeface="Aptos" panose="020B0004020202020204" pitchFamily="34" charset="0"/>
+                        <a:cs typeface="Times New Roman" panose="02020603050405020304" pitchFamily="18" charset="0"/>
+                      </a:endParaRPr>
+                    </a:p>
+                  </a:txBody>
+                  <a:tcPr marL="68580" marR="68580" marT="0" marB="0"/>
+                </a:tc>
+                <a:tc>
+                  <a:txBody>
+                    <a:bodyPr/>
+                    <a:lstStyle/>
+                    <a:p>
+                      <a:pPr>
+                        <a:lnSpc>
+                          <a:spcPct val="115000"/>
+                        </a:lnSpc>
+                        <a:spcAft>
+                          <a:spcPts val="800"/>
+                        </a:spcAft>
+                        <a:buNone/>
+                      </a:pPr>
+                      <a:r>
+                        <a:rPr lang="en-IN" sz="2400" kern="100">
+                          <a:effectLst/>
+                        </a:rPr>
+                        <a:t>Example</a:t>
+                      </a:r>
+                      <a:endParaRPr lang="en-IN" sz="2400" kern="100">
+                        <a:effectLst/>
+                        <a:latin typeface="Aptos" panose="020B0004020202020204" pitchFamily="34" charset="0"/>
+                        <a:ea typeface="Aptos" panose="020B0004020202020204" pitchFamily="34" charset="0"/>
+                        <a:cs typeface="Times New Roman" panose="02020603050405020304" pitchFamily="18" charset="0"/>
+                      </a:endParaRPr>
+                    </a:p>
+                  </a:txBody>
+                  <a:tcPr marL="68580" marR="68580" marT="0" marB="0"/>
+                </a:tc>
+                <a:extLst>
+                  <a:ext uri="{0D108BD9-81ED-4DB2-BD59-A6C34878D82A}">
+                    <a16:rowId xmlns:a16="http://schemas.microsoft.com/office/drawing/2014/main" val="571622613"/>
+                  </a:ext>
+                </a:extLst>
+              </a:tr>
+              <a:tr h="650150">
+                <a:tc>
+                  <a:txBody>
+                    <a:bodyPr/>
+                    <a:lstStyle/>
+                    <a:p>
+                      <a:pPr>
+                        <a:lnSpc>
+                          <a:spcPct val="115000"/>
+                        </a:lnSpc>
+                        <a:spcAft>
+                          <a:spcPts val="800"/>
+                        </a:spcAft>
+                        <a:buNone/>
+                      </a:pPr>
+                      <a:r>
+                        <a:rPr lang="en-IN" sz="2400" kern="100" dirty="0">
+                          <a:effectLst/>
+                        </a:rPr>
+                        <a:t>Language Processing</a:t>
+                      </a:r>
+                      <a:endParaRPr lang="en-IN" sz="2400" kern="100" dirty="0">
+                        <a:effectLst/>
+                        <a:latin typeface="Aptos" panose="020B0004020202020204" pitchFamily="34" charset="0"/>
+                        <a:ea typeface="Aptos" panose="020B0004020202020204" pitchFamily="34" charset="0"/>
+                        <a:cs typeface="Times New Roman" panose="02020603050405020304" pitchFamily="18" charset="0"/>
+                      </a:endParaRPr>
+                    </a:p>
+                  </a:txBody>
+                  <a:tcPr marL="68580" marR="68580" marT="0" marB="0"/>
+                </a:tc>
+                <a:tc>
+                  <a:txBody>
+                    <a:bodyPr/>
+                    <a:lstStyle/>
+                    <a:p>
+                      <a:pPr>
+                        <a:lnSpc>
+                          <a:spcPct val="115000"/>
+                        </a:lnSpc>
+                        <a:spcAft>
+                          <a:spcPts val="800"/>
+                        </a:spcAft>
+                        <a:buNone/>
+                      </a:pPr>
+                      <a:r>
+                        <a:rPr lang="en-IN" sz="2400" kern="100">
+                          <a:effectLst/>
+                        </a:rPr>
+                        <a:t>Predict the next word in a sentence</a:t>
+                      </a:r>
+                      <a:endParaRPr lang="en-IN" sz="2400" kern="100">
+                        <a:effectLst/>
+                        <a:latin typeface="Aptos" panose="020B0004020202020204" pitchFamily="34" charset="0"/>
+                        <a:ea typeface="Aptos" panose="020B0004020202020204" pitchFamily="34" charset="0"/>
+                        <a:cs typeface="Times New Roman" panose="02020603050405020304" pitchFamily="18" charset="0"/>
+                      </a:endParaRPr>
+                    </a:p>
+                  </a:txBody>
+                  <a:tcPr marL="68580" marR="68580" marT="0" marB="0"/>
+                </a:tc>
+                <a:extLst>
+                  <a:ext uri="{0D108BD9-81ED-4DB2-BD59-A6C34878D82A}">
+                    <a16:rowId xmlns:a16="http://schemas.microsoft.com/office/drawing/2014/main" val="1355892863"/>
+                  </a:ext>
+                </a:extLst>
+              </a:tr>
+              <a:tr h="650150">
+                <a:tc>
+                  <a:txBody>
+                    <a:bodyPr/>
+                    <a:lstStyle/>
+                    <a:p>
+                      <a:pPr>
+                        <a:lnSpc>
+                          <a:spcPct val="115000"/>
+                        </a:lnSpc>
+                        <a:spcAft>
+                          <a:spcPts val="800"/>
+                        </a:spcAft>
+                        <a:buNone/>
+                      </a:pPr>
+                      <a:r>
+                        <a:rPr lang="en-IN" sz="2400" kern="100">
+                          <a:effectLst/>
+                        </a:rPr>
+                        <a:t>Time-Series Forecasting</a:t>
+                      </a:r>
+                      <a:endParaRPr lang="en-IN" sz="2400" kern="100">
+                        <a:effectLst/>
+                        <a:latin typeface="Aptos" panose="020B0004020202020204" pitchFamily="34" charset="0"/>
+                        <a:ea typeface="Aptos" panose="020B0004020202020204" pitchFamily="34" charset="0"/>
+                        <a:cs typeface="Times New Roman" panose="02020603050405020304" pitchFamily="18" charset="0"/>
+                      </a:endParaRPr>
+                    </a:p>
+                  </a:txBody>
+                  <a:tcPr marL="68580" marR="68580" marT="0" marB="0"/>
+                </a:tc>
+                <a:tc>
+                  <a:txBody>
+                    <a:bodyPr/>
+                    <a:lstStyle/>
+                    <a:p>
+                      <a:pPr>
+                        <a:lnSpc>
+                          <a:spcPct val="115000"/>
+                        </a:lnSpc>
+                        <a:spcAft>
+                          <a:spcPts val="800"/>
+                        </a:spcAft>
+                        <a:buNone/>
+                      </a:pPr>
+                      <a:r>
+                        <a:rPr lang="en-IN" sz="2400" kern="100">
+                          <a:effectLst/>
+                        </a:rPr>
+                        <a:t>Predict stock prices over time</a:t>
+                      </a:r>
+                      <a:endParaRPr lang="en-IN" sz="2400" kern="100">
+                        <a:effectLst/>
+                        <a:latin typeface="Aptos" panose="020B0004020202020204" pitchFamily="34" charset="0"/>
+                        <a:ea typeface="Aptos" panose="020B0004020202020204" pitchFamily="34" charset="0"/>
+                        <a:cs typeface="Times New Roman" panose="02020603050405020304" pitchFamily="18" charset="0"/>
+                      </a:endParaRPr>
+                    </a:p>
+                  </a:txBody>
+                  <a:tcPr marL="68580" marR="68580" marT="0" marB="0"/>
+                </a:tc>
+                <a:extLst>
+                  <a:ext uri="{0D108BD9-81ED-4DB2-BD59-A6C34878D82A}">
+                    <a16:rowId xmlns:a16="http://schemas.microsoft.com/office/drawing/2014/main" val="623031576"/>
+                  </a:ext>
+                </a:extLst>
+              </a:tr>
+              <a:tr h="650150">
+                <a:tc>
+                  <a:txBody>
+                    <a:bodyPr/>
+                    <a:lstStyle/>
+                    <a:p>
+                      <a:pPr>
+                        <a:lnSpc>
+                          <a:spcPct val="115000"/>
+                        </a:lnSpc>
+                        <a:spcAft>
+                          <a:spcPts val="800"/>
+                        </a:spcAft>
+                        <a:buNone/>
+                      </a:pPr>
+                      <a:r>
+                        <a:rPr lang="en-IN" sz="2400" kern="100">
+                          <a:effectLst/>
+                        </a:rPr>
+                        <a:t>Speech Recognition</a:t>
+                      </a:r>
+                      <a:endParaRPr lang="en-IN" sz="2400" kern="100">
+                        <a:effectLst/>
+                        <a:latin typeface="Aptos" panose="020B0004020202020204" pitchFamily="34" charset="0"/>
+                        <a:ea typeface="Aptos" panose="020B0004020202020204" pitchFamily="34" charset="0"/>
+                        <a:cs typeface="Times New Roman" panose="02020603050405020304" pitchFamily="18" charset="0"/>
+                      </a:endParaRPr>
+                    </a:p>
+                  </a:txBody>
+                  <a:tcPr marL="68580" marR="68580" marT="0" marB="0"/>
+                </a:tc>
+                <a:tc>
+                  <a:txBody>
+                    <a:bodyPr/>
+                    <a:lstStyle/>
+                    <a:p>
+                      <a:pPr>
+                        <a:lnSpc>
+                          <a:spcPct val="115000"/>
+                        </a:lnSpc>
+                        <a:spcAft>
+                          <a:spcPts val="800"/>
+                        </a:spcAft>
+                        <a:buNone/>
+                      </a:pPr>
+                      <a:r>
+                        <a:rPr lang="en-IN" sz="2400" kern="100">
+                          <a:effectLst/>
+                        </a:rPr>
+                        <a:t>Convert spoken words into text</a:t>
+                      </a:r>
+                      <a:endParaRPr lang="en-IN" sz="2400" kern="100">
+                        <a:effectLst/>
+                        <a:latin typeface="Aptos" panose="020B0004020202020204" pitchFamily="34" charset="0"/>
+                        <a:ea typeface="Aptos" panose="020B0004020202020204" pitchFamily="34" charset="0"/>
+                        <a:cs typeface="Times New Roman" panose="02020603050405020304" pitchFamily="18" charset="0"/>
+                      </a:endParaRPr>
+                    </a:p>
+                  </a:txBody>
+                  <a:tcPr marL="68580" marR="68580" marT="0" marB="0"/>
+                </a:tc>
+                <a:extLst>
+                  <a:ext uri="{0D108BD9-81ED-4DB2-BD59-A6C34878D82A}">
+                    <a16:rowId xmlns:a16="http://schemas.microsoft.com/office/drawing/2014/main" val="2566304299"/>
+                  </a:ext>
+                </a:extLst>
+              </a:tr>
+              <a:tr h="1335693">
+                <a:tc>
+                  <a:txBody>
+                    <a:bodyPr/>
+                    <a:lstStyle/>
+                    <a:p>
+                      <a:pPr>
+                        <a:lnSpc>
+                          <a:spcPct val="115000"/>
+                        </a:lnSpc>
+                        <a:spcAft>
+                          <a:spcPts val="800"/>
+                        </a:spcAft>
+                        <a:buNone/>
+                      </a:pPr>
+                      <a:r>
+                        <a:rPr lang="en-IN" sz="2400" kern="100">
+                          <a:effectLst/>
+                        </a:rPr>
+                        <a:t>Music Generation</a:t>
+                      </a:r>
+                      <a:endParaRPr lang="en-IN" sz="2400" kern="100">
+                        <a:effectLst/>
+                        <a:latin typeface="Aptos" panose="020B0004020202020204" pitchFamily="34" charset="0"/>
+                        <a:ea typeface="Aptos" panose="020B0004020202020204" pitchFamily="34" charset="0"/>
+                        <a:cs typeface="Times New Roman" panose="02020603050405020304" pitchFamily="18" charset="0"/>
+                      </a:endParaRPr>
+                    </a:p>
+                  </a:txBody>
+                  <a:tcPr marL="68580" marR="68580" marT="0" marB="0"/>
+                </a:tc>
+                <a:tc>
+                  <a:txBody>
+                    <a:bodyPr/>
+                    <a:lstStyle/>
+                    <a:p>
+                      <a:pPr>
+                        <a:lnSpc>
+                          <a:spcPct val="115000"/>
+                        </a:lnSpc>
+                        <a:spcAft>
+                          <a:spcPts val="800"/>
+                        </a:spcAft>
+                        <a:buNone/>
+                      </a:pPr>
+                      <a:r>
+                        <a:rPr lang="en-IN" sz="2400" kern="100" dirty="0">
+                          <a:effectLst/>
+                        </a:rPr>
+                        <a:t>Create music note by note based on previous notes</a:t>
+                      </a:r>
+                      <a:endParaRPr lang="en-IN" sz="2400" kern="100" dirty="0">
+                        <a:effectLst/>
+                        <a:latin typeface="Aptos" panose="020B0004020202020204" pitchFamily="34" charset="0"/>
+                        <a:ea typeface="Aptos" panose="020B0004020202020204" pitchFamily="34" charset="0"/>
+                        <a:cs typeface="Times New Roman" panose="02020603050405020304" pitchFamily="18" charset="0"/>
+                      </a:endParaRPr>
+                    </a:p>
+                  </a:txBody>
+                  <a:tcPr marL="68580" marR="68580" marT="0" marB="0"/>
+                </a:tc>
+                <a:extLst>
+                  <a:ext uri="{0D108BD9-81ED-4DB2-BD59-A6C34878D82A}">
+                    <a16:rowId xmlns:a16="http://schemas.microsoft.com/office/drawing/2014/main" val="3182946554"/>
+                  </a:ext>
+                </a:extLst>
+              </a:tr>
+            </a:tbl>
+          </a:graphicData>
+        </a:graphic>
+      </p:graphicFrame>
+    </p:spTree>
+    <p:extLst>
+      <p:ext uri="{BB962C8B-B14F-4D97-AF65-F5344CB8AC3E}">
+        <p14:creationId xmlns:p14="http://schemas.microsoft.com/office/powerpoint/2010/main" val="4154944966"/>
+      </p:ext>
+    </p:extLst>
+  </p:cSld>
+  <p:clrMapOvr>
+    <a:masterClrMapping/>
+  </p:clrMapOvr>
+</p:sld>
+</file>
+
+<file path=ppt/slides/slide91.xml><?xml version="1.0" encoding="utf-8"?>
+<p:sld xmlns:a="http://schemas.openxmlformats.org/drawingml/2006/main" xmlns:r="http://schemas.openxmlformats.org/officeDocument/2006/relationships" xmlns:p="http://schemas.openxmlformats.org/presentationml/2006/main">
+  <p:cSld>
+    <p:spTree>
+      <p:nvGrpSpPr>
+        <p:cNvPr id="1" name="">
+          <a:extLst>
+            <a:ext uri="{FF2B5EF4-FFF2-40B4-BE49-F238E27FC236}">
+              <a16:creationId xmlns:a16="http://schemas.microsoft.com/office/drawing/2014/main" id="{0E25FF15-D84A-49E4-75BF-B860AB8DDBB7}"/>
+            </a:ext>
+          </a:extLst>
+        </p:cNvPr>
+        <p:cNvGrpSpPr/>
+        <p:nvPr/>
+      </p:nvGrpSpPr>
+      <p:grpSpPr>
+        <a:xfrm>
+          <a:off x="0" y="0"/>
+          <a:ext cx="0" cy="0"/>
+          <a:chOff x="0" y="0"/>
+          <a:chExt cx="0" cy="0"/>
+        </a:xfrm>
+      </p:grpSpPr>
+      <p:sp>
+        <p:nvSpPr>
+          <p:cNvPr id="3" name="Content Placeholder 2">
+            <a:extLst>
+              <a:ext uri="{FF2B5EF4-FFF2-40B4-BE49-F238E27FC236}">
+                <a16:creationId xmlns:a16="http://schemas.microsoft.com/office/drawing/2014/main" id="{2E856828-5EBA-6582-853F-094D63D9CF5C}"/>
+              </a:ext>
+            </a:extLst>
+          </p:cNvPr>
+          <p:cNvSpPr>
+            <a:spLocks noGrp="1"/>
+          </p:cNvSpPr>
+          <p:nvPr>
+            <p:ph idx="1"/>
+          </p:nvPr>
+        </p:nvSpPr>
+        <p:spPr>
+          <a:xfrm>
+            <a:off x="777240" y="849086"/>
+            <a:ext cx="10659110" cy="5327877"/>
+          </a:xfrm>
+        </p:spPr>
+        <p:txBody>
+          <a:bodyPr>
+            <a:normAutofit/>
+          </a:bodyPr>
+          <a:lstStyle/>
+          <a:p>
+            <a:pPr marL="0" indent="0">
+              <a:buNone/>
+            </a:pPr>
+            <a:r>
+              <a:rPr lang="en-US" sz="2400" b="1" dirty="0"/>
+              <a:t>How RNN Works (Conceptually)</a:t>
+            </a:r>
+          </a:p>
+          <a:p>
+            <a:pPr marL="0" indent="0">
+              <a:buNone/>
+            </a:pPr>
+            <a:r>
+              <a:rPr lang="en-US" sz="2400" dirty="0"/>
+              <a:t>Let’s say you want to predict the next word in the sentence:</a:t>
+            </a:r>
+            <a:br>
+              <a:rPr lang="en-US" sz="2400" dirty="0"/>
+            </a:br>
+            <a:r>
+              <a:rPr lang="en-US" sz="2400" b="1" dirty="0">
+                <a:solidFill>
+                  <a:srgbClr val="C00000"/>
+                </a:solidFill>
+              </a:rPr>
+              <a:t>"The sky is ___"</a:t>
+            </a:r>
+          </a:p>
+          <a:p>
+            <a:pPr marL="0" indent="0">
+              <a:buNone/>
+            </a:pPr>
+            <a:endParaRPr lang="en-US" sz="2400" dirty="0"/>
+          </a:p>
+          <a:p>
+            <a:pPr marL="0" indent="0">
+              <a:buNone/>
+            </a:pPr>
+            <a:r>
+              <a:rPr lang="en-US" sz="2400" dirty="0"/>
+              <a:t>RNN processes this </a:t>
+            </a:r>
+            <a:r>
+              <a:rPr lang="en-US" sz="2400" b="1" dirty="0"/>
+              <a:t>one word at a time</a:t>
+            </a:r>
+            <a:r>
+              <a:rPr lang="en-US" sz="2400" dirty="0"/>
+              <a:t>:</a:t>
+            </a:r>
+          </a:p>
+          <a:p>
+            <a:r>
+              <a:rPr lang="en-US" sz="2400" dirty="0"/>
+              <a:t>First, it sees “</a:t>
+            </a:r>
+            <a:r>
+              <a:rPr lang="en-US" sz="2400" b="1" dirty="0"/>
+              <a:t>The</a:t>
+            </a:r>
+            <a:r>
+              <a:rPr lang="en-US" sz="2400" dirty="0"/>
+              <a:t>”</a:t>
+            </a:r>
+          </a:p>
+          <a:p>
+            <a:r>
+              <a:rPr lang="en-US" sz="2400" dirty="0"/>
+              <a:t>Then it remembers “The” and processes “</a:t>
+            </a:r>
+            <a:r>
+              <a:rPr lang="en-US" sz="2400" b="1" dirty="0"/>
+              <a:t>sky</a:t>
+            </a:r>
+            <a:r>
+              <a:rPr lang="en-US" sz="2400" dirty="0"/>
+              <a:t>”</a:t>
+            </a:r>
+          </a:p>
+          <a:p>
+            <a:r>
+              <a:rPr lang="en-US" sz="2400" dirty="0"/>
+              <a:t>Then it remembers “The sky” and processes “</a:t>
+            </a:r>
+            <a:r>
+              <a:rPr lang="en-US" sz="2400" b="1" dirty="0"/>
+              <a:t>is</a:t>
+            </a:r>
+            <a:r>
+              <a:rPr lang="en-US" sz="2400" dirty="0"/>
+              <a:t>”</a:t>
+            </a:r>
+          </a:p>
+          <a:p>
+            <a:r>
+              <a:rPr lang="en-US" sz="2400" dirty="0"/>
+              <a:t>Based on "The sky is", it predicts "</a:t>
+            </a:r>
+            <a:r>
+              <a:rPr lang="en-US" sz="2400" b="1" dirty="0">
+                <a:solidFill>
+                  <a:srgbClr val="C00000"/>
+                </a:solidFill>
+              </a:rPr>
+              <a:t>blue</a:t>
+            </a:r>
+            <a:r>
+              <a:rPr lang="en-US" sz="2400" dirty="0"/>
+              <a:t>"</a:t>
+            </a:r>
+          </a:p>
+          <a:p>
+            <a:pPr marL="0" indent="0">
+              <a:buNone/>
+            </a:pPr>
+            <a:endParaRPr lang="en-IN" sz="2400" dirty="0"/>
+          </a:p>
+        </p:txBody>
+      </p:sp>
+    </p:spTree>
+    <p:extLst>
+      <p:ext uri="{BB962C8B-B14F-4D97-AF65-F5344CB8AC3E}">
+        <p14:creationId xmlns:p14="http://schemas.microsoft.com/office/powerpoint/2010/main" val="3175839415"/>
+      </p:ext>
+    </p:extLst>
+  </p:cSld>
+  <p:clrMapOvr>
+    <a:masterClrMapping/>
+  </p:clrMapOvr>
+</p:sld>
+</file>
+
+<file path=ppt/slides/slide92.xml><?xml version="1.0" encoding="utf-8"?>
+<p:sld xmlns:a="http://schemas.openxmlformats.org/drawingml/2006/main" xmlns:r="http://schemas.openxmlformats.org/officeDocument/2006/relationships" xmlns:p="http://schemas.openxmlformats.org/presentationml/2006/main">
+  <p:cSld>
+    <p:spTree>
+      <p:nvGrpSpPr>
+        <p:cNvPr id="1" name="">
+          <a:extLst>
+            <a:ext uri="{FF2B5EF4-FFF2-40B4-BE49-F238E27FC236}">
+              <a16:creationId xmlns:a16="http://schemas.microsoft.com/office/drawing/2014/main" id="{5190DFA2-8928-15AD-FE4B-D1A8C0A04113}"/>
+            </a:ext>
+          </a:extLst>
+        </p:cNvPr>
+        <p:cNvGrpSpPr/>
+        <p:nvPr/>
+      </p:nvGrpSpPr>
+      <p:grpSpPr>
+        <a:xfrm>
+          <a:off x="0" y="0"/>
+          <a:ext cx="0" cy="0"/>
+          <a:chOff x="0" y="0"/>
+          <a:chExt cx="0" cy="0"/>
+        </a:xfrm>
+      </p:grpSpPr>
+      <p:sp>
+        <p:nvSpPr>
+          <p:cNvPr id="3" name="Content Placeholder 2">
+            <a:extLst>
+              <a:ext uri="{FF2B5EF4-FFF2-40B4-BE49-F238E27FC236}">
+                <a16:creationId xmlns:a16="http://schemas.microsoft.com/office/drawing/2014/main" id="{C3ABE3FE-A23C-4562-9B10-31F89A23712E}"/>
+              </a:ext>
+            </a:extLst>
+          </p:cNvPr>
+          <p:cNvSpPr>
+            <a:spLocks noGrp="1"/>
+          </p:cNvSpPr>
+          <p:nvPr>
+            <p:ph idx="1"/>
+          </p:nvPr>
+        </p:nvSpPr>
+        <p:spPr>
+          <a:xfrm>
+            <a:off x="743688" y="1001485"/>
+            <a:ext cx="10900568" cy="4974772"/>
+          </a:xfrm>
+        </p:spPr>
+        <p:txBody>
+          <a:bodyPr>
+            <a:normAutofit/>
+          </a:bodyPr>
+          <a:lstStyle/>
+          <a:p>
+            <a:pPr marL="0" indent="0">
+              <a:buNone/>
+            </a:pPr>
+            <a:r>
+              <a:rPr lang="en-US" sz="3200" b="1" dirty="0">
+                <a:solidFill>
+                  <a:srgbClr val="C00000"/>
+                </a:solidFill>
+              </a:rPr>
+              <a:t>Module-4: </a:t>
+            </a:r>
+            <a:r>
+              <a:rPr lang="en-US" sz="3200" b="1" dirty="0">
+                <a:solidFill>
+                  <a:schemeClr val="accent3">
+                    <a:lumMod val="50000"/>
+                  </a:schemeClr>
+                </a:solidFill>
+              </a:rPr>
+              <a:t>Advanced Machine Learning Techniques: </a:t>
+            </a:r>
+          </a:p>
+          <a:p>
+            <a:pPr marL="0" indent="0">
+              <a:buNone/>
+            </a:pPr>
+            <a:r>
+              <a:rPr lang="en-US" sz="3200" b="1" dirty="0"/>
+              <a:t>Ensemble Methods: Bagging and Boosting</a:t>
+            </a:r>
+            <a:r>
+              <a:rPr lang="en-US" sz="3200" dirty="0"/>
+              <a:t>, </a:t>
+            </a:r>
+            <a:r>
+              <a:rPr lang="en-US" sz="3200" b="1" dirty="0"/>
+              <a:t>Gradient Boosting Machines (GBM)</a:t>
+            </a:r>
+            <a:r>
+              <a:rPr lang="en-US" sz="3200" dirty="0"/>
+              <a:t>, </a:t>
+            </a:r>
+            <a:r>
+              <a:rPr lang="en-US" sz="3200" b="1" dirty="0"/>
+              <a:t>Extreme Gradient Boosting (</a:t>
+            </a:r>
+            <a:r>
+              <a:rPr lang="en-US" sz="3200" b="1" dirty="0" err="1"/>
+              <a:t>XGBoost</a:t>
+            </a:r>
+            <a:r>
+              <a:rPr lang="en-US" sz="3200" b="1" dirty="0"/>
+              <a:t>).  </a:t>
+            </a:r>
+          </a:p>
+          <a:p>
+            <a:pPr marL="0" indent="0">
+              <a:buNone/>
+            </a:pPr>
+            <a:r>
+              <a:rPr lang="en-US" sz="3200" b="1" dirty="0"/>
+              <a:t>Support Vector Machines (SVM): Linear and non-linear SVM</a:t>
+            </a:r>
+            <a:r>
+              <a:rPr lang="en-US" sz="3200" dirty="0"/>
+              <a:t>, </a:t>
+            </a:r>
+            <a:r>
+              <a:rPr lang="en-US" sz="3200" b="1" dirty="0"/>
+              <a:t>Kernel trick</a:t>
+            </a:r>
+            <a:r>
+              <a:rPr lang="en-US" sz="3200" dirty="0"/>
+              <a:t>, </a:t>
+            </a:r>
+            <a:r>
+              <a:rPr lang="en-US" sz="3200" b="1" dirty="0"/>
+              <a:t>Model evaluation and tuning</a:t>
+            </a:r>
+            <a:r>
+              <a:rPr lang="en-US" sz="3200" dirty="0"/>
+              <a:t>.  </a:t>
+            </a:r>
+          </a:p>
+          <a:p>
+            <a:pPr marL="0" indent="0">
+              <a:buNone/>
+            </a:pPr>
+            <a:r>
+              <a:rPr lang="en-US" sz="3200" b="1" dirty="0"/>
+              <a:t>Neural Networks and Deep Learning: Introduction to neural networks</a:t>
+            </a:r>
+            <a:r>
+              <a:rPr lang="en-US" sz="3200" dirty="0"/>
+              <a:t>, </a:t>
+            </a:r>
+            <a:r>
+              <a:rPr lang="en-US" sz="3200" b="1" dirty="0"/>
+              <a:t>Building and training neural networks using TensorFlow and </a:t>
+            </a:r>
+            <a:r>
+              <a:rPr lang="en-US" sz="3200" b="1" dirty="0" err="1"/>
+              <a:t>Keras</a:t>
+            </a:r>
+            <a:r>
+              <a:rPr lang="en-US" sz="3200" dirty="0"/>
+              <a:t>, </a:t>
+            </a:r>
+            <a:r>
+              <a:rPr lang="en-US" sz="3200" b="1" dirty="0"/>
+              <a:t>Convolutional Neural Networks (CNN) and Recurrent Neural Networks (RNN). </a:t>
+            </a:r>
+            <a:endParaRPr lang="en-IN" sz="3200" b="1" dirty="0"/>
+          </a:p>
+        </p:txBody>
+      </p:sp>
+    </p:spTree>
+    <p:extLst>
+      <p:ext uri="{BB962C8B-B14F-4D97-AF65-F5344CB8AC3E}">
+        <p14:creationId xmlns:p14="http://schemas.microsoft.com/office/powerpoint/2010/main" val="1168041992"/>
+      </p:ext>
+    </p:extLst>
+  </p:cSld>
+  <p:clrMapOvr>
+    <a:masterClrMapping/>
+  </p:clrMapOvr>
+</p:sld>
+</file>
+
+<file path=ppt/slides/slide93.xml><?xml version="1.0" encoding="utf-8"?>
+<p:sld xmlns:a="http://schemas.openxmlformats.org/drawingml/2006/main" xmlns:r="http://schemas.openxmlformats.org/officeDocument/2006/relationships" xmlns:p="http://schemas.openxmlformats.org/presentationml/2006/main">
+  <p:cSld>
+    <p:spTree>
+      <p:nvGrpSpPr>
+        <p:cNvPr id="1" name="">
+          <a:extLst>
+            <a:ext uri="{FF2B5EF4-FFF2-40B4-BE49-F238E27FC236}">
+              <a16:creationId xmlns:a16="http://schemas.microsoft.com/office/drawing/2014/main" id="{AB9EB865-D1CD-902A-48E7-3BAA39BE9FC7}"/>
+            </a:ext>
+          </a:extLst>
+        </p:cNvPr>
+        <p:cNvGrpSpPr/>
+        <p:nvPr/>
+      </p:nvGrpSpPr>
+      <p:grpSpPr>
+        <a:xfrm>
+          <a:off x="0" y="0"/>
+          <a:ext cx="0" cy="0"/>
+          <a:chOff x="0" y="0"/>
+          <a:chExt cx="0" cy="0"/>
+        </a:xfrm>
+      </p:grpSpPr>
+      <p:sp>
+        <p:nvSpPr>
+          <p:cNvPr id="3" name="Content Placeholder 2">
+            <a:extLst>
+              <a:ext uri="{FF2B5EF4-FFF2-40B4-BE49-F238E27FC236}">
+                <a16:creationId xmlns:a16="http://schemas.microsoft.com/office/drawing/2014/main" id="{A0EBF16B-2586-71F4-B57E-0BA5626E845F}"/>
+              </a:ext>
+            </a:extLst>
+          </p:cNvPr>
+          <p:cNvSpPr>
+            <a:spLocks noGrp="1"/>
+          </p:cNvSpPr>
+          <p:nvPr>
+            <p:ph idx="1"/>
+          </p:nvPr>
+        </p:nvSpPr>
+        <p:spPr>
+          <a:xfrm>
+            <a:off x="777240" y="849086"/>
+            <a:ext cx="10659110" cy="5327877"/>
+          </a:xfrm>
+        </p:spPr>
+        <p:txBody>
+          <a:bodyPr>
+            <a:normAutofit/>
+          </a:bodyPr>
+          <a:lstStyle/>
+          <a:p>
+            <a:pPr marL="0" indent="0">
+              <a:buNone/>
+            </a:pPr>
+            <a:endParaRPr lang="en-IN" sz="2400" dirty="0"/>
+          </a:p>
+        </p:txBody>
+      </p:sp>
+    </p:spTree>
+    <p:extLst>
+      <p:ext uri="{BB962C8B-B14F-4D97-AF65-F5344CB8AC3E}">
+        <p14:creationId xmlns:p14="http://schemas.microsoft.com/office/powerpoint/2010/main" val="1429089744"/>
       </p:ext>
     </p:extLst>
   </p:cSld>

--- a/Theory Class-Notes/Unit-4 Advanced Machine Learning Techniques.pptx
+++ b/Theory Class-Notes/Unit-4 Advanced Machine Learning Techniques.pptx
@@ -207,20 +207,12 @@
 </p:presentation>
 </file>
 
-<file path=ppt/revisionInfo.xml><?xml version="1.0" encoding="utf-8"?>
-<p1510:revInfo xmlns:a="http://schemas.openxmlformats.org/drawingml/2006/main" xmlns:r="http://schemas.openxmlformats.org/officeDocument/2006/relationships" xmlns:p1510="http://schemas.microsoft.com/office/powerpoint/2015/10/main">
-  <p1510:revLst>
-    <p1510:client id="{651BAC71-7343-484D-BD8F-9D1BA4F7D925}" v="118" dt="2025-08-02T17:53:46.649"/>
-  </p1510:revLst>
-</p1510:revInfo>
-</file>
-
 <file path=ppt/changesInfos/changesInfo1.xml><?xml version="1.0" encoding="utf-8"?>
 <pc:chgInfo xmlns:a="http://schemas.openxmlformats.org/drawingml/2006/main" xmlns:r="http://schemas.openxmlformats.org/officeDocument/2006/relationships" xmlns:ac="http://schemas.microsoft.com/office/drawing/2013/main/command" xmlns:pc="http://schemas.microsoft.com/office/powerpoint/2013/main/command">
   <pc:docChgLst>
     <pc:chgData name="Pramod Naik" userId="ceb6df04-ef15-4d9b-a141-998a03559d75" providerId="ADAL" clId="{651BAC71-7343-484D-BD8F-9D1BA4F7D925}"/>
     <pc:docChg chg="undo custSel addSld delSld modSld sldOrd">
-      <pc:chgData name="Pramod Naik" userId="ceb6df04-ef15-4d9b-a141-998a03559d75" providerId="ADAL" clId="{651BAC71-7343-484D-BD8F-9D1BA4F7D925}" dt="2025-08-02T17:55:06.614" v="2202" actId="47"/>
+      <pc:chgData name="Pramod Naik" userId="ceb6df04-ef15-4d9b-a141-998a03559d75" providerId="ADAL" clId="{651BAC71-7343-484D-BD8F-9D1BA4F7D925}" dt="2025-08-05T04:19:53.111" v="2205" actId="403"/>
       <pc:docMkLst>
         <pc:docMk/>
       </pc:docMkLst>
@@ -372,14 +364,6 @@
           <pc:docMk/>
           <pc:sldMk cId="2682781936" sldId="329"/>
         </pc:sldMkLst>
-        <pc:picChg chg="add del">
-          <ac:chgData name="Pramod Naik" userId="ceb6df04-ef15-4d9b-a141-998a03559d75" providerId="ADAL" clId="{651BAC71-7343-484D-BD8F-9D1BA4F7D925}" dt="2025-08-01T18:38:03.402" v="1472" actId="22"/>
-          <ac:picMkLst>
-            <pc:docMk/>
-            <pc:sldMk cId="2682781936" sldId="329"/>
-            <ac:picMk id="3" creationId="{33B62AC5-4CD2-27CC-4BB3-ADD7FBA6540C}"/>
-          </ac:picMkLst>
-        </pc:picChg>
       </pc:sldChg>
       <pc:sldChg chg="modSp add mod">
         <pc:chgData name="Pramod Naik" userId="ceb6df04-ef15-4d9b-a141-998a03559d75" providerId="ADAL" clId="{651BAC71-7343-484D-BD8F-9D1BA4F7D925}" dt="2025-08-01T18:43:43.163" v="1510" actId="1076"/>
@@ -1585,14 +1569,6 @@
           <pc:docMk/>
           <pc:sldMk cId="4081877237" sldId="473"/>
         </pc:sldMkLst>
-        <pc:spChg chg="add">
-          <ac:chgData name="Pramod Naik" userId="ceb6df04-ef15-4d9b-a141-998a03559d75" providerId="ADAL" clId="{651BAC71-7343-484D-BD8F-9D1BA4F7D925}" dt="2025-08-01T19:37:18.366" v="1876"/>
-          <ac:spMkLst>
-            <pc:docMk/>
-            <pc:sldMk cId="4081877237" sldId="473"/>
-            <ac:spMk id="2" creationId="{1497EFC7-0505-9C44-A727-D174AB4EA504}"/>
-          </ac:spMkLst>
-        </pc:spChg>
         <pc:spChg chg="mod">
           <ac:chgData name="Pramod Naik" userId="ceb6df04-ef15-4d9b-a141-998a03559d75" providerId="ADAL" clId="{651BAC71-7343-484D-BD8F-9D1BA4F7D925}" dt="2025-08-02T06:21:16.824" v="1966" actId="14100"/>
           <ac:spMkLst>
@@ -1608,14 +1584,6 @@
           <pc:docMk/>
           <pc:sldMk cId="2453457549" sldId="474"/>
         </pc:sldMkLst>
-        <pc:picChg chg="add">
-          <ac:chgData name="Pramod Naik" userId="ceb6df04-ef15-4d9b-a141-998a03559d75" providerId="ADAL" clId="{651BAC71-7343-484D-BD8F-9D1BA4F7D925}" dt="2025-08-01T18:38:07.161" v="1473" actId="22"/>
-          <ac:picMkLst>
-            <pc:docMk/>
-            <pc:sldMk cId="2453457549" sldId="474"/>
-            <ac:picMk id="4" creationId="{694F0FA4-E990-4E04-7C48-06990F1CA22A}"/>
-          </ac:picMkLst>
-        </pc:picChg>
       </pc:sldChg>
       <pc:sldChg chg="addSp add del mod">
         <pc:chgData name="Pramod Naik" userId="ceb6df04-ef15-4d9b-a141-998a03559d75" providerId="ADAL" clId="{651BAC71-7343-484D-BD8F-9D1BA4F7D925}" dt="2025-08-01T18:38:28.450" v="1477" actId="47"/>
@@ -1623,22 +1591,6 @@
           <pc:docMk/>
           <pc:sldMk cId="1695309701" sldId="475"/>
         </pc:sldMkLst>
-        <pc:picChg chg="add">
-          <ac:chgData name="Pramod Naik" userId="ceb6df04-ef15-4d9b-a141-998a03559d75" providerId="ADAL" clId="{651BAC71-7343-484D-BD8F-9D1BA4F7D925}" dt="2025-08-01T18:38:10.200" v="1474" actId="22"/>
-          <ac:picMkLst>
-            <pc:docMk/>
-            <pc:sldMk cId="1695309701" sldId="475"/>
-            <ac:picMk id="4" creationId="{FFAC80BA-61DA-A9BB-DF46-04A0567BA674}"/>
-          </ac:picMkLst>
-        </pc:picChg>
-        <pc:picChg chg="add">
-          <ac:chgData name="Pramod Naik" userId="ceb6df04-ef15-4d9b-a141-998a03559d75" providerId="ADAL" clId="{651BAC71-7343-484D-BD8F-9D1BA4F7D925}" dt="2025-08-01T18:38:13.297" v="1475" actId="22"/>
-          <ac:picMkLst>
-            <pc:docMk/>
-            <pc:sldMk cId="1695309701" sldId="475"/>
-            <ac:picMk id="6" creationId="{48E217E7-9723-8DC8-27C9-4A53E10188DF}"/>
-          </ac:picMkLst>
-        </pc:picChg>
       </pc:sldChg>
       <pc:sldChg chg="modSp add mod">
         <pc:chgData name="Pramod Naik" userId="ceb6df04-ef15-4d9b-a141-998a03559d75" providerId="ADAL" clId="{651BAC71-7343-484D-BD8F-9D1BA4F7D925}" dt="2025-08-01T19:00:30.493" v="1536" actId="20577"/>
@@ -1667,14 +1619,6 @@
             <pc:docMk/>
             <pc:sldMk cId="738342721" sldId="477"/>
             <ac:spMk id="3" creationId="{73897975-1BBD-F063-A985-DAF5DA4365DB}"/>
-          </ac:spMkLst>
-        </pc:spChg>
-        <pc:spChg chg="add del">
-          <ac:chgData name="Pramod Naik" userId="ceb6df04-ef15-4d9b-a141-998a03559d75" providerId="ADAL" clId="{651BAC71-7343-484D-BD8F-9D1BA4F7D925}" dt="2025-08-01T19:00:47.621" v="1541" actId="22"/>
-          <ac:spMkLst>
-            <pc:docMk/>
-            <pc:sldMk cId="738342721" sldId="477"/>
-            <ac:spMk id="4" creationId="{1F4EBADC-DAC8-EFED-AD89-00FA822FE6C0}"/>
           </ac:spMkLst>
         </pc:spChg>
       </pc:sldChg>
@@ -1715,22 +1659,6 @@
             <ac:spMk id="3" creationId="{1F8F4650-5E0E-7876-F84A-6AA83F880C09}"/>
           </ac:spMkLst>
         </pc:spChg>
-        <pc:spChg chg="add">
-          <ac:chgData name="Pramod Naik" userId="ceb6df04-ef15-4d9b-a141-998a03559d75" providerId="ADAL" clId="{651BAC71-7343-484D-BD8F-9D1BA4F7D925}" dt="2025-08-01T19:04:24.493" v="1587"/>
-          <ac:spMkLst>
-            <pc:docMk/>
-            <pc:sldMk cId="3327637455" sldId="479"/>
-            <ac:spMk id="4" creationId="{0238B891-F0A8-77DE-140A-5EF0D7DE77BA}"/>
-          </ac:spMkLst>
-        </pc:spChg>
-        <pc:graphicFrameChg chg="add mod">
-          <ac:chgData name="Pramod Naik" userId="ceb6df04-ef15-4d9b-a141-998a03559d75" providerId="ADAL" clId="{651BAC71-7343-484D-BD8F-9D1BA4F7D925}" dt="2025-08-01T19:04:26.788" v="1588"/>
-          <ac:graphicFrameMkLst>
-            <pc:docMk/>
-            <pc:sldMk cId="3327637455" sldId="479"/>
-            <ac:graphicFrameMk id="2" creationId="{6E75217A-2533-3954-EF04-6E1F3667319C}"/>
-          </ac:graphicFrameMkLst>
-        </pc:graphicFrameChg>
         <pc:graphicFrameChg chg="add mod modGraphic">
           <ac:chgData name="Pramod Naik" userId="ceb6df04-ef15-4d9b-a141-998a03559d75" providerId="ADAL" clId="{651BAC71-7343-484D-BD8F-9D1BA4F7D925}" dt="2025-08-01T19:05:09.489" v="1602" actId="14734"/>
           <ac:graphicFrameMkLst>
@@ -1846,12 +1774,20 @@
           <pc:sldMk cId="1905388139" sldId="593"/>
         </pc:sldMkLst>
       </pc:sldChg>
-      <pc:sldChg chg="add">
-        <pc:chgData name="Pramod Naik" userId="ceb6df04-ef15-4d9b-a141-998a03559d75" providerId="ADAL" clId="{651BAC71-7343-484D-BD8F-9D1BA4F7D925}" dt="2025-08-02T17:53:02.734" v="2191"/>
+      <pc:sldChg chg="modSp add mod">
+        <pc:chgData name="Pramod Naik" userId="ceb6df04-ef15-4d9b-a141-998a03559d75" providerId="ADAL" clId="{651BAC71-7343-484D-BD8F-9D1BA4F7D925}" dt="2025-08-05T04:19:53.111" v="2205" actId="403"/>
         <pc:sldMkLst>
           <pc:docMk/>
           <pc:sldMk cId="312407068" sldId="594"/>
         </pc:sldMkLst>
+        <pc:spChg chg="mod">
+          <ac:chgData name="Pramod Naik" userId="ceb6df04-ef15-4d9b-a141-998a03559d75" providerId="ADAL" clId="{651BAC71-7343-484D-BD8F-9D1BA4F7D925}" dt="2025-08-05T04:19:53.111" v="2205" actId="403"/>
+          <ac:spMkLst>
+            <pc:docMk/>
+            <pc:sldMk cId="312407068" sldId="594"/>
+            <ac:spMk id="3" creationId="{E611AAA2-5133-AB7A-599B-35EC46DDC8C4}"/>
+          </ac:spMkLst>
+        </pc:spChg>
       </pc:sldChg>
       <pc:sldChg chg="add del">
         <pc:chgData name="Pramod Naik" userId="ceb6df04-ef15-4d9b-a141-998a03559d75" providerId="ADAL" clId="{651BAC71-7343-484D-BD8F-9D1BA4F7D925}" dt="2025-08-02T17:52:49.575" v="2190" actId="2696"/>
@@ -1887,14 +1823,6 @@
           <pc:docMk/>
           <pc:sldMk cId="4271306584" sldId="913"/>
         </pc:sldMkLst>
-        <pc:spChg chg="del">
-          <ac:chgData name="Pramod Naik" userId="ceb6df04-ef15-4d9b-a141-998a03559d75" providerId="ADAL" clId="{651BAC71-7343-484D-BD8F-9D1BA4F7D925}" dt="2025-08-01T19:05:53.551" v="1606" actId="478"/>
-          <ac:spMkLst>
-            <pc:docMk/>
-            <pc:sldMk cId="4271306584" sldId="913"/>
-            <ac:spMk id="2" creationId="{365B3759-1B8E-910F-2C2B-6932B86A9786}"/>
-          </ac:spMkLst>
-        </pc:spChg>
         <pc:spChg chg="mod">
           <ac:chgData name="Pramod Naik" userId="ceb6df04-ef15-4d9b-a141-998a03559d75" providerId="ADAL" clId="{651BAC71-7343-484D-BD8F-9D1BA4F7D925}" dt="2025-08-01T19:14:31.613" v="1737" actId="403"/>
           <ac:spMkLst>
@@ -2010,68 +1938,12 @@
             <ac:spMk id="3" creationId="{8B18970F-3DA7-1CC9-7CA0-1D4B2B303B27}"/>
           </ac:spMkLst>
         </pc:spChg>
-        <pc:spChg chg="add del">
-          <ac:chgData name="Pramod Naik" userId="ceb6df04-ef15-4d9b-a141-998a03559d75" providerId="ADAL" clId="{651BAC71-7343-484D-BD8F-9D1BA4F7D925}" dt="2025-08-01T19:24:14.109" v="1781" actId="26606"/>
-          <ac:spMkLst>
-            <pc:docMk/>
-            <pc:sldMk cId="1705284052" sldId="918"/>
-            <ac:spMk id="9" creationId="{34441C22-9EFD-4DE0-9245-E55F34A58290}"/>
-          </ac:spMkLst>
-        </pc:spChg>
-        <pc:spChg chg="add del">
-          <ac:chgData name="Pramod Naik" userId="ceb6df04-ef15-4d9b-a141-998a03559d75" providerId="ADAL" clId="{651BAC71-7343-484D-BD8F-9D1BA4F7D925}" dt="2025-08-01T19:24:14.109" v="1781" actId="26606"/>
-          <ac:spMkLst>
-            <pc:docMk/>
-            <pc:sldMk cId="1705284052" sldId="918"/>
-            <ac:spMk id="11" creationId="{2E3EC0C7-3371-4F0F-9092-DA8533F0C116}"/>
-          </ac:spMkLst>
-        </pc:spChg>
-        <pc:spChg chg="add del">
-          <ac:chgData name="Pramod Naik" userId="ceb6df04-ef15-4d9b-a141-998a03559d75" providerId="ADAL" clId="{651BAC71-7343-484D-BD8F-9D1BA4F7D925}" dt="2025-08-01T19:24:14.109" v="1781" actId="26606"/>
-          <ac:spMkLst>
-            <pc:docMk/>
-            <pc:sldMk cId="1705284052" sldId="918"/>
-            <ac:spMk id="13" creationId="{B5B75771-DE64-4E88-9F7A-F675EA3D3E5D}"/>
-          </ac:spMkLst>
-        </pc:spChg>
-        <pc:spChg chg="add del">
-          <ac:chgData name="Pramod Naik" userId="ceb6df04-ef15-4d9b-a141-998a03559d75" providerId="ADAL" clId="{651BAC71-7343-484D-BD8F-9D1BA4F7D925}" dt="2025-08-01T19:24:14.109" v="1781" actId="26606"/>
-          <ac:spMkLst>
-            <pc:docMk/>
-            <pc:sldMk cId="1705284052" sldId="918"/>
-            <ac:spMk id="23" creationId="{3B9D6F34-4F66-4AD6-8297-B393AD0A9BDE}"/>
-          </ac:spMkLst>
-        </pc:spChg>
-        <pc:grpChg chg="add del">
-          <ac:chgData name="Pramod Naik" userId="ceb6df04-ef15-4d9b-a141-998a03559d75" providerId="ADAL" clId="{651BAC71-7343-484D-BD8F-9D1BA4F7D925}" dt="2025-08-01T19:24:14.109" v="1781" actId="26606"/>
-          <ac:grpSpMkLst>
-            <pc:docMk/>
-            <pc:sldMk cId="1705284052" sldId="918"/>
-            <ac:grpSpMk id="15" creationId="{B75D38C4-A4CC-488E-85FD-0C69F36EA225}"/>
-          </ac:grpSpMkLst>
-        </pc:grpChg>
         <pc:picChg chg="add mod">
           <ac:chgData name="Pramod Naik" userId="ceb6df04-ef15-4d9b-a141-998a03559d75" providerId="ADAL" clId="{651BAC71-7343-484D-BD8F-9D1BA4F7D925}" dt="2025-08-01T19:24:17.864" v="1783" actId="1076"/>
           <ac:picMkLst>
             <pc:docMk/>
             <pc:sldMk cId="1705284052" sldId="918"/>
             <ac:picMk id="4" creationId="{103C952F-B911-2275-31C3-BEA00AE582E8}"/>
-          </ac:picMkLst>
-        </pc:picChg>
-        <pc:picChg chg="add del">
-          <ac:chgData name="Pramod Naik" userId="ceb6df04-ef15-4d9b-a141-998a03559d75" providerId="ADAL" clId="{651BAC71-7343-484D-BD8F-9D1BA4F7D925}" dt="2025-08-01T19:24:14.109" v="1781" actId="26606"/>
-          <ac:picMkLst>
-            <pc:docMk/>
-            <pc:sldMk cId="1705284052" sldId="918"/>
-            <ac:picMk id="25" creationId="{4A957378-4F2F-4F89-8202-553A431FFCE1}"/>
-          </ac:picMkLst>
-        </pc:picChg>
-        <pc:picChg chg="add del">
-          <ac:chgData name="Pramod Naik" userId="ceb6df04-ef15-4d9b-a141-998a03559d75" providerId="ADAL" clId="{651BAC71-7343-484D-BD8F-9D1BA4F7D925}" dt="2025-08-01T19:24:14.109" v="1781" actId="26606"/>
-          <ac:picMkLst>
-            <pc:docMk/>
-            <pc:sldMk cId="1705284052" sldId="918"/>
-            <ac:picMk id="27" creationId="{5EEF8CC5-3EC6-4753-94A5-A5787A5474EF}"/>
           </ac:picMkLst>
         </pc:picChg>
       </pc:sldChg>
@@ -2089,38 +1961,6 @@
             <ac:spMk id="3" creationId="{6169888C-AC51-A56B-1157-9428C5EBE3FD}"/>
           </ac:spMkLst>
         </pc:spChg>
-        <pc:spChg chg="add del">
-          <ac:chgData name="Pramod Naik" userId="ceb6df04-ef15-4d9b-a141-998a03559d75" providerId="ADAL" clId="{651BAC71-7343-484D-BD8F-9D1BA4F7D925}" dt="2025-08-01T19:29:37.033" v="1832" actId="26606"/>
-          <ac:spMkLst>
-            <pc:docMk/>
-            <pc:sldMk cId="3027574868" sldId="919"/>
-            <ac:spMk id="9" creationId="{4F8E18AC-903E-4B46-8CC0-FE20E612CE37}"/>
-          </ac:spMkLst>
-        </pc:spChg>
-        <pc:spChg chg="add del">
-          <ac:chgData name="Pramod Naik" userId="ceb6df04-ef15-4d9b-a141-998a03559d75" providerId="ADAL" clId="{651BAC71-7343-484D-BD8F-9D1BA4F7D925}" dt="2025-08-01T19:29:37.033" v="1832" actId="26606"/>
-          <ac:spMkLst>
-            <pc:docMk/>
-            <pc:sldMk cId="3027574868" sldId="919"/>
-            <ac:spMk id="11" creationId="{3DEE38FB-0763-470C-8A5E-44456B5130D7}"/>
-          </ac:spMkLst>
-        </pc:spChg>
-        <pc:spChg chg="add del">
-          <ac:chgData name="Pramod Naik" userId="ceb6df04-ef15-4d9b-a141-998a03559d75" providerId="ADAL" clId="{651BAC71-7343-484D-BD8F-9D1BA4F7D925}" dt="2025-08-01T19:29:37.033" v="1832" actId="26606"/>
-          <ac:spMkLst>
-            <pc:docMk/>
-            <pc:sldMk cId="3027574868" sldId="919"/>
-            <ac:spMk id="13" creationId="{F1D6E6C0-11C7-4A38-BD12-80741960B53C}"/>
-          </ac:spMkLst>
-        </pc:spChg>
-        <pc:grpChg chg="add del">
-          <ac:chgData name="Pramod Naik" userId="ceb6df04-ef15-4d9b-a141-998a03559d75" providerId="ADAL" clId="{651BAC71-7343-484D-BD8F-9D1BA4F7D925}" dt="2025-08-01T19:29:37.033" v="1832" actId="26606"/>
-          <ac:grpSpMkLst>
-            <pc:docMk/>
-            <pc:sldMk cId="3027574868" sldId="919"/>
-            <ac:grpSpMk id="15" creationId="{2B16E781-E64A-4007-B0F1-5A50135A4276}"/>
-          </ac:grpSpMkLst>
-        </pc:grpChg>
         <pc:picChg chg="add mod">
           <ac:chgData name="Pramod Naik" userId="ceb6df04-ef15-4d9b-a141-998a03559d75" providerId="ADAL" clId="{651BAC71-7343-484D-BD8F-9D1BA4F7D925}" dt="2025-08-01T19:29:40.769" v="1834" actId="1076"/>
           <ac:picMkLst>
@@ -2167,14 +2007,6 @@
           <pc:docMk/>
           <pc:sldMk cId="3043417450" sldId="921"/>
         </pc:sldMkLst>
-        <pc:spChg chg="add mod">
-          <ac:chgData name="Pramod Naik" userId="ceb6df04-ef15-4d9b-a141-998a03559d75" providerId="ADAL" clId="{651BAC71-7343-484D-BD8F-9D1BA4F7D925}" dt="2025-08-02T17:17:49.463" v="1970"/>
-          <ac:spMkLst>
-            <pc:docMk/>
-            <pc:sldMk cId="3043417450" sldId="921"/>
-            <ac:spMk id="2" creationId="{AF069127-C9AE-CCCD-FFCC-99C5A31FDDBB}"/>
-          </ac:spMkLst>
-        </pc:spChg>
         <pc:spChg chg="add del mod">
           <ac:chgData name="Pramod Naik" userId="ceb6df04-ef15-4d9b-a141-998a03559d75" providerId="ADAL" clId="{651BAC71-7343-484D-BD8F-9D1BA4F7D925}" dt="2025-08-02T17:46:31.892" v="2137" actId="14100"/>
           <ac:spMkLst>
@@ -2190,14 +2022,6 @@
           <pc:docMk/>
           <pc:sldMk cId="981926684" sldId="922"/>
         </pc:sldMkLst>
-        <pc:spChg chg="add">
-          <ac:chgData name="Pramod Naik" userId="ceb6df04-ef15-4d9b-a141-998a03559d75" providerId="ADAL" clId="{651BAC71-7343-484D-BD8F-9D1BA4F7D925}" dt="2025-08-01T19:45:46.707" v="1909"/>
-          <ac:spMkLst>
-            <pc:docMk/>
-            <pc:sldMk cId="981926684" sldId="922"/>
-            <ac:spMk id="2" creationId="{CC43F9F8-B524-EA56-D1CA-6E374ADEC164}"/>
-          </ac:spMkLst>
-        </pc:spChg>
         <pc:spChg chg="mod">
           <ac:chgData name="Pramod Naik" userId="ceb6df04-ef15-4d9b-a141-998a03559d75" providerId="ADAL" clId="{651BAC71-7343-484D-BD8F-9D1BA4F7D925}" dt="2025-08-01T19:46:47.562" v="1913" actId="14100"/>
           <ac:spMkLst>
@@ -2237,14 +2061,6 @@
           <pc:docMk/>
           <pc:sldMk cId="3726074494" sldId="922"/>
         </pc:sldMkLst>
-        <pc:spChg chg="mod">
-          <ac:chgData name="Pramod Naik" userId="ceb6df04-ef15-4d9b-a141-998a03559d75" providerId="ADAL" clId="{651BAC71-7343-484D-BD8F-9D1BA4F7D925}" dt="2025-08-01T19:44:29.629" v="1904" actId="20577"/>
-          <ac:spMkLst>
-            <pc:docMk/>
-            <pc:sldMk cId="3726074494" sldId="922"/>
-            <ac:spMk id="3" creationId="{C2B18FA9-47B9-0269-A72C-8C45AC633C36}"/>
-          </ac:spMkLst>
-        </pc:spChg>
       </pc:sldChg>
       <pc:sldChg chg="modSp add mod ord">
         <pc:chgData name="Pramod Naik" userId="ceb6df04-ef15-4d9b-a141-998a03559d75" providerId="ADAL" clId="{651BAC71-7343-484D-BD8F-9D1BA4F7D925}" dt="2025-08-02T17:24:39.809" v="2023"/>
@@ -2267,36 +2083,12 @@
           <pc:docMk/>
           <pc:sldMk cId="3803609951" sldId="924"/>
         </pc:sldMkLst>
-        <pc:spChg chg="add">
-          <ac:chgData name="Pramod Naik" userId="ceb6df04-ef15-4d9b-a141-998a03559d75" providerId="ADAL" clId="{651BAC71-7343-484D-BD8F-9D1BA4F7D925}" dt="2025-08-02T17:28:04.831" v="2029"/>
-          <ac:spMkLst>
-            <pc:docMk/>
-            <pc:sldMk cId="3803609951" sldId="924"/>
-            <ac:spMk id="2" creationId="{75FEB591-B0DD-1AC4-04E0-2BB1421EDF6D}"/>
-          </ac:spMkLst>
-        </pc:spChg>
         <pc:spChg chg="mod">
           <ac:chgData name="Pramod Naik" userId="ceb6df04-ef15-4d9b-a141-998a03559d75" providerId="ADAL" clId="{651BAC71-7343-484D-BD8F-9D1BA4F7D925}" dt="2025-08-02T17:31:12.131" v="2063" actId="403"/>
           <ac:spMkLst>
             <pc:docMk/>
             <pc:sldMk cId="3803609951" sldId="924"/>
             <ac:spMk id="3" creationId="{CFB568B0-04EB-9AE9-5A4F-525A087DE156}"/>
-          </ac:spMkLst>
-        </pc:spChg>
-        <pc:spChg chg="add">
-          <ac:chgData name="Pramod Naik" userId="ceb6df04-ef15-4d9b-a141-998a03559d75" providerId="ADAL" clId="{651BAC71-7343-484D-BD8F-9D1BA4F7D925}" dt="2025-08-02T17:28:04.831" v="2029"/>
-          <ac:spMkLst>
-            <pc:docMk/>
-            <pc:sldMk cId="3803609951" sldId="924"/>
-            <ac:spMk id="4" creationId="{AFB4724A-340B-B7CE-02F7-AE9900CD7D7F}"/>
-          </ac:spMkLst>
-        </pc:spChg>
-        <pc:spChg chg="add">
-          <ac:chgData name="Pramod Naik" userId="ceb6df04-ef15-4d9b-a141-998a03559d75" providerId="ADAL" clId="{651BAC71-7343-484D-BD8F-9D1BA4F7D925}" dt="2025-08-02T17:28:04.831" v="2029"/>
-          <ac:spMkLst>
-            <pc:docMk/>
-            <pc:sldMk cId="3803609951" sldId="924"/>
-            <ac:spMk id="5" creationId="{FAB79432-5F30-B9FB-D7C3-DE605BF29226}"/>
           </ac:spMkLst>
         </pc:spChg>
       </pc:sldChg>
@@ -2329,14 +2121,6 @@
           <pc:docMk/>
           <pc:sldMk cId="371604518" sldId="926"/>
         </pc:sldMkLst>
-        <pc:spChg chg="add mod">
-          <ac:chgData name="Pramod Naik" userId="ceb6df04-ef15-4d9b-a141-998a03559d75" providerId="ADAL" clId="{651BAC71-7343-484D-BD8F-9D1BA4F7D925}" dt="2025-08-02T17:34:29.474" v="2072"/>
-          <ac:spMkLst>
-            <pc:docMk/>
-            <pc:sldMk cId="371604518" sldId="926"/>
-            <ac:spMk id="2" creationId="{B9843A75-80B9-67C7-40C1-E3657F5902D8}"/>
-          </ac:spMkLst>
-        </pc:spChg>
         <pc:spChg chg="add del mod">
           <ac:chgData name="Pramod Naik" userId="ceb6df04-ef15-4d9b-a141-998a03559d75" providerId="ADAL" clId="{651BAC71-7343-484D-BD8F-9D1BA4F7D925}" dt="2025-08-02T17:42:09.282" v="2090" actId="5793"/>
           <ac:spMkLst>
@@ -2381,14 +2165,6 @@
           <pc:docMk/>
           <pc:sldMk cId="1182689897" sldId="930"/>
         </pc:sldMkLst>
-        <pc:spChg chg="add mod">
-          <ac:chgData name="Pramod Naik" userId="ceb6df04-ef15-4d9b-a141-998a03559d75" providerId="ADAL" clId="{651BAC71-7343-484D-BD8F-9D1BA4F7D925}" dt="2025-08-02T17:43:47.494" v="2106"/>
-          <ac:spMkLst>
-            <pc:docMk/>
-            <pc:sldMk cId="1182689897" sldId="930"/>
-            <ac:spMk id="2" creationId="{646F8FAC-CDC2-FBA7-92BE-45C704F1179F}"/>
-          </ac:spMkLst>
-        </pc:spChg>
         <pc:spChg chg="add del mod">
           <ac:chgData name="Pramod Naik" userId="ceb6df04-ef15-4d9b-a141-998a03559d75" providerId="ADAL" clId="{651BAC71-7343-484D-BD8F-9D1BA4F7D925}" dt="2025-08-02T17:44:11.011" v="2115" actId="14100"/>
           <ac:spMkLst>
@@ -2427,14 +2203,6 @@
           <pc:docMk/>
           <pc:sldMk cId="268459834" sldId="932"/>
         </pc:sldMkLst>
-        <pc:spChg chg="add mod">
-          <ac:chgData name="Pramod Naik" userId="ceb6df04-ef15-4d9b-a141-998a03559d75" providerId="ADAL" clId="{651BAC71-7343-484D-BD8F-9D1BA4F7D925}" dt="2025-08-02T17:47:35.986" v="2139"/>
-          <ac:spMkLst>
-            <pc:docMk/>
-            <pc:sldMk cId="268459834" sldId="932"/>
-            <ac:spMk id="2" creationId="{97D7731B-649A-B25B-F42B-278769791EBE}"/>
-          </ac:spMkLst>
-        </pc:spChg>
         <pc:spChg chg="add del mod">
           <ac:chgData name="Pramod Naik" userId="ceb6df04-ef15-4d9b-a141-998a03559d75" providerId="ADAL" clId="{651BAC71-7343-484D-BD8F-9D1BA4F7D925}" dt="2025-08-02T17:54:26.084" v="2198" actId="27636"/>
           <ac:spMkLst>
@@ -2590,7 +2358,7 @@
           <a:p>
             <a:fld id="{61532AF1-4615-4667-912A-829B12F8C4D2}" type="datetimeFigureOut">
               <a:rPr lang="en-IN" smtClean="0"/>
-              <a:t>02-08-2025</a:t>
+              <a:t>05-08-2025</a:t>
             </a:fld>
             <a:endParaRPr lang="en-IN"/>
           </a:p>
@@ -3007,7 +2775,7 @@
           <a:p>
             <a:fld id="{C43A76A3-ADC8-4477-8FC1-B9DD55D84908}" type="datetime1">
               <a:rPr lang="en-US" smtClean="0"/>
-              <a:t>8/2/2025</a:t>
+              <a:t>8/5/2025</a:t>
             </a:fld>
             <a:endParaRPr lang="en-US" dirty="0"/>
           </a:p>
@@ -3205,7 +2973,7 @@
           <a:p>
             <a:fld id="{D6762538-DC4D-4667-96E5-B3278DDF8B12}" type="datetime1">
               <a:rPr lang="en-US" smtClean="0"/>
-              <a:t>8/2/2025</a:t>
+              <a:t>8/5/2025</a:t>
             </a:fld>
             <a:endParaRPr lang="en-US"/>
           </a:p>
@@ -3413,7 +3181,7 @@
           <a:p>
             <a:fld id="{05880548-5C08-4BE3-B63E-F2BB63B0B00C}" type="datetime1">
               <a:rPr lang="en-US" smtClean="0"/>
-              <a:t>8/2/2025</a:t>
+              <a:t>8/5/2025</a:t>
             </a:fld>
             <a:endParaRPr lang="en-US"/>
           </a:p>
@@ -3611,7 +3379,7 @@
           <a:p>
             <a:fld id="{DE7F49BE-398D-479A-8A7E-5DDBCA61EDCB}" type="datetime1">
               <a:rPr lang="en-US" smtClean="0"/>
-              <a:t>8/2/2025</a:t>
+              <a:t>8/5/2025</a:t>
             </a:fld>
             <a:endParaRPr lang="en-US" dirty="0"/>
           </a:p>
@@ -3887,7 +3655,7 @@
           <a:p>
             <a:fld id="{CCD0C193-4974-4A1F-9C63-07D595E30D66}" type="datetime1">
               <a:rPr lang="en-US" smtClean="0"/>
-              <a:t>8/2/2025</a:t>
+              <a:t>8/5/2025</a:t>
             </a:fld>
             <a:endParaRPr lang="en-US"/>
           </a:p>
@@ -4154,7 +3922,7 @@
           <a:p>
             <a:fld id="{701AA87F-28D4-4BF0-B81F-877A89DFD5AC}" type="datetime1">
               <a:rPr lang="en-US" smtClean="0"/>
-              <a:t>8/2/2025</a:t>
+              <a:t>8/5/2025</a:t>
             </a:fld>
             <a:endParaRPr lang="en-US"/>
           </a:p>
@@ -4568,7 +4336,7 @@
           <a:p>
             <a:fld id="{A8A9F1F3-208B-49A3-B337-9C8ACEB3E0E1}" type="datetime1">
               <a:rPr lang="en-US" smtClean="0"/>
-              <a:t>8/2/2025</a:t>
+              <a:t>8/5/2025</a:t>
             </a:fld>
             <a:endParaRPr lang="en-US"/>
           </a:p>
@@ -4715,7 +4483,7 @@
           <a:p>
             <a:fld id="{27AF6CA6-7293-4AA2-A0E0-A3BF4416E786}" type="datetime1">
               <a:rPr lang="en-US" smtClean="0"/>
-              <a:t>8/2/2025</a:t>
+              <a:t>8/5/2025</a:t>
             </a:fld>
             <a:endParaRPr lang="en-US"/>
           </a:p>
@@ -4828,7 +4596,7 @@
           <a:p>
             <a:fld id="{98D87016-7BCD-46FB-8EE3-AB6C369108B4}" type="datetime1">
               <a:rPr lang="en-US" smtClean="0"/>
-              <a:t>8/2/2025</a:t>
+              <a:t>8/5/2025</a:t>
             </a:fld>
             <a:endParaRPr lang="en-US"/>
           </a:p>
@@ -5147,7 +4915,7 @@
           <a:p>
             <a:fld id="{A1547011-1FFC-4EF8-9A2E-53B4AD2ADBD4}" type="datetime1">
               <a:rPr lang="en-US" smtClean="0"/>
-              <a:t>8/2/2025</a:t>
+              <a:t>8/5/2025</a:t>
             </a:fld>
             <a:endParaRPr lang="en-US"/>
           </a:p>
@@ -5442,7 +5210,7 @@
           <a:p>
             <a:fld id="{9562EB47-45B4-4EF5-A743-B4885DD2F060}" type="datetime1">
               <a:rPr lang="en-US" smtClean="0"/>
-              <a:t>8/2/2025</a:t>
+              <a:t>8/5/2025</a:t>
             </a:fld>
             <a:endParaRPr lang="en-US"/>
           </a:p>
@@ -6827,7 +6595,7 @@
           <a:p>
             <a:fld id="{4A8D24A4-5FEC-4062-8995-EB21925B3B40}" type="datetime1">
               <a:rPr lang="en-US" smtClean="0"/>
-              <a:t>8/2/2025</a:t>
+              <a:t>8/5/2025</a:t>
             </a:fld>
             <a:endParaRPr lang="en-US" sz="1000" dirty="0"/>
           </a:p>
@@ -36985,7 +36753,7 @@
         <p:spPr>
           <a:xfrm>
             <a:off x="951670" y="856785"/>
-            <a:ext cx="10368999" cy="4031873"/>
+            <a:ext cx="10368999" cy="4185761"/>
           </a:xfrm>
           <a:prstGeom prst="rect">
             <a:avLst/>
@@ -36999,7 +36767,7 @@
           <a:lstStyle/>
           <a:p>
             <a:r>
-              <a:rPr lang="en-US" sz="2200" b="1" dirty="0">
+              <a:rPr lang="en-US" sz="3200" b="1" dirty="0">
                 <a:solidFill>
                   <a:srgbClr val="C00000"/>
                 </a:solidFill>
